--- a/Projects/Chapter1/community-assembly.pptx
+++ b/Projects/Chapter1/community-assembly.pptx
@@ -5,7 +5,7 @@
     <p:sldMasterId id="2147483648" r:id="rId1"/>
   </p:sldMasterIdLst>
   <p:notesMasterIdLst>
-    <p:notesMasterId r:id="rId21"/>
+    <p:notesMasterId r:id="rId23"/>
   </p:notesMasterIdLst>
   <p:sldIdLst>
     <p:sldId id="256" r:id="rId2"/>
@@ -26,7 +26,9 @@
     <p:sldId id="271" r:id="rId17"/>
     <p:sldId id="272" r:id="rId18"/>
     <p:sldId id="261" r:id="rId19"/>
-    <p:sldId id="262" r:id="rId20"/>
+    <p:sldId id="277" r:id="rId20"/>
+    <p:sldId id="278" r:id="rId21"/>
+    <p:sldId id="262" r:id="rId22"/>
   </p:sldIdLst>
   <p:sldSz cx="12192000" cy="6858000"/>
   <p:notesSz cx="6858000" cy="9144000"/>
@@ -131,6 +133,3196 @@
     </p:ext>
   </p:extLst>
 </p:presentation>
+</file>
+
+<file path=ppt/diagrams/colors1.xml><?xml version="1.0" encoding="utf-8"?>
+<dgm:colorsDef xmlns:dgm="http://schemas.openxmlformats.org/drawingml/2006/diagram" xmlns:a="http://schemas.openxmlformats.org/drawingml/2006/main" uniqueId="urn:microsoft.com/office/officeart/2005/8/colors/colorful1">
+  <dgm:title val=""/>
+  <dgm:desc val=""/>
+  <dgm:catLst>
+    <dgm:cat type="colorful" pri="10100"/>
+  </dgm:catLst>
+  <dgm:styleLbl name="node0">
+    <dgm:fillClrLst meth="repeat">
+      <a:schemeClr val="accent1"/>
+    </dgm:fillClrLst>
+    <dgm:linClrLst meth="repeat">
+      <a:schemeClr val="lt1"/>
+    </dgm:linClrLst>
+    <dgm:effectClrLst/>
+    <dgm:txLinClrLst/>
+    <dgm:txFillClrLst/>
+    <dgm:txEffectClrLst/>
+  </dgm:styleLbl>
+  <dgm:styleLbl name="node1">
+    <dgm:fillClrLst meth="repeat">
+      <a:schemeClr val="accent2"/>
+      <a:schemeClr val="accent3"/>
+      <a:schemeClr val="accent4"/>
+      <a:schemeClr val="accent5"/>
+      <a:schemeClr val="accent6"/>
+    </dgm:fillClrLst>
+    <dgm:linClrLst meth="repeat">
+      <a:schemeClr val="lt1"/>
+    </dgm:linClrLst>
+    <dgm:effectClrLst/>
+    <dgm:txLinClrLst/>
+    <dgm:txFillClrLst/>
+    <dgm:txEffectClrLst/>
+  </dgm:styleLbl>
+  <dgm:styleLbl name="alignNode1">
+    <dgm:fillClrLst meth="repeat">
+      <a:schemeClr val="accent2"/>
+      <a:schemeClr val="accent3"/>
+      <a:schemeClr val="accent4"/>
+      <a:schemeClr val="accent5"/>
+      <a:schemeClr val="accent6"/>
+    </dgm:fillClrLst>
+    <dgm:linClrLst meth="repeat">
+      <a:schemeClr val="accent2"/>
+      <a:schemeClr val="accent3"/>
+      <a:schemeClr val="accent4"/>
+      <a:schemeClr val="accent5"/>
+      <a:schemeClr val="accent6"/>
+    </dgm:linClrLst>
+    <dgm:effectClrLst/>
+    <dgm:txLinClrLst/>
+    <dgm:txFillClrLst/>
+    <dgm:txEffectClrLst/>
+  </dgm:styleLbl>
+  <dgm:styleLbl name="lnNode1">
+    <dgm:fillClrLst meth="repeat">
+      <a:schemeClr val="accent2"/>
+      <a:schemeClr val="accent3"/>
+      <a:schemeClr val="accent4"/>
+      <a:schemeClr val="accent5"/>
+      <a:schemeClr val="accent6"/>
+    </dgm:fillClrLst>
+    <dgm:linClrLst meth="repeat">
+      <a:schemeClr val="lt1"/>
+    </dgm:linClrLst>
+    <dgm:effectClrLst/>
+    <dgm:txLinClrLst/>
+    <dgm:txFillClrLst/>
+    <dgm:txEffectClrLst/>
+  </dgm:styleLbl>
+  <dgm:styleLbl name="vennNode1">
+    <dgm:fillClrLst meth="repeat">
+      <a:schemeClr val="accent2">
+        <a:alpha val="50000"/>
+      </a:schemeClr>
+      <a:schemeClr val="accent3">
+        <a:alpha val="50000"/>
+      </a:schemeClr>
+      <a:schemeClr val="accent4">
+        <a:alpha val="50000"/>
+      </a:schemeClr>
+      <a:schemeClr val="accent5">
+        <a:alpha val="50000"/>
+      </a:schemeClr>
+      <a:schemeClr val="accent6">
+        <a:alpha val="50000"/>
+      </a:schemeClr>
+    </dgm:fillClrLst>
+    <dgm:linClrLst meth="repeat">
+      <a:schemeClr val="lt1"/>
+    </dgm:linClrLst>
+    <dgm:effectClrLst/>
+    <dgm:txLinClrLst/>
+    <dgm:txFillClrLst/>
+    <dgm:txEffectClrLst/>
+  </dgm:styleLbl>
+  <dgm:styleLbl name="node2">
+    <dgm:fillClrLst>
+      <a:schemeClr val="accent2"/>
+    </dgm:fillClrLst>
+    <dgm:linClrLst meth="repeat">
+      <a:schemeClr val="lt1"/>
+    </dgm:linClrLst>
+    <dgm:effectClrLst/>
+    <dgm:txLinClrLst/>
+    <dgm:txFillClrLst/>
+    <dgm:txEffectClrLst/>
+  </dgm:styleLbl>
+  <dgm:styleLbl name="node3">
+    <dgm:fillClrLst>
+      <a:schemeClr val="accent3"/>
+    </dgm:fillClrLst>
+    <dgm:linClrLst meth="repeat">
+      <a:schemeClr val="lt1"/>
+    </dgm:linClrLst>
+    <dgm:effectClrLst/>
+    <dgm:txLinClrLst/>
+    <dgm:txFillClrLst/>
+    <dgm:txEffectClrLst/>
+  </dgm:styleLbl>
+  <dgm:styleLbl name="node4">
+    <dgm:fillClrLst>
+      <a:schemeClr val="accent4"/>
+    </dgm:fillClrLst>
+    <dgm:linClrLst meth="repeat">
+      <a:schemeClr val="lt1"/>
+    </dgm:linClrLst>
+    <dgm:effectClrLst/>
+    <dgm:txLinClrLst/>
+    <dgm:txFillClrLst/>
+    <dgm:txEffectClrLst/>
+  </dgm:styleLbl>
+  <dgm:styleLbl name="fgImgPlace1">
+    <dgm:fillClrLst meth="repeat">
+      <a:schemeClr val="accent2">
+        <a:tint val="50000"/>
+      </a:schemeClr>
+      <a:schemeClr val="accent3">
+        <a:tint val="50000"/>
+      </a:schemeClr>
+      <a:schemeClr val="accent4">
+        <a:tint val="50000"/>
+      </a:schemeClr>
+      <a:schemeClr val="accent5">
+        <a:tint val="50000"/>
+      </a:schemeClr>
+      <a:schemeClr val="accent6">
+        <a:tint val="50000"/>
+      </a:schemeClr>
+    </dgm:fillClrLst>
+    <dgm:linClrLst meth="repeat">
+      <a:schemeClr val="lt1"/>
+    </dgm:linClrLst>
+    <dgm:effectClrLst/>
+    <dgm:txLinClrLst/>
+    <dgm:txFillClrLst meth="repeat">
+      <a:schemeClr val="lt1"/>
+    </dgm:txFillClrLst>
+    <dgm:txEffectClrLst/>
+  </dgm:styleLbl>
+  <dgm:styleLbl name="alignImgPlace1">
+    <dgm:fillClrLst>
+      <a:schemeClr val="accent1">
+        <a:tint val="50000"/>
+      </a:schemeClr>
+      <a:schemeClr val="accent2">
+        <a:tint val="20000"/>
+      </a:schemeClr>
+    </dgm:fillClrLst>
+    <dgm:linClrLst meth="repeat">
+      <a:schemeClr val="lt1"/>
+    </dgm:linClrLst>
+    <dgm:effectClrLst/>
+    <dgm:txLinClrLst/>
+    <dgm:txFillClrLst meth="repeat">
+      <a:schemeClr val="lt1"/>
+    </dgm:txFillClrLst>
+    <dgm:txEffectClrLst/>
+  </dgm:styleLbl>
+  <dgm:styleLbl name="bgImgPlace1">
+    <dgm:fillClrLst>
+      <a:schemeClr val="accent1">
+        <a:tint val="50000"/>
+      </a:schemeClr>
+      <a:schemeClr val="accent2">
+        <a:tint val="20000"/>
+      </a:schemeClr>
+    </dgm:fillClrLst>
+    <dgm:linClrLst meth="repeat">
+      <a:schemeClr val="lt1"/>
+    </dgm:linClrLst>
+    <dgm:effectClrLst/>
+    <dgm:txLinClrLst/>
+    <dgm:txFillClrLst meth="repeat">
+      <a:schemeClr val="lt1"/>
+    </dgm:txFillClrLst>
+    <dgm:txEffectClrLst/>
+  </dgm:styleLbl>
+  <dgm:styleLbl name="sibTrans2D1">
+    <dgm:fillClrLst meth="repeat">
+      <a:schemeClr val="accent2"/>
+      <a:schemeClr val="accent3"/>
+      <a:schemeClr val="accent4"/>
+      <a:schemeClr val="accent5"/>
+      <a:schemeClr val="accent6"/>
+    </dgm:fillClrLst>
+    <dgm:linClrLst meth="cycle">
+      <a:schemeClr val="lt1"/>
+    </dgm:linClrLst>
+    <dgm:effectClrLst/>
+    <dgm:txLinClrLst/>
+    <dgm:txFillClrLst/>
+    <dgm:txEffectClrLst/>
+  </dgm:styleLbl>
+  <dgm:styleLbl name="fgSibTrans2D1">
+    <dgm:fillClrLst meth="repeat">
+      <a:schemeClr val="accent2"/>
+      <a:schemeClr val="accent3"/>
+      <a:schemeClr val="accent4"/>
+      <a:schemeClr val="accent5"/>
+      <a:schemeClr val="accent6"/>
+    </dgm:fillClrLst>
+    <dgm:linClrLst meth="cycle">
+      <a:schemeClr val="lt1"/>
+    </dgm:linClrLst>
+    <dgm:effectClrLst/>
+    <dgm:txLinClrLst/>
+    <dgm:txFillClrLst meth="repeat">
+      <a:schemeClr val="lt1"/>
+    </dgm:txFillClrLst>
+    <dgm:txEffectClrLst/>
+  </dgm:styleLbl>
+  <dgm:styleLbl name="bgSibTrans2D1">
+    <dgm:fillClrLst meth="repeat">
+      <a:schemeClr val="accent2"/>
+      <a:schemeClr val="accent3"/>
+      <a:schemeClr val="accent4"/>
+      <a:schemeClr val="accent5"/>
+      <a:schemeClr val="accent6"/>
+    </dgm:fillClrLst>
+    <dgm:linClrLst meth="cycle">
+      <a:schemeClr val="lt1"/>
+    </dgm:linClrLst>
+    <dgm:effectClrLst/>
+    <dgm:txLinClrLst/>
+    <dgm:txFillClrLst meth="repeat">
+      <a:schemeClr val="lt1"/>
+    </dgm:txFillClrLst>
+    <dgm:txEffectClrLst/>
+  </dgm:styleLbl>
+  <dgm:styleLbl name="sibTrans1D1">
+    <dgm:fillClrLst meth="repeat">
+      <a:schemeClr val="accent2"/>
+      <a:schemeClr val="accent3"/>
+      <a:schemeClr val="accent4"/>
+      <a:schemeClr val="accent5"/>
+      <a:schemeClr val="accent6"/>
+    </dgm:fillClrLst>
+    <dgm:linClrLst meth="repeat">
+      <a:schemeClr val="accent2"/>
+      <a:schemeClr val="accent3"/>
+      <a:schemeClr val="accent4"/>
+      <a:schemeClr val="accent5"/>
+      <a:schemeClr val="accent6"/>
+    </dgm:linClrLst>
+    <dgm:effectClrLst/>
+    <dgm:txLinClrLst/>
+    <dgm:txFillClrLst meth="repeat">
+      <a:schemeClr val="tx1"/>
+    </dgm:txFillClrLst>
+    <dgm:txEffectClrLst/>
+  </dgm:styleLbl>
+  <dgm:styleLbl name="callout">
+    <dgm:fillClrLst meth="repeat">
+      <a:schemeClr val="accent2"/>
+    </dgm:fillClrLst>
+    <dgm:linClrLst meth="repeat">
+      <a:schemeClr val="accent2">
+        <a:tint val="50000"/>
+      </a:schemeClr>
+    </dgm:linClrLst>
+    <dgm:effectClrLst/>
+    <dgm:txLinClrLst/>
+    <dgm:txFillClrLst meth="repeat">
+      <a:schemeClr val="tx1"/>
+    </dgm:txFillClrLst>
+    <dgm:txEffectClrLst/>
+  </dgm:styleLbl>
+  <dgm:styleLbl name="asst0">
+    <dgm:fillClrLst meth="repeat">
+      <a:schemeClr val="accent1"/>
+    </dgm:fillClrLst>
+    <dgm:linClrLst meth="repeat">
+      <a:schemeClr val="lt1"/>
+    </dgm:linClrLst>
+    <dgm:effectClrLst/>
+    <dgm:txLinClrLst/>
+    <dgm:txFillClrLst/>
+    <dgm:txEffectClrLst/>
+  </dgm:styleLbl>
+  <dgm:styleLbl name="asst1">
+    <dgm:fillClrLst meth="repeat">
+      <a:schemeClr val="accent2"/>
+    </dgm:fillClrLst>
+    <dgm:linClrLst meth="repeat">
+      <a:schemeClr val="lt1"/>
+    </dgm:linClrLst>
+    <dgm:effectClrLst/>
+    <dgm:txLinClrLst/>
+    <dgm:txFillClrLst/>
+    <dgm:txEffectClrLst/>
+  </dgm:styleLbl>
+  <dgm:styleLbl name="asst2">
+    <dgm:fillClrLst>
+      <a:schemeClr val="accent3"/>
+    </dgm:fillClrLst>
+    <dgm:linClrLst meth="repeat">
+      <a:schemeClr val="lt1"/>
+    </dgm:linClrLst>
+    <dgm:effectClrLst/>
+    <dgm:txLinClrLst/>
+    <dgm:txFillClrLst/>
+    <dgm:txEffectClrLst/>
+  </dgm:styleLbl>
+  <dgm:styleLbl name="asst3">
+    <dgm:fillClrLst>
+      <a:schemeClr val="accent4"/>
+    </dgm:fillClrLst>
+    <dgm:linClrLst meth="repeat">
+      <a:schemeClr val="lt1"/>
+    </dgm:linClrLst>
+    <dgm:effectClrLst/>
+    <dgm:txLinClrLst/>
+    <dgm:txFillClrLst/>
+    <dgm:txEffectClrLst/>
+  </dgm:styleLbl>
+  <dgm:styleLbl name="asst4">
+    <dgm:fillClrLst>
+      <a:schemeClr val="accent5"/>
+    </dgm:fillClrLst>
+    <dgm:linClrLst meth="repeat">
+      <a:schemeClr val="lt1"/>
+    </dgm:linClrLst>
+    <dgm:effectClrLst/>
+    <dgm:txLinClrLst/>
+    <dgm:txFillClrLst/>
+    <dgm:txEffectClrLst/>
+  </dgm:styleLbl>
+  <dgm:styleLbl name="parChTrans2D1">
+    <dgm:fillClrLst meth="repeat">
+      <a:schemeClr val="accent2"/>
+    </dgm:fillClrLst>
+    <dgm:linClrLst meth="repeat">
+      <a:schemeClr val="lt1"/>
+    </dgm:linClrLst>
+    <dgm:effectClrLst/>
+    <dgm:txLinClrLst/>
+    <dgm:txFillClrLst meth="repeat">
+      <a:schemeClr val="lt1"/>
+    </dgm:txFillClrLst>
+    <dgm:txEffectClrLst/>
+  </dgm:styleLbl>
+  <dgm:styleLbl name="parChTrans2D2">
+    <dgm:fillClrLst meth="repeat">
+      <a:schemeClr val="accent3"/>
+    </dgm:fillClrLst>
+    <dgm:linClrLst meth="repeat">
+      <a:schemeClr val="lt1"/>
+    </dgm:linClrLst>
+    <dgm:effectClrLst/>
+    <dgm:txLinClrLst/>
+    <dgm:txFillClrLst/>
+    <dgm:txEffectClrLst/>
+  </dgm:styleLbl>
+  <dgm:styleLbl name="parChTrans2D3">
+    <dgm:fillClrLst meth="repeat">
+      <a:schemeClr val="accent4"/>
+    </dgm:fillClrLst>
+    <dgm:linClrLst meth="repeat">
+      <a:schemeClr val="lt1"/>
+    </dgm:linClrLst>
+    <dgm:effectClrLst/>
+    <dgm:txLinClrLst/>
+    <dgm:txFillClrLst/>
+    <dgm:txEffectClrLst/>
+  </dgm:styleLbl>
+  <dgm:styleLbl name="parChTrans2D4">
+    <dgm:fillClrLst meth="repeat">
+      <a:schemeClr val="accent5"/>
+    </dgm:fillClrLst>
+    <dgm:linClrLst meth="repeat">
+      <a:schemeClr val="lt1"/>
+    </dgm:linClrLst>
+    <dgm:effectClrLst/>
+    <dgm:txLinClrLst/>
+    <dgm:txFillClrLst meth="repeat">
+      <a:schemeClr val="lt1"/>
+    </dgm:txFillClrLst>
+    <dgm:txEffectClrLst/>
+  </dgm:styleLbl>
+  <dgm:styleLbl name="parChTrans1D1">
+    <dgm:fillClrLst meth="repeat">
+      <a:schemeClr val="accent2"/>
+    </dgm:fillClrLst>
+    <dgm:linClrLst meth="repeat">
+      <a:schemeClr val="accent1"/>
+    </dgm:linClrLst>
+    <dgm:effectClrLst/>
+    <dgm:txLinClrLst/>
+    <dgm:txFillClrLst meth="repeat">
+      <a:schemeClr val="tx1"/>
+    </dgm:txFillClrLst>
+    <dgm:txEffectClrLst/>
+  </dgm:styleLbl>
+  <dgm:styleLbl name="parChTrans1D2">
+    <dgm:fillClrLst meth="repeat">
+      <a:schemeClr val="accent3">
+        <a:tint val="90000"/>
+      </a:schemeClr>
+    </dgm:fillClrLst>
+    <dgm:linClrLst meth="repeat">
+      <a:schemeClr val="accent2"/>
+    </dgm:linClrLst>
+    <dgm:effectClrLst/>
+    <dgm:txLinClrLst/>
+    <dgm:txFillClrLst meth="repeat">
+      <a:schemeClr val="tx1"/>
+    </dgm:txFillClrLst>
+    <dgm:txEffectClrLst/>
+  </dgm:styleLbl>
+  <dgm:styleLbl name="parChTrans1D3">
+    <dgm:fillClrLst meth="repeat">
+      <a:schemeClr val="accent4">
+        <a:tint val="70000"/>
+      </a:schemeClr>
+    </dgm:fillClrLst>
+    <dgm:linClrLst meth="repeat">
+      <a:schemeClr val="accent3"/>
+    </dgm:linClrLst>
+    <dgm:effectClrLst/>
+    <dgm:txLinClrLst/>
+    <dgm:txFillClrLst meth="repeat">
+      <a:schemeClr val="tx1"/>
+    </dgm:txFillClrLst>
+    <dgm:txEffectClrLst/>
+  </dgm:styleLbl>
+  <dgm:styleLbl name="parChTrans1D4">
+    <dgm:fillClrLst meth="repeat">
+      <a:schemeClr val="accent5">
+        <a:tint val="50000"/>
+      </a:schemeClr>
+    </dgm:fillClrLst>
+    <dgm:linClrLst meth="repeat">
+      <a:schemeClr val="accent4"/>
+    </dgm:linClrLst>
+    <dgm:effectClrLst/>
+    <dgm:txLinClrLst/>
+    <dgm:txFillClrLst meth="repeat">
+      <a:schemeClr val="tx1"/>
+    </dgm:txFillClrLst>
+    <dgm:txEffectClrLst/>
+  </dgm:styleLbl>
+  <dgm:styleLbl name="fgAcc1">
+    <dgm:fillClrLst meth="repeat">
+      <a:schemeClr val="lt1">
+        <a:alpha val="90000"/>
+      </a:schemeClr>
+    </dgm:fillClrLst>
+    <dgm:linClrLst meth="repeat">
+      <a:schemeClr val="accent2"/>
+      <a:schemeClr val="accent3"/>
+      <a:schemeClr val="accent4"/>
+      <a:schemeClr val="accent5"/>
+      <a:schemeClr val="accent6"/>
+    </dgm:linClrLst>
+    <dgm:effectClrLst/>
+    <dgm:txLinClrLst/>
+    <dgm:txFillClrLst meth="repeat">
+      <a:schemeClr val="dk1"/>
+    </dgm:txFillClrLst>
+    <dgm:txEffectClrLst/>
+  </dgm:styleLbl>
+  <dgm:styleLbl name="conFgAcc1">
+    <dgm:fillClrLst meth="repeat">
+      <a:schemeClr val="lt1">
+        <a:alpha val="90000"/>
+      </a:schemeClr>
+    </dgm:fillClrLst>
+    <dgm:linClrLst meth="repeat">
+      <a:schemeClr val="accent2"/>
+      <a:schemeClr val="accent3"/>
+      <a:schemeClr val="accent4"/>
+      <a:schemeClr val="accent5"/>
+      <a:schemeClr val="accent6"/>
+    </dgm:linClrLst>
+    <dgm:effectClrLst/>
+    <dgm:txLinClrLst/>
+    <dgm:txFillClrLst meth="repeat">
+      <a:schemeClr val="dk1"/>
+    </dgm:txFillClrLst>
+    <dgm:txEffectClrLst/>
+  </dgm:styleLbl>
+  <dgm:styleLbl name="alignAcc1">
+    <dgm:fillClrLst meth="repeat">
+      <a:schemeClr val="lt1">
+        <a:alpha val="90000"/>
+      </a:schemeClr>
+    </dgm:fillClrLst>
+    <dgm:linClrLst meth="repeat">
+      <a:schemeClr val="accent2"/>
+      <a:schemeClr val="accent3"/>
+      <a:schemeClr val="accent4"/>
+      <a:schemeClr val="accent5"/>
+      <a:schemeClr val="accent6"/>
+    </dgm:linClrLst>
+    <dgm:effectClrLst/>
+    <dgm:txLinClrLst/>
+    <dgm:txFillClrLst meth="repeat">
+      <a:schemeClr val="dk1"/>
+    </dgm:txFillClrLst>
+    <dgm:txEffectClrLst/>
+  </dgm:styleLbl>
+  <dgm:styleLbl name="trAlignAcc1">
+    <dgm:fillClrLst meth="repeat">
+      <a:schemeClr val="lt1">
+        <a:alpha val="40000"/>
+      </a:schemeClr>
+    </dgm:fillClrLst>
+    <dgm:linClrLst meth="repeat">
+      <a:schemeClr val="accent1"/>
+    </dgm:linClrLst>
+    <dgm:effectClrLst/>
+    <dgm:txLinClrLst/>
+    <dgm:txFillClrLst meth="repeat">
+      <a:schemeClr val="dk1"/>
+    </dgm:txFillClrLst>
+    <dgm:txEffectClrLst/>
+  </dgm:styleLbl>
+  <dgm:styleLbl name="bgAcc1">
+    <dgm:fillClrLst meth="repeat">
+      <a:schemeClr val="lt1">
+        <a:alpha val="90000"/>
+      </a:schemeClr>
+    </dgm:fillClrLst>
+    <dgm:linClrLst meth="repeat">
+      <a:schemeClr val="accent2"/>
+      <a:schemeClr val="accent3"/>
+      <a:schemeClr val="accent4"/>
+      <a:schemeClr val="accent5"/>
+      <a:schemeClr val="accent6"/>
+    </dgm:linClrLst>
+    <dgm:effectClrLst/>
+    <dgm:txLinClrLst/>
+    <dgm:txFillClrLst meth="repeat">
+      <a:schemeClr val="dk1"/>
+    </dgm:txFillClrLst>
+    <dgm:txEffectClrLst/>
+  </dgm:styleLbl>
+  <dgm:styleLbl name="solidFgAcc1">
+    <dgm:fillClrLst meth="repeat">
+      <a:schemeClr val="lt1"/>
+    </dgm:fillClrLst>
+    <dgm:linClrLst meth="repeat">
+      <a:schemeClr val="accent2"/>
+      <a:schemeClr val="accent3"/>
+      <a:schemeClr val="accent4"/>
+      <a:schemeClr val="accent5"/>
+      <a:schemeClr val="accent6"/>
+    </dgm:linClrLst>
+    <dgm:effectClrLst/>
+    <dgm:txLinClrLst/>
+    <dgm:txFillClrLst meth="repeat">
+      <a:schemeClr val="dk1"/>
+    </dgm:txFillClrLst>
+    <dgm:txEffectClrLst/>
+  </dgm:styleLbl>
+  <dgm:styleLbl name="solidAlignAcc1">
+    <dgm:fillClrLst meth="repeat">
+      <a:schemeClr val="lt1"/>
+    </dgm:fillClrLst>
+    <dgm:linClrLst meth="repeat">
+      <a:schemeClr val="accent2"/>
+      <a:schemeClr val="accent3"/>
+      <a:schemeClr val="accent4"/>
+      <a:schemeClr val="accent5"/>
+      <a:schemeClr val="accent6"/>
+    </dgm:linClrLst>
+    <dgm:effectClrLst/>
+    <dgm:txLinClrLst/>
+    <dgm:txFillClrLst meth="repeat">
+      <a:schemeClr val="dk1"/>
+    </dgm:txFillClrLst>
+    <dgm:txEffectClrLst/>
+  </dgm:styleLbl>
+  <dgm:styleLbl name="solidBgAcc1">
+    <dgm:fillClrLst meth="repeat">
+      <a:schemeClr val="lt1"/>
+    </dgm:fillClrLst>
+    <dgm:linClrLst meth="repeat">
+      <a:schemeClr val="accent2"/>
+      <a:schemeClr val="accent3"/>
+      <a:schemeClr val="accent4"/>
+      <a:schemeClr val="accent5"/>
+      <a:schemeClr val="accent6"/>
+    </dgm:linClrLst>
+    <dgm:effectClrLst/>
+    <dgm:txLinClrLst/>
+    <dgm:txFillClrLst meth="repeat">
+      <a:schemeClr val="dk1"/>
+    </dgm:txFillClrLst>
+    <dgm:txEffectClrLst/>
+  </dgm:styleLbl>
+  <dgm:styleLbl name="fgAccFollowNode1">
+    <dgm:fillClrLst meth="repeat">
+      <a:schemeClr val="accent2">
+        <a:tint val="40000"/>
+        <a:alpha val="90000"/>
+      </a:schemeClr>
+      <a:schemeClr val="accent3">
+        <a:tint val="40000"/>
+        <a:alpha val="90000"/>
+      </a:schemeClr>
+      <a:schemeClr val="accent4">
+        <a:tint val="40000"/>
+        <a:alpha val="90000"/>
+      </a:schemeClr>
+      <a:schemeClr val="accent5">
+        <a:tint val="40000"/>
+        <a:alpha val="90000"/>
+      </a:schemeClr>
+      <a:schemeClr val="accent6">
+        <a:tint val="40000"/>
+        <a:alpha val="90000"/>
+      </a:schemeClr>
+    </dgm:fillClrLst>
+    <dgm:linClrLst meth="repeat">
+      <a:schemeClr val="accent2">
+        <a:tint val="40000"/>
+        <a:alpha val="90000"/>
+      </a:schemeClr>
+      <a:schemeClr val="accent3">
+        <a:tint val="40000"/>
+        <a:alpha val="90000"/>
+      </a:schemeClr>
+      <a:schemeClr val="accent4">
+        <a:tint val="40000"/>
+        <a:alpha val="90000"/>
+      </a:schemeClr>
+      <a:schemeClr val="accent5">
+        <a:tint val="40000"/>
+        <a:alpha val="90000"/>
+      </a:schemeClr>
+      <a:schemeClr val="accent6">
+        <a:tint val="40000"/>
+        <a:alpha val="90000"/>
+      </a:schemeClr>
+    </dgm:linClrLst>
+    <dgm:effectClrLst/>
+    <dgm:txLinClrLst/>
+    <dgm:txFillClrLst meth="repeat">
+      <a:schemeClr val="dk1"/>
+    </dgm:txFillClrLst>
+    <dgm:txEffectClrLst/>
+  </dgm:styleLbl>
+  <dgm:styleLbl name="alignAccFollowNode1">
+    <dgm:fillClrLst meth="repeat">
+      <a:schemeClr val="accent2">
+        <a:tint val="40000"/>
+        <a:alpha val="90000"/>
+      </a:schemeClr>
+      <a:schemeClr val="accent3">
+        <a:tint val="40000"/>
+        <a:alpha val="90000"/>
+      </a:schemeClr>
+      <a:schemeClr val="accent4">
+        <a:tint val="40000"/>
+        <a:alpha val="90000"/>
+      </a:schemeClr>
+      <a:schemeClr val="accent5">
+        <a:tint val="40000"/>
+        <a:alpha val="90000"/>
+      </a:schemeClr>
+      <a:schemeClr val="accent6">
+        <a:tint val="40000"/>
+        <a:alpha val="90000"/>
+      </a:schemeClr>
+    </dgm:fillClrLst>
+    <dgm:linClrLst meth="repeat">
+      <a:schemeClr val="accent2">
+        <a:tint val="40000"/>
+        <a:alpha val="90000"/>
+      </a:schemeClr>
+      <a:schemeClr val="accent3">
+        <a:tint val="40000"/>
+        <a:alpha val="90000"/>
+      </a:schemeClr>
+      <a:schemeClr val="accent4">
+        <a:tint val="40000"/>
+        <a:alpha val="90000"/>
+      </a:schemeClr>
+      <a:schemeClr val="accent5">
+        <a:tint val="40000"/>
+        <a:alpha val="90000"/>
+      </a:schemeClr>
+      <a:schemeClr val="accent6">
+        <a:tint val="40000"/>
+        <a:alpha val="90000"/>
+      </a:schemeClr>
+    </dgm:linClrLst>
+    <dgm:effectClrLst/>
+    <dgm:txLinClrLst/>
+    <dgm:txFillClrLst meth="repeat">
+      <a:schemeClr val="dk1"/>
+    </dgm:txFillClrLst>
+    <dgm:txEffectClrLst/>
+  </dgm:styleLbl>
+  <dgm:styleLbl name="bgAccFollowNode1">
+    <dgm:fillClrLst meth="repeat">
+      <a:schemeClr val="accent2">
+        <a:tint val="40000"/>
+        <a:alpha val="90000"/>
+      </a:schemeClr>
+      <a:schemeClr val="accent3">
+        <a:tint val="40000"/>
+        <a:alpha val="90000"/>
+      </a:schemeClr>
+      <a:schemeClr val="accent4">
+        <a:tint val="40000"/>
+        <a:alpha val="90000"/>
+      </a:schemeClr>
+      <a:schemeClr val="accent5">
+        <a:tint val="40000"/>
+        <a:alpha val="90000"/>
+      </a:schemeClr>
+      <a:schemeClr val="accent6">
+        <a:tint val="40000"/>
+        <a:alpha val="90000"/>
+      </a:schemeClr>
+    </dgm:fillClrLst>
+    <dgm:linClrLst meth="repeat">
+      <a:schemeClr val="accent2">
+        <a:tint val="40000"/>
+        <a:alpha val="90000"/>
+      </a:schemeClr>
+      <a:schemeClr val="accent3">
+        <a:tint val="40000"/>
+        <a:alpha val="90000"/>
+      </a:schemeClr>
+      <a:schemeClr val="accent4">
+        <a:tint val="40000"/>
+        <a:alpha val="90000"/>
+      </a:schemeClr>
+      <a:schemeClr val="accent5">
+        <a:tint val="40000"/>
+        <a:alpha val="90000"/>
+      </a:schemeClr>
+      <a:schemeClr val="accent6">
+        <a:tint val="40000"/>
+        <a:alpha val="90000"/>
+      </a:schemeClr>
+    </dgm:linClrLst>
+    <dgm:effectClrLst/>
+    <dgm:txLinClrLst/>
+    <dgm:txFillClrLst meth="repeat">
+      <a:schemeClr val="dk1"/>
+    </dgm:txFillClrLst>
+    <dgm:txEffectClrLst/>
+  </dgm:styleLbl>
+  <dgm:styleLbl name="fgAcc0">
+    <dgm:fillClrLst meth="repeat">
+      <a:schemeClr val="lt1">
+        <a:alpha val="90000"/>
+      </a:schemeClr>
+    </dgm:fillClrLst>
+    <dgm:linClrLst>
+      <a:schemeClr val="accent1"/>
+    </dgm:linClrLst>
+    <dgm:effectClrLst/>
+    <dgm:txLinClrLst/>
+    <dgm:txFillClrLst meth="repeat">
+      <a:schemeClr val="dk1"/>
+    </dgm:txFillClrLst>
+    <dgm:txEffectClrLst/>
+  </dgm:styleLbl>
+  <dgm:styleLbl name="fgAcc2">
+    <dgm:fillClrLst meth="repeat">
+      <a:schemeClr val="lt1">
+        <a:alpha val="90000"/>
+      </a:schemeClr>
+    </dgm:fillClrLst>
+    <dgm:linClrLst>
+      <a:schemeClr val="accent2"/>
+    </dgm:linClrLst>
+    <dgm:effectClrLst/>
+    <dgm:txLinClrLst/>
+    <dgm:txFillClrLst meth="repeat">
+      <a:schemeClr val="dk1"/>
+    </dgm:txFillClrLst>
+    <dgm:txEffectClrLst/>
+  </dgm:styleLbl>
+  <dgm:styleLbl name="fgAcc3">
+    <dgm:fillClrLst meth="repeat">
+      <a:schemeClr val="lt1">
+        <a:alpha val="90000"/>
+      </a:schemeClr>
+    </dgm:fillClrLst>
+    <dgm:linClrLst>
+      <a:schemeClr val="accent3"/>
+    </dgm:linClrLst>
+    <dgm:effectClrLst/>
+    <dgm:txLinClrLst/>
+    <dgm:txFillClrLst meth="repeat">
+      <a:schemeClr val="dk1"/>
+    </dgm:txFillClrLst>
+    <dgm:txEffectClrLst/>
+  </dgm:styleLbl>
+  <dgm:styleLbl name="fgAcc4">
+    <dgm:fillClrLst meth="repeat">
+      <a:schemeClr val="lt1">
+        <a:alpha val="90000"/>
+      </a:schemeClr>
+    </dgm:fillClrLst>
+    <dgm:linClrLst>
+      <a:schemeClr val="accent4"/>
+    </dgm:linClrLst>
+    <dgm:effectClrLst/>
+    <dgm:txLinClrLst/>
+    <dgm:txFillClrLst meth="repeat">
+      <a:schemeClr val="dk1"/>
+    </dgm:txFillClrLst>
+    <dgm:txEffectClrLst/>
+  </dgm:styleLbl>
+  <dgm:styleLbl name="bgShp">
+    <dgm:fillClrLst meth="repeat">
+      <a:schemeClr val="accent2">
+        <a:tint val="40000"/>
+      </a:schemeClr>
+    </dgm:fillClrLst>
+    <dgm:linClrLst meth="repeat">
+      <a:schemeClr val="dk1"/>
+    </dgm:linClrLst>
+    <dgm:effectClrLst/>
+    <dgm:txLinClrLst/>
+    <dgm:txFillClrLst meth="repeat">
+      <a:schemeClr val="dk1"/>
+    </dgm:txFillClrLst>
+    <dgm:txEffectClrLst/>
+  </dgm:styleLbl>
+  <dgm:styleLbl name="dkBgShp">
+    <dgm:fillClrLst meth="repeat">
+      <a:schemeClr val="accent2">
+        <a:shade val="90000"/>
+      </a:schemeClr>
+    </dgm:fillClrLst>
+    <dgm:linClrLst meth="repeat">
+      <a:schemeClr val="dk1"/>
+    </dgm:linClrLst>
+    <dgm:effectClrLst/>
+    <dgm:txLinClrLst/>
+    <dgm:txFillClrLst meth="repeat">
+      <a:schemeClr val="lt1"/>
+    </dgm:txFillClrLst>
+    <dgm:txEffectClrLst/>
+  </dgm:styleLbl>
+  <dgm:styleLbl name="trBgShp">
+    <dgm:fillClrLst meth="repeat">
+      <a:schemeClr val="accent1">
+        <a:tint val="50000"/>
+        <a:alpha val="40000"/>
+      </a:schemeClr>
+    </dgm:fillClrLst>
+    <dgm:linClrLst meth="repeat">
+      <a:schemeClr val="accent2"/>
+    </dgm:linClrLst>
+    <dgm:effectClrLst/>
+    <dgm:txLinClrLst/>
+    <dgm:txFillClrLst meth="repeat">
+      <a:schemeClr val="lt1"/>
+    </dgm:txFillClrLst>
+    <dgm:txEffectClrLst/>
+  </dgm:styleLbl>
+  <dgm:styleLbl name="fgShp">
+    <dgm:fillClrLst meth="repeat">
+      <a:schemeClr val="accent2">
+        <a:tint val="40000"/>
+      </a:schemeClr>
+    </dgm:fillClrLst>
+    <dgm:linClrLst meth="repeat">
+      <a:schemeClr val="lt1"/>
+    </dgm:linClrLst>
+    <dgm:effectClrLst/>
+    <dgm:txLinClrLst/>
+    <dgm:txFillClrLst meth="repeat">
+      <a:schemeClr val="dk1"/>
+    </dgm:txFillClrLst>
+    <dgm:txEffectClrLst/>
+  </dgm:styleLbl>
+  <dgm:styleLbl name="revTx">
+    <dgm:fillClrLst meth="repeat">
+      <a:schemeClr val="lt1">
+        <a:alpha val="0"/>
+      </a:schemeClr>
+    </dgm:fillClrLst>
+    <dgm:linClrLst meth="repeat">
+      <a:schemeClr val="dk1">
+        <a:alpha val="0"/>
+      </a:schemeClr>
+    </dgm:linClrLst>
+    <dgm:effectClrLst/>
+    <dgm:txLinClrLst/>
+    <dgm:txFillClrLst meth="repeat">
+      <a:schemeClr val="tx1"/>
+    </dgm:txFillClrLst>
+    <dgm:txEffectClrLst/>
+  </dgm:styleLbl>
+</dgm:colorsDef>
+</file>
+
+<file path=ppt/diagrams/data1.xml><?xml version="1.0" encoding="utf-8"?>
+<dgm:dataModel xmlns:dgm="http://schemas.openxmlformats.org/drawingml/2006/diagram" xmlns:a="http://schemas.openxmlformats.org/drawingml/2006/main">
+  <dgm:ptLst>
+    <dgm:pt modelId="{CB88F0E7-4140-1B4D-A33B-6563FB2E1C23}" type="doc">
+      <dgm:prSet loTypeId="urn:microsoft.com/office/officeart/2005/8/layout/process2" loCatId="" qsTypeId="urn:microsoft.com/office/officeart/2005/8/quickstyle/simple1" qsCatId="simple" csTypeId="urn:microsoft.com/office/officeart/2005/8/colors/colorful1" csCatId="colorful" phldr="1"/>
+      <dgm:spPr/>
+    </dgm:pt>
+    <dgm:pt modelId="{B5498DE5-7CDC-0347-BA87-FB91FE15E435}">
+      <dgm:prSet phldrT="[Text]"/>
+      <dgm:spPr/>
+      <dgm:t>
+        <a:bodyPr/>
+        <a:lstStyle/>
+        <a:p>
+          <a:r>
+            <a:rPr lang="en-US" dirty="0"/>
+            <a:t>Extract ASV table from </a:t>
+          </a:r>
+          <a:r>
+            <a:rPr lang="en-US" dirty="0" err="1"/>
+            <a:t>phyloseq</a:t>
+          </a:r>
+          <a:r>
+            <a:rPr lang="en-US" dirty="0"/>
+            <a:t> object</a:t>
+          </a:r>
+        </a:p>
+      </dgm:t>
+    </dgm:pt>
+    <dgm:pt modelId="{A4B182FE-28CF-CC4A-A857-D974481A212A}" type="parTrans" cxnId="{6F8A8218-A43D-754D-AC34-7D7A44CB7D31}">
+      <dgm:prSet/>
+      <dgm:spPr/>
+      <dgm:t>
+        <a:bodyPr/>
+        <a:lstStyle/>
+        <a:p>
+          <a:endParaRPr lang="en-US"/>
+        </a:p>
+      </dgm:t>
+    </dgm:pt>
+    <dgm:pt modelId="{30256DA3-2063-6145-A40C-3F213F51F903}" type="sibTrans" cxnId="{6F8A8218-A43D-754D-AC34-7D7A44CB7D31}">
+      <dgm:prSet/>
+      <dgm:spPr/>
+      <dgm:t>
+        <a:bodyPr/>
+        <a:lstStyle/>
+        <a:p>
+          <a:endParaRPr lang="en-US"/>
+        </a:p>
+      </dgm:t>
+    </dgm:pt>
+    <dgm:pt modelId="{6D80D72C-DBB2-D94A-BCBD-1B0C1C35E98A}">
+      <dgm:prSet phldrT="[Text]"/>
+      <dgm:spPr/>
+      <dgm:t>
+        <a:bodyPr/>
+        <a:lstStyle/>
+        <a:p>
+          <a:r>
+            <a:rPr lang="en-US" dirty="0"/>
+            <a:t>Calculate the size of the metacommunity (</a:t>
+          </a:r>
+          <a:r>
+            <a:rPr lang="en-US" i="1" dirty="0"/>
+            <a:t>N</a:t>
+          </a:r>
+          <a:r>
+            <a:rPr lang="en-US" dirty="0"/>
+            <a:t>) by finding the mean number of reads per sample. We also find the limit of detection (</a:t>
+          </a:r>
+          <a:r>
+            <a:rPr lang="en-US" i="1" dirty="0"/>
+            <a:t>d</a:t>
+          </a:r>
+          <a:r>
+            <a:rPr lang="en-US" dirty="0"/>
+            <a:t>) = </a:t>
+          </a:r>
+          <a:r>
+            <a:rPr lang="en-US" i="1" dirty="0"/>
+            <a:t>1/N</a:t>
+          </a:r>
+        </a:p>
+      </dgm:t>
+    </dgm:pt>
+    <dgm:pt modelId="{7A0A85DE-826D-F943-B70A-C309B2E35E00}" type="parTrans" cxnId="{A399560D-2686-BB49-BEC8-16E0E59F898C}">
+      <dgm:prSet/>
+      <dgm:spPr/>
+      <dgm:t>
+        <a:bodyPr/>
+        <a:lstStyle/>
+        <a:p>
+          <a:endParaRPr lang="en-US"/>
+        </a:p>
+      </dgm:t>
+    </dgm:pt>
+    <dgm:pt modelId="{ECF5917A-5A86-4945-92ED-C3A30B725FE7}" type="sibTrans" cxnId="{A399560D-2686-BB49-BEC8-16E0E59F898C}">
+      <dgm:prSet/>
+      <dgm:spPr/>
+      <dgm:t>
+        <a:bodyPr/>
+        <a:lstStyle/>
+        <a:p>
+          <a:endParaRPr lang="en-US"/>
+        </a:p>
+      </dgm:t>
+    </dgm:pt>
+    <dgm:pt modelId="{3AAD80AB-86BA-354D-A91B-40CE06269A51}">
+      <dgm:prSet phldrT="[Text]"/>
+      <dgm:spPr/>
+      <dgm:t>
+        <a:bodyPr/>
+        <a:lstStyle/>
+        <a:p>
+          <a:r>
+            <a:rPr lang="en-US" dirty="0"/>
+            <a:t>Calculate the mean observed relative abundance and occurrence frequency of each ASV</a:t>
+          </a:r>
+        </a:p>
+      </dgm:t>
+    </dgm:pt>
+    <dgm:pt modelId="{3035F67B-CB08-4446-AE7D-48C039F6D2DF}" type="parTrans" cxnId="{6CC7BC8F-A4DC-3E43-A468-7FE509ECF895}">
+      <dgm:prSet/>
+      <dgm:spPr/>
+      <dgm:t>
+        <a:bodyPr/>
+        <a:lstStyle/>
+        <a:p>
+          <a:endParaRPr lang="en-US"/>
+        </a:p>
+      </dgm:t>
+    </dgm:pt>
+    <dgm:pt modelId="{C215D862-A291-E848-A659-5797AEF6E6A2}" type="sibTrans" cxnId="{6CC7BC8F-A4DC-3E43-A468-7FE509ECF895}">
+      <dgm:prSet/>
+      <dgm:spPr/>
+      <dgm:t>
+        <a:bodyPr/>
+        <a:lstStyle/>
+        <a:p>
+          <a:endParaRPr lang="en-US"/>
+        </a:p>
+      </dgm:t>
+    </dgm:pt>
+    <dgm:pt modelId="{99CAAEDC-6392-D343-9A6F-7F5A17C79600}">
+      <dgm:prSet/>
+      <dgm:spPr/>
+      <dgm:t>
+        <a:bodyPr/>
+        <a:lstStyle/>
+        <a:p>
+          <a:r>
+            <a:rPr lang="en-US" dirty="0"/>
+            <a:t>Using non-linear least squares fitting we fit the neutral model to our data to find, finding the probability of dispersal (</a:t>
+          </a:r>
+          <a:r>
+            <a:rPr lang="en-US" i="1" dirty="0"/>
+            <a:t>m</a:t>
+          </a:r>
+          <a:r>
+            <a:rPr lang="en-US" dirty="0"/>
+            <a:t>)</a:t>
+          </a:r>
+        </a:p>
+      </dgm:t>
+    </dgm:pt>
+    <dgm:pt modelId="{C17FB67C-707B-D74A-80D6-94F7481B177D}" type="parTrans" cxnId="{850E1FA5-AA48-724C-8558-F11B12C530EE}">
+      <dgm:prSet/>
+      <dgm:spPr/>
+      <dgm:t>
+        <a:bodyPr/>
+        <a:lstStyle/>
+        <a:p>
+          <a:endParaRPr lang="en-US"/>
+        </a:p>
+      </dgm:t>
+    </dgm:pt>
+    <dgm:pt modelId="{E9E523D2-25B5-CD4B-9629-508B4D79D50B}" type="sibTrans" cxnId="{850E1FA5-AA48-724C-8558-F11B12C530EE}">
+      <dgm:prSet/>
+      <dgm:spPr/>
+      <dgm:t>
+        <a:bodyPr/>
+        <a:lstStyle/>
+        <a:p>
+          <a:endParaRPr lang="en-US"/>
+        </a:p>
+      </dgm:t>
+    </dgm:pt>
+    <dgm:pt modelId="{7FA26DE3-9601-BF47-AC3A-1976221D9FF7}">
+      <dgm:prSet/>
+      <dgm:spPr/>
+      <dgm:t>
+        <a:bodyPr/>
+        <a:lstStyle/>
+        <a:p>
+          <a:r>
+            <a:rPr lang="en-US" dirty="0"/>
+            <a:t>Using the estimated value of </a:t>
+          </a:r>
+          <a:r>
+            <a:rPr lang="en-US" i="1" dirty="0"/>
+            <a:t>m</a:t>
+          </a:r>
+          <a:r>
+            <a:rPr lang="en-US" dirty="0"/>
+            <a:t> we calculate predicted occurrence frequencies and plot predictions from the neutral model against observed frequencies</a:t>
+          </a:r>
+        </a:p>
+      </dgm:t>
+    </dgm:pt>
+    <dgm:pt modelId="{DA997D57-FC54-1543-8E4F-C5A29391F936}" type="parTrans" cxnId="{26E3548D-A542-114A-9949-6B29D19AA1AB}">
+      <dgm:prSet/>
+      <dgm:spPr/>
+      <dgm:t>
+        <a:bodyPr/>
+        <a:lstStyle/>
+        <a:p>
+          <a:endParaRPr lang="en-US"/>
+        </a:p>
+      </dgm:t>
+    </dgm:pt>
+    <dgm:pt modelId="{6BBB6159-CF03-854D-ADAC-23CBD22E850F}" type="sibTrans" cxnId="{26E3548D-A542-114A-9949-6B29D19AA1AB}">
+      <dgm:prSet/>
+      <dgm:spPr/>
+      <dgm:t>
+        <a:bodyPr/>
+        <a:lstStyle/>
+        <a:p>
+          <a:endParaRPr lang="en-US"/>
+        </a:p>
+      </dgm:t>
+    </dgm:pt>
+    <dgm:pt modelId="{55F5C254-F149-8D49-B068-DD2BB6700AB1}" type="pres">
+      <dgm:prSet presAssocID="{CB88F0E7-4140-1B4D-A33B-6563FB2E1C23}" presName="linearFlow" presStyleCnt="0">
+        <dgm:presLayoutVars>
+          <dgm:resizeHandles val="exact"/>
+        </dgm:presLayoutVars>
+      </dgm:prSet>
+      <dgm:spPr/>
+    </dgm:pt>
+    <dgm:pt modelId="{381AA547-A4ED-3840-A5BF-F16754F7DE5F}" type="pres">
+      <dgm:prSet presAssocID="{B5498DE5-7CDC-0347-BA87-FB91FE15E435}" presName="node" presStyleLbl="node1" presStyleIdx="0" presStyleCnt="5" custScaleX="266769">
+        <dgm:presLayoutVars>
+          <dgm:bulletEnabled val="1"/>
+        </dgm:presLayoutVars>
+      </dgm:prSet>
+      <dgm:spPr/>
+    </dgm:pt>
+    <dgm:pt modelId="{91DA19BA-A0AB-564A-8A9E-322DF18B64CF}" type="pres">
+      <dgm:prSet presAssocID="{30256DA3-2063-6145-A40C-3F213F51F903}" presName="sibTrans" presStyleLbl="sibTrans2D1" presStyleIdx="0" presStyleCnt="4"/>
+      <dgm:spPr/>
+    </dgm:pt>
+    <dgm:pt modelId="{93A03A25-0C23-0B49-A801-B6DF4800FF1C}" type="pres">
+      <dgm:prSet presAssocID="{30256DA3-2063-6145-A40C-3F213F51F903}" presName="connectorText" presStyleLbl="sibTrans2D1" presStyleIdx="0" presStyleCnt="4"/>
+      <dgm:spPr/>
+    </dgm:pt>
+    <dgm:pt modelId="{43D2067A-91F6-8745-98BA-D6A10B24950A}" type="pres">
+      <dgm:prSet presAssocID="{6D80D72C-DBB2-D94A-BCBD-1B0C1C35E98A}" presName="node" presStyleLbl="node1" presStyleIdx="1" presStyleCnt="5" custScaleX="264923">
+        <dgm:presLayoutVars>
+          <dgm:bulletEnabled val="1"/>
+        </dgm:presLayoutVars>
+      </dgm:prSet>
+      <dgm:spPr/>
+    </dgm:pt>
+    <dgm:pt modelId="{D067C965-9057-9C4A-A1D2-4912C14C50F7}" type="pres">
+      <dgm:prSet presAssocID="{ECF5917A-5A86-4945-92ED-C3A30B725FE7}" presName="sibTrans" presStyleLbl="sibTrans2D1" presStyleIdx="1" presStyleCnt="4"/>
+      <dgm:spPr/>
+    </dgm:pt>
+    <dgm:pt modelId="{5030DE2C-F3D5-7E44-98C9-D5A5317CA56C}" type="pres">
+      <dgm:prSet presAssocID="{ECF5917A-5A86-4945-92ED-C3A30B725FE7}" presName="connectorText" presStyleLbl="sibTrans2D1" presStyleIdx="1" presStyleCnt="4"/>
+      <dgm:spPr/>
+    </dgm:pt>
+    <dgm:pt modelId="{80C05A4E-2A0A-294C-8DDC-052E97D834DA}" type="pres">
+      <dgm:prSet presAssocID="{3AAD80AB-86BA-354D-A91B-40CE06269A51}" presName="node" presStyleLbl="node1" presStyleIdx="2" presStyleCnt="5" custScaleX="263077">
+        <dgm:presLayoutVars>
+          <dgm:bulletEnabled val="1"/>
+        </dgm:presLayoutVars>
+      </dgm:prSet>
+      <dgm:spPr/>
+    </dgm:pt>
+    <dgm:pt modelId="{B3C2DB7A-EC33-6544-A09D-B1205728770A}" type="pres">
+      <dgm:prSet presAssocID="{C215D862-A291-E848-A659-5797AEF6E6A2}" presName="sibTrans" presStyleLbl="sibTrans2D1" presStyleIdx="2" presStyleCnt="4"/>
+      <dgm:spPr/>
+    </dgm:pt>
+    <dgm:pt modelId="{14D2D5CD-E619-2C4C-83EC-B8786FE7D09C}" type="pres">
+      <dgm:prSet presAssocID="{C215D862-A291-E848-A659-5797AEF6E6A2}" presName="connectorText" presStyleLbl="sibTrans2D1" presStyleIdx="2" presStyleCnt="4"/>
+      <dgm:spPr/>
+    </dgm:pt>
+    <dgm:pt modelId="{6F6C8E07-FBAD-3F4D-A906-27ECCF26E70E}" type="pres">
+      <dgm:prSet presAssocID="{99CAAEDC-6392-D343-9A6F-7F5A17C79600}" presName="node" presStyleLbl="node1" presStyleIdx="3" presStyleCnt="5" custScaleX="262154">
+        <dgm:presLayoutVars>
+          <dgm:bulletEnabled val="1"/>
+        </dgm:presLayoutVars>
+      </dgm:prSet>
+      <dgm:spPr/>
+    </dgm:pt>
+    <dgm:pt modelId="{48489AC1-89DA-0F48-B940-23505B5798FF}" type="pres">
+      <dgm:prSet presAssocID="{E9E523D2-25B5-CD4B-9629-508B4D79D50B}" presName="sibTrans" presStyleLbl="sibTrans2D1" presStyleIdx="3" presStyleCnt="4"/>
+      <dgm:spPr/>
+    </dgm:pt>
+    <dgm:pt modelId="{3C8009BD-6E6B-AA43-B36E-EB048E42CE59}" type="pres">
+      <dgm:prSet presAssocID="{E9E523D2-25B5-CD4B-9629-508B4D79D50B}" presName="connectorText" presStyleLbl="sibTrans2D1" presStyleIdx="3" presStyleCnt="4"/>
+      <dgm:spPr/>
+    </dgm:pt>
+    <dgm:pt modelId="{80377AF5-BC76-FB40-840E-12C9D1BDB641}" type="pres">
+      <dgm:prSet presAssocID="{7FA26DE3-9601-BF47-AC3A-1976221D9FF7}" presName="node" presStyleLbl="node1" presStyleIdx="4" presStyleCnt="5" custScaleX="263077">
+        <dgm:presLayoutVars>
+          <dgm:bulletEnabled val="1"/>
+        </dgm:presLayoutVars>
+      </dgm:prSet>
+      <dgm:spPr/>
+    </dgm:pt>
+  </dgm:ptLst>
+  <dgm:cxnLst>
+    <dgm:cxn modelId="{D6131E09-85B8-A64C-B70F-332DBD927645}" type="presOf" srcId="{30256DA3-2063-6145-A40C-3F213F51F903}" destId="{93A03A25-0C23-0B49-A801-B6DF4800FF1C}" srcOrd="1" destOrd="0" presId="urn:microsoft.com/office/officeart/2005/8/layout/process2"/>
+    <dgm:cxn modelId="{5904A30C-0CB9-7441-8EE9-02853E905445}" type="presOf" srcId="{ECF5917A-5A86-4945-92ED-C3A30B725FE7}" destId="{5030DE2C-F3D5-7E44-98C9-D5A5317CA56C}" srcOrd="1" destOrd="0" presId="urn:microsoft.com/office/officeart/2005/8/layout/process2"/>
+    <dgm:cxn modelId="{A399560D-2686-BB49-BEC8-16E0E59F898C}" srcId="{CB88F0E7-4140-1B4D-A33B-6563FB2E1C23}" destId="{6D80D72C-DBB2-D94A-BCBD-1B0C1C35E98A}" srcOrd="1" destOrd="0" parTransId="{7A0A85DE-826D-F943-B70A-C309B2E35E00}" sibTransId="{ECF5917A-5A86-4945-92ED-C3A30B725FE7}"/>
+    <dgm:cxn modelId="{78350D13-8018-2442-8F21-2B5DA59CB55B}" type="presOf" srcId="{99CAAEDC-6392-D343-9A6F-7F5A17C79600}" destId="{6F6C8E07-FBAD-3F4D-A906-27ECCF26E70E}" srcOrd="0" destOrd="0" presId="urn:microsoft.com/office/officeart/2005/8/layout/process2"/>
+    <dgm:cxn modelId="{C16B0C15-CF6C-284A-A383-0640B635E0E2}" type="presOf" srcId="{7FA26DE3-9601-BF47-AC3A-1976221D9FF7}" destId="{80377AF5-BC76-FB40-840E-12C9D1BDB641}" srcOrd="0" destOrd="0" presId="urn:microsoft.com/office/officeart/2005/8/layout/process2"/>
+    <dgm:cxn modelId="{6F8A8218-A43D-754D-AC34-7D7A44CB7D31}" srcId="{CB88F0E7-4140-1B4D-A33B-6563FB2E1C23}" destId="{B5498DE5-7CDC-0347-BA87-FB91FE15E435}" srcOrd="0" destOrd="0" parTransId="{A4B182FE-28CF-CC4A-A857-D974481A212A}" sibTransId="{30256DA3-2063-6145-A40C-3F213F51F903}"/>
+    <dgm:cxn modelId="{4E285119-2459-8646-A275-E2ED993B432A}" type="presOf" srcId="{C215D862-A291-E848-A659-5797AEF6E6A2}" destId="{14D2D5CD-E619-2C4C-83EC-B8786FE7D09C}" srcOrd="1" destOrd="0" presId="urn:microsoft.com/office/officeart/2005/8/layout/process2"/>
+    <dgm:cxn modelId="{85095E25-989E-8644-8FAC-8BF624EEEE21}" type="presOf" srcId="{C215D862-A291-E848-A659-5797AEF6E6A2}" destId="{B3C2DB7A-EC33-6544-A09D-B1205728770A}" srcOrd="0" destOrd="0" presId="urn:microsoft.com/office/officeart/2005/8/layout/process2"/>
+    <dgm:cxn modelId="{4CDBD944-8E38-3E46-8153-1E412D1822B3}" type="presOf" srcId="{6D80D72C-DBB2-D94A-BCBD-1B0C1C35E98A}" destId="{43D2067A-91F6-8745-98BA-D6A10B24950A}" srcOrd="0" destOrd="0" presId="urn:microsoft.com/office/officeart/2005/8/layout/process2"/>
+    <dgm:cxn modelId="{81A8B549-091C-3746-9E41-0841544AE411}" type="presOf" srcId="{3AAD80AB-86BA-354D-A91B-40CE06269A51}" destId="{80C05A4E-2A0A-294C-8DDC-052E97D834DA}" srcOrd="0" destOrd="0" presId="urn:microsoft.com/office/officeart/2005/8/layout/process2"/>
+    <dgm:cxn modelId="{08CFD367-D1E2-774B-B131-FBDC4B1434F3}" type="presOf" srcId="{E9E523D2-25B5-CD4B-9629-508B4D79D50B}" destId="{3C8009BD-6E6B-AA43-B36E-EB048E42CE59}" srcOrd="1" destOrd="0" presId="urn:microsoft.com/office/officeart/2005/8/layout/process2"/>
+    <dgm:cxn modelId="{31B7676C-5E13-6240-8873-94CFD48BF4D4}" type="presOf" srcId="{ECF5917A-5A86-4945-92ED-C3A30B725FE7}" destId="{D067C965-9057-9C4A-A1D2-4912C14C50F7}" srcOrd="0" destOrd="0" presId="urn:microsoft.com/office/officeart/2005/8/layout/process2"/>
+    <dgm:cxn modelId="{26E3548D-A542-114A-9949-6B29D19AA1AB}" srcId="{CB88F0E7-4140-1B4D-A33B-6563FB2E1C23}" destId="{7FA26DE3-9601-BF47-AC3A-1976221D9FF7}" srcOrd="4" destOrd="0" parTransId="{DA997D57-FC54-1543-8E4F-C5A29391F936}" sibTransId="{6BBB6159-CF03-854D-ADAC-23CBD22E850F}"/>
+    <dgm:cxn modelId="{6CC7BC8F-A4DC-3E43-A468-7FE509ECF895}" srcId="{CB88F0E7-4140-1B4D-A33B-6563FB2E1C23}" destId="{3AAD80AB-86BA-354D-A91B-40CE06269A51}" srcOrd="2" destOrd="0" parTransId="{3035F67B-CB08-4446-AE7D-48C039F6D2DF}" sibTransId="{C215D862-A291-E848-A659-5797AEF6E6A2}"/>
+    <dgm:cxn modelId="{94FC48A0-733E-B74A-8978-25792B03521A}" type="presOf" srcId="{B5498DE5-7CDC-0347-BA87-FB91FE15E435}" destId="{381AA547-A4ED-3840-A5BF-F16754F7DE5F}" srcOrd="0" destOrd="0" presId="urn:microsoft.com/office/officeart/2005/8/layout/process2"/>
+    <dgm:cxn modelId="{850E1FA5-AA48-724C-8558-F11B12C530EE}" srcId="{CB88F0E7-4140-1B4D-A33B-6563FB2E1C23}" destId="{99CAAEDC-6392-D343-9A6F-7F5A17C79600}" srcOrd="3" destOrd="0" parTransId="{C17FB67C-707B-D74A-80D6-94F7481B177D}" sibTransId="{E9E523D2-25B5-CD4B-9629-508B4D79D50B}"/>
+    <dgm:cxn modelId="{0C5B59B5-F8B1-E84F-A770-CFDEED93C193}" type="presOf" srcId="{E9E523D2-25B5-CD4B-9629-508B4D79D50B}" destId="{48489AC1-89DA-0F48-B940-23505B5798FF}" srcOrd="0" destOrd="0" presId="urn:microsoft.com/office/officeart/2005/8/layout/process2"/>
+    <dgm:cxn modelId="{4B8D3CDA-C71C-8644-BEF2-25F7C84E26CD}" type="presOf" srcId="{CB88F0E7-4140-1B4D-A33B-6563FB2E1C23}" destId="{55F5C254-F149-8D49-B068-DD2BB6700AB1}" srcOrd="0" destOrd="0" presId="urn:microsoft.com/office/officeart/2005/8/layout/process2"/>
+    <dgm:cxn modelId="{86204DF7-69DC-6847-B172-56BDA05E8683}" type="presOf" srcId="{30256DA3-2063-6145-A40C-3F213F51F903}" destId="{91DA19BA-A0AB-564A-8A9E-322DF18B64CF}" srcOrd="0" destOrd="0" presId="urn:microsoft.com/office/officeart/2005/8/layout/process2"/>
+    <dgm:cxn modelId="{89CC1CC3-BE64-AB44-A616-37735F71B013}" type="presParOf" srcId="{55F5C254-F149-8D49-B068-DD2BB6700AB1}" destId="{381AA547-A4ED-3840-A5BF-F16754F7DE5F}" srcOrd="0" destOrd="0" presId="urn:microsoft.com/office/officeart/2005/8/layout/process2"/>
+    <dgm:cxn modelId="{98CD7474-430F-C64D-B064-F9944BCE1FFC}" type="presParOf" srcId="{55F5C254-F149-8D49-B068-DD2BB6700AB1}" destId="{91DA19BA-A0AB-564A-8A9E-322DF18B64CF}" srcOrd="1" destOrd="0" presId="urn:microsoft.com/office/officeart/2005/8/layout/process2"/>
+    <dgm:cxn modelId="{F77B03C0-3B99-DA44-ACA7-106E5F115049}" type="presParOf" srcId="{91DA19BA-A0AB-564A-8A9E-322DF18B64CF}" destId="{93A03A25-0C23-0B49-A801-B6DF4800FF1C}" srcOrd="0" destOrd="0" presId="urn:microsoft.com/office/officeart/2005/8/layout/process2"/>
+    <dgm:cxn modelId="{E0361171-1004-814D-9384-11011E7DBAFA}" type="presParOf" srcId="{55F5C254-F149-8D49-B068-DD2BB6700AB1}" destId="{43D2067A-91F6-8745-98BA-D6A10B24950A}" srcOrd="2" destOrd="0" presId="urn:microsoft.com/office/officeart/2005/8/layout/process2"/>
+    <dgm:cxn modelId="{9E89FA7B-6EC5-3D4F-A2E9-0489975E5A87}" type="presParOf" srcId="{55F5C254-F149-8D49-B068-DD2BB6700AB1}" destId="{D067C965-9057-9C4A-A1D2-4912C14C50F7}" srcOrd="3" destOrd="0" presId="urn:microsoft.com/office/officeart/2005/8/layout/process2"/>
+    <dgm:cxn modelId="{99622694-B90F-7546-938F-69663FCB7B51}" type="presParOf" srcId="{D067C965-9057-9C4A-A1D2-4912C14C50F7}" destId="{5030DE2C-F3D5-7E44-98C9-D5A5317CA56C}" srcOrd="0" destOrd="0" presId="urn:microsoft.com/office/officeart/2005/8/layout/process2"/>
+    <dgm:cxn modelId="{8CBAB055-23C9-2546-9DAF-CEC39B7D6480}" type="presParOf" srcId="{55F5C254-F149-8D49-B068-DD2BB6700AB1}" destId="{80C05A4E-2A0A-294C-8DDC-052E97D834DA}" srcOrd="4" destOrd="0" presId="urn:microsoft.com/office/officeart/2005/8/layout/process2"/>
+    <dgm:cxn modelId="{4A5400AB-6FEE-0949-A825-32DFDDF5C5FC}" type="presParOf" srcId="{55F5C254-F149-8D49-B068-DD2BB6700AB1}" destId="{B3C2DB7A-EC33-6544-A09D-B1205728770A}" srcOrd="5" destOrd="0" presId="urn:microsoft.com/office/officeart/2005/8/layout/process2"/>
+    <dgm:cxn modelId="{F55D1266-0549-5F47-A020-0AE4C6A8F5F8}" type="presParOf" srcId="{B3C2DB7A-EC33-6544-A09D-B1205728770A}" destId="{14D2D5CD-E619-2C4C-83EC-B8786FE7D09C}" srcOrd="0" destOrd="0" presId="urn:microsoft.com/office/officeart/2005/8/layout/process2"/>
+    <dgm:cxn modelId="{9670566E-C6A8-EB46-A599-ADE70B5EED77}" type="presParOf" srcId="{55F5C254-F149-8D49-B068-DD2BB6700AB1}" destId="{6F6C8E07-FBAD-3F4D-A906-27ECCF26E70E}" srcOrd="6" destOrd="0" presId="urn:microsoft.com/office/officeart/2005/8/layout/process2"/>
+    <dgm:cxn modelId="{D858F26B-4C1F-A94D-A8E0-A7E3177794AA}" type="presParOf" srcId="{55F5C254-F149-8D49-B068-DD2BB6700AB1}" destId="{48489AC1-89DA-0F48-B940-23505B5798FF}" srcOrd="7" destOrd="0" presId="urn:microsoft.com/office/officeart/2005/8/layout/process2"/>
+    <dgm:cxn modelId="{784D6DCE-95A6-2B43-928C-01BEE8EB9D44}" type="presParOf" srcId="{48489AC1-89DA-0F48-B940-23505B5798FF}" destId="{3C8009BD-6E6B-AA43-B36E-EB048E42CE59}" srcOrd="0" destOrd="0" presId="urn:microsoft.com/office/officeart/2005/8/layout/process2"/>
+    <dgm:cxn modelId="{D889FC8E-DA0F-DB4D-B68C-E9542CE782E5}" type="presParOf" srcId="{55F5C254-F149-8D49-B068-DD2BB6700AB1}" destId="{80377AF5-BC76-FB40-840E-12C9D1BDB641}" srcOrd="8" destOrd="0" presId="urn:microsoft.com/office/officeart/2005/8/layout/process2"/>
+  </dgm:cxnLst>
+  <dgm:bg/>
+  <dgm:whole/>
+  <dgm:extLst>
+    <a:ext uri="http://schemas.microsoft.com/office/drawing/2008/diagram">
+      <dsp:dataModelExt xmlns:dsp="http://schemas.microsoft.com/office/drawing/2008/diagram" relId="rId7" minVer="http://schemas.openxmlformats.org/drawingml/2006/diagram"/>
+    </a:ext>
+  </dgm:extLst>
+</dgm:dataModel>
+</file>
+
+<file path=ppt/diagrams/drawing1.xml><?xml version="1.0" encoding="utf-8"?>
+<dsp:drawing xmlns:dgm="http://schemas.openxmlformats.org/drawingml/2006/diagram" xmlns:dsp="http://schemas.microsoft.com/office/drawing/2008/diagram" xmlns:a="http://schemas.openxmlformats.org/drawingml/2006/main">
+  <dsp:spTree>
+    <dsp:nvGrpSpPr>
+      <dsp:cNvPr id="0" name=""/>
+      <dsp:cNvGrpSpPr/>
+    </dsp:nvGrpSpPr>
+    <dsp:grpSpPr/>
+    <dsp:sp modelId="{381AA547-A4ED-3840-A5BF-F16754F7DE5F}">
+      <dsp:nvSpPr>
+        <dsp:cNvPr id="0" name=""/>
+        <dsp:cNvSpPr/>
+      </dsp:nvSpPr>
+      <dsp:spPr>
+        <a:xfrm>
+          <a:off x="100015" y="661"/>
+          <a:ext cx="8258168" cy="773906"/>
+        </a:xfrm>
+        <a:prstGeom prst="roundRect">
+          <a:avLst>
+            <a:gd name="adj" fmla="val 10000"/>
+          </a:avLst>
+        </a:prstGeom>
+        <a:solidFill>
+          <a:schemeClr val="accent2">
+            <a:hueOff val="0"/>
+            <a:satOff val="0"/>
+            <a:lumOff val="0"/>
+            <a:alphaOff val="0"/>
+          </a:schemeClr>
+        </a:solidFill>
+        <a:ln w="12700" cap="flat" cmpd="sng" algn="ctr">
+          <a:solidFill>
+            <a:schemeClr val="lt1">
+              <a:hueOff val="0"/>
+              <a:satOff val="0"/>
+              <a:lumOff val="0"/>
+              <a:alphaOff val="0"/>
+            </a:schemeClr>
+          </a:solidFill>
+          <a:prstDash val="solid"/>
+          <a:miter lim="800000"/>
+        </a:ln>
+        <a:effectLst/>
+      </dsp:spPr>
+      <dsp:style>
+        <a:lnRef idx="2">
+          <a:scrgbClr r="0" g="0" b="0"/>
+        </a:lnRef>
+        <a:fillRef idx="1">
+          <a:scrgbClr r="0" g="0" b="0"/>
+        </a:fillRef>
+        <a:effectRef idx="0">
+          <a:scrgbClr r="0" g="0" b="0"/>
+        </a:effectRef>
+        <a:fontRef idx="minor">
+          <a:schemeClr val="lt1"/>
+        </a:fontRef>
+      </dsp:style>
+      <dsp:txBody>
+        <a:bodyPr spcFirstLastPara="0" vert="horz" wrap="square" lIns="60960" tIns="60960" rIns="60960" bIns="60960" numCol="1" spcCol="1270" anchor="ctr" anchorCtr="0">
+          <a:noAutofit/>
+        </a:bodyPr>
+        <a:lstStyle/>
+        <a:p>
+          <a:pPr marL="0" lvl="0" indent="0" algn="ctr" defTabSz="711200">
+            <a:lnSpc>
+              <a:spcPct val="90000"/>
+            </a:lnSpc>
+            <a:spcBef>
+              <a:spcPct val="0"/>
+            </a:spcBef>
+            <a:spcAft>
+              <a:spcPct val="35000"/>
+            </a:spcAft>
+            <a:buNone/>
+          </a:pPr>
+          <a:r>
+            <a:rPr lang="en-US" sz="1600" kern="1200" dirty="0"/>
+            <a:t>Extract ASV table from </a:t>
+          </a:r>
+          <a:r>
+            <a:rPr lang="en-US" sz="1600" kern="1200" dirty="0" err="1"/>
+            <a:t>phyloseq</a:t>
+          </a:r>
+          <a:r>
+            <a:rPr lang="en-US" sz="1600" kern="1200" dirty="0"/>
+            <a:t> object</a:t>
+          </a:r>
+        </a:p>
+      </dsp:txBody>
+      <dsp:txXfrm>
+        <a:off x="122682" y="23328"/>
+        <a:ext cx="8212834" cy="728572"/>
+      </dsp:txXfrm>
+    </dsp:sp>
+    <dsp:sp modelId="{91DA19BA-A0AB-564A-8A9E-322DF18B64CF}">
+      <dsp:nvSpPr>
+        <dsp:cNvPr id="0" name=""/>
+        <dsp:cNvSpPr/>
+      </dsp:nvSpPr>
+      <dsp:spPr>
+        <a:xfrm rot="5400000">
+          <a:off x="4083992" y="793915"/>
+          <a:ext cx="290214" cy="348257"/>
+        </a:xfrm>
+        <a:prstGeom prst="rightArrow">
+          <a:avLst>
+            <a:gd name="adj1" fmla="val 60000"/>
+            <a:gd name="adj2" fmla="val 50000"/>
+          </a:avLst>
+        </a:prstGeom>
+        <a:solidFill>
+          <a:schemeClr val="accent2">
+            <a:hueOff val="0"/>
+            <a:satOff val="0"/>
+            <a:lumOff val="0"/>
+            <a:alphaOff val="0"/>
+          </a:schemeClr>
+        </a:solidFill>
+        <a:ln>
+          <a:noFill/>
+        </a:ln>
+        <a:effectLst/>
+      </dsp:spPr>
+      <dsp:style>
+        <a:lnRef idx="0">
+          <a:scrgbClr r="0" g="0" b="0"/>
+        </a:lnRef>
+        <a:fillRef idx="1">
+          <a:scrgbClr r="0" g="0" b="0"/>
+        </a:fillRef>
+        <a:effectRef idx="0">
+          <a:scrgbClr r="0" g="0" b="0"/>
+        </a:effectRef>
+        <a:fontRef idx="minor">
+          <a:schemeClr val="lt1"/>
+        </a:fontRef>
+      </dsp:style>
+      <dsp:txBody>
+        <a:bodyPr spcFirstLastPara="0" vert="horz" wrap="square" lIns="0" tIns="0" rIns="0" bIns="0" numCol="1" spcCol="1270" anchor="ctr" anchorCtr="0">
+          <a:noAutofit/>
+        </a:bodyPr>
+        <a:lstStyle/>
+        <a:p>
+          <a:pPr marL="0" lvl="0" indent="0" algn="ctr" defTabSz="577850">
+            <a:lnSpc>
+              <a:spcPct val="90000"/>
+            </a:lnSpc>
+            <a:spcBef>
+              <a:spcPct val="0"/>
+            </a:spcBef>
+            <a:spcAft>
+              <a:spcPct val="35000"/>
+            </a:spcAft>
+            <a:buNone/>
+          </a:pPr>
+          <a:endParaRPr lang="en-US" sz="1300" kern="1200"/>
+        </a:p>
+      </dsp:txBody>
+      <dsp:txXfrm rot="-5400000">
+        <a:off x="4124622" y="822936"/>
+        <a:ext cx="208955" cy="203150"/>
+      </dsp:txXfrm>
+    </dsp:sp>
+    <dsp:sp modelId="{43D2067A-91F6-8745-98BA-D6A10B24950A}">
+      <dsp:nvSpPr>
+        <dsp:cNvPr id="0" name=""/>
+        <dsp:cNvSpPr/>
+      </dsp:nvSpPr>
+      <dsp:spPr>
+        <a:xfrm>
+          <a:off x="128588" y="1161520"/>
+          <a:ext cx="8201023" cy="773906"/>
+        </a:xfrm>
+        <a:prstGeom prst="roundRect">
+          <a:avLst>
+            <a:gd name="adj" fmla="val 10000"/>
+          </a:avLst>
+        </a:prstGeom>
+        <a:solidFill>
+          <a:schemeClr val="accent3">
+            <a:hueOff val="0"/>
+            <a:satOff val="0"/>
+            <a:lumOff val="0"/>
+            <a:alphaOff val="0"/>
+          </a:schemeClr>
+        </a:solidFill>
+        <a:ln w="12700" cap="flat" cmpd="sng" algn="ctr">
+          <a:solidFill>
+            <a:schemeClr val="lt1">
+              <a:hueOff val="0"/>
+              <a:satOff val="0"/>
+              <a:lumOff val="0"/>
+              <a:alphaOff val="0"/>
+            </a:schemeClr>
+          </a:solidFill>
+          <a:prstDash val="solid"/>
+          <a:miter lim="800000"/>
+        </a:ln>
+        <a:effectLst/>
+      </dsp:spPr>
+      <dsp:style>
+        <a:lnRef idx="2">
+          <a:scrgbClr r="0" g="0" b="0"/>
+        </a:lnRef>
+        <a:fillRef idx="1">
+          <a:scrgbClr r="0" g="0" b="0"/>
+        </a:fillRef>
+        <a:effectRef idx="0">
+          <a:scrgbClr r="0" g="0" b="0"/>
+        </a:effectRef>
+        <a:fontRef idx="minor">
+          <a:schemeClr val="lt1"/>
+        </a:fontRef>
+      </dsp:style>
+      <dsp:txBody>
+        <a:bodyPr spcFirstLastPara="0" vert="horz" wrap="square" lIns="60960" tIns="60960" rIns="60960" bIns="60960" numCol="1" spcCol="1270" anchor="ctr" anchorCtr="0">
+          <a:noAutofit/>
+        </a:bodyPr>
+        <a:lstStyle/>
+        <a:p>
+          <a:pPr marL="0" lvl="0" indent="0" algn="ctr" defTabSz="711200">
+            <a:lnSpc>
+              <a:spcPct val="90000"/>
+            </a:lnSpc>
+            <a:spcBef>
+              <a:spcPct val="0"/>
+            </a:spcBef>
+            <a:spcAft>
+              <a:spcPct val="35000"/>
+            </a:spcAft>
+            <a:buNone/>
+          </a:pPr>
+          <a:r>
+            <a:rPr lang="en-US" sz="1600" kern="1200" dirty="0"/>
+            <a:t>Calculate the size of the metacommunity (</a:t>
+          </a:r>
+          <a:r>
+            <a:rPr lang="en-US" sz="1600" i="1" kern="1200" dirty="0"/>
+            <a:t>N</a:t>
+          </a:r>
+          <a:r>
+            <a:rPr lang="en-US" sz="1600" kern="1200" dirty="0"/>
+            <a:t>) by finding the mean number of reads per sample. We also find the limit of detection (</a:t>
+          </a:r>
+          <a:r>
+            <a:rPr lang="en-US" sz="1600" i="1" kern="1200" dirty="0"/>
+            <a:t>d</a:t>
+          </a:r>
+          <a:r>
+            <a:rPr lang="en-US" sz="1600" kern="1200" dirty="0"/>
+            <a:t>) = </a:t>
+          </a:r>
+          <a:r>
+            <a:rPr lang="en-US" sz="1600" i="1" kern="1200" dirty="0"/>
+            <a:t>1/N</a:t>
+          </a:r>
+        </a:p>
+      </dsp:txBody>
+      <dsp:txXfrm>
+        <a:off x="151255" y="1184187"/>
+        <a:ext cx="8155689" cy="728572"/>
+      </dsp:txXfrm>
+    </dsp:sp>
+    <dsp:sp modelId="{D067C965-9057-9C4A-A1D2-4912C14C50F7}">
+      <dsp:nvSpPr>
+        <dsp:cNvPr id="0" name=""/>
+        <dsp:cNvSpPr/>
+      </dsp:nvSpPr>
+      <dsp:spPr>
+        <a:xfrm rot="5400000">
+          <a:off x="4083992" y="1954774"/>
+          <a:ext cx="290214" cy="348257"/>
+        </a:xfrm>
+        <a:prstGeom prst="rightArrow">
+          <a:avLst>
+            <a:gd name="adj1" fmla="val 60000"/>
+            <a:gd name="adj2" fmla="val 50000"/>
+          </a:avLst>
+        </a:prstGeom>
+        <a:solidFill>
+          <a:schemeClr val="accent3">
+            <a:hueOff val="0"/>
+            <a:satOff val="0"/>
+            <a:lumOff val="0"/>
+            <a:alphaOff val="0"/>
+          </a:schemeClr>
+        </a:solidFill>
+        <a:ln>
+          <a:noFill/>
+        </a:ln>
+        <a:effectLst/>
+      </dsp:spPr>
+      <dsp:style>
+        <a:lnRef idx="0">
+          <a:scrgbClr r="0" g="0" b="0"/>
+        </a:lnRef>
+        <a:fillRef idx="1">
+          <a:scrgbClr r="0" g="0" b="0"/>
+        </a:fillRef>
+        <a:effectRef idx="0">
+          <a:scrgbClr r="0" g="0" b="0"/>
+        </a:effectRef>
+        <a:fontRef idx="minor">
+          <a:schemeClr val="lt1"/>
+        </a:fontRef>
+      </dsp:style>
+      <dsp:txBody>
+        <a:bodyPr spcFirstLastPara="0" vert="horz" wrap="square" lIns="0" tIns="0" rIns="0" bIns="0" numCol="1" spcCol="1270" anchor="ctr" anchorCtr="0">
+          <a:noAutofit/>
+        </a:bodyPr>
+        <a:lstStyle/>
+        <a:p>
+          <a:pPr marL="0" lvl="0" indent="0" algn="ctr" defTabSz="577850">
+            <a:lnSpc>
+              <a:spcPct val="90000"/>
+            </a:lnSpc>
+            <a:spcBef>
+              <a:spcPct val="0"/>
+            </a:spcBef>
+            <a:spcAft>
+              <a:spcPct val="35000"/>
+            </a:spcAft>
+            <a:buNone/>
+          </a:pPr>
+          <a:endParaRPr lang="en-US" sz="1300" kern="1200"/>
+        </a:p>
+      </dsp:txBody>
+      <dsp:txXfrm rot="-5400000">
+        <a:off x="4124622" y="1983795"/>
+        <a:ext cx="208955" cy="203150"/>
+      </dsp:txXfrm>
+    </dsp:sp>
+    <dsp:sp modelId="{80C05A4E-2A0A-294C-8DDC-052E97D834DA}">
+      <dsp:nvSpPr>
+        <dsp:cNvPr id="0" name=""/>
+        <dsp:cNvSpPr/>
+      </dsp:nvSpPr>
+      <dsp:spPr>
+        <a:xfrm>
+          <a:off x="157161" y="2322380"/>
+          <a:ext cx="8143877" cy="773906"/>
+        </a:xfrm>
+        <a:prstGeom prst="roundRect">
+          <a:avLst>
+            <a:gd name="adj" fmla="val 10000"/>
+          </a:avLst>
+        </a:prstGeom>
+        <a:solidFill>
+          <a:schemeClr val="accent4">
+            <a:hueOff val="0"/>
+            <a:satOff val="0"/>
+            <a:lumOff val="0"/>
+            <a:alphaOff val="0"/>
+          </a:schemeClr>
+        </a:solidFill>
+        <a:ln w="12700" cap="flat" cmpd="sng" algn="ctr">
+          <a:solidFill>
+            <a:schemeClr val="lt1">
+              <a:hueOff val="0"/>
+              <a:satOff val="0"/>
+              <a:lumOff val="0"/>
+              <a:alphaOff val="0"/>
+            </a:schemeClr>
+          </a:solidFill>
+          <a:prstDash val="solid"/>
+          <a:miter lim="800000"/>
+        </a:ln>
+        <a:effectLst/>
+      </dsp:spPr>
+      <dsp:style>
+        <a:lnRef idx="2">
+          <a:scrgbClr r="0" g="0" b="0"/>
+        </a:lnRef>
+        <a:fillRef idx="1">
+          <a:scrgbClr r="0" g="0" b="0"/>
+        </a:fillRef>
+        <a:effectRef idx="0">
+          <a:scrgbClr r="0" g="0" b="0"/>
+        </a:effectRef>
+        <a:fontRef idx="minor">
+          <a:schemeClr val="lt1"/>
+        </a:fontRef>
+      </dsp:style>
+      <dsp:txBody>
+        <a:bodyPr spcFirstLastPara="0" vert="horz" wrap="square" lIns="60960" tIns="60960" rIns="60960" bIns="60960" numCol="1" spcCol="1270" anchor="ctr" anchorCtr="0">
+          <a:noAutofit/>
+        </a:bodyPr>
+        <a:lstStyle/>
+        <a:p>
+          <a:pPr marL="0" lvl="0" indent="0" algn="ctr" defTabSz="711200">
+            <a:lnSpc>
+              <a:spcPct val="90000"/>
+            </a:lnSpc>
+            <a:spcBef>
+              <a:spcPct val="0"/>
+            </a:spcBef>
+            <a:spcAft>
+              <a:spcPct val="35000"/>
+            </a:spcAft>
+            <a:buNone/>
+          </a:pPr>
+          <a:r>
+            <a:rPr lang="en-US" sz="1600" kern="1200" dirty="0"/>
+            <a:t>Calculate the mean observed relative abundance and occurrence frequency of each ASV</a:t>
+          </a:r>
+        </a:p>
+      </dsp:txBody>
+      <dsp:txXfrm>
+        <a:off x="179828" y="2345047"/>
+        <a:ext cx="8098543" cy="728572"/>
+      </dsp:txXfrm>
+    </dsp:sp>
+    <dsp:sp modelId="{B3C2DB7A-EC33-6544-A09D-B1205728770A}">
+      <dsp:nvSpPr>
+        <dsp:cNvPr id="0" name=""/>
+        <dsp:cNvSpPr/>
+      </dsp:nvSpPr>
+      <dsp:spPr>
+        <a:xfrm rot="5400000">
+          <a:off x="4083992" y="3115634"/>
+          <a:ext cx="290214" cy="348257"/>
+        </a:xfrm>
+        <a:prstGeom prst="rightArrow">
+          <a:avLst>
+            <a:gd name="adj1" fmla="val 60000"/>
+            <a:gd name="adj2" fmla="val 50000"/>
+          </a:avLst>
+        </a:prstGeom>
+        <a:solidFill>
+          <a:schemeClr val="accent4">
+            <a:hueOff val="0"/>
+            <a:satOff val="0"/>
+            <a:lumOff val="0"/>
+            <a:alphaOff val="0"/>
+          </a:schemeClr>
+        </a:solidFill>
+        <a:ln>
+          <a:noFill/>
+        </a:ln>
+        <a:effectLst/>
+      </dsp:spPr>
+      <dsp:style>
+        <a:lnRef idx="0">
+          <a:scrgbClr r="0" g="0" b="0"/>
+        </a:lnRef>
+        <a:fillRef idx="1">
+          <a:scrgbClr r="0" g="0" b="0"/>
+        </a:fillRef>
+        <a:effectRef idx="0">
+          <a:scrgbClr r="0" g="0" b="0"/>
+        </a:effectRef>
+        <a:fontRef idx="minor">
+          <a:schemeClr val="lt1"/>
+        </a:fontRef>
+      </dsp:style>
+      <dsp:txBody>
+        <a:bodyPr spcFirstLastPara="0" vert="horz" wrap="square" lIns="0" tIns="0" rIns="0" bIns="0" numCol="1" spcCol="1270" anchor="ctr" anchorCtr="0">
+          <a:noAutofit/>
+        </a:bodyPr>
+        <a:lstStyle/>
+        <a:p>
+          <a:pPr marL="0" lvl="0" indent="0" algn="ctr" defTabSz="577850">
+            <a:lnSpc>
+              <a:spcPct val="90000"/>
+            </a:lnSpc>
+            <a:spcBef>
+              <a:spcPct val="0"/>
+            </a:spcBef>
+            <a:spcAft>
+              <a:spcPct val="35000"/>
+            </a:spcAft>
+            <a:buNone/>
+          </a:pPr>
+          <a:endParaRPr lang="en-US" sz="1300" kern="1200"/>
+        </a:p>
+      </dsp:txBody>
+      <dsp:txXfrm rot="-5400000">
+        <a:off x="4124622" y="3144655"/>
+        <a:ext cx="208955" cy="203150"/>
+      </dsp:txXfrm>
+    </dsp:sp>
+    <dsp:sp modelId="{6F6C8E07-FBAD-3F4D-A906-27ECCF26E70E}">
+      <dsp:nvSpPr>
+        <dsp:cNvPr id="0" name=""/>
+        <dsp:cNvSpPr/>
+      </dsp:nvSpPr>
+      <dsp:spPr>
+        <a:xfrm>
+          <a:off x="171447" y="3483239"/>
+          <a:ext cx="8115305" cy="773906"/>
+        </a:xfrm>
+        <a:prstGeom prst="roundRect">
+          <a:avLst>
+            <a:gd name="adj" fmla="val 10000"/>
+          </a:avLst>
+        </a:prstGeom>
+        <a:solidFill>
+          <a:schemeClr val="accent5">
+            <a:hueOff val="0"/>
+            <a:satOff val="0"/>
+            <a:lumOff val="0"/>
+            <a:alphaOff val="0"/>
+          </a:schemeClr>
+        </a:solidFill>
+        <a:ln w="12700" cap="flat" cmpd="sng" algn="ctr">
+          <a:solidFill>
+            <a:schemeClr val="lt1">
+              <a:hueOff val="0"/>
+              <a:satOff val="0"/>
+              <a:lumOff val="0"/>
+              <a:alphaOff val="0"/>
+            </a:schemeClr>
+          </a:solidFill>
+          <a:prstDash val="solid"/>
+          <a:miter lim="800000"/>
+        </a:ln>
+        <a:effectLst/>
+      </dsp:spPr>
+      <dsp:style>
+        <a:lnRef idx="2">
+          <a:scrgbClr r="0" g="0" b="0"/>
+        </a:lnRef>
+        <a:fillRef idx="1">
+          <a:scrgbClr r="0" g="0" b="0"/>
+        </a:fillRef>
+        <a:effectRef idx="0">
+          <a:scrgbClr r="0" g="0" b="0"/>
+        </a:effectRef>
+        <a:fontRef idx="minor">
+          <a:schemeClr val="lt1"/>
+        </a:fontRef>
+      </dsp:style>
+      <dsp:txBody>
+        <a:bodyPr spcFirstLastPara="0" vert="horz" wrap="square" lIns="60960" tIns="60960" rIns="60960" bIns="60960" numCol="1" spcCol="1270" anchor="ctr" anchorCtr="0">
+          <a:noAutofit/>
+        </a:bodyPr>
+        <a:lstStyle/>
+        <a:p>
+          <a:pPr marL="0" lvl="0" indent="0" algn="ctr" defTabSz="711200">
+            <a:lnSpc>
+              <a:spcPct val="90000"/>
+            </a:lnSpc>
+            <a:spcBef>
+              <a:spcPct val="0"/>
+            </a:spcBef>
+            <a:spcAft>
+              <a:spcPct val="35000"/>
+            </a:spcAft>
+            <a:buNone/>
+          </a:pPr>
+          <a:r>
+            <a:rPr lang="en-US" sz="1600" kern="1200" dirty="0"/>
+            <a:t>Using non-linear least squares fitting we fit the neutral model to our data to find, finding the probability of dispersal (</a:t>
+          </a:r>
+          <a:r>
+            <a:rPr lang="en-US" sz="1600" i="1" kern="1200" dirty="0"/>
+            <a:t>m</a:t>
+          </a:r>
+          <a:r>
+            <a:rPr lang="en-US" sz="1600" kern="1200" dirty="0"/>
+            <a:t>)</a:t>
+          </a:r>
+        </a:p>
+      </dsp:txBody>
+      <dsp:txXfrm>
+        <a:off x="194114" y="3505906"/>
+        <a:ext cx="8069971" cy="728572"/>
+      </dsp:txXfrm>
+    </dsp:sp>
+    <dsp:sp modelId="{48489AC1-89DA-0F48-B940-23505B5798FF}">
+      <dsp:nvSpPr>
+        <dsp:cNvPr id="0" name=""/>
+        <dsp:cNvSpPr/>
+      </dsp:nvSpPr>
+      <dsp:spPr>
+        <a:xfrm rot="5400000">
+          <a:off x="4083992" y="4276493"/>
+          <a:ext cx="290214" cy="348257"/>
+        </a:xfrm>
+        <a:prstGeom prst="rightArrow">
+          <a:avLst>
+            <a:gd name="adj1" fmla="val 60000"/>
+            <a:gd name="adj2" fmla="val 50000"/>
+          </a:avLst>
+        </a:prstGeom>
+        <a:solidFill>
+          <a:schemeClr val="accent5">
+            <a:hueOff val="0"/>
+            <a:satOff val="0"/>
+            <a:lumOff val="0"/>
+            <a:alphaOff val="0"/>
+          </a:schemeClr>
+        </a:solidFill>
+        <a:ln>
+          <a:noFill/>
+        </a:ln>
+        <a:effectLst/>
+      </dsp:spPr>
+      <dsp:style>
+        <a:lnRef idx="0">
+          <a:scrgbClr r="0" g="0" b="0"/>
+        </a:lnRef>
+        <a:fillRef idx="1">
+          <a:scrgbClr r="0" g="0" b="0"/>
+        </a:fillRef>
+        <a:effectRef idx="0">
+          <a:scrgbClr r="0" g="0" b="0"/>
+        </a:effectRef>
+        <a:fontRef idx="minor">
+          <a:schemeClr val="lt1"/>
+        </a:fontRef>
+      </dsp:style>
+      <dsp:txBody>
+        <a:bodyPr spcFirstLastPara="0" vert="horz" wrap="square" lIns="0" tIns="0" rIns="0" bIns="0" numCol="1" spcCol="1270" anchor="ctr" anchorCtr="0">
+          <a:noAutofit/>
+        </a:bodyPr>
+        <a:lstStyle/>
+        <a:p>
+          <a:pPr marL="0" lvl="0" indent="0" algn="ctr" defTabSz="577850">
+            <a:lnSpc>
+              <a:spcPct val="90000"/>
+            </a:lnSpc>
+            <a:spcBef>
+              <a:spcPct val="0"/>
+            </a:spcBef>
+            <a:spcAft>
+              <a:spcPct val="35000"/>
+            </a:spcAft>
+            <a:buNone/>
+          </a:pPr>
+          <a:endParaRPr lang="en-US" sz="1300" kern="1200"/>
+        </a:p>
+      </dsp:txBody>
+      <dsp:txXfrm rot="-5400000">
+        <a:off x="4124622" y="4305514"/>
+        <a:ext cx="208955" cy="203150"/>
+      </dsp:txXfrm>
+    </dsp:sp>
+    <dsp:sp modelId="{80377AF5-BC76-FB40-840E-12C9D1BDB641}">
+      <dsp:nvSpPr>
+        <dsp:cNvPr id="0" name=""/>
+        <dsp:cNvSpPr/>
+      </dsp:nvSpPr>
+      <dsp:spPr>
+        <a:xfrm>
+          <a:off x="157161" y="4644099"/>
+          <a:ext cx="8143877" cy="773906"/>
+        </a:xfrm>
+        <a:prstGeom prst="roundRect">
+          <a:avLst>
+            <a:gd name="adj" fmla="val 10000"/>
+          </a:avLst>
+        </a:prstGeom>
+        <a:solidFill>
+          <a:schemeClr val="accent6">
+            <a:hueOff val="0"/>
+            <a:satOff val="0"/>
+            <a:lumOff val="0"/>
+            <a:alphaOff val="0"/>
+          </a:schemeClr>
+        </a:solidFill>
+        <a:ln w="12700" cap="flat" cmpd="sng" algn="ctr">
+          <a:solidFill>
+            <a:schemeClr val="lt1">
+              <a:hueOff val="0"/>
+              <a:satOff val="0"/>
+              <a:lumOff val="0"/>
+              <a:alphaOff val="0"/>
+            </a:schemeClr>
+          </a:solidFill>
+          <a:prstDash val="solid"/>
+          <a:miter lim="800000"/>
+        </a:ln>
+        <a:effectLst/>
+      </dsp:spPr>
+      <dsp:style>
+        <a:lnRef idx="2">
+          <a:scrgbClr r="0" g="0" b="0"/>
+        </a:lnRef>
+        <a:fillRef idx="1">
+          <a:scrgbClr r="0" g="0" b="0"/>
+        </a:fillRef>
+        <a:effectRef idx="0">
+          <a:scrgbClr r="0" g="0" b="0"/>
+        </a:effectRef>
+        <a:fontRef idx="minor">
+          <a:schemeClr val="lt1"/>
+        </a:fontRef>
+      </dsp:style>
+      <dsp:txBody>
+        <a:bodyPr spcFirstLastPara="0" vert="horz" wrap="square" lIns="60960" tIns="60960" rIns="60960" bIns="60960" numCol="1" spcCol="1270" anchor="ctr" anchorCtr="0">
+          <a:noAutofit/>
+        </a:bodyPr>
+        <a:lstStyle/>
+        <a:p>
+          <a:pPr marL="0" lvl="0" indent="0" algn="ctr" defTabSz="711200">
+            <a:lnSpc>
+              <a:spcPct val="90000"/>
+            </a:lnSpc>
+            <a:spcBef>
+              <a:spcPct val="0"/>
+            </a:spcBef>
+            <a:spcAft>
+              <a:spcPct val="35000"/>
+            </a:spcAft>
+            <a:buNone/>
+          </a:pPr>
+          <a:r>
+            <a:rPr lang="en-US" sz="1600" kern="1200" dirty="0"/>
+            <a:t>Using the estimated value of </a:t>
+          </a:r>
+          <a:r>
+            <a:rPr lang="en-US" sz="1600" i="1" kern="1200" dirty="0"/>
+            <a:t>m</a:t>
+          </a:r>
+          <a:r>
+            <a:rPr lang="en-US" sz="1600" kern="1200" dirty="0"/>
+            <a:t> we calculate predicted occurrence frequencies and plot predictions from the neutral model against observed frequencies</a:t>
+          </a:r>
+        </a:p>
+      </dsp:txBody>
+      <dsp:txXfrm>
+        <a:off x="179828" y="4666766"/>
+        <a:ext cx="8098543" cy="728572"/>
+      </dsp:txXfrm>
+    </dsp:sp>
+  </dsp:spTree>
+</dsp:drawing>
+</file>
+
+<file path=ppt/diagrams/layout1.xml><?xml version="1.0" encoding="utf-8"?>
+<dgm:layoutDef xmlns:dgm="http://schemas.openxmlformats.org/drawingml/2006/diagram" xmlns:a="http://schemas.openxmlformats.org/drawingml/2006/main" uniqueId="urn:microsoft.com/office/officeart/2005/8/layout/process2">
+  <dgm:title val=""/>
+  <dgm:desc val=""/>
+  <dgm:catLst>
+    <dgm:cat type="process" pri="13000"/>
+  </dgm:catLst>
+  <dgm:sampData useDef="1">
+    <dgm:dataModel>
+      <dgm:ptLst/>
+      <dgm:bg/>
+      <dgm:whole/>
+    </dgm:dataModel>
+  </dgm:sampData>
+  <dgm:styleData>
+    <dgm:dataModel>
+      <dgm:ptLst>
+        <dgm:pt modelId="0" type="doc"/>
+        <dgm:pt modelId="1"/>
+        <dgm:pt modelId="2"/>
+      </dgm:ptLst>
+      <dgm:cxnLst>
+        <dgm:cxn modelId="3" srcId="0" destId="1" srcOrd="0" destOrd="0"/>
+        <dgm:cxn modelId="4" srcId="0" destId="2" srcOrd="1" destOrd="0"/>
+      </dgm:cxnLst>
+      <dgm:bg/>
+      <dgm:whole/>
+    </dgm:dataModel>
+  </dgm:styleData>
+  <dgm:clrData>
+    <dgm:dataModel>
+      <dgm:ptLst>
+        <dgm:pt modelId="0" type="doc"/>
+        <dgm:pt modelId="1"/>
+        <dgm:pt modelId="2"/>
+        <dgm:pt modelId="3"/>
+        <dgm:pt modelId="4"/>
+      </dgm:ptLst>
+      <dgm:cxnLst>
+        <dgm:cxn modelId="5" srcId="0" destId="1" srcOrd="0" destOrd="0"/>
+        <dgm:cxn modelId="6" srcId="0" destId="2" srcOrd="1" destOrd="0"/>
+        <dgm:cxn modelId="7" srcId="0" destId="3" srcOrd="2" destOrd="0"/>
+        <dgm:cxn modelId="8" srcId="0" destId="4" srcOrd="3" destOrd="0"/>
+      </dgm:cxnLst>
+      <dgm:bg/>
+      <dgm:whole/>
+    </dgm:dataModel>
+  </dgm:clrData>
+  <dgm:layoutNode name="linearFlow">
+    <dgm:varLst>
+      <dgm:resizeHandles val="exact"/>
+    </dgm:varLst>
+    <dgm:alg type="lin">
+      <dgm:param type="linDir" val="fromT"/>
+    </dgm:alg>
+    <dgm:shape xmlns:r="http://schemas.openxmlformats.org/officeDocument/2006/relationships" r:blip="">
+      <dgm:adjLst/>
+    </dgm:shape>
+    <dgm:presOf/>
+    <dgm:constrLst>
+      <dgm:constr type="h" for="ch" ptType="node" refType="h"/>
+      <dgm:constr type="h" for="ch" ptType="sibTrans" refType="h" refFor="ch" refPtType="node" fact="0.5"/>
+      <dgm:constr type="w" for="ch" ptType="node" op="equ"/>
+      <dgm:constr type="primFontSz" for="ch" ptType="node" op="equ" val="65"/>
+      <dgm:constr type="primFontSz" for="des" forName="connectorText" op="equ" val="55"/>
+      <dgm:constr type="primFontSz" for="des" forName="connectorText" refType="primFontSz" refFor="ch" refPtType="node" op="lte" fact="0.8"/>
+    </dgm:constrLst>
+    <dgm:ruleLst/>
+    <dgm:forEach name="nodesForEach" axis="ch" ptType="node">
+      <dgm:layoutNode name="node">
+        <dgm:varLst>
+          <dgm:bulletEnabled val="1"/>
+        </dgm:varLst>
+        <dgm:choose name="Name0">
+          <dgm:if name="Name1" axis="root des" ptType="all node" func="maxDepth" op="gt" val="1">
+            <dgm:alg type="tx">
+              <dgm:param type="parTxLTRAlign" val="l"/>
+              <dgm:param type="parTxRTLAlign" val="r"/>
+              <dgm:param type="txAnchorVertCh" val="mid"/>
+            </dgm:alg>
+          </dgm:if>
+          <dgm:else name="Name2">
+            <dgm:alg type="tx"/>
+          </dgm:else>
+        </dgm:choose>
+        <dgm:shape xmlns:r="http://schemas.openxmlformats.org/officeDocument/2006/relationships" type="roundRect" r:blip="">
+          <dgm:adjLst>
+            <dgm:adj idx="1" val="0.1"/>
+          </dgm:adjLst>
+        </dgm:shape>
+        <dgm:presOf axis="desOrSelf" ptType="node"/>
+        <dgm:constrLst>
+          <dgm:constr type="w" refType="h" fact="1.8"/>
+          <dgm:constr type="tMarg" refType="primFontSz" fact="0.3"/>
+          <dgm:constr type="bMarg" refType="primFontSz" fact="0.3"/>
+          <dgm:constr type="lMarg" refType="primFontSz" fact="0.3"/>
+          <dgm:constr type="rMarg" refType="primFontSz" fact="0.3"/>
+        </dgm:constrLst>
+        <dgm:ruleLst>
+          <dgm:rule type="primFontSz" val="18" fact="NaN" max="NaN"/>
+          <dgm:rule type="w" val="NaN" fact="4" max="NaN"/>
+          <dgm:rule type="primFontSz" val="5" fact="NaN" max="NaN"/>
+        </dgm:ruleLst>
+      </dgm:layoutNode>
+      <dgm:forEach name="sibTransForEach" axis="followSib" ptType="sibTrans" cnt="1">
+        <dgm:layoutNode name="sibTrans">
+          <dgm:alg type="conn">
+            <dgm:param type="begPts" val="auto"/>
+            <dgm:param type="endPts" val="auto"/>
+          </dgm:alg>
+          <dgm:shape xmlns:r="http://schemas.openxmlformats.org/officeDocument/2006/relationships" type="conn" r:blip="">
+            <dgm:adjLst/>
+          </dgm:shape>
+          <dgm:presOf axis="self"/>
+          <dgm:constrLst>
+            <dgm:constr type="w" refType="h" fact="0.9"/>
+            <dgm:constr type="connDist"/>
+            <dgm:constr type="wArH" refType="w" fact="0.5"/>
+            <dgm:constr type="hArH" refType="w"/>
+            <dgm:constr type="stemThick" refType="w" fact="0.6"/>
+            <dgm:constr type="begPad" refType="connDist" fact="0.125"/>
+            <dgm:constr type="endPad" refType="connDist" fact="0.125"/>
+          </dgm:constrLst>
+          <dgm:ruleLst/>
+          <dgm:layoutNode name="connectorText">
+            <dgm:alg type="tx">
+              <dgm:param type="autoTxRot" val="upr"/>
+            </dgm:alg>
+            <dgm:shape xmlns:r="http://schemas.openxmlformats.org/officeDocument/2006/relationships" type="conn" r:blip="" hideGeom="1">
+              <dgm:adjLst/>
+            </dgm:shape>
+            <dgm:presOf axis="self"/>
+            <dgm:constrLst>
+              <dgm:constr type="lMarg"/>
+              <dgm:constr type="rMarg"/>
+              <dgm:constr type="tMarg"/>
+              <dgm:constr type="bMarg"/>
+            </dgm:constrLst>
+            <dgm:ruleLst>
+              <dgm:rule type="primFontSz" val="5" fact="NaN" max="NaN"/>
+            </dgm:ruleLst>
+          </dgm:layoutNode>
+        </dgm:layoutNode>
+      </dgm:forEach>
+    </dgm:forEach>
+  </dgm:layoutNode>
+</dgm:layoutDef>
+</file>
+
+<file path=ppt/diagrams/quickStyle1.xml><?xml version="1.0" encoding="utf-8"?>
+<dgm:styleDef xmlns:dgm="http://schemas.openxmlformats.org/drawingml/2006/diagram" xmlns:a="http://schemas.openxmlformats.org/drawingml/2006/main" uniqueId="urn:microsoft.com/office/officeart/2005/8/quickstyle/simple1">
+  <dgm:title val=""/>
+  <dgm:desc val=""/>
+  <dgm:catLst>
+    <dgm:cat type="simple" pri="10100"/>
+  </dgm:catLst>
+  <dgm:scene3d>
+    <a:camera prst="orthographicFront"/>
+    <a:lightRig rig="threePt" dir="t"/>
+  </dgm:scene3d>
+  <dgm:styleLbl name="node0">
+    <dgm:scene3d>
+      <a:camera prst="orthographicFront"/>
+      <a:lightRig rig="threePt" dir="t"/>
+    </dgm:scene3d>
+    <dgm:sp3d/>
+    <dgm:txPr/>
+    <dgm:style>
+      <a:lnRef idx="2">
+        <a:scrgbClr r="0" g="0" b="0"/>
+      </a:lnRef>
+      <a:fillRef idx="1">
+        <a:scrgbClr r="0" g="0" b="0"/>
+      </a:fillRef>
+      <a:effectRef idx="0">
+        <a:scrgbClr r="0" g="0" b="0"/>
+      </a:effectRef>
+      <a:fontRef idx="minor">
+        <a:schemeClr val="lt1"/>
+      </a:fontRef>
+    </dgm:style>
+  </dgm:styleLbl>
+  <dgm:styleLbl name="lnNode1">
+    <dgm:scene3d>
+      <a:camera prst="orthographicFront"/>
+      <a:lightRig rig="threePt" dir="t"/>
+    </dgm:scene3d>
+    <dgm:sp3d/>
+    <dgm:txPr/>
+    <dgm:style>
+      <a:lnRef idx="2">
+        <a:scrgbClr r="0" g="0" b="0"/>
+      </a:lnRef>
+      <a:fillRef idx="1">
+        <a:scrgbClr r="0" g="0" b="0"/>
+      </a:fillRef>
+      <a:effectRef idx="0">
+        <a:scrgbClr r="0" g="0" b="0"/>
+      </a:effectRef>
+      <a:fontRef idx="minor">
+        <a:schemeClr val="lt1"/>
+      </a:fontRef>
+    </dgm:style>
+  </dgm:styleLbl>
+  <dgm:styleLbl name="vennNode1">
+    <dgm:scene3d>
+      <a:camera prst="orthographicFront"/>
+      <a:lightRig rig="threePt" dir="t"/>
+    </dgm:scene3d>
+    <dgm:sp3d/>
+    <dgm:txPr/>
+    <dgm:style>
+      <a:lnRef idx="2">
+        <a:scrgbClr r="0" g="0" b="0"/>
+      </a:lnRef>
+      <a:fillRef idx="1">
+        <a:scrgbClr r="0" g="0" b="0"/>
+      </a:fillRef>
+      <a:effectRef idx="0">
+        <a:scrgbClr r="0" g="0" b="0"/>
+      </a:effectRef>
+      <a:fontRef idx="minor">
+        <a:schemeClr val="tx1"/>
+      </a:fontRef>
+    </dgm:style>
+  </dgm:styleLbl>
+  <dgm:styleLbl name="alignNode1">
+    <dgm:scene3d>
+      <a:camera prst="orthographicFront"/>
+      <a:lightRig rig="threePt" dir="t"/>
+    </dgm:scene3d>
+    <dgm:sp3d/>
+    <dgm:txPr/>
+    <dgm:style>
+      <a:lnRef idx="2">
+        <a:scrgbClr r="0" g="0" b="0"/>
+      </a:lnRef>
+      <a:fillRef idx="1">
+        <a:scrgbClr r="0" g="0" b="0"/>
+      </a:fillRef>
+      <a:effectRef idx="0">
+        <a:scrgbClr r="0" g="0" b="0"/>
+      </a:effectRef>
+      <a:fontRef idx="minor">
+        <a:schemeClr val="lt1"/>
+      </a:fontRef>
+    </dgm:style>
+  </dgm:styleLbl>
+  <dgm:styleLbl name="node1">
+    <dgm:scene3d>
+      <a:camera prst="orthographicFront"/>
+      <a:lightRig rig="threePt" dir="t"/>
+    </dgm:scene3d>
+    <dgm:sp3d/>
+    <dgm:txPr/>
+    <dgm:style>
+      <a:lnRef idx="2">
+        <a:scrgbClr r="0" g="0" b="0"/>
+      </a:lnRef>
+      <a:fillRef idx="1">
+        <a:scrgbClr r="0" g="0" b="0"/>
+      </a:fillRef>
+      <a:effectRef idx="0">
+        <a:scrgbClr r="0" g="0" b="0"/>
+      </a:effectRef>
+      <a:fontRef idx="minor">
+        <a:schemeClr val="lt1"/>
+      </a:fontRef>
+    </dgm:style>
+  </dgm:styleLbl>
+  <dgm:styleLbl name="node2">
+    <dgm:scene3d>
+      <a:camera prst="orthographicFront"/>
+      <a:lightRig rig="threePt" dir="t"/>
+    </dgm:scene3d>
+    <dgm:sp3d/>
+    <dgm:txPr/>
+    <dgm:style>
+      <a:lnRef idx="2">
+        <a:scrgbClr r="0" g="0" b="0"/>
+      </a:lnRef>
+      <a:fillRef idx="1">
+        <a:scrgbClr r="0" g="0" b="0"/>
+      </a:fillRef>
+      <a:effectRef idx="0">
+        <a:scrgbClr r="0" g="0" b="0"/>
+      </a:effectRef>
+      <a:fontRef idx="minor">
+        <a:schemeClr val="lt1"/>
+      </a:fontRef>
+    </dgm:style>
+  </dgm:styleLbl>
+  <dgm:styleLbl name="node3">
+    <dgm:scene3d>
+      <a:camera prst="orthographicFront"/>
+      <a:lightRig rig="threePt" dir="t"/>
+    </dgm:scene3d>
+    <dgm:sp3d/>
+    <dgm:txPr/>
+    <dgm:style>
+      <a:lnRef idx="2">
+        <a:scrgbClr r="0" g="0" b="0"/>
+      </a:lnRef>
+      <a:fillRef idx="1">
+        <a:scrgbClr r="0" g="0" b="0"/>
+      </a:fillRef>
+      <a:effectRef idx="0">
+        <a:scrgbClr r="0" g="0" b="0"/>
+      </a:effectRef>
+      <a:fontRef idx="minor">
+        <a:schemeClr val="lt1"/>
+      </a:fontRef>
+    </dgm:style>
+  </dgm:styleLbl>
+  <dgm:styleLbl name="node4">
+    <dgm:scene3d>
+      <a:camera prst="orthographicFront"/>
+      <a:lightRig rig="threePt" dir="t"/>
+    </dgm:scene3d>
+    <dgm:sp3d/>
+    <dgm:txPr/>
+    <dgm:style>
+      <a:lnRef idx="2">
+        <a:scrgbClr r="0" g="0" b="0"/>
+      </a:lnRef>
+      <a:fillRef idx="1">
+        <a:scrgbClr r="0" g="0" b="0"/>
+      </a:fillRef>
+      <a:effectRef idx="0">
+        <a:scrgbClr r="0" g="0" b="0"/>
+      </a:effectRef>
+      <a:fontRef idx="minor">
+        <a:schemeClr val="lt1"/>
+      </a:fontRef>
+    </dgm:style>
+  </dgm:styleLbl>
+  <dgm:styleLbl name="fgImgPlace1">
+    <dgm:scene3d>
+      <a:camera prst="orthographicFront"/>
+      <a:lightRig rig="threePt" dir="t"/>
+    </dgm:scene3d>
+    <dgm:sp3d/>
+    <dgm:txPr/>
+    <dgm:style>
+      <a:lnRef idx="2">
+        <a:scrgbClr r="0" g="0" b="0"/>
+      </a:lnRef>
+      <a:fillRef idx="1">
+        <a:scrgbClr r="0" g="0" b="0"/>
+      </a:fillRef>
+      <a:effectRef idx="0">
+        <a:scrgbClr r="0" g="0" b="0"/>
+      </a:effectRef>
+      <a:fontRef idx="minor"/>
+    </dgm:style>
+  </dgm:styleLbl>
+  <dgm:styleLbl name="alignImgPlace1">
+    <dgm:scene3d>
+      <a:camera prst="orthographicFront"/>
+      <a:lightRig rig="threePt" dir="t"/>
+    </dgm:scene3d>
+    <dgm:sp3d/>
+    <dgm:txPr/>
+    <dgm:style>
+      <a:lnRef idx="2">
+        <a:scrgbClr r="0" g="0" b="0"/>
+      </a:lnRef>
+      <a:fillRef idx="1">
+        <a:scrgbClr r="0" g="0" b="0"/>
+      </a:fillRef>
+      <a:effectRef idx="0">
+        <a:scrgbClr r="0" g="0" b="0"/>
+      </a:effectRef>
+      <a:fontRef idx="minor"/>
+    </dgm:style>
+  </dgm:styleLbl>
+  <dgm:styleLbl name="bgImgPlace1">
+    <dgm:scene3d>
+      <a:camera prst="orthographicFront"/>
+      <a:lightRig rig="threePt" dir="t"/>
+    </dgm:scene3d>
+    <dgm:sp3d/>
+    <dgm:txPr/>
+    <dgm:style>
+      <a:lnRef idx="2">
+        <a:scrgbClr r="0" g="0" b="0"/>
+      </a:lnRef>
+      <a:fillRef idx="1">
+        <a:scrgbClr r="0" g="0" b="0"/>
+      </a:fillRef>
+      <a:effectRef idx="0">
+        <a:scrgbClr r="0" g="0" b="0"/>
+      </a:effectRef>
+      <a:fontRef idx="minor"/>
+    </dgm:style>
+  </dgm:styleLbl>
+  <dgm:styleLbl name="sibTrans2D1">
+    <dgm:scene3d>
+      <a:camera prst="orthographicFront"/>
+      <a:lightRig rig="threePt" dir="t"/>
+    </dgm:scene3d>
+    <dgm:sp3d/>
+    <dgm:txPr/>
+    <dgm:style>
+      <a:lnRef idx="0">
+        <a:scrgbClr r="0" g="0" b="0"/>
+      </a:lnRef>
+      <a:fillRef idx="1">
+        <a:scrgbClr r="0" g="0" b="0"/>
+      </a:fillRef>
+      <a:effectRef idx="0">
+        <a:scrgbClr r="0" g="0" b="0"/>
+      </a:effectRef>
+      <a:fontRef idx="minor">
+        <a:schemeClr val="lt1"/>
+      </a:fontRef>
+    </dgm:style>
+  </dgm:styleLbl>
+  <dgm:styleLbl name="fgSibTrans2D1">
+    <dgm:scene3d>
+      <a:camera prst="orthographicFront"/>
+      <a:lightRig rig="threePt" dir="t"/>
+    </dgm:scene3d>
+    <dgm:sp3d/>
+    <dgm:txPr/>
+    <dgm:style>
+      <a:lnRef idx="0">
+        <a:scrgbClr r="0" g="0" b="0"/>
+      </a:lnRef>
+      <a:fillRef idx="1">
+        <a:scrgbClr r="0" g="0" b="0"/>
+      </a:fillRef>
+      <a:effectRef idx="0">
+        <a:scrgbClr r="0" g="0" b="0"/>
+      </a:effectRef>
+      <a:fontRef idx="minor">
+        <a:schemeClr val="lt1"/>
+      </a:fontRef>
+    </dgm:style>
+  </dgm:styleLbl>
+  <dgm:styleLbl name="bgSibTrans2D1">
+    <dgm:scene3d>
+      <a:camera prst="orthographicFront"/>
+      <a:lightRig rig="threePt" dir="t"/>
+    </dgm:scene3d>
+    <dgm:sp3d/>
+    <dgm:txPr/>
+    <dgm:style>
+      <a:lnRef idx="0">
+        <a:scrgbClr r="0" g="0" b="0"/>
+      </a:lnRef>
+      <a:fillRef idx="1">
+        <a:scrgbClr r="0" g="0" b="0"/>
+      </a:fillRef>
+      <a:effectRef idx="0">
+        <a:scrgbClr r="0" g="0" b="0"/>
+      </a:effectRef>
+      <a:fontRef idx="minor">
+        <a:schemeClr val="lt1"/>
+      </a:fontRef>
+    </dgm:style>
+  </dgm:styleLbl>
+  <dgm:styleLbl name="sibTrans1D1">
+    <dgm:scene3d>
+      <a:camera prst="orthographicFront"/>
+      <a:lightRig rig="threePt" dir="t"/>
+    </dgm:scene3d>
+    <dgm:sp3d/>
+    <dgm:txPr/>
+    <dgm:style>
+      <a:lnRef idx="1">
+        <a:scrgbClr r="0" g="0" b="0"/>
+      </a:lnRef>
+      <a:fillRef idx="0">
+        <a:scrgbClr r="0" g="0" b="0"/>
+      </a:fillRef>
+      <a:effectRef idx="0">
+        <a:scrgbClr r="0" g="0" b="0"/>
+      </a:effectRef>
+      <a:fontRef idx="minor"/>
+    </dgm:style>
+  </dgm:styleLbl>
+  <dgm:styleLbl name="callout">
+    <dgm:scene3d>
+      <a:camera prst="orthographicFront"/>
+      <a:lightRig rig="threePt" dir="t"/>
+    </dgm:scene3d>
+    <dgm:sp3d/>
+    <dgm:txPr/>
+    <dgm:style>
+      <a:lnRef idx="2">
+        <a:scrgbClr r="0" g="0" b="0"/>
+      </a:lnRef>
+      <a:fillRef idx="1">
+        <a:scrgbClr r="0" g="0" b="0"/>
+      </a:fillRef>
+      <a:effectRef idx="0">
+        <a:scrgbClr r="0" g="0" b="0"/>
+      </a:effectRef>
+      <a:fontRef idx="minor"/>
+    </dgm:style>
+  </dgm:styleLbl>
+  <dgm:styleLbl name="asst0">
+    <dgm:scene3d>
+      <a:camera prst="orthographicFront"/>
+      <a:lightRig rig="threePt" dir="t"/>
+    </dgm:scene3d>
+    <dgm:sp3d/>
+    <dgm:txPr/>
+    <dgm:style>
+      <a:lnRef idx="2">
+        <a:scrgbClr r="0" g="0" b="0"/>
+      </a:lnRef>
+      <a:fillRef idx="1">
+        <a:scrgbClr r="0" g="0" b="0"/>
+      </a:fillRef>
+      <a:effectRef idx="0">
+        <a:scrgbClr r="0" g="0" b="0"/>
+      </a:effectRef>
+      <a:fontRef idx="minor">
+        <a:schemeClr val="lt1"/>
+      </a:fontRef>
+    </dgm:style>
+  </dgm:styleLbl>
+  <dgm:styleLbl name="asst1">
+    <dgm:scene3d>
+      <a:camera prst="orthographicFront"/>
+      <a:lightRig rig="threePt" dir="t"/>
+    </dgm:scene3d>
+    <dgm:sp3d/>
+    <dgm:txPr/>
+    <dgm:style>
+      <a:lnRef idx="2">
+        <a:scrgbClr r="0" g="0" b="0"/>
+      </a:lnRef>
+      <a:fillRef idx="1">
+        <a:scrgbClr r="0" g="0" b="0"/>
+      </a:fillRef>
+      <a:effectRef idx="0">
+        <a:scrgbClr r="0" g="0" b="0"/>
+      </a:effectRef>
+      <a:fontRef idx="minor">
+        <a:schemeClr val="lt1"/>
+      </a:fontRef>
+    </dgm:style>
+  </dgm:styleLbl>
+  <dgm:styleLbl name="asst2">
+    <dgm:scene3d>
+      <a:camera prst="orthographicFront"/>
+      <a:lightRig rig="threePt" dir="t"/>
+    </dgm:scene3d>
+    <dgm:sp3d/>
+    <dgm:txPr/>
+    <dgm:style>
+      <a:lnRef idx="2">
+        <a:scrgbClr r="0" g="0" b="0"/>
+      </a:lnRef>
+      <a:fillRef idx="1">
+        <a:scrgbClr r="0" g="0" b="0"/>
+      </a:fillRef>
+      <a:effectRef idx="0">
+        <a:scrgbClr r="0" g="0" b="0"/>
+      </a:effectRef>
+      <a:fontRef idx="minor">
+        <a:schemeClr val="lt1"/>
+      </a:fontRef>
+    </dgm:style>
+  </dgm:styleLbl>
+  <dgm:styleLbl name="asst3">
+    <dgm:scene3d>
+      <a:camera prst="orthographicFront"/>
+      <a:lightRig rig="threePt" dir="t"/>
+    </dgm:scene3d>
+    <dgm:sp3d/>
+    <dgm:txPr/>
+    <dgm:style>
+      <a:lnRef idx="2">
+        <a:scrgbClr r="0" g="0" b="0"/>
+      </a:lnRef>
+      <a:fillRef idx="1">
+        <a:scrgbClr r="0" g="0" b="0"/>
+      </a:fillRef>
+      <a:effectRef idx="0">
+        <a:scrgbClr r="0" g="0" b="0"/>
+      </a:effectRef>
+      <a:fontRef idx="minor">
+        <a:schemeClr val="lt1"/>
+      </a:fontRef>
+    </dgm:style>
+  </dgm:styleLbl>
+  <dgm:styleLbl name="asst4">
+    <dgm:scene3d>
+      <a:camera prst="orthographicFront"/>
+      <a:lightRig rig="threePt" dir="t"/>
+    </dgm:scene3d>
+    <dgm:sp3d/>
+    <dgm:txPr/>
+    <dgm:style>
+      <a:lnRef idx="2">
+        <a:scrgbClr r="0" g="0" b="0"/>
+      </a:lnRef>
+      <a:fillRef idx="1">
+        <a:scrgbClr r="0" g="0" b="0"/>
+      </a:fillRef>
+      <a:effectRef idx="0">
+        <a:scrgbClr r="0" g="0" b="0"/>
+      </a:effectRef>
+      <a:fontRef idx="minor">
+        <a:schemeClr val="lt1"/>
+      </a:fontRef>
+    </dgm:style>
+  </dgm:styleLbl>
+  <dgm:styleLbl name="parChTrans2D1">
+    <dgm:scene3d>
+      <a:camera prst="orthographicFront"/>
+      <a:lightRig rig="threePt" dir="t"/>
+    </dgm:scene3d>
+    <dgm:sp3d/>
+    <dgm:txPr/>
+    <dgm:style>
+      <a:lnRef idx="2">
+        <a:scrgbClr r="0" g="0" b="0"/>
+      </a:lnRef>
+      <a:fillRef idx="1">
+        <a:scrgbClr r="0" g="0" b="0"/>
+      </a:fillRef>
+      <a:effectRef idx="0">
+        <a:scrgbClr r="0" g="0" b="0"/>
+      </a:effectRef>
+      <a:fontRef idx="minor">
+        <a:schemeClr val="lt1"/>
+      </a:fontRef>
+    </dgm:style>
+  </dgm:styleLbl>
+  <dgm:styleLbl name="parChTrans2D2">
+    <dgm:scene3d>
+      <a:camera prst="orthographicFront"/>
+      <a:lightRig rig="threePt" dir="t"/>
+    </dgm:scene3d>
+    <dgm:sp3d/>
+    <dgm:txPr/>
+    <dgm:style>
+      <a:lnRef idx="2">
+        <a:scrgbClr r="0" g="0" b="0"/>
+      </a:lnRef>
+      <a:fillRef idx="1">
+        <a:scrgbClr r="0" g="0" b="0"/>
+      </a:fillRef>
+      <a:effectRef idx="0">
+        <a:scrgbClr r="0" g="0" b="0"/>
+      </a:effectRef>
+      <a:fontRef idx="minor">
+        <a:schemeClr val="lt1"/>
+      </a:fontRef>
+    </dgm:style>
+  </dgm:styleLbl>
+  <dgm:styleLbl name="parChTrans2D3">
+    <dgm:scene3d>
+      <a:camera prst="orthographicFront"/>
+      <a:lightRig rig="threePt" dir="t"/>
+    </dgm:scene3d>
+    <dgm:sp3d/>
+    <dgm:txPr/>
+    <dgm:style>
+      <a:lnRef idx="2">
+        <a:scrgbClr r="0" g="0" b="0"/>
+      </a:lnRef>
+      <a:fillRef idx="1">
+        <a:scrgbClr r="0" g="0" b="0"/>
+      </a:fillRef>
+      <a:effectRef idx="0">
+        <a:scrgbClr r="0" g="0" b="0"/>
+      </a:effectRef>
+      <a:fontRef idx="minor">
+        <a:schemeClr val="lt1"/>
+      </a:fontRef>
+    </dgm:style>
+  </dgm:styleLbl>
+  <dgm:styleLbl name="parChTrans2D4">
+    <dgm:scene3d>
+      <a:camera prst="orthographicFront"/>
+      <a:lightRig rig="threePt" dir="t"/>
+    </dgm:scene3d>
+    <dgm:sp3d/>
+    <dgm:txPr/>
+    <dgm:style>
+      <a:lnRef idx="2">
+        <a:scrgbClr r="0" g="0" b="0"/>
+      </a:lnRef>
+      <a:fillRef idx="1">
+        <a:scrgbClr r="0" g="0" b="0"/>
+      </a:fillRef>
+      <a:effectRef idx="0">
+        <a:scrgbClr r="0" g="0" b="0"/>
+      </a:effectRef>
+      <a:fontRef idx="minor">
+        <a:schemeClr val="lt1"/>
+      </a:fontRef>
+    </dgm:style>
+  </dgm:styleLbl>
+  <dgm:styleLbl name="parChTrans1D1">
+    <dgm:scene3d>
+      <a:camera prst="orthographicFront"/>
+      <a:lightRig rig="threePt" dir="t"/>
+    </dgm:scene3d>
+    <dgm:sp3d/>
+    <dgm:txPr/>
+    <dgm:style>
+      <a:lnRef idx="2">
+        <a:scrgbClr r="0" g="0" b="0"/>
+      </a:lnRef>
+      <a:fillRef idx="0">
+        <a:scrgbClr r="0" g="0" b="0"/>
+      </a:fillRef>
+      <a:effectRef idx="0">
+        <a:scrgbClr r="0" g="0" b="0"/>
+      </a:effectRef>
+      <a:fontRef idx="minor"/>
+    </dgm:style>
+  </dgm:styleLbl>
+  <dgm:styleLbl name="parChTrans1D2">
+    <dgm:scene3d>
+      <a:camera prst="orthographicFront"/>
+      <a:lightRig rig="threePt" dir="t"/>
+    </dgm:scene3d>
+    <dgm:sp3d/>
+    <dgm:txPr/>
+    <dgm:style>
+      <a:lnRef idx="2">
+        <a:scrgbClr r="0" g="0" b="0"/>
+      </a:lnRef>
+      <a:fillRef idx="0">
+        <a:scrgbClr r="0" g="0" b="0"/>
+      </a:fillRef>
+      <a:effectRef idx="0">
+        <a:scrgbClr r="0" g="0" b="0"/>
+      </a:effectRef>
+      <a:fontRef idx="minor"/>
+    </dgm:style>
+  </dgm:styleLbl>
+  <dgm:styleLbl name="parChTrans1D3">
+    <dgm:scene3d>
+      <a:camera prst="orthographicFront"/>
+      <a:lightRig rig="threePt" dir="t"/>
+    </dgm:scene3d>
+    <dgm:sp3d/>
+    <dgm:txPr/>
+    <dgm:style>
+      <a:lnRef idx="2">
+        <a:scrgbClr r="0" g="0" b="0"/>
+      </a:lnRef>
+      <a:fillRef idx="0">
+        <a:scrgbClr r="0" g="0" b="0"/>
+      </a:fillRef>
+      <a:effectRef idx="0">
+        <a:scrgbClr r="0" g="0" b="0"/>
+      </a:effectRef>
+      <a:fontRef idx="minor"/>
+    </dgm:style>
+  </dgm:styleLbl>
+  <dgm:styleLbl name="parChTrans1D4">
+    <dgm:scene3d>
+      <a:camera prst="orthographicFront"/>
+      <a:lightRig rig="threePt" dir="t"/>
+    </dgm:scene3d>
+    <dgm:sp3d/>
+    <dgm:txPr/>
+    <dgm:style>
+      <a:lnRef idx="2">
+        <a:scrgbClr r="0" g="0" b="0"/>
+      </a:lnRef>
+      <a:fillRef idx="0">
+        <a:scrgbClr r="0" g="0" b="0"/>
+      </a:fillRef>
+      <a:effectRef idx="0">
+        <a:scrgbClr r="0" g="0" b="0"/>
+      </a:effectRef>
+      <a:fontRef idx="minor"/>
+    </dgm:style>
+  </dgm:styleLbl>
+  <dgm:styleLbl name="fgAcc1">
+    <dgm:scene3d>
+      <a:camera prst="orthographicFront"/>
+      <a:lightRig rig="threePt" dir="t"/>
+    </dgm:scene3d>
+    <dgm:sp3d/>
+    <dgm:txPr/>
+    <dgm:style>
+      <a:lnRef idx="2">
+        <a:scrgbClr r="0" g="0" b="0"/>
+      </a:lnRef>
+      <a:fillRef idx="1">
+        <a:scrgbClr r="0" g="0" b="0"/>
+      </a:fillRef>
+      <a:effectRef idx="0">
+        <a:scrgbClr r="0" g="0" b="0"/>
+      </a:effectRef>
+      <a:fontRef idx="minor"/>
+    </dgm:style>
+  </dgm:styleLbl>
+  <dgm:styleLbl name="conFgAcc1">
+    <dgm:scene3d>
+      <a:camera prst="orthographicFront"/>
+      <a:lightRig rig="threePt" dir="t"/>
+    </dgm:scene3d>
+    <dgm:sp3d/>
+    <dgm:txPr/>
+    <dgm:style>
+      <a:lnRef idx="2">
+        <a:scrgbClr r="0" g="0" b="0"/>
+      </a:lnRef>
+      <a:fillRef idx="1">
+        <a:scrgbClr r="0" g="0" b="0"/>
+      </a:fillRef>
+      <a:effectRef idx="0">
+        <a:scrgbClr r="0" g="0" b="0"/>
+      </a:effectRef>
+      <a:fontRef idx="minor"/>
+    </dgm:style>
+  </dgm:styleLbl>
+  <dgm:styleLbl name="alignAcc1">
+    <dgm:scene3d>
+      <a:camera prst="orthographicFront"/>
+      <a:lightRig rig="threePt" dir="t"/>
+    </dgm:scene3d>
+    <dgm:sp3d/>
+    <dgm:txPr/>
+    <dgm:style>
+      <a:lnRef idx="2">
+        <a:scrgbClr r="0" g="0" b="0"/>
+      </a:lnRef>
+      <a:fillRef idx="1">
+        <a:scrgbClr r="0" g="0" b="0"/>
+      </a:fillRef>
+      <a:effectRef idx="0">
+        <a:scrgbClr r="0" g="0" b="0"/>
+      </a:effectRef>
+      <a:fontRef idx="minor"/>
+    </dgm:style>
+  </dgm:styleLbl>
+  <dgm:styleLbl name="trAlignAcc1">
+    <dgm:scene3d>
+      <a:camera prst="orthographicFront"/>
+      <a:lightRig rig="threePt" dir="t"/>
+    </dgm:scene3d>
+    <dgm:sp3d/>
+    <dgm:txPr/>
+    <dgm:style>
+      <a:lnRef idx="1">
+        <a:scrgbClr r="0" g="0" b="0"/>
+      </a:lnRef>
+      <a:fillRef idx="1">
+        <a:scrgbClr r="0" g="0" b="0"/>
+      </a:fillRef>
+      <a:effectRef idx="0">
+        <a:scrgbClr r="0" g="0" b="0"/>
+      </a:effectRef>
+      <a:fontRef idx="minor"/>
+    </dgm:style>
+  </dgm:styleLbl>
+  <dgm:styleLbl name="bgAcc1">
+    <dgm:scene3d>
+      <a:camera prst="orthographicFront"/>
+      <a:lightRig rig="threePt" dir="t"/>
+    </dgm:scene3d>
+    <dgm:sp3d/>
+    <dgm:txPr/>
+    <dgm:style>
+      <a:lnRef idx="2">
+        <a:scrgbClr r="0" g="0" b="0"/>
+      </a:lnRef>
+      <a:fillRef idx="1">
+        <a:scrgbClr r="0" g="0" b="0"/>
+      </a:fillRef>
+      <a:effectRef idx="0">
+        <a:scrgbClr r="0" g="0" b="0"/>
+      </a:effectRef>
+      <a:fontRef idx="minor"/>
+    </dgm:style>
+  </dgm:styleLbl>
+  <dgm:styleLbl name="solidFgAcc1">
+    <dgm:scene3d>
+      <a:camera prst="orthographicFront"/>
+      <a:lightRig rig="threePt" dir="t"/>
+    </dgm:scene3d>
+    <dgm:sp3d/>
+    <dgm:txPr/>
+    <dgm:style>
+      <a:lnRef idx="2">
+        <a:scrgbClr r="0" g="0" b="0"/>
+      </a:lnRef>
+      <a:fillRef idx="1">
+        <a:scrgbClr r="0" g="0" b="0"/>
+      </a:fillRef>
+      <a:effectRef idx="0">
+        <a:scrgbClr r="0" g="0" b="0"/>
+      </a:effectRef>
+      <a:fontRef idx="minor"/>
+    </dgm:style>
+  </dgm:styleLbl>
+  <dgm:styleLbl name="solidAlignAcc1">
+    <dgm:scene3d>
+      <a:camera prst="orthographicFront"/>
+      <a:lightRig rig="threePt" dir="t"/>
+    </dgm:scene3d>
+    <dgm:sp3d/>
+    <dgm:txPr/>
+    <dgm:style>
+      <a:lnRef idx="2">
+        <a:scrgbClr r="0" g="0" b="0"/>
+      </a:lnRef>
+      <a:fillRef idx="1">
+        <a:scrgbClr r="0" g="0" b="0"/>
+      </a:fillRef>
+      <a:effectRef idx="0">
+        <a:scrgbClr r="0" g="0" b="0"/>
+      </a:effectRef>
+      <a:fontRef idx="minor"/>
+    </dgm:style>
+  </dgm:styleLbl>
+  <dgm:styleLbl name="solidBgAcc1">
+    <dgm:scene3d>
+      <a:camera prst="orthographicFront"/>
+      <a:lightRig rig="threePt" dir="t"/>
+    </dgm:scene3d>
+    <dgm:sp3d/>
+    <dgm:txPr/>
+    <dgm:style>
+      <a:lnRef idx="2">
+        <a:scrgbClr r="0" g="0" b="0"/>
+      </a:lnRef>
+      <a:fillRef idx="1">
+        <a:scrgbClr r="0" g="0" b="0"/>
+      </a:fillRef>
+      <a:effectRef idx="0">
+        <a:scrgbClr r="0" g="0" b="0"/>
+      </a:effectRef>
+      <a:fontRef idx="minor"/>
+    </dgm:style>
+  </dgm:styleLbl>
+  <dgm:styleLbl name="fgAccFollowNode1">
+    <dgm:scene3d>
+      <a:camera prst="orthographicFront"/>
+      <a:lightRig rig="threePt" dir="t"/>
+    </dgm:scene3d>
+    <dgm:sp3d/>
+    <dgm:txPr/>
+    <dgm:style>
+      <a:lnRef idx="2">
+        <a:scrgbClr r="0" g="0" b="0"/>
+      </a:lnRef>
+      <a:fillRef idx="1">
+        <a:scrgbClr r="0" g="0" b="0"/>
+      </a:fillRef>
+      <a:effectRef idx="0">
+        <a:scrgbClr r="0" g="0" b="0"/>
+      </a:effectRef>
+      <a:fontRef idx="minor"/>
+    </dgm:style>
+  </dgm:styleLbl>
+  <dgm:styleLbl name="alignAccFollowNode1">
+    <dgm:scene3d>
+      <a:camera prst="orthographicFront"/>
+      <a:lightRig rig="threePt" dir="t"/>
+    </dgm:scene3d>
+    <dgm:sp3d/>
+    <dgm:txPr/>
+    <dgm:style>
+      <a:lnRef idx="2">
+        <a:scrgbClr r="0" g="0" b="0"/>
+      </a:lnRef>
+      <a:fillRef idx="1">
+        <a:scrgbClr r="0" g="0" b="0"/>
+      </a:fillRef>
+      <a:effectRef idx="0">
+        <a:scrgbClr r="0" g="0" b="0"/>
+      </a:effectRef>
+      <a:fontRef idx="minor"/>
+    </dgm:style>
+  </dgm:styleLbl>
+  <dgm:styleLbl name="bgAccFollowNode1">
+    <dgm:scene3d>
+      <a:camera prst="orthographicFront"/>
+      <a:lightRig rig="threePt" dir="t"/>
+    </dgm:scene3d>
+    <dgm:sp3d/>
+    <dgm:txPr/>
+    <dgm:style>
+      <a:lnRef idx="2">
+        <a:scrgbClr r="0" g="0" b="0"/>
+      </a:lnRef>
+      <a:fillRef idx="1">
+        <a:scrgbClr r="0" g="0" b="0"/>
+      </a:fillRef>
+      <a:effectRef idx="0">
+        <a:scrgbClr r="0" g="0" b="0"/>
+      </a:effectRef>
+      <a:fontRef idx="minor"/>
+    </dgm:style>
+  </dgm:styleLbl>
+  <dgm:styleLbl name="fgAcc0">
+    <dgm:scene3d>
+      <a:camera prst="orthographicFront"/>
+      <a:lightRig rig="threePt" dir="t"/>
+    </dgm:scene3d>
+    <dgm:sp3d/>
+    <dgm:txPr/>
+    <dgm:style>
+      <a:lnRef idx="2">
+        <a:scrgbClr r="0" g="0" b="0"/>
+      </a:lnRef>
+      <a:fillRef idx="1">
+        <a:scrgbClr r="0" g="0" b="0"/>
+      </a:fillRef>
+      <a:effectRef idx="0">
+        <a:scrgbClr r="0" g="0" b="0"/>
+      </a:effectRef>
+      <a:fontRef idx="minor"/>
+    </dgm:style>
+  </dgm:styleLbl>
+  <dgm:styleLbl name="fgAcc2">
+    <dgm:scene3d>
+      <a:camera prst="orthographicFront"/>
+      <a:lightRig rig="threePt" dir="t"/>
+    </dgm:scene3d>
+    <dgm:sp3d/>
+    <dgm:txPr/>
+    <dgm:style>
+      <a:lnRef idx="2">
+        <a:scrgbClr r="0" g="0" b="0"/>
+      </a:lnRef>
+      <a:fillRef idx="1">
+        <a:scrgbClr r="0" g="0" b="0"/>
+      </a:fillRef>
+      <a:effectRef idx="0">
+        <a:scrgbClr r="0" g="0" b="0"/>
+      </a:effectRef>
+      <a:fontRef idx="minor"/>
+    </dgm:style>
+  </dgm:styleLbl>
+  <dgm:styleLbl name="fgAcc3">
+    <dgm:scene3d>
+      <a:camera prst="orthographicFront"/>
+      <a:lightRig rig="threePt" dir="t"/>
+    </dgm:scene3d>
+    <dgm:sp3d/>
+    <dgm:txPr/>
+    <dgm:style>
+      <a:lnRef idx="2">
+        <a:scrgbClr r="0" g="0" b="0"/>
+      </a:lnRef>
+      <a:fillRef idx="1">
+        <a:scrgbClr r="0" g="0" b="0"/>
+      </a:fillRef>
+      <a:effectRef idx="0">
+        <a:scrgbClr r="0" g="0" b="0"/>
+      </a:effectRef>
+      <a:fontRef idx="minor"/>
+    </dgm:style>
+  </dgm:styleLbl>
+  <dgm:styleLbl name="fgAcc4">
+    <dgm:scene3d>
+      <a:camera prst="orthographicFront"/>
+      <a:lightRig rig="threePt" dir="t"/>
+    </dgm:scene3d>
+    <dgm:sp3d/>
+    <dgm:txPr/>
+    <dgm:style>
+      <a:lnRef idx="2">
+        <a:scrgbClr r="0" g="0" b="0"/>
+      </a:lnRef>
+      <a:fillRef idx="1">
+        <a:scrgbClr r="0" g="0" b="0"/>
+      </a:fillRef>
+      <a:effectRef idx="0">
+        <a:scrgbClr r="0" g="0" b="0"/>
+      </a:effectRef>
+      <a:fontRef idx="minor"/>
+    </dgm:style>
+  </dgm:styleLbl>
+  <dgm:styleLbl name="bgShp">
+    <dgm:scene3d>
+      <a:camera prst="orthographicFront"/>
+      <a:lightRig rig="threePt" dir="t"/>
+    </dgm:scene3d>
+    <dgm:sp3d/>
+    <dgm:txPr/>
+    <dgm:style>
+      <a:lnRef idx="0">
+        <a:scrgbClr r="0" g="0" b="0"/>
+      </a:lnRef>
+      <a:fillRef idx="1">
+        <a:scrgbClr r="0" g="0" b="0"/>
+      </a:fillRef>
+      <a:effectRef idx="0">
+        <a:scrgbClr r="0" g="0" b="0"/>
+      </a:effectRef>
+      <a:fontRef idx="minor"/>
+    </dgm:style>
+  </dgm:styleLbl>
+  <dgm:styleLbl name="dkBgShp">
+    <dgm:scene3d>
+      <a:camera prst="orthographicFront"/>
+      <a:lightRig rig="threePt" dir="t"/>
+    </dgm:scene3d>
+    <dgm:sp3d/>
+    <dgm:txPr/>
+    <dgm:style>
+      <a:lnRef idx="0">
+        <a:scrgbClr r="0" g="0" b="0"/>
+      </a:lnRef>
+      <a:fillRef idx="1">
+        <a:scrgbClr r="0" g="0" b="0"/>
+      </a:fillRef>
+      <a:effectRef idx="0">
+        <a:scrgbClr r="0" g="0" b="0"/>
+      </a:effectRef>
+      <a:fontRef idx="minor"/>
+    </dgm:style>
+  </dgm:styleLbl>
+  <dgm:styleLbl name="trBgShp">
+    <dgm:scene3d>
+      <a:camera prst="orthographicFront"/>
+      <a:lightRig rig="threePt" dir="t"/>
+    </dgm:scene3d>
+    <dgm:sp3d/>
+    <dgm:txPr/>
+    <dgm:style>
+      <a:lnRef idx="0">
+        <a:scrgbClr r="0" g="0" b="0"/>
+      </a:lnRef>
+      <a:fillRef idx="1">
+        <a:scrgbClr r="0" g="0" b="0"/>
+      </a:fillRef>
+      <a:effectRef idx="0">
+        <a:scrgbClr r="0" g="0" b="0"/>
+      </a:effectRef>
+      <a:fontRef idx="minor"/>
+    </dgm:style>
+  </dgm:styleLbl>
+  <dgm:styleLbl name="fgShp">
+    <dgm:scene3d>
+      <a:camera prst="orthographicFront"/>
+      <a:lightRig rig="threePt" dir="t"/>
+    </dgm:scene3d>
+    <dgm:sp3d/>
+    <dgm:txPr/>
+    <dgm:style>
+      <a:lnRef idx="2">
+        <a:scrgbClr r="0" g="0" b="0"/>
+      </a:lnRef>
+      <a:fillRef idx="1">
+        <a:scrgbClr r="0" g="0" b="0"/>
+      </a:fillRef>
+      <a:effectRef idx="0">
+        <a:scrgbClr r="0" g="0" b="0"/>
+      </a:effectRef>
+      <a:fontRef idx="minor"/>
+    </dgm:style>
+  </dgm:styleLbl>
+  <dgm:styleLbl name="revTx">
+    <dgm:scene3d>
+      <a:camera prst="orthographicFront"/>
+      <a:lightRig rig="threePt" dir="t"/>
+    </dgm:scene3d>
+    <dgm:sp3d/>
+    <dgm:txPr/>
+    <dgm:style>
+      <a:lnRef idx="0">
+        <a:scrgbClr r="0" g="0" b="0"/>
+      </a:lnRef>
+      <a:fillRef idx="0">
+        <a:scrgbClr r="0" g="0" b="0"/>
+      </a:fillRef>
+      <a:effectRef idx="0">
+        <a:scrgbClr r="0" g="0" b="0"/>
+      </a:effectRef>
+      <a:fontRef idx="minor"/>
+    </dgm:style>
+  </dgm:styleLbl>
+</dgm:styleDef>
 </file>
 
 <file path=ppt/notesMasters/notesMaster1.xml><?xml version="1.0" encoding="utf-8"?>
@@ -1272,6 +4464,262 @@
     <p:extLst>
       <p:ext uri="{BB962C8B-B14F-4D97-AF65-F5344CB8AC3E}">
         <p14:creationId xmlns:p14="http://schemas.microsoft.com/office/powerpoint/2010/main" val="1811139538"/>
+      </p:ext>
+    </p:extLst>
+  </p:cSld>
+  <p:clrMapOvr>
+    <a:masterClrMapping/>
+  </p:clrMapOvr>
+</p:notes>
+</file>
+
+<file path=ppt/notesSlides/notesSlide7.xml><?xml version="1.0" encoding="utf-8"?>
+<p:notes xmlns:a="http://schemas.openxmlformats.org/drawingml/2006/main" xmlns:r="http://schemas.openxmlformats.org/officeDocument/2006/relationships" xmlns:p="http://schemas.openxmlformats.org/presentationml/2006/main">
+  <p:cSld>
+    <p:spTree>
+      <p:nvGrpSpPr>
+        <p:cNvPr id="1" name=""/>
+        <p:cNvGrpSpPr/>
+        <p:nvPr/>
+      </p:nvGrpSpPr>
+      <p:grpSpPr>
+        <a:xfrm>
+          <a:off x="0" y="0"/>
+          <a:ext cx="0" cy="0"/>
+          <a:chOff x="0" y="0"/>
+          <a:chExt cx="0" cy="0"/>
+        </a:xfrm>
+      </p:grpSpPr>
+      <p:sp>
+        <p:nvSpPr>
+          <p:cNvPr id="2" name="Slide Image Placeholder 1"/>
+          <p:cNvSpPr>
+            <a:spLocks noGrp="1" noRot="1" noChangeAspect="1"/>
+          </p:cNvSpPr>
+          <p:nvPr>
+            <p:ph type="sldImg"/>
+          </p:nvPr>
+        </p:nvSpPr>
+        <p:spPr/>
+      </p:sp>
+      <p:sp>
+        <p:nvSpPr>
+          <p:cNvPr id="3" name="Notes Placeholder 2"/>
+          <p:cNvSpPr>
+            <a:spLocks noGrp="1"/>
+          </p:cNvSpPr>
+          <p:nvPr>
+            <p:ph type="body" idx="1"/>
+          </p:nvPr>
+        </p:nvSpPr>
+        <p:spPr/>
+        <p:txBody>
+          <a:bodyPr/>
+          <a:lstStyle/>
+          <a:p>
+            <a:r>
+              <a:rPr lang="en-US" dirty="0"/>
+              <a:t>Code developed from Barnett et al., (2020) Soil characteristics and land-use drive bacterial community assembly patterns (https://</a:t>
+            </a:r>
+            <a:r>
+              <a:rPr lang="en-US" dirty="0" err="1"/>
+              <a:t>github.com</a:t>
+            </a:r>
+            <a:r>
+              <a:rPr lang="en-US" dirty="0"/>
+              <a:t>/seb369/</a:t>
+            </a:r>
+            <a:r>
+              <a:rPr lang="en-US" dirty="0" err="1"/>
+              <a:t>landuse_comm_assembly</a:t>
+            </a:r>
+            <a:r>
+              <a:rPr lang="en-US" dirty="0"/>
+              <a:t>)</a:t>
+            </a:r>
+          </a:p>
+        </p:txBody>
+      </p:sp>
+      <p:sp>
+        <p:nvSpPr>
+          <p:cNvPr id="4" name="Slide Number Placeholder 3"/>
+          <p:cNvSpPr>
+            <a:spLocks noGrp="1"/>
+          </p:cNvSpPr>
+          <p:nvPr>
+            <p:ph type="sldNum" sz="quarter" idx="5"/>
+          </p:nvPr>
+        </p:nvSpPr>
+        <p:spPr/>
+        <p:txBody>
+          <a:bodyPr/>
+          <a:lstStyle/>
+          <a:p>
+            <a:fld id="{91AE2140-D502-214A-B76B-E0784B2C949B}" type="slidenum">
+              <a:rPr lang="en-US" smtClean="0"/>
+              <a:t>19</a:t>
+            </a:fld>
+            <a:endParaRPr lang="en-US"/>
+          </a:p>
+        </p:txBody>
+      </p:sp>
+    </p:spTree>
+    <p:extLst>
+      <p:ext uri="{BB962C8B-B14F-4D97-AF65-F5344CB8AC3E}">
+        <p14:creationId xmlns:p14="http://schemas.microsoft.com/office/powerpoint/2010/main" val="2263901205"/>
+      </p:ext>
+    </p:extLst>
+  </p:cSld>
+  <p:clrMapOvr>
+    <a:masterClrMapping/>
+  </p:clrMapOvr>
+</p:notes>
+</file>
+
+<file path=ppt/notesSlides/notesSlide8.xml><?xml version="1.0" encoding="utf-8"?>
+<p:notes xmlns:a="http://schemas.openxmlformats.org/drawingml/2006/main" xmlns:r="http://schemas.openxmlformats.org/officeDocument/2006/relationships" xmlns:p="http://schemas.openxmlformats.org/presentationml/2006/main">
+  <p:cSld>
+    <p:spTree>
+      <p:nvGrpSpPr>
+        <p:cNvPr id="1" name=""/>
+        <p:cNvGrpSpPr/>
+        <p:nvPr/>
+      </p:nvGrpSpPr>
+      <p:grpSpPr>
+        <a:xfrm>
+          <a:off x="0" y="0"/>
+          <a:ext cx="0" cy="0"/>
+          <a:chOff x="0" y="0"/>
+          <a:chExt cx="0" cy="0"/>
+        </a:xfrm>
+      </p:grpSpPr>
+      <p:sp>
+        <p:nvSpPr>
+          <p:cNvPr id="2" name="Slide Image Placeholder 1"/>
+          <p:cNvSpPr>
+            <a:spLocks noGrp="1" noRot="1" noChangeAspect="1"/>
+          </p:cNvSpPr>
+          <p:nvPr>
+            <p:ph type="sldImg"/>
+          </p:nvPr>
+        </p:nvSpPr>
+        <p:spPr/>
+      </p:sp>
+      <p:sp>
+        <p:nvSpPr>
+          <p:cNvPr id="3" name="Notes Placeholder 2"/>
+          <p:cNvSpPr>
+            <a:spLocks noGrp="1"/>
+          </p:cNvSpPr>
+          <p:nvPr>
+            <p:ph type="body" idx="1"/>
+          </p:nvPr>
+        </p:nvSpPr>
+        <p:spPr/>
+        <p:txBody>
+          <a:bodyPr/>
+          <a:lstStyle/>
+          <a:p>
+            <a:r>
+              <a:rPr lang="en-US" dirty="0"/>
+              <a:t>This is the result of the model fitting with the Sommers dataset (not reduced).</a:t>
+            </a:r>
+          </a:p>
+          <a:p>
+            <a:r>
+              <a:rPr lang="en-US" dirty="0"/>
+              <a:t>X axis = log mean relative abundances of each ASV</a:t>
+            </a:r>
+          </a:p>
+          <a:p>
+            <a:r>
+              <a:rPr lang="en-US" dirty="0"/>
+              <a:t>Y axis = mean occurrence frequency of each ASV </a:t>
+            </a:r>
+          </a:p>
+          <a:p>
+            <a:r>
+              <a:rPr lang="en-US" dirty="0"/>
+              <a:t>Points = observed log relative abundances against occurrence frequencies</a:t>
+            </a:r>
+          </a:p>
+          <a:p>
+            <a:r>
+              <a:rPr lang="en-US" dirty="0"/>
+              <a:t>Solid line = predicted log relative abundances plotted against occurrence frequencies</a:t>
+            </a:r>
+          </a:p>
+          <a:p>
+            <a:r>
+              <a:rPr lang="en-US" dirty="0"/>
+              <a:t>Dotted lines = 95% confidence intervals</a:t>
+            </a:r>
+          </a:p>
+          <a:p>
+            <a:endParaRPr lang="en-US" dirty="0"/>
+          </a:p>
+          <a:p>
+            <a:r>
+              <a:rPr lang="en-US" dirty="0"/>
+              <a:t>This allows us to assess to what degree observed community structure can be explained by stochastic processes within each sample.</a:t>
+            </a:r>
+          </a:p>
+          <a:p>
+            <a:r>
+              <a:rPr lang="en-US" dirty="0"/>
+              <a:t>The Sloan neutral model is applied here. This model does not take into account phylogenetic distance. </a:t>
+            </a:r>
+          </a:p>
+          <a:p>
+            <a:r>
+              <a:rPr lang="en-US" dirty="0"/>
+              <a:t>ASV occurrence frequency is explained as a function of ASV abundance within the metacommunity (i.e. the more abundant an ASV is in the metacommunity, the more frequently it will be detected in the local community by chance). </a:t>
+            </a:r>
+          </a:p>
+          <a:p>
+            <a:r>
+              <a:rPr lang="en-US" dirty="0"/>
+              <a:t>The neutral model performed well, explaining 77% of variation in ASV detection frequency with an estimated migration factor of 0.02 between sites.</a:t>
+            </a:r>
+          </a:p>
+          <a:p>
+            <a:r>
+              <a:rPr lang="en-US" dirty="0"/>
+              <a:t>These results suggest that </a:t>
+            </a:r>
+          </a:p>
+          <a:p>
+            <a:endParaRPr lang="en-US" dirty="0"/>
+          </a:p>
+        </p:txBody>
+      </p:sp>
+      <p:sp>
+        <p:nvSpPr>
+          <p:cNvPr id="4" name="Slide Number Placeholder 3"/>
+          <p:cNvSpPr>
+            <a:spLocks noGrp="1"/>
+          </p:cNvSpPr>
+          <p:nvPr>
+            <p:ph type="sldNum" sz="quarter" idx="5"/>
+          </p:nvPr>
+        </p:nvSpPr>
+        <p:spPr/>
+        <p:txBody>
+          <a:bodyPr/>
+          <a:lstStyle/>
+          <a:p>
+            <a:fld id="{91AE2140-D502-214A-B76B-E0784B2C949B}" type="slidenum">
+              <a:rPr lang="en-US" smtClean="0"/>
+              <a:t>20</a:t>
+            </a:fld>
+            <a:endParaRPr lang="en-US"/>
+          </a:p>
+        </p:txBody>
+      </p:sp>
+    </p:spTree>
+    <p:extLst>
+      <p:ext uri="{BB962C8B-B14F-4D97-AF65-F5344CB8AC3E}">
+        <p14:creationId xmlns:p14="http://schemas.microsoft.com/office/powerpoint/2010/main" val="1669585764"/>
       </p:ext>
     </p:extLst>
   </p:cSld>
@@ -6390,7 +9838,7 @@
           <p:cNvPr id="2" name="Title 1">
             <a:extLst>
               <a:ext uri="{FF2B5EF4-FFF2-40B4-BE49-F238E27FC236}">
-                <a16:creationId xmlns:a16="http://schemas.microsoft.com/office/drawing/2014/main" id="{C1C65F0F-7C96-DA4F-BD8F-8C9975EFAB82}"/>
+                <a16:creationId xmlns:a16="http://schemas.microsoft.com/office/drawing/2014/main" id="{FA2666F3-51C2-4741-B321-B1E35D0FA677}"/>
               </a:ext>
             </a:extLst>
           </p:cNvPr>
@@ -6408,17 +9856,45 @@
           <a:p>
             <a:r>
               <a:rPr lang="en-US" dirty="0"/>
-              <a:t>Co-Occurrence Network Analysis</a:t>
-            </a:r>
-          </a:p>
-        </p:txBody>
-      </p:sp>
-      <p:sp>
-        <p:nvSpPr>
-          <p:cNvPr id="3" name="Content Placeholder 2">
-            <a:extLst>
-              <a:ext uri="{FF2B5EF4-FFF2-40B4-BE49-F238E27FC236}">
-                <a16:creationId xmlns:a16="http://schemas.microsoft.com/office/drawing/2014/main" id="{958C73FE-1CD3-9D4C-8447-A79ED529B7A0}"/>
+              <a:t>Code</a:t>
+            </a:r>
+          </a:p>
+        </p:txBody>
+      </p:sp>
+      <p:graphicFrame>
+        <p:nvGraphicFramePr>
+          <p:cNvPr id="4" name="Diagram 3">
+            <a:extLst>
+              <a:ext uri="{FF2B5EF4-FFF2-40B4-BE49-F238E27FC236}">
+                <a16:creationId xmlns:a16="http://schemas.microsoft.com/office/drawing/2014/main" id="{B2B24C83-F06A-6B49-8844-40109AFE847B}"/>
+              </a:ext>
+            </a:extLst>
+          </p:cNvPr>
+          <p:cNvGraphicFramePr/>
+          <p:nvPr>
+            <p:extLst>
+              <p:ext uri="{D42A27DB-BD31-4B8C-83A1-F6EECF244321}">
+                <p14:modId xmlns:p14="http://schemas.microsoft.com/office/powerpoint/2010/main" val="755050813"/>
+              </p:ext>
+            </p:extLst>
+          </p:nvPr>
+        </p:nvGraphicFramePr>
+        <p:xfrm>
+          <a:off x="3200400" y="623359"/>
+          <a:ext cx="8458200" cy="5418667"/>
+        </p:xfrm>
+        <a:graphic>
+          <a:graphicData uri="http://schemas.openxmlformats.org/drawingml/2006/diagram">
+            <dgm:relIds xmlns:dgm="http://schemas.openxmlformats.org/drawingml/2006/diagram" xmlns:r="http://schemas.openxmlformats.org/officeDocument/2006/relationships" r:dm="rId3" r:lo="rId4" r:qs="rId5" r:cs="rId6"/>
+          </a:graphicData>
+        </a:graphic>
+      </p:graphicFrame>
+      <p:sp>
+        <p:nvSpPr>
+          <p:cNvPr id="5" name="Content Placeholder 2">
+            <a:extLst>
+              <a:ext uri="{FF2B5EF4-FFF2-40B4-BE49-F238E27FC236}">
+                <a16:creationId xmlns:a16="http://schemas.microsoft.com/office/drawing/2014/main" id="{79118AC9-2DCE-9E4F-A300-E8EC5CD657BC}"/>
               </a:ext>
             </a:extLst>
           </p:cNvPr>
@@ -6429,19 +9905,259 @@
             <p:ph idx="1"/>
           </p:nvPr>
         </p:nvSpPr>
-        <p:spPr/>
-        <p:txBody>
-          <a:bodyPr/>
+        <p:spPr>
+          <a:xfrm>
+            <a:off x="838200" y="1562101"/>
+            <a:ext cx="1804988" cy="4351338"/>
+          </a:xfrm>
+        </p:spPr>
+        <p:txBody>
+          <a:bodyPr>
+            <a:normAutofit fontScale="92500" lnSpcReduction="10000"/>
+          </a:bodyPr>
           <a:lstStyle/>
           <a:p>
-            <a:endParaRPr lang="en-US"/>
+            <a:pPr marL="0" indent="0">
+              <a:buNone/>
+            </a:pPr>
+            <a:r>
+              <a:rPr lang="en-US" sz="1600" b="1" dirty="0"/>
+              <a:t>Packages</a:t>
+            </a:r>
+          </a:p>
+          <a:p>
+            <a:pPr marL="0" indent="0">
+              <a:buNone/>
+            </a:pPr>
+            <a:r>
+              <a:rPr lang="en-US" sz="1600" dirty="0"/>
+              <a:t>library(</a:t>
+            </a:r>
+            <a:r>
+              <a:rPr lang="en-US" sz="1600" dirty="0" err="1"/>
+              <a:t>dplyr</a:t>
+            </a:r>
+            <a:r>
+              <a:rPr lang="en-US" sz="1600" dirty="0"/>
+              <a:t>)</a:t>
+            </a:r>
+          </a:p>
+          <a:p>
+            <a:pPr marL="0" indent="0">
+              <a:buNone/>
+            </a:pPr>
+            <a:r>
+              <a:rPr lang="en-US" sz="1600" dirty="0"/>
+              <a:t>library(</a:t>
+            </a:r>
+            <a:r>
+              <a:rPr lang="en-US" sz="1600" dirty="0" err="1"/>
+              <a:t>tibble</a:t>
+            </a:r>
+            <a:r>
+              <a:rPr lang="en-US" sz="1600" dirty="0"/>
+              <a:t>)</a:t>
+            </a:r>
+          </a:p>
+          <a:p>
+            <a:pPr marL="0" indent="0">
+              <a:buNone/>
+            </a:pPr>
+            <a:r>
+              <a:rPr lang="en-US" sz="1600" dirty="0"/>
+              <a:t>library(</a:t>
+            </a:r>
+            <a:r>
+              <a:rPr lang="en-US" sz="1600" dirty="0" err="1"/>
+              <a:t>phyloseq</a:t>
+            </a:r>
+            <a:r>
+              <a:rPr lang="en-US" sz="1600" dirty="0"/>
+              <a:t>)</a:t>
+            </a:r>
+          </a:p>
+          <a:p>
+            <a:pPr marL="0" indent="0">
+              <a:buNone/>
+            </a:pPr>
+            <a:r>
+              <a:rPr lang="en-US" sz="1600" dirty="0"/>
+              <a:t>library(ape)</a:t>
+            </a:r>
+          </a:p>
+          <a:p>
+            <a:pPr marL="0" indent="0">
+              <a:buNone/>
+            </a:pPr>
+            <a:r>
+              <a:rPr lang="en-US" sz="1600" dirty="0"/>
+              <a:t>library(vegan)</a:t>
+            </a:r>
+          </a:p>
+          <a:p>
+            <a:pPr marL="0" indent="0">
+              <a:buNone/>
+            </a:pPr>
+            <a:r>
+              <a:rPr lang="en-US" sz="1600" dirty="0"/>
+              <a:t>library(FSA)</a:t>
+            </a:r>
+          </a:p>
+          <a:p>
+            <a:pPr marL="0" indent="0">
+              <a:buNone/>
+            </a:pPr>
+            <a:r>
+              <a:rPr lang="en-US" sz="1600" dirty="0"/>
+              <a:t>library(</a:t>
+            </a:r>
+            <a:r>
+              <a:rPr lang="en-US" sz="1600" dirty="0" err="1"/>
+              <a:t>eulerr</a:t>
+            </a:r>
+            <a:r>
+              <a:rPr lang="en-US" sz="1600" dirty="0"/>
+              <a:t>)</a:t>
+            </a:r>
+          </a:p>
+          <a:p>
+            <a:pPr marL="0" indent="0">
+              <a:buNone/>
+            </a:pPr>
+            <a:r>
+              <a:rPr lang="en-US" sz="1600" dirty="0"/>
+              <a:t>library(</a:t>
+            </a:r>
+            <a:r>
+              <a:rPr lang="en-US" sz="1600" dirty="0" err="1"/>
+              <a:t>minpack.lm</a:t>
+            </a:r>
+            <a:r>
+              <a:rPr lang="en-US" sz="1600" dirty="0"/>
+              <a:t>)</a:t>
+            </a:r>
+          </a:p>
+          <a:p>
+            <a:pPr marL="0" indent="0">
+              <a:buNone/>
+            </a:pPr>
+            <a:r>
+              <a:rPr lang="en-US" sz="1600" dirty="0"/>
+              <a:t>library(</a:t>
+            </a:r>
+            <a:r>
+              <a:rPr lang="en-US" sz="1600" dirty="0" err="1"/>
+              <a:t>Hmisc</a:t>
+            </a:r>
+            <a:r>
+              <a:rPr lang="en-US" sz="1600" dirty="0"/>
+              <a:t>)</a:t>
+            </a:r>
+          </a:p>
+          <a:p>
+            <a:pPr marL="0" indent="0">
+              <a:buNone/>
+            </a:pPr>
+            <a:r>
+              <a:rPr lang="en-US" sz="1600" dirty="0"/>
+              <a:t>library(stats4)</a:t>
+            </a:r>
+          </a:p>
+          <a:p>
+            <a:pPr marL="0" indent="0">
+              <a:buNone/>
+            </a:pPr>
+            <a:r>
+              <a:rPr lang="en-US" sz="1600" dirty="0"/>
+              <a:t>library(ggplot2)</a:t>
+            </a:r>
+          </a:p>
+          <a:p>
+            <a:pPr marL="0" indent="0">
+              <a:buNone/>
+            </a:pPr>
+            <a:r>
+              <a:rPr lang="en-US" sz="1600" dirty="0"/>
+              <a:t>library(grid)</a:t>
+            </a:r>
+          </a:p>
+          <a:p>
+            <a:pPr marL="0" indent="0">
+              <a:buNone/>
+            </a:pPr>
+            <a:r>
+              <a:rPr lang="en-US" sz="1600" dirty="0"/>
+              <a:t>library(</a:t>
+            </a:r>
+            <a:r>
+              <a:rPr lang="en-US" sz="1600" dirty="0" err="1"/>
+              <a:t>gridExtra</a:t>
+            </a:r>
+            <a:r>
+              <a:rPr lang="en-US" sz="1600" dirty="0"/>
+              <a:t>)</a:t>
+            </a:r>
+          </a:p>
+          <a:p>
+            <a:endParaRPr lang="en-US" sz="1600" dirty="0"/>
+          </a:p>
+        </p:txBody>
+      </p:sp>
+      <p:sp>
+        <p:nvSpPr>
+          <p:cNvPr id="6" name="TextBox 5">
+            <a:extLst>
+              <a:ext uri="{FF2B5EF4-FFF2-40B4-BE49-F238E27FC236}">
+                <a16:creationId xmlns:a16="http://schemas.microsoft.com/office/drawing/2014/main" id="{FD3270B5-31FF-0647-B915-EE3334BD49A7}"/>
+              </a:ext>
+            </a:extLst>
+          </p:cNvPr>
+          <p:cNvSpPr txBox="1"/>
+          <p:nvPr/>
+        </p:nvSpPr>
+        <p:spPr>
+          <a:xfrm>
+            <a:off x="1181100" y="6186488"/>
+            <a:ext cx="9829800" cy="523220"/>
+          </a:xfrm>
+          <a:prstGeom prst="rect">
+            <a:avLst/>
+          </a:prstGeom>
+          <a:noFill/>
+        </p:spPr>
+        <p:txBody>
+          <a:bodyPr wrap="square" rtlCol="0">
+            <a:spAutoFit/>
+          </a:bodyPr>
+          <a:lstStyle/>
+          <a:p>
+            <a:r>
+              <a:rPr lang="en-US" sz="1400" dirty="0"/>
+              <a:t>Code developed from Barnett et al., (2020) Soil characteristics and land-use drive bacterial community assembly patterns (https://</a:t>
+            </a:r>
+            <a:r>
+              <a:rPr lang="en-US" sz="1400" dirty="0" err="1"/>
+              <a:t>github.com</a:t>
+            </a:r>
+            <a:r>
+              <a:rPr lang="en-US" sz="1400" dirty="0"/>
+              <a:t>/seb369/</a:t>
+            </a:r>
+            <a:r>
+              <a:rPr lang="en-US" sz="1400" dirty="0" err="1"/>
+              <a:t>landuse_comm_assembly</a:t>
+            </a:r>
+            <a:r>
+              <a:rPr lang="en-US" sz="1400" dirty="0"/>
+              <a:t>)</a:t>
+            </a:r>
           </a:p>
         </p:txBody>
       </p:sp>
     </p:spTree>
     <p:extLst>
       <p:ext uri="{BB962C8B-B14F-4D97-AF65-F5344CB8AC3E}">
-        <p14:creationId xmlns:p14="http://schemas.microsoft.com/office/powerpoint/2010/main" val="1804698877"/>
+        <p14:creationId xmlns:p14="http://schemas.microsoft.com/office/powerpoint/2010/main" val="1160375881"/>
       </p:ext>
     </p:extLst>
   </p:cSld>
@@ -6555,6 +10271,177 @@
     <p:extLst>
       <p:ext uri="{BB962C8B-B14F-4D97-AF65-F5344CB8AC3E}">
         <p14:creationId xmlns:p14="http://schemas.microsoft.com/office/powerpoint/2010/main" val="4079415005"/>
+      </p:ext>
+    </p:extLst>
+  </p:cSld>
+  <p:clrMapOvr>
+    <a:masterClrMapping/>
+  </p:clrMapOvr>
+</p:sld>
+</file>
+
+<file path=ppt/slides/slide20.xml><?xml version="1.0" encoding="utf-8"?>
+<p:sld xmlns:a="http://schemas.openxmlformats.org/drawingml/2006/main" xmlns:r="http://schemas.openxmlformats.org/officeDocument/2006/relationships" xmlns:p="http://schemas.openxmlformats.org/presentationml/2006/main">
+  <p:cSld>
+    <p:spTree>
+      <p:nvGrpSpPr>
+        <p:cNvPr id="1" name=""/>
+        <p:cNvGrpSpPr/>
+        <p:nvPr/>
+      </p:nvGrpSpPr>
+      <p:grpSpPr>
+        <a:xfrm>
+          <a:off x="0" y="0"/>
+          <a:ext cx="0" cy="0"/>
+          <a:chOff x="0" y="0"/>
+          <a:chExt cx="0" cy="0"/>
+        </a:xfrm>
+      </p:grpSpPr>
+      <p:pic>
+        <p:nvPicPr>
+          <p:cNvPr id="5" name="Picture 4">
+            <a:extLst>
+              <a:ext uri="{FF2B5EF4-FFF2-40B4-BE49-F238E27FC236}">
+                <a16:creationId xmlns:a16="http://schemas.microsoft.com/office/drawing/2014/main" id="{B29D4884-8744-C041-9173-CD555FAD40F8}"/>
+              </a:ext>
+            </a:extLst>
+          </p:cNvPr>
+          <p:cNvPicPr>
+            <a:picLocks noChangeAspect="1"/>
+          </p:cNvPicPr>
+          <p:nvPr/>
+        </p:nvPicPr>
+        <p:blipFill>
+          <a:blip r:embed="rId3"/>
+          <a:stretch>
+            <a:fillRect/>
+          </a:stretch>
+        </p:blipFill>
+        <p:spPr>
+          <a:xfrm>
+            <a:off x="2059778" y="1027906"/>
+            <a:ext cx="8327233" cy="5551488"/>
+          </a:xfrm>
+          <a:prstGeom prst="rect">
+            <a:avLst/>
+          </a:prstGeom>
+        </p:spPr>
+      </p:pic>
+      <p:sp>
+        <p:nvSpPr>
+          <p:cNvPr id="2" name="Title 1">
+            <a:extLst>
+              <a:ext uri="{FF2B5EF4-FFF2-40B4-BE49-F238E27FC236}">
+                <a16:creationId xmlns:a16="http://schemas.microsoft.com/office/drawing/2014/main" id="{D33FD964-3202-A846-A157-C84F553A5A37}"/>
+              </a:ext>
+            </a:extLst>
+          </p:cNvPr>
+          <p:cNvSpPr>
+            <a:spLocks noGrp="1"/>
+          </p:cNvSpPr>
+          <p:nvPr>
+            <p:ph type="title"/>
+          </p:nvPr>
+        </p:nvSpPr>
+        <p:spPr/>
+        <p:txBody>
+          <a:bodyPr/>
+          <a:lstStyle/>
+          <a:p>
+            <a:r>
+              <a:rPr lang="en-US" dirty="0"/>
+              <a:t>Results</a:t>
+            </a:r>
+          </a:p>
+        </p:txBody>
+      </p:sp>
+    </p:spTree>
+    <p:extLst>
+      <p:ext uri="{BB962C8B-B14F-4D97-AF65-F5344CB8AC3E}">
+        <p14:creationId xmlns:p14="http://schemas.microsoft.com/office/powerpoint/2010/main" val="966227120"/>
+      </p:ext>
+    </p:extLst>
+  </p:cSld>
+  <p:clrMapOvr>
+    <a:masterClrMapping/>
+  </p:clrMapOvr>
+</p:sld>
+</file>
+
+<file path=ppt/slides/slide21.xml><?xml version="1.0" encoding="utf-8"?>
+<p:sld xmlns:a="http://schemas.openxmlformats.org/drawingml/2006/main" xmlns:r="http://schemas.openxmlformats.org/officeDocument/2006/relationships" xmlns:p="http://schemas.openxmlformats.org/presentationml/2006/main">
+  <p:cSld>
+    <p:spTree>
+      <p:nvGrpSpPr>
+        <p:cNvPr id="1" name=""/>
+        <p:cNvGrpSpPr/>
+        <p:nvPr/>
+      </p:nvGrpSpPr>
+      <p:grpSpPr>
+        <a:xfrm>
+          <a:off x="0" y="0"/>
+          <a:ext cx="0" cy="0"/>
+          <a:chOff x="0" y="0"/>
+          <a:chExt cx="0" cy="0"/>
+        </a:xfrm>
+      </p:grpSpPr>
+      <p:sp>
+        <p:nvSpPr>
+          <p:cNvPr id="2" name="Title 1">
+            <a:extLst>
+              <a:ext uri="{FF2B5EF4-FFF2-40B4-BE49-F238E27FC236}">
+                <a16:creationId xmlns:a16="http://schemas.microsoft.com/office/drawing/2014/main" id="{C1C65F0F-7C96-DA4F-BD8F-8C9975EFAB82}"/>
+              </a:ext>
+            </a:extLst>
+          </p:cNvPr>
+          <p:cNvSpPr>
+            <a:spLocks noGrp="1"/>
+          </p:cNvSpPr>
+          <p:nvPr>
+            <p:ph type="title"/>
+          </p:nvPr>
+        </p:nvSpPr>
+        <p:spPr/>
+        <p:txBody>
+          <a:bodyPr/>
+          <a:lstStyle/>
+          <a:p>
+            <a:r>
+              <a:rPr lang="en-US" dirty="0"/>
+              <a:t>Co-Occurrence Network Analysis</a:t>
+            </a:r>
+          </a:p>
+        </p:txBody>
+      </p:sp>
+      <p:sp>
+        <p:nvSpPr>
+          <p:cNvPr id="3" name="Content Placeholder 2">
+            <a:extLst>
+              <a:ext uri="{FF2B5EF4-FFF2-40B4-BE49-F238E27FC236}">
+                <a16:creationId xmlns:a16="http://schemas.microsoft.com/office/drawing/2014/main" id="{958C73FE-1CD3-9D4C-8447-A79ED529B7A0}"/>
+              </a:ext>
+            </a:extLst>
+          </p:cNvPr>
+          <p:cNvSpPr>
+            <a:spLocks noGrp="1"/>
+          </p:cNvSpPr>
+          <p:nvPr>
+            <p:ph idx="1"/>
+          </p:nvPr>
+        </p:nvSpPr>
+        <p:spPr/>
+        <p:txBody>
+          <a:bodyPr/>
+          <a:lstStyle/>
+          <a:p>
+            <a:endParaRPr lang="en-US"/>
+          </a:p>
+        </p:txBody>
+      </p:sp>
+    </p:spTree>
+    <p:extLst>
+      <p:ext uri="{BB962C8B-B14F-4D97-AF65-F5344CB8AC3E}">
+        <p14:creationId xmlns:p14="http://schemas.microsoft.com/office/powerpoint/2010/main" val="1804698877"/>
       </p:ext>
     </p:extLst>
   </p:cSld>

--- a/Projects/Chapter1/community-assembly.pptx
+++ b/Projects/Chapter1/community-assembly.pptx
@@ -9,7 +9,7 @@
   </p:notesMasterIdLst>
   <p:sldIdLst>
     <p:sldId id="256" r:id="rId2"/>
-    <p:sldId id="257" r:id="rId3"/>
+    <p:sldId id="279" r:id="rId3"/>
     <p:sldId id="264" r:id="rId4"/>
     <p:sldId id="268" r:id="rId5"/>
     <p:sldId id="269" r:id="rId6"/>
@@ -136,6 +136,788 @@
 </file>
 
 <file path=ppt/diagrams/colors1.xml><?xml version="1.0" encoding="utf-8"?>
+<dgm:colorsDef xmlns:dgm="http://schemas.openxmlformats.org/drawingml/2006/diagram" xmlns:a="http://schemas.openxmlformats.org/drawingml/2006/main" uniqueId="urn:microsoft.com/office/officeart/2005/8/colors/colorful4">
+  <dgm:title val=""/>
+  <dgm:desc val=""/>
+  <dgm:catLst>
+    <dgm:cat type="colorful" pri="10400"/>
+  </dgm:catLst>
+  <dgm:styleLbl name="node0">
+    <dgm:fillClrLst meth="repeat">
+      <a:schemeClr val="accent3"/>
+    </dgm:fillClrLst>
+    <dgm:linClrLst meth="repeat">
+      <a:schemeClr val="lt1"/>
+    </dgm:linClrLst>
+    <dgm:effectClrLst/>
+    <dgm:txLinClrLst/>
+    <dgm:txFillClrLst/>
+    <dgm:txEffectClrLst/>
+  </dgm:styleLbl>
+  <dgm:styleLbl name="node1">
+    <dgm:fillClrLst>
+      <a:schemeClr val="accent4"/>
+      <a:schemeClr val="accent5"/>
+    </dgm:fillClrLst>
+    <dgm:linClrLst meth="repeat">
+      <a:schemeClr val="lt1"/>
+    </dgm:linClrLst>
+    <dgm:effectClrLst/>
+    <dgm:txLinClrLst/>
+    <dgm:txFillClrLst/>
+    <dgm:txEffectClrLst/>
+  </dgm:styleLbl>
+  <dgm:styleLbl name="alignNode1">
+    <dgm:fillClrLst>
+      <a:schemeClr val="accent4"/>
+      <a:schemeClr val="accent5"/>
+    </dgm:fillClrLst>
+    <dgm:linClrLst>
+      <a:schemeClr val="accent4"/>
+      <a:schemeClr val="accent5"/>
+    </dgm:linClrLst>
+    <dgm:effectClrLst/>
+    <dgm:txLinClrLst/>
+    <dgm:txFillClrLst/>
+    <dgm:txEffectClrLst/>
+  </dgm:styleLbl>
+  <dgm:styleLbl name="lnNode1">
+    <dgm:fillClrLst>
+      <a:schemeClr val="accent4"/>
+      <a:schemeClr val="accent5"/>
+    </dgm:fillClrLst>
+    <dgm:linClrLst meth="repeat">
+      <a:schemeClr val="lt1"/>
+    </dgm:linClrLst>
+    <dgm:effectClrLst/>
+    <dgm:txLinClrLst/>
+    <dgm:txFillClrLst/>
+    <dgm:txEffectClrLst/>
+  </dgm:styleLbl>
+  <dgm:styleLbl name="vennNode1">
+    <dgm:fillClrLst>
+      <a:schemeClr val="accent4">
+        <a:alpha val="50000"/>
+      </a:schemeClr>
+      <a:schemeClr val="accent5">
+        <a:alpha val="50000"/>
+      </a:schemeClr>
+    </dgm:fillClrLst>
+    <dgm:linClrLst meth="repeat">
+      <a:schemeClr val="lt1"/>
+    </dgm:linClrLst>
+    <dgm:effectClrLst/>
+    <dgm:txLinClrLst/>
+    <dgm:txFillClrLst/>
+    <dgm:txEffectClrLst/>
+  </dgm:styleLbl>
+  <dgm:styleLbl name="node2">
+    <dgm:fillClrLst>
+      <a:schemeClr val="accent5"/>
+    </dgm:fillClrLst>
+    <dgm:linClrLst meth="repeat">
+      <a:schemeClr val="lt1"/>
+    </dgm:linClrLst>
+    <dgm:effectClrLst/>
+    <dgm:txLinClrLst/>
+    <dgm:txFillClrLst/>
+    <dgm:txEffectClrLst/>
+  </dgm:styleLbl>
+  <dgm:styleLbl name="node3">
+    <dgm:fillClrLst>
+      <a:schemeClr val="accent6"/>
+    </dgm:fillClrLst>
+    <dgm:linClrLst meth="repeat">
+      <a:schemeClr val="lt1"/>
+    </dgm:linClrLst>
+    <dgm:effectClrLst/>
+    <dgm:txLinClrLst/>
+    <dgm:txFillClrLst/>
+    <dgm:txEffectClrLst/>
+  </dgm:styleLbl>
+  <dgm:styleLbl name="node4">
+    <dgm:fillClrLst>
+      <a:schemeClr val="accent1"/>
+    </dgm:fillClrLst>
+    <dgm:linClrLst meth="repeat">
+      <a:schemeClr val="lt1"/>
+    </dgm:linClrLst>
+    <dgm:effectClrLst/>
+    <dgm:txLinClrLst/>
+    <dgm:txFillClrLst/>
+    <dgm:txEffectClrLst/>
+  </dgm:styleLbl>
+  <dgm:styleLbl name="fgImgPlace1">
+    <dgm:fillClrLst>
+      <a:schemeClr val="accent4">
+        <a:tint val="50000"/>
+      </a:schemeClr>
+      <a:schemeClr val="accent5">
+        <a:tint val="50000"/>
+      </a:schemeClr>
+    </dgm:fillClrLst>
+    <dgm:linClrLst meth="repeat">
+      <a:schemeClr val="lt1"/>
+    </dgm:linClrLst>
+    <dgm:effectClrLst/>
+    <dgm:txLinClrLst/>
+    <dgm:txFillClrLst meth="repeat">
+      <a:schemeClr val="lt1"/>
+    </dgm:txFillClrLst>
+    <dgm:txEffectClrLst/>
+  </dgm:styleLbl>
+  <dgm:styleLbl name="alignImgPlace1">
+    <dgm:fillClrLst>
+      <a:schemeClr val="accent4">
+        <a:tint val="50000"/>
+      </a:schemeClr>
+      <a:schemeClr val="accent5">
+        <a:tint val="20000"/>
+      </a:schemeClr>
+    </dgm:fillClrLst>
+    <dgm:linClrLst meth="repeat">
+      <a:schemeClr val="lt1"/>
+    </dgm:linClrLst>
+    <dgm:effectClrLst/>
+    <dgm:txLinClrLst/>
+    <dgm:txFillClrLst meth="repeat">
+      <a:schemeClr val="lt1"/>
+    </dgm:txFillClrLst>
+    <dgm:txEffectClrLst/>
+  </dgm:styleLbl>
+  <dgm:styleLbl name="bgImgPlace1">
+    <dgm:fillClrLst>
+      <a:schemeClr val="accent4">
+        <a:tint val="50000"/>
+      </a:schemeClr>
+      <a:schemeClr val="accent5">
+        <a:tint val="20000"/>
+      </a:schemeClr>
+    </dgm:fillClrLst>
+    <dgm:linClrLst meth="repeat">
+      <a:schemeClr val="lt1"/>
+    </dgm:linClrLst>
+    <dgm:effectClrLst/>
+    <dgm:txLinClrLst/>
+    <dgm:txFillClrLst meth="repeat">
+      <a:schemeClr val="lt1"/>
+    </dgm:txFillClrLst>
+    <dgm:txEffectClrLst/>
+  </dgm:styleLbl>
+  <dgm:styleLbl name="sibTrans2D1">
+    <dgm:fillClrLst>
+      <a:schemeClr val="accent4"/>
+      <a:schemeClr val="accent5"/>
+    </dgm:fillClrLst>
+    <dgm:linClrLst meth="repeat">
+      <a:schemeClr val="lt1"/>
+    </dgm:linClrLst>
+    <dgm:effectClrLst/>
+    <dgm:txLinClrLst/>
+    <dgm:txFillClrLst/>
+    <dgm:txEffectClrLst/>
+  </dgm:styleLbl>
+  <dgm:styleLbl name="fgSibTrans2D1">
+    <dgm:fillClrLst>
+      <a:schemeClr val="accent4"/>
+      <a:schemeClr val="accent5"/>
+    </dgm:fillClrLst>
+    <dgm:linClrLst meth="repeat">
+      <a:schemeClr val="lt1"/>
+    </dgm:linClrLst>
+    <dgm:effectClrLst/>
+    <dgm:txLinClrLst/>
+    <dgm:txFillClrLst meth="repeat">
+      <a:schemeClr val="lt1"/>
+    </dgm:txFillClrLst>
+    <dgm:txEffectClrLst/>
+  </dgm:styleLbl>
+  <dgm:styleLbl name="bgSibTrans2D1">
+    <dgm:fillClrLst>
+      <a:schemeClr val="accent4"/>
+      <a:schemeClr val="accent5"/>
+    </dgm:fillClrLst>
+    <dgm:linClrLst meth="repeat">
+      <a:schemeClr val="lt1"/>
+    </dgm:linClrLst>
+    <dgm:effectClrLst/>
+    <dgm:txLinClrLst/>
+    <dgm:txFillClrLst meth="repeat">
+      <a:schemeClr val="lt1"/>
+    </dgm:txFillClrLst>
+    <dgm:txEffectClrLst/>
+  </dgm:styleLbl>
+  <dgm:styleLbl name="sibTrans1D1">
+    <dgm:fillClrLst/>
+    <dgm:linClrLst>
+      <a:schemeClr val="accent4"/>
+      <a:schemeClr val="accent5"/>
+    </dgm:linClrLst>
+    <dgm:effectClrLst/>
+    <dgm:txLinClrLst/>
+    <dgm:txFillClrLst meth="repeat">
+      <a:schemeClr val="tx1"/>
+    </dgm:txFillClrLst>
+    <dgm:txEffectClrLst/>
+  </dgm:styleLbl>
+  <dgm:styleLbl name="callout">
+    <dgm:fillClrLst meth="repeat">
+      <a:schemeClr val="accent4"/>
+    </dgm:fillClrLst>
+    <dgm:linClrLst meth="repeat">
+      <a:schemeClr val="accent4">
+        <a:tint val="50000"/>
+      </a:schemeClr>
+    </dgm:linClrLst>
+    <dgm:effectClrLst/>
+    <dgm:txLinClrLst/>
+    <dgm:txFillClrLst meth="repeat">
+      <a:schemeClr val="tx1"/>
+    </dgm:txFillClrLst>
+    <dgm:txEffectClrLst/>
+  </dgm:styleLbl>
+  <dgm:styleLbl name="asst0">
+    <dgm:fillClrLst meth="repeat">
+      <a:schemeClr val="accent4"/>
+    </dgm:fillClrLst>
+    <dgm:linClrLst meth="repeat">
+      <a:schemeClr val="lt1">
+        <a:shade val="80000"/>
+      </a:schemeClr>
+    </dgm:linClrLst>
+    <dgm:effectClrLst/>
+    <dgm:txLinClrLst/>
+    <dgm:txFillClrLst/>
+    <dgm:txEffectClrLst/>
+  </dgm:styleLbl>
+  <dgm:styleLbl name="asst1">
+    <dgm:fillClrLst meth="repeat">
+      <a:schemeClr val="accent5"/>
+    </dgm:fillClrLst>
+    <dgm:linClrLst meth="repeat">
+      <a:schemeClr val="lt1">
+        <a:shade val="80000"/>
+      </a:schemeClr>
+    </dgm:linClrLst>
+    <dgm:effectClrLst/>
+    <dgm:txLinClrLst/>
+    <dgm:txFillClrLst/>
+    <dgm:txEffectClrLst/>
+  </dgm:styleLbl>
+  <dgm:styleLbl name="asst2">
+    <dgm:fillClrLst>
+      <a:schemeClr val="accent6"/>
+    </dgm:fillClrLst>
+    <dgm:linClrLst meth="repeat">
+      <a:schemeClr val="lt1"/>
+    </dgm:linClrLst>
+    <dgm:effectClrLst/>
+    <dgm:txLinClrLst/>
+    <dgm:txFillClrLst/>
+    <dgm:txEffectClrLst/>
+  </dgm:styleLbl>
+  <dgm:styleLbl name="asst3">
+    <dgm:fillClrLst>
+      <a:schemeClr val="accent1"/>
+    </dgm:fillClrLst>
+    <dgm:linClrLst meth="repeat">
+      <a:schemeClr val="lt1"/>
+    </dgm:linClrLst>
+    <dgm:effectClrLst/>
+    <dgm:txLinClrLst/>
+    <dgm:txFillClrLst/>
+    <dgm:txEffectClrLst/>
+  </dgm:styleLbl>
+  <dgm:styleLbl name="asst4">
+    <dgm:fillClrLst>
+      <a:schemeClr val="accent2"/>
+    </dgm:fillClrLst>
+    <dgm:linClrLst meth="repeat">
+      <a:schemeClr val="lt1"/>
+    </dgm:linClrLst>
+    <dgm:effectClrLst/>
+    <dgm:txLinClrLst/>
+    <dgm:txFillClrLst/>
+    <dgm:txEffectClrLst/>
+  </dgm:styleLbl>
+  <dgm:styleLbl name="parChTrans2D1">
+    <dgm:fillClrLst meth="repeat">
+      <a:schemeClr val="accent4"/>
+    </dgm:fillClrLst>
+    <dgm:linClrLst meth="repeat">
+      <a:schemeClr val="lt1"/>
+    </dgm:linClrLst>
+    <dgm:effectClrLst/>
+    <dgm:txLinClrLst/>
+    <dgm:txFillClrLst meth="repeat">
+      <a:schemeClr val="lt1"/>
+    </dgm:txFillClrLst>
+    <dgm:txEffectClrLst/>
+  </dgm:styleLbl>
+  <dgm:styleLbl name="parChTrans2D2">
+    <dgm:fillClrLst meth="repeat">
+      <a:schemeClr val="accent5"/>
+    </dgm:fillClrLst>
+    <dgm:linClrLst meth="repeat">
+      <a:schemeClr val="lt1"/>
+    </dgm:linClrLst>
+    <dgm:effectClrLst/>
+    <dgm:txLinClrLst/>
+    <dgm:txFillClrLst/>
+    <dgm:txEffectClrLst/>
+  </dgm:styleLbl>
+  <dgm:styleLbl name="parChTrans2D3">
+    <dgm:fillClrLst meth="repeat">
+      <a:schemeClr val="accent5"/>
+    </dgm:fillClrLst>
+    <dgm:linClrLst meth="repeat">
+      <a:schemeClr val="lt1"/>
+    </dgm:linClrLst>
+    <dgm:effectClrLst/>
+    <dgm:txLinClrLst/>
+    <dgm:txFillClrLst/>
+    <dgm:txEffectClrLst/>
+  </dgm:styleLbl>
+  <dgm:styleLbl name="parChTrans2D4">
+    <dgm:fillClrLst meth="repeat">
+      <a:schemeClr val="accent6"/>
+    </dgm:fillClrLst>
+    <dgm:linClrLst meth="repeat">
+      <a:schemeClr val="lt1"/>
+    </dgm:linClrLst>
+    <dgm:effectClrLst/>
+    <dgm:txLinClrLst/>
+    <dgm:txFillClrLst meth="repeat">
+      <a:schemeClr val="lt1"/>
+    </dgm:txFillClrLst>
+    <dgm:txEffectClrLst/>
+  </dgm:styleLbl>
+  <dgm:styleLbl name="parChTrans1D1">
+    <dgm:fillClrLst meth="repeat">
+      <a:schemeClr val="accent4"/>
+    </dgm:fillClrLst>
+    <dgm:linClrLst meth="repeat">
+      <a:schemeClr val="accent4"/>
+    </dgm:linClrLst>
+    <dgm:effectClrLst/>
+    <dgm:txLinClrLst/>
+    <dgm:txFillClrLst meth="repeat">
+      <a:schemeClr val="tx1"/>
+    </dgm:txFillClrLst>
+    <dgm:txEffectClrLst/>
+  </dgm:styleLbl>
+  <dgm:styleLbl name="parChTrans1D2">
+    <dgm:fillClrLst meth="repeat">
+      <a:schemeClr val="accent4">
+        <a:tint val="90000"/>
+      </a:schemeClr>
+    </dgm:fillClrLst>
+    <dgm:linClrLst meth="repeat">
+      <a:schemeClr val="accent5"/>
+    </dgm:linClrLst>
+    <dgm:effectClrLst/>
+    <dgm:txLinClrLst/>
+    <dgm:txFillClrLst meth="repeat">
+      <a:schemeClr val="tx1"/>
+    </dgm:txFillClrLst>
+    <dgm:txEffectClrLst/>
+  </dgm:styleLbl>
+  <dgm:styleLbl name="parChTrans1D3">
+    <dgm:fillClrLst meth="repeat">
+      <a:schemeClr val="accent4">
+        <a:tint val="70000"/>
+      </a:schemeClr>
+    </dgm:fillClrLst>
+    <dgm:linClrLst meth="repeat">
+      <a:schemeClr val="accent6"/>
+    </dgm:linClrLst>
+    <dgm:effectClrLst/>
+    <dgm:txLinClrLst/>
+    <dgm:txFillClrLst meth="repeat">
+      <a:schemeClr val="tx1"/>
+    </dgm:txFillClrLst>
+    <dgm:txEffectClrLst/>
+  </dgm:styleLbl>
+  <dgm:styleLbl name="parChTrans1D4">
+    <dgm:fillClrLst meth="repeat">
+      <a:schemeClr val="accent4">
+        <a:tint val="50000"/>
+      </a:schemeClr>
+    </dgm:fillClrLst>
+    <dgm:linClrLst meth="repeat">
+      <a:schemeClr val="accent1"/>
+    </dgm:linClrLst>
+    <dgm:effectClrLst/>
+    <dgm:txLinClrLst/>
+    <dgm:txFillClrLst meth="repeat">
+      <a:schemeClr val="tx1"/>
+    </dgm:txFillClrLst>
+    <dgm:txEffectClrLst/>
+  </dgm:styleLbl>
+  <dgm:styleLbl name="fgAcc1">
+    <dgm:fillClrLst meth="repeat">
+      <a:schemeClr val="lt1">
+        <a:alpha val="90000"/>
+      </a:schemeClr>
+    </dgm:fillClrLst>
+    <dgm:linClrLst>
+      <a:schemeClr val="accent4"/>
+      <a:schemeClr val="accent5"/>
+    </dgm:linClrLst>
+    <dgm:effectClrLst/>
+    <dgm:txLinClrLst/>
+    <dgm:txFillClrLst meth="repeat">
+      <a:schemeClr val="dk1"/>
+    </dgm:txFillClrLst>
+    <dgm:txEffectClrLst/>
+  </dgm:styleLbl>
+  <dgm:styleLbl name="conFgAcc1">
+    <dgm:fillClrLst meth="repeat">
+      <a:schemeClr val="lt1">
+        <a:alpha val="90000"/>
+      </a:schemeClr>
+    </dgm:fillClrLst>
+    <dgm:linClrLst>
+      <a:schemeClr val="accent4"/>
+      <a:schemeClr val="accent5"/>
+    </dgm:linClrLst>
+    <dgm:effectClrLst/>
+    <dgm:txLinClrLst/>
+    <dgm:txFillClrLst meth="repeat">
+      <a:schemeClr val="dk1"/>
+    </dgm:txFillClrLst>
+    <dgm:txEffectClrLst/>
+  </dgm:styleLbl>
+  <dgm:styleLbl name="alignAcc1">
+    <dgm:fillClrLst meth="repeat">
+      <a:schemeClr val="lt1">
+        <a:alpha val="90000"/>
+      </a:schemeClr>
+    </dgm:fillClrLst>
+    <dgm:linClrLst>
+      <a:schemeClr val="accent4"/>
+      <a:schemeClr val="accent5"/>
+    </dgm:linClrLst>
+    <dgm:effectClrLst/>
+    <dgm:txLinClrLst/>
+    <dgm:txFillClrLst meth="repeat">
+      <a:schemeClr val="dk1"/>
+    </dgm:txFillClrLst>
+    <dgm:txEffectClrLst/>
+  </dgm:styleLbl>
+  <dgm:styleLbl name="trAlignAcc1">
+    <dgm:fillClrLst meth="repeat">
+      <a:schemeClr val="lt1">
+        <a:alpha val="40000"/>
+      </a:schemeClr>
+    </dgm:fillClrLst>
+    <dgm:linClrLst meth="repeat">
+      <a:schemeClr val="accent4"/>
+    </dgm:linClrLst>
+    <dgm:effectClrLst/>
+    <dgm:txLinClrLst/>
+    <dgm:txFillClrLst meth="repeat">
+      <a:schemeClr val="dk1"/>
+    </dgm:txFillClrLst>
+    <dgm:txEffectClrLst/>
+  </dgm:styleLbl>
+  <dgm:styleLbl name="bgAcc1">
+    <dgm:fillClrLst meth="repeat">
+      <a:schemeClr val="lt1">
+        <a:alpha val="90000"/>
+      </a:schemeClr>
+    </dgm:fillClrLst>
+    <dgm:linClrLst>
+      <a:schemeClr val="accent4"/>
+      <a:schemeClr val="accent5"/>
+    </dgm:linClrLst>
+    <dgm:effectClrLst/>
+    <dgm:txLinClrLst/>
+    <dgm:txFillClrLst meth="repeat">
+      <a:schemeClr val="dk1"/>
+    </dgm:txFillClrLst>
+    <dgm:txEffectClrLst/>
+  </dgm:styleLbl>
+  <dgm:styleLbl name="solidFgAcc1">
+    <dgm:fillClrLst meth="repeat">
+      <a:schemeClr val="lt1"/>
+    </dgm:fillClrLst>
+    <dgm:linClrLst>
+      <a:schemeClr val="accent4"/>
+      <a:schemeClr val="accent5"/>
+    </dgm:linClrLst>
+    <dgm:effectClrLst/>
+    <dgm:txLinClrLst/>
+    <dgm:txFillClrLst meth="repeat">
+      <a:schemeClr val="dk1"/>
+    </dgm:txFillClrLst>
+    <dgm:txEffectClrLst/>
+  </dgm:styleLbl>
+  <dgm:styleLbl name="solidAlignAcc1">
+    <dgm:fillClrLst meth="repeat">
+      <a:schemeClr val="lt1"/>
+    </dgm:fillClrLst>
+    <dgm:linClrLst>
+      <a:schemeClr val="accent4"/>
+      <a:schemeClr val="accent5"/>
+    </dgm:linClrLst>
+    <dgm:effectClrLst/>
+    <dgm:txLinClrLst/>
+    <dgm:txFillClrLst meth="repeat">
+      <a:schemeClr val="dk1"/>
+    </dgm:txFillClrLst>
+    <dgm:txEffectClrLst/>
+  </dgm:styleLbl>
+  <dgm:styleLbl name="solidBgAcc1">
+    <dgm:fillClrLst meth="repeat">
+      <a:schemeClr val="lt1"/>
+    </dgm:fillClrLst>
+    <dgm:linClrLst>
+      <a:schemeClr val="accent4"/>
+      <a:schemeClr val="accent5"/>
+    </dgm:linClrLst>
+    <dgm:effectClrLst/>
+    <dgm:txLinClrLst/>
+    <dgm:txFillClrLst meth="repeat">
+      <a:schemeClr val="dk1"/>
+    </dgm:txFillClrLst>
+    <dgm:txEffectClrLst/>
+  </dgm:styleLbl>
+  <dgm:styleLbl name="fgAccFollowNode1">
+    <dgm:fillClrLst>
+      <a:schemeClr val="accent4">
+        <a:tint val="40000"/>
+        <a:alpha val="90000"/>
+      </a:schemeClr>
+      <a:schemeClr val="accent5">
+        <a:tint val="40000"/>
+        <a:alpha val="90000"/>
+      </a:schemeClr>
+    </dgm:fillClrLst>
+    <dgm:linClrLst>
+      <a:schemeClr val="accent4">
+        <a:tint val="40000"/>
+        <a:alpha val="90000"/>
+      </a:schemeClr>
+      <a:schemeClr val="accent5">
+        <a:tint val="40000"/>
+        <a:alpha val="90000"/>
+      </a:schemeClr>
+    </dgm:linClrLst>
+    <dgm:effectClrLst/>
+    <dgm:txLinClrLst/>
+    <dgm:txFillClrLst meth="repeat">
+      <a:schemeClr val="dk1"/>
+    </dgm:txFillClrLst>
+    <dgm:txEffectClrLst/>
+  </dgm:styleLbl>
+  <dgm:styleLbl name="alignAccFollowNode1">
+    <dgm:fillClrLst>
+      <a:schemeClr val="accent4">
+        <a:tint val="40000"/>
+        <a:alpha val="90000"/>
+      </a:schemeClr>
+      <a:schemeClr val="accent5">
+        <a:tint val="40000"/>
+        <a:alpha val="90000"/>
+      </a:schemeClr>
+    </dgm:fillClrLst>
+    <dgm:linClrLst>
+      <a:schemeClr val="accent4">
+        <a:tint val="40000"/>
+        <a:alpha val="90000"/>
+      </a:schemeClr>
+      <a:schemeClr val="accent5">
+        <a:tint val="40000"/>
+        <a:alpha val="90000"/>
+      </a:schemeClr>
+    </dgm:linClrLst>
+    <dgm:effectClrLst/>
+    <dgm:txLinClrLst/>
+    <dgm:txFillClrLst meth="repeat">
+      <a:schemeClr val="dk1"/>
+    </dgm:txFillClrLst>
+    <dgm:txEffectClrLst/>
+  </dgm:styleLbl>
+  <dgm:styleLbl name="bgAccFollowNode1">
+    <dgm:fillClrLst>
+      <a:schemeClr val="accent4">
+        <a:tint val="40000"/>
+        <a:alpha val="90000"/>
+      </a:schemeClr>
+      <a:schemeClr val="accent5">
+        <a:tint val="40000"/>
+        <a:alpha val="90000"/>
+      </a:schemeClr>
+    </dgm:fillClrLst>
+    <dgm:linClrLst>
+      <a:schemeClr val="accent4">
+        <a:tint val="40000"/>
+        <a:alpha val="90000"/>
+      </a:schemeClr>
+      <a:schemeClr val="accent5">
+        <a:tint val="40000"/>
+        <a:alpha val="90000"/>
+      </a:schemeClr>
+    </dgm:linClrLst>
+    <dgm:effectClrLst/>
+    <dgm:txLinClrLst/>
+    <dgm:txFillClrLst meth="repeat">
+      <a:schemeClr val="dk1"/>
+    </dgm:txFillClrLst>
+    <dgm:txEffectClrLst/>
+  </dgm:styleLbl>
+  <dgm:styleLbl name="fgAcc0">
+    <dgm:fillClrLst meth="repeat">
+      <a:schemeClr val="lt1">
+        <a:alpha val="90000"/>
+      </a:schemeClr>
+    </dgm:fillClrLst>
+    <dgm:linClrLst>
+      <a:schemeClr val="accent3"/>
+    </dgm:linClrLst>
+    <dgm:effectClrLst/>
+    <dgm:txLinClrLst/>
+    <dgm:txFillClrLst meth="repeat">
+      <a:schemeClr val="dk1"/>
+    </dgm:txFillClrLst>
+    <dgm:txEffectClrLst/>
+  </dgm:styleLbl>
+  <dgm:styleLbl name="fgAcc2">
+    <dgm:fillClrLst meth="repeat">
+      <a:schemeClr val="lt1">
+        <a:alpha val="90000"/>
+      </a:schemeClr>
+    </dgm:fillClrLst>
+    <dgm:linClrLst>
+      <a:schemeClr val="accent5"/>
+    </dgm:linClrLst>
+    <dgm:effectClrLst/>
+    <dgm:txLinClrLst/>
+    <dgm:txFillClrLst meth="repeat">
+      <a:schemeClr val="dk1"/>
+    </dgm:txFillClrLst>
+    <dgm:txEffectClrLst/>
+  </dgm:styleLbl>
+  <dgm:styleLbl name="fgAcc3">
+    <dgm:fillClrLst meth="repeat">
+      <a:schemeClr val="lt1">
+        <a:alpha val="90000"/>
+      </a:schemeClr>
+    </dgm:fillClrLst>
+    <dgm:linClrLst>
+      <a:schemeClr val="accent6"/>
+    </dgm:linClrLst>
+    <dgm:effectClrLst/>
+    <dgm:txLinClrLst/>
+    <dgm:txFillClrLst meth="repeat">
+      <a:schemeClr val="dk1"/>
+    </dgm:txFillClrLst>
+    <dgm:txEffectClrLst/>
+  </dgm:styleLbl>
+  <dgm:styleLbl name="fgAcc4">
+    <dgm:fillClrLst meth="repeat">
+      <a:schemeClr val="lt1">
+        <a:alpha val="90000"/>
+      </a:schemeClr>
+    </dgm:fillClrLst>
+    <dgm:linClrLst>
+      <a:schemeClr val="accent1"/>
+    </dgm:linClrLst>
+    <dgm:effectClrLst/>
+    <dgm:txLinClrLst/>
+    <dgm:txFillClrLst meth="repeat">
+      <a:schemeClr val="dk1"/>
+    </dgm:txFillClrLst>
+    <dgm:txEffectClrLst/>
+  </dgm:styleLbl>
+  <dgm:styleLbl name="bgShp">
+    <dgm:fillClrLst meth="repeat">
+      <a:schemeClr val="accent4">
+        <a:tint val="40000"/>
+      </a:schemeClr>
+    </dgm:fillClrLst>
+    <dgm:linClrLst meth="repeat">
+      <a:schemeClr val="dk1"/>
+    </dgm:linClrLst>
+    <dgm:effectClrLst/>
+    <dgm:txLinClrLst/>
+    <dgm:txFillClrLst meth="repeat">
+      <a:schemeClr val="dk1"/>
+    </dgm:txFillClrLst>
+    <dgm:txEffectClrLst/>
+  </dgm:styleLbl>
+  <dgm:styleLbl name="dkBgShp">
+    <dgm:fillClrLst meth="repeat">
+      <a:schemeClr val="accent4">
+        <a:shade val="90000"/>
+      </a:schemeClr>
+    </dgm:fillClrLst>
+    <dgm:linClrLst meth="repeat">
+      <a:schemeClr val="dk1"/>
+    </dgm:linClrLst>
+    <dgm:effectClrLst/>
+    <dgm:txLinClrLst/>
+    <dgm:txFillClrLst meth="repeat">
+      <a:schemeClr val="lt1"/>
+    </dgm:txFillClrLst>
+    <dgm:txEffectClrLst/>
+  </dgm:styleLbl>
+  <dgm:styleLbl name="trBgShp">
+    <dgm:fillClrLst meth="repeat">
+      <a:schemeClr val="accent4">
+        <a:tint val="50000"/>
+        <a:alpha val="40000"/>
+      </a:schemeClr>
+    </dgm:fillClrLst>
+    <dgm:linClrLst meth="repeat">
+      <a:schemeClr val="accent4"/>
+    </dgm:linClrLst>
+    <dgm:effectClrLst/>
+    <dgm:txLinClrLst/>
+    <dgm:txFillClrLst meth="repeat">
+      <a:schemeClr val="lt1"/>
+    </dgm:txFillClrLst>
+    <dgm:txEffectClrLst/>
+  </dgm:styleLbl>
+  <dgm:styleLbl name="fgShp">
+    <dgm:fillClrLst meth="repeat">
+      <a:schemeClr val="accent4">
+        <a:tint val="40000"/>
+      </a:schemeClr>
+    </dgm:fillClrLst>
+    <dgm:linClrLst meth="repeat">
+      <a:schemeClr val="lt1"/>
+    </dgm:linClrLst>
+    <dgm:effectClrLst/>
+    <dgm:txLinClrLst/>
+    <dgm:txFillClrLst meth="repeat">
+      <a:schemeClr val="dk1"/>
+    </dgm:txFillClrLst>
+    <dgm:txEffectClrLst/>
+  </dgm:styleLbl>
+  <dgm:styleLbl name="revTx">
+    <dgm:fillClrLst meth="repeat">
+      <a:schemeClr val="lt1">
+        <a:alpha val="0"/>
+      </a:schemeClr>
+    </dgm:fillClrLst>
+    <dgm:linClrLst meth="repeat">
+      <a:schemeClr val="dk1">
+        <a:alpha val="0"/>
+      </a:schemeClr>
+    </dgm:linClrLst>
+    <dgm:effectClrLst/>
+    <dgm:txLinClrLst/>
+    <dgm:txFillClrLst meth="repeat">
+      <a:schemeClr val="tx1"/>
+    </dgm:txFillClrLst>
+    <dgm:txEffectClrLst/>
+  </dgm:styleLbl>
+</dgm:colorsDef>
+</file>
+
+<file path=ppt/diagrams/colors2.xml><?xml version="1.0" encoding="utf-8"?>
 <dgm:colorsDef xmlns:dgm="http://schemas.openxmlformats.org/drawingml/2006/diagram" xmlns:a="http://schemas.openxmlformats.org/drawingml/2006/main" uniqueId="urn:microsoft.com/office/officeart/2005/8/colors/colorful1">
   <dgm:title val=""/>
   <dgm:desc val=""/>
@@ -1055,6 +1837,202 @@
 </file>
 
 <file path=ppt/diagrams/data1.xml><?xml version="1.0" encoding="utf-8"?>
+<dgm:dataModel xmlns:dgm="http://schemas.openxmlformats.org/drawingml/2006/diagram" xmlns:a="http://schemas.openxmlformats.org/drawingml/2006/main">
+  <dgm:ptLst>
+    <dgm:pt modelId="{8F4A8053-4923-A24E-AEC5-81BF6014CBC8}" type="doc">
+      <dgm:prSet loTypeId="urn:microsoft.com/office/officeart/2005/8/layout/venn1" loCatId="" qsTypeId="urn:microsoft.com/office/officeart/2005/8/quickstyle/simple1" qsCatId="simple" csTypeId="urn:microsoft.com/office/officeart/2005/8/colors/colorful4" csCatId="colorful" phldr="1"/>
+      <dgm:spPr/>
+    </dgm:pt>
+    <dgm:pt modelId="{7F8359A3-B9CF-6D4B-8037-57FE1863EDF2}">
+      <dgm:prSet phldrT="[Text]"/>
+      <dgm:spPr/>
+      <dgm:t>
+        <a:bodyPr/>
+        <a:lstStyle/>
+        <a:p>
+          <a:r>
+            <a:rPr lang="en-US" dirty="0"/>
+            <a:t>Selection</a:t>
+          </a:r>
+        </a:p>
+      </dgm:t>
+    </dgm:pt>
+    <dgm:pt modelId="{B0B7F09A-A873-7049-9697-5CF8A7964645}" type="parTrans" cxnId="{22E0002F-3AB5-A944-A9A5-20F9CD6BC590}">
+      <dgm:prSet/>
+      <dgm:spPr/>
+      <dgm:t>
+        <a:bodyPr/>
+        <a:lstStyle/>
+        <a:p>
+          <a:endParaRPr lang="en-US"/>
+        </a:p>
+      </dgm:t>
+    </dgm:pt>
+    <dgm:pt modelId="{B699ECE7-0CE4-8B41-A16C-D2DA25295E5A}" type="sibTrans" cxnId="{22E0002F-3AB5-A944-A9A5-20F9CD6BC590}">
+      <dgm:prSet/>
+      <dgm:spPr/>
+      <dgm:t>
+        <a:bodyPr/>
+        <a:lstStyle/>
+        <a:p>
+          <a:endParaRPr lang="en-US"/>
+        </a:p>
+      </dgm:t>
+    </dgm:pt>
+    <dgm:pt modelId="{0475E55C-BC76-CC49-A6EA-4425DC97CB71}">
+      <dgm:prSet phldrT="[Text]"/>
+      <dgm:spPr/>
+      <dgm:t>
+        <a:bodyPr/>
+        <a:lstStyle/>
+        <a:p>
+          <a:r>
+            <a:rPr lang="en-US" dirty="0"/>
+            <a:t>Dispersal</a:t>
+          </a:r>
+        </a:p>
+      </dgm:t>
+    </dgm:pt>
+    <dgm:pt modelId="{CAC93909-FC75-1A4A-AC6C-8A176D84B327}" type="parTrans" cxnId="{6C7751D4-1294-EB42-9CAD-B69CD70ABD32}">
+      <dgm:prSet/>
+      <dgm:spPr/>
+      <dgm:t>
+        <a:bodyPr/>
+        <a:lstStyle/>
+        <a:p>
+          <a:endParaRPr lang="en-US"/>
+        </a:p>
+      </dgm:t>
+    </dgm:pt>
+    <dgm:pt modelId="{6589743F-27BF-6740-9E4C-996261639427}" type="sibTrans" cxnId="{6C7751D4-1294-EB42-9CAD-B69CD70ABD32}">
+      <dgm:prSet/>
+      <dgm:spPr/>
+      <dgm:t>
+        <a:bodyPr/>
+        <a:lstStyle/>
+        <a:p>
+          <a:endParaRPr lang="en-US"/>
+        </a:p>
+      </dgm:t>
+    </dgm:pt>
+    <dgm:pt modelId="{C77A4A92-8829-554D-A202-9E33F357FC68}">
+      <dgm:prSet phldrT="[Text]"/>
+      <dgm:spPr/>
+      <dgm:t>
+        <a:bodyPr/>
+        <a:lstStyle/>
+        <a:p>
+          <a:r>
+            <a:rPr lang="en-US" dirty="0"/>
+            <a:t>Ecological Drift</a:t>
+          </a:r>
+        </a:p>
+      </dgm:t>
+    </dgm:pt>
+    <dgm:pt modelId="{CD6B9D5D-8787-D348-92EC-DD8D371AAF2D}" type="parTrans" cxnId="{E16A4536-2D03-6141-932B-DB32ABF87EDF}">
+      <dgm:prSet/>
+      <dgm:spPr/>
+      <dgm:t>
+        <a:bodyPr/>
+        <a:lstStyle/>
+        <a:p>
+          <a:endParaRPr lang="en-US"/>
+        </a:p>
+      </dgm:t>
+    </dgm:pt>
+    <dgm:pt modelId="{DE11C94D-1CAD-B04E-8F8C-6BD6380124BA}" type="sibTrans" cxnId="{E16A4536-2D03-6141-932B-DB32ABF87EDF}">
+      <dgm:prSet/>
+      <dgm:spPr/>
+      <dgm:t>
+        <a:bodyPr/>
+        <a:lstStyle/>
+        <a:p>
+          <a:endParaRPr lang="en-US"/>
+        </a:p>
+      </dgm:t>
+    </dgm:pt>
+    <dgm:pt modelId="{99849F71-D68B-6349-82AD-85F23C18C551}" type="pres">
+      <dgm:prSet presAssocID="{8F4A8053-4923-A24E-AEC5-81BF6014CBC8}" presName="compositeShape" presStyleCnt="0">
+        <dgm:presLayoutVars>
+          <dgm:chMax val="7"/>
+          <dgm:dir/>
+          <dgm:resizeHandles val="exact"/>
+        </dgm:presLayoutVars>
+      </dgm:prSet>
+      <dgm:spPr/>
+    </dgm:pt>
+    <dgm:pt modelId="{25E2C31A-9C32-8244-A94C-1A921F1582B3}" type="pres">
+      <dgm:prSet presAssocID="{7F8359A3-B9CF-6D4B-8037-57FE1863EDF2}" presName="circ1" presStyleLbl="vennNode1" presStyleIdx="0" presStyleCnt="3"/>
+      <dgm:spPr/>
+    </dgm:pt>
+    <dgm:pt modelId="{12CDB55E-5DD0-DE4F-96C4-703F4165CACE}" type="pres">
+      <dgm:prSet presAssocID="{7F8359A3-B9CF-6D4B-8037-57FE1863EDF2}" presName="circ1Tx" presStyleLbl="revTx" presStyleIdx="0" presStyleCnt="0">
+        <dgm:presLayoutVars>
+          <dgm:chMax val="0"/>
+          <dgm:chPref val="0"/>
+          <dgm:bulletEnabled val="1"/>
+        </dgm:presLayoutVars>
+      </dgm:prSet>
+      <dgm:spPr/>
+    </dgm:pt>
+    <dgm:pt modelId="{7DAC2FF7-8C69-8544-B207-8AD8ED8CC18E}" type="pres">
+      <dgm:prSet presAssocID="{0475E55C-BC76-CC49-A6EA-4425DC97CB71}" presName="circ2" presStyleLbl="vennNode1" presStyleIdx="1" presStyleCnt="3"/>
+      <dgm:spPr/>
+    </dgm:pt>
+    <dgm:pt modelId="{76DE5FBD-4E39-D141-A1C7-AC8C1D7BAF55}" type="pres">
+      <dgm:prSet presAssocID="{0475E55C-BC76-CC49-A6EA-4425DC97CB71}" presName="circ2Tx" presStyleLbl="revTx" presStyleIdx="0" presStyleCnt="0">
+        <dgm:presLayoutVars>
+          <dgm:chMax val="0"/>
+          <dgm:chPref val="0"/>
+          <dgm:bulletEnabled val="1"/>
+        </dgm:presLayoutVars>
+      </dgm:prSet>
+      <dgm:spPr/>
+    </dgm:pt>
+    <dgm:pt modelId="{C13988BE-4667-2C42-B802-C07898FB496F}" type="pres">
+      <dgm:prSet presAssocID="{C77A4A92-8829-554D-A202-9E33F357FC68}" presName="circ3" presStyleLbl="vennNode1" presStyleIdx="2" presStyleCnt="3"/>
+      <dgm:spPr/>
+    </dgm:pt>
+    <dgm:pt modelId="{63B1BA92-5CBD-5D43-B807-32F00F93F4C2}" type="pres">
+      <dgm:prSet presAssocID="{C77A4A92-8829-554D-A202-9E33F357FC68}" presName="circ3Tx" presStyleLbl="revTx" presStyleIdx="0" presStyleCnt="0">
+        <dgm:presLayoutVars>
+          <dgm:chMax val="0"/>
+          <dgm:chPref val="0"/>
+          <dgm:bulletEnabled val="1"/>
+        </dgm:presLayoutVars>
+      </dgm:prSet>
+      <dgm:spPr/>
+    </dgm:pt>
+  </dgm:ptLst>
+  <dgm:cxnLst>
+    <dgm:cxn modelId="{22E0002F-3AB5-A944-A9A5-20F9CD6BC590}" srcId="{8F4A8053-4923-A24E-AEC5-81BF6014CBC8}" destId="{7F8359A3-B9CF-6D4B-8037-57FE1863EDF2}" srcOrd="0" destOrd="0" parTransId="{B0B7F09A-A873-7049-9697-5CF8A7964645}" sibTransId="{B699ECE7-0CE4-8B41-A16C-D2DA25295E5A}"/>
+    <dgm:cxn modelId="{E16A4536-2D03-6141-932B-DB32ABF87EDF}" srcId="{8F4A8053-4923-A24E-AEC5-81BF6014CBC8}" destId="{C77A4A92-8829-554D-A202-9E33F357FC68}" srcOrd="2" destOrd="0" parTransId="{CD6B9D5D-8787-D348-92EC-DD8D371AAF2D}" sibTransId="{DE11C94D-1CAD-B04E-8F8C-6BD6380124BA}"/>
+    <dgm:cxn modelId="{30926E4F-908A-2648-A053-9920F727B0EC}" type="presOf" srcId="{0475E55C-BC76-CC49-A6EA-4425DC97CB71}" destId="{76DE5FBD-4E39-D141-A1C7-AC8C1D7BAF55}" srcOrd="1" destOrd="0" presId="urn:microsoft.com/office/officeart/2005/8/layout/venn1"/>
+    <dgm:cxn modelId="{1CE78F51-CC2E-DD49-9AB8-215DB2E3873F}" type="presOf" srcId="{7F8359A3-B9CF-6D4B-8037-57FE1863EDF2}" destId="{25E2C31A-9C32-8244-A94C-1A921F1582B3}" srcOrd="0" destOrd="0" presId="urn:microsoft.com/office/officeart/2005/8/layout/venn1"/>
+    <dgm:cxn modelId="{77AD5456-ADF9-5144-901C-53774063F956}" type="presOf" srcId="{7F8359A3-B9CF-6D4B-8037-57FE1863EDF2}" destId="{12CDB55E-5DD0-DE4F-96C4-703F4165CACE}" srcOrd="1" destOrd="0" presId="urn:microsoft.com/office/officeart/2005/8/layout/venn1"/>
+    <dgm:cxn modelId="{43CD5461-142A-BC4E-90AB-21C84DA1623D}" type="presOf" srcId="{C77A4A92-8829-554D-A202-9E33F357FC68}" destId="{63B1BA92-5CBD-5D43-B807-32F00F93F4C2}" srcOrd="1" destOrd="0" presId="urn:microsoft.com/office/officeart/2005/8/layout/venn1"/>
+    <dgm:cxn modelId="{903EFF63-DF67-514E-8054-8C572B8FB92F}" type="presOf" srcId="{C77A4A92-8829-554D-A202-9E33F357FC68}" destId="{C13988BE-4667-2C42-B802-C07898FB496F}" srcOrd="0" destOrd="0" presId="urn:microsoft.com/office/officeart/2005/8/layout/venn1"/>
+    <dgm:cxn modelId="{01B8258E-F57E-024C-9034-8CCCDFC3C0BF}" type="presOf" srcId="{0475E55C-BC76-CC49-A6EA-4425DC97CB71}" destId="{7DAC2FF7-8C69-8544-B207-8AD8ED8CC18E}" srcOrd="0" destOrd="0" presId="urn:microsoft.com/office/officeart/2005/8/layout/venn1"/>
+    <dgm:cxn modelId="{E502D9AF-D72C-8E4E-B145-ADD72D368CFD}" type="presOf" srcId="{8F4A8053-4923-A24E-AEC5-81BF6014CBC8}" destId="{99849F71-D68B-6349-82AD-85F23C18C551}" srcOrd="0" destOrd="0" presId="urn:microsoft.com/office/officeart/2005/8/layout/venn1"/>
+    <dgm:cxn modelId="{6C7751D4-1294-EB42-9CAD-B69CD70ABD32}" srcId="{8F4A8053-4923-A24E-AEC5-81BF6014CBC8}" destId="{0475E55C-BC76-CC49-A6EA-4425DC97CB71}" srcOrd="1" destOrd="0" parTransId="{CAC93909-FC75-1A4A-AC6C-8A176D84B327}" sibTransId="{6589743F-27BF-6740-9E4C-996261639427}"/>
+    <dgm:cxn modelId="{D16D97F3-DFAD-144F-84C9-FD14C1B6A643}" type="presParOf" srcId="{99849F71-D68B-6349-82AD-85F23C18C551}" destId="{25E2C31A-9C32-8244-A94C-1A921F1582B3}" srcOrd="0" destOrd="0" presId="urn:microsoft.com/office/officeart/2005/8/layout/venn1"/>
+    <dgm:cxn modelId="{68F31C22-3EB3-7546-80D3-71255CEF552E}" type="presParOf" srcId="{99849F71-D68B-6349-82AD-85F23C18C551}" destId="{12CDB55E-5DD0-DE4F-96C4-703F4165CACE}" srcOrd="1" destOrd="0" presId="urn:microsoft.com/office/officeart/2005/8/layout/venn1"/>
+    <dgm:cxn modelId="{ED19B7B3-6FAE-BD49-9E19-A1C4E1D85B26}" type="presParOf" srcId="{99849F71-D68B-6349-82AD-85F23C18C551}" destId="{7DAC2FF7-8C69-8544-B207-8AD8ED8CC18E}" srcOrd="2" destOrd="0" presId="urn:microsoft.com/office/officeart/2005/8/layout/venn1"/>
+    <dgm:cxn modelId="{B964DD3B-9CC4-174F-A633-FBFB58832294}" type="presParOf" srcId="{99849F71-D68B-6349-82AD-85F23C18C551}" destId="{76DE5FBD-4E39-D141-A1C7-AC8C1D7BAF55}" srcOrd="3" destOrd="0" presId="urn:microsoft.com/office/officeart/2005/8/layout/venn1"/>
+    <dgm:cxn modelId="{720B36BF-859B-B64D-8DC5-26567BAA7DE8}" type="presParOf" srcId="{99849F71-D68B-6349-82AD-85F23C18C551}" destId="{C13988BE-4667-2C42-B802-C07898FB496F}" srcOrd="4" destOrd="0" presId="urn:microsoft.com/office/officeart/2005/8/layout/venn1"/>
+    <dgm:cxn modelId="{43A3809A-FA93-8346-91EF-D786EBA2C43D}" type="presParOf" srcId="{99849F71-D68B-6349-82AD-85F23C18C551}" destId="{63B1BA92-5CBD-5D43-B807-32F00F93F4C2}" srcOrd="5" destOrd="0" presId="urn:microsoft.com/office/officeart/2005/8/layout/venn1"/>
+  </dgm:cxnLst>
+  <dgm:bg/>
+  <dgm:whole/>
+  <dgm:extLst>
+    <a:ext uri="http://schemas.microsoft.com/office/drawing/2008/diagram">
+      <dsp:dataModelExt xmlns:dsp="http://schemas.microsoft.com/office/drawing/2008/diagram" relId="rId7" minVer="http://schemas.openxmlformats.org/drawingml/2006/diagram"/>
+    </a:ext>
+  </dgm:extLst>
+</dgm:dataModel>
+</file>
+
+<file path=ppt/diagrams/data2.xml><?xml version="1.0" encoding="utf-8"?>
 <dgm:dataModel xmlns:dgm="http://schemas.openxmlformats.org/drawingml/2006/diagram" xmlns:a="http://schemas.openxmlformats.org/drawingml/2006/main">
   <dgm:ptLst>
     <dgm:pt modelId="{CB88F0E7-4140-1B4D-A33B-6563FB2E1C23}" type="doc">
@@ -1411,6 +2389,255 @@
 </file>
 
 <file path=ppt/diagrams/drawing1.xml><?xml version="1.0" encoding="utf-8"?>
+<dsp:drawing xmlns:dgm="http://schemas.openxmlformats.org/drawingml/2006/diagram" xmlns:dsp="http://schemas.microsoft.com/office/drawing/2008/diagram" xmlns:a="http://schemas.openxmlformats.org/drawingml/2006/main">
+  <dsp:spTree>
+    <dsp:nvGrpSpPr>
+      <dsp:cNvPr id="0" name=""/>
+      <dsp:cNvGrpSpPr/>
+    </dsp:nvGrpSpPr>
+    <dsp:grpSpPr/>
+    <dsp:sp modelId="{25E2C31A-9C32-8244-A94C-1A921F1582B3}">
+      <dsp:nvSpPr>
+        <dsp:cNvPr id="0" name=""/>
+        <dsp:cNvSpPr/>
+      </dsp:nvSpPr>
+      <dsp:spPr>
+        <a:xfrm>
+          <a:off x="2163603" y="60100"/>
+          <a:ext cx="2884805" cy="2884805"/>
+        </a:xfrm>
+        <a:prstGeom prst="ellipse">
+          <a:avLst/>
+        </a:prstGeom>
+        <a:solidFill>
+          <a:schemeClr val="accent4">
+            <a:alpha val="50000"/>
+            <a:hueOff val="0"/>
+            <a:satOff val="0"/>
+            <a:lumOff val="0"/>
+            <a:alphaOff val="0"/>
+          </a:schemeClr>
+        </a:solidFill>
+        <a:ln w="12700" cap="flat" cmpd="sng" algn="ctr">
+          <a:solidFill>
+            <a:schemeClr val="lt1">
+              <a:hueOff val="0"/>
+              <a:satOff val="0"/>
+              <a:lumOff val="0"/>
+              <a:alphaOff val="0"/>
+            </a:schemeClr>
+          </a:solidFill>
+          <a:prstDash val="solid"/>
+          <a:miter lim="800000"/>
+        </a:ln>
+        <a:effectLst/>
+      </dsp:spPr>
+      <dsp:style>
+        <a:lnRef idx="2">
+          <a:scrgbClr r="0" g="0" b="0"/>
+        </a:lnRef>
+        <a:fillRef idx="1">
+          <a:scrgbClr r="0" g="0" b="0"/>
+        </a:fillRef>
+        <a:effectRef idx="0">
+          <a:scrgbClr r="0" g="0" b="0"/>
+        </a:effectRef>
+        <a:fontRef idx="minor">
+          <a:schemeClr val="tx1"/>
+        </a:fontRef>
+      </dsp:style>
+      <dsp:txBody>
+        <a:bodyPr spcFirstLastPara="0" vert="horz" wrap="square" lIns="0" tIns="0" rIns="0" bIns="0" numCol="1" spcCol="1270" anchor="ctr" anchorCtr="0">
+          <a:noAutofit/>
+        </a:bodyPr>
+        <a:lstStyle/>
+        <a:p>
+          <a:pPr marL="0" lvl="0" indent="0" algn="ctr" defTabSz="1511300">
+            <a:lnSpc>
+              <a:spcPct val="90000"/>
+            </a:lnSpc>
+            <a:spcBef>
+              <a:spcPct val="0"/>
+            </a:spcBef>
+            <a:spcAft>
+              <a:spcPct val="35000"/>
+            </a:spcAft>
+            <a:buNone/>
+          </a:pPr>
+          <a:r>
+            <a:rPr lang="en-US" sz="3400" kern="1200" dirty="0"/>
+            <a:t>Selection</a:t>
+          </a:r>
+        </a:p>
+      </dsp:txBody>
+      <dsp:txXfrm>
+        <a:off x="2548244" y="564941"/>
+        <a:ext cx="2115523" cy="1298162"/>
+      </dsp:txXfrm>
+    </dsp:sp>
+    <dsp:sp modelId="{7DAC2FF7-8C69-8544-B207-8AD8ED8CC18E}">
+      <dsp:nvSpPr>
+        <dsp:cNvPr id="0" name=""/>
+        <dsp:cNvSpPr/>
+      </dsp:nvSpPr>
+      <dsp:spPr>
+        <a:xfrm>
+          <a:off x="3204537" y="1863103"/>
+          <a:ext cx="2884805" cy="2884805"/>
+        </a:xfrm>
+        <a:prstGeom prst="ellipse">
+          <a:avLst/>
+        </a:prstGeom>
+        <a:solidFill>
+          <a:schemeClr val="accent4">
+            <a:alpha val="50000"/>
+            <a:hueOff val="4900445"/>
+            <a:satOff val="-20388"/>
+            <a:lumOff val="4804"/>
+            <a:alphaOff val="0"/>
+          </a:schemeClr>
+        </a:solidFill>
+        <a:ln w="12700" cap="flat" cmpd="sng" algn="ctr">
+          <a:solidFill>
+            <a:schemeClr val="lt1">
+              <a:hueOff val="0"/>
+              <a:satOff val="0"/>
+              <a:lumOff val="0"/>
+              <a:alphaOff val="0"/>
+            </a:schemeClr>
+          </a:solidFill>
+          <a:prstDash val="solid"/>
+          <a:miter lim="800000"/>
+        </a:ln>
+        <a:effectLst/>
+      </dsp:spPr>
+      <dsp:style>
+        <a:lnRef idx="2">
+          <a:scrgbClr r="0" g="0" b="0"/>
+        </a:lnRef>
+        <a:fillRef idx="1">
+          <a:scrgbClr r="0" g="0" b="0"/>
+        </a:fillRef>
+        <a:effectRef idx="0">
+          <a:scrgbClr r="0" g="0" b="0"/>
+        </a:effectRef>
+        <a:fontRef idx="minor">
+          <a:schemeClr val="tx1"/>
+        </a:fontRef>
+      </dsp:style>
+      <dsp:txBody>
+        <a:bodyPr spcFirstLastPara="0" vert="horz" wrap="square" lIns="0" tIns="0" rIns="0" bIns="0" numCol="1" spcCol="1270" anchor="ctr" anchorCtr="0">
+          <a:noAutofit/>
+        </a:bodyPr>
+        <a:lstStyle/>
+        <a:p>
+          <a:pPr marL="0" lvl="0" indent="0" algn="ctr" defTabSz="1511300">
+            <a:lnSpc>
+              <a:spcPct val="90000"/>
+            </a:lnSpc>
+            <a:spcBef>
+              <a:spcPct val="0"/>
+            </a:spcBef>
+            <a:spcAft>
+              <a:spcPct val="35000"/>
+            </a:spcAft>
+            <a:buNone/>
+          </a:pPr>
+          <a:r>
+            <a:rPr lang="en-US" sz="3400" kern="1200" dirty="0"/>
+            <a:t>Dispersal</a:t>
+          </a:r>
+        </a:p>
+      </dsp:txBody>
+      <dsp:txXfrm>
+        <a:off x="4086807" y="2608344"/>
+        <a:ext cx="1730883" cy="1586642"/>
+      </dsp:txXfrm>
+    </dsp:sp>
+    <dsp:sp modelId="{C13988BE-4667-2C42-B802-C07898FB496F}">
+      <dsp:nvSpPr>
+        <dsp:cNvPr id="0" name=""/>
+        <dsp:cNvSpPr/>
+      </dsp:nvSpPr>
+      <dsp:spPr>
+        <a:xfrm>
+          <a:off x="1122669" y="1863103"/>
+          <a:ext cx="2884805" cy="2884805"/>
+        </a:xfrm>
+        <a:prstGeom prst="ellipse">
+          <a:avLst/>
+        </a:prstGeom>
+        <a:solidFill>
+          <a:schemeClr val="accent4">
+            <a:alpha val="50000"/>
+            <a:hueOff val="9800891"/>
+            <a:satOff val="-40777"/>
+            <a:lumOff val="9608"/>
+            <a:alphaOff val="0"/>
+          </a:schemeClr>
+        </a:solidFill>
+        <a:ln w="12700" cap="flat" cmpd="sng" algn="ctr">
+          <a:solidFill>
+            <a:schemeClr val="lt1">
+              <a:hueOff val="0"/>
+              <a:satOff val="0"/>
+              <a:lumOff val="0"/>
+              <a:alphaOff val="0"/>
+            </a:schemeClr>
+          </a:solidFill>
+          <a:prstDash val="solid"/>
+          <a:miter lim="800000"/>
+        </a:ln>
+        <a:effectLst/>
+      </dsp:spPr>
+      <dsp:style>
+        <a:lnRef idx="2">
+          <a:scrgbClr r="0" g="0" b="0"/>
+        </a:lnRef>
+        <a:fillRef idx="1">
+          <a:scrgbClr r="0" g="0" b="0"/>
+        </a:fillRef>
+        <a:effectRef idx="0">
+          <a:scrgbClr r="0" g="0" b="0"/>
+        </a:effectRef>
+        <a:fontRef idx="minor">
+          <a:schemeClr val="tx1"/>
+        </a:fontRef>
+      </dsp:style>
+      <dsp:txBody>
+        <a:bodyPr spcFirstLastPara="0" vert="horz" wrap="square" lIns="0" tIns="0" rIns="0" bIns="0" numCol="1" spcCol="1270" anchor="ctr" anchorCtr="0">
+          <a:noAutofit/>
+        </a:bodyPr>
+        <a:lstStyle/>
+        <a:p>
+          <a:pPr marL="0" lvl="0" indent="0" algn="ctr" defTabSz="1511300">
+            <a:lnSpc>
+              <a:spcPct val="90000"/>
+            </a:lnSpc>
+            <a:spcBef>
+              <a:spcPct val="0"/>
+            </a:spcBef>
+            <a:spcAft>
+              <a:spcPct val="35000"/>
+            </a:spcAft>
+            <a:buNone/>
+          </a:pPr>
+          <a:r>
+            <a:rPr lang="en-US" sz="3400" kern="1200" dirty="0"/>
+            <a:t>Ecological Drift</a:t>
+          </a:r>
+        </a:p>
+      </dsp:txBody>
+      <dsp:txXfrm>
+        <a:off x="1394322" y="2608344"/>
+        <a:ext cx="1730883" cy="1586642"/>
+      </dsp:txXfrm>
+    </dsp:sp>
+  </dsp:spTree>
+</dsp:drawing>
+</file>
+
+<file path=ppt/diagrams/drawing2.xml><?xml version="1.0" encoding="utf-8"?>
 <dsp:drawing xmlns:dgm="http://schemas.openxmlformats.org/drawingml/2006/diagram" xmlns:dsp="http://schemas.microsoft.com/office/drawing/2008/diagram" xmlns:a="http://schemas.openxmlformats.org/drawingml/2006/main">
   <dsp:spTree>
     <dsp:nvGrpSpPr>
@@ -2143,6 +3370,881 @@
 </file>
 
 <file path=ppt/diagrams/layout1.xml><?xml version="1.0" encoding="utf-8"?>
+<dgm:layoutDef xmlns:dgm="http://schemas.openxmlformats.org/drawingml/2006/diagram" xmlns:a="http://schemas.openxmlformats.org/drawingml/2006/main" uniqueId="urn:microsoft.com/office/officeart/2005/8/layout/venn1">
+  <dgm:title val=""/>
+  <dgm:desc val=""/>
+  <dgm:catLst>
+    <dgm:cat type="relationship" pri="28000"/>
+    <dgm:cat type="convert" pri="19000"/>
+  </dgm:catLst>
+  <dgm:sampData useDef="1">
+    <dgm:dataModel>
+      <dgm:ptLst/>
+      <dgm:bg/>
+      <dgm:whole/>
+    </dgm:dataModel>
+  </dgm:sampData>
+  <dgm:styleData useDef="1">
+    <dgm:dataModel>
+      <dgm:ptLst/>
+      <dgm:bg/>
+      <dgm:whole/>
+    </dgm:dataModel>
+  </dgm:styleData>
+  <dgm:clrData>
+    <dgm:dataModel>
+      <dgm:ptLst>
+        <dgm:pt modelId="0" type="doc"/>
+        <dgm:pt modelId="1"/>
+        <dgm:pt modelId="2"/>
+        <dgm:pt modelId="3"/>
+        <dgm:pt modelId="4"/>
+      </dgm:ptLst>
+      <dgm:cxnLst>
+        <dgm:cxn modelId="7" srcId="0" destId="1" srcOrd="0" destOrd="0"/>
+        <dgm:cxn modelId="8" srcId="0" destId="2" srcOrd="1" destOrd="0"/>
+        <dgm:cxn modelId="9" srcId="0" destId="3" srcOrd="2" destOrd="0"/>
+        <dgm:cxn modelId="10" srcId="0" destId="4" srcOrd="3" destOrd="0"/>
+      </dgm:cxnLst>
+      <dgm:bg/>
+      <dgm:whole/>
+    </dgm:dataModel>
+  </dgm:clrData>
+  <dgm:layoutNode name="compositeShape">
+    <dgm:varLst>
+      <dgm:chMax val="7"/>
+      <dgm:dir/>
+      <dgm:resizeHandles val="exact"/>
+    </dgm:varLst>
+    <dgm:choose name="Name0">
+      <dgm:if name="Name1" axis="ch" ptType="node" func="cnt" op="equ" val="1">
+        <dgm:alg type="composite">
+          <dgm:param type="ar" val="1"/>
+        </dgm:alg>
+      </dgm:if>
+      <dgm:if name="Name2" axis="ch" ptType="node" func="cnt" op="equ" val="2">
+        <dgm:alg type="composite">
+          <dgm:param type="ar" val="1.792"/>
+        </dgm:alg>
+      </dgm:if>
+      <dgm:if name="Name3" axis="ch" ptType="node" func="cnt" op="equ" val="3">
+        <dgm:alg type="composite">
+          <dgm:param type="ar" val="1"/>
+        </dgm:alg>
+      </dgm:if>
+      <dgm:if name="Name4" axis="ch" ptType="node" func="cnt" op="equ" val="4">
+        <dgm:alg type="composite">
+          <dgm:param type="ar" val="1"/>
+        </dgm:alg>
+      </dgm:if>
+      <dgm:if name="Name5" axis="ch" ptType="node" func="cnt" op="equ" val="5">
+        <dgm:alg type="composite">
+          <dgm:param type="ar" val="1.4"/>
+        </dgm:alg>
+      </dgm:if>
+      <dgm:if name="Name6" axis="ch" ptType="node" func="cnt" op="equ" val="6">
+        <dgm:alg type="composite">
+          <dgm:param type="ar" val="1.285"/>
+        </dgm:alg>
+      </dgm:if>
+      <dgm:if name="Name7" axis="ch" ptType="node" func="cnt" op="equ" val="7">
+        <dgm:alg type="composite">
+          <dgm:param type="ar" val="1.359"/>
+        </dgm:alg>
+      </dgm:if>
+      <dgm:else name="Name8">
+        <dgm:alg type="composite">
+          <dgm:param type="ar" val="1.359"/>
+        </dgm:alg>
+      </dgm:else>
+    </dgm:choose>
+    <dgm:shape xmlns:r="http://schemas.openxmlformats.org/officeDocument/2006/relationships" r:blip="">
+      <dgm:adjLst/>
+    </dgm:shape>
+    <dgm:presOf/>
+    <dgm:choose name="Name9">
+      <dgm:if name="Name10" axis="ch" ptType="node" func="cnt" op="equ" val="1">
+        <dgm:constrLst>
+          <dgm:constr type="ctrX" for="ch" forName="circ1TxSh" refType="w" fact="0.5"/>
+          <dgm:constr type="ctrY" for="ch" forName="circ1TxSh" refType="h" fact="0.5"/>
+          <dgm:constr type="w" for="ch" forName="circ1TxSh" refType="w"/>
+          <dgm:constr type="h" for="ch" forName="circ1TxSh" refType="h"/>
+          <dgm:constr type="primFontSz" for="ch" ptType="node" op="equ"/>
+        </dgm:constrLst>
+      </dgm:if>
+      <dgm:if name="Name11" axis="ch" ptType="node" func="cnt" op="equ" val="2">
+        <dgm:constrLst>
+          <dgm:constr type="ctrX" for="ch" forName="circ1" refType="w" fact="0.3"/>
+          <dgm:constr type="ctrY" for="ch" forName="circ1" refType="h" fact="0.5"/>
+          <dgm:constr type="w" for="ch" forName="circ1" refType="w" fact="0.555"/>
+          <dgm:constr type="h" for="ch" forName="circ1" refType="h" fact="0.99456"/>
+          <dgm:constr type="l" for="ch" forName="circ1Tx" refType="w" fact="0.1"/>
+          <dgm:constr type="t" for="ch" forName="circ1Tx" refType="h" fact="0.12"/>
+          <dgm:constr type="w" for="ch" forName="circ1Tx" refType="w" fact="0.32"/>
+          <dgm:constr type="h" for="ch" forName="circ1Tx" refType="h" fact="0.76"/>
+          <dgm:constr type="ctrX" for="ch" forName="circ2" refType="w" fact="0.7"/>
+          <dgm:constr type="ctrY" for="ch" forName="circ2" refType="h" fact="0.5"/>
+          <dgm:constr type="w" for="ch" forName="circ2" refType="w" fact="0.555"/>
+          <dgm:constr type="h" for="ch" forName="circ2" refType="h" fact="0.99456"/>
+          <dgm:constr type="l" for="ch" forName="circ2Tx" refType="w" fact="0.58"/>
+          <dgm:constr type="t" for="ch" forName="circ2Tx" refType="h" fact="0.12"/>
+          <dgm:constr type="w" for="ch" forName="circ2Tx" refType="w" fact="0.32"/>
+          <dgm:constr type="h" for="ch" forName="circ2Tx" refType="h" fact="0.76"/>
+          <dgm:constr type="primFontSz" for="ch" ptType="node" op="equ"/>
+        </dgm:constrLst>
+      </dgm:if>
+      <dgm:if name="Name12" axis="ch" ptType="node" func="cnt" op="equ" val="3">
+        <dgm:constrLst>
+          <dgm:constr type="ctrX" for="ch" forName="circ1" refType="w" fact="0.5"/>
+          <dgm:constr type="ctrY" for="ch" forName="circ1" refType="w" fact="0.25"/>
+          <dgm:constr type="w" for="ch" forName="circ1" refType="w" fact="0.6"/>
+          <dgm:constr type="h" for="ch" forName="circ1" refType="h" fact="0.6"/>
+          <dgm:constr type="l" for="ch" forName="circ1Tx" refType="w" fact="0.28"/>
+          <dgm:constr type="t" for="ch" forName="circ1Tx" refType="h" fact="0.055"/>
+          <dgm:constr type="w" for="ch" forName="circ1Tx" refType="w" fact="0.44"/>
+          <dgm:constr type="h" for="ch" forName="circ1Tx" refType="h" fact="0.27"/>
+          <dgm:constr type="ctrX" for="ch" forName="circ2" refType="w" fact="0.7165"/>
+          <dgm:constr type="ctrY" for="ch" forName="circ2" refType="w" fact="0.625"/>
+          <dgm:constr type="w" for="ch" forName="circ2" refType="w" fact="0.6"/>
+          <dgm:constr type="h" for="ch" forName="circ2" refType="h" fact="0.6"/>
+          <dgm:constr type="l" for="ch" forName="circ2Tx" refType="w" fact="0.6"/>
+          <dgm:constr type="t" for="ch" forName="circ2Tx" refType="h" fact="0.48"/>
+          <dgm:constr type="w" for="ch" forName="circ2Tx" refType="w" fact="0.36"/>
+          <dgm:constr type="h" for="ch" forName="circ2Tx" refType="h" fact="0.33"/>
+          <dgm:constr type="ctrX" for="ch" forName="circ3" refType="w" fact="0.2835"/>
+          <dgm:constr type="ctrY" for="ch" forName="circ3" refType="w" fact="0.625"/>
+          <dgm:constr type="w" for="ch" forName="circ3" refType="w" fact="0.6"/>
+          <dgm:constr type="h" for="ch" forName="circ3" refType="h" fact="0.6"/>
+          <dgm:constr type="l" for="ch" forName="circ3Tx" refType="w" fact="0.04"/>
+          <dgm:constr type="t" for="ch" forName="circ3Tx" refType="h" fact="0.48"/>
+          <dgm:constr type="w" for="ch" forName="circ3Tx" refType="w" fact="0.36"/>
+          <dgm:constr type="h" for="ch" forName="circ3Tx" refType="h" fact="0.33"/>
+          <dgm:constr type="primFontSz" for="ch" ptType="node" op="equ"/>
+        </dgm:constrLst>
+      </dgm:if>
+      <dgm:if name="Name13" axis="ch" ptType="node" func="cnt" op="equ" val="4">
+        <dgm:constrLst>
+          <dgm:constr type="ctrX" for="ch" forName="circ1" refType="w" fact="0.5"/>
+          <dgm:constr type="ctrY" for="ch" forName="circ1" refType="w" fact="0.27"/>
+          <dgm:constr type="w" for="ch" forName="circ1" refType="w" fact="0.52"/>
+          <dgm:constr type="h" for="ch" forName="circ1" refType="h" fact="0.52"/>
+          <dgm:constr type="l" for="ch" forName="circ1Tx" refType="w" fact="0.3"/>
+          <dgm:constr type="t" for="ch" forName="circ1Tx" refType="h" fact="0.08"/>
+          <dgm:constr type="w" for="ch" forName="circ1Tx" refType="w" fact="0.4"/>
+          <dgm:constr type="h" for="ch" forName="circ1Tx" refType="h" fact="0.165"/>
+          <dgm:constr type="ctrX" for="ch" forName="circ2" refType="w" fact="0.73"/>
+          <dgm:constr type="ctrY" for="ch" forName="circ2" refType="w" fact="0.5"/>
+          <dgm:constr type="w" for="ch" forName="circ2" refType="w" fact="0.52"/>
+          <dgm:constr type="h" for="ch" forName="circ2" refType="h" fact="0.52"/>
+          <dgm:constr type="r" for="ch" forName="circ2Tx" refType="w" fact="0.95"/>
+          <dgm:constr type="t" for="ch" forName="circ2Tx" refType="h" fact="0.3"/>
+          <dgm:constr type="w" for="ch" forName="circ2Tx" refType="w" fact="0.2"/>
+          <dgm:constr type="h" for="ch" forName="circ2Tx" refType="h" fact="0.4"/>
+          <dgm:constr type="ctrX" for="ch" forName="circ3" refType="w" fact="0.5"/>
+          <dgm:constr type="ctrY" for="ch" forName="circ3" refType="w" fact="0.73"/>
+          <dgm:constr type="w" for="ch" forName="circ3" refType="w" fact="0.52"/>
+          <dgm:constr type="h" for="ch" forName="circ3" refType="h" fact="0.52"/>
+          <dgm:constr type="l" for="ch" forName="circ3Tx" refType="w" fact="0.3"/>
+          <dgm:constr type="b" for="ch" forName="circ3Tx" refType="h" fact="0.92"/>
+          <dgm:constr type="w" for="ch" forName="circ3Tx" refType="w" fact="0.4"/>
+          <dgm:constr type="h" for="ch" forName="circ3Tx" refType="h" fact="0.165"/>
+          <dgm:constr type="ctrX" for="ch" forName="circ4" refType="w" fact="0.27"/>
+          <dgm:constr type="ctrY" for="ch" forName="circ4" refType="h" fact="0.5"/>
+          <dgm:constr type="w" for="ch" forName="circ4" refType="w" fact="0.52"/>
+          <dgm:constr type="h" for="ch" forName="circ4" refType="h" fact="0.52"/>
+          <dgm:constr type="l" for="ch" forName="circ4Tx" refType="w" fact="0.05"/>
+          <dgm:constr type="t" for="ch" forName="circ4Tx" refType="h" fact="0.3"/>
+          <dgm:constr type="w" for="ch" forName="circ4Tx" refType="w" fact="0.2"/>
+          <dgm:constr type="h" for="ch" forName="circ4Tx" refType="h" fact="0.4"/>
+          <dgm:constr type="primFontSz" for="ch" ptType="node" op="equ"/>
+        </dgm:constrLst>
+      </dgm:if>
+      <dgm:if name="Name14" axis="ch" ptType="node" func="cnt" op="equ" val="5">
+        <dgm:constrLst>
+          <dgm:constr type="ctrX" for="ch" forName="circ1" refType="w" fact="0.5"/>
+          <dgm:constr type="ctrY" for="ch" forName="circ1" refType="h" fact="0.46"/>
+          <dgm:constr type="w" for="ch" forName="circ1" refType="w" fact="0.25"/>
+          <dgm:constr type="h" for="ch" forName="circ1" refType="h" fact="0.35"/>
+          <dgm:constr type="l" for="ch" forName="circ1Tx" refType="w" fact="0.355"/>
+          <dgm:constr type="t" for="ch" forName="circ1Tx"/>
+          <dgm:constr type="w" for="ch" forName="circ1Tx" refType="w" fact="0.29"/>
+          <dgm:constr type="h" for="ch" forName="circ1Tx" refType="h" fact="0.235"/>
+          <dgm:constr type="ctrX" for="ch" forName="circ2" refType="w" fact="0.5951"/>
+          <dgm:constr type="ctrY" for="ch" forName="circ2" refType="h" fact="0.5567"/>
+          <dgm:constr type="w" for="ch" forName="circ2" refType="w" fact="0.25"/>
+          <dgm:constr type="h" for="ch" forName="circ2" refType="h" fact="0.35"/>
+          <dgm:constr type="l" for="ch" forName="circ2Tx" refType="w" fact="0.74"/>
+          <dgm:constr type="t" for="ch" forName="circ2Tx" refType="h" fact="0.31"/>
+          <dgm:constr type="w" for="ch" forName="circ2Tx" refType="w" fact="0.26"/>
+          <dgm:constr type="h" for="ch" forName="circ2Tx" refType="h" fact="0.255"/>
+          <dgm:constr type="ctrX" for="ch" forName="circ3" refType="w" fact="0.5588"/>
+          <dgm:constr type="ctrY" for="ch" forName="circ3" refType="h" fact="0.7133"/>
+          <dgm:constr type="w" for="ch" forName="circ3" refType="w" fact="0.25"/>
+          <dgm:constr type="h" for="ch" forName="circ3" refType="h" fact="0.35"/>
+          <dgm:constr type="l" for="ch" forName="circ3Tx" refType="w" fact="0.7"/>
+          <dgm:constr type="t" for="ch" forName="circ3Tx" refType="h" fact="0.745"/>
+          <dgm:constr type="w" for="ch" forName="circ3Tx" refType="w" fact="0.26"/>
+          <dgm:constr type="h" for="ch" forName="circ3Tx" refType="h" fact="0.255"/>
+          <dgm:constr type="ctrX" for="ch" forName="circ4" refType="w" fact="0.4412"/>
+          <dgm:constr type="ctrY" for="ch" forName="circ4" refType="h" fact="0.7133"/>
+          <dgm:constr type="w" for="ch" forName="circ4" refType="w" fact="0.25"/>
+          <dgm:constr type="h" for="ch" forName="circ4" refType="h" fact="0.35"/>
+          <dgm:constr type="l" for="ch" forName="circ4Tx" refType="w" fact="0.04"/>
+          <dgm:constr type="t" for="ch" forName="circ4Tx" refType="h" fact="0.745"/>
+          <dgm:constr type="w" for="ch" forName="circ4Tx" refType="w" fact="0.26"/>
+          <dgm:constr type="h" for="ch" forName="circ4Tx" refType="h" fact="0.255"/>
+          <dgm:constr type="ctrX" for="ch" forName="circ5" refType="w" fact="0.4049"/>
+          <dgm:constr type="ctrY" for="ch" forName="circ5" refType="h" fact="0.5567"/>
+          <dgm:constr type="w" for="ch" forName="circ5" refType="w" fact="0.25"/>
+          <dgm:constr type="h" for="ch" forName="circ5" refType="h" fact="0.35"/>
+          <dgm:constr type="l" for="ch" forName="circ5Tx"/>
+          <dgm:constr type="t" for="ch" forName="circ5Tx" refType="h" fact="0.31"/>
+          <dgm:constr type="w" for="ch" forName="circ5Tx" refType="w" fact="0.26"/>
+          <dgm:constr type="h" for="ch" forName="circ5Tx" refType="h" fact="0.255"/>
+          <dgm:constr type="primFontSz" for="ch" ptType="node" op="equ"/>
+        </dgm:constrLst>
+      </dgm:if>
+      <dgm:if name="Name15" axis="ch" ptType="node" func="cnt" op="equ" val="6">
+        <dgm:constrLst>
+          <dgm:constr type="ctrX" for="ch" forName="circ1" refType="w" fact="0.5"/>
+          <dgm:constr type="ctrY" for="ch" forName="circ1" refType="h" fact="0.3844"/>
+          <dgm:constr type="w" for="ch" forName="circ1" refType="w" fact="0.24"/>
+          <dgm:constr type="h" for="ch" forName="circ1" refType="h" fact="0.3084"/>
+          <dgm:constr type="l" for="ch" forName="circ1Tx" refType="w" fact="0.35"/>
+          <dgm:constr type="t" for="ch" forName="circ1Tx"/>
+          <dgm:constr type="w" for="ch" forName="circ1Tx" refType="w" fact="0.3"/>
+          <dgm:constr type="h" for="ch" forName="circ1Tx" refType="h" fact="0.21"/>
+          <dgm:constr type="ctrX" for="ch" forName="circ2" refType="w" fact="0.5779"/>
+          <dgm:constr type="ctrY" for="ch" forName="circ2" refType="h" fact="0.4422"/>
+          <dgm:constr type="w" for="ch" forName="circ2" refType="w" fact="0.24"/>
+          <dgm:constr type="h" for="ch" forName="circ2" refType="h" fact="0.3084"/>
+          <dgm:constr type="l" for="ch" forName="circ2Tx" refType="w" fact="0.7157"/>
+          <dgm:constr type="t" for="ch" forName="circ2Tx" refType="h" fact="0.2"/>
+          <dgm:constr type="w" for="ch" forName="circ2Tx" refType="w" fact="0.2843"/>
+          <dgm:constr type="h" for="ch" forName="circ2Tx" refType="h" fact="0.23"/>
+          <dgm:constr type="ctrX" for="ch" forName="circ3" refType="w" fact="0.5779"/>
+          <dgm:constr type="ctrY" for="ch" forName="circ3" refType="h" fact="0.5578"/>
+          <dgm:constr type="w" for="ch" forName="circ3" refType="w" fact="0.24"/>
+          <dgm:constr type="h" for="ch" forName="circ3" refType="h" fact="0.3084"/>
+          <dgm:constr type="l" for="ch" forName="circ3Tx" refType="w" fact="0.7157"/>
+          <dgm:constr type="t" for="ch" forName="circ3Tx" refType="h" fact="0.543"/>
+          <dgm:constr type="w" for="ch" forName="circ3Tx" refType="w" fact="0.2843"/>
+          <dgm:constr type="h" for="ch" forName="circ3Tx" refType="h" fact="0.257"/>
+          <dgm:constr type="ctrX" for="ch" forName="circ4" refType="w" fact="0.5"/>
+          <dgm:constr type="ctrY" for="ch" forName="circ4" refType="h" fact="0.6157"/>
+          <dgm:constr type="w" for="ch" forName="circ4" refType="w" fact="0.24"/>
+          <dgm:constr type="h" for="ch" forName="circ4" refType="h" fact="0.3084"/>
+          <dgm:constr type="l" for="ch" forName="circ4Tx" refType="w" fact="0.35"/>
+          <dgm:constr type="t" for="ch" forName="circ4Tx" refType="h" fact="0.79"/>
+          <dgm:constr type="w" for="ch" forName="circ4Tx" refType="w" fact="0.3"/>
+          <dgm:constr type="h" for="ch" forName="circ4Tx" refType="h" fact="0.21"/>
+          <dgm:constr type="ctrX" for="ch" forName="circ5" refType="w" fact="0.4221"/>
+          <dgm:constr type="ctrY" for="ch" forName="circ5" refType="h" fact="0.5578"/>
+          <dgm:constr type="w" for="ch" forName="circ5" refType="w" fact="0.24"/>
+          <dgm:constr type="h" for="ch" forName="circ5" refType="h" fact="0.3084"/>
+          <dgm:constr type="l" for="ch" forName="circ5Tx" refType="w" fact="0"/>
+          <dgm:constr type="t" for="ch" forName="circ5Tx" refType="h" fact="0.543"/>
+          <dgm:constr type="w" for="ch" forName="circ5Tx" refType="w" fact="0.2843"/>
+          <dgm:constr type="h" for="ch" forName="circ5Tx" refType="h" fact="0.257"/>
+          <dgm:constr type="ctrX" for="ch" forName="circ6" refType="w" fact="0.4221"/>
+          <dgm:constr type="ctrY" for="ch" forName="circ6" refType="h" fact="0.4422"/>
+          <dgm:constr type="w" for="ch" forName="circ6" refType="w" fact="0.24"/>
+          <dgm:constr type="h" for="ch" forName="circ6" refType="h" fact="0.3084"/>
+          <dgm:constr type="l" for="ch" forName="circ6Tx" refType="w" fact="0"/>
+          <dgm:constr type="t" for="ch" forName="circ6Tx" refType="h" fact="0.2"/>
+          <dgm:constr type="w" for="ch" forName="circ6Tx" refType="w" fact="0.2843"/>
+          <dgm:constr type="h" for="ch" forName="circ6Tx" refType="h" fact="0.257"/>
+          <dgm:constr type="primFontSz" for="ch" ptType="node" op="equ"/>
+        </dgm:constrLst>
+      </dgm:if>
+      <dgm:else name="Name16">
+        <dgm:constrLst>
+          <dgm:constr type="ctrX" for="ch" forName="circ1" refType="w" fact="0.5"/>
+          <dgm:constr type="ctrY" for="ch" forName="circ1" refType="h" fact="0.4177"/>
+          <dgm:constr type="w" for="ch" forName="circ1" refType="w" fact="0.24"/>
+          <dgm:constr type="h" for="ch" forName="circ1" refType="h" fact="0.3262"/>
+          <dgm:constr type="l" for="ch" forName="circ1Tx" refType="w" fact="0.3625"/>
+          <dgm:constr type="t" for="ch" forName="circ1Tx"/>
+          <dgm:constr type="w" for="ch" forName="circ1Tx" refType="w" fact="0.275"/>
+          <dgm:constr type="h" for="ch" forName="circ1Tx" refType="h" fact="0.2"/>
+          <dgm:constr type="ctrX" for="ch" forName="circ2" refType="w" fact="0.5704"/>
+          <dgm:constr type="ctrY" for="ch" forName="circ2" refType="h" fact="0.4637"/>
+          <dgm:constr type="w" for="ch" forName="circ2" refType="w" fact="0.24"/>
+          <dgm:constr type="h" for="ch" forName="circ2" refType="h" fact="0.3262"/>
+          <dgm:constr type="l" for="ch" forName="circ2Tx" refType="w" fact="0.72"/>
+          <dgm:constr type="t" for="ch" forName="circ2Tx" refType="h" fact="0.19"/>
+          <dgm:constr type="w" for="ch" forName="circ2Tx" refType="w" fact="0.26"/>
+          <dgm:constr type="h" for="ch" forName="circ2Tx" refType="h" fact="0.22"/>
+          <dgm:constr type="ctrX" for="ch" forName="circ3" refType="w" fact="0.5877"/>
+          <dgm:constr type="ctrY" for="ch" forName="circ3" refType="h" fact="0.5672"/>
+          <dgm:constr type="w" for="ch" forName="circ3" refType="w" fact="0.24"/>
+          <dgm:constr type="h" for="ch" forName="circ3" refType="h" fact="0.3262"/>
+          <dgm:constr type="l" for="ch" forName="circ3Tx" refType="w" fact="0.745"/>
+          <dgm:constr type="t" for="ch" forName="circ3Tx" refType="h" fact="0.47"/>
+          <dgm:constr type="w" for="ch" forName="circ3Tx" refType="w" fact="0.255"/>
+          <dgm:constr type="h" for="ch" forName="circ3Tx" refType="h" fact="0.235"/>
+          <dgm:constr type="ctrX" for="ch" forName="circ4" refType="w" fact="0.539"/>
+          <dgm:constr type="ctrY" for="ch" forName="circ4" refType="h" fact="0.6502"/>
+          <dgm:constr type="w" for="ch" forName="circ4" refType="w" fact="0.24"/>
+          <dgm:constr type="h" for="ch" forName="circ4" refType="h" fact="0.3262"/>
+          <dgm:constr type="l" for="ch" forName="circ4Tx" refType="w" fact="0.635"/>
+          <dgm:constr type="t" for="ch" forName="circ4Tx" refType="h" fact="0.785"/>
+          <dgm:constr type="w" for="ch" forName="circ4Tx" refType="w" fact="0.275"/>
+          <dgm:constr type="h" for="ch" forName="circ4Tx" refType="h" fact="0.215"/>
+          <dgm:constr type="ctrX" for="ch" forName="circ5" refType="w" fact="0.461"/>
+          <dgm:constr type="ctrY" for="ch" forName="circ5" refType="h" fact="0.6502"/>
+          <dgm:constr type="w" for="ch" forName="circ5" refType="w" fact="0.24"/>
+          <dgm:constr type="h" for="ch" forName="circ5" refType="h" fact="0.3262"/>
+          <dgm:constr type="l" for="ch" forName="circ5Tx" refType="w" fact="0.09"/>
+          <dgm:constr type="t" for="ch" forName="circ5Tx" refType="h" fact="0.785"/>
+          <dgm:constr type="w" for="ch" forName="circ5Tx" refType="w" fact="0.275"/>
+          <dgm:constr type="h" for="ch" forName="circ5Tx" refType="h" fact="0.215"/>
+          <dgm:constr type="ctrX" for="ch" forName="circ6" refType="w" fact="0.4123"/>
+          <dgm:constr type="ctrY" for="ch" forName="circ6" refType="h" fact="0.5672"/>
+          <dgm:constr type="w" for="ch" forName="circ6" refType="w" fact="0.24"/>
+          <dgm:constr type="h" for="ch" forName="circ6" refType="h" fact="0.3262"/>
+          <dgm:constr type="l" for="ch" forName="circ6Tx"/>
+          <dgm:constr type="t" for="ch" forName="circ6Tx" refType="h" fact="0.47"/>
+          <dgm:constr type="w" for="ch" forName="circ6Tx" refType="w" fact="0.255"/>
+          <dgm:constr type="h" for="ch" forName="circ6Tx" refType="h" fact="0.235"/>
+          <dgm:constr type="ctrX" for="ch" forName="circ7" refType="w" fact="0.4296"/>
+          <dgm:constr type="ctrY" for="ch" forName="circ7" refType="h" fact="0.4637"/>
+          <dgm:constr type="w" for="ch" forName="circ7" refType="w" fact="0.24"/>
+          <dgm:constr type="h" for="ch" forName="circ7" refType="h" fact="0.3262"/>
+          <dgm:constr type="l" for="ch" forName="circ7Tx" refType="w" fact="0.02"/>
+          <dgm:constr type="t" for="ch" forName="circ7Tx" refType="h" fact="0.19"/>
+          <dgm:constr type="w" for="ch" forName="circ7Tx" refType="w" fact="0.26"/>
+          <dgm:constr type="h" for="ch" forName="circ7Tx" refType="h" fact="0.22"/>
+          <dgm:constr type="primFontSz" for="ch" ptType="node" op="equ"/>
+        </dgm:constrLst>
+      </dgm:else>
+    </dgm:choose>
+    <dgm:ruleLst/>
+    <dgm:forEach name="Name17" axis="ch" ptType="node" cnt="1">
+      <dgm:choose name="Name18">
+        <dgm:if name="Name19" axis="root ch" ptType="all node" func="cnt" op="equ" val="1">
+          <dgm:layoutNode name="circ1TxSh" styleLbl="vennNode1">
+            <dgm:alg type="tx">
+              <dgm:param type="txAnchorHorzCh" val="ctr"/>
+              <dgm:param type="txAnchorVertCh" val="mid"/>
+            </dgm:alg>
+            <dgm:shape xmlns:r="http://schemas.openxmlformats.org/officeDocument/2006/relationships" type="ellipse" r:blip="">
+              <dgm:adjLst/>
+            </dgm:shape>
+            <dgm:choose name="Name20">
+              <dgm:if name="Name21" func="var" arg="dir" op="equ" val="norm">
+                <dgm:choose name="Name22">
+                  <dgm:if name="Name23" axis="root ch" ptType="all node" func="cnt" op="lte" val="4">
+                    <dgm:presOf axis="desOrSelf" ptType="node"/>
+                  </dgm:if>
+                  <dgm:else name="Name24">
+                    <dgm:presOf/>
+                  </dgm:else>
+                </dgm:choose>
+              </dgm:if>
+              <dgm:else name="Name25">
+                <dgm:choose name="Name26">
+                  <dgm:if name="Name27" axis="root ch" ptType="all node" func="cnt" op="equ" val="2">
+                    <dgm:presOf axis="root ch desOrSelf" ptType="all node node" st="1 2 1" cnt="1 1 0"/>
+                  </dgm:if>
+                  <dgm:else name="Name28">
+                    <dgm:presOf axis="desOrSelf" ptType="node"/>
+                  </dgm:else>
+                </dgm:choose>
+              </dgm:else>
+            </dgm:choose>
+            <dgm:constrLst>
+              <dgm:constr type="tMarg"/>
+              <dgm:constr type="bMarg"/>
+              <dgm:constr type="lMarg"/>
+              <dgm:constr type="rMarg"/>
+              <dgm:constr type="primFontSz" val="65"/>
+            </dgm:constrLst>
+            <dgm:ruleLst>
+              <dgm:rule type="primFontSz" val="5" fact="NaN" max="NaN"/>
+            </dgm:ruleLst>
+          </dgm:layoutNode>
+        </dgm:if>
+        <dgm:else name="Name29">
+          <dgm:layoutNode name="circ1" styleLbl="vennNode1">
+            <dgm:alg type="sp"/>
+            <dgm:shape xmlns:r="http://schemas.openxmlformats.org/officeDocument/2006/relationships" type="ellipse" r:blip="">
+              <dgm:adjLst/>
+            </dgm:shape>
+            <dgm:choose name="Name30">
+              <dgm:if name="Name31" func="var" arg="dir" op="equ" val="norm">
+                <dgm:choose name="Name32">
+                  <dgm:if name="Name33" axis="root ch" ptType="all node" func="cnt" op="lte" val="4">
+                    <dgm:presOf axis="desOrSelf" ptType="node"/>
+                  </dgm:if>
+                  <dgm:else name="Name34">
+                    <dgm:presOf/>
+                  </dgm:else>
+                </dgm:choose>
+              </dgm:if>
+              <dgm:else name="Name35">
+                <dgm:choose name="Name36">
+                  <dgm:if name="Name37" axis="root ch" ptType="all node" func="cnt" op="equ" val="2">
+                    <dgm:presOf axis="root ch desOrSelf" ptType="all node node" st="1 2 1" cnt="1 1 0"/>
+                  </dgm:if>
+                  <dgm:else name="Name38">
+                    <dgm:choose name="Name39">
+                      <dgm:if name="Name40" axis="root ch" ptType="all node" func="cnt" op="lte" val="4">
+                        <dgm:presOf axis="desOrSelf" ptType="node"/>
+                      </dgm:if>
+                      <dgm:else name="Name41">
+                        <dgm:presOf/>
+                      </dgm:else>
+                    </dgm:choose>
+                  </dgm:else>
+                </dgm:choose>
+              </dgm:else>
+            </dgm:choose>
+            <dgm:constrLst/>
+            <dgm:ruleLst/>
+          </dgm:layoutNode>
+          <dgm:layoutNode name="circ1Tx" styleLbl="revTx">
+            <dgm:varLst>
+              <dgm:chMax val="0"/>
+              <dgm:chPref val="0"/>
+              <dgm:bulletEnabled val="1"/>
+            </dgm:varLst>
+            <dgm:alg type="tx">
+              <dgm:param type="txAnchorHorzCh" val="ctr"/>
+              <dgm:param type="txAnchorVertCh" val="mid"/>
+            </dgm:alg>
+            <dgm:shape xmlns:r="http://schemas.openxmlformats.org/officeDocument/2006/relationships" type="rect" r:blip="" hideGeom="1">
+              <dgm:adjLst/>
+            </dgm:shape>
+            <dgm:choose name="Name42">
+              <dgm:if name="Name43" func="var" arg="dir" op="equ" val="norm">
+                <dgm:presOf axis="desOrSelf" ptType="node"/>
+              </dgm:if>
+              <dgm:else name="Name44">
+                <dgm:choose name="Name45">
+                  <dgm:if name="Name46" axis="root ch" ptType="all node" func="cnt" op="equ" val="2">
+                    <dgm:presOf axis="root ch desOrSelf" ptType="all node node" st="1 2 1" cnt="1 1 0"/>
+                  </dgm:if>
+                  <dgm:else name="Name47">
+                    <dgm:presOf axis="desOrSelf" ptType="node"/>
+                  </dgm:else>
+                </dgm:choose>
+              </dgm:else>
+            </dgm:choose>
+            <dgm:constrLst>
+              <dgm:constr type="tMarg"/>
+              <dgm:constr type="bMarg"/>
+              <dgm:constr type="lMarg"/>
+              <dgm:constr type="rMarg"/>
+              <dgm:constr type="primFontSz" val="65"/>
+            </dgm:constrLst>
+            <dgm:ruleLst>
+              <dgm:rule type="primFontSz" val="5" fact="NaN" max="NaN"/>
+            </dgm:ruleLst>
+          </dgm:layoutNode>
+        </dgm:else>
+      </dgm:choose>
+    </dgm:forEach>
+    <dgm:forEach name="Name48" axis="ch" ptType="node" st="2" cnt="1">
+      <dgm:layoutNode name="circ2" styleLbl="vennNode1">
+        <dgm:alg type="sp"/>
+        <dgm:shape xmlns:r="http://schemas.openxmlformats.org/officeDocument/2006/relationships" type="ellipse" r:blip="">
+          <dgm:adjLst/>
+        </dgm:shape>
+        <dgm:choose name="Name49">
+          <dgm:if name="Name50" func="var" arg="dir" op="equ" val="norm">
+            <dgm:choose name="Name51">
+              <dgm:if name="Name52" axis="root ch" ptType="all node" func="cnt" op="lte" val="4">
+                <dgm:presOf axis="desOrSelf" ptType="node"/>
+              </dgm:if>
+              <dgm:else name="Name53">
+                <dgm:presOf/>
+              </dgm:else>
+            </dgm:choose>
+          </dgm:if>
+          <dgm:else name="Name54">
+            <dgm:choose name="Name55">
+              <dgm:if name="Name56" axis="root ch" ptType="all node" func="cnt" op="equ" val="2">
+                <dgm:presOf axis="root ch desOrSelf" ptType="all node node" st="1 1 1" cnt="1 1 0"/>
+              </dgm:if>
+              <dgm:if name="Name57" axis="root ch" ptType="all node" func="cnt" op="equ" val="3">
+                <dgm:presOf axis="root ch desOrSelf" ptType="all node node" st="1 3 1" cnt="1 1 0"/>
+              </dgm:if>
+              <dgm:if name="Name58" axis="root ch" ptType="all node" func="cnt" op="equ" val="4">
+                <dgm:presOf axis="root ch desOrSelf" ptType="all node node" st="1 4 1" cnt="1 1 0"/>
+              </dgm:if>
+              <dgm:else name="Name59">
+                <dgm:presOf/>
+              </dgm:else>
+            </dgm:choose>
+          </dgm:else>
+        </dgm:choose>
+        <dgm:constrLst/>
+        <dgm:ruleLst/>
+      </dgm:layoutNode>
+      <dgm:layoutNode name="circ2Tx" styleLbl="revTx">
+        <dgm:varLst>
+          <dgm:chMax val="0"/>
+          <dgm:chPref val="0"/>
+          <dgm:bulletEnabled val="1"/>
+        </dgm:varLst>
+        <dgm:alg type="tx">
+          <dgm:param type="txAnchorHorzCh" val="ctr"/>
+          <dgm:param type="txAnchorVertCh" val="mid"/>
+        </dgm:alg>
+        <dgm:shape xmlns:r="http://schemas.openxmlformats.org/officeDocument/2006/relationships" type="rect" r:blip="" hideGeom="1">
+          <dgm:adjLst/>
+        </dgm:shape>
+        <dgm:choose name="Name60">
+          <dgm:if name="Name61" func="var" arg="dir" op="equ" val="norm">
+            <dgm:presOf axis="desOrSelf" ptType="node"/>
+          </dgm:if>
+          <dgm:else name="Name62">
+            <dgm:choose name="Name63">
+              <dgm:if name="Name64" axis="root ch" ptType="all node" func="cnt" op="equ" val="2">
+                <dgm:presOf axis="root ch desOrSelf" ptType="all node node" st="1 1 1" cnt="1 1 0"/>
+              </dgm:if>
+              <dgm:if name="Name65" axis="root ch" ptType="all node" func="cnt" op="equ" val="3">
+                <dgm:presOf axis="root ch desOrSelf" ptType="all node node" st="1 3 1" cnt="1 1 0"/>
+              </dgm:if>
+              <dgm:if name="Name66" axis="root ch" ptType="all node" func="cnt" op="equ" val="4">
+                <dgm:presOf axis="root ch desOrSelf" ptType="all node node" st="1 4 1" cnt="1 1 0"/>
+              </dgm:if>
+              <dgm:if name="Name67" axis="root ch" ptType="all node" func="cnt" op="equ" val="5">
+                <dgm:presOf axis="root ch desOrSelf" ptType="all node node" st="1 5 1" cnt="1 1 0"/>
+              </dgm:if>
+              <dgm:if name="Name68" axis="root ch" ptType="all node" func="cnt" op="equ" val="6">
+                <dgm:presOf axis="root ch desOrSelf" ptType="all node node" st="1 6 1" cnt="1 1 0"/>
+              </dgm:if>
+              <dgm:else name="Name69">
+                <dgm:presOf axis="root ch desOrSelf" ptType="all node node" st="1 7 1" cnt="1 1 0"/>
+              </dgm:else>
+            </dgm:choose>
+          </dgm:else>
+        </dgm:choose>
+        <dgm:constrLst>
+          <dgm:constr type="tMarg"/>
+          <dgm:constr type="bMarg"/>
+          <dgm:constr type="lMarg"/>
+          <dgm:constr type="rMarg"/>
+          <dgm:constr type="primFontSz" val="65"/>
+        </dgm:constrLst>
+        <dgm:ruleLst>
+          <dgm:rule type="primFontSz" val="5" fact="NaN" max="NaN"/>
+        </dgm:ruleLst>
+      </dgm:layoutNode>
+    </dgm:forEach>
+    <dgm:forEach name="Name70" axis="ch" ptType="node" st="3" cnt="1">
+      <dgm:layoutNode name="circ3" styleLbl="vennNode1">
+        <dgm:alg type="sp"/>
+        <dgm:shape xmlns:r="http://schemas.openxmlformats.org/officeDocument/2006/relationships" type="ellipse" r:blip="">
+          <dgm:adjLst/>
+        </dgm:shape>
+        <dgm:choose name="Name71">
+          <dgm:if name="Name72" func="var" arg="dir" op="equ" val="norm">
+            <dgm:choose name="Name73">
+              <dgm:if name="Name74" axis="root ch" ptType="all node" func="cnt" op="lte" val="4">
+                <dgm:presOf axis="desOrSelf" ptType="node"/>
+              </dgm:if>
+              <dgm:else name="Name75">
+                <dgm:presOf/>
+              </dgm:else>
+            </dgm:choose>
+          </dgm:if>
+          <dgm:else name="Name76">
+            <dgm:choose name="Name77">
+              <dgm:if name="Name78" axis="root ch" ptType="all node" func="cnt" op="equ" val="3">
+                <dgm:presOf axis="root ch desOrSelf" ptType="all node node" st="1 2 1" cnt="1 1 0"/>
+              </dgm:if>
+              <dgm:if name="Name79" axis="root ch" ptType="all node" func="cnt" op="equ" val="4">
+                <dgm:presOf axis="root ch desOrSelf" ptType="all node node" st="1 3 1" cnt="1 1 0"/>
+              </dgm:if>
+              <dgm:else name="Name80">
+                <dgm:presOf/>
+              </dgm:else>
+            </dgm:choose>
+          </dgm:else>
+        </dgm:choose>
+        <dgm:constrLst/>
+        <dgm:ruleLst/>
+      </dgm:layoutNode>
+      <dgm:layoutNode name="circ3Tx" styleLbl="revTx">
+        <dgm:varLst>
+          <dgm:chMax val="0"/>
+          <dgm:chPref val="0"/>
+          <dgm:bulletEnabled val="1"/>
+        </dgm:varLst>
+        <dgm:alg type="tx">
+          <dgm:param type="txAnchorHorzCh" val="ctr"/>
+          <dgm:param type="txAnchorVertCh" val="mid"/>
+        </dgm:alg>
+        <dgm:shape xmlns:r="http://schemas.openxmlformats.org/officeDocument/2006/relationships" type="rect" r:blip="" hideGeom="1">
+          <dgm:adjLst/>
+        </dgm:shape>
+        <dgm:choose name="Name81">
+          <dgm:if name="Name82" func="var" arg="dir" op="equ" val="norm">
+            <dgm:presOf axis="desOrSelf" ptType="node"/>
+          </dgm:if>
+          <dgm:else name="Name83">
+            <dgm:choose name="Name84">
+              <dgm:if name="Name85" axis="root ch" ptType="all node" func="cnt" op="equ" val="3">
+                <dgm:presOf axis="root ch desOrSelf" ptType="all node node" st="1 2 1" cnt="1 1 0"/>
+              </dgm:if>
+              <dgm:if name="Name86" axis="root ch" ptType="all node" func="cnt" op="equ" val="4">
+                <dgm:presOf axis="root ch desOrSelf" ptType="all node node" st="1 3 1" cnt="1 1 0"/>
+              </dgm:if>
+              <dgm:if name="Name87" axis="root ch" ptType="all node" func="cnt" op="equ" val="5">
+                <dgm:presOf axis="root ch desOrSelf" ptType="all node node" st="1 4 1" cnt="1 1 0"/>
+              </dgm:if>
+              <dgm:if name="Name88" axis="root ch" ptType="all node" func="cnt" op="equ" val="6">
+                <dgm:presOf axis="root ch desOrSelf" ptType="all node node" st="1 5 1" cnt="1 1 0"/>
+              </dgm:if>
+              <dgm:else name="Name89">
+                <dgm:presOf axis="root ch desOrSelf" ptType="all node node" st="1 6 1" cnt="1 1 0"/>
+              </dgm:else>
+            </dgm:choose>
+          </dgm:else>
+        </dgm:choose>
+        <dgm:constrLst>
+          <dgm:constr type="tMarg"/>
+          <dgm:constr type="bMarg"/>
+          <dgm:constr type="lMarg"/>
+          <dgm:constr type="rMarg"/>
+          <dgm:constr type="primFontSz" val="65"/>
+        </dgm:constrLst>
+        <dgm:ruleLst>
+          <dgm:rule type="primFontSz" val="5" fact="NaN" max="NaN"/>
+        </dgm:ruleLst>
+      </dgm:layoutNode>
+    </dgm:forEach>
+    <dgm:forEach name="Name90" axis="ch" ptType="node" st="4" cnt="1">
+      <dgm:layoutNode name="circ4" styleLbl="vennNode1">
+        <dgm:alg type="sp"/>
+        <dgm:shape xmlns:r="http://schemas.openxmlformats.org/officeDocument/2006/relationships" type="ellipse" r:blip="">
+          <dgm:adjLst/>
+        </dgm:shape>
+        <dgm:choose name="Name91">
+          <dgm:if name="Name92" func="var" arg="dir" op="equ" val="norm">
+            <dgm:choose name="Name93">
+              <dgm:if name="Name94" axis="root ch" ptType="all node" func="cnt" op="lte" val="4">
+                <dgm:presOf axis="desOrSelf" ptType="node"/>
+              </dgm:if>
+              <dgm:else name="Name95">
+                <dgm:presOf/>
+              </dgm:else>
+            </dgm:choose>
+          </dgm:if>
+          <dgm:else name="Name96">
+            <dgm:choose name="Name97">
+              <dgm:if name="Name98" axis="root ch" ptType="all node" func="cnt" op="equ" val="4">
+                <dgm:presOf axis="root ch desOrSelf" ptType="all node node" st="1 2 1" cnt="1 1 0"/>
+              </dgm:if>
+              <dgm:else name="Name99">
+                <dgm:presOf/>
+              </dgm:else>
+            </dgm:choose>
+          </dgm:else>
+        </dgm:choose>
+        <dgm:constrLst/>
+        <dgm:ruleLst/>
+      </dgm:layoutNode>
+      <dgm:layoutNode name="circ4Tx" styleLbl="revTx">
+        <dgm:varLst>
+          <dgm:chMax val="0"/>
+          <dgm:chPref val="0"/>
+          <dgm:bulletEnabled val="1"/>
+        </dgm:varLst>
+        <dgm:alg type="tx">
+          <dgm:param type="txAnchorHorzCh" val="ctr"/>
+          <dgm:param type="txAnchorVertCh" val="mid"/>
+        </dgm:alg>
+        <dgm:shape xmlns:r="http://schemas.openxmlformats.org/officeDocument/2006/relationships" type="rect" r:blip="" hideGeom="1">
+          <dgm:adjLst/>
+        </dgm:shape>
+        <dgm:choose name="Name100">
+          <dgm:if name="Name101" func="var" arg="dir" op="equ" val="norm">
+            <dgm:presOf axis="desOrSelf" ptType="node"/>
+          </dgm:if>
+          <dgm:else name="Name102">
+            <dgm:choose name="Name103">
+              <dgm:if name="Name104" axis="root ch" ptType="all node" func="cnt" op="equ" val="4">
+                <dgm:presOf axis="root ch desOrSelf" ptType="all node node" st="1 2 1" cnt="1 1 0"/>
+              </dgm:if>
+              <dgm:if name="Name105" axis="root ch" ptType="all node" func="cnt" op="equ" val="5">
+                <dgm:presOf axis="root ch desOrSelf" ptType="all node node" st="1 3 1" cnt="1 1 0"/>
+              </dgm:if>
+              <dgm:if name="Name106" axis="root ch" ptType="all node" func="cnt" op="equ" val="6">
+                <dgm:presOf axis="root ch desOrSelf" ptType="all node node" st="1 4 1" cnt="1 1 0"/>
+              </dgm:if>
+              <dgm:else name="Name107">
+                <dgm:presOf axis="root ch desOrSelf" ptType="all node node" st="1 5 1" cnt="1 1 0"/>
+              </dgm:else>
+            </dgm:choose>
+          </dgm:else>
+        </dgm:choose>
+        <dgm:constrLst>
+          <dgm:constr type="tMarg"/>
+          <dgm:constr type="bMarg"/>
+          <dgm:constr type="lMarg"/>
+          <dgm:constr type="rMarg"/>
+          <dgm:constr type="primFontSz" val="65"/>
+        </dgm:constrLst>
+        <dgm:ruleLst>
+          <dgm:rule type="primFontSz" val="5" fact="NaN" max="NaN"/>
+        </dgm:ruleLst>
+      </dgm:layoutNode>
+    </dgm:forEach>
+    <dgm:forEach name="Name108" axis="ch" ptType="node" st="5" cnt="1">
+      <dgm:layoutNode name="circ5" styleLbl="vennNode1">
+        <dgm:alg type="sp"/>
+        <dgm:shape xmlns:r="http://schemas.openxmlformats.org/officeDocument/2006/relationships" type="ellipse" r:blip="">
+          <dgm:adjLst/>
+        </dgm:shape>
+        <dgm:presOf/>
+        <dgm:constrLst/>
+        <dgm:ruleLst/>
+      </dgm:layoutNode>
+      <dgm:layoutNode name="circ5Tx" styleLbl="revTx">
+        <dgm:varLst>
+          <dgm:chMax val="0"/>
+          <dgm:chPref val="0"/>
+          <dgm:bulletEnabled val="1"/>
+        </dgm:varLst>
+        <dgm:alg type="tx">
+          <dgm:param type="txAnchorHorzCh" val="ctr"/>
+          <dgm:param type="txAnchorVertCh" val="mid"/>
+        </dgm:alg>
+        <dgm:shape xmlns:r="http://schemas.openxmlformats.org/officeDocument/2006/relationships" type="rect" r:blip="" hideGeom="1">
+          <dgm:adjLst/>
+        </dgm:shape>
+        <dgm:choose name="Name109">
+          <dgm:if name="Name110" func="var" arg="dir" op="equ" val="norm">
+            <dgm:presOf axis="desOrSelf" ptType="node"/>
+          </dgm:if>
+          <dgm:else name="Name111">
+            <dgm:choose name="Name112">
+              <dgm:if name="Name113" axis="root ch" ptType="all node" func="cnt" op="equ" val="5">
+                <dgm:presOf axis="root ch desOrSelf" ptType="all node node" st="1 2 1" cnt="1 1 0"/>
+              </dgm:if>
+              <dgm:if name="Name114" axis="root ch" ptType="all node" func="cnt" op="equ" val="6">
+                <dgm:presOf axis="root ch desOrSelf" ptType="all node node" st="1 3 1" cnt="1 1 0"/>
+              </dgm:if>
+              <dgm:else name="Name115">
+                <dgm:presOf axis="root ch desOrSelf" ptType="all node node" st="1 4 1" cnt="1 1 0"/>
+              </dgm:else>
+            </dgm:choose>
+          </dgm:else>
+        </dgm:choose>
+        <dgm:constrLst>
+          <dgm:constr type="tMarg"/>
+          <dgm:constr type="bMarg"/>
+          <dgm:constr type="lMarg"/>
+          <dgm:constr type="rMarg"/>
+          <dgm:constr type="primFontSz" val="65"/>
+        </dgm:constrLst>
+        <dgm:ruleLst>
+          <dgm:rule type="primFontSz" val="5" fact="NaN" max="NaN"/>
+        </dgm:ruleLst>
+      </dgm:layoutNode>
+    </dgm:forEach>
+    <dgm:forEach name="Name116" axis="ch" ptType="node" st="6" cnt="1">
+      <dgm:layoutNode name="circ6" styleLbl="vennNode1">
+        <dgm:alg type="sp"/>
+        <dgm:shape xmlns:r="http://schemas.openxmlformats.org/officeDocument/2006/relationships" type="ellipse" r:blip="">
+          <dgm:adjLst/>
+        </dgm:shape>
+        <dgm:presOf/>
+        <dgm:constrLst/>
+        <dgm:ruleLst/>
+      </dgm:layoutNode>
+      <dgm:layoutNode name="circ6Tx" styleLbl="revTx">
+        <dgm:varLst>
+          <dgm:chMax val="0"/>
+          <dgm:chPref val="0"/>
+          <dgm:bulletEnabled val="1"/>
+        </dgm:varLst>
+        <dgm:alg type="tx">
+          <dgm:param type="txAnchorHorzCh" val="ctr"/>
+          <dgm:param type="txAnchorVertCh" val="mid"/>
+        </dgm:alg>
+        <dgm:shape xmlns:r="http://schemas.openxmlformats.org/officeDocument/2006/relationships" type="rect" r:blip="" hideGeom="1">
+          <dgm:adjLst/>
+        </dgm:shape>
+        <dgm:choose name="Name117">
+          <dgm:if name="Name118" func="var" arg="dir" op="equ" val="norm">
+            <dgm:presOf axis="desOrSelf" ptType="node"/>
+          </dgm:if>
+          <dgm:else name="Name119">
+            <dgm:choose name="Name120">
+              <dgm:if name="Name121" axis="root ch" ptType="all node" func="cnt" op="equ" val="6">
+                <dgm:presOf axis="root ch desOrSelf" ptType="all node node" st="1 2 1" cnt="1 1 0"/>
+              </dgm:if>
+              <dgm:else name="Name122">
+                <dgm:presOf axis="root ch desOrSelf" ptType="all node node" st="1 3 1" cnt="1 1 0"/>
+              </dgm:else>
+            </dgm:choose>
+          </dgm:else>
+        </dgm:choose>
+        <dgm:constrLst>
+          <dgm:constr type="tMarg"/>
+          <dgm:constr type="bMarg"/>
+          <dgm:constr type="lMarg"/>
+          <dgm:constr type="rMarg"/>
+          <dgm:constr type="primFontSz" val="65"/>
+        </dgm:constrLst>
+        <dgm:ruleLst>
+          <dgm:rule type="primFontSz" val="5" fact="NaN" max="NaN"/>
+        </dgm:ruleLst>
+      </dgm:layoutNode>
+    </dgm:forEach>
+    <dgm:forEach name="Name123" axis="ch" ptType="node" st="7" cnt="1">
+      <dgm:layoutNode name="circ7" styleLbl="vennNode1">
+        <dgm:alg type="sp"/>
+        <dgm:shape xmlns:r="http://schemas.openxmlformats.org/officeDocument/2006/relationships" type="ellipse" r:blip="">
+          <dgm:adjLst/>
+        </dgm:shape>
+        <dgm:presOf/>
+        <dgm:constrLst/>
+        <dgm:ruleLst/>
+      </dgm:layoutNode>
+      <dgm:layoutNode name="circ7Tx" styleLbl="revTx">
+        <dgm:varLst>
+          <dgm:chMax val="0"/>
+          <dgm:chPref val="0"/>
+          <dgm:bulletEnabled val="1"/>
+        </dgm:varLst>
+        <dgm:alg type="tx">
+          <dgm:param type="txAnchorHorzCh" val="ctr"/>
+          <dgm:param type="txAnchorVertCh" val="mid"/>
+        </dgm:alg>
+        <dgm:shape xmlns:r="http://schemas.openxmlformats.org/officeDocument/2006/relationships" type="rect" r:blip="" hideGeom="1">
+          <dgm:adjLst/>
+        </dgm:shape>
+        <dgm:choose name="Name124">
+          <dgm:if name="Name125" func="var" arg="dir" op="equ" val="norm">
+            <dgm:presOf axis="desOrSelf" ptType="node"/>
+          </dgm:if>
+          <dgm:else name="Name126">
+            <dgm:presOf axis="root ch desOrSelf" ptType="all node node" st="1 2 1" cnt="1 1 0"/>
+          </dgm:else>
+        </dgm:choose>
+        <dgm:constrLst>
+          <dgm:constr type="tMarg"/>
+          <dgm:constr type="bMarg"/>
+          <dgm:constr type="lMarg"/>
+          <dgm:constr type="rMarg"/>
+          <dgm:constr type="primFontSz" val="65"/>
+        </dgm:constrLst>
+        <dgm:ruleLst>
+          <dgm:rule type="primFontSz" val="5" fact="NaN" max="NaN"/>
+        </dgm:ruleLst>
+      </dgm:layoutNode>
+    </dgm:forEach>
+  </dgm:layoutNode>
+</dgm:layoutDef>
+</file>
+
+<file path=ppt/diagrams/layout2.xml><?xml version="1.0" encoding="utf-8"?>
 <dgm:layoutDef xmlns:dgm="http://schemas.openxmlformats.org/drawingml/2006/diagram" xmlns:a="http://schemas.openxmlformats.org/drawingml/2006/main" uniqueId="urn:microsoft.com/office/officeart/2005/8/layout/process2">
   <dgm:title val=""/>
   <dgm:desc val=""/>
@@ -3325,6 +5427,1040 @@
 </dgm:styleDef>
 </file>
 
+<file path=ppt/diagrams/quickStyle2.xml><?xml version="1.0" encoding="utf-8"?>
+<dgm:styleDef xmlns:dgm="http://schemas.openxmlformats.org/drawingml/2006/diagram" xmlns:a="http://schemas.openxmlformats.org/drawingml/2006/main" uniqueId="urn:microsoft.com/office/officeart/2005/8/quickstyle/simple1">
+  <dgm:title val=""/>
+  <dgm:desc val=""/>
+  <dgm:catLst>
+    <dgm:cat type="simple" pri="10100"/>
+  </dgm:catLst>
+  <dgm:scene3d>
+    <a:camera prst="orthographicFront"/>
+    <a:lightRig rig="threePt" dir="t"/>
+  </dgm:scene3d>
+  <dgm:styleLbl name="node0">
+    <dgm:scene3d>
+      <a:camera prst="orthographicFront"/>
+      <a:lightRig rig="threePt" dir="t"/>
+    </dgm:scene3d>
+    <dgm:sp3d/>
+    <dgm:txPr/>
+    <dgm:style>
+      <a:lnRef idx="2">
+        <a:scrgbClr r="0" g="0" b="0"/>
+      </a:lnRef>
+      <a:fillRef idx="1">
+        <a:scrgbClr r="0" g="0" b="0"/>
+      </a:fillRef>
+      <a:effectRef idx="0">
+        <a:scrgbClr r="0" g="0" b="0"/>
+      </a:effectRef>
+      <a:fontRef idx="minor">
+        <a:schemeClr val="lt1"/>
+      </a:fontRef>
+    </dgm:style>
+  </dgm:styleLbl>
+  <dgm:styleLbl name="lnNode1">
+    <dgm:scene3d>
+      <a:camera prst="orthographicFront"/>
+      <a:lightRig rig="threePt" dir="t"/>
+    </dgm:scene3d>
+    <dgm:sp3d/>
+    <dgm:txPr/>
+    <dgm:style>
+      <a:lnRef idx="2">
+        <a:scrgbClr r="0" g="0" b="0"/>
+      </a:lnRef>
+      <a:fillRef idx="1">
+        <a:scrgbClr r="0" g="0" b="0"/>
+      </a:fillRef>
+      <a:effectRef idx="0">
+        <a:scrgbClr r="0" g="0" b="0"/>
+      </a:effectRef>
+      <a:fontRef idx="minor">
+        <a:schemeClr val="lt1"/>
+      </a:fontRef>
+    </dgm:style>
+  </dgm:styleLbl>
+  <dgm:styleLbl name="vennNode1">
+    <dgm:scene3d>
+      <a:camera prst="orthographicFront"/>
+      <a:lightRig rig="threePt" dir="t"/>
+    </dgm:scene3d>
+    <dgm:sp3d/>
+    <dgm:txPr/>
+    <dgm:style>
+      <a:lnRef idx="2">
+        <a:scrgbClr r="0" g="0" b="0"/>
+      </a:lnRef>
+      <a:fillRef idx="1">
+        <a:scrgbClr r="0" g="0" b="0"/>
+      </a:fillRef>
+      <a:effectRef idx="0">
+        <a:scrgbClr r="0" g="0" b="0"/>
+      </a:effectRef>
+      <a:fontRef idx="minor">
+        <a:schemeClr val="tx1"/>
+      </a:fontRef>
+    </dgm:style>
+  </dgm:styleLbl>
+  <dgm:styleLbl name="alignNode1">
+    <dgm:scene3d>
+      <a:camera prst="orthographicFront"/>
+      <a:lightRig rig="threePt" dir="t"/>
+    </dgm:scene3d>
+    <dgm:sp3d/>
+    <dgm:txPr/>
+    <dgm:style>
+      <a:lnRef idx="2">
+        <a:scrgbClr r="0" g="0" b="0"/>
+      </a:lnRef>
+      <a:fillRef idx="1">
+        <a:scrgbClr r="0" g="0" b="0"/>
+      </a:fillRef>
+      <a:effectRef idx="0">
+        <a:scrgbClr r="0" g="0" b="0"/>
+      </a:effectRef>
+      <a:fontRef idx="minor">
+        <a:schemeClr val="lt1"/>
+      </a:fontRef>
+    </dgm:style>
+  </dgm:styleLbl>
+  <dgm:styleLbl name="node1">
+    <dgm:scene3d>
+      <a:camera prst="orthographicFront"/>
+      <a:lightRig rig="threePt" dir="t"/>
+    </dgm:scene3d>
+    <dgm:sp3d/>
+    <dgm:txPr/>
+    <dgm:style>
+      <a:lnRef idx="2">
+        <a:scrgbClr r="0" g="0" b="0"/>
+      </a:lnRef>
+      <a:fillRef idx="1">
+        <a:scrgbClr r="0" g="0" b="0"/>
+      </a:fillRef>
+      <a:effectRef idx="0">
+        <a:scrgbClr r="0" g="0" b="0"/>
+      </a:effectRef>
+      <a:fontRef idx="minor">
+        <a:schemeClr val="lt1"/>
+      </a:fontRef>
+    </dgm:style>
+  </dgm:styleLbl>
+  <dgm:styleLbl name="node2">
+    <dgm:scene3d>
+      <a:camera prst="orthographicFront"/>
+      <a:lightRig rig="threePt" dir="t"/>
+    </dgm:scene3d>
+    <dgm:sp3d/>
+    <dgm:txPr/>
+    <dgm:style>
+      <a:lnRef idx="2">
+        <a:scrgbClr r="0" g="0" b="0"/>
+      </a:lnRef>
+      <a:fillRef idx="1">
+        <a:scrgbClr r="0" g="0" b="0"/>
+      </a:fillRef>
+      <a:effectRef idx="0">
+        <a:scrgbClr r="0" g="0" b="0"/>
+      </a:effectRef>
+      <a:fontRef idx="minor">
+        <a:schemeClr val="lt1"/>
+      </a:fontRef>
+    </dgm:style>
+  </dgm:styleLbl>
+  <dgm:styleLbl name="node3">
+    <dgm:scene3d>
+      <a:camera prst="orthographicFront"/>
+      <a:lightRig rig="threePt" dir="t"/>
+    </dgm:scene3d>
+    <dgm:sp3d/>
+    <dgm:txPr/>
+    <dgm:style>
+      <a:lnRef idx="2">
+        <a:scrgbClr r="0" g="0" b="0"/>
+      </a:lnRef>
+      <a:fillRef idx="1">
+        <a:scrgbClr r="0" g="0" b="0"/>
+      </a:fillRef>
+      <a:effectRef idx="0">
+        <a:scrgbClr r="0" g="0" b="0"/>
+      </a:effectRef>
+      <a:fontRef idx="minor">
+        <a:schemeClr val="lt1"/>
+      </a:fontRef>
+    </dgm:style>
+  </dgm:styleLbl>
+  <dgm:styleLbl name="node4">
+    <dgm:scene3d>
+      <a:camera prst="orthographicFront"/>
+      <a:lightRig rig="threePt" dir="t"/>
+    </dgm:scene3d>
+    <dgm:sp3d/>
+    <dgm:txPr/>
+    <dgm:style>
+      <a:lnRef idx="2">
+        <a:scrgbClr r="0" g="0" b="0"/>
+      </a:lnRef>
+      <a:fillRef idx="1">
+        <a:scrgbClr r="0" g="0" b="0"/>
+      </a:fillRef>
+      <a:effectRef idx="0">
+        <a:scrgbClr r="0" g="0" b="0"/>
+      </a:effectRef>
+      <a:fontRef idx="minor">
+        <a:schemeClr val="lt1"/>
+      </a:fontRef>
+    </dgm:style>
+  </dgm:styleLbl>
+  <dgm:styleLbl name="fgImgPlace1">
+    <dgm:scene3d>
+      <a:camera prst="orthographicFront"/>
+      <a:lightRig rig="threePt" dir="t"/>
+    </dgm:scene3d>
+    <dgm:sp3d/>
+    <dgm:txPr/>
+    <dgm:style>
+      <a:lnRef idx="2">
+        <a:scrgbClr r="0" g="0" b="0"/>
+      </a:lnRef>
+      <a:fillRef idx="1">
+        <a:scrgbClr r="0" g="0" b="0"/>
+      </a:fillRef>
+      <a:effectRef idx="0">
+        <a:scrgbClr r="0" g="0" b="0"/>
+      </a:effectRef>
+      <a:fontRef idx="minor"/>
+    </dgm:style>
+  </dgm:styleLbl>
+  <dgm:styleLbl name="alignImgPlace1">
+    <dgm:scene3d>
+      <a:camera prst="orthographicFront"/>
+      <a:lightRig rig="threePt" dir="t"/>
+    </dgm:scene3d>
+    <dgm:sp3d/>
+    <dgm:txPr/>
+    <dgm:style>
+      <a:lnRef idx="2">
+        <a:scrgbClr r="0" g="0" b="0"/>
+      </a:lnRef>
+      <a:fillRef idx="1">
+        <a:scrgbClr r="0" g="0" b="0"/>
+      </a:fillRef>
+      <a:effectRef idx="0">
+        <a:scrgbClr r="0" g="0" b="0"/>
+      </a:effectRef>
+      <a:fontRef idx="minor"/>
+    </dgm:style>
+  </dgm:styleLbl>
+  <dgm:styleLbl name="bgImgPlace1">
+    <dgm:scene3d>
+      <a:camera prst="orthographicFront"/>
+      <a:lightRig rig="threePt" dir="t"/>
+    </dgm:scene3d>
+    <dgm:sp3d/>
+    <dgm:txPr/>
+    <dgm:style>
+      <a:lnRef idx="2">
+        <a:scrgbClr r="0" g="0" b="0"/>
+      </a:lnRef>
+      <a:fillRef idx="1">
+        <a:scrgbClr r="0" g="0" b="0"/>
+      </a:fillRef>
+      <a:effectRef idx="0">
+        <a:scrgbClr r="0" g="0" b="0"/>
+      </a:effectRef>
+      <a:fontRef idx="minor"/>
+    </dgm:style>
+  </dgm:styleLbl>
+  <dgm:styleLbl name="sibTrans2D1">
+    <dgm:scene3d>
+      <a:camera prst="orthographicFront"/>
+      <a:lightRig rig="threePt" dir="t"/>
+    </dgm:scene3d>
+    <dgm:sp3d/>
+    <dgm:txPr/>
+    <dgm:style>
+      <a:lnRef idx="0">
+        <a:scrgbClr r="0" g="0" b="0"/>
+      </a:lnRef>
+      <a:fillRef idx="1">
+        <a:scrgbClr r="0" g="0" b="0"/>
+      </a:fillRef>
+      <a:effectRef idx="0">
+        <a:scrgbClr r="0" g="0" b="0"/>
+      </a:effectRef>
+      <a:fontRef idx="minor">
+        <a:schemeClr val="lt1"/>
+      </a:fontRef>
+    </dgm:style>
+  </dgm:styleLbl>
+  <dgm:styleLbl name="fgSibTrans2D1">
+    <dgm:scene3d>
+      <a:camera prst="orthographicFront"/>
+      <a:lightRig rig="threePt" dir="t"/>
+    </dgm:scene3d>
+    <dgm:sp3d/>
+    <dgm:txPr/>
+    <dgm:style>
+      <a:lnRef idx="0">
+        <a:scrgbClr r="0" g="0" b="0"/>
+      </a:lnRef>
+      <a:fillRef idx="1">
+        <a:scrgbClr r="0" g="0" b="0"/>
+      </a:fillRef>
+      <a:effectRef idx="0">
+        <a:scrgbClr r="0" g="0" b="0"/>
+      </a:effectRef>
+      <a:fontRef idx="minor">
+        <a:schemeClr val="lt1"/>
+      </a:fontRef>
+    </dgm:style>
+  </dgm:styleLbl>
+  <dgm:styleLbl name="bgSibTrans2D1">
+    <dgm:scene3d>
+      <a:camera prst="orthographicFront"/>
+      <a:lightRig rig="threePt" dir="t"/>
+    </dgm:scene3d>
+    <dgm:sp3d/>
+    <dgm:txPr/>
+    <dgm:style>
+      <a:lnRef idx="0">
+        <a:scrgbClr r="0" g="0" b="0"/>
+      </a:lnRef>
+      <a:fillRef idx="1">
+        <a:scrgbClr r="0" g="0" b="0"/>
+      </a:fillRef>
+      <a:effectRef idx="0">
+        <a:scrgbClr r="0" g="0" b="0"/>
+      </a:effectRef>
+      <a:fontRef idx="minor">
+        <a:schemeClr val="lt1"/>
+      </a:fontRef>
+    </dgm:style>
+  </dgm:styleLbl>
+  <dgm:styleLbl name="sibTrans1D1">
+    <dgm:scene3d>
+      <a:camera prst="orthographicFront"/>
+      <a:lightRig rig="threePt" dir="t"/>
+    </dgm:scene3d>
+    <dgm:sp3d/>
+    <dgm:txPr/>
+    <dgm:style>
+      <a:lnRef idx="1">
+        <a:scrgbClr r="0" g="0" b="0"/>
+      </a:lnRef>
+      <a:fillRef idx="0">
+        <a:scrgbClr r="0" g="0" b="0"/>
+      </a:fillRef>
+      <a:effectRef idx="0">
+        <a:scrgbClr r="0" g="0" b="0"/>
+      </a:effectRef>
+      <a:fontRef idx="minor"/>
+    </dgm:style>
+  </dgm:styleLbl>
+  <dgm:styleLbl name="callout">
+    <dgm:scene3d>
+      <a:camera prst="orthographicFront"/>
+      <a:lightRig rig="threePt" dir="t"/>
+    </dgm:scene3d>
+    <dgm:sp3d/>
+    <dgm:txPr/>
+    <dgm:style>
+      <a:lnRef idx="2">
+        <a:scrgbClr r="0" g="0" b="0"/>
+      </a:lnRef>
+      <a:fillRef idx="1">
+        <a:scrgbClr r="0" g="0" b="0"/>
+      </a:fillRef>
+      <a:effectRef idx="0">
+        <a:scrgbClr r="0" g="0" b="0"/>
+      </a:effectRef>
+      <a:fontRef idx="minor"/>
+    </dgm:style>
+  </dgm:styleLbl>
+  <dgm:styleLbl name="asst0">
+    <dgm:scene3d>
+      <a:camera prst="orthographicFront"/>
+      <a:lightRig rig="threePt" dir="t"/>
+    </dgm:scene3d>
+    <dgm:sp3d/>
+    <dgm:txPr/>
+    <dgm:style>
+      <a:lnRef idx="2">
+        <a:scrgbClr r="0" g="0" b="0"/>
+      </a:lnRef>
+      <a:fillRef idx="1">
+        <a:scrgbClr r="0" g="0" b="0"/>
+      </a:fillRef>
+      <a:effectRef idx="0">
+        <a:scrgbClr r="0" g="0" b="0"/>
+      </a:effectRef>
+      <a:fontRef idx="minor">
+        <a:schemeClr val="lt1"/>
+      </a:fontRef>
+    </dgm:style>
+  </dgm:styleLbl>
+  <dgm:styleLbl name="asst1">
+    <dgm:scene3d>
+      <a:camera prst="orthographicFront"/>
+      <a:lightRig rig="threePt" dir="t"/>
+    </dgm:scene3d>
+    <dgm:sp3d/>
+    <dgm:txPr/>
+    <dgm:style>
+      <a:lnRef idx="2">
+        <a:scrgbClr r="0" g="0" b="0"/>
+      </a:lnRef>
+      <a:fillRef idx="1">
+        <a:scrgbClr r="0" g="0" b="0"/>
+      </a:fillRef>
+      <a:effectRef idx="0">
+        <a:scrgbClr r="0" g="0" b="0"/>
+      </a:effectRef>
+      <a:fontRef idx="minor">
+        <a:schemeClr val="lt1"/>
+      </a:fontRef>
+    </dgm:style>
+  </dgm:styleLbl>
+  <dgm:styleLbl name="asst2">
+    <dgm:scene3d>
+      <a:camera prst="orthographicFront"/>
+      <a:lightRig rig="threePt" dir="t"/>
+    </dgm:scene3d>
+    <dgm:sp3d/>
+    <dgm:txPr/>
+    <dgm:style>
+      <a:lnRef idx="2">
+        <a:scrgbClr r="0" g="0" b="0"/>
+      </a:lnRef>
+      <a:fillRef idx="1">
+        <a:scrgbClr r="0" g="0" b="0"/>
+      </a:fillRef>
+      <a:effectRef idx="0">
+        <a:scrgbClr r="0" g="0" b="0"/>
+      </a:effectRef>
+      <a:fontRef idx="minor">
+        <a:schemeClr val="lt1"/>
+      </a:fontRef>
+    </dgm:style>
+  </dgm:styleLbl>
+  <dgm:styleLbl name="asst3">
+    <dgm:scene3d>
+      <a:camera prst="orthographicFront"/>
+      <a:lightRig rig="threePt" dir="t"/>
+    </dgm:scene3d>
+    <dgm:sp3d/>
+    <dgm:txPr/>
+    <dgm:style>
+      <a:lnRef idx="2">
+        <a:scrgbClr r="0" g="0" b="0"/>
+      </a:lnRef>
+      <a:fillRef idx="1">
+        <a:scrgbClr r="0" g="0" b="0"/>
+      </a:fillRef>
+      <a:effectRef idx="0">
+        <a:scrgbClr r="0" g="0" b="0"/>
+      </a:effectRef>
+      <a:fontRef idx="minor">
+        <a:schemeClr val="lt1"/>
+      </a:fontRef>
+    </dgm:style>
+  </dgm:styleLbl>
+  <dgm:styleLbl name="asst4">
+    <dgm:scene3d>
+      <a:camera prst="orthographicFront"/>
+      <a:lightRig rig="threePt" dir="t"/>
+    </dgm:scene3d>
+    <dgm:sp3d/>
+    <dgm:txPr/>
+    <dgm:style>
+      <a:lnRef idx="2">
+        <a:scrgbClr r="0" g="0" b="0"/>
+      </a:lnRef>
+      <a:fillRef idx="1">
+        <a:scrgbClr r="0" g="0" b="0"/>
+      </a:fillRef>
+      <a:effectRef idx="0">
+        <a:scrgbClr r="0" g="0" b="0"/>
+      </a:effectRef>
+      <a:fontRef idx="minor">
+        <a:schemeClr val="lt1"/>
+      </a:fontRef>
+    </dgm:style>
+  </dgm:styleLbl>
+  <dgm:styleLbl name="parChTrans2D1">
+    <dgm:scene3d>
+      <a:camera prst="orthographicFront"/>
+      <a:lightRig rig="threePt" dir="t"/>
+    </dgm:scene3d>
+    <dgm:sp3d/>
+    <dgm:txPr/>
+    <dgm:style>
+      <a:lnRef idx="2">
+        <a:scrgbClr r="0" g="0" b="0"/>
+      </a:lnRef>
+      <a:fillRef idx="1">
+        <a:scrgbClr r="0" g="0" b="0"/>
+      </a:fillRef>
+      <a:effectRef idx="0">
+        <a:scrgbClr r="0" g="0" b="0"/>
+      </a:effectRef>
+      <a:fontRef idx="minor">
+        <a:schemeClr val="lt1"/>
+      </a:fontRef>
+    </dgm:style>
+  </dgm:styleLbl>
+  <dgm:styleLbl name="parChTrans2D2">
+    <dgm:scene3d>
+      <a:camera prst="orthographicFront"/>
+      <a:lightRig rig="threePt" dir="t"/>
+    </dgm:scene3d>
+    <dgm:sp3d/>
+    <dgm:txPr/>
+    <dgm:style>
+      <a:lnRef idx="2">
+        <a:scrgbClr r="0" g="0" b="0"/>
+      </a:lnRef>
+      <a:fillRef idx="1">
+        <a:scrgbClr r="0" g="0" b="0"/>
+      </a:fillRef>
+      <a:effectRef idx="0">
+        <a:scrgbClr r="0" g="0" b="0"/>
+      </a:effectRef>
+      <a:fontRef idx="minor">
+        <a:schemeClr val="lt1"/>
+      </a:fontRef>
+    </dgm:style>
+  </dgm:styleLbl>
+  <dgm:styleLbl name="parChTrans2D3">
+    <dgm:scene3d>
+      <a:camera prst="orthographicFront"/>
+      <a:lightRig rig="threePt" dir="t"/>
+    </dgm:scene3d>
+    <dgm:sp3d/>
+    <dgm:txPr/>
+    <dgm:style>
+      <a:lnRef idx="2">
+        <a:scrgbClr r="0" g="0" b="0"/>
+      </a:lnRef>
+      <a:fillRef idx="1">
+        <a:scrgbClr r="0" g="0" b="0"/>
+      </a:fillRef>
+      <a:effectRef idx="0">
+        <a:scrgbClr r="0" g="0" b="0"/>
+      </a:effectRef>
+      <a:fontRef idx="minor">
+        <a:schemeClr val="lt1"/>
+      </a:fontRef>
+    </dgm:style>
+  </dgm:styleLbl>
+  <dgm:styleLbl name="parChTrans2D4">
+    <dgm:scene3d>
+      <a:camera prst="orthographicFront"/>
+      <a:lightRig rig="threePt" dir="t"/>
+    </dgm:scene3d>
+    <dgm:sp3d/>
+    <dgm:txPr/>
+    <dgm:style>
+      <a:lnRef idx="2">
+        <a:scrgbClr r="0" g="0" b="0"/>
+      </a:lnRef>
+      <a:fillRef idx="1">
+        <a:scrgbClr r="0" g="0" b="0"/>
+      </a:fillRef>
+      <a:effectRef idx="0">
+        <a:scrgbClr r="0" g="0" b="0"/>
+      </a:effectRef>
+      <a:fontRef idx="minor">
+        <a:schemeClr val="lt1"/>
+      </a:fontRef>
+    </dgm:style>
+  </dgm:styleLbl>
+  <dgm:styleLbl name="parChTrans1D1">
+    <dgm:scene3d>
+      <a:camera prst="orthographicFront"/>
+      <a:lightRig rig="threePt" dir="t"/>
+    </dgm:scene3d>
+    <dgm:sp3d/>
+    <dgm:txPr/>
+    <dgm:style>
+      <a:lnRef idx="2">
+        <a:scrgbClr r="0" g="0" b="0"/>
+      </a:lnRef>
+      <a:fillRef idx="0">
+        <a:scrgbClr r="0" g="0" b="0"/>
+      </a:fillRef>
+      <a:effectRef idx="0">
+        <a:scrgbClr r="0" g="0" b="0"/>
+      </a:effectRef>
+      <a:fontRef idx="minor"/>
+    </dgm:style>
+  </dgm:styleLbl>
+  <dgm:styleLbl name="parChTrans1D2">
+    <dgm:scene3d>
+      <a:camera prst="orthographicFront"/>
+      <a:lightRig rig="threePt" dir="t"/>
+    </dgm:scene3d>
+    <dgm:sp3d/>
+    <dgm:txPr/>
+    <dgm:style>
+      <a:lnRef idx="2">
+        <a:scrgbClr r="0" g="0" b="0"/>
+      </a:lnRef>
+      <a:fillRef idx="0">
+        <a:scrgbClr r="0" g="0" b="0"/>
+      </a:fillRef>
+      <a:effectRef idx="0">
+        <a:scrgbClr r="0" g="0" b="0"/>
+      </a:effectRef>
+      <a:fontRef idx="minor"/>
+    </dgm:style>
+  </dgm:styleLbl>
+  <dgm:styleLbl name="parChTrans1D3">
+    <dgm:scene3d>
+      <a:camera prst="orthographicFront"/>
+      <a:lightRig rig="threePt" dir="t"/>
+    </dgm:scene3d>
+    <dgm:sp3d/>
+    <dgm:txPr/>
+    <dgm:style>
+      <a:lnRef idx="2">
+        <a:scrgbClr r="0" g="0" b="0"/>
+      </a:lnRef>
+      <a:fillRef idx="0">
+        <a:scrgbClr r="0" g="0" b="0"/>
+      </a:fillRef>
+      <a:effectRef idx="0">
+        <a:scrgbClr r="0" g="0" b="0"/>
+      </a:effectRef>
+      <a:fontRef idx="minor"/>
+    </dgm:style>
+  </dgm:styleLbl>
+  <dgm:styleLbl name="parChTrans1D4">
+    <dgm:scene3d>
+      <a:camera prst="orthographicFront"/>
+      <a:lightRig rig="threePt" dir="t"/>
+    </dgm:scene3d>
+    <dgm:sp3d/>
+    <dgm:txPr/>
+    <dgm:style>
+      <a:lnRef idx="2">
+        <a:scrgbClr r="0" g="0" b="0"/>
+      </a:lnRef>
+      <a:fillRef idx="0">
+        <a:scrgbClr r="0" g="0" b="0"/>
+      </a:fillRef>
+      <a:effectRef idx="0">
+        <a:scrgbClr r="0" g="0" b="0"/>
+      </a:effectRef>
+      <a:fontRef idx="minor"/>
+    </dgm:style>
+  </dgm:styleLbl>
+  <dgm:styleLbl name="fgAcc1">
+    <dgm:scene3d>
+      <a:camera prst="orthographicFront"/>
+      <a:lightRig rig="threePt" dir="t"/>
+    </dgm:scene3d>
+    <dgm:sp3d/>
+    <dgm:txPr/>
+    <dgm:style>
+      <a:lnRef idx="2">
+        <a:scrgbClr r="0" g="0" b="0"/>
+      </a:lnRef>
+      <a:fillRef idx="1">
+        <a:scrgbClr r="0" g="0" b="0"/>
+      </a:fillRef>
+      <a:effectRef idx="0">
+        <a:scrgbClr r="0" g="0" b="0"/>
+      </a:effectRef>
+      <a:fontRef idx="minor"/>
+    </dgm:style>
+  </dgm:styleLbl>
+  <dgm:styleLbl name="conFgAcc1">
+    <dgm:scene3d>
+      <a:camera prst="orthographicFront"/>
+      <a:lightRig rig="threePt" dir="t"/>
+    </dgm:scene3d>
+    <dgm:sp3d/>
+    <dgm:txPr/>
+    <dgm:style>
+      <a:lnRef idx="2">
+        <a:scrgbClr r="0" g="0" b="0"/>
+      </a:lnRef>
+      <a:fillRef idx="1">
+        <a:scrgbClr r="0" g="0" b="0"/>
+      </a:fillRef>
+      <a:effectRef idx="0">
+        <a:scrgbClr r="0" g="0" b="0"/>
+      </a:effectRef>
+      <a:fontRef idx="minor"/>
+    </dgm:style>
+  </dgm:styleLbl>
+  <dgm:styleLbl name="alignAcc1">
+    <dgm:scene3d>
+      <a:camera prst="orthographicFront"/>
+      <a:lightRig rig="threePt" dir="t"/>
+    </dgm:scene3d>
+    <dgm:sp3d/>
+    <dgm:txPr/>
+    <dgm:style>
+      <a:lnRef idx="2">
+        <a:scrgbClr r="0" g="0" b="0"/>
+      </a:lnRef>
+      <a:fillRef idx="1">
+        <a:scrgbClr r="0" g="0" b="0"/>
+      </a:fillRef>
+      <a:effectRef idx="0">
+        <a:scrgbClr r="0" g="0" b="0"/>
+      </a:effectRef>
+      <a:fontRef idx="minor"/>
+    </dgm:style>
+  </dgm:styleLbl>
+  <dgm:styleLbl name="trAlignAcc1">
+    <dgm:scene3d>
+      <a:camera prst="orthographicFront"/>
+      <a:lightRig rig="threePt" dir="t"/>
+    </dgm:scene3d>
+    <dgm:sp3d/>
+    <dgm:txPr/>
+    <dgm:style>
+      <a:lnRef idx="1">
+        <a:scrgbClr r="0" g="0" b="0"/>
+      </a:lnRef>
+      <a:fillRef idx="1">
+        <a:scrgbClr r="0" g="0" b="0"/>
+      </a:fillRef>
+      <a:effectRef idx="0">
+        <a:scrgbClr r="0" g="0" b="0"/>
+      </a:effectRef>
+      <a:fontRef idx="minor"/>
+    </dgm:style>
+  </dgm:styleLbl>
+  <dgm:styleLbl name="bgAcc1">
+    <dgm:scene3d>
+      <a:camera prst="orthographicFront"/>
+      <a:lightRig rig="threePt" dir="t"/>
+    </dgm:scene3d>
+    <dgm:sp3d/>
+    <dgm:txPr/>
+    <dgm:style>
+      <a:lnRef idx="2">
+        <a:scrgbClr r="0" g="0" b="0"/>
+      </a:lnRef>
+      <a:fillRef idx="1">
+        <a:scrgbClr r="0" g="0" b="0"/>
+      </a:fillRef>
+      <a:effectRef idx="0">
+        <a:scrgbClr r="0" g="0" b="0"/>
+      </a:effectRef>
+      <a:fontRef idx="minor"/>
+    </dgm:style>
+  </dgm:styleLbl>
+  <dgm:styleLbl name="solidFgAcc1">
+    <dgm:scene3d>
+      <a:camera prst="orthographicFront"/>
+      <a:lightRig rig="threePt" dir="t"/>
+    </dgm:scene3d>
+    <dgm:sp3d/>
+    <dgm:txPr/>
+    <dgm:style>
+      <a:lnRef idx="2">
+        <a:scrgbClr r="0" g="0" b="0"/>
+      </a:lnRef>
+      <a:fillRef idx="1">
+        <a:scrgbClr r="0" g="0" b="0"/>
+      </a:fillRef>
+      <a:effectRef idx="0">
+        <a:scrgbClr r="0" g="0" b="0"/>
+      </a:effectRef>
+      <a:fontRef idx="minor"/>
+    </dgm:style>
+  </dgm:styleLbl>
+  <dgm:styleLbl name="solidAlignAcc1">
+    <dgm:scene3d>
+      <a:camera prst="orthographicFront"/>
+      <a:lightRig rig="threePt" dir="t"/>
+    </dgm:scene3d>
+    <dgm:sp3d/>
+    <dgm:txPr/>
+    <dgm:style>
+      <a:lnRef idx="2">
+        <a:scrgbClr r="0" g="0" b="0"/>
+      </a:lnRef>
+      <a:fillRef idx="1">
+        <a:scrgbClr r="0" g="0" b="0"/>
+      </a:fillRef>
+      <a:effectRef idx="0">
+        <a:scrgbClr r="0" g="0" b="0"/>
+      </a:effectRef>
+      <a:fontRef idx="minor"/>
+    </dgm:style>
+  </dgm:styleLbl>
+  <dgm:styleLbl name="solidBgAcc1">
+    <dgm:scene3d>
+      <a:camera prst="orthographicFront"/>
+      <a:lightRig rig="threePt" dir="t"/>
+    </dgm:scene3d>
+    <dgm:sp3d/>
+    <dgm:txPr/>
+    <dgm:style>
+      <a:lnRef idx="2">
+        <a:scrgbClr r="0" g="0" b="0"/>
+      </a:lnRef>
+      <a:fillRef idx="1">
+        <a:scrgbClr r="0" g="0" b="0"/>
+      </a:fillRef>
+      <a:effectRef idx="0">
+        <a:scrgbClr r="0" g="0" b="0"/>
+      </a:effectRef>
+      <a:fontRef idx="minor"/>
+    </dgm:style>
+  </dgm:styleLbl>
+  <dgm:styleLbl name="fgAccFollowNode1">
+    <dgm:scene3d>
+      <a:camera prst="orthographicFront"/>
+      <a:lightRig rig="threePt" dir="t"/>
+    </dgm:scene3d>
+    <dgm:sp3d/>
+    <dgm:txPr/>
+    <dgm:style>
+      <a:lnRef idx="2">
+        <a:scrgbClr r="0" g="0" b="0"/>
+      </a:lnRef>
+      <a:fillRef idx="1">
+        <a:scrgbClr r="0" g="0" b="0"/>
+      </a:fillRef>
+      <a:effectRef idx="0">
+        <a:scrgbClr r="0" g="0" b="0"/>
+      </a:effectRef>
+      <a:fontRef idx="minor"/>
+    </dgm:style>
+  </dgm:styleLbl>
+  <dgm:styleLbl name="alignAccFollowNode1">
+    <dgm:scene3d>
+      <a:camera prst="orthographicFront"/>
+      <a:lightRig rig="threePt" dir="t"/>
+    </dgm:scene3d>
+    <dgm:sp3d/>
+    <dgm:txPr/>
+    <dgm:style>
+      <a:lnRef idx="2">
+        <a:scrgbClr r="0" g="0" b="0"/>
+      </a:lnRef>
+      <a:fillRef idx="1">
+        <a:scrgbClr r="0" g="0" b="0"/>
+      </a:fillRef>
+      <a:effectRef idx="0">
+        <a:scrgbClr r="0" g="0" b="0"/>
+      </a:effectRef>
+      <a:fontRef idx="minor"/>
+    </dgm:style>
+  </dgm:styleLbl>
+  <dgm:styleLbl name="bgAccFollowNode1">
+    <dgm:scene3d>
+      <a:camera prst="orthographicFront"/>
+      <a:lightRig rig="threePt" dir="t"/>
+    </dgm:scene3d>
+    <dgm:sp3d/>
+    <dgm:txPr/>
+    <dgm:style>
+      <a:lnRef idx="2">
+        <a:scrgbClr r="0" g="0" b="0"/>
+      </a:lnRef>
+      <a:fillRef idx="1">
+        <a:scrgbClr r="0" g="0" b="0"/>
+      </a:fillRef>
+      <a:effectRef idx="0">
+        <a:scrgbClr r="0" g="0" b="0"/>
+      </a:effectRef>
+      <a:fontRef idx="minor"/>
+    </dgm:style>
+  </dgm:styleLbl>
+  <dgm:styleLbl name="fgAcc0">
+    <dgm:scene3d>
+      <a:camera prst="orthographicFront"/>
+      <a:lightRig rig="threePt" dir="t"/>
+    </dgm:scene3d>
+    <dgm:sp3d/>
+    <dgm:txPr/>
+    <dgm:style>
+      <a:lnRef idx="2">
+        <a:scrgbClr r="0" g="0" b="0"/>
+      </a:lnRef>
+      <a:fillRef idx="1">
+        <a:scrgbClr r="0" g="0" b="0"/>
+      </a:fillRef>
+      <a:effectRef idx="0">
+        <a:scrgbClr r="0" g="0" b="0"/>
+      </a:effectRef>
+      <a:fontRef idx="minor"/>
+    </dgm:style>
+  </dgm:styleLbl>
+  <dgm:styleLbl name="fgAcc2">
+    <dgm:scene3d>
+      <a:camera prst="orthographicFront"/>
+      <a:lightRig rig="threePt" dir="t"/>
+    </dgm:scene3d>
+    <dgm:sp3d/>
+    <dgm:txPr/>
+    <dgm:style>
+      <a:lnRef idx="2">
+        <a:scrgbClr r="0" g="0" b="0"/>
+      </a:lnRef>
+      <a:fillRef idx="1">
+        <a:scrgbClr r="0" g="0" b="0"/>
+      </a:fillRef>
+      <a:effectRef idx="0">
+        <a:scrgbClr r="0" g="0" b="0"/>
+      </a:effectRef>
+      <a:fontRef idx="minor"/>
+    </dgm:style>
+  </dgm:styleLbl>
+  <dgm:styleLbl name="fgAcc3">
+    <dgm:scene3d>
+      <a:camera prst="orthographicFront"/>
+      <a:lightRig rig="threePt" dir="t"/>
+    </dgm:scene3d>
+    <dgm:sp3d/>
+    <dgm:txPr/>
+    <dgm:style>
+      <a:lnRef idx="2">
+        <a:scrgbClr r="0" g="0" b="0"/>
+      </a:lnRef>
+      <a:fillRef idx="1">
+        <a:scrgbClr r="0" g="0" b="0"/>
+      </a:fillRef>
+      <a:effectRef idx="0">
+        <a:scrgbClr r="0" g="0" b="0"/>
+      </a:effectRef>
+      <a:fontRef idx="minor"/>
+    </dgm:style>
+  </dgm:styleLbl>
+  <dgm:styleLbl name="fgAcc4">
+    <dgm:scene3d>
+      <a:camera prst="orthographicFront"/>
+      <a:lightRig rig="threePt" dir="t"/>
+    </dgm:scene3d>
+    <dgm:sp3d/>
+    <dgm:txPr/>
+    <dgm:style>
+      <a:lnRef idx="2">
+        <a:scrgbClr r="0" g="0" b="0"/>
+      </a:lnRef>
+      <a:fillRef idx="1">
+        <a:scrgbClr r="0" g="0" b="0"/>
+      </a:fillRef>
+      <a:effectRef idx="0">
+        <a:scrgbClr r="0" g="0" b="0"/>
+      </a:effectRef>
+      <a:fontRef idx="minor"/>
+    </dgm:style>
+  </dgm:styleLbl>
+  <dgm:styleLbl name="bgShp">
+    <dgm:scene3d>
+      <a:camera prst="orthographicFront"/>
+      <a:lightRig rig="threePt" dir="t"/>
+    </dgm:scene3d>
+    <dgm:sp3d/>
+    <dgm:txPr/>
+    <dgm:style>
+      <a:lnRef idx="0">
+        <a:scrgbClr r="0" g="0" b="0"/>
+      </a:lnRef>
+      <a:fillRef idx="1">
+        <a:scrgbClr r="0" g="0" b="0"/>
+      </a:fillRef>
+      <a:effectRef idx="0">
+        <a:scrgbClr r="0" g="0" b="0"/>
+      </a:effectRef>
+      <a:fontRef idx="minor"/>
+    </dgm:style>
+  </dgm:styleLbl>
+  <dgm:styleLbl name="dkBgShp">
+    <dgm:scene3d>
+      <a:camera prst="orthographicFront"/>
+      <a:lightRig rig="threePt" dir="t"/>
+    </dgm:scene3d>
+    <dgm:sp3d/>
+    <dgm:txPr/>
+    <dgm:style>
+      <a:lnRef idx="0">
+        <a:scrgbClr r="0" g="0" b="0"/>
+      </a:lnRef>
+      <a:fillRef idx="1">
+        <a:scrgbClr r="0" g="0" b="0"/>
+      </a:fillRef>
+      <a:effectRef idx="0">
+        <a:scrgbClr r="0" g="0" b="0"/>
+      </a:effectRef>
+      <a:fontRef idx="minor"/>
+    </dgm:style>
+  </dgm:styleLbl>
+  <dgm:styleLbl name="trBgShp">
+    <dgm:scene3d>
+      <a:camera prst="orthographicFront"/>
+      <a:lightRig rig="threePt" dir="t"/>
+    </dgm:scene3d>
+    <dgm:sp3d/>
+    <dgm:txPr/>
+    <dgm:style>
+      <a:lnRef idx="0">
+        <a:scrgbClr r="0" g="0" b="0"/>
+      </a:lnRef>
+      <a:fillRef idx="1">
+        <a:scrgbClr r="0" g="0" b="0"/>
+      </a:fillRef>
+      <a:effectRef idx="0">
+        <a:scrgbClr r="0" g="0" b="0"/>
+      </a:effectRef>
+      <a:fontRef idx="minor"/>
+    </dgm:style>
+  </dgm:styleLbl>
+  <dgm:styleLbl name="fgShp">
+    <dgm:scene3d>
+      <a:camera prst="orthographicFront"/>
+      <a:lightRig rig="threePt" dir="t"/>
+    </dgm:scene3d>
+    <dgm:sp3d/>
+    <dgm:txPr/>
+    <dgm:style>
+      <a:lnRef idx="2">
+        <a:scrgbClr r="0" g="0" b="0"/>
+      </a:lnRef>
+      <a:fillRef idx="1">
+        <a:scrgbClr r="0" g="0" b="0"/>
+      </a:fillRef>
+      <a:effectRef idx="0">
+        <a:scrgbClr r="0" g="0" b="0"/>
+      </a:effectRef>
+      <a:fontRef idx="minor"/>
+    </dgm:style>
+  </dgm:styleLbl>
+  <dgm:styleLbl name="revTx">
+    <dgm:scene3d>
+      <a:camera prst="orthographicFront"/>
+      <a:lightRig rig="threePt" dir="t"/>
+    </dgm:scene3d>
+    <dgm:sp3d/>
+    <dgm:txPr/>
+    <dgm:style>
+      <a:lnRef idx="0">
+        <a:scrgbClr r="0" g="0" b="0"/>
+      </a:lnRef>
+      <a:fillRef idx="0">
+        <a:scrgbClr r="0" g="0" b="0"/>
+      </a:fillRef>
+      <a:effectRef idx="0">
+        <a:scrgbClr r="0" g="0" b="0"/>
+      </a:effectRef>
+      <a:fontRef idx="minor"/>
+    </dgm:style>
+  </dgm:styleLbl>
+</dgm:styleDef>
+</file>
+
 <file path=ppt/notesMasters/notesMaster1.xml><?xml version="1.0" encoding="utf-8"?>
 <p:notesMaster xmlns:a="http://schemas.openxmlformats.org/drawingml/2006/main" xmlns:r="http://schemas.openxmlformats.org/officeDocument/2006/relationships" xmlns:p="http://schemas.openxmlformats.org/presentationml/2006/main">
   <p:cSld>
@@ -3843,6 +6979,15 @@
           <a:p>
             <a:r>
               <a:rPr lang="en-US" dirty="0"/>
+              <a:t>Spatial turnover in community composition (that is, the difference in abundance and diversity of biological communities between locations) is shaped by ecological drift, selection and dispersal</a:t>
+            </a:r>
+          </a:p>
+          <a:p>
+            <a:endParaRPr lang="en-US" dirty="0"/>
+          </a:p>
+          <a:p>
+            <a:r>
+              <a:rPr lang="en-US" dirty="0"/>
               <a:t>Community assembly processes can be stochastic or deterministic.</a:t>
             </a:r>
           </a:p>
@@ -4390,49 +7535,7 @@
           <a:p>
             <a:r>
               <a:rPr lang="en-US" dirty="0"/>
-              <a:t>Sloan’s Neutral Model states that the probability of species </a:t>
-            </a:r>
-            <a:r>
-              <a:rPr lang="en-US" i="1" dirty="0" err="1"/>
-              <a:t>i</a:t>
-            </a:r>
-            <a:r>
-              <a:rPr lang="en-US" dirty="0"/>
-              <a:t> occurring within a sample at abundance (x</a:t>
-            </a:r>
-            <a:r>
-              <a:rPr lang="en-US" i="0" baseline="-25000" dirty="0"/>
-              <a:t>i</a:t>
-            </a:r>
-            <a:r>
-              <a:rPr lang="en-US" dirty="0"/>
-              <a:t>) above a detection threshold (d) </a:t>
-            </a:r>
-          </a:p>
-          <a:p>
-            <a:endParaRPr lang="en-US" dirty="0"/>
-          </a:p>
-          <a:p>
-            <a:r>
-              <a:rPr lang="en-US" dirty="0"/>
-              <a:t>Model results are compared to the observed data. Deviation of observed data from model results is assumed to be evidence of deterministic community assembly.</a:t>
-            </a:r>
-          </a:p>
-          <a:p>
-            <a:endParaRPr lang="en-US" dirty="0"/>
-          </a:p>
-          <a:p>
-            <a:r>
-              <a:rPr lang="en-US" dirty="0"/>
-              <a:t>The abundance of each ASV in the metacommunity (p</a:t>
-            </a:r>
-            <a:r>
-              <a:rPr lang="en-US" i="1" dirty="0"/>
-              <a:t>i</a:t>
-            </a:r>
-            <a:r>
-              <a:rPr lang="en-US" dirty="0"/>
-              <a:t>) is estimated by averaging it’s relative abundance across all samples.</a:t>
+              <a:t>As the phylogenetic null model approach is dependent on phylogenetic signal </a:t>
             </a:r>
           </a:p>
         </p:txBody>
@@ -4454,7 +7557,7 @@
           <a:p>
             <a:fld id="{91AE2140-D502-214A-B76B-E0784B2C949B}" type="slidenum">
               <a:rPr lang="en-US" smtClean="0"/>
-              <a:t>18</a:t>
+              <a:t>16</a:t>
             </a:fld>
             <a:endParaRPr lang="en-US"/>
           </a:p>
@@ -4463,7 +7566,7 @@
     </p:spTree>
     <p:extLst>
       <p:ext uri="{BB962C8B-B14F-4D97-AF65-F5344CB8AC3E}">
-        <p14:creationId xmlns:p14="http://schemas.microsoft.com/office/powerpoint/2010/main" val="1811139538"/>
+        <p14:creationId xmlns:p14="http://schemas.microsoft.com/office/powerpoint/2010/main" val="1424753429"/>
       </p:ext>
     </p:extLst>
   </p:cSld>
@@ -4519,23 +7622,49 @@
           <a:p>
             <a:r>
               <a:rPr lang="en-US" dirty="0"/>
-              <a:t>Code developed from Barnett et al., (2020) Soil characteristics and land-use drive bacterial community assembly patterns (https://</a:t>
-            </a:r>
-            <a:r>
-              <a:rPr lang="en-US" dirty="0" err="1"/>
-              <a:t>github.com</a:t>
+              <a:t>Sloan’s Neutral Model states that the probability of species </a:t>
+            </a:r>
+            <a:r>
+              <a:rPr lang="en-US" i="1" dirty="0" err="1"/>
+              <a:t>i</a:t>
             </a:r>
             <a:r>
               <a:rPr lang="en-US" dirty="0"/>
-              <a:t>/seb369/</a:t>
-            </a:r>
-            <a:r>
-              <a:rPr lang="en-US" dirty="0" err="1"/>
-              <a:t>landuse_comm_assembly</a:t>
+              <a:t> occurring within a sample at abundance (x</a:t>
+            </a:r>
+            <a:r>
+              <a:rPr lang="en-US" i="0" baseline="-25000" dirty="0"/>
+              <a:t>i</a:t>
             </a:r>
             <a:r>
               <a:rPr lang="en-US" dirty="0"/>
-              <a:t>)</a:t>
+              <a:t>) above a detection threshold (d) </a:t>
+            </a:r>
+          </a:p>
+          <a:p>
+            <a:endParaRPr lang="en-US" dirty="0"/>
+          </a:p>
+          <a:p>
+            <a:r>
+              <a:rPr lang="en-US" dirty="0"/>
+              <a:t>Model results are compared to the observed data. Deviation of observed data from model results is assumed to be evidence of deterministic community assembly.</a:t>
+            </a:r>
+          </a:p>
+          <a:p>
+            <a:endParaRPr lang="en-US" dirty="0"/>
+          </a:p>
+          <a:p>
+            <a:r>
+              <a:rPr lang="en-US" dirty="0"/>
+              <a:t>The abundance of each ASV in the metacommunity (p</a:t>
+            </a:r>
+            <a:r>
+              <a:rPr lang="en-US" i="1" dirty="0"/>
+              <a:t>i</a:t>
+            </a:r>
+            <a:r>
+              <a:rPr lang="en-US" dirty="0"/>
+              <a:t>) is estimated by averaging it’s relative abundance across all samples.</a:t>
             </a:r>
           </a:p>
         </p:txBody>
@@ -4557,7 +7686,7 @@
           <a:p>
             <a:fld id="{91AE2140-D502-214A-B76B-E0784B2C949B}" type="slidenum">
               <a:rPr lang="en-US" smtClean="0"/>
-              <a:t>19</a:t>
+              <a:t>18</a:t>
             </a:fld>
             <a:endParaRPr lang="en-US"/>
           </a:p>
@@ -4566,7 +7695,7 @@
     </p:spTree>
     <p:extLst>
       <p:ext uri="{BB962C8B-B14F-4D97-AF65-F5344CB8AC3E}">
-        <p14:creationId xmlns:p14="http://schemas.microsoft.com/office/powerpoint/2010/main" val="2263901205"/>
+        <p14:creationId xmlns:p14="http://schemas.microsoft.com/office/powerpoint/2010/main" val="1811139538"/>
       </p:ext>
     </p:extLst>
   </p:cSld>
@@ -4622,6 +7751,109 @@
           <a:p>
             <a:r>
               <a:rPr lang="en-US" dirty="0"/>
+              <a:t>Code developed from Barnett et al., (2020) Soil characteristics and land-use drive bacterial community assembly patterns (https://</a:t>
+            </a:r>
+            <a:r>
+              <a:rPr lang="en-US" dirty="0" err="1"/>
+              <a:t>github.com</a:t>
+            </a:r>
+            <a:r>
+              <a:rPr lang="en-US" dirty="0"/>
+              <a:t>/seb369/</a:t>
+            </a:r>
+            <a:r>
+              <a:rPr lang="en-US" dirty="0" err="1"/>
+              <a:t>landuse_comm_assembly</a:t>
+            </a:r>
+            <a:r>
+              <a:rPr lang="en-US" dirty="0"/>
+              <a:t>)</a:t>
+            </a:r>
+          </a:p>
+        </p:txBody>
+      </p:sp>
+      <p:sp>
+        <p:nvSpPr>
+          <p:cNvPr id="4" name="Slide Number Placeholder 3"/>
+          <p:cNvSpPr>
+            <a:spLocks noGrp="1"/>
+          </p:cNvSpPr>
+          <p:nvPr>
+            <p:ph type="sldNum" sz="quarter" idx="5"/>
+          </p:nvPr>
+        </p:nvSpPr>
+        <p:spPr/>
+        <p:txBody>
+          <a:bodyPr/>
+          <a:lstStyle/>
+          <a:p>
+            <a:fld id="{91AE2140-D502-214A-B76B-E0784B2C949B}" type="slidenum">
+              <a:rPr lang="en-US" smtClean="0"/>
+              <a:t>19</a:t>
+            </a:fld>
+            <a:endParaRPr lang="en-US"/>
+          </a:p>
+        </p:txBody>
+      </p:sp>
+    </p:spTree>
+    <p:extLst>
+      <p:ext uri="{BB962C8B-B14F-4D97-AF65-F5344CB8AC3E}">
+        <p14:creationId xmlns:p14="http://schemas.microsoft.com/office/powerpoint/2010/main" val="2263901205"/>
+      </p:ext>
+    </p:extLst>
+  </p:cSld>
+  <p:clrMapOvr>
+    <a:masterClrMapping/>
+  </p:clrMapOvr>
+</p:notes>
+</file>
+
+<file path=ppt/notesSlides/notesSlide9.xml><?xml version="1.0" encoding="utf-8"?>
+<p:notes xmlns:a="http://schemas.openxmlformats.org/drawingml/2006/main" xmlns:r="http://schemas.openxmlformats.org/officeDocument/2006/relationships" xmlns:p="http://schemas.openxmlformats.org/presentationml/2006/main">
+  <p:cSld>
+    <p:spTree>
+      <p:nvGrpSpPr>
+        <p:cNvPr id="1" name=""/>
+        <p:cNvGrpSpPr/>
+        <p:nvPr/>
+      </p:nvGrpSpPr>
+      <p:grpSpPr>
+        <a:xfrm>
+          <a:off x="0" y="0"/>
+          <a:ext cx="0" cy="0"/>
+          <a:chOff x="0" y="0"/>
+          <a:chExt cx="0" cy="0"/>
+        </a:xfrm>
+      </p:grpSpPr>
+      <p:sp>
+        <p:nvSpPr>
+          <p:cNvPr id="2" name="Slide Image Placeholder 1"/>
+          <p:cNvSpPr>
+            <a:spLocks noGrp="1" noRot="1" noChangeAspect="1"/>
+          </p:cNvSpPr>
+          <p:nvPr>
+            <p:ph type="sldImg"/>
+          </p:nvPr>
+        </p:nvSpPr>
+        <p:spPr/>
+      </p:sp>
+      <p:sp>
+        <p:nvSpPr>
+          <p:cNvPr id="3" name="Notes Placeholder 2"/>
+          <p:cNvSpPr>
+            <a:spLocks noGrp="1"/>
+          </p:cNvSpPr>
+          <p:nvPr>
+            <p:ph type="body" idx="1"/>
+          </p:nvPr>
+        </p:nvSpPr>
+        <p:spPr/>
+        <p:txBody>
+          <a:bodyPr/>
+          <a:lstStyle/>
+          <a:p>
+            <a:r>
+              <a:rPr lang="en-US" dirty="0"/>
               <a:t>This is the result of the model fitting with the Sommers dataset (not reduced).</a:t>
             </a:r>
           </a:p>
@@ -4685,7 +7917,17 @@
           <a:p>
             <a:r>
               <a:rPr lang="en-US" dirty="0"/>
-              <a:t>These results suggest that </a:t>
+              <a:t>These results suggest that neutral assembly processes can explain the pattern of observed ASV occurrence frequencies </a:t>
+            </a:r>
+            <a:r>
+              <a:rPr lang="en-US" strike="sngStrike" dirty="0"/>
+              <a:t>and that the the regional species pool is a driving factor in the community composition of these samples. </a:t>
+            </a:r>
+          </a:p>
+          <a:p>
+            <a:r>
+              <a:rPr lang="en-US" strike="noStrike" dirty="0"/>
+              <a:t>The deviation of predicted occurrence frequencies from observed occurrence frequencies suggests that there are also deterministic processes driving community composition.</a:t>
             </a:r>
           </a:p>
           <a:p>
@@ -8634,7 +11876,7 @@
           </p:nvPr>
         </p:nvPicPr>
         <p:blipFill>
-          <a:blip r:embed="rId2"/>
+          <a:blip r:embed="rId3"/>
           <a:stretch>
             <a:fillRect/>
           </a:stretch>
@@ -10189,7 +13431,7 @@
           <p:cNvPr id="2" name="Title 1">
             <a:extLst>
               <a:ext uri="{FF2B5EF4-FFF2-40B4-BE49-F238E27FC236}">
-                <a16:creationId xmlns:a16="http://schemas.microsoft.com/office/drawing/2014/main" id="{6C0AE8A7-46CF-6A41-9356-95AD74775928}"/>
+                <a16:creationId xmlns:a16="http://schemas.microsoft.com/office/drawing/2014/main" id="{122A31DA-B431-C54A-874F-C1236B9B36B8}"/>
               </a:ext>
             </a:extLst>
           </p:cNvPr>
@@ -10207,70 +13449,1245 @@
           <a:p>
             <a:r>
               <a:rPr lang="en-US" dirty="0"/>
-              <a:t>Analysis</a:t>
+              <a:t>Why are they different? Why should we care?</a:t>
             </a:r>
           </a:p>
         </p:txBody>
       </p:sp>
       <p:sp>
         <p:nvSpPr>
-          <p:cNvPr id="3" name="Content Placeholder 2">
+          <p:cNvPr id="4" name="Oval 3">
             <a:extLst>
               <a:ext uri="{FF2B5EF4-FFF2-40B4-BE49-F238E27FC236}">
-                <a16:creationId xmlns:a16="http://schemas.microsoft.com/office/drawing/2014/main" id="{3F3B803F-4C3A-CD47-9287-492C0BABB02D}"/>
+                <a16:creationId xmlns:a16="http://schemas.microsoft.com/office/drawing/2014/main" id="{4075A81A-7D11-9448-BF36-6D732E7F151C}"/>
               </a:ext>
             </a:extLst>
           </p:cNvPr>
-          <p:cNvSpPr>
-            <a:spLocks noGrp="1"/>
-          </p:cNvSpPr>
-          <p:nvPr>
-            <p:ph idx="1"/>
-          </p:nvPr>
-        </p:nvSpPr>
-        <p:spPr/>
+          <p:cNvSpPr/>
+          <p:nvPr/>
+        </p:nvSpPr>
+        <p:spPr>
+          <a:xfrm>
+            <a:off x="2600326" y="3014662"/>
+            <a:ext cx="314325" cy="314325"/>
+          </a:xfrm>
+          <a:prstGeom prst="ellipse">
+            <a:avLst/>
+          </a:prstGeom>
+        </p:spPr>
+        <p:style>
+          <a:lnRef idx="2">
+            <a:schemeClr val="accent1">
+              <a:shade val="50000"/>
+            </a:schemeClr>
+          </a:lnRef>
+          <a:fillRef idx="1">
+            <a:schemeClr val="accent1"/>
+          </a:fillRef>
+          <a:effectRef idx="0">
+            <a:schemeClr val="accent1"/>
+          </a:effectRef>
+          <a:fontRef idx="minor">
+            <a:schemeClr val="lt1"/>
+          </a:fontRef>
+        </p:style>
         <p:txBody>
-          <a:bodyPr/>
+          <a:bodyPr rtlCol="0" anchor="ctr"/>
           <a:lstStyle/>
           <a:p>
-            <a:r>
-              <a:rPr lang="en-US" dirty="0"/>
-              <a:t>ISAR and DDR</a:t>
-            </a:r>
-          </a:p>
-          <a:p>
-            <a:r>
-              <a:rPr lang="en-US" dirty="0"/>
-              <a:t>Multivariate Analysis</a:t>
-            </a:r>
-          </a:p>
-          <a:p>
-            <a:r>
-              <a:rPr lang="en-US" dirty="0"/>
-              <a:t>Null Model</a:t>
-            </a:r>
-          </a:p>
-          <a:p>
-            <a:r>
-              <a:rPr lang="en-US" dirty="0"/>
-              <a:t>Neutral Model</a:t>
-            </a:r>
-          </a:p>
-          <a:p>
-            <a:r>
-              <a:rPr lang="en-US" dirty="0"/>
-              <a:t>Network Analysis</a:t>
-            </a:r>
-          </a:p>
-          <a:p>
-            <a:endParaRPr lang="en-US" dirty="0"/>
+            <a:pPr algn="ctr"/>
+            <a:endParaRPr lang="en-US"/>
+          </a:p>
+        </p:txBody>
+      </p:sp>
+      <p:sp>
+        <p:nvSpPr>
+          <p:cNvPr id="5" name="Oval 4">
+            <a:extLst>
+              <a:ext uri="{FF2B5EF4-FFF2-40B4-BE49-F238E27FC236}">
+                <a16:creationId xmlns:a16="http://schemas.microsoft.com/office/drawing/2014/main" id="{E4516562-A1F7-4A44-B228-68531F4F81E8}"/>
+              </a:ext>
+            </a:extLst>
+          </p:cNvPr>
+          <p:cNvSpPr/>
+          <p:nvPr/>
+        </p:nvSpPr>
+        <p:spPr>
+          <a:xfrm>
+            <a:off x="3467101" y="3752849"/>
+            <a:ext cx="314325" cy="314325"/>
+          </a:xfrm>
+          <a:prstGeom prst="ellipse">
+            <a:avLst/>
+          </a:prstGeom>
+        </p:spPr>
+        <p:style>
+          <a:lnRef idx="2">
+            <a:schemeClr val="accent1">
+              <a:shade val="50000"/>
+            </a:schemeClr>
+          </a:lnRef>
+          <a:fillRef idx="1">
+            <a:schemeClr val="accent1"/>
+          </a:fillRef>
+          <a:effectRef idx="0">
+            <a:schemeClr val="accent1"/>
+          </a:effectRef>
+          <a:fontRef idx="minor">
+            <a:schemeClr val="lt1"/>
+          </a:fontRef>
+        </p:style>
+        <p:txBody>
+          <a:bodyPr rtlCol="0" anchor="ctr"/>
+          <a:lstStyle/>
+          <a:p>
+            <a:pPr algn="ctr"/>
+            <a:endParaRPr lang="en-US"/>
+          </a:p>
+        </p:txBody>
+      </p:sp>
+      <p:sp>
+        <p:nvSpPr>
+          <p:cNvPr id="6" name="Oval 5">
+            <a:extLst>
+              <a:ext uri="{FF2B5EF4-FFF2-40B4-BE49-F238E27FC236}">
+                <a16:creationId xmlns:a16="http://schemas.microsoft.com/office/drawing/2014/main" id="{1ABEA4FE-AD89-454B-989F-A777676B2DAB}"/>
+              </a:ext>
+            </a:extLst>
+          </p:cNvPr>
+          <p:cNvSpPr/>
+          <p:nvPr/>
+        </p:nvSpPr>
+        <p:spPr>
+          <a:xfrm>
+            <a:off x="2586038" y="4410075"/>
+            <a:ext cx="314325" cy="314325"/>
+          </a:xfrm>
+          <a:prstGeom prst="ellipse">
+            <a:avLst/>
+          </a:prstGeom>
+          <a:solidFill>
+            <a:srgbClr val="92D050"/>
+          </a:solidFill>
+        </p:spPr>
+        <p:style>
+          <a:lnRef idx="2">
+            <a:schemeClr val="accent1">
+              <a:shade val="50000"/>
+            </a:schemeClr>
+          </a:lnRef>
+          <a:fillRef idx="1">
+            <a:schemeClr val="accent1"/>
+          </a:fillRef>
+          <a:effectRef idx="0">
+            <a:schemeClr val="accent1"/>
+          </a:effectRef>
+          <a:fontRef idx="minor">
+            <a:schemeClr val="lt1"/>
+          </a:fontRef>
+        </p:style>
+        <p:txBody>
+          <a:bodyPr rtlCol="0" anchor="ctr"/>
+          <a:lstStyle/>
+          <a:p>
+            <a:pPr algn="ctr"/>
+            <a:endParaRPr lang="en-US"/>
+          </a:p>
+        </p:txBody>
+      </p:sp>
+      <p:sp>
+        <p:nvSpPr>
+          <p:cNvPr id="7" name="Oval 6">
+            <a:extLst>
+              <a:ext uri="{FF2B5EF4-FFF2-40B4-BE49-F238E27FC236}">
+                <a16:creationId xmlns:a16="http://schemas.microsoft.com/office/drawing/2014/main" id="{4E83A67A-C00A-B342-BE75-24729CD2D02F}"/>
+              </a:ext>
+            </a:extLst>
+          </p:cNvPr>
+          <p:cNvSpPr/>
+          <p:nvPr/>
+        </p:nvSpPr>
+        <p:spPr>
+          <a:xfrm>
+            <a:off x="4724401" y="4567237"/>
+            <a:ext cx="314325" cy="314325"/>
+          </a:xfrm>
+          <a:prstGeom prst="ellipse">
+            <a:avLst/>
+          </a:prstGeom>
+        </p:spPr>
+        <p:style>
+          <a:lnRef idx="2">
+            <a:schemeClr val="accent1">
+              <a:shade val="50000"/>
+            </a:schemeClr>
+          </a:lnRef>
+          <a:fillRef idx="1">
+            <a:schemeClr val="accent1"/>
+          </a:fillRef>
+          <a:effectRef idx="0">
+            <a:schemeClr val="accent1"/>
+          </a:effectRef>
+          <a:fontRef idx="minor">
+            <a:schemeClr val="lt1"/>
+          </a:fontRef>
+        </p:style>
+        <p:txBody>
+          <a:bodyPr rtlCol="0" anchor="ctr"/>
+          <a:lstStyle/>
+          <a:p>
+            <a:pPr algn="ctr"/>
+            <a:endParaRPr lang="en-US"/>
+          </a:p>
+        </p:txBody>
+      </p:sp>
+      <p:sp>
+        <p:nvSpPr>
+          <p:cNvPr id="8" name="Oval 7">
+            <a:extLst>
+              <a:ext uri="{FF2B5EF4-FFF2-40B4-BE49-F238E27FC236}">
+                <a16:creationId xmlns:a16="http://schemas.microsoft.com/office/drawing/2014/main" id="{6F55F405-3566-B348-BF65-58C69A1A867A}"/>
+              </a:ext>
+            </a:extLst>
+          </p:cNvPr>
+          <p:cNvSpPr/>
+          <p:nvPr/>
+        </p:nvSpPr>
+        <p:spPr>
+          <a:xfrm>
+            <a:off x="3467101" y="5186360"/>
+            <a:ext cx="314325" cy="314325"/>
+          </a:xfrm>
+          <a:prstGeom prst="ellipse">
+            <a:avLst/>
+          </a:prstGeom>
+          <a:solidFill>
+            <a:srgbClr val="FFC000"/>
+          </a:solidFill>
+        </p:spPr>
+        <p:style>
+          <a:lnRef idx="2">
+            <a:schemeClr val="accent1">
+              <a:shade val="50000"/>
+            </a:schemeClr>
+          </a:lnRef>
+          <a:fillRef idx="1">
+            <a:schemeClr val="accent1"/>
+          </a:fillRef>
+          <a:effectRef idx="0">
+            <a:schemeClr val="accent1"/>
+          </a:effectRef>
+          <a:fontRef idx="minor">
+            <a:schemeClr val="lt1"/>
+          </a:fontRef>
+        </p:style>
+        <p:txBody>
+          <a:bodyPr rtlCol="0" anchor="ctr"/>
+          <a:lstStyle/>
+          <a:p>
+            <a:pPr algn="ctr"/>
+            <a:endParaRPr lang="en-US"/>
+          </a:p>
+        </p:txBody>
+      </p:sp>
+      <p:sp>
+        <p:nvSpPr>
+          <p:cNvPr id="9" name="Oval 8">
+            <a:extLst>
+              <a:ext uri="{FF2B5EF4-FFF2-40B4-BE49-F238E27FC236}">
+                <a16:creationId xmlns:a16="http://schemas.microsoft.com/office/drawing/2014/main" id="{EDD5ABE0-00B9-DD40-8C3A-A0CB5719BCBA}"/>
+              </a:ext>
+            </a:extLst>
+          </p:cNvPr>
+          <p:cNvSpPr/>
+          <p:nvPr/>
+        </p:nvSpPr>
+        <p:spPr>
+          <a:xfrm>
+            <a:off x="4410075" y="2800349"/>
+            <a:ext cx="314325" cy="314325"/>
+          </a:xfrm>
+          <a:prstGeom prst="ellipse">
+            <a:avLst/>
+          </a:prstGeom>
+          <a:solidFill>
+            <a:srgbClr val="FF0000"/>
+          </a:solidFill>
+        </p:spPr>
+        <p:style>
+          <a:lnRef idx="2">
+            <a:schemeClr val="accent1">
+              <a:shade val="50000"/>
+            </a:schemeClr>
+          </a:lnRef>
+          <a:fillRef idx="1">
+            <a:schemeClr val="accent1"/>
+          </a:fillRef>
+          <a:effectRef idx="0">
+            <a:schemeClr val="accent1"/>
+          </a:effectRef>
+          <a:fontRef idx="minor">
+            <a:schemeClr val="lt1"/>
+          </a:fontRef>
+        </p:style>
+        <p:txBody>
+          <a:bodyPr rtlCol="0" anchor="ctr"/>
+          <a:lstStyle/>
+          <a:p>
+            <a:pPr algn="ctr"/>
+            <a:endParaRPr lang="en-US"/>
+          </a:p>
+        </p:txBody>
+      </p:sp>
+      <p:sp>
+        <p:nvSpPr>
+          <p:cNvPr id="10" name="Oval 9">
+            <a:extLst>
+              <a:ext uri="{FF2B5EF4-FFF2-40B4-BE49-F238E27FC236}">
+                <a16:creationId xmlns:a16="http://schemas.microsoft.com/office/drawing/2014/main" id="{B26DB84F-E78D-2A48-A3F2-63B628D47B3F}"/>
+              </a:ext>
+            </a:extLst>
+          </p:cNvPr>
+          <p:cNvSpPr/>
+          <p:nvPr/>
+        </p:nvSpPr>
+        <p:spPr>
+          <a:xfrm>
+            <a:off x="3467100" y="3050382"/>
+            <a:ext cx="314325" cy="314325"/>
+          </a:xfrm>
+          <a:prstGeom prst="ellipse">
+            <a:avLst/>
+          </a:prstGeom>
+          <a:solidFill>
+            <a:srgbClr val="92D050"/>
+          </a:solidFill>
+          <a:ln>
+            <a:solidFill>
+              <a:schemeClr val="accent1"/>
+            </a:solidFill>
+          </a:ln>
+        </p:spPr>
+        <p:style>
+          <a:lnRef idx="2">
+            <a:schemeClr val="accent1">
+              <a:shade val="50000"/>
+            </a:schemeClr>
+          </a:lnRef>
+          <a:fillRef idx="1">
+            <a:schemeClr val="accent1"/>
+          </a:fillRef>
+          <a:effectRef idx="0">
+            <a:schemeClr val="accent1"/>
+          </a:effectRef>
+          <a:fontRef idx="minor">
+            <a:schemeClr val="lt1"/>
+          </a:fontRef>
+        </p:style>
+        <p:txBody>
+          <a:bodyPr rtlCol="0" anchor="ctr"/>
+          <a:lstStyle/>
+          <a:p>
+            <a:pPr algn="ctr"/>
+            <a:endParaRPr lang="en-US"/>
+          </a:p>
+        </p:txBody>
+      </p:sp>
+      <p:sp>
+        <p:nvSpPr>
+          <p:cNvPr id="11" name="Oval 10">
+            <a:extLst>
+              <a:ext uri="{FF2B5EF4-FFF2-40B4-BE49-F238E27FC236}">
+                <a16:creationId xmlns:a16="http://schemas.microsoft.com/office/drawing/2014/main" id="{DC502950-677E-3049-990E-AEC7AF21DD01}"/>
+              </a:ext>
+            </a:extLst>
+          </p:cNvPr>
+          <p:cNvSpPr/>
+          <p:nvPr/>
+        </p:nvSpPr>
+        <p:spPr>
+          <a:xfrm>
+            <a:off x="3967164" y="4410074"/>
+            <a:ext cx="314325" cy="314325"/>
+          </a:xfrm>
+          <a:prstGeom prst="ellipse">
+            <a:avLst/>
+          </a:prstGeom>
+          <a:solidFill>
+            <a:srgbClr val="92D050"/>
+          </a:solidFill>
+        </p:spPr>
+        <p:style>
+          <a:lnRef idx="2">
+            <a:schemeClr val="accent1">
+              <a:shade val="50000"/>
+            </a:schemeClr>
+          </a:lnRef>
+          <a:fillRef idx="1">
+            <a:schemeClr val="accent1"/>
+          </a:fillRef>
+          <a:effectRef idx="0">
+            <a:schemeClr val="accent1"/>
+          </a:effectRef>
+          <a:fontRef idx="minor">
+            <a:schemeClr val="lt1"/>
+          </a:fontRef>
+        </p:style>
+        <p:txBody>
+          <a:bodyPr rtlCol="0" anchor="ctr"/>
+          <a:lstStyle/>
+          <a:p>
+            <a:pPr algn="ctr"/>
+            <a:endParaRPr lang="en-US"/>
+          </a:p>
+        </p:txBody>
+      </p:sp>
+      <p:sp>
+        <p:nvSpPr>
+          <p:cNvPr id="12" name="Oval 11">
+            <a:extLst>
+              <a:ext uri="{FF2B5EF4-FFF2-40B4-BE49-F238E27FC236}">
+                <a16:creationId xmlns:a16="http://schemas.microsoft.com/office/drawing/2014/main" id="{45A94771-F505-D14F-B441-07C73CD0D66B}"/>
+              </a:ext>
+            </a:extLst>
+          </p:cNvPr>
+          <p:cNvSpPr/>
+          <p:nvPr/>
+        </p:nvSpPr>
+        <p:spPr>
+          <a:xfrm>
+            <a:off x="4567238" y="3752848"/>
+            <a:ext cx="314325" cy="314325"/>
+          </a:xfrm>
+          <a:prstGeom prst="ellipse">
+            <a:avLst/>
+          </a:prstGeom>
+        </p:spPr>
+        <p:style>
+          <a:lnRef idx="2">
+            <a:schemeClr val="accent1">
+              <a:shade val="50000"/>
+            </a:schemeClr>
+          </a:lnRef>
+          <a:fillRef idx="1">
+            <a:schemeClr val="accent1"/>
+          </a:fillRef>
+          <a:effectRef idx="0">
+            <a:schemeClr val="accent1"/>
+          </a:effectRef>
+          <a:fontRef idx="minor">
+            <a:schemeClr val="lt1"/>
+          </a:fontRef>
+        </p:style>
+        <p:txBody>
+          <a:bodyPr rtlCol="0" anchor="ctr"/>
+          <a:lstStyle/>
+          <a:p>
+            <a:pPr algn="ctr"/>
+            <a:endParaRPr lang="en-US"/>
+          </a:p>
+        </p:txBody>
+      </p:sp>
+      <p:sp>
+        <p:nvSpPr>
+          <p:cNvPr id="13" name="Oval 12">
+            <a:extLst>
+              <a:ext uri="{FF2B5EF4-FFF2-40B4-BE49-F238E27FC236}">
+                <a16:creationId xmlns:a16="http://schemas.microsoft.com/office/drawing/2014/main" id="{A3A575E6-7D11-6844-B659-F1F931279368}"/>
+              </a:ext>
+            </a:extLst>
+          </p:cNvPr>
+          <p:cNvSpPr/>
+          <p:nvPr/>
+        </p:nvSpPr>
+        <p:spPr>
+          <a:xfrm>
+            <a:off x="3119438" y="4710111"/>
+            <a:ext cx="314325" cy="314325"/>
+          </a:xfrm>
+          <a:prstGeom prst="ellipse">
+            <a:avLst/>
+          </a:prstGeom>
+        </p:spPr>
+        <p:style>
+          <a:lnRef idx="2">
+            <a:schemeClr val="accent1">
+              <a:shade val="50000"/>
+            </a:schemeClr>
+          </a:lnRef>
+          <a:fillRef idx="1">
+            <a:schemeClr val="accent1"/>
+          </a:fillRef>
+          <a:effectRef idx="0">
+            <a:schemeClr val="accent1"/>
+          </a:effectRef>
+          <a:fontRef idx="minor">
+            <a:schemeClr val="lt1"/>
+          </a:fontRef>
+        </p:style>
+        <p:txBody>
+          <a:bodyPr rtlCol="0" anchor="ctr"/>
+          <a:lstStyle/>
+          <a:p>
+            <a:pPr algn="ctr"/>
+            <a:endParaRPr lang="en-US"/>
+          </a:p>
+        </p:txBody>
+      </p:sp>
+      <p:sp>
+        <p:nvSpPr>
+          <p:cNvPr id="14" name="Oval 13">
+            <a:extLst>
+              <a:ext uri="{FF2B5EF4-FFF2-40B4-BE49-F238E27FC236}">
+                <a16:creationId xmlns:a16="http://schemas.microsoft.com/office/drawing/2014/main" id="{1D5E120C-A984-764E-B4EF-AA70BC53CD10}"/>
+              </a:ext>
+            </a:extLst>
+          </p:cNvPr>
+          <p:cNvSpPr/>
+          <p:nvPr/>
+        </p:nvSpPr>
+        <p:spPr>
+          <a:xfrm>
+            <a:off x="2728912" y="3867149"/>
+            <a:ext cx="314325" cy="314325"/>
+          </a:xfrm>
+          <a:prstGeom prst="ellipse">
+            <a:avLst/>
+          </a:prstGeom>
+        </p:spPr>
+        <p:style>
+          <a:lnRef idx="2">
+            <a:schemeClr val="accent1">
+              <a:shade val="50000"/>
+            </a:schemeClr>
+          </a:lnRef>
+          <a:fillRef idx="1">
+            <a:schemeClr val="accent1"/>
+          </a:fillRef>
+          <a:effectRef idx="0">
+            <a:schemeClr val="accent1"/>
+          </a:effectRef>
+          <a:fontRef idx="minor">
+            <a:schemeClr val="lt1"/>
+          </a:fontRef>
+        </p:style>
+        <p:txBody>
+          <a:bodyPr rtlCol="0" anchor="ctr"/>
+          <a:lstStyle/>
+          <a:p>
+            <a:pPr algn="ctr"/>
+            <a:endParaRPr lang="en-US"/>
+          </a:p>
+        </p:txBody>
+      </p:sp>
+      <p:sp>
+        <p:nvSpPr>
+          <p:cNvPr id="15" name="Oval 14">
+            <a:extLst>
+              <a:ext uri="{FF2B5EF4-FFF2-40B4-BE49-F238E27FC236}">
+                <a16:creationId xmlns:a16="http://schemas.microsoft.com/office/drawing/2014/main" id="{F4679495-EAA4-F64B-8588-1E9DEA49D4C8}"/>
+              </a:ext>
+            </a:extLst>
+          </p:cNvPr>
+          <p:cNvSpPr/>
+          <p:nvPr/>
+        </p:nvSpPr>
+        <p:spPr>
+          <a:xfrm>
+            <a:off x="3967163" y="3378993"/>
+            <a:ext cx="314325" cy="314325"/>
+          </a:xfrm>
+          <a:prstGeom prst="ellipse">
+            <a:avLst/>
+          </a:prstGeom>
+        </p:spPr>
+        <p:style>
+          <a:lnRef idx="2">
+            <a:schemeClr val="accent1">
+              <a:shade val="50000"/>
+            </a:schemeClr>
+          </a:lnRef>
+          <a:fillRef idx="1">
+            <a:schemeClr val="accent1"/>
+          </a:fillRef>
+          <a:effectRef idx="0">
+            <a:schemeClr val="accent1"/>
+          </a:effectRef>
+          <a:fontRef idx="minor">
+            <a:schemeClr val="lt1"/>
+          </a:fontRef>
+        </p:style>
+        <p:txBody>
+          <a:bodyPr rtlCol="0" anchor="ctr"/>
+          <a:lstStyle/>
+          <a:p>
+            <a:pPr algn="ctr"/>
+            <a:endParaRPr lang="en-US"/>
+          </a:p>
+        </p:txBody>
+      </p:sp>
+      <p:sp>
+        <p:nvSpPr>
+          <p:cNvPr id="16" name="Oval 15">
+            <a:extLst>
+              <a:ext uri="{FF2B5EF4-FFF2-40B4-BE49-F238E27FC236}">
+                <a16:creationId xmlns:a16="http://schemas.microsoft.com/office/drawing/2014/main" id="{BF75227F-3BDA-534D-AC82-AA532C3B808A}"/>
+              </a:ext>
+            </a:extLst>
+          </p:cNvPr>
+          <p:cNvSpPr/>
+          <p:nvPr/>
+        </p:nvSpPr>
+        <p:spPr>
+          <a:xfrm>
+            <a:off x="6524626" y="3014662"/>
+            <a:ext cx="314325" cy="314325"/>
+          </a:xfrm>
+          <a:prstGeom prst="ellipse">
+            <a:avLst/>
+          </a:prstGeom>
+          <a:solidFill>
+            <a:srgbClr val="FF00E5"/>
+          </a:solidFill>
+        </p:spPr>
+        <p:style>
+          <a:lnRef idx="2">
+            <a:schemeClr val="accent1">
+              <a:shade val="50000"/>
+            </a:schemeClr>
+          </a:lnRef>
+          <a:fillRef idx="1">
+            <a:schemeClr val="accent1"/>
+          </a:fillRef>
+          <a:effectRef idx="0">
+            <a:schemeClr val="accent1"/>
+          </a:effectRef>
+          <a:fontRef idx="minor">
+            <a:schemeClr val="lt1"/>
+          </a:fontRef>
+        </p:style>
+        <p:txBody>
+          <a:bodyPr rtlCol="0" anchor="ctr"/>
+          <a:lstStyle/>
+          <a:p>
+            <a:pPr algn="ctr"/>
+            <a:endParaRPr lang="en-US"/>
+          </a:p>
+        </p:txBody>
+      </p:sp>
+      <p:sp>
+        <p:nvSpPr>
+          <p:cNvPr id="17" name="Oval 16">
+            <a:extLst>
+              <a:ext uri="{FF2B5EF4-FFF2-40B4-BE49-F238E27FC236}">
+                <a16:creationId xmlns:a16="http://schemas.microsoft.com/office/drawing/2014/main" id="{AC9855B0-6DB2-1749-A1D4-4B1B81587D5F}"/>
+              </a:ext>
+            </a:extLst>
+          </p:cNvPr>
+          <p:cNvSpPr/>
+          <p:nvPr/>
+        </p:nvSpPr>
+        <p:spPr>
+          <a:xfrm>
+            <a:off x="7391401" y="3752849"/>
+            <a:ext cx="314325" cy="314325"/>
+          </a:xfrm>
+          <a:prstGeom prst="ellipse">
+            <a:avLst/>
+          </a:prstGeom>
+          <a:solidFill>
+            <a:srgbClr val="7030A0"/>
+          </a:solidFill>
+        </p:spPr>
+        <p:style>
+          <a:lnRef idx="2">
+            <a:schemeClr val="accent1">
+              <a:shade val="50000"/>
+            </a:schemeClr>
+          </a:lnRef>
+          <a:fillRef idx="1">
+            <a:schemeClr val="accent1"/>
+          </a:fillRef>
+          <a:effectRef idx="0">
+            <a:schemeClr val="accent1"/>
+          </a:effectRef>
+          <a:fontRef idx="minor">
+            <a:schemeClr val="lt1"/>
+          </a:fontRef>
+        </p:style>
+        <p:txBody>
+          <a:bodyPr rtlCol="0" anchor="ctr"/>
+          <a:lstStyle/>
+          <a:p>
+            <a:pPr algn="ctr"/>
+            <a:endParaRPr lang="en-US"/>
+          </a:p>
+        </p:txBody>
+      </p:sp>
+      <p:sp>
+        <p:nvSpPr>
+          <p:cNvPr id="18" name="Oval 17">
+            <a:extLst>
+              <a:ext uri="{FF2B5EF4-FFF2-40B4-BE49-F238E27FC236}">
+                <a16:creationId xmlns:a16="http://schemas.microsoft.com/office/drawing/2014/main" id="{19F5CB4E-153D-EF40-9DD1-4986310BA056}"/>
+              </a:ext>
+            </a:extLst>
+          </p:cNvPr>
+          <p:cNvSpPr/>
+          <p:nvPr/>
+        </p:nvSpPr>
+        <p:spPr>
+          <a:xfrm>
+            <a:off x="6510338" y="4410075"/>
+            <a:ext cx="314325" cy="314325"/>
+          </a:xfrm>
+          <a:prstGeom prst="ellipse">
+            <a:avLst/>
+          </a:prstGeom>
+          <a:solidFill>
+            <a:srgbClr val="FF0000"/>
+          </a:solidFill>
+        </p:spPr>
+        <p:style>
+          <a:lnRef idx="2">
+            <a:schemeClr val="accent1">
+              <a:shade val="50000"/>
+            </a:schemeClr>
+          </a:lnRef>
+          <a:fillRef idx="1">
+            <a:schemeClr val="accent1"/>
+          </a:fillRef>
+          <a:effectRef idx="0">
+            <a:schemeClr val="accent1"/>
+          </a:effectRef>
+          <a:fontRef idx="minor">
+            <a:schemeClr val="lt1"/>
+          </a:fontRef>
+        </p:style>
+        <p:txBody>
+          <a:bodyPr rtlCol="0" anchor="ctr"/>
+          <a:lstStyle/>
+          <a:p>
+            <a:pPr algn="ctr"/>
+            <a:endParaRPr lang="en-US"/>
+          </a:p>
+        </p:txBody>
+      </p:sp>
+      <p:sp>
+        <p:nvSpPr>
+          <p:cNvPr id="19" name="Oval 18">
+            <a:extLst>
+              <a:ext uri="{FF2B5EF4-FFF2-40B4-BE49-F238E27FC236}">
+                <a16:creationId xmlns:a16="http://schemas.microsoft.com/office/drawing/2014/main" id="{304877B3-DB5A-2E40-9762-5B3784FF014E}"/>
+              </a:ext>
+            </a:extLst>
+          </p:cNvPr>
+          <p:cNvSpPr/>
+          <p:nvPr/>
+        </p:nvSpPr>
+        <p:spPr>
+          <a:xfrm>
+            <a:off x="8648701" y="4567237"/>
+            <a:ext cx="314325" cy="314325"/>
+          </a:xfrm>
+          <a:prstGeom prst="ellipse">
+            <a:avLst/>
+          </a:prstGeom>
+          <a:solidFill>
+            <a:srgbClr val="FFFF00"/>
+          </a:solidFill>
+        </p:spPr>
+        <p:style>
+          <a:lnRef idx="2">
+            <a:schemeClr val="accent1">
+              <a:shade val="50000"/>
+            </a:schemeClr>
+          </a:lnRef>
+          <a:fillRef idx="1">
+            <a:schemeClr val="accent1"/>
+          </a:fillRef>
+          <a:effectRef idx="0">
+            <a:schemeClr val="accent1"/>
+          </a:effectRef>
+          <a:fontRef idx="minor">
+            <a:schemeClr val="lt1"/>
+          </a:fontRef>
+        </p:style>
+        <p:txBody>
+          <a:bodyPr rtlCol="0" anchor="ctr"/>
+          <a:lstStyle/>
+          <a:p>
+            <a:pPr algn="ctr"/>
+            <a:endParaRPr lang="en-US"/>
+          </a:p>
+        </p:txBody>
+      </p:sp>
+      <p:sp>
+        <p:nvSpPr>
+          <p:cNvPr id="20" name="Oval 19">
+            <a:extLst>
+              <a:ext uri="{FF2B5EF4-FFF2-40B4-BE49-F238E27FC236}">
+                <a16:creationId xmlns:a16="http://schemas.microsoft.com/office/drawing/2014/main" id="{E53C1F00-2970-264E-8F3C-13F5A89C374D}"/>
+              </a:ext>
+            </a:extLst>
+          </p:cNvPr>
+          <p:cNvSpPr/>
+          <p:nvPr/>
+        </p:nvSpPr>
+        <p:spPr>
+          <a:xfrm>
+            <a:off x="7391401" y="5186360"/>
+            <a:ext cx="314325" cy="314325"/>
+          </a:xfrm>
+          <a:prstGeom prst="ellipse">
+            <a:avLst/>
+          </a:prstGeom>
+          <a:solidFill>
+            <a:srgbClr val="FF00E5"/>
+          </a:solidFill>
+        </p:spPr>
+        <p:style>
+          <a:lnRef idx="2">
+            <a:schemeClr val="accent1">
+              <a:shade val="50000"/>
+            </a:schemeClr>
+          </a:lnRef>
+          <a:fillRef idx="1">
+            <a:schemeClr val="accent1"/>
+          </a:fillRef>
+          <a:effectRef idx="0">
+            <a:schemeClr val="accent1"/>
+          </a:effectRef>
+          <a:fontRef idx="minor">
+            <a:schemeClr val="lt1"/>
+          </a:fontRef>
+        </p:style>
+        <p:txBody>
+          <a:bodyPr rtlCol="0" anchor="ctr"/>
+          <a:lstStyle/>
+          <a:p>
+            <a:pPr algn="ctr"/>
+            <a:endParaRPr lang="en-US"/>
+          </a:p>
+        </p:txBody>
+      </p:sp>
+      <p:sp>
+        <p:nvSpPr>
+          <p:cNvPr id="21" name="Oval 20">
+            <a:extLst>
+              <a:ext uri="{FF2B5EF4-FFF2-40B4-BE49-F238E27FC236}">
+                <a16:creationId xmlns:a16="http://schemas.microsoft.com/office/drawing/2014/main" id="{CBE665D8-BD16-C443-A7DB-33C745F5F4C3}"/>
+              </a:ext>
+            </a:extLst>
+          </p:cNvPr>
+          <p:cNvSpPr/>
+          <p:nvPr/>
+        </p:nvSpPr>
+        <p:spPr>
+          <a:xfrm>
+            <a:off x="8334375" y="2800349"/>
+            <a:ext cx="314325" cy="314325"/>
+          </a:xfrm>
+          <a:prstGeom prst="ellipse">
+            <a:avLst/>
+          </a:prstGeom>
+          <a:solidFill>
+            <a:srgbClr val="00B0F0"/>
+          </a:solidFill>
+        </p:spPr>
+        <p:style>
+          <a:lnRef idx="2">
+            <a:schemeClr val="accent1">
+              <a:shade val="50000"/>
+            </a:schemeClr>
+          </a:lnRef>
+          <a:fillRef idx="1">
+            <a:schemeClr val="accent1"/>
+          </a:fillRef>
+          <a:effectRef idx="0">
+            <a:schemeClr val="accent1"/>
+          </a:effectRef>
+          <a:fontRef idx="minor">
+            <a:schemeClr val="lt1"/>
+          </a:fontRef>
+        </p:style>
+        <p:txBody>
+          <a:bodyPr rtlCol="0" anchor="ctr"/>
+          <a:lstStyle/>
+          <a:p>
+            <a:pPr algn="ctr"/>
+            <a:endParaRPr lang="en-US"/>
+          </a:p>
+        </p:txBody>
+      </p:sp>
+      <p:sp>
+        <p:nvSpPr>
+          <p:cNvPr id="22" name="Oval 21">
+            <a:extLst>
+              <a:ext uri="{FF2B5EF4-FFF2-40B4-BE49-F238E27FC236}">
+                <a16:creationId xmlns:a16="http://schemas.microsoft.com/office/drawing/2014/main" id="{8716A6E8-5194-1843-8740-7CFE1E71AC8C}"/>
+              </a:ext>
+            </a:extLst>
+          </p:cNvPr>
+          <p:cNvSpPr/>
+          <p:nvPr/>
+        </p:nvSpPr>
+        <p:spPr>
+          <a:xfrm>
+            <a:off x="7391400" y="3050382"/>
+            <a:ext cx="314325" cy="314325"/>
+          </a:xfrm>
+          <a:prstGeom prst="ellipse">
+            <a:avLst/>
+          </a:prstGeom>
+          <a:solidFill>
+            <a:srgbClr val="FFFF00"/>
+          </a:solidFill>
+        </p:spPr>
+        <p:style>
+          <a:lnRef idx="2">
+            <a:schemeClr val="accent1">
+              <a:shade val="50000"/>
+            </a:schemeClr>
+          </a:lnRef>
+          <a:fillRef idx="1">
+            <a:schemeClr val="accent1"/>
+          </a:fillRef>
+          <a:effectRef idx="0">
+            <a:schemeClr val="accent1"/>
+          </a:effectRef>
+          <a:fontRef idx="minor">
+            <a:schemeClr val="lt1"/>
+          </a:fontRef>
+        </p:style>
+        <p:txBody>
+          <a:bodyPr rtlCol="0" anchor="ctr"/>
+          <a:lstStyle/>
+          <a:p>
+            <a:pPr algn="ctr"/>
+            <a:endParaRPr lang="en-US"/>
+          </a:p>
+        </p:txBody>
+      </p:sp>
+      <p:sp>
+        <p:nvSpPr>
+          <p:cNvPr id="23" name="Oval 22">
+            <a:extLst>
+              <a:ext uri="{FF2B5EF4-FFF2-40B4-BE49-F238E27FC236}">
+                <a16:creationId xmlns:a16="http://schemas.microsoft.com/office/drawing/2014/main" id="{AC7232C0-D3C4-874D-B786-BB148BFF7049}"/>
+              </a:ext>
+            </a:extLst>
+          </p:cNvPr>
+          <p:cNvSpPr/>
+          <p:nvPr/>
+        </p:nvSpPr>
+        <p:spPr>
+          <a:xfrm>
+            <a:off x="7891464" y="4410074"/>
+            <a:ext cx="314325" cy="314325"/>
+          </a:xfrm>
+          <a:prstGeom prst="ellipse">
+            <a:avLst/>
+          </a:prstGeom>
+          <a:solidFill>
+            <a:srgbClr val="00B0F0"/>
+          </a:solidFill>
+        </p:spPr>
+        <p:style>
+          <a:lnRef idx="2">
+            <a:schemeClr val="accent1">
+              <a:shade val="50000"/>
+            </a:schemeClr>
+          </a:lnRef>
+          <a:fillRef idx="1">
+            <a:schemeClr val="accent1"/>
+          </a:fillRef>
+          <a:effectRef idx="0">
+            <a:schemeClr val="accent1"/>
+          </a:effectRef>
+          <a:fontRef idx="minor">
+            <a:schemeClr val="lt1"/>
+          </a:fontRef>
+        </p:style>
+        <p:txBody>
+          <a:bodyPr rtlCol="0" anchor="ctr"/>
+          <a:lstStyle/>
+          <a:p>
+            <a:pPr algn="ctr"/>
+            <a:endParaRPr lang="en-US"/>
+          </a:p>
+        </p:txBody>
+      </p:sp>
+      <p:sp>
+        <p:nvSpPr>
+          <p:cNvPr id="24" name="Oval 23">
+            <a:extLst>
+              <a:ext uri="{FF2B5EF4-FFF2-40B4-BE49-F238E27FC236}">
+                <a16:creationId xmlns:a16="http://schemas.microsoft.com/office/drawing/2014/main" id="{CFB75B72-7751-E244-927A-357FEE2AD292}"/>
+              </a:ext>
+            </a:extLst>
+          </p:cNvPr>
+          <p:cNvSpPr/>
+          <p:nvPr/>
+        </p:nvSpPr>
+        <p:spPr>
+          <a:xfrm>
+            <a:off x="8491538" y="3752848"/>
+            <a:ext cx="314325" cy="314325"/>
+          </a:xfrm>
+          <a:prstGeom prst="ellipse">
+            <a:avLst/>
+          </a:prstGeom>
+          <a:solidFill>
+            <a:srgbClr val="002060"/>
+          </a:solidFill>
+        </p:spPr>
+        <p:style>
+          <a:lnRef idx="2">
+            <a:schemeClr val="accent1">
+              <a:shade val="50000"/>
+            </a:schemeClr>
+          </a:lnRef>
+          <a:fillRef idx="1">
+            <a:schemeClr val="accent1"/>
+          </a:fillRef>
+          <a:effectRef idx="0">
+            <a:schemeClr val="accent1"/>
+          </a:effectRef>
+          <a:fontRef idx="minor">
+            <a:schemeClr val="lt1"/>
+          </a:fontRef>
+        </p:style>
+        <p:txBody>
+          <a:bodyPr rtlCol="0" anchor="ctr"/>
+          <a:lstStyle/>
+          <a:p>
+            <a:pPr algn="ctr"/>
+            <a:endParaRPr lang="en-US"/>
+          </a:p>
+        </p:txBody>
+      </p:sp>
+      <p:sp>
+        <p:nvSpPr>
+          <p:cNvPr id="25" name="Oval 24">
+            <a:extLst>
+              <a:ext uri="{FF2B5EF4-FFF2-40B4-BE49-F238E27FC236}">
+                <a16:creationId xmlns:a16="http://schemas.microsoft.com/office/drawing/2014/main" id="{5A90B763-4A6C-AE44-B10A-CAC54BEA55F6}"/>
+              </a:ext>
+            </a:extLst>
+          </p:cNvPr>
+          <p:cNvSpPr/>
+          <p:nvPr/>
+        </p:nvSpPr>
+        <p:spPr>
+          <a:xfrm>
+            <a:off x="7043738" y="4710111"/>
+            <a:ext cx="314325" cy="314325"/>
+          </a:xfrm>
+          <a:prstGeom prst="ellipse">
+            <a:avLst/>
+          </a:prstGeom>
+          <a:solidFill>
+            <a:srgbClr val="FFFF00"/>
+          </a:solidFill>
+        </p:spPr>
+        <p:style>
+          <a:lnRef idx="2">
+            <a:schemeClr val="accent1">
+              <a:shade val="50000"/>
+            </a:schemeClr>
+          </a:lnRef>
+          <a:fillRef idx="1">
+            <a:schemeClr val="accent1"/>
+          </a:fillRef>
+          <a:effectRef idx="0">
+            <a:schemeClr val="accent1"/>
+          </a:effectRef>
+          <a:fontRef idx="minor">
+            <a:schemeClr val="lt1"/>
+          </a:fontRef>
+        </p:style>
+        <p:txBody>
+          <a:bodyPr rtlCol="0" anchor="ctr"/>
+          <a:lstStyle/>
+          <a:p>
+            <a:pPr algn="ctr"/>
+            <a:endParaRPr lang="en-US"/>
+          </a:p>
+        </p:txBody>
+      </p:sp>
+      <p:sp>
+        <p:nvSpPr>
+          <p:cNvPr id="26" name="Oval 25">
+            <a:extLst>
+              <a:ext uri="{FF2B5EF4-FFF2-40B4-BE49-F238E27FC236}">
+                <a16:creationId xmlns:a16="http://schemas.microsoft.com/office/drawing/2014/main" id="{E608D13B-D12C-924F-8139-3E7E8F9E180F}"/>
+              </a:ext>
+            </a:extLst>
+          </p:cNvPr>
+          <p:cNvSpPr/>
+          <p:nvPr/>
+        </p:nvSpPr>
+        <p:spPr>
+          <a:xfrm>
+            <a:off x="6653212" y="3867149"/>
+            <a:ext cx="314325" cy="314325"/>
+          </a:xfrm>
+          <a:prstGeom prst="ellipse">
+            <a:avLst/>
+          </a:prstGeom>
+          <a:solidFill>
+            <a:srgbClr val="92D050"/>
+          </a:solidFill>
+        </p:spPr>
+        <p:style>
+          <a:lnRef idx="2">
+            <a:schemeClr val="accent1">
+              <a:shade val="50000"/>
+            </a:schemeClr>
+          </a:lnRef>
+          <a:fillRef idx="1">
+            <a:schemeClr val="accent1"/>
+          </a:fillRef>
+          <a:effectRef idx="0">
+            <a:schemeClr val="accent1"/>
+          </a:effectRef>
+          <a:fontRef idx="minor">
+            <a:schemeClr val="lt1"/>
+          </a:fontRef>
+        </p:style>
+        <p:txBody>
+          <a:bodyPr rtlCol="0" anchor="ctr"/>
+          <a:lstStyle/>
+          <a:p>
+            <a:pPr algn="ctr"/>
+            <a:endParaRPr lang="en-US"/>
+          </a:p>
+        </p:txBody>
+      </p:sp>
+      <p:sp>
+        <p:nvSpPr>
+          <p:cNvPr id="27" name="Oval 26">
+            <a:extLst>
+              <a:ext uri="{FF2B5EF4-FFF2-40B4-BE49-F238E27FC236}">
+                <a16:creationId xmlns:a16="http://schemas.microsoft.com/office/drawing/2014/main" id="{6549C0F0-8986-694D-A0BD-8647118E99FE}"/>
+              </a:ext>
+            </a:extLst>
+          </p:cNvPr>
+          <p:cNvSpPr/>
+          <p:nvPr/>
+        </p:nvSpPr>
+        <p:spPr>
+          <a:xfrm>
+            <a:off x="7891463" y="3378993"/>
+            <a:ext cx="314325" cy="314325"/>
+          </a:xfrm>
+          <a:prstGeom prst="ellipse">
+            <a:avLst/>
+          </a:prstGeom>
+          <a:solidFill>
+            <a:srgbClr val="FFC000"/>
+          </a:solidFill>
+        </p:spPr>
+        <p:style>
+          <a:lnRef idx="2">
+            <a:schemeClr val="accent1">
+              <a:shade val="50000"/>
+            </a:schemeClr>
+          </a:lnRef>
+          <a:fillRef idx="1">
+            <a:schemeClr val="accent1"/>
+          </a:fillRef>
+          <a:effectRef idx="0">
+            <a:schemeClr val="accent1"/>
+          </a:effectRef>
+          <a:fontRef idx="minor">
+            <a:schemeClr val="lt1"/>
+          </a:fontRef>
+        </p:style>
+        <p:txBody>
+          <a:bodyPr rtlCol="0" anchor="ctr"/>
+          <a:lstStyle/>
+          <a:p>
+            <a:pPr algn="ctr"/>
+            <a:endParaRPr lang="en-US"/>
+          </a:p>
+        </p:txBody>
+      </p:sp>
+      <p:sp>
+        <p:nvSpPr>
+          <p:cNvPr id="28" name="TextBox 27">
+            <a:extLst>
+              <a:ext uri="{FF2B5EF4-FFF2-40B4-BE49-F238E27FC236}">
+                <a16:creationId xmlns:a16="http://schemas.microsoft.com/office/drawing/2014/main" id="{EA335B55-8B52-5644-A550-2710A16DB226}"/>
+              </a:ext>
+            </a:extLst>
+          </p:cNvPr>
+          <p:cNvSpPr txBox="1"/>
+          <p:nvPr/>
+        </p:nvSpPr>
+        <p:spPr>
+          <a:xfrm>
+            <a:off x="2717006" y="1991378"/>
+            <a:ext cx="2164558" cy="523220"/>
+          </a:xfrm>
+          <a:prstGeom prst="rect">
+            <a:avLst/>
+          </a:prstGeom>
+          <a:noFill/>
+        </p:spPr>
+        <p:txBody>
+          <a:bodyPr wrap="square" rtlCol="0">
+            <a:spAutoFit/>
+          </a:bodyPr>
+          <a:lstStyle/>
+          <a:p>
+            <a:r>
+              <a:rPr lang="en-US" sz="2800" dirty="0"/>
+              <a:t>Community 1</a:t>
+            </a:r>
+          </a:p>
+        </p:txBody>
+      </p:sp>
+      <p:sp>
+        <p:nvSpPr>
+          <p:cNvPr id="29" name="TextBox 28">
+            <a:extLst>
+              <a:ext uri="{FF2B5EF4-FFF2-40B4-BE49-F238E27FC236}">
+                <a16:creationId xmlns:a16="http://schemas.microsoft.com/office/drawing/2014/main" id="{BC52BB93-C1D8-A04D-98AA-48CAD4AC9990}"/>
+              </a:ext>
+            </a:extLst>
+          </p:cNvPr>
+          <p:cNvSpPr txBox="1"/>
+          <p:nvPr/>
+        </p:nvSpPr>
+        <p:spPr>
+          <a:xfrm>
+            <a:off x="6667500" y="2015520"/>
+            <a:ext cx="2164558" cy="523220"/>
+          </a:xfrm>
+          <a:prstGeom prst="rect">
+            <a:avLst/>
+          </a:prstGeom>
+          <a:noFill/>
+        </p:spPr>
+        <p:txBody>
+          <a:bodyPr wrap="square" rtlCol="0">
+            <a:spAutoFit/>
+          </a:bodyPr>
+          <a:lstStyle/>
+          <a:p>
+            <a:r>
+              <a:rPr lang="en-US" sz="2800" dirty="0"/>
+              <a:t>Community 2</a:t>
+            </a:r>
           </a:p>
         </p:txBody>
       </p:sp>
     </p:spTree>
     <p:extLst>
       <p:ext uri="{BB962C8B-B14F-4D97-AF65-F5344CB8AC3E}">
-        <p14:creationId xmlns:p14="http://schemas.microsoft.com/office/powerpoint/2010/main" val="4079415005"/>
+        <p14:creationId xmlns:p14="http://schemas.microsoft.com/office/powerpoint/2010/main" val="3055002149"/>
       </p:ext>
     </p:extLst>
   </p:cSld>
@@ -10496,43 +14913,34 @@
           </a:p>
         </p:txBody>
       </p:sp>
-      <p:sp>
-        <p:nvSpPr>
-          <p:cNvPr id="3" name="Content Placeholder 2">
+      <p:graphicFrame>
+        <p:nvGraphicFramePr>
+          <p:cNvPr id="12" name="Diagram 11">
             <a:extLst>
               <a:ext uri="{FF2B5EF4-FFF2-40B4-BE49-F238E27FC236}">
-                <a16:creationId xmlns:a16="http://schemas.microsoft.com/office/drawing/2014/main" id="{653EEF6E-04AB-1745-84FB-768D011D176C}"/>
+                <a16:creationId xmlns:a16="http://schemas.microsoft.com/office/drawing/2014/main" id="{8B3002D7-459F-0B49-B4AD-4140562B12BC}"/>
               </a:ext>
             </a:extLst>
           </p:cNvPr>
-          <p:cNvSpPr>
-            <a:spLocks noGrp="1"/>
-          </p:cNvSpPr>
+          <p:cNvGraphicFramePr/>
           <p:nvPr>
-            <p:ph idx="1"/>
+            <p:extLst>
+              <p:ext uri="{D42A27DB-BD31-4B8C-83A1-F6EECF244321}">
+                <p14:modId xmlns:p14="http://schemas.microsoft.com/office/powerpoint/2010/main" val="662949717"/>
+              </p:ext>
+            </p:extLst>
           </p:nvPr>
-        </p:nvSpPr>
-        <p:spPr/>
-        <p:txBody>
-          <a:bodyPr/>
-          <a:lstStyle/>
-          <a:p>
-            <a:r>
-              <a:rPr lang="en-US" dirty="0"/>
-              <a:t>Stochastic (ecological drift – random birth and death events in the absence of selection) </a:t>
-            </a:r>
-          </a:p>
-          <a:p>
-            <a:r>
-              <a:rPr lang="en-US" dirty="0"/>
-              <a:t>Deterministic</a:t>
-            </a:r>
-          </a:p>
-          <a:p>
-            <a:endParaRPr lang="en-US" dirty="0"/>
-          </a:p>
-        </p:txBody>
-      </p:sp>
+        </p:nvGraphicFramePr>
+        <p:xfrm>
+          <a:off x="2489993" y="1690688"/>
+          <a:ext cx="7212013" cy="4808009"/>
+        </p:xfrm>
+        <a:graphic>
+          <a:graphicData uri="http://schemas.openxmlformats.org/drawingml/2006/diagram">
+            <dgm:relIds xmlns:dgm="http://schemas.openxmlformats.org/drawingml/2006/diagram" xmlns:r="http://schemas.openxmlformats.org/officeDocument/2006/relationships" r:dm="rId3" r:lo="rId4" r:qs="rId5" r:cs="rId6"/>
+          </a:graphicData>
+        </a:graphic>
+      </p:graphicFrame>
     </p:spTree>
     <p:extLst>
       <p:ext uri="{BB962C8B-B14F-4D97-AF65-F5344CB8AC3E}">

--- a/Projects/Chapter1/community-assembly.pptx
+++ b/Projects/Chapter1/community-assembly.pptx
@@ -5,7 +5,7 @@
     <p:sldMasterId id="2147483648" r:id="rId1"/>
   </p:sldMasterIdLst>
   <p:notesMasterIdLst>
-    <p:notesMasterId r:id="rId27"/>
+    <p:notesMasterId r:id="rId30"/>
   </p:notesMasterIdLst>
   <p:sldIdLst>
     <p:sldId id="256" r:id="rId2"/>
@@ -19,20 +19,23 @@
     <p:sldId id="283" r:id="rId10"/>
     <p:sldId id="282" r:id="rId11"/>
     <p:sldId id="267" r:id="rId12"/>
-    <p:sldId id="274" r:id="rId13"/>
-    <p:sldId id="273" r:id="rId14"/>
-    <p:sldId id="263" r:id="rId15"/>
-    <p:sldId id="258" r:id="rId16"/>
-    <p:sldId id="259" r:id="rId17"/>
-    <p:sldId id="265" r:id="rId18"/>
-    <p:sldId id="266" r:id="rId19"/>
-    <p:sldId id="260" r:id="rId20"/>
-    <p:sldId id="271" r:id="rId21"/>
-    <p:sldId id="272" r:id="rId22"/>
-    <p:sldId id="261" r:id="rId23"/>
-    <p:sldId id="277" r:id="rId24"/>
-    <p:sldId id="278" r:id="rId25"/>
-    <p:sldId id="262" r:id="rId26"/>
+    <p:sldId id="284" r:id="rId13"/>
+    <p:sldId id="274" r:id="rId14"/>
+    <p:sldId id="273" r:id="rId15"/>
+    <p:sldId id="285" r:id="rId16"/>
+    <p:sldId id="286" r:id="rId17"/>
+    <p:sldId id="263" r:id="rId18"/>
+    <p:sldId id="258" r:id="rId19"/>
+    <p:sldId id="259" r:id="rId20"/>
+    <p:sldId id="265" r:id="rId21"/>
+    <p:sldId id="266" r:id="rId22"/>
+    <p:sldId id="260" r:id="rId23"/>
+    <p:sldId id="271" r:id="rId24"/>
+    <p:sldId id="272" r:id="rId25"/>
+    <p:sldId id="261" r:id="rId26"/>
+    <p:sldId id="277" r:id="rId27"/>
+    <p:sldId id="278" r:id="rId28"/>
+    <p:sldId id="262" r:id="rId29"/>
   </p:sldIdLst>
   <p:sldSz cx="12192000" cy="6858000"/>
   <p:notesSz cx="6858000" cy="9144000"/>
@@ -5556,7 +5559,7 @@
       <dgm:spPr/>
     </dgm:pt>
     <dgm:pt modelId="{381AA547-A4ED-3840-A5BF-F16754F7DE5F}" type="pres">
-      <dgm:prSet presAssocID="{B5498DE5-7CDC-0347-BA87-FB91FE15E435}" presName="node" presStyleLbl="node1" presStyleIdx="0" presStyleCnt="8" custScaleX="349941" custScaleY="53000">
+      <dgm:prSet presAssocID="{B5498DE5-7CDC-0347-BA87-FB91FE15E435}" presName="node" presStyleLbl="node1" presStyleIdx="0" presStyleCnt="8" custScaleX="349935" custScaleY="53000">
         <dgm:presLayoutVars>
           <dgm:bulletEnabled val="1"/>
         </dgm:presLayoutVars>
@@ -5748,42 +5751,6 @@
       <dgm:prSet loTypeId="urn:microsoft.com/office/officeart/2005/8/layout/process2" loCatId="" qsTypeId="urn:microsoft.com/office/officeart/2005/8/quickstyle/simple1" qsCatId="simple" csTypeId="urn:microsoft.com/office/officeart/2005/8/colors/colorful1" csCatId="colorful" phldr="1"/>
       <dgm:spPr/>
     </dgm:pt>
-    <dgm:pt modelId="{B5498DE5-7CDC-0347-BA87-FB91FE15E435}">
-      <dgm:prSet phldrT="[Text]"/>
-      <dgm:spPr/>
-      <dgm:t>
-        <a:bodyPr/>
-        <a:lstStyle/>
-        <a:p>
-          <a:r>
-            <a:rPr lang="en-US" dirty="0"/>
-            <a:t>Download sequence data and metadata in command line using SRA toolbox</a:t>
-          </a:r>
-        </a:p>
-      </dgm:t>
-    </dgm:pt>
-    <dgm:pt modelId="{A4B182FE-28CF-CC4A-A857-D974481A212A}" type="parTrans" cxnId="{6F8A8218-A43D-754D-AC34-7D7A44CB7D31}">
-      <dgm:prSet/>
-      <dgm:spPr/>
-      <dgm:t>
-        <a:bodyPr/>
-        <a:lstStyle/>
-        <a:p>
-          <a:endParaRPr lang="en-US"/>
-        </a:p>
-      </dgm:t>
-    </dgm:pt>
-    <dgm:pt modelId="{30256DA3-2063-6145-A40C-3F213F51F903}" type="sibTrans" cxnId="{6F8A8218-A43D-754D-AC34-7D7A44CB7D31}">
-      <dgm:prSet/>
-      <dgm:spPr/>
-      <dgm:t>
-        <a:bodyPr/>
-        <a:lstStyle/>
-        <a:p>
-          <a:endParaRPr lang="en-US"/>
-        </a:p>
-      </dgm:t>
-    </dgm:pt>
     <dgm:pt modelId="{6D80D72C-DBB2-D94A-BCBD-1B0C1C35E98A}">
       <dgm:prSet phldrT="[Text]"/>
       <dgm:spPr/>
@@ -5793,7 +5760,7 @@
         <a:p>
           <a:r>
             <a:rPr lang="en-US" dirty="0"/>
-            <a:t>QIIME2: Modify/convert files to QIIME2 formats</a:t>
+            <a:t>Wrangle metadata</a:t>
           </a:r>
           <a:endParaRPr lang="en-US" i="1" dirty="0"/>
         </a:p>
@@ -5830,7 +5797,7 @@
         <a:p>
           <a:r>
             <a:rPr lang="en-US" dirty="0"/>
-            <a:t>QIIME2: Trim primers</a:t>
+            <a:t>Identify and remove contaminant ASVs</a:t>
           </a:r>
         </a:p>
       </dgm:t>
@@ -5866,7 +5833,7 @@
         <a:p>
           <a:r>
             <a:rPr lang="en-US" dirty="0"/>
-            <a:t>DADA2: Denoise data</a:t>
+            <a:t>Remove singletons</a:t>
           </a:r>
         </a:p>
       </dgm:t>
@@ -5902,7 +5869,7 @@
         <a:p>
           <a:r>
             <a:rPr lang="en-US" dirty="0"/>
-            <a:t>QIIME2:  Use SILVA classifier to classify representative sequences</a:t>
+            <a:t>Re-root phylogenetic tree</a:t>
           </a:r>
         </a:p>
       </dgm:t>
@@ -5938,7 +5905,7 @@
         <a:p>
           <a:r>
             <a:rPr lang="en-US" dirty="0"/>
-            <a:t>QIIME2: Generate feature table </a:t>
+            <a:t>Remove ambiguous annotations and low abundance phyla</a:t>
           </a:r>
         </a:p>
       </dgm:t>
@@ -5974,7 +5941,15 @@
         <a:p>
           <a:r>
             <a:rPr lang="en-US" dirty="0"/>
-            <a:t>QIIME2: Make multiple sequence alignment with MAFFT, construct phylogenetic tree and root.</a:t>
+            <a:t>Construct </a:t>
+          </a:r>
+          <a:r>
+            <a:rPr lang="en-US" dirty="0" err="1"/>
+            <a:t>phyloseq</a:t>
+          </a:r>
+          <a:r>
+            <a:rPr lang="en-US" dirty="0"/>
+            <a:t> object and export </a:t>
           </a:r>
         </a:p>
       </dgm:t>
@@ -6001,8 +5976,8 @@
         </a:p>
       </dgm:t>
     </dgm:pt>
-    <dgm:pt modelId="{4BA86EBA-301B-894C-9E58-371F1419EEF2}">
-      <dgm:prSet/>
+    <dgm:pt modelId="{B5498DE5-7CDC-0347-BA87-FB91FE15E435}">
+      <dgm:prSet phldrT="[Text]"/>
       <dgm:spPr/>
       <dgm:t>
         <a:bodyPr/>
@@ -6010,12 +5985,12 @@
         <a:p>
           <a:r>
             <a:rPr lang="en-US" dirty="0"/>
-            <a:t>QIIME2: Export feature table, ASV count table, representative sequences, taxonomy table and rooted phylogenetic tree.</a:t>
+            <a:t>Load in data from QIIME2 step</a:t>
           </a:r>
         </a:p>
       </dgm:t>
     </dgm:pt>
-    <dgm:pt modelId="{F0DE1318-0E22-3447-AABB-108F63AEBF76}" type="parTrans" cxnId="{DFDC9720-DA41-4347-BBAC-0777E0F9CD5E}">
+    <dgm:pt modelId="{30256DA3-2063-6145-A40C-3F213F51F903}" type="sibTrans" cxnId="{6F8A8218-A43D-754D-AC34-7D7A44CB7D31}">
       <dgm:prSet/>
       <dgm:spPr/>
       <dgm:t>
@@ -6026,7 +6001,7 @@
         </a:p>
       </dgm:t>
     </dgm:pt>
-    <dgm:pt modelId="{374085FA-BF47-3A48-BEA6-BD8154C1D35B}" type="sibTrans" cxnId="{DFDC9720-DA41-4347-BBAC-0777E0F9CD5E}">
+    <dgm:pt modelId="{A4B182FE-28CF-CC4A-A857-D974481A212A}" type="parTrans" cxnId="{6F8A8218-A43D-754D-AC34-7D7A44CB7D31}">
       <dgm:prSet/>
       <dgm:spPr/>
       <dgm:t>
@@ -6046,7 +6021,7 @@
       <dgm:spPr/>
     </dgm:pt>
     <dgm:pt modelId="{381AA547-A4ED-3840-A5BF-F16754F7DE5F}" type="pres">
-      <dgm:prSet presAssocID="{B5498DE5-7CDC-0347-BA87-FB91FE15E435}" presName="node" presStyleLbl="node1" presStyleIdx="0" presStyleCnt="8" custScaleX="349941" custScaleY="53000">
+      <dgm:prSet presAssocID="{B5498DE5-7CDC-0347-BA87-FB91FE15E435}" presName="node" presStyleLbl="node1" presStyleIdx="0" presStyleCnt="7" custScaleX="349941" custScaleY="53000">
         <dgm:presLayoutVars>
           <dgm:bulletEnabled val="1"/>
         </dgm:presLayoutVars>
@@ -6054,15 +6029,15 @@
       <dgm:spPr/>
     </dgm:pt>
     <dgm:pt modelId="{91DA19BA-A0AB-564A-8A9E-322DF18B64CF}" type="pres">
-      <dgm:prSet presAssocID="{30256DA3-2063-6145-A40C-3F213F51F903}" presName="sibTrans" presStyleLbl="sibTrans2D1" presStyleIdx="0" presStyleCnt="7"/>
+      <dgm:prSet presAssocID="{30256DA3-2063-6145-A40C-3F213F51F903}" presName="sibTrans" presStyleLbl="sibTrans2D1" presStyleIdx="0" presStyleCnt="6"/>
       <dgm:spPr/>
     </dgm:pt>
     <dgm:pt modelId="{93A03A25-0C23-0B49-A801-B6DF4800FF1C}" type="pres">
-      <dgm:prSet presAssocID="{30256DA3-2063-6145-A40C-3F213F51F903}" presName="connectorText" presStyleLbl="sibTrans2D1" presStyleIdx="0" presStyleCnt="7"/>
+      <dgm:prSet presAssocID="{30256DA3-2063-6145-A40C-3F213F51F903}" presName="connectorText" presStyleLbl="sibTrans2D1" presStyleIdx="0" presStyleCnt="6"/>
       <dgm:spPr/>
     </dgm:pt>
     <dgm:pt modelId="{43D2067A-91F6-8745-98BA-D6A10B24950A}" type="pres">
-      <dgm:prSet presAssocID="{6D80D72C-DBB2-D94A-BCBD-1B0C1C35E98A}" presName="node" presStyleLbl="node1" presStyleIdx="1" presStyleCnt="8" custScaleX="349941" custScaleY="53000">
+      <dgm:prSet presAssocID="{6D80D72C-DBB2-D94A-BCBD-1B0C1C35E98A}" presName="node" presStyleLbl="node1" presStyleIdx="1" presStyleCnt="7" custScaleX="349941" custScaleY="53000">
         <dgm:presLayoutVars>
           <dgm:bulletEnabled val="1"/>
         </dgm:presLayoutVars>
@@ -6070,15 +6045,15 @@
       <dgm:spPr/>
     </dgm:pt>
     <dgm:pt modelId="{D067C965-9057-9C4A-A1D2-4912C14C50F7}" type="pres">
-      <dgm:prSet presAssocID="{ECF5917A-5A86-4945-92ED-C3A30B725FE7}" presName="sibTrans" presStyleLbl="sibTrans2D1" presStyleIdx="1" presStyleCnt="7"/>
+      <dgm:prSet presAssocID="{ECF5917A-5A86-4945-92ED-C3A30B725FE7}" presName="sibTrans" presStyleLbl="sibTrans2D1" presStyleIdx="1" presStyleCnt="6"/>
       <dgm:spPr/>
     </dgm:pt>
     <dgm:pt modelId="{5030DE2C-F3D5-7E44-98C9-D5A5317CA56C}" type="pres">
-      <dgm:prSet presAssocID="{ECF5917A-5A86-4945-92ED-C3A30B725FE7}" presName="connectorText" presStyleLbl="sibTrans2D1" presStyleIdx="1" presStyleCnt="7"/>
+      <dgm:prSet presAssocID="{ECF5917A-5A86-4945-92ED-C3A30B725FE7}" presName="connectorText" presStyleLbl="sibTrans2D1" presStyleIdx="1" presStyleCnt="6"/>
       <dgm:spPr/>
     </dgm:pt>
     <dgm:pt modelId="{80C05A4E-2A0A-294C-8DDC-052E97D834DA}" type="pres">
-      <dgm:prSet presAssocID="{3AAD80AB-86BA-354D-A91B-40CE06269A51}" presName="node" presStyleLbl="node1" presStyleIdx="2" presStyleCnt="8" custScaleX="349941" custScaleY="53000">
+      <dgm:prSet presAssocID="{3AAD80AB-86BA-354D-A91B-40CE06269A51}" presName="node" presStyleLbl="node1" presStyleIdx="2" presStyleCnt="7" custScaleX="349941" custScaleY="53000">
         <dgm:presLayoutVars>
           <dgm:bulletEnabled val="1"/>
         </dgm:presLayoutVars>
@@ -6086,15 +6061,15 @@
       <dgm:spPr/>
     </dgm:pt>
     <dgm:pt modelId="{B3C2DB7A-EC33-6544-A09D-B1205728770A}" type="pres">
-      <dgm:prSet presAssocID="{C215D862-A291-E848-A659-5797AEF6E6A2}" presName="sibTrans" presStyleLbl="sibTrans2D1" presStyleIdx="2" presStyleCnt="7"/>
+      <dgm:prSet presAssocID="{C215D862-A291-E848-A659-5797AEF6E6A2}" presName="sibTrans" presStyleLbl="sibTrans2D1" presStyleIdx="2" presStyleCnt="6"/>
       <dgm:spPr/>
     </dgm:pt>
     <dgm:pt modelId="{14D2D5CD-E619-2C4C-83EC-B8786FE7D09C}" type="pres">
-      <dgm:prSet presAssocID="{C215D862-A291-E848-A659-5797AEF6E6A2}" presName="connectorText" presStyleLbl="sibTrans2D1" presStyleIdx="2" presStyleCnt="7"/>
+      <dgm:prSet presAssocID="{C215D862-A291-E848-A659-5797AEF6E6A2}" presName="connectorText" presStyleLbl="sibTrans2D1" presStyleIdx="2" presStyleCnt="6"/>
       <dgm:spPr/>
     </dgm:pt>
     <dgm:pt modelId="{6F6C8E07-FBAD-3F4D-A906-27ECCF26E70E}" type="pres">
-      <dgm:prSet presAssocID="{99CAAEDC-6392-D343-9A6F-7F5A17C79600}" presName="node" presStyleLbl="node1" presStyleIdx="3" presStyleCnt="8" custScaleX="349941" custScaleY="53000">
+      <dgm:prSet presAssocID="{99CAAEDC-6392-D343-9A6F-7F5A17C79600}" presName="node" presStyleLbl="node1" presStyleIdx="3" presStyleCnt="7" custScaleX="349941" custScaleY="53000">
         <dgm:presLayoutVars>
           <dgm:bulletEnabled val="1"/>
         </dgm:presLayoutVars>
@@ -6102,15 +6077,15 @@
       <dgm:spPr/>
     </dgm:pt>
     <dgm:pt modelId="{48489AC1-89DA-0F48-B940-23505B5798FF}" type="pres">
-      <dgm:prSet presAssocID="{E9E523D2-25B5-CD4B-9629-508B4D79D50B}" presName="sibTrans" presStyleLbl="sibTrans2D1" presStyleIdx="3" presStyleCnt="7"/>
+      <dgm:prSet presAssocID="{E9E523D2-25B5-CD4B-9629-508B4D79D50B}" presName="sibTrans" presStyleLbl="sibTrans2D1" presStyleIdx="3" presStyleCnt="6"/>
       <dgm:spPr/>
     </dgm:pt>
     <dgm:pt modelId="{3C8009BD-6E6B-AA43-B36E-EB048E42CE59}" type="pres">
-      <dgm:prSet presAssocID="{E9E523D2-25B5-CD4B-9629-508B4D79D50B}" presName="connectorText" presStyleLbl="sibTrans2D1" presStyleIdx="3" presStyleCnt="7"/>
+      <dgm:prSet presAssocID="{E9E523D2-25B5-CD4B-9629-508B4D79D50B}" presName="connectorText" presStyleLbl="sibTrans2D1" presStyleIdx="3" presStyleCnt="6"/>
       <dgm:spPr/>
     </dgm:pt>
     <dgm:pt modelId="{BEBB65BD-4B92-BC44-96A8-BAAA586B7BF5}" type="pres">
-      <dgm:prSet presAssocID="{AF485B0E-A33B-9844-9210-9C1E1BDA0205}" presName="node" presStyleLbl="node1" presStyleIdx="4" presStyleCnt="8" custScaleX="349941" custScaleY="53000">
+      <dgm:prSet presAssocID="{AF485B0E-A33B-9844-9210-9C1E1BDA0205}" presName="node" presStyleLbl="node1" presStyleIdx="4" presStyleCnt="7" custScaleX="349941" custScaleY="53000">
         <dgm:presLayoutVars>
           <dgm:bulletEnabled val="1"/>
         </dgm:presLayoutVars>
@@ -6118,15 +6093,15 @@
       <dgm:spPr/>
     </dgm:pt>
     <dgm:pt modelId="{2839F08F-24F1-614A-A1A4-847F111C0482}" type="pres">
-      <dgm:prSet presAssocID="{F898BA7A-4505-614F-B67E-8FA6BAB686B5}" presName="sibTrans" presStyleLbl="sibTrans2D1" presStyleIdx="4" presStyleCnt="7"/>
+      <dgm:prSet presAssocID="{F898BA7A-4505-614F-B67E-8FA6BAB686B5}" presName="sibTrans" presStyleLbl="sibTrans2D1" presStyleIdx="4" presStyleCnt="6"/>
       <dgm:spPr/>
     </dgm:pt>
     <dgm:pt modelId="{7F333F59-D690-B24C-ABEB-6EE4EB2A6CE1}" type="pres">
-      <dgm:prSet presAssocID="{F898BA7A-4505-614F-B67E-8FA6BAB686B5}" presName="connectorText" presStyleLbl="sibTrans2D1" presStyleIdx="4" presStyleCnt="7"/>
+      <dgm:prSet presAssocID="{F898BA7A-4505-614F-B67E-8FA6BAB686B5}" presName="connectorText" presStyleLbl="sibTrans2D1" presStyleIdx="4" presStyleCnt="6"/>
       <dgm:spPr/>
     </dgm:pt>
     <dgm:pt modelId="{80377AF5-BC76-FB40-840E-12C9D1BDB641}" type="pres">
-      <dgm:prSet presAssocID="{7FA26DE3-9601-BF47-AC3A-1976221D9FF7}" presName="node" presStyleLbl="node1" presStyleIdx="5" presStyleCnt="8" custScaleX="349941" custScaleY="53000">
+      <dgm:prSet presAssocID="{7FA26DE3-9601-BF47-AC3A-1976221D9FF7}" presName="node" presStyleLbl="node1" presStyleIdx="5" presStyleCnt="7" custScaleX="349941" custScaleY="53000">
         <dgm:presLayoutVars>
           <dgm:bulletEnabled val="1"/>
         </dgm:presLayoutVars>
@@ -6134,31 +6109,15 @@
       <dgm:spPr/>
     </dgm:pt>
     <dgm:pt modelId="{C9A34051-A77A-F049-83DF-B23743A74457}" type="pres">
-      <dgm:prSet presAssocID="{6BBB6159-CF03-854D-ADAC-23CBD22E850F}" presName="sibTrans" presStyleLbl="sibTrans2D1" presStyleIdx="5" presStyleCnt="7"/>
+      <dgm:prSet presAssocID="{6BBB6159-CF03-854D-ADAC-23CBD22E850F}" presName="sibTrans" presStyleLbl="sibTrans2D1" presStyleIdx="5" presStyleCnt="6"/>
       <dgm:spPr/>
     </dgm:pt>
     <dgm:pt modelId="{B372B6F6-AA4E-0A43-A234-81DA0BBCD8AB}" type="pres">
-      <dgm:prSet presAssocID="{6BBB6159-CF03-854D-ADAC-23CBD22E850F}" presName="connectorText" presStyleLbl="sibTrans2D1" presStyleIdx="5" presStyleCnt="7"/>
+      <dgm:prSet presAssocID="{6BBB6159-CF03-854D-ADAC-23CBD22E850F}" presName="connectorText" presStyleLbl="sibTrans2D1" presStyleIdx="5" presStyleCnt="6"/>
       <dgm:spPr/>
     </dgm:pt>
     <dgm:pt modelId="{77F0190E-9B2D-0449-9A36-A264480F521F}" type="pres">
-      <dgm:prSet presAssocID="{015830E8-F665-B44B-9DB8-53596A8F4B44}" presName="node" presStyleLbl="node1" presStyleIdx="6" presStyleCnt="8" custScaleX="349941" custScaleY="53000">
-        <dgm:presLayoutVars>
-          <dgm:bulletEnabled val="1"/>
-        </dgm:presLayoutVars>
-      </dgm:prSet>
-      <dgm:spPr/>
-    </dgm:pt>
-    <dgm:pt modelId="{26A17077-D919-4B4F-8DCF-A621A4F50A35}" type="pres">
-      <dgm:prSet presAssocID="{762744FF-B12D-B048-A7F9-0D25528B3DD4}" presName="sibTrans" presStyleLbl="sibTrans2D1" presStyleIdx="6" presStyleCnt="7"/>
-      <dgm:spPr/>
-    </dgm:pt>
-    <dgm:pt modelId="{1C85A635-76EE-CB45-B9FA-7B7A76246FB3}" type="pres">
-      <dgm:prSet presAssocID="{762744FF-B12D-B048-A7F9-0D25528B3DD4}" presName="connectorText" presStyleLbl="sibTrans2D1" presStyleIdx="6" presStyleCnt="7"/>
-      <dgm:spPr/>
-    </dgm:pt>
-    <dgm:pt modelId="{218DEA2E-8D5B-8741-B88A-2B31902D6D39}" type="pres">
-      <dgm:prSet presAssocID="{4BA86EBA-301B-894C-9E58-371F1419EEF2}" presName="node" presStyleLbl="node1" presStyleIdx="7" presStyleCnt="8" custScaleX="349941" custScaleY="53000">
+      <dgm:prSet presAssocID="{015830E8-F665-B44B-9DB8-53596A8F4B44}" presName="node" presStyleLbl="node1" presStyleIdx="6" presStyleCnt="7" custScaleX="349941" custScaleY="53000">
         <dgm:presLayoutVars>
           <dgm:bulletEnabled val="1"/>
         </dgm:presLayoutVars>
@@ -6167,7 +6126,6 @@
     </dgm:pt>
   </dgm:ptLst>
   <dgm:cxnLst>
-    <dgm:cxn modelId="{C7731D08-B68F-EA49-A139-9AE53C623103}" type="presOf" srcId="{762744FF-B12D-B048-A7F9-0D25528B3DD4}" destId="{1C85A635-76EE-CB45-B9FA-7B7A76246FB3}" srcOrd="1" destOrd="0" presId="urn:microsoft.com/office/officeart/2005/8/layout/process2"/>
     <dgm:cxn modelId="{D6131E09-85B8-A64C-B70F-332DBD927645}" type="presOf" srcId="{30256DA3-2063-6145-A40C-3F213F51F903}" destId="{93A03A25-0C23-0B49-A801-B6DF4800FF1C}" srcOrd="1" destOrd="0" presId="urn:microsoft.com/office/officeart/2005/8/layout/process2"/>
     <dgm:cxn modelId="{5904A30C-0CB9-7441-8EE9-02853E905445}" type="presOf" srcId="{ECF5917A-5A86-4945-92ED-C3A30B725FE7}" destId="{5030DE2C-F3D5-7E44-98C9-D5A5317CA56C}" srcOrd="1" destOrd="0" presId="urn:microsoft.com/office/officeart/2005/8/layout/process2"/>
     <dgm:cxn modelId="{A399560D-2686-BB49-BEC8-16E0E59F898C}" srcId="{CB88F0E7-4140-1B4D-A33B-6563FB2E1C23}" destId="{6D80D72C-DBB2-D94A-BCBD-1B0C1C35E98A}" srcOrd="1" destOrd="0" parTransId="{7A0A85DE-826D-F943-B70A-C309B2E35E00}" sibTransId="{ECF5917A-5A86-4945-92ED-C3A30B725FE7}"/>
@@ -6176,7 +6134,6 @@
     <dgm:cxn modelId="{6F8A8218-A43D-754D-AC34-7D7A44CB7D31}" srcId="{CB88F0E7-4140-1B4D-A33B-6563FB2E1C23}" destId="{B5498DE5-7CDC-0347-BA87-FB91FE15E435}" srcOrd="0" destOrd="0" parTransId="{A4B182FE-28CF-CC4A-A857-D974481A212A}" sibTransId="{30256DA3-2063-6145-A40C-3F213F51F903}"/>
     <dgm:cxn modelId="{C0931419-B5B5-9741-91F2-A3180203F038}" type="presOf" srcId="{F898BA7A-4505-614F-B67E-8FA6BAB686B5}" destId="{7F333F59-D690-B24C-ABEB-6EE4EB2A6CE1}" srcOrd="1" destOrd="0" presId="urn:microsoft.com/office/officeart/2005/8/layout/process2"/>
     <dgm:cxn modelId="{4E285119-2459-8646-A275-E2ED993B432A}" type="presOf" srcId="{C215D862-A291-E848-A659-5797AEF6E6A2}" destId="{14D2D5CD-E619-2C4C-83EC-B8786FE7D09C}" srcOrd="1" destOrd="0" presId="urn:microsoft.com/office/officeart/2005/8/layout/process2"/>
-    <dgm:cxn modelId="{DFDC9720-DA41-4347-BBAC-0777E0F9CD5E}" srcId="{CB88F0E7-4140-1B4D-A33B-6563FB2E1C23}" destId="{4BA86EBA-301B-894C-9E58-371F1419EEF2}" srcOrd="7" destOrd="0" parTransId="{F0DE1318-0E22-3447-AABB-108F63AEBF76}" sibTransId="{374085FA-BF47-3A48-BEA6-BD8154C1D35B}"/>
     <dgm:cxn modelId="{85095E25-989E-8644-8FAC-8BF624EEEE21}" type="presOf" srcId="{C215D862-A291-E848-A659-5797AEF6E6A2}" destId="{B3C2DB7A-EC33-6544-A09D-B1205728770A}" srcOrd="0" destOrd="0" presId="urn:microsoft.com/office/officeart/2005/8/layout/process2"/>
     <dgm:cxn modelId="{5E573632-5F57-F24C-A760-D2988D36FDA8}" type="presOf" srcId="{6BBB6159-CF03-854D-ADAC-23CBD22E850F}" destId="{C9A34051-A77A-F049-83DF-B23743A74457}" srcOrd="0" destOrd="0" presId="urn:microsoft.com/office/officeart/2005/8/layout/process2"/>
     <dgm:cxn modelId="{4CDBD944-8E38-3E46-8153-1E412D1822B3}" type="presOf" srcId="{6D80D72C-DBB2-D94A-BCBD-1B0C1C35E98A}" destId="{43D2067A-91F6-8745-98BA-D6A10B24950A}" srcOrd="0" destOrd="0" presId="urn:microsoft.com/office/officeart/2005/8/layout/process2"/>
@@ -6184,9 +6141,7 @@
     <dgm:cxn modelId="{45637A5C-225F-734B-86EB-139616362E27}" type="presOf" srcId="{6BBB6159-CF03-854D-ADAC-23CBD22E850F}" destId="{B372B6F6-AA4E-0A43-A234-81DA0BBCD8AB}" srcOrd="1" destOrd="0" presId="urn:microsoft.com/office/officeart/2005/8/layout/process2"/>
     <dgm:cxn modelId="{29C6B55E-D2F5-EE46-A8EF-509405DE8534}" type="presOf" srcId="{015830E8-F665-B44B-9DB8-53596A8F4B44}" destId="{77F0190E-9B2D-0449-9A36-A264480F521F}" srcOrd="0" destOrd="0" presId="urn:microsoft.com/office/officeart/2005/8/layout/process2"/>
     <dgm:cxn modelId="{08CFD367-D1E2-774B-B131-FBDC4B1434F3}" type="presOf" srcId="{E9E523D2-25B5-CD4B-9629-508B4D79D50B}" destId="{3C8009BD-6E6B-AA43-B36E-EB048E42CE59}" srcOrd="1" destOrd="0" presId="urn:microsoft.com/office/officeart/2005/8/layout/process2"/>
-    <dgm:cxn modelId="{D4EC3F6A-DC63-AB42-84D5-064E1774991E}" type="presOf" srcId="{762744FF-B12D-B048-A7F9-0D25528B3DD4}" destId="{26A17077-D919-4B4F-8DCF-A621A4F50A35}" srcOrd="0" destOrd="0" presId="urn:microsoft.com/office/officeart/2005/8/layout/process2"/>
     <dgm:cxn modelId="{31B7676C-5E13-6240-8873-94CFD48BF4D4}" type="presOf" srcId="{ECF5917A-5A86-4945-92ED-C3A30B725FE7}" destId="{D067C965-9057-9C4A-A1D2-4912C14C50F7}" srcOrd="0" destOrd="0" presId="urn:microsoft.com/office/officeart/2005/8/layout/process2"/>
-    <dgm:cxn modelId="{42693C70-6993-8D4E-8B1C-9211A8B5A1F6}" type="presOf" srcId="{4BA86EBA-301B-894C-9E58-371F1419EEF2}" destId="{218DEA2E-8D5B-8741-B88A-2B31902D6D39}" srcOrd="0" destOrd="0" presId="urn:microsoft.com/office/officeart/2005/8/layout/process2"/>
     <dgm:cxn modelId="{26E3548D-A542-114A-9949-6B29D19AA1AB}" srcId="{CB88F0E7-4140-1B4D-A33B-6563FB2E1C23}" destId="{7FA26DE3-9601-BF47-AC3A-1976221D9FF7}" srcOrd="5" destOrd="0" parTransId="{DA997D57-FC54-1543-8E4F-C5A29391F936}" sibTransId="{6BBB6159-CF03-854D-ADAC-23CBD22E850F}"/>
     <dgm:cxn modelId="{6CC7BC8F-A4DC-3E43-A468-7FE509ECF895}" srcId="{CB88F0E7-4140-1B4D-A33B-6563FB2E1C23}" destId="{3AAD80AB-86BA-354D-A91B-40CE06269A51}" srcOrd="2" destOrd="0" parTransId="{3035F67B-CB08-4446-AE7D-48C039F6D2DF}" sibTransId="{C215D862-A291-E848-A659-5797AEF6E6A2}"/>
     <dgm:cxn modelId="{3A86D698-1F94-304C-A18C-CF7C34B962A8}" type="presOf" srcId="{AF485B0E-A33B-9844-9210-9C1E1BDA0205}" destId="{BEBB65BD-4B92-BC44-96A8-BAAA586B7BF5}" srcOrd="0" destOrd="0" presId="urn:microsoft.com/office/officeart/2005/8/layout/process2"/>
@@ -6217,9 +6172,6 @@
     <dgm:cxn modelId="{9E09BCF5-E8B7-1846-93BF-609BCA819B6B}" type="presParOf" srcId="{55F5C254-F149-8D49-B068-DD2BB6700AB1}" destId="{C9A34051-A77A-F049-83DF-B23743A74457}" srcOrd="11" destOrd="0" presId="urn:microsoft.com/office/officeart/2005/8/layout/process2"/>
     <dgm:cxn modelId="{46CB4DBC-9D42-CE47-8CFC-1F4B2D1AC9FE}" type="presParOf" srcId="{C9A34051-A77A-F049-83DF-B23743A74457}" destId="{B372B6F6-AA4E-0A43-A234-81DA0BBCD8AB}" srcOrd="0" destOrd="0" presId="urn:microsoft.com/office/officeart/2005/8/layout/process2"/>
     <dgm:cxn modelId="{2A289DDD-E86F-8946-9C9E-367E49FE4E4A}" type="presParOf" srcId="{55F5C254-F149-8D49-B068-DD2BB6700AB1}" destId="{77F0190E-9B2D-0449-9A36-A264480F521F}" srcOrd="12" destOrd="0" presId="urn:microsoft.com/office/officeart/2005/8/layout/process2"/>
-    <dgm:cxn modelId="{8BCC7B57-EA12-CF40-992C-2CA263431C3B}" type="presParOf" srcId="{55F5C254-F149-8D49-B068-DD2BB6700AB1}" destId="{26A17077-D919-4B4F-8DCF-A621A4F50A35}" srcOrd="13" destOrd="0" presId="urn:microsoft.com/office/officeart/2005/8/layout/process2"/>
-    <dgm:cxn modelId="{D5E49362-F01C-2241-A185-9002A1C58B3C}" type="presParOf" srcId="{26A17077-D919-4B4F-8DCF-A621A4F50A35}" destId="{1C85A635-76EE-CB45-B9FA-7B7A76246FB3}" srcOrd="0" destOrd="0" presId="urn:microsoft.com/office/officeart/2005/8/layout/process2"/>
-    <dgm:cxn modelId="{9D2BDECB-E8D9-0C4D-8CC4-1D870363DD2D}" type="presParOf" srcId="{55F5C254-F149-8D49-B068-DD2BB6700AB1}" destId="{218DEA2E-8D5B-8741-B88A-2B31902D6D39}" srcOrd="14" destOrd="0" presId="urn:microsoft.com/office/officeart/2005/8/layout/process2"/>
   </dgm:cxnLst>
   <dgm:bg/>
   <dgm:whole/>
@@ -7487,8 +7439,8 @@
       </dsp:nvSpPr>
       <dsp:spPr>
         <a:xfrm>
-          <a:off x="947675" y="988"/>
-          <a:ext cx="9507755" cy="359997"/>
+          <a:off x="948603" y="988"/>
+          <a:ext cx="9507592" cy="359997"/>
         </a:xfrm>
         <a:prstGeom prst="roundRect">
           <a:avLst>
@@ -7556,8 +7508,8 @@
         </a:p>
       </dsp:txBody>
       <dsp:txXfrm>
-        <a:off x="958219" y="11532"/>
-        <a:ext cx="9486667" cy="338909"/>
+        <a:off x="959147" y="11532"/>
+        <a:ext cx="9486504" cy="338909"/>
       </dsp:txXfrm>
     </dsp:sp>
     <dsp:sp modelId="{91DA19BA-A0AB-564A-8A9E-322DF18B64CF}">
@@ -7567,7 +7519,7 @@
       </dsp:nvSpPr>
       <dsp:spPr>
         <a:xfrm rot="5400000">
-          <a:off x="5574195" y="377966"/>
+          <a:off x="5575042" y="377966"/>
           <a:ext cx="254714" cy="305657"/>
         </a:xfrm>
         <a:prstGeom prst="rightArrow">
@@ -7625,7 +7577,7 @@
         </a:p>
       </dsp:txBody>
       <dsp:txXfrm rot="-5400000">
-        <a:off x="5609855" y="403437"/>
+        <a:off x="5610702" y="403437"/>
         <a:ext cx="183395" cy="178300"/>
       </dsp:txXfrm>
     </dsp:sp>
@@ -7636,7 +7588,7 @@
       </dsp:nvSpPr>
       <dsp:spPr>
         <a:xfrm>
-          <a:off x="947675" y="700605"/>
+          <a:off x="948522" y="700605"/>
           <a:ext cx="9507755" cy="359997"/>
         </a:xfrm>
         <a:prstGeom prst="roundRect">
@@ -7706,7 +7658,7 @@
         </a:p>
       </dsp:txBody>
       <dsp:txXfrm>
-        <a:off x="958219" y="711149"/>
+        <a:off x="959066" y="711149"/>
         <a:ext cx="9486667" cy="338909"/>
       </dsp:txXfrm>
     </dsp:sp>
@@ -7717,7 +7669,7 @@
       </dsp:nvSpPr>
       <dsp:spPr>
         <a:xfrm rot="5400000">
-          <a:off x="5574195" y="1077583"/>
+          <a:off x="5575042" y="1077583"/>
           <a:ext cx="254714" cy="305657"/>
         </a:xfrm>
         <a:prstGeom prst="rightArrow">
@@ -7775,7 +7727,7 @@
         </a:p>
       </dsp:txBody>
       <dsp:txXfrm rot="-5400000">
-        <a:off x="5609855" y="1103054"/>
+        <a:off x="5610702" y="1103054"/>
         <a:ext cx="183395" cy="178300"/>
       </dsp:txXfrm>
     </dsp:sp>
@@ -7786,7 +7738,7 @@
       </dsp:nvSpPr>
       <dsp:spPr>
         <a:xfrm>
-          <a:off x="947675" y="1400222"/>
+          <a:off x="948522" y="1400222"/>
           <a:ext cx="9507755" cy="359997"/>
         </a:xfrm>
         <a:prstGeom prst="roundRect">
@@ -7855,7 +7807,7 @@
         </a:p>
       </dsp:txBody>
       <dsp:txXfrm>
-        <a:off x="958219" y="1410766"/>
+        <a:off x="959066" y="1410766"/>
         <a:ext cx="9486667" cy="338909"/>
       </dsp:txXfrm>
     </dsp:sp>
@@ -7866,7 +7818,7 @@
       </dsp:nvSpPr>
       <dsp:spPr>
         <a:xfrm rot="5400000">
-          <a:off x="5574195" y="1777200"/>
+          <a:off x="5575042" y="1777200"/>
           <a:ext cx="254714" cy="305657"/>
         </a:xfrm>
         <a:prstGeom prst="rightArrow">
@@ -7924,7 +7876,7 @@
         </a:p>
       </dsp:txBody>
       <dsp:txXfrm rot="-5400000">
-        <a:off x="5609855" y="1802671"/>
+        <a:off x="5610702" y="1802671"/>
         <a:ext cx="183395" cy="178300"/>
       </dsp:txXfrm>
     </dsp:sp>
@@ -7935,7 +7887,7 @@
       </dsp:nvSpPr>
       <dsp:spPr>
         <a:xfrm>
-          <a:off x="947675" y="2099839"/>
+          <a:off x="948522" y="2099839"/>
           <a:ext cx="9507755" cy="359997"/>
         </a:xfrm>
         <a:prstGeom prst="roundRect">
@@ -8004,7 +7956,7 @@
         </a:p>
       </dsp:txBody>
       <dsp:txXfrm>
-        <a:off x="958219" y="2110383"/>
+        <a:off x="959066" y="2110383"/>
         <a:ext cx="9486667" cy="338909"/>
       </dsp:txXfrm>
     </dsp:sp>
@@ -8015,7 +7967,7 @@
       </dsp:nvSpPr>
       <dsp:spPr>
         <a:xfrm rot="5400000">
-          <a:off x="5574195" y="2476818"/>
+          <a:off x="5575042" y="2476818"/>
           <a:ext cx="254714" cy="305657"/>
         </a:xfrm>
         <a:prstGeom prst="rightArrow">
@@ -8073,7 +8025,7 @@
         </a:p>
       </dsp:txBody>
       <dsp:txXfrm rot="-5400000">
-        <a:off x="5609855" y="2502289"/>
+        <a:off x="5610702" y="2502289"/>
         <a:ext cx="183395" cy="178300"/>
       </dsp:txXfrm>
     </dsp:sp>
@@ -8084,7 +8036,7 @@
       </dsp:nvSpPr>
       <dsp:spPr>
         <a:xfrm>
-          <a:off x="947675" y="2799456"/>
+          <a:off x="948522" y="2799456"/>
           <a:ext cx="9507755" cy="359997"/>
         </a:xfrm>
         <a:prstGeom prst="roundRect">
@@ -8153,7 +8105,7 @@
         </a:p>
       </dsp:txBody>
       <dsp:txXfrm>
-        <a:off x="958219" y="2810000"/>
+        <a:off x="959066" y="2810000"/>
         <a:ext cx="9486667" cy="338909"/>
       </dsp:txXfrm>
     </dsp:sp>
@@ -8164,7 +8116,7 @@
       </dsp:nvSpPr>
       <dsp:spPr>
         <a:xfrm rot="5400000">
-          <a:off x="5574195" y="3176435"/>
+          <a:off x="5575042" y="3176435"/>
           <a:ext cx="254714" cy="305657"/>
         </a:xfrm>
         <a:prstGeom prst="rightArrow">
@@ -8222,7 +8174,7 @@
         </a:p>
       </dsp:txBody>
       <dsp:txXfrm rot="-5400000">
-        <a:off x="5609855" y="3201906"/>
+        <a:off x="5610702" y="3201906"/>
         <a:ext cx="183395" cy="178300"/>
       </dsp:txXfrm>
     </dsp:sp>
@@ -8233,7 +8185,7 @@
       </dsp:nvSpPr>
       <dsp:spPr>
         <a:xfrm>
-          <a:off x="947675" y="3499074"/>
+          <a:off x="948522" y="3499074"/>
           <a:ext cx="9507755" cy="359997"/>
         </a:xfrm>
         <a:prstGeom prst="roundRect">
@@ -8302,7 +8254,7 @@
         </a:p>
       </dsp:txBody>
       <dsp:txXfrm>
-        <a:off x="958219" y="3509618"/>
+        <a:off x="959066" y="3509618"/>
         <a:ext cx="9486667" cy="338909"/>
       </dsp:txXfrm>
     </dsp:sp>
@@ -8313,7 +8265,7 @@
       </dsp:nvSpPr>
       <dsp:spPr>
         <a:xfrm rot="5400000">
-          <a:off x="5574195" y="3876052"/>
+          <a:off x="5575042" y="3876052"/>
           <a:ext cx="254714" cy="305657"/>
         </a:xfrm>
         <a:prstGeom prst="rightArrow">
@@ -8371,7 +8323,7 @@
         </a:p>
       </dsp:txBody>
       <dsp:txXfrm rot="-5400000">
-        <a:off x="5609855" y="3901523"/>
+        <a:off x="5610702" y="3901523"/>
         <a:ext cx="183395" cy="178300"/>
       </dsp:txXfrm>
     </dsp:sp>
@@ -8382,7 +8334,7 @@
       </dsp:nvSpPr>
       <dsp:spPr>
         <a:xfrm>
-          <a:off x="947675" y="4198691"/>
+          <a:off x="948522" y="4198691"/>
           <a:ext cx="9507755" cy="359997"/>
         </a:xfrm>
         <a:prstGeom prst="roundRect">
@@ -8451,7 +8403,7 @@
         </a:p>
       </dsp:txBody>
       <dsp:txXfrm>
-        <a:off x="958219" y="4209235"/>
+        <a:off x="959066" y="4209235"/>
         <a:ext cx="9486667" cy="338909"/>
       </dsp:txXfrm>
     </dsp:sp>
@@ -8462,7 +8414,7 @@
       </dsp:nvSpPr>
       <dsp:spPr>
         <a:xfrm rot="5400000">
-          <a:off x="5574195" y="4575669"/>
+          <a:off x="5575042" y="4575669"/>
           <a:ext cx="254714" cy="305657"/>
         </a:xfrm>
         <a:prstGeom prst="rightArrow">
@@ -8520,7 +8472,7 @@
         </a:p>
       </dsp:txBody>
       <dsp:txXfrm rot="-5400000">
-        <a:off x="5609855" y="4601140"/>
+        <a:off x="5610702" y="4601140"/>
         <a:ext cx="183395" cy="178300"/>
       </dsp:txXfrm>
     </dsp:sp>
@@ -8531,7 +8483,7 @@
       </dsp:nvSpPr>
       <dsp:spPr>
         <a:xfrm>
-          <a:off x="947675" y="4898308"/>
+          <a:off x="948522" y="4898308"/>
           <a:ext cx="9507755" cy="359997"/>
         </a:xfrm>
         <a:prstGeom prst="roundRect">
@@ -8600,7 +8552,7 @@
         </a:p>
       </dsp:txBody>
       <dsp:txXfrm>
-        <a:off x="958219" y="4908852"/>
+        <a:off x="959066" y="4908852"/>
         <a:ext cx="9486667" cy="338909"/>
       </dsp:txXfrm>
     </dsp:sp>
@@ -8623,8 +8575,8 @@
       </dsp:nvSpPr>
       <dsp:spPr>
         <a:xfrm>
-          <a:off x="947675" y="988"/>
-          <a:ext cx="9507755" cy="359997"/>
+          <a:off x="413538" y="1861"/>
+          <a:ext cx="10576028" cy="415119"/>
         </a:xfrm>
         <a:prstGeom prst="roundRect">
           <a:avLst>
@@ -8668,12 +8620,12 @@
         </a:fontRef>
       </dsp:style>
       <dsp:txBody>
-        <a:bodyPr spcFirstLastPara="0" vert="horz" wrap="square" lIns="49530" tIns="49530" rIns="49530" bIns="49530" numCol="1" spcCol="1270" anchor="ctr" anchorCtr="0">
+        <a:bodyPr spcFirstLastPara="0" vert="horz" wrap="square" lIns="64770" tIns="64770" rIns="64770" bIns="64770" numCol="1" spcCol="1270" anchor="ctr" anchorCtr="0">
           <a:noAutofit/>
         </a:bodyPr>
         <a:lstStyle/>
         <a:p>
-          <a:pPr marL="0" lvl="0" indent="0" algn="ctr" defTabSz="577850">
+          <a:pPr marL="0" lvl="0" indent="0" algn="ctr" defTabSz="755650">
             <a:lnSpc>
               <a:spcPct val="90000"/>
             </a:lnSpc>
@@ -8686,14 +8638,14 @@
             <a:buNone/>
           </a:pPr>
           <a:r>
-            <a:rPr lang="en-US" sz="1300" kern="1200" dirty="0"/>
-            <a:t>Download sequence data and metadata in command line using SRA toolbox</a:t>
+            <a:rPr lang="en-US" sz="1700" kern="1200" dirty="0"/>
+            <a:t>Load in data from QIIME2 step</a:t>
           </a:r>
         </a:p>
       </dsp:txBody>
       <dsp:txXfrm>
-        <a:off x="958219" y="11532"/>
-        <a:ext cx="9486667" cy="338909"/>
+        <a:off x="425696" y="14019"/>
+        <a:ext cx="10551712" cy="390803"/>
       </dsp:txXfrm>
     </dsp:sp>
     <dsp:sp modelId="{91DA19BA-A0AB-564A-8A9E-322DF18B64CF}">
@@ -8703,8 +8655,8 @@
       </dsp:nvSpPr>
       <dsp:spPr>
         <a:xfrm rot="5400000">
-          <a:off x="5574195" y="377966"/>
-          <a:ext cx="254714" cy="305657"/>
+          <a:off x="5554694" y="436562"/>
+          <a:ext cx="293716" cy="352460"/>
         </a:xfrm>
         <a:prstGeom prst="rightArrow">
           <a:avLst>
@@ -8745,7 +8697,7 @@
         </a:bodyPr>
         <a:lstStyle/>
         <a:p>
-          <a:pPr marL="0" lvl="0" indent="0" algn="ctr" defTabSz="444500">
+          <a:pPr marL="0" lvl="0" indent="0" algn="ctr" defTabSz="622300">
             <a:lnSpc>
               <a:spcPct val="90000"/>
             </a:lnSpc>
@@ -8757,12 +8709,12 @@
             </a:spcAft>
             <a:buNone/>
           </a:pPr>
-          <a:endParaRPr lang="en-US" sz="1000" kern="1200"/>
+          <a:endParaRPr lang="en-US" sz="1400" kern="1200"/>
         </a:p>
       </dsp:txBody>
       <dsp:txXfrm rot="-5400000">
-        <a:off x="5609855" y="403437"/>
-        <a:ext cx="183395" cy="178300"/>
+        <a:off x="5595815" y="465934"/>
+        <a:ext cx="211476" cy="205601"/>
       </dsp:txXfrm>
     </dsp:sp>
     <dsp:sp modelId="{43D2067A-91F6-8745-98BA-D6A10B24950A}">
@@ -8772,8 +8724,8 @@
       </dsp:nvSpPr>
       <dsp:spPr>
         <a:xfrm>
-          <a:off x="947675" y="700605"/>
-          <a:ext cx="9507755" cy="359997"/>
+          <a:off x="413538" y="808603"/>
+          <a:ext cx="10576028" cy="415119"/>
         </a:xfrm>
         <a:prstGeom prst="roundRect">
           <a:avLst>
@@ -8817,12 +8769,12 @@
         </a:fontRef>
       </dsp:style>
       <dsp:txBody>
-        <a:bodyPr spcFirstLastPara="0" vert="horz" wrap="square" lIns="49530" tIns="49530" rIns="49530" bIns="49530" numCol="1" spcCol="1270" anchor="ctr" anchorCtr="0">
+        <a:bodyPr spcFirstLastPara="0" vert="horz" wrap="square" lIns="64770" tIns="64770" rIns="64770" bIns="64770" numCol="1" spcCol="1270" anchor="ctr" anchorCtr="0">
           <a:noAutofit/>
         </a:bodyPr>
         <a:lstStyle/>
         <a:p>
-          <a:pPr marL="0" lvl="0" indent="0" algn="ctr" defTabSz="577850">
+          <a:pPr marL="0" lvl="0" indent="0" algn="ctr" defTabSz="755650">
             <a:lnSpc>
               <a:spcPct val="90000"/>
             </a:lnSpc>
@@ -8835,15 +8787,15 @@
             <a:buNone/>
           </a:pPr>
           <a:r>
-            <a:rPr lang="en-US" sz="1300" kern="1200" dirty="0"/>
-            <a:t>QIIME2: Modify/convert files to QIIME2 formats</a:t>
+            <a:rPr lang="en-US" sz="1700" kern="1200" dirty="0"/>
+            <a:t>Wrangle metadata</a:t>
           </a:r>
-          <a:endParaRPr lang="en-US" sz="1300" i="1" kern="1200" dirty="0"/>
+          <a:endParaRPr lang="en-US" sz="1700" i="1" kern="1200" dirty="0"/>
         </a:p>
       </dsp:txBody>
       <dsp:txXfrm>
-        <a:off x="958219" y="711149"/>
-        <a:ext cx="9486667" cy="338909"/>
+        <a:off x="425696" y="820761"/>
+        <a:ext cx="10551712" cy="390803"/>
       </dsp:txXfrm>
     </dsp:sp>
     <dsp:sp modelId="{D067C965-9057-9C4A-A1D2-4912C14C50F7}">
@@ -8853,8 +8805,8 @@
       </dsp:nvSpPr>
       <dsp:spPr>
         <a:xfrm rot="5400000">
-          <a:off x="5574195" y="1077583"/>
-          <a:ext cx="254714" cy="305657"/>
+          <a:off x="5554694" y="1243304"/>
+          <a:ext cx="293716" cy="352460"/>
         </a:xfrm>
         <a:prstGeom prst="rightArrow">
           <a:avLst>
@@ -8895,7 +8847,7 @@
         </a:bodyPr>
         <a:lstStyle/>
         <a:p>
-          <a:pPr marL="0" lvl="0" indent="0" algn="ctr" defTabSz="444500">
+          <a:pPr marL="0" lvl="0" indent="0" algn="ctr" defTabSz="622300">
             <a:lnSpc>
               <a:spcPct val="90000"/>
             </a:lnSpc>
@@ -8907,12 +8859,12 @@
             </a:spcAft>
             <a:buNone/>
           </a:pPr>
-          <a:endParaRPr lang="en-US" sz="1000" kern="1200"/>
+          <a:endParaRPr lang="en-US" sz="1400" kern="1200"/>
         </a:p>
       </dsp:txBody>
       <dsp:txXfrm rot="-5400000">
-        <a:off x="5609855" y="1103054"/>
-        <a:ext cx="183395" cy="178300"/>
+        <a:off x="5595815" y="1272676"/>
+        <a:ext cx="211476" cy="205601"/>
       </dsp:txXfrm>
     </dsp:sp>
     <dsp:sp modelId="{80C05A4E-2A0A-294C-8DDC-052E97D834DA}">
@@ -8922,8 +8874,8 @@
       </dsp:nvSpPr>
       <dsp:spPr>
         <a:xfrm>
-          <a:off x="947675" y="1400222"/>
-          <a:ext cx="9507755" cy="359997"/>
+          <a:off x="413538" y="1615345"/>
+          <a:ext cx="10576028" cy="415119"/>
         </a:xfrm>
         <a:prstGeom prst="roundRect">
           <a:avLst>
@@ -8967,12 +8919,12 @@
         </a:fontRef>
       </dsp:style>
       <dsp:txBody>
-        <a:bodyPr spcFirstLastPara="0" vert="horz" wrap="square" lIns="49530" tIns="49530" rIns="49530" bIns="49530" numCol="1" spcCol="1270" anchor="ctr" anchorCtr="0">
+        <a:bodyPr spcFirstLastPara="0" vert="horz" wrap="square" lIns="64770" tIns="64770" rIns="64770" bIns="64770" numCol="1" spcCol="1270" anchor="ctr" anchorCtr="0">
           <a:noAutofit/>
         </a:bodyPr>
         <a:lstStyle/>
         <a:p>
-          <a:pPr marL="0" lvl="0" indent="0" algn="ctr" defTabSz="577850">
+          <a:pPr marL="0" lvl="0" indent="0" algn="ctr" defTabSz="755650">
             <a:lnSpc>
               <a:spcPct val="90000"/>
             </a:lnSpc>
@@ -8985,14 +8937,14 @@
             <a:buNone/>
           </a:pPr>
           <a:r>
-            <a:rPr lang="en-US" sz="1300" kern="1200" dirty="0"/>
-            <a:t>QIIME2: Trim primers</a:t>
+            <a:rPr lang="en-US" sz="1700" kern="1200" dirty="0"/>
+            <a:t>Identify and remove contaminant ASVs</a:t>
           </a:r>
         </a:p>
       </dsp:txBody>
       <dsp:txXfrm>
-        <a:off x="958219" y="1410766"/>
-        <a:ext cx="9486667" cy="338909"/>
+        <a:off x="425696" y="1627503"/>
+        <a:ext cx="10551712" cy="390803"/>
       </dsp:txXfrm>
     </dsp:sp>
     <dsp:sp modelId="{B3C2DB7A-EC33-6544-A09D-B1205728770A}">
@@ -9002,8 +8954,8 @@
       </dsp:nvSpPr>
       <dsp:spPr>
         <a:xfrm rot="5400000">
-          <a:off x="5574195" y="1777200"/>
-          <a:ext cx="254714" cy="305657"/>
+          <a:off x="5554694" y="2050046"/>
+          <a:ext cx="293716" cy="352460"/>
         </a:xfrm>
         <a:prstGeom prst="rightArrow">
           <a:avLst>
@@ -9044,7 +8996,7 @@
         </a:bodyPr>
         <a:lstStyle/>
         <a:p>
-          <a:pPr marL="0" lvl="0" indent="0" algn="ctr" defTabSz="444500">
+          <a:pPr marL="0" lvl="0" indent="0" algn="ctr" defTabSz="622300">
             <a:lnSpc>
               <a:spcPct val="90000"/>
             </a:lnSpc>
@@ -9056,12 +9008,12 @@
             </a:spcAft>
             <a:buNone/>
           </a:pPr>
-          <a:endParaRPr lang="en-US" sz="1000" kern="1200"/>
+          <a:endParaRPr lang="en-US" sz="1400" kern="1200"/>
         </a:p>
       </dsp:txBody>
       <dsp:txXfrm rot="-5400000">
-        <a:off x="5609855" y="1802671"/>
-        <a:ext cx="183395" cy="178300"/>
+        <a:off x="5595815" y="2079418"/>
+        <a:ext cx="211476" cy="205601"/>
       </dsp:txXfrm>
     </dsp:sp>
     <dsp:sp modelId="{6F6C8E07-FBAD-3F4D-A906-27ECCF26E70E}">
@@ -9071,8 +9023,8 @@
       </dsp:nvSpPr>
       <dsp:spPr>
         <a:xfrm>
-          <a:off x="947675" y="2099839"/>
-          <a:ext cx="9507755" cy="359997"/>
+          <a:off x="413538" y="2422087"/>
+          <a:ext cx="10576028" cy="415119"/>
         </a:xfrm>
         <a:prstGeom prst="roundRect">
           <a:avLst>
@@ -9116,12 +9068,12 @@
         </a:fontRef>
       </dsp:style>
       <dsp:txBody>
-        <a:bodyPr spcFirstLastPara="0" vert="horz" wrap="square" lIns="49530" tIns="49530" rIns="49530" bIns="49530" numCol="1" spcCol="1270" anchor="ctr" anchorCtr="0">
+        <a:bodyPr spcFirstLastPara="0" vert="horz" wrap="square" lIns="64770" tIns="64770" rIns="64770" bIns="64770" numCol="1" spcCol="1270" anchor="ctr" anchorCtr="0">
           <a:noAutofit/>
         </a:bodyPr>
         <a:lstStyle/>
         <a:p>
-          <a:pPr marL="0" lvl="0" indent="0" algn="ctr" defTabSz="577850">
+          <a:pPr marL="0" lvl="0" indent="0" algn="ctr" defTabSz="755650">
             <a:lnSpc>
               <a:spcPct val="90000"/>
             </a:lnSpc>
@@ -9134,14 +9086,14 @@
             <a:buNone/>
           </a:pPr>
           <a:r>
-            <a:rPr lang="en-US" sz="1300" kern="1200" dirty="0"/>
-            <a:t>DADA2: Denoise data</a:t>
+            <a:rPr lang="en-US" sz="1700" kern="1200" dirty="0"/>
+            <a:t>Remove singletons</a:t>
           </a:r>
         </a:p>
       </dsp:txBody>
       <dsp:txXfrm>
-        <a:off x="958219" y="2110383"/>
-        <a:ext cx="9486667" cy="338909"/>
+        <a:off x="425696" y="2434245"/>
+        <a:ext cx="10551712" cy="390803"/>
       </dsp:txXfrm>
     </dsp:sp>
     <dsp:sp modelId="{48489AC1-89DA-0F48-B940-23505B5798FF}">
@@ -9151,8 +9103,8 @@
       </dsp:nvSpPr>
       <dsp:spPr>
         <a:xfrm rot="5400000">
-          <a:off x="5574195" y="2476818"/>
-          <a:ext cx="254714" cy="305657"/>
+          <a:off x="5554694" y="2856787"/>
+          <a:ext cx="293716" cy="352460"/>
         </a:xfrm>
         <a:prstGeom prst="rightArrow">
           <a:avLst>
@@ -9193,7 +9145,7 @@
         </a:bodyPr>
         <a:lstStyle/>
         <a:p>
-          <a:pPr marL="0" lvl="0" indent="0" algn="ctr" defTabSz="444500">
+          <a:pPr marL="0" lvl="0" indent="0" algn="ctr" defTabSz="622300">
             <a:lnSpc>
               <a:spcPct val="90000"/>
             </a:lnSpc>
@@ -9205,12 +9157,12 @@
             </a:spcAft>
             <a:buNone/>
           </a:pPr>
-          <a:endParaRPr lang="en-US" sz="1000" kern="1200"/>
+          <a:endParaRPr lang="en-US" sz="1400" kern="1200"/>
         </a:p>
       </dsp:txBody>
       <dsp:txXfrm rot="-5400000">
-        <a:off x="5609855" y="2502289"/>
-        <a:ext cx="183395" cy="178300"/>
+        <a:off x="5595815" y="2886159"/>
+        <a:ext cx="211476" cy="205601"/>
       </dsp:txXfrm>
     </dsp:sp>
     <dsp:sp modelId="{BEBB65BD-4B92-BC44-96A8-BAAA586B7BF5}">
@@ -9220,8 +9172,8 @@
       </dsp:nvSpPr>
       <dsp:spPr>
         <a:xfrm>
-          <a:off x="947675" y="2799456"/>
-          <a:ext cx="9507755" cy="359997"/>
+          <a:off x="413538" y="3228829"/>
+          <a:ext cx="10576028" cy="415119"/>
         </a:xfrm>
         <a:prstGeom prst="roundRect">
           <a:avLst>
@@ -9265,12 +9217,12 @@
         </a:fontRef>
       </dsp:style>
       <dsp:txBody>
-        <a:bodyPr spcFirstLastPara="0" vert="horz" wrap="square" lIns="49530" tIns="49530" rIns="49530" bIns="49530" numCol="1" spcCol="1270" anchor="ctr" anchorCtr="0">
+        <a:bodyPr spcFirstLastPara="0" vert="horz" wrap="square" lIns="64770" tIns="64770" rIns="64770" bIns="64770" numCol="1" spcCol="1270" anchor="ctr" anchorCtr="0">
           <a:noAutofit/>
         </a:bodyPr>
         <a:lstStyle/>
         <a:p>
-          <a:pPr marL="0" lvl="0" indent="0" algn="ctr" defTabSz="577850">
+          <a:pPr marL="0" lvl="0" indent="0" algn="ctr" defTabSz="755650">
             <a:lnSpc>
               <a:spcPct val="90000"/>
             </a:lnSpc>
@@ -9283,14 +9235,14 @@
             <a:buNone/>
           </a:pPr>
           <a:r>
-            <a:rPr lang="en-US" sz="1300" kern="1200" dirty="0"/>
-            <a:t>QIIME2: Generate feature table </a:t>
+            <a:rPr lang="en-US" sz="1700" kern="1200" dirty="0"/>
+            <a:t>Remove ambiguous annotations and low abundance phyla</a:t>
           </a:r>
         </a:p>
       </dsp:txBody>
       <dsp:txXfrm>
-        <a:off x="958219" y="2810000"/>
-        <a:ext cx="9486667" cy="338909"/>
+        <a:off x="425696" y="3240987"/>
+        <a:ext cx="10551712" cy="390803"/>
       </dsp:txXfrm>
     </dsp:sp>
     <dsp:sp modelId="{2839F08F-24F1-614A-A1A4-847F111C0482}">
@@ -9300,8 +9252,8 @@
       </dsp:nvSpPr>
       <dsp:spPr>
         <a:xfrm rot="5400000">
-          <a:off x="5574195" y="3176435"/>
-          <a:ext cx="254714" cy="305657"/>
+          <a:off x="5554694" y="3663529"/>
+          <a:ext cx="293716" cy="352460"/>
         </a:xfrm>
         <a:prstGeom prst="rightArrow">
           <a:avLst>
@@ -9342,7 +9294,7 @@
         </a:bodyPr>
         <a:lstStyle/>
         <a:p>
-          <a:pPr marL="0" lvl="0" indent="0" algn="ctr" defTabSz="444500">
+          <a:pPr marL="0" lvl="0" indent="0" algn="ctr" defTabSz="622300">
             <a:lnSpc>
               <a:spcPct val="90000"/>
             </a:lnSpc>
@@ -9354,12 +9306,12 @@
             </a:spcAft>
             <a:buNone/>
           </a:pPr>
-          <a:endParaRPr lang="en-US" sz="1000" kern="1200"/>
+          <a:endParaRPr lang="en-US" sz="1400" kern="1200"/>
         </a:p>
       </dsp:txBody>
       <dsp:txXfrm rot="-5400000">
-        <a:off x="5609855" y="3201906"/>
-        <a:ext cx="183395" cy="178300"/>
+        <a:off x="5595815" y="3692901"/>
+        <a:ext cx="211476" cy="205601"/>
       </dsp:txXfrm>
     </dsp:sp>
     <dsp:sp modelId="{80377AF5-BC76-FB40-840E-12C9D1BDB641}">
@@ -9369,8 +9321,8 @@
       </dsp:nvSpPr>
       <dsp:spPr>
         <a:xfrm>
-          <a:off x="947675" y="3499074"/>
-          <a:ext cx="9507755" cy="359997"/>
+          <a:off x="413538" y="4035570"/>
+          <a:ext cx="10576028" cy="415119"/>
         </a:xfrm>
         <a:prstGeom prst="roundRect">
           <a:avLst>
@@ -9414,12 +9366,12 @@
         </a:fontRef>
       </dsp:style>
       <dsp:txBody>
-        <a:bodyPr spcFirstLastPara="0" vert="horz" wrap="square" lIns="49530" tIns="49530" rIns="49530" bIns="49530" numCol="1" spcCol="1270" anchor="ctr" anchorCtr="0">
+        <a:bodyPr spcFirstLastPara="0" vert="horz" wrap="square" lIns="64770" tIns="64770" rIns="64770" bIns="64770" numCol="1" spcCol="1270" anchor="ctr" anchorCtr="0">
           <a:noAutofit/>
         </a:bodyPr>
         <a:lstStyle/>
         <a:p>
-          <a:pPr marL="0" lvl="0" indent="0" algn="ctr" defTabSz="577850">
+          <a:pPr marL="0" lvl="0" indent="0" algn="ctr" defTabSz="755650">
             <a:lnSpc>
               <a:spcPct val="90000"/>
             </a:lnSpc>
@@ -9432,14 +9384,14 @@
             <a:buNone/>
           </a:pPr>
           <a:r>
-            <a:rPr lang="en-US" sz="1300" kern="1200" dirty="0"/>
-            <a:t>QIIME2:  Use SILVA classifier to classify representative sequences</a:t>
+            <a:rPr lang="en-US" sz="1700" kern="1200" dirty="0"/>
+            <a:t>Re-root phylogenetic tree</a:t>
           </a:r>
         </a:p>
       </dsp:txBody>
       <dsp:txXfrm>
-        <a:off x="958219" y="3509618"/>
-        <a:ext cx="9486667" cy="338909"/>
+        <a:off x="425696" y="4047728"/>
+        <a:ext cx="10551712" cy="390803"/>
       </dsp:txXfrm>
     </dsp:sp>
     <dsp:sp modelId="{C9A34051-A77A-F049-83DF-B23743A74457}">
@@ -9449,8 +9401,8 @@
       </dsp:nvSpPr>
       <dsp:spPr>
         <a:xfrm rot="5400000">
-          <a:off x="5574195" y="3876052"/>
-          <a:ext cx="254714" cy="305657"/>
+          <a:off x="5554694" y="4470271"/>
+          <a:ext cx="293716" cy="352460"/>
         </a:xfrm>
         <a:prstGeom prst="rightArrow">
           <a:avLst>
@@ -9491,7 +9443,7 @@
         </a:bodyPr>
         <a:lstStyle/>
         <a:p>
-          <a:pPr marL="0" lvl="0" indent="0" algn="ctr" defTabSz="444500">
+          <a:pPr marL="0" lvl="0" indent="0" algn="ctr" defTabSz="622300">
             <a:lnSpc>
               <a:spcPct val="90000"/>
             </a:lnSpc>
@@ -9503,12 +9455,12 @@
             </a:spcAft>
             <a:buNone/>
           </a:pPr>
-          <a:endParaRPr lang="en-US" sz="1000" kern="1200"/>
+          <a:endParaRPr lang="en-US" sz="1400" kern="1200"/>
         </a:p>
       </dsp:txBody>
       <dsp:txXfrm rot="-5400000">
-        <a:off x="5609855" y="3901523"/>
-        <a:ext cx="183395" cy="178300"/>
+        <a:off x="5595815" y="4499643"/>
+        <a:ext cx="211476" cy="205601"/>
       </dsp:txXfrm>
     </dsp:sp>
     <dsp:sp modelId="{77F0190E-9B2D-0449-9A36-A264480F521F}">
@@ -9518,8 +9470,8 @@
       </dsp:nvSpPr>
       <dsp:spPr>
         <a:xfrm>
-          <a:off x="947675" y="4198691"/>
-          <a:ext cx="9507755" cy="359997"/>
+          <a:off x="413538" y="4842312"/>
+          <a:ext cx="10576028" cy="415119"/>
         </a:xfrm>
         <a:prstGeom prst="roundRect">
           <a:avLst>
@@ -9563,12 +9515,12 @@
         </a:fontRef>
       </dsp:style>
       <dsp:txBody>
-        <a:bodyPr spcFirstLastPara="0" vert="horz" wrap="square" lIns="49530" tIns="49530" rIns="49530" bIns="49530" numCol="1" spcCol="1270" anchor="ctr" anchorCtr="0">
+        <a:bodyPr spcFirstLastPara="0" vert="horz" wrap="square" lIns="64770" tIns="64770" rIns="64770" bIns="64770" numCol="1" spcCol="1270" anchor="ctr" anchorCtr="0">
           <a:noAutofit/>
         </a:bodyPr>
         <a:lstStyle/>
         <a:p>
-          <a:pPr marL="0" lvl="0" indent="0" algn="ctr" defTabSz="577850">
+          <a:pPr marL="0" lvl="0" indent="0" algn="ctr" defTabSz="755650">
             <a:lnSpc>
               <a:spcPct val="90000"/>
             </a:lnSpc>
@@ -9581,163 +9533,22 @@
             <a:buNone/>
           </a:pPr>
           <a:r>
-            <a:rPr lang="en-US" sz="1300" kern="1200" dirty="0"/>
-            <a:t>QIIME2: Make multiple sequence alignment with MAFFT, construct phylogenetic tree and root.</a:t>
+            <a:rPr lang="en-US" sz="1700" kern="1200" dirty="0"/>
+            <a:t>Construct </a:t>
+          </a:r>
+          <a:r>
+            <a:rPr lang="en-US" sz="1700" kern="1200" dirty="0" err="1"/>
+            <a:t>phyloseq</a:t>
+          </a:r>
+          <a:r>
+            <a:rPr lang="en-US" sz="1700" kern="1200" dirty="0"/>
+            <a:t> object and export </a:t>
           </a:r>
         </a:p>
       </dsp:txBody>
       <dsp:txXfrm>
-        <a:off x="958219" y="4209235"/>
-        <a:ext cx="9486667" cy="338909"/>
-      </dsp:txXfrm>
-    </dsp:sp>
-    <dsp:sp modelId="{26A17077-D919-4B4F-8DCF-A621A4F50A35}">
-      <dsp:nvSpPr>
-        <dsp:cNvPr id="0" name=""/>
-        <dsp:cNvSpPr/>
-      </dsp:nvSpPr>
-      <dsp:spPr>
-        <a:xfrm rot="5400000">
-          <a:off x="5574195" y="4575669"/>
-          <a:ext cx="254714" cy="305657"/>
-        </a:xfrm>
-        <a:prstGeom prst="rightArrow">
-          <a:avLst>
-            <a:gd name="adj1" fmla="val 60000"/>
-            <a:gd name="adj2" fmla="val 50000"/>
-          </a:avLst>
-        </a:prstGeom>
-        <a:solidFill>
-          <a:schemeClr val="accent3">
-            <a:hueOff val="0"/>
-            <a:satOff val="0"/>
-            <a:lumOff val="0"/>
-            <a:alphaOff val="0"/>
-          </a:schemeClr>
-        </a:solidFill>
-        <a:ln>
-          <a:noFill/>
-        </a:ln>
-        <a:effectLst/>
-      </dsp:spPr>
-      <dsp:style>
-        <a:lnRef idx="0">
-          <a:scrgbClr r="0" g="0" b="0"/>
-        </a:lnRef>
-        <a:fillRef idx="1">
-          <a:scrgbClr r="0" g="0" b="0"/>
-        </a:fillRef>
-        <a:effectRef idx="0">
-          <a:scrgbClr r="0" g="0" b="0"/>
-        </a:effectRef>
-        <a:fontRef idx="minor">
-          <a:schemeClr val="lt1"/>
-        </a:fontRef>
-      </dsp:style>
-      <dsp:txBody>
-        <a:bodyPr spcFirstLastPara="0" vert="horz" wrap="square" lIns="0" tIns="0" rIns="0" bIns="0" numCol="1" spcCol="1270" anchor="ctr" anchorCtr="0">
-          <a:noAutofit/>
-        </a:bodyPr>
-        <a:lstStyle/>
-        <a:p>
-          <a:pPr marL="0" lvl="0" indent="0" algn="ctr" defTabSz="444500">
-            <a:lnSpc>
-              <a:spcPct val="90000"/>
-            </a:lnSpc>
-            <a:spcBef>
-              <a:spcPct val="0"/>
-            </a:spcBef>
-            <a:spcAft>
-              <a:spcPct val="35000"/>
-            </a:spcAft>
-            <a:buNone/>
-          </a:pPr>
-          <a:endParaRPr lang="en-US" sz="1000" kern="1200"/>
-        </a:p>
-      </dsp:txBody>
-      <dsp:txXfrm rot="-5400000">
-        <a:off x="5609855" y="4601140"/>
-        <a:ext cx="183395" cy="178300"/>
-      </dsp:txXfrm>
-    </dsp:sp>
-    <dsp:sp modelId="{218DEA2E-8D5B-8741-B88A-2B31902D6D39}">
-      <dsp:nvSpPr>
-        <dsp:cNvPr id="0" name=""/>
-        <dsp:cNvSpPr/>
-      </dsp:nvSpPr>
-      <dsp:spPr>
-        <a:xfrm>
-          <a:off x="947675" y="4898308"/>
-          <a:ext cx="9507755" cy="359997"/>
-        </a:xfrm>
-        <a:prstGeom prst="roundRect">
-          <a:avLst>
-            <a:gd name="adj" fmla="val 10000"/>
-          </a:avLst>
-        </a:prstGeom>
-        <a:solidFill>
-          <a:schemeClr val="accent4">
-            <a:hueOff val="0"/>
-            <a:satOff val="0"/>
-            <a:lumOff val="0"/>
-            <a:alphaOff val="0"/>
-          </a:schemeClr>
-        </a:solidFill>
-        <a:ln w="12700" cap="flat" cmpd="sng" algn="ctr">
-          <a:solidFill>
-            <a:schemeClr val="lt1">
-              <a:hueOff val="0"/>
-              <a:satOff val="0"/>
-              <a:lumOff val="0"/>
-              <a:alphaOff val="0"/>
-            </a:schemeClr>
-          </a:solidFill>
-          <a:prstDash val="solid"/>
-          <a:miter lim="800000"/>
-        </a:ln>
-        <a:effectLst/>
-      </dsp:spPr>
-      <dsp:style>
-        <a:lnRef idx="2">
-          <a:scrgbClr r="0" g="0" b="0"/>
-        </a:lnRef>
-        <a:fillRef idx="1">
-          <a:scrgbClr r="0" g="0" b="0"/>
-        </a:fillRef>
-        <a:effectRef idx="0">
-          <a:scrgbClr r="0" g="0" b="0"/>
-        </a:effectRef>
-        <a:fontRef idx="minor">
-          <a:schemeClr val="lt1"/>
-        </a:fontRef>
-      </dsp:style>
-      <dsp:txBody>
-        <a:bodyPr spcFirstLastPara="0" vert="horz" wrap="square" lIns="49530" tIns="49530" rIns="49530" bIns="49530" numCol="1" spcCol="1270" anchor="ctr" anchorCtr="0">
-          <a:noAutofit/>
-        </a:bodyPr>
-        <a:lstStyle/>
-        <a:p>
-          <a:pPr marL="0" lvl="0" indent="0" algn="ctr" defTabSz="577850">
-            <a:lnSpc>
-              <a:spcPct val="90000"/>
-            </a:lnSpc>
-            <a:spcBef>
-              <a:spcPct val="0"/>
-            </a:spcBef>
-            <a:spcAft>
-              <a:spcPct val="35000"/>
-            </a:spcAft>
-            <a:buNone/>
-          </a:pPr>
-          <a:r>
-            <a:rPr lang="en-US" sz="1300" kern="1200" dirty="0"/>
-            <a:t>QIIME2: Export feature table, ASV count table, representative sequences, taxonomy table and rooted phylogenetic tree.</a:t>
-          </a:r>
-        </a:p>
-      </dsp:txBody>
-      <dsp:txXfrm>
-        <a:off x="958219" y="4908852"/>
-        <a:ext cx="9486667" cy="338909"/>
+        <a:off x="425696" y="4854470"/>
+        <a:ext cx="10551712" cy="390803"/>
       </dsp:txXfrm>
     </dsp:sp>
   </dsp:spTree>
@@ -17769,49 +17580,13 @@
           <a:p>
             <a:r>
               <a:rPr lang="en-US" dirty="0"/>
-              <a:t>Sloan’s Neutral Model states that the probability of species </a:t>
-            </a:r>
-            <a:r>
-              <a:rPr lang="en-US" i="1" dirty="0" err="1"/>
-              <a:t>i</a:t>
-            </a:r>
+              <a:t>Linear Regression Analysis</a:t>
+            </a:r>
+          </a:p>
+          <a:p>
             <a:r>
               <a:rPr lang="en-US" dirty="0"/>
-              <a:t> occurring within a sample at abundance (x</a:t>
-            </a:r>
-            <a:r>
-              <a:rPr lang="en-US" i="0" baseline="-25000" dirty="0"/>
-              <a:t>i</a:t>
-            </a:r>
-            <a:r>
-              <a:rPr lang="en-US" dirty="0"/>
-              <a:t>) above a detection threshold (d) </a:t>
-            </a:r>
-          </a:p>
-          <a:p>
-            <a:endParaRPr lang="en-US" dirty="0"/>
-          </a:p>
-          <a:p>
-            <a:r>
-              <a:rPr lang="en-US" dirty="0"/>
-              <a:t>Model results are compared to the observed data. Deviation of observed data from model results is assumed to be evidence of deterministic community assembly.</a:t>
-            </a:r>
-          </a:p>
-          <a:p>
-            <a:endParaRPr lang="en-US" dirty="0"/>
-          </a:p>
-          <a:p>
-            <a:r>
-              <a:rPr lang="en-US" dirty="0"/>
-              <a:t>The abundance of each ASV in the metacommunity (p</a:t>
-            </a:r>
-            <a:r>
-              <a:rPr lang="en-US" i="1" dirty="0"/>
-              <a:t>i</a:t>
-            </a:r>
-            <a:r>
-              <a:rPr lang="en-US" dirty="0"/>
-              <a:t>) is estimated by averaging it’s relative abundance across all samples.</a:t>
+              <a:t>#We use linear regression analysis if our explanatory variable is continuous </a:t>
             </a:r>
           </a:p>
         </p:txBody>
@@ -17833,7 +17608,7 @@
           <a:p>
             <a:fld id="{91AE2140-D502-214A-B76B-E0784B2C949B}" type="slidenum">
               <a:rPr lang="en-US" smtClean="0"/>
-              <a:t>22</a:t>
+              <a:t>16</a:t>
             </a:fld>
             <a:endParaRPr lang="en-US"/>
           </a:p>
@@ -17842,7 +17617,7 @@
     </p:spTree>
     <p:extLst>
       <p:ext uri="{BB962C8B-B14F-4D97-AF65-F5344CB8AC3E}">
-        <p14:creationId xmlns:p14="http://schemas.microsoft.com/office/powerpoint/2010/main" val="1811139538"/>
+        <p14:creationId xmlns:p14="http://schemas.microsoft.com/office/powerpoint/2010/main" val="2976129878"/>
       </p:ext>
     </p:extLst>
   </p:cSld>
@@ -17898,23 +17673,50 @@
           <a:p>
             <a:r>
               <a:rPr lang="en-US" dirty="0"/>
-              <a:t>Code developed from Barnett et al., (2020) Soil characteristics and land-use drive bacterial community assembly patterns (https://</a:t>
+              <a:t>Multivariate analysis can allow us to look at the relationship between community composition and environmental characteristics – these are deterministic, non-random processes. </a:t>
             </a:r>
             <a:r>
               <a:rPr lang="en-US" dirty="0" err="1"/>
-              <a:t>github.com</a:t>
+              <a:t>Investiagation</a:t>
             </a:r>
             <a:r>
               <a:rPr lang="en-US" dirty="0"/>
-              <a:t>/seb369/</a:t>
+              <a:t> into deterministic processes of community assembly (e.g. relationship between community composition and environmental characteristics) dominate most studies of microbial community assembly, </a:t>
             </a:r>
             <a:r>
               <a:rPr lang="en-US" dirty="0" err="1"/>
-              <a:t>landuse_comm_assembly</a:t>
+              <a:t>howeber</a:t>
             </a:r>
             <a:r>
               <a:rPr lang="en-US" dirty="0"/>
-              <a:t>)</a:t>
+              <a:t>, it is likely both deterministic and stochastic processes contribute to community assembly. This is why I combine multivariate and network analysis (deterministic) with phylogenetic null modelling (deterministic and stochastic) and neutral modelling (stochastic). </a:t>
+            </a:r>
+          </a:p>
+          <a:p>
+            <a:endParaRPr lang="en-US" dirty="0"/>
+          </a:p>
+          <a:p>
+            <a:r>
+              <a:rPr lang="en-US" dirty="0"/>
+              <a:t>It has been suggested that initial community assembly is driven by stochastic processes, and deterministic processes shape the community through time. </a:t>
+            </a:r>
+          </a:p>
+          <a:p>
+            <a:endParaRPr lang="en-US" dirty="0"/>
+          </a:p>
+          <a:p>
+            <a:r>
+              <a:rPr lang="en-US" dirty="0"/>
+              <a:t>What do we already know about deterministic processes on glaciers?</a:t>
+            </a:r>
+          </a:p>
+          <a:p>
+            <a:endParaRPr lang="en-US" dirty="0"/>
+          </a:p>
+          <a:p>
+            <a:r>
+              <a:rPr lang="en-US" dirty="0"/>
+              <a:t>What do we already know about stochastic processes on glaciers?</a:t>
             </a:r>
           </a:p>
         </p:txBody>
@@ -17936,7 +17738,7 @@
           <a:p>
             <a:fld id="{91AE2140-D502-214A-B76B-E0784B2C949B}" type="slidenum">
               <a:rPr lang="en-US" smtClean="0"/>
-              <a:t>23</a:t>
+              <a:t>17</a:t>
             </a:fld>
             <a:endParaRPr lang="en-US"/>
           </a:p>
@@ -17945,7 +17747,7 @@
     </p:spTree>
     <p:extLst>
       <p:ext uri="{BB962C8B-B14F-4D97-AF65-F5344CB8AC3E}">
-        <p14:creationId xmlns:p14="http://schemas.microsoft.com/office/powerpoint/2010/main" val="2263901205"/>
+        <p14:creationId xmlns:p14="http://schemas.microsoft.com/office/powerpoint/2010/main" val="2827327905"/>
       </p:ext>
     </p:extLst>
   </p:cSld>
@@ -18001,37 +17803,46 @@
           <a:p>
             <a:r>
               <a:rPr lang="en-US" dirty="0"/>
-              <a:t>This is the result of the model fitting with the Sommers dataset (not reduced).</a:t>
+              <a:t>Stochastic processes can produce complex spatial community patterns. </a:t>
             </a:r>
           </a:p>
           <a:p>
             <a:r>
               <a:rPr lang="en-US" dirty="0"/>
-              <a:t>X axis = log mean relative abundances of each ASV</a:t>
+              <a:t>Ecological drift = random birth/death events in a specific area, in the absence of selection. Ecological drift is particularly important when dispersal is limited as illustrated by island biogeography theory.</a:t>
             </a:r>
           </a:p>
           <a:p>
             <a:r>
               <a:rPr lang="en-US" dirty="0"/>
-              <a:t>Y axis = mean occurrence frequency of each ASV </a:t>
+              <a:t>Dispersal limitation between isolated habitats promotes local extinction and ecological drift which causes initially identical communities to diverge. Ecological drift can cause communities to diverge, even when dispersal is high and selection pressure is low.</a:t>
             </a:r>
           </a:p>
           <a:p>
             <a:r>
               <a:rPr lang="en-US" dirty="0"/>
-              <a:t>Points = observed log relative abundances against occurrence frequencies</a:t>
-            </a:r>
+              <a:t>Homogenizing dispersal = high dispersal rates leading to similar communities between habitats (overcomes the impact of ecological drift and even deterministic processes)</a:t>
+            </a:r>
+          </a:p>
+          <a:p>
+            <a:endParaRPr lang="en-US" dirty="0"/>
           </a:p>
           <a:p>
             <a:r>
               <a:rPr lang="en-US" dirty="0"/>
-              <a:t>Solid line = predicted log relative abundances plotted against occurrence frequencies</a:t>
+              <a:t>Deterministic (deterministic processes commonly mean beta diversity varies as a result of environmental characteristics – i.e. communities are more or less different due to the differences or similarities of the environments)</a:t>
             </a:r>
           </a:p>
           <a:p>
             <a:r>
               <a:rPr lang="en-US" dirty="0"/>
-              <a:t>Dotted lines = 95% confidence intervals</a:t>
+              <a:t>Variable selection – deterministic processes are driving variable composition between communities. Different areas have different environmental characteristics that select for different species.</a:t>
+            </a:r>
+          </a:p>
+          <a:p>
+            <a:r>
+              <a:rPr lang="en-US" dirty="0"/>
+              <a:t>Homogenizing selection – deterministic processes are driving homogenous composition between communities. Different areas have similar environmental characteristics that select for similar species.</a:t>
             </a:r>
           </a:p>
           <a:p>
@@ -18040,41 +17851,19 @@
           <a:p>
             <a:r>
               <a:rPr lang="en-US" dirty="0"/>
-              <a:t>This allows us to assess to what degree observed community structure can be explained by stochastic processes within each sample.</a:t>
+              <a:t>Dispersal limitation – stochastic dispersal limitation is driving variable composition between communities </a:t>
             </a:r>
           </a:p>
           <a:p>
             <a:r>
               <a:rPr lang="en-US" dirty="0"/>
-              <a:t>The Sloan neutral model is applied here. This model does not take into account phylogenetic distance. </a:t>
+              <a:t>Homogenizing dispersal – stochastic high dispersal is driving homogenous composition between communities</a:t>
             </a:r>
           </a:p>
           <a:p>
             <a:r>
               <a:rPr lang="en-US" dirty="0"/>
-              <a:t>ASV occurrence frequency is explained as a function of ASV abundance within the metacommunity (i.e. the more abundant an ASV is in the metacommunity, the more frequently it will be detected in the local community by chance). </a:t>
-            </a:r>
-          </a:p>
-          <a:p>
-            <a:r>
-              <a:rPr lang="en-US" dirty="0"/>
-              <a:t>The neutral model performed well, explaining 77% of variation in ASV detection frequency with an estimated migration factor of 0.02 between sites.</a:t>
-            </a:r>
-          </a:p>
-          <a:p>
-            <a:r>
-              <a:rPr lang="en-US" dirty="0"/>
-              <a:t>These results suggest that neutral assembly processes can explain the pattern of observed ASV occurrence frequencies </a:t>
-            </a:r>
-            <a:r>
-              <a:rPr lang="en-US" strike="sngStrike" dirty="0"/>
-              <a:t>and that the the regional species pool is a driving factor in the community composition of these samples. </a:t>
-            </a:r>
-          </a:p>
-          <a:p>
-            <a:r>
-              <a:rPr lang="en-US" strike="noStrike" dirty="0"/>
-              <a:t>The deviation of predicted occurrence frequencies from observed occurrence frequencies suggests that there are also deterministic processes driving community composition.</a:t>
+              <a:t>Ecological drift – stochastic ecological drift is driving variable composition between communities</a:t>
             </a:r>
           </a:p>
           <a:p>
@@ -18099,7 +17888,600 @@
           <a:p>
             <a:fld id="{91AE2140-D502-214A-B76B-E0784B2C949B}" type="slidenum">
               <a:rPr lang="en-US" smtClean="0"/>
-              <a:t>24</a:t>
+              <a:t>20</a:t>
+            </a:fld>
+            <a:endParaRPr lang="en-US"/>
+          </a:p>
+        </p:txBody>
+      </p:sp>
+    </p:spTree>
+    <p:extLst>
+      <p:ext uri="{BB962C8B-B14F-4D97-AF65-F5344CB8AC3E}">
+        <p14:creationId xmlns:p14="http://schemas.microsoft.com/office/powerpoint/2010/main" val="4270121788"/>
+      </p:ext>
+    </p:extLst>
+  </p:cSld>
+  <p:clrMapOvr>
+    <a:masterClrMapping/>
+  </p:clrMapOvr>
+</p:notes>
+</file>
+
+<file path=ppt/notesSlides/notesSlide13.xml><?xml version="1.0" encoding="utf-8"?>
+<p:notes xmlns:a="http://schemas.openxmlformats.org/drawingml/2006/main" xmlns:r="http://schemas.openxmlformats.org/officeDocument/2006/relationships" xmlns:p="http://schemas.openxmlformats.org/presentationml/2006/main">
+  <p:cSld>
+    <p:spTree>
+      <p:nvGrpSpPr>
+        <p:cNvPr id="1" name=""/>
+        <p:cNvGrpSpPr/>
+        <p:nvPr/>
+      </p:nvGrpSpPr>
+      <p:grpSpPr>
+        <a:xfrm>
+          <a:off x="0" y="0"/>
+          <a:ext cx="0" cy="0"/>
+          <a:chOff x="0" y="0"/>
+          <a:chExt cx="0" cy="0"/>
+        </a:xfrm>
+      </p:grpSpPr>
+      <p:sp>
+        <p:nvSpPr>
+          <p:cNvPr id="2" name="Slide Image Placeholder 1"/>
+          <p:cNvSpPr>
+            <a:spLocks noGrp="1" noRot="1" noChangeAspect="1"/>
+          </p:cNvSpPr>
+          <p:nvPr>
+            <p:ph type="sldImg"/>
+          </p:nvPr>
+        </p:nvSpPr>
+        <p:spPr/>
+      </p:sp>
+      <p:sp>
+        <p:nvSpPr>
+          <p:cNvPr id="3" name="Notes Placeholder 2"/>
+          <p:cNvSpPr>
+            <a:spLocks noGrp="1"/>
+          </p:cNvSpPr>
+          <p:nvPr>
+            <p:ph type="body" idx="1"/>
+          </p:nvPr>
+        </p:nvSpPr>
+        <p:spPr/>
+        <p:txBody>
+          <a:bodyPr/>
+          <a:lstStyle/>
+          <a:p>
+            <a:r>
+              <a:rPr lang="en-US" dirty="0"/>
+              <a:t>Adaptive divergence (adaptation to the environment) + genetic drift (random genetic mutations) = evolutionary diversification (evolutionary branching of species through time).</a:t>
+            </a:r>
+          </a:p>
+          <a:p>
+            <a:r>
+              <a:rPr lang="en-US" dirty="0"/>
+              <a:t>Large spatial and temporal scales.</a:t>
+            </a:r>
+          </a:p>
+          <a:p>
+            <a:r>
+              <a:rPr lang="en-US" dirty="0"/>
+              <a:t>Evolution impacts diversity, function and fitness of communities.</a:t>
+            </a:r>
+          </a:p>
+          <a:p>
+            <a:r>
+              <a:rPr lang="en-US" dirty="0"/>
+              <a:t>Evolution contributes to community assembly by contributing new species to the species pool. </a:t>
+            </a:r>
+          </a:p>
+          <a:p>
+            <a:r>
+              <a:rPr lang="en-US" dirty="0"/>
+              <a:t>This is often excluded from study due to the long time scales over which evolution occurs, even for microbial communities. </a:t>
+            </a:r>
+          </a:p>
+        </p:txBody>
+      </p:sp>
+      <p:sp>
+        <p:nvSpPr>
+          <p:cNvPr id="4" name="Slide Number Placeholder 3"/>
+          <p:cNvSpPr>
+            <a:spLocks noGrp="1"/>
+          </p:cNvSpPr>
+          <p:nvPr>
+            <p:ph type="sldNum" sz="quarter" idx="5"/>
+          </p:nvPr>
+        </p:nvSpPr>
+        <p:spPr/>
+        <p:txBody>
+          <a:bodyPr/>
+          <a:lstStyle/>
+          <a:p>
+            <a:fld id="{91AE2140-D502-214A-B76B-E0784B2C949B}" type="slidenum">
+              <a:rPr lang="en-US" smtClean="0"/>
+              <a:t>21</a:t>
+            </a:fld>
+            <a:endParaRPr lang="en-US"/>
+          </a:p>
+        </p:txBody>
+      </p:sp>
+    </p:spTree>
+    <p:extLst>
+      <p:ext uri="{BB962C8B-B14F-4D97-AF65-F5344CB8AC3E}">
+        <p14:creationId xmlns:p14="http://schemas.microsoft.com/office/powerpoint/2010/main" val="2680826747"/>
+      </p:ext>
+    </p:extLst>
+  </p:cSld>
+  <p:clrMapOvr>
+    <a:masterClrMapping/>
+  </p:clrMapOvr>
+</p:notes>
+</file>
+
+<file path=ppt/notesSlides/notesSlide14.xml><?xml version="1.0" encoding="utf-8"?>
+<p:notes xmlns:a="http://schemas.openxmlformats.org/drawingml/2006/main" xmlns:r="http://schemas.openxmlformats.org/officeDocument/2006/relationships" xmlns:p="http://schemas.openxmlformats.org/presentationml/2006/main">
+  <p:cSld>
+    <p:spTree>
+      <p:nvGrpSpPr>
+        <p:cNvPr id="1" name=""/>
+        <p:cNvGrpSpPr/>
+        <p:nvPr/>
+      </p:nvGrpSpPr>
+      <p:grpSpPr>
+        <a:xfrm>
+          <a:off x="0" y="0"/>
+          <a:ext cx="0" cy="0"/>
+          <a:chOff x="0" y="0"/>
+          <a:chExt cx="0" cy="0"/>
+        </a:xfrm>
+      </p:grpSpPr>
+      <p:sp>
+        <p:nvSpPr>
+          <p:cNvPr id="2" name="Slide Image Placeholder 1"/>
+          <p:cNvSpPr>
+            <a:spLocks noGrp="1" noRot="1" noChangeAspect="1"/>
+          </p:cNvSpPr>
+          <p:nvPr>
+            <p:ph type="sldImg"/>
+          </p:nvPr>
+        </p:nvSpPr>
+        <p:spPr/>
+      </p:sp>
+      <p:sp>
+        <p:nvSpPr>
+          <p:cNvPr id="3" name="Notes Placeholder 2"/>
+          <p:cNvSpPr>
+            <a:spLocks noGrp="1"/>
+          </p:cNvSpPr>
+          <p:nvPr>
+            <p:ph type="body" idx="1"/>
+          </p:nvPr>
+        </p:nvSpPr>
+        <p:spPr/>
+        <p:txBody>
+          <a:bodyPr/>
+          <a:lstStyle/>
+          <a:p>
+            <a:r>
+              <a:rPr lang="en-US" dirty="0"/>
+              <a:t>As the phylogenetic null model approach is dependent on phylogenetic signal </a:t>
+            </a:r>
+          </a:p>
+        </p:txBody>
+      </p:sp>
+      <p:sp>
+        <p:nvSpPr>
+          <p:cNvPr id="4" name="Slide Number Placeholder 3"/>
+          <p:cNvSpPr>
+            <a:spLocks noGrp="1"/>
+          </p:cNvSpPr>
+          <p:nvPr>
+            <p:ph type="sldNum" sz="quarter" idx="5"/>
+          </p:nvPr>
+        </p:nvSpPr>
+        <p:spPr/>
+        <p:txBody>
+          <a:bodyPr/>
+          <a:lstStyle/>
+          <a:p>
+            <a:fld id="{91AE2140-D502-214A-B76B-E0784B2C949B}" type="slidenum">
+              <a:rPr lang="en-US" smtClean="0"/>
+              <a:t>23</a:t>
+            </a:fld>
+            <a:endParaRPr lang="en-US"/>
+          </a:p>
+        </p:txBody>
+      </p:sp>
+    </p:spTree>
+    <p:extLst>
+      <p:ext uri="{BB962C8B-B14F-4D97-AF65-F5344CB8AC3E}">
+        <p14:creationId xmlns:p14="http://schemas.microsoft.com/office/powerpoint/2010/main" val="1424753429"/>
+      </p:ext>
+    </p:extLst>
+  </p:cSld>
+  <p:clrMapOvr>
+    <a:masterClrMapping/>
+  </p:clrMapOvr>
+</p:notes>
+</file>
+
+<file path=ppt/notesSlides/notesSlide15.xml><?xml version="1.0" encoding="utf-8"?>
+<p:notes xmlns:a="http://schemas.openxmlformats.org/drawingml/2006/main" xmlns:r="http://schemas.openxmlformats.org/officeDocument/2006/relationships" xmlns:p="http://schemas.openxmlformats.org/presentationml/2006/main">
+  <p:cSld>
+    <p:spTree>
+      <p:nvGrpSpPr>
+        <p:cNvPr id="1" name=""/>
+        <p:cNvGrpSpPr/>
+        <p:nvPr/>
+      </p:nvGrpSpPr>
+      <p:grpSpPr>
+        <a:xfrm>
+          <a:off x="0" y="0"/>
+          <a:ext cx="0" cy="0"/>
+          <a:chOff x="0" y="0"/>
+          <a:chExt cx="0" cy="0"/>
+        </a:xfrm>
+      </p:grpSpPr>
+      <p:sp>
+        <p:nvSpPr>
+          <p:cNvPr id="2" name="Slide Image Placeholder 1"/>
+          <p:cNvSpPr>
+            <a:spLocks noGrp="1" noRot="1" noChangeAspect="1"/>
+          </p:cNvSpPr>
+          <p:nvPr>
+            <p:ph type="sldImg"/>
+          </p:nvPr>
+        </p:nvSpPr>
+        <p:spPr/>
+      </p:sp>
+      <p:sp>
+        <p:nvSpPr>
+          <p:cNvPr id="3" name="Notes Placeholder 2"/>
+          <p:cNvSpPr>
+            <a:spLocks noGrp="1"/>
+          </p:cNvSpPr>
+          <p:nvPr>
+            <p:ph type="body" idx="1"/>
+          </p:nvPr>
+        </p:nvSpPr>
+        <p:spPr/>
+        <p:txBody>
+          <a:bodyPr/>
+          <a:lstStyle/>
+          <a:p>
+            <a:r>
+              <a:rPr lang="en-US" dirty="0"/>
+              <a:t>Sloan’s Neutral Model states that the probability of species </a:t>
+            </a:r>
+            <a:r>
+              <a:rPr lang="en-US" i="1" dirty="0" err="1"/>
+              <a:t>i</a:t>
+            </a:r>
+            <a:r>
+              <a:rPr lang="en-US" dirty="0"/>
+              <a:t> occurring within a sample at abundance (x</a:t>
+            </a:r>
+            <a:r>
+              <a:rPr lang="en-US" i="0" baseline="-25000" dirty="0"/>
+              <a:t>i</a:t>
+            </a:r>
+            <a:r>
+              <a:rPr lang="en-US" dirty="0"/>
+              <a:t>) above a detection threshold (d) </a:t>
+            </a:r>
+          </a:p>
+          <a:p>
+            <a:endParaRPr lang="en-US" dirty="0"/>
+          </a:p>
+          <a:p>
+            <a:r>
+              <a:rPr lang="en-US" dirty="0"/>
+              <a:t>Model results are compared to the observed data. Deviation of observed data from model results is assumed to be evidence of deterministic community assembly.</a:t>
+            </a:r>
+          </a:p>
+          <a:p>
+            <a:endParaRPr lang="en-US" dirty="0"/>
+          </a:p>
+          <a:p>
+            <a:r>
+              <a:rPr lang="en-US" dirty="0"/>
+              <a:t>The abundance of each ASV in the metacommunity (p</a:t>
+            </a:r>
+            <a:r>
+              <a:rPr lang="en-US" i="1" dirty="0"/>
+              <a:t>i</a:t>
+            </a:r>
+            <a:r>
+              <a:rPr lang="en-US" dirty="0"/>
+              <a:t>) is estimated by averaging it’s relative abundance across all samples.</a:t>
+            </a:r>
+          </a:p>
+        </p:txBody>
+      </p:sp>
+      <p:sp>
+        <p:nvSpPr>
+          <p:cNvPr id="4" name="Slide Number Placeholder 3"/>
+          <p:cNvSpPr>
+            <a:spLocks noGrp="1"/>
+          </p:cNvSpPr>
+          <p:nvPr>
+            <p:ph type="sldNum" sz="quarter" idx="5"/>
+          </p:nvPr>
+        </p:nvSpPr>
+        <p:spPr/>
+        <p:txBody>
+          <a:bodyPr/>
+          <a:lstStyle/>
+          <a:p>
+            <a:fld id="{91AE2140-D502-214A-B76B-E0784B2C949B}" type="slidenum">
+              <a:rPr lang="en-US" smtClean="0"/>
+              <a:t>25</a:t>
+            </a:fld>
+            <a:endParaRPr lang="en-US"/>
+          </a:p>
+        </p:txBody>
+      </p:sp>
+    </p:spTree>
+    <p:extLst>
+      <p:ext uri="{BB962C8B-B14F-4D97-AF65-F5344CB8AC3E}">
+        <p14:creationId xmlns:p14="http://schemas.microsoft.com/office/powerpoint/2010/main" val="1811139538"/>
+      </p:ext>
+    </p:extLst>
+  </p:cSld>
+  <p:clrMapOvr>
+    <a:masterClrMapping/>
+  </p:clrMapOvr>
+</p:notes>
+</file>
+
+<file path=ppt/notesSlides/notesSlide16.xml><?xml version="1.0" encoding="utf-8"?>
+<p:notes xmlns:a="http://schemas.openxmlformats.org/drawingml/2006/main" xmlns:r="http://schemas.openxmlformats.org/officeDocument/2006/relationships" xmlns:p="http://schemas.openxmlformats.org/presentationml/2006/main">
+  <p:cSld>
+    <p:spTree>
+      <p:nvGrpSpPr>
+        <p:cNvPr id="1" name=""/>
+        <p:cNvGrpSpPr/>
+        <p:nvPr/>
+      </p:nvGrpSpPr>
+      <p:grpSpPr>
+        <a:xfrm>
+          <a:off x="0" y="0"/>
+          <a:ext cx="0" cy="0"/>
+          <a:chOff x="0" y="0"/>
+          <a:chExt cx="0" cy="0"/>
+        </a:xfrm>
+      </p:grpSpPr>
+      <p:sp>
+        <p:nvSpPr>
+          <p:cNvPr id="2" name="Slide Image Placeholder 1"/>
+          <p:cNvSpPr>
+            <a:spLocks noGrp="1" noRot="1" noChangeAspect="1"/>
+          </p:cNvSpPr>
+          <p:nvPr>
+            <p:ph type="sldImg"/>
+          </p:nvPr>
+        </p:nvSpPr>
+        <p:spPr/>
+      </p:sp>
+      <p:sp>
+        <p:nvSpPr>
+          <p:cNvPr id="3" name="Notes Placeholder 2"/>
+          <p:cNvSpPr>
+            <a:spLocks noGrp="1"/>
+          </p:cNvSpPr>
+          <p:nvPr>
+            <p:ph type="body" idx="1"/>
+          </p:nvPr>
+        </p:nvSpPr>
+        <p:spPr/>
+        <p:txBody>
+          <a:bodyPr/>
+          <a:lstStyle/>
+          <a:p>
+            <a:r>
+              <a:rPr lang="en-US" dirty="0"/>
+              <a:t>Code developed from Barnett et al., (2020) Soil characteristics and land-use drive bacterial community assembly patterns (https://</a:t>
+            </a:r>
+            <a:r>
+              <a:rPr lang="en-US" dirty="0" err="1"/>
+              <a:t>github.com</a:t>
+            </a:r>
+            <a:r>
+              <a:rPr lang="en-US" dirty="0"/>
+              <a:t>/seb369/</a:t>
+            </a:r>
+            <a:r>
+              <a:rPr lang="en-US" dirty="0" err="1"/>
+              <a:t>landuse_comm_assembly</a:t>
+            </a:r>
+            <a:r>
+              <a:rPr lang="en-US" dirty="0"/>
+              <a:t>)</a:t>
+            </a:r>
+          </a:p>
+        </p:txBody>
+      </p:sp>
+      <p:sp>
+        <p:nvSpPr>
+          <p:cNvPr id="4" name="Slide Number Placeholder 3"/>
+          <p:cNvSpPr>
+            <a:spLocks noGrp="1"/>
+          </p:cNvSpPr>
+          <p:nvPr>
+            <p:ph type="sldNum" sz="quarter" idx="5"/>
+          </p:nvPr>
+        </p:nvSpPr>
+        <p:spPr/>
+        <p:txBody>
+          <a:bodyPr/>
+          <a:lstStyle/>
+          <a:p>
+            <a:fld id="{91AE2140-D502-214A-B76B-E0784B2C949B}" type="slidenum">
+              <a:rPr lang="en-US" smtClean="0"/>
+              <a:t>26</a:t>
+            </a:fld>
+            <a:endParaRPr lang="en-US"/>
+          </a:p>
+        </p:txBody>
+      </p:sp>
+    </p:spTree>
+    <p:extLst>
+      <p:ext uri="{BB962C8B-B14F-4D97-AF65-F5344CB8AC3E}">
+        <p14:creationId xmlns:p14="http://schemas.microsoft.com/office/powerpoint/2010/main" val="2263901205"/>
+      </p:ext>
+    </p:extLst>
+  </p:cSld>
+  <p:clrMapOvr>
+    <a:masterClrMapping/>
+  </p:clrMapOvr>
+</p:notes>
+</file>
+
+<file path=ppt/notesSlides/notesSlide17.xml><?xml version="1.0" encoding="utf-8"?>
+<p:notes xmlns:a="http://schemas.openxmlformats.org/drawingml/2006/main" xmlns:r="http://schemas.openxmlformats.org/officeDocument/2006/relationships" xmlns:p="http://schemas.openxmlformats.org/presentationml/2006/main">
+  <p:cSld>
+    <p:spTree>
+      <p:nvGrpSpPr>
+        <p:cNvPr id="1" name=""/>
+        <p:cNvGrpSpPr/>
+        <p:nvPr/>
+      </p:nvGrpSpPr>
+      <p:grpSpPr>
+        <a:xfrm>
+          <a:off x="0" y="0"/>
+          <a:ext cx="0" cy="0"/>
+          <a:chOff x="0" y="0"/>
+          <a:chExt cx="0" cy="0"/>
+        </a:xfrm>
+      </p:grpSpPr>
+      <p:sp>
+        <p:nvSpPr>
+          <p:cNvPr id="2" name="Slide Image Placeholder 1"/>
+          <p:cNvSpPr>
+            <a:spLocks noGrp="1" noRot="1" noChangeAspect="1"/>
+          </p:cNvSpPr>
+          <p:nvPr>
+            <p:ph type="sldImg"/>
+          </p:nvPr>
+        </p:nvSpPr>
+        <p:spPr/>
+      </p:sp>
+      <p:sp>
+        <p:nvSpPr>
+          <p:cNvPr id="3" name="Notes Placeholder 2"/>
+          <p:cNvSpPr>
+            <a:spLocks noGrp="1"/>
+          </p:cNvSpPr>
+          <p:nvPr>
+            <p:ph type="body" idx="1"/>
+          </p:nvPr>
+        </p:nvSpPr>
+        <p:spPr/>
+        <p:txBody>
+          <a:bodyPr/>
+          <a:lstStyle/>
+          <a:p>
+            <a:r>
+              <a:rPr lang="en-US" dirty="0"/>
+              <a:t>This is the result of the model fitting with the Sommers dataset (not reduced).</a:t>
+            </a:r>
+          </a:p>
+          <a:p>
+            <a:r>
+              <a:rPr lang="en-US" dirty="0"/>
+              <a:t>X axis = log mean relative abundances of each ASV</a:t>
+            </a:r>
+          </a:p>
+          <a:p>
+            <a:r>
+              <a:rPr lang="en-US" dirty="0"/>
+              <a:t>Y axis = mean occurrence frequency of each ASV </a:t>
+            </a:r>
+          </a:p>
+          <a:p>
+            <a:r>
+              <a:rPr lang="en-US" dirty="0"/>
+              <a:t>Points = observed log relative abundances against occurrence frequencies</a:t>
+            </a:r>
+          </a:p>
+          <a:p>
+            <a:r>
+              <a:rPr lang="en-US" dirty="0"/>
+              <a:t>Solid line = predicted log relative abundances plotted against occurrence frequencies</a:t>
+            </a:r>
+          </a:p>
+          <a:p>
+            <a:r>
+              <a:rPr lang="en-US" dirty="0"/>
+              <a:t>Dotted lines = 95% confidence intervals</a:t>
+            </a:r>
+          </a:p>
+          <a:p>
+            <a:endParaRPr lang="en-US" dirty="0"/>
+          </a:p>
+          <a:p>
+            <a:r>
+              <a:rPr lang="en-US" dirty="0"/>
+              <a:t>This allows us to assess to what degree observed community structure can be explained by stochastic processes within each sample.</a:t>
+            </a:r>
+          </a:p>
+          <a:p>
+            <a:r>
+              <a:rPr lang="en-US" dirty="0"/>
+              <a:t>The Sloan neutral model is applied here. This model does not take into account phylogenetic distance. </a:t>
+            </a:r>
+          </a:p>
+          <a:p>
+            <a:r>
+              <a:rPr lang="en-US" dirty="0"/>
+              <a:t>ASV occurrence frequency is explained as a function of ASV abundance within the metacommunity (i.e. the more abundant an ASV is in the metacommunity, the more frequently it will be detected in the local community by chance). </a:t>
+            </a:r>
+          </a:p>
+          <a:p>
+            <a:r>
+              <a:rPr lang="en-US" dirty="0"/>
+              <a:t>The neutral model performed well, explaining 77% of variation in ASV detection frequency with an estimated migration factor of 0.02 between sites.</a:t>
+            </a:r>
+          </a:p>
+          <a:p>
+            <a:r>
+              <a:rPr lang="en-US" dirty="0"/>
+              <a:t>These results suggest that neutral assembly processes can explain the pattern of observed ASV occurrence frequencies </a:t>
+            </a:r>
+            <a:r>
+              <a:rPr lang="en-US" strike="sngStrike" dirty="0"/>
+              <a:t>and that the the regional species pool is a driving factor in the community composition of these samples. </a:t>
+            </a:r>
+          </a:p>
+          <a:p>
+            <a:r>
+              <a:rPr lang="en-US" strike="noStrike" dirty="0"/>
+              <a:t>The deviation of predicted occurrence frequencies from observed occurrence frequencies suggests that there are also deterministic processes driving community composition.</a:t>
+            </a:r>
+          </a:p>
+          <a:p>
+            <a:endParaRPr lang="en-US" dirty="0"/>
+          </a:p>
+        </p:txBody>
+      </p:sp>
+      <p:sp>
+        <p:nvSpPr>
+          <p:cNvPr id="4" name="Slide Number Placeholder 3"/>
+          <p:cNvSpPr>
+            <a:spLocks noGrp="1"/>
+          </p:cNvSpPr>
+          <p:nvPr>
+            <p:ph type="sldNum" sz="quarter" idx="5"/>
+          </p:nvPr>
+        </p:nvSpPr>
+        <p:spPr/>
+        <p:txBody>
+          <a:bodyPr/>
+          <a:lstStyle/>
+          <a:p>
+            <a:fld id="{91AE2140-D502-214A-B76B-E0784B2C949B}" type="slidenum">
+              <a:rPr lang="en-US" smtClean="0"/>
+              <a:t>27</a:t>
             </a:fld>
             <a:endParaRPr lang="en-US"/>
           </a:p>
@@ -19358,52 +19740,137 @@
           <a:bodyPr/>
           <a:lstStyle/>
           <a:p>
+            <a:pPr marL="228600" indent="-228600">
+              <a:buAutoNum type="arabicParenR"/>
+            </a:pPr>
             <a:r>
               <a:rPr lang="en-US" dirty="0"/>
-              <a:t>Multivariate analysis can allow us to look at the relationship between community composition and environmental characteristics – these are deterministic, non-random processes. </a:t>
+              <a:t>Load data/</a:t>
             </a:r>
             <a:r>
               <a:rPr lang="en-US" dirty="0" err="1"/>
-              <a:t>Investiagation</a:t>
+              <a:t>phyloseq</a:t>
             </a:r>
             <a:r>
               <a:rPr lang="en-US" dirty="0"/>
-              <a:t> into deterministic processes of community assembly (e.g. relationship between community composition and environmental characteristics) dominate most studies of microbial community assembly, </a:t>
+              <a:t> object</a:t>
+            </a:r>
+          </a:p>
+          <a:p>
+            <a:pPr marL="228600" indent="-228600">
+              <a:buAutoNum type="arabicParenR"/>
+            </a:pPr>
+            <a:r>
+              <a:rPr lang="en-US" dirty="0"/>
+              <a:t>Figure 1: Construct bar chart of agglomerated taxa from Hellinger transformed (relative abundance) ASV count data</a:t>
+            </a:r>
+          </a:p>
+          <a:p>
+            <a:pPr marL="228600" indent="-228600">
+              <a:buAutoNum type="arabicParenR"/>
+            </a:pPr>
+            <a:r>
+              <a:rPr lang="en-US" dirty="0"/>
+              <a:t>Calculate bray-Curtis dissimilarity matrix </a:t>
+            </a:r>
+          </a:p>
+          <a:p>
+            <a:pPr marL="228600" indent="-228600">
+              <a:buAutoNum type="arabicParenR"/>
+            </a:pPr>
+            <a:r>
+              <a:rPr lang="en-US" dirty="0"/>
+              <a:t>Figure 2: Bray-Curtis </a:t>
             </a:r>
             <a:r>
               <a:rPr lang="en-US" dirty="0" err="1"/>
-              <a:t>howeber</a:t>
+              <a:t>PCoA</a:t>
             </a:r>
             <a:r>
               <a:rPr lang="en-US" dirty="0"/>
-              <a:t>, it is likely both deterministic and stochastic processes contribute to community assembly. This is why I combine multivariate and network analysis (deterministic) with phylogenetic null modelling (deterministic and stochastic) and neutral modelling (stochastic). </a:t>
-            </a:r>
-          </a:p>
-          <a:p>
+              <a:t> Analysis, scaled by eigenvalues </a:t>
+            </a:r>
+          </a:p>
+          <a:p>
+            <a:pPr marL="228600" indent="-228600">
+              <a:buAutoNum type="arabicParenR"/>
+            </a:pPr>
+            <a:r>
+              <a:rPr lang="en-US" dirty="0"/>
+              <a:t>Figure 3: </a:t>
+            </a:r>
+            <a:r>
+              <a:rPr lang="en-US" sz="1200" dirty="0"/>
+              <a:t> Unweighted </a:t>
+            </a:r>
+            <a:r>
+              <a:rPr lang="en-US" sz="1200" dirty="0" err="1"/>
+              <a:t>UniFrac</a:t>
+            </a:r>
+            <a:r>
+              <a:rPr lang="en-US" sz="1200" dirty="0"/>
+              <a:t> </a:t>
+            </a:r>
+            <a:r>
+              <a:rPr lang="en-US" sz="1200" dirty="0" err="1"/>
+              <a:t>PCoA</a:t>
+            </a:r>
+            <a:r>
+              <a:rPr lang="en-US" sz="1200" dirty="0"/>
+              <a:t>, scaled by eigenvalues</a:t>
+            </a:r>
             <a:endParaRPr lang="en-US" dirty="0"/>
           </a:p>
           <a:p>
+            <a:pPr marL="228600" indent="-228600">
+              <a:buAutoNum type="arabicParenR"/>
+            </a:pPr>
             <a:r>
               <a:rPr lang="en-US" dirty="0"/>
-              <a:t>It has been suggested that initial community assembly is driven by stochastic processes, and deterministic processes shape the community through time. </a:t>
-            </a:r>
-          </a:p>
-          <a:p>
-            <a:endParaRPr lang="en-US" dirty="0"/>
-          </a:p>
-          <a:p>
-            <a:r>
-              <a:rPr lang="en-US" dirty="0"/>
-              <a:t>What do we already know about deterministic processes on glaciers?</a:t>
-            </a:r>
-          </a:p>
-          <a:p>
-            <a:endParaRPr lang="en-US" dirty="0"/>
-          </a:p>
-          <a:p>
-            <a:r>
-              <a:rPr lang="en-US" dirty="0"/>
-              <a:t>What do we already know about stochastic processes on glaciers?</a:t>
+              <a:t>Figure 4: </a:t>
+            </a:r>
+            <a:r>
+              <a:rPr lang="en-US" sz="1200" dirty="0"/>
+              <a:t> Weighted </a:t>
+            </a:r>
+            <a:r>
+              <a:rPr lang="en-US" sz="1200" dirty="0" err="1"/>
+              <a:t>UniFrac</a:t>
+            </a:r>
+            <a:r>
+              <a:rPr lang="en-US" sz="1200" dirty="0"/>
+              <a:t> </a:t>
+            </a:r>
+            <a:r>
+              <a:rPr lang="en-US" sz="1200" dirty="0" err="1"/>
+              <a:t>PCoA</a:t>
+            </a:r>
+            <a:r>
+              <a:rPr lang="en-US" sz="1200" dirty="0"/>
+              <a:t>, scaled by eigenvalues</a:t>
+            </a:r>
+          </a:p>
+          <a:p>
+            <a:pPr marL="228600" marR="0" lvl="0" indent="-228600" algn="l" defTabSz="914400" rtl="0" eaLnBrk="1" fontAlgn="auto" latinLnBrk="0" hangingPunct="1">
+              <a:lnSpc>
+                <a:spcPct val="100000"/>
+              </a:lnSpc>
+              <a:spcBef>
+                <a:spcPts val="0"/>
+              </a:spcBef>
+              <a:spcAft>
+                <a:spcPts val="0"/>
+              </a:spcAft>
+              <a:buClrTx/>
+              <a:buSzTx/>
+              <a:buFontTx/>
+              <a:buAutoNum type="arabicParenR"/>
+              <a:tabLst/>
+              <a:defRPr/>
+            </a:pPr>
+            <a:r>
+              <a:rPr lang="en-US" sz="1200" dirty="0"/>
+              <a:t>Figure 5. Bray-Curtis NMDS plot</a:t>
             </a:r>
           </a:p>
         </p:txBody>
@@ -19425,7 +19892,7 @@
           <a:p>
             <a:fld id="{91AE2140-D502-214A-B76B-E0784B2C949B}" type="slidenum">
               <a:rPr lang="en-US" smtClean="0"/>
-              <a:t>14</a:t>
+              <a:t>11</a:t>
             </a:fld>
             <a:endParaRPr lang="en-US"/>
           </a:p>
@@ -19434,7 +19901,7 @@
     </p:spTree>
     <p:extLst>
       <p:ext uri="{BB962C8B-B14F-4D97-AF65-F5344CB8AC3E}">
-        <p14:creationId xmlns:p14="http://schemas.microsoft.com/office/powerpoint/2010/main" val="2827327905"/>
+        <p14:creationId xmlns:p14="http://schemas.microsoft.com/office/powerpoint/2010/main" val="2491024685"/>
       </p:ext>
     </p:extLst>
   </p:cSld>
@@ -19490,46 +19957,56 @@
           <a:p>
             <a:r>
               <a:rPr lang="en-US" dirty="0"/>
-              <a:t>Stochastic processes can produce complex spatial community patterns. </a:t>
+              <a:t>1) Looked for evidence of compositionality. By multiplying ASV table by itself we can look for evidence of covariance.</a:t>
             </a:r>
           </a:p>
           <a:p>
             <a:r>
               <a:rPr lang="en-US" dirty="0"/>
-              <a:t>Ecological drift = random birth/death events in a specific area, in the absence of selection. Ecological drift is particularly important when dispersal is limited as illustrated by island biogeography theory.</a:t>
-            </a:r>
+              <a:t>#We then find the determinant of the covariance matrix and if the answer is 0 we have evidence of compositionality in the data – the result was 0 so the data is compositional.</a:t>
+            </a:r>
+          </a:p>
+          <a:p>
+            <a:endParaRPr lang="en-US" dirty="0"/>
           </a:p>
           <a:p>
             <a:r>
               <a:rPr lang="en-US" dirty="0"/>
-              <a:t>Dispersal limitation between isolated habitats promotes local extinction and ecological drift which causes initially identical communities to diverge. Ecological drift can cause communities to diverge, even when dispersal is high and selection pressure is low.</a:t>
+              <a:t>2) Because out data are compositional we then need to transform them for downstream analysis</a:t>
             </a:r>
           </a:p>
           <a:p>
             <a:r>
               <a:rPr lang="en-US" dirty="0"/>
-              <a:t>Homogenizing dispersal = high dispersal rates leading to similar communities between habitats (overcomes the impact of ecological drift and even deterministic processes)</a:t>
-            </a:r>
-          </a:p>
-          <a:p>
+              <a:t>#Step Four: Perform a Log-Ratio </a:t>
+            </a:r>
+            <a:r>
+              <a:rPr lang="en-US" dirty="0" err="1"/>
+              <a:t>trasnformation</a:t>
+            </a:r>
             <a:endParaRPr lang="en-US" dirty="0"/>
           </a:p>
           <a:p>
             <a:r>
               <a:rPr lang="en-US" dirty="0"/>
-              <a:t>Deterministic (deterministic processes commonly mean beta diversity varies as a result of environmental characteristics – i.e. communities are more or less different due to the differences or similarities of the environments)</a:t>
-            </a:r>
-          </a:p>
-          <a:p>
+              <a:t>#This will </a:t>
+            </a:r>
+            <a:r>
+              <a:rPr lang="en-US" dirty="0" err="1"/>
+              <a:t>normalise</a:t>
+            </a:r>
             <a:r>
               <a:rPr lang="en-US" dirty="0"/>
-              <a:t>Variable selection – deterministic processes are driving variable composition between communities. Different areas have different environmental characteristics that select for different species.</a:t>
-            </a:r>
+              <a:t> the ASV data within each sample</a:t>
+            </a:r>
+          </a:p>
+          <a:p>
+            <a:endParaRPr lang="en-US" dirty="0"/>
           </a:p>
           <a:p>
             <a:r>
               <a:rPr lang="en-US" dirty="0"/>
-              <a:t>Homogenizing selection – deterministic processes are driving homogenous composition between communities. Different areas have similar environmental characteristics that select for similar species.</a:t>
+              <a:t>3) Look at the difference the log-ratio transformation has made to the covariance of the data</a:t>
             </a:r>
           </a:p>
           <a:p>
@@ -19538,19 +20015,49 @@
           <a:p>
             <a:r>
               <a:rPr lang="en-US" dirty="0"/>
-              <a:t>Dispersal limitation – stochastic dispersal limitation is driving variable composition between communities </a:t>
-            </a:r>
+              <a:t>4) Figure 6: Perform Principal Component Analysis on Log-Ratio Transformed Data, Create visual representation of PCA and plot</a:t>
+            </a:r>
+          </a:p>
+          <a:p>
+            <a:endParaRPr lang="en-US" dirty="0"/>
           </a:p>
           <a:p>
             <a:r>
               <a:rPr lang="en-US" dirty="0"/>
-              <a:t>Homogenizing dispersal – stochastic high dispersal is driving homogenous composition between communities</a:t>
-            </a:r>
-          </a:p>
-          <a:p>
+              <a:t>5) Figure 7: </a:t>
+            </a:r>
+            <a:r>
+              <a:rPr lang="en-US" dirty="0" err="1"/>
+              <a:t>Visualise</a:t>
+            </a:r>
             <a:r>
               <a:rPr lang="en-US" dirty="0"/>
-              <a:t>Ecological drift – stochastic ecological drift is driving variable composition between communities</a:t>
+              <a:t> and plot the </a:t>
+            </a:r>
+            <a:r>
+              <a:rPr lang="en-US" dirty="0" err="1"/>
+              <a:t>pca</a:t>
+            </a:r>
+            <a:r>
+              <a:rPr lang="en-US" dirty="0"/>
+              <a:t> </a:t>
+            </a:r>
+          </a:p>
+          <a:p>
+            <a:endParaRPr lang="en-US" dirty="0"/>
+          </a:p>
+          <a:p>
+            <a:r>
+              <a:rPr lang="en-US" dirty="0"/>
+              <a:t>6) Computed the </a:t>
+            </a:r>
+            <a:r>
+              <a:rPr lang="en-US" dirty="0" err="1"/>
+              <a:t>jaccard</a:t>
+            </a:r>
+            <a:r>
+              <a:rPr lang="en-US" dirty="0"/>
+              <a:t> distance metric</a:t>
             </a:r>
           </a:p>
           <a:p>
@@ -19575,7 +20082,7 @@
           <a:p>
             <a:fld id="{91AE2140-D502-214A-B76B-E0784B2C949B}" type="slidenum">
               <a:rPr lang="en-US" smtClean="0"/>
-              <a:t>17</a:t>
+              <a:t>12</a:t>
             </a:fld>
             <a:endParaRPr lang="en-US"/>
           </a:p>
@@ -19584,7 +20091,7 @@
     </p:spTree>
     <p:extLst>
       <p:ext uri="{BB962C8B-B14F-4D97-AF65-F5344CB8AC3E}">
-        <p14:creationId xmlns:p14="http://schemas.microsoft.com/office/powerpoint/2010/main" val="4270121788"/>
+        <p14:creationId xmlns:p14="http://schemas.microsoft.com/office/powerpoint/2010/main" val="171950858"/>
       </p:ext>
     </p:extLst>
   </p:cSld>
@@ -19640,31 +20147,15 @@
           <a:p>
             <a:r>
               <a:rPr lang="en-US" dirty="0"/>
-              <a:t>Adaptive divergence (adaptation to the environment) + genetic drift (random genetic mutations) = evolutionary diversification (evolutionary branching of species through time).</a:t>
-            </a:r>
-          </a:p>
-          <a:p>
+              <a:t>1) Used ‘vegan’ package to get Shannon, Simpsons, Inverted Simpsons Diversity Indexes of count data in each sample. Also </a:t>
+            </a:r>
+            <a:r>
+              <a:rPr lang="en-US" dirty="0" err="1"/>
+              <a:t>Pilou</a:t>
+            </a:r>
             <a:r>
               <a:rPr lang="en-US" dirty="0"/>
-              <a:t>Large spatial and temporal scales.</a:t>
-            </a:r>
-          </a:p>
-          <a:p>
-            <a:r>
-              <a:rPr lang="en-US" dirty="0"/>
-              <a:t>Evolution impacts diversity, function and fitness of communities.</a:t>
-            </a:r>
-          </a:p>
-          <a:p>
-            <a:r>
-              <a:rPr lang="en-US" dirty="0"/>
-              <a:t>Evolution contributes to community assembly by contributing new species to the species pool. </a:t>
-            </a:r>
-          </a:p>
-          <a:p>
-            <a:r>
-              <a:rPr lang="en-US" dirty="0"/>
-              <a:t>This is often excluded from study due to the long time scales over which evolution occurs, even for microbial communities. </a:t>
+              <a:t> evenness and Faith’s phylogenetic diversity. </a:t>
             </a:r>
           </a:p>
         </p:txBody>
@@ -19686,7 +20177,7 @@
           <a:p>
             <a:fld id="{91AE2140-D502-214A-B76B-E0784B2C949B}" type="slidenum">
               <a:rPr lang="en-US" smtClean="0"/>
-              <a:t>18</a:t>
+              <a:t>13</a:t>
             </a:fld>
             <a:endParaRPr lang="en-US"/>
           </a:p>
@@ -19695,7 +20186,7 @@
     </p:spTree>
     <p:extLst>
       <p:ext uri="{BB962C8B-B14F-4D97-AF65-F5344CB8AC3E}">
-        <p14:creationId xmlns:p14="http://schemas.microsoft.com/office/powerpoint/2010/main" val="2680826747"/>
+        <p14:creationId xmlns:p14="http://schemas.microsoft.com/office/powerpoint/2010/main" val="3006070899"/>
       </p:ext>
     </p:extLst>
   </p:cSld>
@@ -19751,8 +20242,74 @@
           <a:p>
             <a:r>
               <a:rPr lang="en-US" dirty="0"/>
-              <a:t>As the phylogenetic null model approach is dependent on phylogenetic signal </a:t>
-            </a:r>
+              <a:t>I performed linear regressions between the explanatory variables (glaciers) and response variables (richness, depth, area, chlorophyll, </a:t>
+            </a:r>
+            <a:r>
+              <a:rPr lang="en-US" dirty="0" err="1"/>
+              <a:t>dna</a:t>
+            </a:r>
+            <a:r>
+              <a:rPr lang="en-US" dirty="0"/>
+              <a:t> per gram, diversity indices).</a:t>
+            </a:r>
+          </a:p>
+          <a:p>
+            <a:endParaRPr lang="en-US" dirty="0"/>
+          </a:p>
+          <a:p>
+            <a:r>
+              <a:rPr lang="en-US" dirty="0"/>
+              <a:t>I then constructed ANOVA tables of the linear regression models to gauge their statistical significance. </a:t>
+            </a:r>
+          </a:p>
+          <a:p>
+            <a:endParaRPr lang="en-US" dirty="0"/>
+          </a:p>
+          <a:p>
+            <a:r>
+              <a:rPr lang="en-US" dirty="0"/>
+              <a:t>#Analysis of Variance (ANOVA), a linear model analysis. We want to ask: is the ASV richness/chlorophyll/hole size/hole depth/DNA per gram between glaciers significantly different? Plot the data divided into glacier groups</a:t>
+            </a:r>
+          </a:p>
+          <a:p>
+            <a:r>
+              <a:rPr lang="en-US" dirty="0"/>
+              <a:t>#ANOVA quantifies the signal to noise ratio. How different are our groups in ratio to how spread out the data are? ANOVA will tell us how confident we can be that we are not being fooled by a type I error (a false positive difference between the groups)</a:t>
+            </a:r>
+          </a:p>
+          <a:p>
+            <a:r>
+              <a:rPr lang="en-US" dirty="0"/>
+              <a:t>#ANOVA will: 1) quantify the overall variability of the dataset. 2) Divide that variability into the variability between and within groups. More signal = more </a:t>
+            </a:r>
+            <a:r>
+              <a:rPr lang="en-US" dirty="0" err="1"/>
+              <a:t>condifent</a:t>
+            </a:r>
+            <a:r>
+              <a:rPr lang="en-US" dirty="0"/>
+              <a:t>. More noise = less confident.</a:t>
+            </a:r>
+          </a:p>
+          <a:p>
+            <a:endParaRPr lang="en-US" dirty="0"/>
+          </a:p>
+          <a:p>
+            <a:r>
+              <a:rPr lang="en-US" dirty="0"/>
+              <a:t>The ANOVA tables showed there was significant difference between the glaciers in terms of ASV richness, cryoconite hole depth, the </a:t>
+            </a:r>
+            <a:r>
+              <a:rPr lang="en-US" dirty="0" err="1"/>
+              <a:t>dna</a:t>
+            </a:r>
+            <a:r>
+              <a:rPr lang="en-US" dirty="0"/>
+              <a:t> per gram of cryoconite and faith’s pd.</a:t>
+            </a:r>
+          </a:p>
+          <a:p>
+            <a:endParaRPr lang="en-US" dirty="0"/>
           </a:p>
         </p:txBody>
       </p:sp>
@@ -19773,7 +20330,7 @@
           <a:p>
             <a:fld id="{91AE2140-D502-214A-B76B-E0784B2C949B}" type="slidenum">
               <a:rPr lang="en-US" smtClean="0"/>
-              <a:t>20</a:t>
+              <a:t>15</a:t>
             </a:fld>
             <a:endParaRPr lang="en-US"/>
           </a:p>
@@ -19782,7 +20339,7 @@
     </p:spTree>
     <p:extLst>
       <p:ext uri="{BB962C8B-B14F-4D97-AF65-F5344CB8AC3E}">
-        <p14:creationId xmlns:p14="http://schemas.microsoft.com/office/powerpoint/2010/main" val="1424753429"/>
+        <p14:creationId xmlns:p14="http://schemas.microsoft.com/office/powerpoint/2010/main" val="3419341708"/>
       </p:ext>
     </p:extLst>
   </p:cSld>
@@ -23150,7 +23707,7 @@
           <p:nvPr>
             <p:extLst>
               <p:ext uri="{D42A27DB-BD31-4B8C-83A1-F6EECF244321}">
-                <p14:modId xmlns:p14="http://schemas.microsoft.com/office/powerpoint/2010/main" val="4024712381"/>
+                <p14:modId xmlns:p14="http://schemas.microsoft.com/office/powerpoint/2010/main" val="2036473356"/>
               </p:ext>
             </p:extLst>
           </p:nvPr>
@@ -23195,6 +23752,36 @@
           <a:chExt cx="0" cy="0"/>
         </a:xfrm>
       </p:grpSpPr>
+      <p:pic>
+        <p:nvPicPr>
+          <p:cNvPr id="14" name="Picture 13">
+            <a:extLst>
+              <a:ext uri="{FF2B5EF4-FFF2-40B4-BE49-F238E27FC236}">
+                <a16:creationId xmlns:a16="http://schemas.microsoft.com/office/drawing/2014/main" id="{B236FC47-056D-8F42-8FB5-02001186B775}"/>
+              </a:ext>
+            </a:extLst>
+          </p:cNvPr>
+          <p:cNvPicPr>
+            <a:picLocks noChangeAspect="1"/>
+          </p:cNvPicPr>
+          <p:nvPr/>
+        </p:nvPicPr>
+        <p:blipFill>
+          <a:blip r:embed="rId3"/>
+          <a:stretch>
+            <a:fillRect/>
+          </a:stretch>
+        </p:blipFill>
+        <p:spPr>
+          <a:xfrm>
+            <a:off x="5403849" y="3361532"/>
+            <a:ext cx="3595686" cy="3595686"/>
+          </a:xfrm>
+          <a:prstGeom prst="rect">
+            <a:avLst/>
+          </a:prstGeom>
+        </p:spPr>
+      </p:pic>
       <p:sp>
         <p:nvSpPr>
           <p:cNvPr id="2" name="Title 1">
@@ -23223,45 +23810,336 @@
           </a:p>
         </p:txBody>
       </p:sp>
-      <p:sp>
-        <p:nvSpPr>
-          <p:cNvPr id="3" name="Content Placeholder 2">
+      <p:pic>
+        <p:nvPicPr>
+          <p:cNvPr id="5" name="Picture 4">
             <a:extLst>
               <a:ext uri="{FF2B5EF4-FFF2-40B4-BE49-F238E27FC236}">
-                <a16:creationId xmlns:a16="http://schemas.microsoft.com/office/drawing/2014/main" id="{28B86DE3-8EDB-3A49-8E50-7FD4218F36FD}"/>
+                <a16:creationId xmlns:a16="http://schemas.microsoft.com/office/drawing/2014/main" id="{B9DAD4B0-E9CE-D444-960D-1DC64E0DC26D}"/>
               </a:ext>
             </a:extLst>
           </p:cNvPr>
-          <p:cNvSpPr>
-            <a:spLocks noGrp="1"/>
-          </p:cNvSpPr>
-          <p:nvPr>
-            <p:ph idx="1"/>
-          </p:nvPr>
+          <p:cNvPicPr>
+            <a:picLocks noChangeAspect="1"/>
+          </p:cNvPicPr>
+          <p:nvPr/>
+        </p:nvPicPr>
+        <p:blipFill>
+          <a:blip r:embed="rId4"/>
+          <a:stretch>
+            <a:fillRect/>
+          </a:stretch>
+        </p:blipFill>
+        <p:spPr>
+          <a:xfrm>
+            <a:off x="214721" y="1513532"/>
+            <a:ext cx="2628728" cy="2628728"/>
+          </a:xfrm>
+          <a:prstGeom prst="rect">
+            <a:avLst/>
+          </a:prstGeom>
+        </p:spPr>
+      </p:pic>
+      <p:sp>
+        <p:nvSpPr>
+          <p:cNvPr id="6" name="TextBox 5">
+            <a:extLst>
+              <a:ext uri="{FF2B5EF4-FFF2-40B4-BE49-F238E27FC236}">
+                <a16:creationId xmlns:a16="http://schemas.microsoft.com/office/drawing/2014/main" id="{6F063E1D-5AC7-DC41-846B-FA1A6161BDB0}"/>
+              </a:ext>
+            </a:extLst>
+          </p:cNvPr>
+          <p:cNvSpPr txBox="1"/>
+          <p:nvPr/>
         </p:nvSpPr>
-        <p:spPr/>
+        <p:spPr>
+          <a:xfrm>
+            <a:off x="3057245" y="1934472"/>
+            <a:ext cx="1935166" cy="830997"/>
+          </a:xfrm>
+          <a:prstGeom prst="rect">
+            <a:avLst/>
+          </a:prstGeom>
+          <a:noFill/>
+        </p:spPr>
         <p:txBody>
-          <a:bodyPr/>
+          <a:bodyPr wrap="square" rtlCol="0">
+            <a:spAutoFit/>
+          </a:bodyPr>
           <a:lstStyle/>
           <a:p>
             <a:r>
-              <a:rPr lang="en-US" dirty="0"/>
-              <a:t>Data taken from: Sommers et al., (2020) </a:t>
-            </a:r>
-            <a:r>
-              <a:rPr lang="en-GB" dirty="0"/>
-              <a:t>Microbial Species – Area Relationships in Antarctic Cryoconite Holes Depend on Productivity</a:t>
-            </a:r>
-          </a:p>
-          <a:p>
-            <a:r>
-              <a:rPr lang="en-GB" dirty="0"/>
-              <a:t>Principal Coordinate Analysis to explore variation in community composition between the glaciers</a:t>
-            </a:r>
-            <a:endParaRPr lang="en-US" dirty="0"/>
-          </a:p>
-          <a:p>
-            <a:endParaRPr lang="en-US" dirty="0"/>
+              <a:rPr lang="en-US" sz="1200" dirty="0"/>
+              <a:t>Figure 1. Bar chart of Hellinger transformed ASV data with agglomerated Phyla </a:t>
+            </a:r>
+          </a:p>
+        </p:txBody>
+      </p:sp>
+      <p:pic>
+        <p:nvPicPr>
+          <p:cNvPr id="8" name="Picture 7">
+            <a:extLst>
+              <a:ext uri="{FF2B5EF4-FFF2-40B4-BE49-F238E27FC236}">
+                <a16:creationId xmlns:a16="http://schemas.microsoft.com/office/drawing/2014/main" id="{40F59D41-24AB-1C42-B376-0A8B7284AAE0}"/>
+              </a:ext>
+            </a:extLst>
+          </p:cNvPr>
+          <p:cNvPicPr>
+            <a:picLocks noChangeAspect="1"/>
+          </p:cNvPicPr>
+          <p:nvPr/>
+        </p:nvPicPr>
+        <p:blipFill rotWithShape="1">
+          <a:blip r:embed="rId5"/>
+          <a:srcRect l="-1707" t="21631" r="1707" b="24114"/>
+          <a:stretch/>
+        </p:blipFill>
+        <p:spPr>
+          <a:xfrm>
+            <a:off x="5403849" y="270347"/>
+            <a:ext cx="3581400" cy="1943100"/>
+          </a:xfrm>
+          <a:prstGeom prst="rect">
+            <a:avLst/>
+          </a:prstGeom>
+        </p:spPr>
+      </p:pic>
+      <p:sp>
+        <p:nvSpPr>
+          <p:cNvPr id="9" name="TextBox 8">
+            <a:extLst>
+              <a:ext uri="{FF2B5EF4-FFF2-40B4-BE49-F238E27FC236}">
+                <a16:creationId xmlns:a16="http://schemas.microsoft.com/office/drawing/2014/main" id="{D42B2D0E-9D2E-D549-8629-AA9ED4EDA863}"/>
+              </a:ext>
+            </a:extLst>
+          </p:cNvPr>
+          <p:cNvSpPr txBox="1"/>
+          <p:nvPr/>
+        </p:nvSpPr>
+        <p:spPr>
+          <a:xfrm>
+            <a:off x="5601492" y="2119139"/>
+            <a:ext cx="3186113" cy="461665"/>
+          </a:xfrm>
+          <a:prstGeom prst="rect">
+            <a:avLst/>
+          </a:prstGeom>
+          <a:noFill/>
+        </p:spPr>
+        <p:txBody>
+          <a:bodyPr wrap="square" rtlCol="0">
+            <a:spAutoFit/>
+          </a:bodyPr>
+          <a:lstStyle/>
+          <a:p>
+            <a:r>
+              <a:rPr lang="en-US" sz="1200" dirty="0"/>
+              <a:t>Figure 2. Bray-Curtis </a:t>
+            </a:r>
+            <a:r>
+              <a:rPr lang="en-US" sz="1200" dirty="0" err="1"/>
+              <a:t>PCoA</a:t>
+            </a:r>
+            <a:r>
+              <a:rPr lang="en-US" sz="1200" dirty="0"/>
+              <a:t>, scaled by eigenvalues</a:t>
+            </a:r>
+          </a:p>
+        </p:txBody>
+      </p:sp>
+      <p:pic>
+        <p:nvPicPr>
+          <p:cNvPr id="11" name="Picture 10">
+            <a:extLst>
+              <a:ext uri="{FF2B5EF4-FFF2-40B4-BE49-F238E27FC236}">
+                <a16:creationId xmlns:a16="http://schemas.microsoft.com/office/drawing/2014/main" id="{D53BA01B-C6C8-F84B-A5B0-ED061449F88B}"/>
+              </a:ext>
+            </a:extLst>
+          </p:cNvPr>
+          <p:cNvPicPr>
+            <a:picLocks noChangeAspect="1"/>
+          </p:cNvPicPr>
+          <p:nvPr/>
+        </p:nvPicPr>
+        <p:blipFill rotWithShape="1">
+          <a:blip r:embed="rId6"/>
+          <a:srcRect t="29431" b="27144"/>
+          <a:stretch/>
+        </p:blipFill>
+        <p:spPr>
+          <a:xfrm>
+            <a:off x="5403849" y="2580804"/>
+            <a:ext cx="3595686" cy="1561456"/>
+          </a:xfrm>
+          <a:prstGeom prst="rect">
+            <a:avLst/>
+          </a:prstGeom>
+        </p:spPr>
+      </p:pic>
+      <p:sp>
+        <p:nvSpPr>
+          <p:cNvPr id="12" name="TextBox 11">
+            <a:extLst>
+              <a:ext uri="{FF2B5EF4-FFF2-40B4-BE49-F238E27FC236}">
+                <a16:creationId xmlns:a16="http://schemas.microsoft.com/office/drawing/2014/main" id="{EC2F6E76-C21B-6D41-B486-2F5A5733ECC2}"/>
+              </a:ext>
+            </a:extLst>
+          </p:cNvPr>
+          <p:cNvSpPr txBox="1"/>
+          <p:nvPr/>
+        </p:nvSpPr>
+        <p:spPr>
+          <a:xfrm>
+            <a:off x="5601491" y="3991743"/>
+            <a:ext cx="3186113" cy="461665"/>
+          </a:xfrm>
+          <a:prstGeom prst="rect">
+            <a:avLst/>
+          </a:prstGeom>
+          <a:noFill/>
+        </p:spPr>
+        <p:txBody>
+          <a:bodyPr wrap="square" rtlCol="0">
+            <a:spAutoFit/>
+          </a:bodyPr>
+          <a:lstStyle/>
+          <a:p>
+            <a:r>
+              <a:rPr lang="en-US" sz="1200" dirty="0"/>
+              <a:t>Figure 3. Unweighted </a:t>
+            </a:r>
+            <a:r>
+              <a:rPr lang="en-US" sz="1200" dirty="0" err="1"/>
+              <a:t>UniFrac</a:t>
+            </a:r>
+            <a:r>
+              <a:rPr lang="en-US" sz="1200" dirty="0"/>
+              <a:t> </a:t>
+            </a:r>
+            <a:r>
+              <a:rPr lang="en-US" sz="1200" dirty="0" err="1"/>
+              <a:t>PCoA</a:t>
+            </a:r>
+            <a:r>
+              <a:rPr lang="en-US" sz="1200" dirty="0"/>
+              <a:t>, scaled by eigenvalues</a:t>
+            </a:r>
+          </a:p>
+        </p:txBody>
+      </p:sp>
+      <p:sp>
+        <p:nvSpPr>
+          <p:cNvPr id="15" name="TextBox 14">
+            <a:extLst>
+              <a:ext uri="{FF2B5EF4-FFF2-40B4-BE49-F238E27FC236}">
+                <a16:creationId xmlns:a16="http://schemas.microsoft.com/office/drawing/2014/main" id="{EE7DA3E0-9D14-5346-9700-A4F5A9752CDE}"/>
+              </a:ext>
+            </a:extLst>
+          </p:cNvPr>
+          <p:cNvSpPr txBox="1"/>
+          <p:nvPr/>
+        </p:nvSpPr>
+        <p:spPr>
+          <a:xfrm>
+            <a:off x="5608635" y="5887218"/>
+            <a:ext cx="3186113" cy="461665"/>
+          </a:xfrm>
+          <a:prstGeom prst="rect">
+            <a:avLst/>
+          </a:prstGeom>
+          <a:noFill/>
+        </p:spPr>
+        <p:txBody>
+          <a:bodyPr wrap="square" rtlCol="0">
+            <a:spAutoFit/>
+          </a:bodyPr>
+          <a:lstStyle/>
+          <a:p>
+            <a:r>
+              <a:rPr lang="en-US" sz="1200" dirty="0"/>
+              <a:t>Figure 4. Weighted </a:t>
+            </a:r>
+            <a:r>
+              <a:rPr lang="en-US" sz="1200" dirty="0" err="1"/>
+              <a:t>UniFrac</a:t>
+            </a:r>
+            <a:r>
+              <a:rPr lang="en-US" sz="1200" dirty="0"/>
+              <a:t> </a:t>
+            </a:r>
+            <a:r>
+              <a:rPr lang="en-US" sz="1200" dirty="0" err="1"/>
+              <a:t>PCoA</a:t>
+            </a:r>
+            <a:r>
+              <a:rPr lang="en-US" sz="1200" dirty="0"/>
+              <a:t>, scaled by eigenvalues</a:t>
+            </a:r>
+          </a:p>
+        </p:txBody>
+      </p:sp>
+      <p:pic>
+        <p:nvPicPr>
+          <p:cNvPr id="17" name="Picture 16">
+            <a:extLst>
+              <a:ext uri="{FF2B5EF4-FFF2-40B4-BE49-F238E27FC236}">
+                <a16:creationId xmlns:a16="http://schemas.microsoft.com/office/drawing/2014/main" id="{77FEC430-17C9-E043-9A01-EE6414D35B23}"/>
+              </a:ext>
+            </a:extLst>
+          </p:cNvPr>
+          <p:cNvPicPr>
+            <a:picLocks noChangeAspect="1"/>
+          </p:cNvPicPr>
+          <p:nvPr/>
+        </p:nvPicPr>
+        <p:blipFill>
+          <a:blip r:embed="rId7"/>
+          <a:stretch>
+            <a:fillRect/>
+          </a:stretch>
+        </p:blipFill>
+        <p:spPr>
+          <a:xfrm>
+            <a:off x="276546" y="4142260"/>
+            <a:ext cx="2505077" cy="2505077"/>
+          </a:xfrm>
+          <a:prstGeom prst="rect">
+            <a:avLst/>
+          </a:prstGeom>
+        </p:spPr>
+      </p:pic>
+      <p:sp>
+        <p:nvSpPr>
+          <p:cNvPr id="18" name="TextBox 17">
+            <a:extLst>
+              <a:ext uri="{FF2B5EF4-FFF2-40B4-BE49-F238E27FC236}">
+                <a16:creationId xmlns:a16="http://schemas.microsoft.com/office/drawing/2014/main" id="{8D8C8CC9-C5AA-614B-94F8-5FB9AF3917AA}"/>
+              </a:ext>
+            </a:extLst>
+          </p:cNvPr>
+          <p:cNvSpPr txBox="1"/>
+          <p:nvPr/>
+        </p:nvSpPr>
+        <p:spPr>
+          <a:xfrm>
+            <a:off x="3057245" y="4743876"/>
+            <a:ext cx="1935166" cy="461665"/>
+          </a:xfrm>
+          <a:prstGeom prst="rect">
+            <a:avLst/>
+          </a:prstGeom>
+          <a:noFill/>
+        </p:spPr>
+        <p:txBody>
+          <a:bodyPr wrap="square" rtlCol="0">
+            <a:spAutoFit/>
+          </a:bodyPr>
+          <a:lstStyle/>
+          <a:p>
+            <a:r>
+              <a:rPr lang="en-US" sz="1200" dirty="0"/>
+              <a:t>Figure 5. Bray-Curtis NMDS plot</a:t>
+            </a:r>
           </a:p>
         </p:txBody>
       </p:sp>
@@ -23300,6 +24178,486 @@
           <p:cNvPr id="2" name="Title 1">
             <a:extLst>
               <a:ext uri="{FF2B5EF4-FFF2-40B4-BE49-F238E27FC236}">
+                <a16:creationId xmlns:a16="http://schemas.microsoft.com/office/drawing/2014/main" id="{D949B615-6302-3749-9C9D-450854A7B4FC}"/>
+              </a:ext>
+            </a:extLst>
+          </p:cNvPr>
+          <p:cNvSpPr>
+            <a:spLocks noGrp="1"/>
+          </p:cNvSpPr>
+          <p:nvPr>
+            <p:ph type="title"/>
+          </p:nvPr>
+        </p:nvSpPr>
+        <p:spPr/>
+        <p:txBody>
+          <a:bodyPr/>
+          <a:lstStyle/>
+          <a:p>
+            <a:r>
+              <a:rPr lang="en-US" dirty="0"/>
+              <a:t>Ordination</a:t>
+            </a:r>
+          </a:p>
+        </p:txBody>
+      </p:sp>
+      <p:pic>
+        <p:nvPicPr>
+          <p:cNvPr id="5" name="Picture 4">
+            <a:extLst>
+              <a:ext uri="{FF2B5EF4-FFF2-40B4-BE49-F238E27FC236}">
+                <a16:creationId xmlns:a16="http://schemas.microsoft.com/office/drawing/2014/main" id="{A581D335-DFFC-1143-BF29-2688477FDA3F}"/>
+              </a:ext>
+            </a:extLst>
+          </p:cNvPr>
+          <p:cNvPicPr>
+            <a:picLocks noChangeAspect="1"/>
+          </p:cNvPicPr>
+          <p:nvPr/>
+        </p:nvPicPr>
+        <p:blipFill>
+          <a:blip r:embed="rId3"/>
+          <a:stretch>
+            <a:fillRect/>
+          </a:stretch>
+        </p:blipFill>
+        <p:spPr>
+          <a:xfrm>
+            <a:off x="404808" y="1278734"/>
+            <a:ext cx="1800222" cy="1800222"/>
+          </a:xfrm>
+          <a:prstGeom prst="rect">
+            <a:avLst/>
+          </a:prstGeom>
+        </p:spPr>
+      </p:pic>
+      <p:sp>
+        <p:nvSpPr>
+          <p:cNvPr id="6" name="TextBox 5">
+            <a:extLst>
+              <a:ext uri="{FF2B5EF4-FFF2-40B4-BE49-F238E27FC236}">
+                <a16:creationId xmlns:a16="http://schemas.microsoft.com/office/drawing/2014/main" id="{268B9DD7-F3E0-2244-8A36-B5372EF07E88}"/>
+              </a:ext>
+            </a:extLst>
+          </p:cNvPr>
+          <p:cNvSpPr txBox="1"/>
+          <p:nvPr/>
+        </p:nvSpPr>
+        <p:spPr>
+          <a:xfrm>
+            <a:off x="2228846" y="1502300"/>
+            <a:ext cx="1414467" cy="1200329"/>
+          </a:xfrm>
+          <a:prstGeom prst="rect">
+            <a:avLst/>
+          </a:prstGeom>
+          <a:noFill/>
+        </p:spPr>
+        <p:txBody>
+          <a:bodyPr wrap="square" rtlCol="0">
+            <a:spAutoFit/>
+          </a:bodyPr>
+          <a:lstStyle/>
+          <a:p>
+            <a:r>
+              <a:rPr lang="en-US" sz="1200" dirty="0"/>
+              <a:t>Figure 6. Bar plot of Principal Component Analysis on Log-Ratio Transformed Data</a:t>
+            </a:r>
+          </a:p>
+        </p:txBody>
+      </p:sp>
+      <p:pic>
+        <p:nvPicPr>
+          <p:cNvPr id="8" name="Picture 7">
+            <a:extLst>
+              <a:ext uri="{FF2B5EF4-FFF2-40B4-BE49-F238E27FC236}">
+                <a16:creationId xmlns:a16="http://schemas.microsoft.com/office/drawing/2014/main" id="{964FDF21-A5BE-9341-8006-35983884743F}"/>
+              </a:ext>
+            </a:extLst>
+          </p:cNvPr>
+          <p:cNvPicPr>
+            <a:picLocks noChangeAspect="1"/>
+          </p:cNvPicPr>
+          <p:nvPr/>
+        </p:nvPicPr>
+        <p:blipFill>
+          <a:blip r:embed="rId4"/>
+          <a:stretch>
+            <a:fillRect/>
+          </a:stretch>
+        </p:blipFill>
+        <p:spPr>
+          <a:xfrm>
+            <a:off x="404808" y="2987677"/>
+            <a:ext cx="2009776" cy="2009776"/>
+          </a:xfrm>
+          <a:prstGeom prst="rect">
+            <a:avLst/>
+          </a:prstGeom>
+        </p:spPr>
+      </p:pic>
+      <p:sp>
+        <p:nvSpPr>
+          <p:cNvPr id="9" name="TextBox 8">
+            <a:extLst>
+              <a:ext uri="{FF2B5EF4-FFF2-40B4-BE49-F238E27FC236}">
+                <a16:creationId xmlns:a16="http://schemas.microsoft.com/office/drawing/2014/main" id="{D4162294-5278-9A49-89DF-B3EB29407B06}"/>
+              </a:ext>
+            </a:extLst>
+          </p:cNvPr>
+          <p:cNvSpPr txBox="1"/>
+          <p:nvPr/>
+        </p:nvSpPr>
+        <p:spPr>
+          <a:xfrm>
+            <a:off x="2333626" y="3399631"/>
+            <a:ext cx="1309687" cy="830997"/>
+          </a:xfrm>
+          <a:prstGeom prst="rect">
+            <a:avLst/>
+          </a:prstGeom>
+          <a:noFill/>
+        </p:spPr>
+        <p:txBody>
+          <a:bodyPr wrap="square" rtlCol="0">
+            <a:spAutoFit/>
+          </a:bodyPr>
+          <a:lstStyle/>
+          <a:p>
+            <a:r>
+              <a:rPr lang="en-US" sz="1200" dirty="0"/>
+              <a:t>Figure 7. Log-Ratio PCA ordination of 16S sequence data</a:t>
+            </a:r>
+          </a:p>
+        </p:txBody>
+      </p:sp>
+      <p:pic>
+        <p:nvPicPr>
+          <p:cNvPr id="11" name="Picture 10">
+            <a:extLst>
+              <a:ext uri="{FF2B5EF4-FFF2-40B4-BE49-F238E27FC236}">
+                <a16:creationId xmlns:a16="http://schemas.microsoft.com/office/drawing/2014/main" id="{4605CCF0-0A32-B349-AEBC-DB7EDA4D7984}"/>
+              </a:ext>
+            </a:extLst>
+          </p:cNvPr>
+          <p:cNvPicPr>
+            <a:picLocks noChangeAspect="1"/>
+          </p:cNvPicPr>
+          <p:nvPr/>
+        </p:nvPicPr>
+        <p:blipFill>
+          <a:blip r:embed="rId5"/>
+          <a:stretch>
+            <a:fillRect/>
+          </a:stretch>
+        </p:blipFill>
+        <p:spPr>
+          <a:xfrm>
+            <a:off x="3943350" y="434131"/>
+            <a:ext cx="1614488" cy="1614488"/>
+          </a:xfrm>
+          <a:prstGeom prst="rect">
+            <a:avLst/>
+          </a:prstGeom>
+        </p:spPr>
+      </p:pic>
+      <p:sp>
+        <p:nvSpPr>
+          <p:cNvPr id="12" name="TextBox 11">
+            <a:extLst>
+              <a:ext uri="{FF2B5EF4-FFF2-40B4-BE49-F238E27FC236}">
+                <a16:creationId xmlns:a16="http://schemas.microsoft.com/office/drawing/2014/main" id="{BA970433-457A-2646-90DA-835914F430E1}"/>
+              </a:ext>
+            </a:extLst>
+          </p:cNvPr>
+          <p:cNvSpPr txBox="1"/>
+          <p:nvPr/>
+        </p:nvSpPr>
+        <p:spPr>
+          <a:xfrm>
+            <a:off x="5876933" y="792209"/>
+            <a:ext cx="1281105" cy="830997"/>
+          </a:xfrm>
+          <a:prstGeom prst="rect">
+            <a:avLst/>
+          </a:prstGeom>
+          <a:noFill/>
+        </p:spPr>
+        <p:txBody>
+          <a:bodyPr wrap="square" rtlCol="0">
+            <a:spAutoFit/>
+          </a:bodyPr>
+          <a:lstStyle/>
+          <a:p>
+            <a:r>
+              <a:rPr lang="en-US" sz="1200" dirty="0"/>
+              <a:t>Figure 8. Log-Ratio </a:t>
+            </a:r>
+            <a:r>
+              <a:rPr lang="en-US" sz="1200" dirty="0" err="1"/>
+              <a:t>PCoA</a:t>
+            </a:r>
+            <a:r>
+              <a:rPr lang="en-US" sz="1200" dirty="0"/>
+              <a:t> </a:t>
+            </a:r>
+            <a:r>
+              <a:rPr lang="en-US" sz="1200" dirty="0" err="1"/>
+              <a:t>screenplot</a:t>
+            </a:r>
+            <a:r>
+              <a:rPr lang="en-US" sz="1200" dirty="0"/>
+              <a:t> using Jaccard variances</a:t>
+            </a:r>
+          </a:p>
+        </p:txBody>
+      </p:sp>
+      <p:pic>
+        <p:nvPicPr>
+          <p:cNvPr id="14" name="Picture 13">
+            <a:extLst>
+              <a:ext uri="{FF2B5EF4-FFF2-40B4-BE49-F238E27FC236}">
+                <a16:creationId xmlns:a16="http://schemas.microsoft.com/office/drawing/2014/main" id="{9FD4A4FA-ABC9-114E-9C37-FAFEEB008796}"/>
+              </a:ext>
+            </a:extLst>
+          </p:cNvPr>
+          <p:cNvPicPr>
+            <a:picLocks noChangeAspect="1"/>
+          </p:cNvPicPr>
+          <p:nvPr/>
+        </p:nvPicPr>
+        <p:blipFill>
+          <a:blip r:embed="rId6"/>
+          <a:stretch>
+            <a:fillRect/>
+          </a:stretch>
+        </p:blipFill>
+        <p:spPr>
+          <a:xfrm>
+            <a:off x="3943351" y="2178846"/>
+            <a:ext cx="1614488" cy="1614488"/>
+          </a:xfrm>
+          <a:prstGeom prst="rect">
+            <a:avLst/>
+          </a:prstGeom>
+        </p:spPr>
+      </p:pic>
+      <p:sp>
+        <p:nvSpPr>
+          <p:cNvPr id="15" name="TextBox 14">
+            <a:extLst>
+              <a:ext uri="{FF2B5EF4-FFF2-40B4-BE49-F238E27FC236}">
+                <a16:creationId xmlns:a16="http://schemas.microsoft.com/office/drawing/2014/main" id="{0ABFC3FC-2783-5547-B4E1-1560B5AAA389}"/>
+              </a:ext>
+            </a:extLst>
+          </p:cNvPr>
+          <p:cNvSpPr txBox="1"/>
+          <p:nvPr/>
+        </p:nvSpPr>
+        <p:spPr>
+          <a:xfrm>
+            <a:off x="5876935" y="2702629"/>
+            <a:ext cx="1419225" cy="830997"/>
+          </a:xfrm>
+          <a:prstGeom prst="rect">
+            <a:avLst/>
+          </a:prstGeom>
+          <a:noFill/>
+        </p:spPr>
+        <p:txBody>
+          <a:bodyPr wrap="square" rtlCol="0">
+            <a:spAutoFit/>
+          </a:bodyPr>
+          <a:lstStyle/>
+          <a:p>
+            <a:r>
+              <a:rPr lang="en-US" sz="1200" dirty="0"/>
+              <a:t>Figure 9. Log-Ratio </a:t>
+            </a:r>
+            <a:r>
+              <a:rPr lang="en-US" sz="1200" dirty="0" err="1"/>
+              <a:t>PCoA</a:t>
+            </a:r>
+            <a:r>
+              <a:rPr lang="en-US" sz="1200" dirty="0"/>
+              <a:t> </a:t>
+            </a:r>
+            <a:r>
+              <a:rPr lang="en-US" sz="1200" dirty="0" err="1"/>
+              <a:t>screenplot</a:t>
+            </a:r>
+            <a:r>
+              <a:rPr lang="en-US" sz="1200" dirty="0"/>
+              <a:t> using Euclidean variances</a:t>
+            </a:r>
+          </a:p>
+        </p:txBody>
+      </p:sp>
+      <p:pic>
+        <p:nvPicPr>
+          <p:cNvPr id="17" name="Picture 16">
+            <a:extLst>
+              <a:ext uri="{FF2B5EF4-FFF2-40B4-BE49-F238E27FC236}">
+                <a16:creationId xmlns:a16="http://schemas.microsoft.com/office/drawing/2014/main" id="{4D9C7E1B-89CB-B545-9585-D367C09BEF54}"/>
+              </a:ext>
+            </a:extLst>
+          </p:cNvPr>
+          <p:cNvPicPr>
+            <a:picLocks noChangeAspect="1"/>
+          </p:cNvPicPr>
+          <p:nvPr/>
+        </p:nvPicPr>
+        <p:blipFill>
+          <a:blip r:embed="rId7"/>
+          <a:stretch>
+            <a:fillRect/>
+          </a:stretch>
+        </p:blipFill>
+        <p:spPr>
+          <a:xfrm>
+            <a:off x="3943350" y="3992565"/>
+            <a:ext cx="1690688" cy="1690688"/>
+          </a:xfrm>
+          <a:prstGeom prst="rect">
+            <a:avLst/>
+          </a:prstGeom>
+        </p:spPr>
+      </p:pic>
+      <p:sp>
+        <p:nvSpPr>
+          <p:cNvPr id="18" name="TextBox 17">
+            <a:extLst>
+              <a:ext uri="{FF2B5EF4-FFF2-40B4-BE49-F238E27FC236}">
+                <a16:creationId xmlns:a16="http://schemas.microsoft.com/office/drawing/2014/main" id="{FD559CBB-9EEF-9E43-8A4C-650168FCAA36}"/>
+              </a:ext>
+            </a:extLst>
+          </p:cNvPr>
+          <p:cNvSpPr txBox="1"/>
+          <p:nvPr/>
+        </p:nvSpPr>
+        <p:spPr>
+          <a:xfrm>
+            <a:off x="3529023" y="5794379"/>
+            <a:ext cx="2600315" cy="276999"/>
+          </a:xfrm>
+          <a:prstGeom prst="rect">
+            <a:avLst/>
+          </a:prstGeom>
+          <a:noFill/>
+        </p:spPr>
+        <p:txBody>
+          <a:bodyPr wrap="square" rtlCol="0">
+            <a:spAutoFit/>
+          </a:bodyPr>
+          <a:lstStyle/>
+          <a:p>
+            <a:r>
+              <a:rPr lang="en-US" sz="1200" dirty="0"/>
+              <a:t>Figure 10. Euclidean NMDS plot</a:t>
+            </a:r>
+          </a:p>
+        </p:txBody>
+      </p:sp>
+      <p:pic>
+        <p:nvPicPr>
+          <p:cNvPr id="20" name="Picture 19">
+            <a:extLst>
+              <a:ext uri="{FF2B5EF4-FFF2-40B4-BE49-F238E27FC236}">
+                <a16:creationId xmlns:a16="http://schemas.microsoft.com/office/drawing/2014/main" id="{2E61C60F-7113-D34B-94CE-7E15E097A968}"/>
+              </a:ext>
+            </a:extLst>
+          </p:cNvPr>
+          <p:cNvPicPr>
+            <a:picLocks noChangeAspect="1"/>
+          </p:cNvPicPr>
+          <p:nvPr/>
+        </p:nvPicPr>
+        <p:blipFill>
+          <a:blip r:embed="rId8"/>
+          <a:stretch>
+            <a:fillRect/>
+          </a:stretch>
+        </p:blipFill>
+        <p:spPr>
+          <a:xfrm>
+            <a:off x="6273408" y="3913994"/>
+            <a:ext cx="1769259" cy="1769259"/>
+          </a:xfrm>
+          <a:prstGeom prst="rect">
+            <a:avLst/>
+          </a:prstGeom>
+        </p:spPr>
+      </p:pic>
+      <p:sp>
+        <p:nvSpPr>
+          <p:cNvPr id="21" name="TextBox 20">
+            <a:extLst>
+              <a:ext uri="{FF2B5EF4-FFF2-40B4-BE49-F238E27FC236}">
+                <a16:creationId xmlns:a16="http://schemas.microsoft.com/office/drawing/2014/main" id="{0E50DB5E-F8A6-D141-8857-79EDA9C03512}"/>
+              </a:ext>
+            </a:extLst>
+          </p:cNvPr>
+          <p:cNvSpPr txBox="1"/>
+          <p:nvPr/>
+        </p:nvSpPr>
+        <p:spPr>
+          <a:xfrm>
+            <a:off x="5881696" y="5786622"/>
+            <a:ext cx="2600315" cy="276999"/>
+          </a:xfrm>
+          <a:prstGeom prst="rect">
+            <a:avLst/>
+          </a:prstGeom>
+          <a:noFill/>
+        </p:spPr>
+        <p:txBody>
+          <a:bodyPr wrap="square" rtlCol="0">
+            <a:spAutoFit/>
+          </a:bodyPr>
+          <a:lstStyle/>
+          <a:p>
+            <a:r>
+              <a:rPr lang="en-US" sz="1200" dirty="0"/>
+              <a:t>Figure 11. Jaccard NMDS plot</a:t>
+            </a:r>
+          </a:p>
+        </p:txBody>
+      </p:sp>
+    </p:spTree>
+    <p:extLst>
+      <p:ext uri="{BB962C8B-B14F-4D97-AF65-F5344CB8AC3E}">
+        <p14:creationId xmlns:p14="http://schemas.microsoft.com/office/powerpoint/2010/main" val="1314241307"/>
+      </p:ext>
+    </p:extLst>
+  </p:cSld>
+  <p:clrMapOvr>
+    <a:masterClrMapping/>
+  </p:clrMapOvr>
+</p:sld>
+</file>
+
+<file path=ppt/slides/slide13.xml><?xml version="1.0" encoding="utf-8"?>
+<p:sld xmlns:a="http://schemas.openxmlformats.org/drawingml/2006/main" xmlns:r="http://schemas.openxmlformats.org/officeDocument/2006/relationships" xmlns:p="http://schemas.openxmlformats.org/presentationml/2006/main">
+  <p:cSld>
+    <p:spTree>
+      <p:nvGrpSpPr>
+        <p:cNvPr id="1" name=""/>
+        <p:cNvGrpSpPr/>
+        <p:nvPr/>
+      </p:nvGrpSpPr>
+      <p:grpSpPr>
+        <a:xfrm>
+          <a:off x="0" y="0"/>
+          <a:ext cx="0" cy="0"/>
+          <a:chOff x="0" y="0"/>
+          <a:chExt cx="0" cy="0"/>
+        </a:xfrm>
+      </p:grpSpPr>
+      <p:sp>
+        <p:nvSpPr>
+          <p:cNvPr id="2" name="Title 1">
+            <a:extLst>
+              <a:ext uri="{FF2B5EF4-FFF2-40B4-BE49-F238E27FC236}">
                 <a16:creationId xmlns:a16="http://schemas.microsoft.com/office/drawing/2014/main" id="{FD545D3B-A455-EF48-91C3-A3250798EA64}"/>
               </a:ext>
             </a:extLst>
@@ -23355,6 +24713,34 @@
               <a:t>Shannon Diversity</a:t>
             </a:r>
           </a:p>
+          <a:p>
+            <a:r>
+              <a:rPr lang="en-US" dirty="0"/>
+              <a:t>Simpsons Diversity</a:t>
+            </a:r>
+          </a:p>
+          <a:p>
+            <a:r>
+              <a:rPr lang="en-US" dirty="0"/>
+              <a:t>Inverted Simpsons Diversity</a:t>
+            </a:r>
+          </a:p>
+          <a:p>
+            <a:r>
+              <a:rPr lang="en-US" dirty="0" err="1"/>
+              <a:t>Pilou</a:t>
+            </a:r>
+            <a:r>
+              <a:rPr lang="en-US" dirty="0"/>
+              <a:t> Evenness</a:t>
+            </a:r>
+          </a:p>
+          <a:p>
+            <a:r>
+              <a:rPr lang="en-US" dirty="0"/>
+              <a:t>Faith’s PD</a:t>
+            </a:r>
+          </a:p>
         </p:txBody>
       </p:sp>
     </p:spTree>
@@ -23370,7 +24756,7 @@
 </p:sld>
 </file>
 
-<file path=ppt/slides/slide13.xml><?xml version="1.0" encoding="utf-8"?>
+<file path=ppt/slides/slide14.xml><?xml version="1.0" encoding="utf-8"?>
 <p:sld xmlns:a="http://schemas.openxmlformats.org/drawingml/2006/main" xmlns:r="http://schemas.openxmlformats.org/officeDocument/2006/relationships" xmlns:p="http://schemas.openxmlformats.org/presentationml/2006/main">
   <p:cSld>
     <p:spTree>
@@ -23464,7 +24850,542 @@
 </p:sld>
 </file>
 
-<file path=ppt/slides/slide14.xml><?xml version="1.0" encoding="utf-8"?>
+<file path=ppt/slides/slide15.xml><?xml version="1.0" encoding="utf-8"?>
+<p:sld xmlns:a="http://schemas.openxmlformats.org/drawingml/2006/main" xmlns:r="http://schemas.openxmlformats.org/officeDocument/2006/relationships" xmlns:p="http://schemas.openxmlformats.org/presentationml/2006/main">
+  <p:cSld>
+    <p:spTree>
+      <p:nvGrpSpPr>
+        <p:cNvPr id="1" name=""/>
+        <p:cNvGrpSpPr/>
+        <p:nvPr/>
+      </p:nvGrpSpPr>
+      <p:grpSpPr>
+        <a:xfrm>
+          <a:off x="0" y="0"/>
+          <a:ext cx="0" cy="0"/>
+          <a:chOff x="0" y="0"/>
+          <a:chExt cx="0" cy="0"/>
+        </a:xfrm>
+      </p:grpSpPr>
+      <p:sp>
+        <p:nvSpPr>
+          <p:cNvPr id="2" name="Title 1">
+            <a:extLst>
+              <a:ext uri="{FF2B5EF4-FFF2-40B4-BE49-F238E27FC236}">
+                <a16:creationId xmlns:a16="http://schemas.microsoft.com/office/drawing/2014/main" id="{326B15C2-352D-7244-8523-A17BAA6CB11A}"/>
+              </a:ext>
+            </a:extLst>
+          </p:cNvPr>
+          <p:cNvSpPr>
+            <a:spLocks noGrp="1"/>
+          </p:cNvSpPr>
+          <p:nvPr>
+            <p:ph type="title"/>
+          </p:nvPr>
+        </p:nvSpPr>
+        <p:spPr/>
+        <p:txBody>
+          <a:bodyPr/>
+          <a:lstStyle/>
+          <a:p>
+            <a:r>
+              <a:rPr lang="en-US" dirty="0"/>
+              <a:t>General Statistics: ANOVA of linear models</a:t>
+            </a:r>
+          </a:p>
+        </p:txBody>
+      </p:sp>
+      <p:pic>
+        <p:nvPicPr>
+          <p:cNvPr id="7" name="Picture 6">
+            <a:extLst>
+              <a:ext uri="{FF2B5EF4-FFF2-40B4-BE49-F238E27FC236}">
+                <a16:creationId xmlns:a16="http://schemas.microsoft.com/office/drawing/2014/main" id="{C390D8F2-FE6B-9D47-9E22-2349F978CFF2}"/>
+              </a:ext>
+            </a:extLst>
+          </p:cNvPr>
+          <p:cNvPicPr>
+            <a:picLocks noChangeAspect="1"/>
+          </p:cNvPicPr>
+          <p:nvPr/>
+        </p:nvPicPr>
+        <p:blipFill>
+          <a:blip r:embed="rId3"/>
+          <a:stretch>
+            <a:fillRect/>
+          </a:stretch>
+        </p:blipFill>
+        <p:spPr>
+          <a:xfrm>
+            <a:off x="9553800" y="1743519"/>
+            <a:ext cx="1800000" cy="1800000"/>
+          </a:xfrm>
+          <a:prstGeom prst="rect">
+            <a:avLst/>
+          </a:prstGeom>
+        </p:spPr>
+      </p:pic>
+      <p:pic>
+        <p:nvPicPr>
+          <p:cNvPr id="9" name="Picture 8">
+            <a:extLst>
+              <a:ext uri="{FF2B5EF4-FFF2-40B4-BE49-F238E27FC236}">
+                <a16:creationId xmlns:a16="http://schemas.microsoft.com/office/drawing/2014/main" id="{4FF54945-6BCE-4E47-BF8A-AF25A8E40D90}"/>
+              </a:ext>
+            </a:extLst>
+          </p:cNvPr>
+          <p:cNvPicPr>
+            <a:picLocks noChangeAspect="1"/>
+          </p:cNvPicPr>
+          <p:nvPr/>
+        </p:nvPicPr>
+        <p:blipFill>
+          <a:blip r:embed="rId4"/>
+          <a:stretch>
+            <a:fillRect/>
+          </a:stretch>
+        </p:blipFill>
+        <p:spPr>
+          <a:xfrm>
+            <a:off x="7403583" y="1774451"/>
+            <a:ext cx="1800000" cy="1800000"/>
+          </a:xfrm>
+          <a:prstGeom prst="rect">
+            <a:avLst/>
+          </a:prstGeom>
+        </p:spPr>
+      </p:pic>
+      <p:pic>
+        <p:nvPicPr>
+          <p:cNvPr id="11" name="Picture 10">
+            <a:extLst>
+              <a:ext uri="{FF2B5EF4-FFF2-40B4-BE49-F238E27FC236}">
+                <a16:creationId xmlns:a16="http://schemas.microsoft.com/office/drawing/2014/main" id="{6527A7FD-FEEC-2D42-8379-AF823768FF64}"/>
+              </a:ext>
+            </a:extLst>
+          </p:cNvPr>
+          <p:cNvPicPr>
+            <a:picLocks noChangeAspect="1"/>
+          </p:cNvPicPr>
+          <p:nvPr/>
+        </p:nvPicPr>
+        <p:blipFill>
+          <a:blip r:embed="rId5"/>
+          <a:stretch>
+            <a:fillRect/>
+          </a:stretch>
+        </p:blipFill>
+        <p:spPr>
+          <a:xfrm>
+            <a:off x="3007238" y="1796761"/>
+            <a:ext cx="1800000" cy="1800000"/>
+          </a:xfrm>
+          <a:prstGeom prst="rect">
+            <a:avLst/>
+          </a:prstGeom>
+        </p:spPr>
+      </p:pic>
+      <p:pic>
+        <p:nvPicPr>
+          <p:cNvPr id="13" name="Picture 12">
+            <a:extLst>
+              <a:ext uri="{FF2B5EF4-FFF2-40B4-BE49-F238E27FC236}">
+                <a16:creationId xmlns:a16="http://schemas.microsoft.com/office/drawing/2014/main" id="{756C24B0-18AF-804C-9C45-0B501074A7DC}"/>
+              </a:ext>
+            </a:extLst>
+          </p:cNvPr>
+          <p:cNvPicPr>
+            <a:picLocks noChangeAspect="1"/>
+          </p:cNvPicPr>
+          <p:nvPr/>
+        </p:nvPicPr>
+        <p:blipFill>
+          <a:blip r:embed="rId6"/>
+          <a:stretch>
+            <a:fillRect/>
+          </a:stretch>
+        </p:blipFill>
+        <p:spPr>
+          <a:xfrm>
+            <a:off x="5196000" y="1761726"/>
+            <a:ext cx="1800000" cy="1800000"/>
+          </a:xfrm>
+          <a:prstGeom prst="rect">
+            <a:avLst/>
+          </a:prstGeom>
+        </p:spPr>
+      </p:pic>
+      <p:pic>
+        <p:nvPicPr>
+          <p:cNvPr id="15" name="Picture 14">
+            <a:extLst>
+              <a:ext uri="{FF2B5EF4-FFF2-40B4-BE49-F238E27FC236}">
+                <a16:creationId xmlns:a16="http://schemas.microsoft.com/office/drawing/2014/main" id="{77B286B0-164B-BB4E-9DF8-4A9DDFBDF723}"/>
+              </a:ext>
+            </a:extLst>
+          </p:cNvPr>
+          <p:cNvPicPr>
+            <a:picLocks noChangeAspect="1"/>
+          </p:cNvPicPr>
+          <p:nvPr/>
+        </p:nvPicPr>
+        <p:blipFill>
+          <a:blip r:embed="rId7"/>
+          <a:stretch>
+            <a:fillRect/>
+          </a:stretch>
+        </p:blipFill>
+        <p:spPr>
+          <a:xfrm>
+            <a:off x="838200" y="1796761"/>
+            <a:ext cx="1800000" cy="1800000"/>
+          </a:xfrm>
+          <a:prstGeom prst="rect">
+            <a:avLst/>
+          </a:prstGeom>
+        </p:spPr>
+      </p:pic>
+      <p:pic>
+        <p:nvPicPr>
+          <p:cNvPr id="17" name="Picture 16">
+            <a:extLst>
+              <a:ext uri="{FF2B5EF4-FFF2-40B4-BE49-F238E27FC236}">
+                <a16:creationId xmlns:a16="http://schemas.microsoft.com/office/drawing/2014/main" id="{38C7DD22-EC25-1044-853A-C17F7F38BD4E}"/>
+              </a:ext>
+            </a:extLst>
+          </p:cNvPr>
+          <p:cNvPicPr>
+            <a:picLocks noChangeAspect="1"/>
+          </p:cNvPicPr>
+          <p:nvPr/>
+        </p:nvPicPr>
+        <p:blipFill>
+          <a:blip r:embed="rId8"/>
+          <a:stretch>
+            <a:fillRect/>
+          </a:stretch>
+        </p:blipFill>
+        <p:spPr>
+          <a:xfrm>
+            <a:off x="9553800" y="4330044"/>
+            <a:ext cx="1800000" cy="1800000"/>
+          </a:xfrm>
+          <a:prstGeom prst="rect">
+            <a:avLst/>
+          </a:prstGeom>
+        </p:spPr>
+      </p:pic>
+      <p:pic>
+        <p:nvPicPr>
+          <p:cNvPr id="21" name="Picture 20">
+            <a:extLst>
+              <a:ext uri="{FF2B5EF4-FFF2-40B4-BE49-F238E27FC236}">
+                <a16:creationId xmlns:a16="http://schemas.microsoft.com/office/drawing/2014/main" id="{C39A86B3-C4B8-B64A-B7D9-5030E34D4D4A}"/>
+              </a:ext>
+            </a:extLst>
+          </p:cNvPr>
+          <p:cNvPicPr>
+            <a:picLocks noChangeAspect="1"/>
+          </p:cNvPicPr>
+          <p:nvPr/>
+        </p:nvPicPr>
+        <p:blipFill>
+          <a:blip r:embed="rId9"/>
+          <a:stretch>
+            <a:fillRect/>
+          </a:stretch>
+        </p:blipFill>
+        <p:spPr>
+          <a:xfrm>
+            <a:off x="5196000" y="4330044"/>
+            <a:ext cx="1800000" cy="1800000"/>
+          </a:xfrm>
+          <a:prstGeom prst="rect">
+            <a:avLst/>
+          </a:prstGeom>
+        </p:spPr>
+      </p:pic>
+      <p:pic>
+        <p:nvPicPr>
+          <p:cNvPr id="25" name="Picture 24">
+            <a:extLst>
+              <a:ext uri="{FF2B5EF4-FFF2-40B4-BE49-F238E27FC236}">
+                <a16:creationId xmlns:a16="http://schemas.microsoft.com/office/drawing/2014/main" id="{0BFB303C-02A5-B544-B34B-A6F36B3801DF}"/>
+              </a:ext>
+            </a:extLst>
+          </p:cNvPr>
+          <p:cNvPicPr>
+            <a:picLocks noChangeAspect="1"/>
+          </p:cNvPicPr>
+          <p:nvPr/>
+        </p:nvPicPr>
+        <p:blipFill>
+          <a:blip r:embed="rId10"/>
+          <a:stretch>
+            <a:fillRect/>
+          </a:stretch>
+        </p:blipFill>
+        <p:spPr>
+          <a:xfrm>
+            <a:off x="7238274" y="4330044"/>
+            <a:ext cx="1800000" cy="1800000"/>
+          </a:xfrm>
+          <a:prstGeom prst="rect">
+            <a:avLst/>
+          </a:prstGeom>
+        </p:spPr>
+      </p:pic>
+      <p:pic>
+        <p:nvPicPr>
+          <p:cNvPr id="29" name="Picture 28">
+            <a:extLst>
+              <a:ext uri="{FF2B5EF4-FFF2-40B4-BE49-F238E27FC236}">
+                <a16:creationId xmlns:a16="http://schemas.microsoft.com/office/drawing/2014/main" id="{8AC5CD21-BF3C-D64F-AE15-E1717AD46B46}"/>
+              </a:ext>
+            </a:extLst>
+          </p:cNvPr>
+          <p:cNvPicPr>
+            <a:picLocks noChangeAspect="1"/>
+          </p:cNvPicPr>
+          <p:nvPr/>
+        </p:nvPicPr>
+        <p:blipFill>
+          <a:blip r:embed="rId11"/>
+          <a:stretch>
+            <a:fillRect/>
+          </a:stretch>
+        </p:blipFill>
+        <p:spPr>
+          <a:xfrm>
+            <a:off x="761111" y="4330044"/>
+            <a:ext cx="1800000" cy="1800000"/>
+          </a:xfrm>
+          <a:prstGeom prst="rect">
+            <a:avLst/>
+          </a:prstGeom>
+        </p:spPr>
+      </p:pic>
+      <p:pic>
+        <p:nvPicPr>
+          <p:cNvPr id="33" name="Picture 32">
+            <a:extLst>
+              <a:ext uri="{FF2B5EF4-FFF2-40B4-BE49-F238E27FC236}">
+                <a16:creationId xmlns:a16="http://schemas.microsoft.com/office/drawing/2014/main" id="{2AAC71C9-1DDD-D346-9BC4-A459C98EE3EA}"/>
+              </a:ext>
+            </a:extLst>
+          </p:cNvPr>
+          <p:cNvPicPr>
+            <a:picLocks noChangeAspect="1"/>
+          </p:cNvPicPr>
+          <p:nvPr/>
+        </p:nvPicPr>
+        <p:blipFill>
+          <a:blip r:embed="rId12"/>
+          <a:stretch>
+            <a:fillRect/>
+          </a:stretch>
+        </p:blipFill>
+        <p:spPr>
+          <a:xfrm>
+            <a:off x="2961739" y="4330044"/>
+            <a:ext cx="1800000" cy="1800000"/>
+          </a:xfrm>
+          <a:prstGeom prst="rect">
+            <a:avLst/>
+          </a:prstGeom>
+        </p:spPr>
+      </p:pic>
+      <p:sp>
+        <p:nvSpPr>
+          <p:cNvPr id="34" name="TextBox 33">
+            <a:extLst>
+              <a:ext uri="{FF2B5EF4-FFF2-40B4-BE49-F238E27FC236}">
+                <a16:creationId xmlns:a16="http://schemas.microsoft.com/office/drawing/2014/main" id="{EFB48590-676E-D24C-9954-B8281B91DEAF}"/>
+              </a:ext>
+            </a:extLst>
+          </p:cNvPr>
+          <p:cNvSpPr txBox="1"/>
+          <p:nvPr/>
+        </p:nvSpPr>
+        <p:spPr>
+          <a:xfrm>
+            <a:off x="761111" y="3605383"/>
+            <a:ext cx="10592689" cy="646331"/>
+          </a:xfrm>
+          <a:prstGeom prst="rect">
+            <a:avLst/>
+          </a:prstGeom>
+          <a:noFill/>
+        </p:spPr>
+        <p:txBody>
+          <a:bodyPr wrap="square" rtlCol="0">
+            <a:spAutoFit/>
+          </a:bodyPr>
+          <a:lstStyle/>
+          <a:p>
+            <a:r>
+              <a:rPr lang="en-US" dirty="0"/>
+              <a:t>Figures 12-16: Boxplots showing medians, 25</a:t>
+            </a:r>
+            <a:r>
+              <a:rPr lang="en-US" baseline="30000" dirty="0"/>
+              <a:t>th</a:t>
+            </a:r>
+            <a:r>
+              <a:rPr lang="en-US" dirty="0"/>
+              <a:t>, 75th percentiles and outlying data points for ASV richness, hole area, hole depth, chlorophyll and DNA content, between the two glaciers</a:t>
+            </a:r>
+          </a:p>
+        </p:txBody>
+      </p:sp>
+      <p:sp>
+        <p:nvSpPr>
+          <p:cNvPr id="35" name="TextBox 34">
+            <a:extLst>
+              <a:ext uri="{FF2B5EF4-FFF2-40B4-BE49-F238E27FC236}">
+                <a16:creationId xmlns:a16="http://schemas.microsoft.com/office/drawing/2014/main" id="{AC8322CB-50FC-D04E-80D9-08868385A3B5}"/>
+              </a:ext>
+            </a:extLst>
+          </p:cNvPr>
+          <p:cNvSpPr txBox="1"/>
+          <p:nvPr/>
+        </p:nvSpPr>
+        <p:spPr>
+          <a:xfrm>
+            <a:off x="799655" y="6155450"/>
+            <a:ext cx="10592689" cy="646331"/>
+          </a:xfrm>
+          <a:prstGeom prst="rect">
+            <a:avLst/>
+          </a:prstGeom>
+          <a:noFill/>
+        </p:spPr>
+        <p:txBody>
+          <a:bodyPr wrap="square" rtlCol="0">
+            <a:spAutoFit/>
+          </a:bodyPr>
+          <a:lstStyle/>
+          <a:p>
+            <a:r>
+              <a:rPr lang="en-US" dirty="0"/>
+              <a:t>Figures 17-21: Boxplots showing medians, 25</a:t>
+            </a:r>
+            <a:r>
+              <a:rPr lang="en-US" baseline="30000" dirty="0"/>
+              <a:t>th</a:t>
+            </a:r>
+            <a:r>
+              <a:rPr lang="en-US" dirty="0"/>
+              <a:t>, 75th percentiles and outlying data points for Shannon, Simpson, Inverse Simpson Diversity, </a:t>
+            </a:r>
+            <a:r>
+              <a:rPr lang="en-US" dirty="0" err="1"/>
+              <a:t>Pilou</a:t>
+            </a:r>
+            <a:r>
+              <a:rPr lang="en-US" dirty="0"/>
+              <a:t> Evenness and Faith’s PD, between the two glaciers</a:t>
+            </a:r>
+          </a:p>
+        </p:txBody>
+      </p:sp>
+    </p:spTree>
+    <p:extLst>
+      <p:ext uri="{BB962C8B-B14F-4D97-AF65-F5344CB8AC3E}">
+        <p14:creationId xmlns:p14="http://schemas.microsoft.com/office/powerpoint/2010/main" val="847913219"/>
+      </p:ext>
+    </p:extLst>
+  </p:cSld>
+  <p:clrMapOvr>
+    <a:masterClrMapping/>
+  </p:clrMapOvr>
+</p:sld>
+</file>
+
+<file path=ppt/slides/slide16.xml><?xml version="1.0" encoding="utf-8"?>
+<p:sld xmlns:a="http://schemas.openxmlformats.org/drawingml/2006/main" xmlns:r="http://schemas.openxmlformats.org/officeDocument/2006/relationships" xmlns:p="http://schemas.openxmlformats.org/presentationml/2006/main">
+  <p:cSld>
+    <p:spTree>
+      <p:nvGrpSpPr>
+        <p:cNvPr id="1" name=""/>
+        <p:cNvGrpSpPr/>
+        <p:nvPr/>
+      </p:nvGrpSpPr>
+      <p:grpSpPr>
+        <a:xfrm>
+          <a:off x="0" y="0"/>
+          <a:ext cx="0" cy="0"/>
+          <a:chOff x="0" y="0"/>
+          <a:chExt cx="0" cy="0"/>
+        </a:xfrm>
+      </p:grpSpPr>
+      <p:sp>
+        <p:nvSpPr>
+          <p:cNvPr id="2" name="Title 1">
+            <a:extLst>
+              <a:ext uri="{FF2B5EF4-FFF2-40B4-BE49-F238E27FC236}">
+                <a16:creationId xmlns:a16="http://schemas.microsoft.com/office/drawing/2014/main" id="{59ABD80F-EB70-6C4E-8A1D-52448A861CC4}"/>
+              </a:ext>
+            </a:extLst>
+          </p:cNvPr>
+          <p:cNvSpPr>
+            <a:spLocks noGrp="1"/>
+          </p:cNvSpPr>
+          <p:nvPr>
+            <p:ph type="title"/>
+          </p:nvPr>
+        </p:nvSpPr>
+        <p:spPr/>
+        <p:txBody>
+          <a:bodyPr/>
+          <a:lstStyle/>
+          <a:p>
+            <a:r>
+              <a:rPr lang="en-US" dirty="0"/>
+              <a:t>General Statistics: Linear Regression Analysis</a:t>
+            </a:r>
+          </a:p>
+        </p:txBody>
+      </p:sp>
+      <p:sp>
+        <p:nvSpPr>
+          <p:cNvPr id="3" name="Content Placeholder 2">
+            <a:extLst>
+              <a:ext uri="{FF2B5EF4-FFF2-40B4-BE49-F238E27FC236}">
+                <a16:creationId xmlns:a16="http://schemas.microsoft.com/office/drawing/2014/main" id="{734B7B04-01BB-5A49-B86B-6A4F674D3E63}"/>
+              </a:ext>
+            </a:extLst>
+          </p:cNvPr>
+          <p:cNvSpPr>
+            <a:spLocks noGrp="1"/>
+          </p:cNvSpPr>
+          <p:nvPr>
+            <p:ph idx="1"/>
+          </p:nvPr>
+        </p:nvSpPr>
+        <p:spPr/>
+        <p:txBody>
+          <a:bodyPr/>
+          <a:lstStyle/>
+          <a:p>
+            <a:endParaRPr lang="en-US" dirty="0"/>
+          </a:p>
+        </p:txBody>
+      </p:sp>
+    </p:spTree>
+    <p:extLst>
+      <p:ext uri="{BB962C8B-B14F-4D97-AF65-F5344CB8AC3E}">
+        <p14:creationId xmlns:p14="http://schemas.microsoft.com/office/powerpoint/2010/main" val="3654280662"/>
+      </p:ext>
+    </p:extLst>
+  </p:cSld>
+  <p:clrMapOvr>
+    <a:masterClrMapping/>
+  </p:clrMapOvr>
+</p:sld>
+</file>
+
+<file path=ppt/slides/slide17.xml><?xml version="1.0" encoding="utf-8"?>
 <p:sld xmlns:a="http://schemas.openxmlformats.org/drawingml/2006/main" xmlns:r="http://schemas.openxmlformats.org/officeDocument/2006/relationships" xmlns:p="http://schemas.openxmlformats.org/presentationml/2006/main">
   <p:cSld>
     <p:spTree>
@@ -23565,7 +25486,7 @@
 </p:sld>
 </file>
 
-<file path=ppt/slides/slide15.xml><?xml version="1.0" encoding="utf-8"?>
+<file path=ppt/slides/slide18.xml><?xml version="1.0" encoding="utf-8"?>
 <p:sld xmlns:a="http://schemas.openxmlformats.org/drawingml/2006/main" xmlns:r="http://schemas.openxmlformats.org/officeDocument/2006/relationships" xmlns:p="http://schemas.openxmlformats.org/presentationml/2006/main">
   <p:cSld>
     <p:spTree>
@@ -23648,7 +25569,7 @@
 </p:sld>
 </file>
 
-<file path=ppt/slides/slide16.xml><?xml version="1.0" encoding="utf-8"?>
+<file path=ppt/slides/slide19.xml><?xml version="1.0" encoding="utf-8"?>
 <p:sld xmlns:a="http://schemas.openxmlformats.org/drawingml/2006/main" xmlns:r="http://schemas.openxmlformats.org/officeDocument/2006/relationships" xmlns:p="http://schemas.openxmlformats.org/presentationml/2006/main">
   <p:cSld>
     <p:spTree>
@@ -23722,282 +25643,6 @@
     <p:extLst>
       <p:ext uri="{BB962C8B-B14F-4D97-AF65-F5344CB8AC3E}">
         <p14:creationId xmlns:p14="http://schemas.microsoft.com/office/powerpoint/2010/main" val="3103124144"/>
-      </p:ext>
-    </p:extLst>
-  </p:cSld>
-  <p:clrMapOvr>
-    <a:masterClrMapping/>
-  </p:clrMapOvr>
-</p:sld>
-</file>
-
-<file path=ppt/slides/slide17.xml><?xml version="1.0" encoding="utf-8"?>
-<p:sld xmlns:a="http://schemas.openxmlformats.org/drawingml/2006/main" xmlns:r="http://schemas.openxmlformats.org/officeDocument/2006/relationships" xmlns:p="http://schemas.openxmlformats.org/presentationml/2006/main">
-  <p:cSld>
-    <p:spTree>
-      <p:nvGrpSpPr>
-        <p:cNvPr id="1" name=""/>
-        <p:cNvGrpSpPr/>
-        <p:nvPr/>
-      </p:nvGrpSpPr>
-      <p:grpSpPr>
-        <a:xfrm>
-          <a:off x="0" y="0"/>
-          <a:ext cx="0" cy="0"/>
-          <a:chOff x="0" y="0"/>
-          <a:chExt cx="0" cy="0"/>
-        </a:xfrm>
-      </p:grpSpPr>
-      <p:sp>
-        <p:nvSpPr>
-          <p:cNvPr id="2" name="Title 1">
-            <a:extLst>
-              <a:ext uri="{FF2B5EF4-FFF2-40B4-BE49-F238E27FC236}">
-                <a16:creationId xmlns:a16="http://schemas.microsoft.com/office/drawing/2014/main" id="{E31E3458-3266-244D-BCB1-9A7BADC0BE83}"/>
-              </a:ext>
-            </a:extLst>
-          </p:cNvPr>
-          <p:cNvSpPr>
-            <a:spLocks noGrp="1"/>
-          </p:cNvSpPr>
-          <p:nvPr>
-            <p:ph type="title"/>
-          </p:nvPr>
-        </p:nvSpPr>
-        <p:spPr/>
-        <p:txBody>
-          <a:bodyPr/>
-          <a:lstStyle/>
-          <a:p>
-            <a:r>
-              <a:rPr lang="en-US" dirty="0"/>
-              <a:t>Community Assembly Processes</a:t>
-            </a:r>
-          </a:p>
-        </p:txBody>
-      </p:sp>
-      <p:sp>
-        <p:nvSpPr>
-          <p:cNvPr id="3" name="Content Placeholder 2">
-            <a:extLst>
-              <a:ext uri="{FF2B5EF4-FFF2-40B4-BE49-F238E27FC236}">
-                <a16:creationId xmlns:a16="http://schemas.microsoft.com/office/drawing/2014/main" id="{F90D7D02-C8D3-3346-98EA-A1F2BC2048E4}"/>
-              </a:ext>
-            </a:extLst>
-          </p:cNvPr>
-          <p:cNvSpPr>
-            <a:spLocks noGrp="1"/>
-          </p:cNvSpPr>
-          <p:nvPr>
-            <p:ph idx="1"/>
-          </p:nvPr>
-        </p:nvSpPr>
-        <p:spPr/>
-        <p:txBody>
-          <a:bodyPr/>
-          <a:lstStyle/>
-          <a:p>
-            <a:r>
-              <a:rPr lang="en-US" dirty="0"/>
-              <a:t>Variable selection</a:t>
-            </a:r>
-          </a:p>
-          <a:p>
-            <a:r>
-              <a:rPr lang="en-US" dirty="0"/>
-              <a:t>Homogenizing selection</a:t>
-            </a:r>
-          </a:p>
-          <a:p>
-            <a:r>
-              <a:rPr lang="en-US" dirty="0"/>
-              <a:t>Dispersal limitation</a:t>
-            </a:r>
-          </a:p>
-          <a:p>
-            <a:r>
-              <a:rPr lang="en-US" dirty="0"/>
-              <a:t>Homogenizing dispersal</a:t>
-            </a:r>
-          </a:p>
-          <a:p>
-            <a:r>
-              <a:rPr lang="en-US" dirty="0"/>
-              <a:t>Ecological drift</a:t>
-            </a:r>
-          </a:p>
-        </p:txBody>
-      </p:sp>
-    </p:spTree>
-    <p:extLst>
-      <p:ext uri="{BB962C8B-B14F-4D97-AF65-F5344CB8AC3E}">
-        <p14:creationId xmlns:p14="http://schemas.microsoft.com/office/powerpoint/2010/main" val="56936835"/>
-      </p:ext>
-    </p:extLst>
-  </p:cSld>
-  <p:clrMapOvr>
-    <a:masterClrMapping/>
-  </p:clrMapOvr>
-</p:sld>
-</file>
-
-<file path=ppt/slides/slide18.xml><?xml version="1.0" encoding="utf-8"?>
-<p:sld xmlns:a="http://schemas.openxmlformats.org/drawingml/2006/main" xmlns:r="http://schemas.openxmlformats.org/officeDocument/2006/relationships" xmlns:p="http://schemas.openxmlformats.org/presentationml/2006/main">
-  <p:cSld>
-    <p:spTree>
-      <p:nvGrpSpPr>
-        <p:cNvPr id="1" name=""/>
-        <p:cNvGrpSpPr/>
-        <p:nvPr/>
-      </p:nvGrpSpPr>
-      <p:grpSpPr>
-        <a:xfrm>
-          <a:off x="0" y="0"/>
-          <a:ext cx="0" cy="0"/>
-          <a:chOff x="0" y="0"/>
-          <a:chExt cx="0" cy="0"/>
-        </a:xfrm>
-      </p:grpSpPr>
-      <p:sp>
-        <p:nvSpPr>
-          <p:cNvPr id="2" name="Title 1">
-            <a:extLst>
-              <a:ext uri="{FF2B5EF4-FFF2-40B4-BE49-F238E27FC236}">
-                <a16:creationId xmlns:a16="http://schemas.microsoft.com/office/drawing/2014/main" id="{B1F26D42-074B-1E4B-A777-A7DC340A8715}"/>
-              </a:ext>
-            </a:extLst>
-          </p:cNvPr>
-          <p:cNvSpPr>
-            <a:spLocks noGrp="1"/>
-          </p:cNvSpPr>
-          <p:nvPr>
-            <p:ph type="title"/>
-          </p:nvPr>
-        </p:nvSpPr>
-        <p:spPr/>
-        <p:txBody>
-          <a:bodyPr/>
-          <a:lstStyle/>
-          <a:p>
-            <a:r>
-              <a:rPr lang="en-US" dirty="0"/>
-              <a:t>Evolutionary Diversification</a:t>
-            </a:r>
-          </a:p>
-        </p:txBody>
-      </p:sp>
-      <p:sp>
-        <p:nvSpPr>
-          <p:cNvPr id="3" name="Content Placeholder 2">
-            <a:extLst>
-              <a:ext uri="{FF2B5EF4-FFF2-40B4-BE49-F238E27FC236}">
-                <a16:creationId xmlns:a16="http://schemas.microsoft.com/office/drawing/2014/main" id="{1CA944D9-62DB-F04F-A3DA-3DD8B531DB20}"/>
-              </a:ext>
-            </a:extLst>
-          </p:cNvPr>
-          <p:cNvSpPr>
-            <a:spLocks noGrp="1"/>
-          </p:cNvSpPr>
-          <p:nvPr>
-            <p:ph idx="1"/>
-          </p:nvPr>
-        </p:nvSpPr>
-        <p:spPr/>
-        <p:txBody>
-          <a:bodyPr/>
-          <a:lstStyle/>
-          <a:p>
-            <a:endParaRPr lang="en-US" dirty="0"/>
-          </a:p>
-        </p:txBody>
-      </p:sp>
-    </p:spTree>
-    <p:extLst>
-      <p:ext uri="{BB962C8B-B14F-4D97-AF65-F5344CB8AC3E}">
-        <p14:creationId xmlns:p14="http://schemas.microsoft.com/office/powerpoint/2010/main" val="3982018106"/>
-      </p:ext>
-    </p:extLst>
-  </p:cSld>
-  <p:clrMapOvr>
-    <a:masterClrMapping/>
-  </p:clrMapOvr>
-</p:sld>
-</file>
-
-<file path=ppt/slides/slide19.xml><?xml version="1.0" encoding="utf-8"?>
-<p:sld xmlns:a="http://schemas.openxmlformats.org/drawingml/2006/main" xmlns:r="http://schemas.openxmlformats.org/officeDocument/2006/relationships" xmlns:p="http://schemas.openxmlformats.org/presentationml/2006/main">
-  <p:cSld>
-    <p:spTree>
-      <p:nvGrpSpPr>
-        <p:cNvPr id="1" name=""/>
-        <p:cNvGrpSpPr/>
-        <p:nvPr/>
-      </p:nvGrpSpPr>
-      <p:grpSpPr>
-        <a:xfrm>
-          <a:off x="0" y="0"/>
-          <a:ext cx="0" cy="0"/>
-          <a:chOff x="0" y="0"/>
-          <a:chExt cx="0" cy="0"/>
-        </a:xfrm>
-      </p:grpSpPr>
-      <p:sp>
-        <p:nvSpPr>
-          <p:cNvPr id="2" name="Title 1">
-            <a:extLst>
-              <a:ext uri="{FF2B5EF4-FFF2-40B4-BE49-F238E27FC236}">
-                <a16:creationId xmlns:a16="http://schemas.microsoft.com/office/drawing/2014/main" id="{68ABA72A-65D0-264A-81C1-22BB6ED24C60}"/>
-              </a:ext>
-            </a:extLst>
-          </p:cNvPr>
-          <p:cNvSpPr>
-            <a:spLocks noGrp="1"/>
-          </p:cNvSpPr>
-          <p:nvPr>
-            <p:ph type="title"/>
-          </p:nvPr>
-        </p:nvSpPr>
-        <p:spPr/>
-        <p:txBody>
-          <a:bodyPr/>
-          <a:lstStyle/>
-          <a:p>
-            <a:r>
-              <a:rPr lang="en-US" dirty="0"/>
-              <a:t>Phylogenetic Null Model</a:t>
-            </a:r>
-          </a:p>
-        </p:txBody>
-      </p:sp>
-      <p:sp>
-        <p:nvSpPr>
-          <p:cNvPr id="3" name="Content Placeholder 2">
-            <a:extLst>
-              <a:ext uri="{FF2B5EF4-FFF2-40B4-BE49-F238E27FC236}">
-                <a16:creationId xmlns:a16="http://schemas.microsoft.com/office/drawing/2014/main" id="{5BADFAAF-DC9F-AC4F-9CCF-4761A7AC07DE}"/>
-              </a:ext>
-            </a:extLst>
-          </p:cNvPr>
-          <p:cNvSpPr>
-            <a:spLocks noGrp="1"/>
-          </p:cNvSpPr>
-          <p:nvPr>
-            <p:ph idx="1"/>
-          </p:nvPr>
-        </p:nvSpPr>
-        <p:spPr/>
-        <p:txBody>
-          <a:bodyPr/>
-          <a:lstStyle/>
-          <a:p>
-            <a:endParaRPr lang="en-US"/>
-          </a:p>
-        </p:txBody>
-      </p:sp>
-    </p:spTree>
-    <p:extLst>
-      <p:ext uri="{BB962C8B-B14F-4D97-AF65-F5344CB8AC3E}">
-        <p14:creationId xmlns:p14="http://schemas.microsoft.com/office/powerpoint/2010/main" val="2838930548"/>
       </p:ext>
     </p:extLst>
   </p:cSld>
@@ -25317,6 +26962,282 @@
           <p:cNvPr id="2" name="Title 1">
             <a:extLst>
               <a:ext uri="{FF2B5EF4-FFF2-40B4-BE49-F238E27FC236}">
+                <a16:creationId xmlns:a16="http://schemas.microsoft.com/office/drawing/2014/main" id="{E31E3458-3266-244D-BCB1-9A7BADC0BE83}"/>
+              </a:ext>
+            </a:extLst>
+          </p:cNvPr>
+          <p:cNvSpPr>
+            <a:spLocks noGrp="1"/>
+          </p:cNvSpPr>
+          <p:nvPr>
+            <p:ph type="title"/>
+          </p:nvPr>
+        </p:nvSpPr>
+        <p:spPr/>
+        <p:txBody>
+          <a:bodyPr/>
+          <a:lstStyle/>
+          <a:p>
+            <a:r>
+              <a:rPr lang="en-US" dirty="0"/>
+              <a:t>Community Assembly Processes</a:t>
+            </a:r>
+          </a:p>
+        </p:txBody>
+      </p:sp>
+      <p:sp>
+        <p:nvSpPr>
+          <p:cNvPr id="3" name="Content Placeholder 2">
+            <a:extLst>
+              <a:ext uri="{FF2B5EF4-FFF2-40B4-BE49-F238E27FC236}">
+                <a16:creationId xmlns:a16="http://schemas.microsoft.com/office/drawing/2014/main" id="{F90D7D02-C8D3-3346-98EA-A1F2BC2048E4}"/>
+              </a:ext>
+            </a:extLst>
+          </p:cNvPr>
+          <p:cNvSpPr>
+            <a:spLocks noGrp="1"/>
+          </p:cNvSpPr>
+          <p:nvPr>
+            <p:ph idx="1"/>
+          </p:nvPr>
+        </p:nvSpPr>
+        <p:spPr/>
+        <p:txBody>
+          <a:bodyPr/>
+          <a:lstStyle/>
+          <a:p>
+            <a:r>
+              <a:rPr lang="en-US" dirty="0"/>
+              <a:t>Variable selection</a:t>
+            </a:r>
+          </a:p>
+          <a:p>
+            <a:r>
+              <a:rPr lang="en-US" dirty="0"/>
+              <a:t>Homogenizing selection</a:t>
+            </a:r>
+          </a:p>
+          <a:p>
+            <a:r>
+              <a:rPr lang="en-US" dirty="0"/>
+              <a:t>Dispersal limitation</a:t>
+            </a:r>
+          </a:p>
+          <a:p>
+            <a:r>
+              <a:rPr lang="en-US" dirty="0"/>
+              <a:t>Homogenizing dispersal</a:t>
+            </a:r>
+          </a:p>
+          <a:p>
+            <a:r>
+              <a:rPr lang="en-US" dirty="0"/>
+              <a:t>Ecological drift</a:t>
+            </a:r>
+          </a:p>
+        </p:txBody>
+      </p:sp>
+    </p:spTree>
+    <p:extLst>
+      <p:ext uri="{BB962C8B-B14F-4D97-AF65-F5344CB8AC3E}">
+        <p14:creationId xmlns:p14="http://schemas.microsoft.com/office/powerpoint/2010/main" val="56936835"/>
+      </p:ext>
+    </p:extLst>
+  </p:cSld>
+  <p:clrMapOvr>
+    <a:masterClrMapping/>
+  </p:clrMapOvr>
+</p:sld>
+</file>
+
+<file path=ppt/slides/slide21.xml><?xml version="1.0" encoding="utf-8"?>
+<p:sld xmlns:a="http://schemas.openxmlformats.org/drawingml/2006/main" xmlns:r="http://schemas.openxmlformats.org/officeDocument/2006/relationships" xmlns:p="http://schemas.openxmlformats.org/presentationml/2006/main">
+  <p:cSld>
+    <p:spTree>
+      <p:nvGrpSpPr>
+        <p:cNvPr id="1" name=""/>
+        <p:cNvGrpSpPr/>
+        <p:nvPr/>
+      </p:nvGrpSpPr>
+      <p:grpSpPr>
+        <a:xfrm>
+          <a:off x="0" y="0"/>
+          <a:ext cx="0" cy="0"/>
+          <a:chOff x="0" y="0"/>
+          <a:chExt cx="0" cy="0"/>
+        </a:xfrm>
+      </p:grpSpPr>
+      <p:sp>
+        <p:nvSpPr>
+          <p:cNvPr id="2" name="Title 1">
+            <a:extLst>
+              <a:ext uri="{FF2B5EF4-FFF2-40B4-BE49-F238E27FC236}">
+                <a16:creationId xmlns:a16="http://schemas.microsoft.com/office/drawing/2014/main" id="{B1F26D42-074B-1E4B-A777-A7DC340A8715}"/>
+              </a:ext>
+            </a:extLst>
+          </p:cNvPr>
+          <p:cNvSpPr>
+            <a:spLocks noGrp="1"/>
+          </p:cNvSpPr>
+          <p:nvPr>
+            <p:ph type="title"/>
+          </p:nvPr>
+        </p:nvSpPr>
+        <p:spPr/>
+        <p:txBody>
+          <a:bodyPr/>
+          <a:lstStyle/>
+          <a:p>
+            <a:r>
+              <a:rPr lang="en-US" dirty="0"/>
+              <a:t>Evolutionary Diversification</a:t>
+            </a:r>
+          </a:p>
+        </p:txBody>
+      </p:sp>
+      <p:sp>
+        <p:nvSpPr>
+          <p:cNvPr id="3" name="Content Placeholder 2">
+            <a:extLst>
+              <a:ext uri="{FF2B5EF4-FFF2-40B4-BE49-F238E27FC236}">
+                <a16:creationId xmlns:a16="http://schemas.microsoft.com/office/drawing/2014/main" id="{1CA944D9-62DB-F04F-A3DA-3DD8B531DB20}"/>
+              </a:ext>
+            </a:extLst>
+          </p:cNvPr>
+          <p:cNvSpPr>
+            <a:spLocks noGrp="1"/>
+          </p:cNvSpPr>
+          <p:nvPr>
+            <p:ph idx="1"/>
+          </p:nvPr>
+        </p:nvSpPr>
+        <p:spPr/>
+        <p:txBody>
+          <a:bodyPr/>
+          <a:lstStyle/>
+          <a:p>
+            <a:endParaRPr lang="en-US" dirty="0"/>
+          </a:p>
+        </p:txBody>
+      </p:sp>
+    </p:spTree>
+    <p:extLst>
+      <p:ext uri="{BB962C8B-B14F-4D97-AF65-F5344CB8AC3E}">
+        <p14:creationId xmlns:p14="http://schemas.microsoft.com/office/powerpoint/2010/main" val="3982018106"/>
+      </p:ext>
+    </p:extLst>
+  </p:cSld>
+  <p:clrMapOvr>
+    <a:masterClrMapping/>
+  </p:clrMapOvr>
+</p:sld>
+</file>
+
+<file path=ppt/slides/slide22.xml><?xml version="1.0" encoding="utf-8"?>
+<p:sld xmlns:a="http://schemas.openxmlformats.org/drawingml/2006/main" xmlns:r="http://schemas.openxmlformats.org/officeDocument/2006/relationships" xmlns:p="http://schemas.openxmlformats.org/presentationml/2006/main">
+  <p:cSld>
+    <p:spTree>
+      <p:nvGrpSpPr>
+        <p:cNvPr id="1" name=""/>
+        <p:cNvGrpSpPr/>
+        <p:nvPr/>
+      </p:nvGrpSpPr>
+      <p:grpSpPr>
+        <a:xfrm>
+          <a:off x="0" y="0"/>
+          <a:ext cx="0" cy="0"/>
+          <a:chOff x="0" y="0"/>
+          <a:chExt cx="0" cy="0"/>
+        </a:xfrm>
+      </p:grpSpPr>
+      <p:sp>
+        <p:nvSpPr>
+          <p:cNvPr id="2" name="Title 1">
+            <a:extLst>
+              <a:ext uri="{FF2B5EF4-FFF2-40B4-BE49-F238E27FC236}">
+                <a16:creationId xmlns:a16="http://schemas.microsoft.com/office/drawing/2014/main" id="{68ABA72A-65D0-264A-81C1-22BB6ED24C60}"/>
+              </a:ext>
+            </a:extLst>
+          </p:cNvPr>
+          <p:cNvSpPr>
+            <a:spLocks noGrp="1"/>
+          </p:cNvSpPr>
+          <p:nvPr>
+            <p:ph type="title"/>
+          </p:nvPr>
+        </p:nvSpPr>
+        <p:spPr/>
+        <p:txBody>
+          <a:bodyPr/>
+          <a:lstStyle/>
+          <a:p>
+            <a:r>
+              <a:rPr lang="en-US" dirty="0"/>
+              <a:t>Phylogenetic Null Model</a:t>
+            </a:r>
+          </a:p>
+        </p:txBody>
+      </p:sp>
+      <p:sp>
+        <p:nvSpPr>
+          <p:cNvPr id="3" name="Content Placeholder 2">
+            <a:extLst>
+              <a:ext uri="{FF2B5EF4-FFF2-40B4-BE49-F238E27FC236}">
+                <a16:creationId xmlns:a16="http://schemas.microsoft.com/office/drawing/2014/main" id="{5BADFAAF-DC9F-AC4F-9CCF-4761A7AC07DE}"/>
+              </a:ext>
+            </a:extLst>
+          </p:cNvPr>
+          <p:cNvSpPr>
+            <a:spLocks noGrp="1"/>
+          </p:cNvSpPr>
+          <p:nvPr>
+            <p:ph idx="1"/>
+          </p:nvPr>
+        </p:nvSpPr>
+        <p:spPr/>
+        <p:txBody>
+          <a:bodyPr/>
+          <a:lstStyle/>
+          <a:p>
+            <a:endParaRPr lang="en-US"/>
+          </a:p>
+        </p:txBody>
+      </p:sp>
+    </p:spTree>
+    <p:extLst>
+      <p:ext uri="{BB962C8B-B14F-4D97-AF65-F5344CB8AC3E}">
+        <p14:creationId xmlns:p14="http://schemas.microsoft.com/office/powerpoint/2010/main" val="2838930548"/>
+      </p:ext>
+    </p:extLst>
+  </p:cSld>
+  <p:clrMapOvr>
+    <a:masterClrMapping/>
+  </p:clrMapOvr>
+</p:sld>
+</file>
+
+<file path=ppt/slides/slide23.xml><?xml version="1.0" encoding="utf-8"?>
+<p:sld xmlns:a="http://schemas.openxmlformats.org/drawingml/2006/main" xmlns:r="http://schemas.openxmlformats.org/officeDocument/2006/relationships" xmlns:p="http://schemas.openxmlformats.org/presentationml/2006/main">
+  <p:cSld>
+    <p:spTree>
+      <p:nvGrpSpPr>
+        <p:cNvPr id="1" name=""/>
+        <p:cNvGrpSpPr/>
+        <p:nvPr/>
+      </p:nvGrpSpPr>
+      <p:grpSpPr>
+        <a:xfrm>
+          <a:off x="0" y="0"/>
+          <a:ext cx="0" cy="0"/>
+          <a:chOff x="0" y="0"/>
+          <a:chExt cx="0" cy="0"/>
+        </a:xfrm>
+      </p:grpSpPr>
+      <p:sp>
+        <p:nvSpPr>
+          <p:cNvPr id="2" name="Title 1">
+            <a:extLst>
+              <a:ext uri="{FF2B5EF4-FFF2-40B4-BE49-F238E27FC236}">
                 <a16:creationId xmlns:a16="http://schemas.microsoft.com/office/drawing/2014/main" id="{2EC15911-3E3A-2D42-812C-A002F73441A0}"/>
               </a:ext>
             </a:extLst>
@@ -25382,7 +27303,7 @@
 </p:sld>
 </file>
 
-<file path=ppt/slides/slide21.xml><?xml version="1.0" encoding="utf-8"?>
+<file path=ppt/slides/slide24.xml><?xml version="1.0" encoding="utf-8"?>
 <p:sld xmlns:a="http://schemas.openxmlformats.org/drawingml/2006/main" xmlns:r="http://schemas.openxmlformats.org/officeDocument/2006/relationships" xmlns:p="http://schemas.openxmlformats.org/presentationml/2006/main">
   <p:cSld>
     <p:spTree>
@@ -25469,7 +27390,7 @@
 </p:sld>
 </file>
 
-<file path=ppt/slides/slide22.xml><?xml version="1.0" encoding="utf-8"?>
+<file path=ppt/slides/slide25.xml><?xml version="1.0" encoding="utf-8"?>
 <p:sld xmlns:a="http://schemas.openxmlformats.org/drawingml/2006/main" xmlns:r="http://schemas.openxmlformats.org/officeDocument/2006/relationships" xmlns:p="http://schemas.openxmlformats.org/presentationml/2006/main">
   <p:cSld>
     <p:spTree>
@@ -26540,7 +28461,7 @@
 </p:sld>
 </file>
 
-<file path=ppt/slides/slide23.xml><?xml version="1.0" encoding="utf-8"?>
+<file path=ppt/slides/slide26.xml><?xml version="1.0" encoding="utf-8"?>
 <p:sld xmlns:a="http://schemas.openxmlformats.org/drawingml/2006/main" xmlns:r="http://schemas.openxmlformats.org/officeDocument/2006/relationships" xmlns:p="http://schemas.openxmlformats.org/presentationml/2006/main">
   <p:cSld>
     <p:spTree>
@@ -26891,7 +28812,7 @@
 </p:sld>
 </file>
 
-<file path=ppt/slides/slide24.xml><?xml version="1.0" encoding="utf-8"?>
+<file path=ppt/slides/slide27.xml><?xml version="1.0" encoding="utf-8"?>
 <p:sld xmlns:a="http://schemas.openxmlformats.org/drawingml/2006/main" xmlns:r="http://schemas.openxmlformats.org/officeDocument/2006/relationships" xmlns:p="http://schemas.openxmlformats.org/presentationml/2006/main">
   <p:cSld>
     <p:spTree>
@@ -26979,7 +28900,7 @@
 </p:sld>
 </file>
 
-<file path=ppt/slides/slide25.xml><?xml version="1.0" encoding="utf-8"?>
+<file path=ppt/slides/slide28.xml><?xml version="1.0" encoding="utf-8"?>
 <p:sld xmlns:a="http://schemas.openxmlformats.org/drawingml/2006/main" xmlns:r="http://schemas.openxmlformats.org/officeDocument/2006/relationships" xmlns:p="http://schemas.openxmlformats.org/presentationml/2006/main">
   <p:cSld>
     <p:spTree>
@@ -27694,14 +29615,14 @@
           <p:nvPr>
             <p:extLst>
               <p:ext uri="{D42A27DB-BD31-4B8C-83A1-F6EECF244321}">
-                <p14:modId xmlns:p14="http://schemas.microsoft.com/office/powerpoint/2010/main" val="1972040180"/>
+                <p14:modId xmlns:p14="http://schemas.microsoft.com/office/powerpoint/2010/main" val="1176625177"/>
               </p:ext>
             </p:extLst>
           </p:nvPr>
         </p:nvGraphicFramePr>
         <p:xfrm>
           <a:off x="496700" y="1449387"/>
-          <a:ext cx="11403106" cy="5259294"/>
+          <a:ext cx="11404800" cy="5259294"/>
         </p:xfrm>
         <a:graphic>
           <a:graphicData uri="http://schemas.openxmlformats.org/drawingml/2006/diagram">

--- a/Projects/Chapter1/community-assembly.pptx
+++ b/Projects/Chapter1/community-assembly.pptx
@@ -5,7 +5,7 @@
     <p:sldMasterId id="2147483648" r:id="rId1"/>
   </p:sldMasterIdLst>
   <p:notesMasterIdLst>
-    <p:notesMasterId r:id="rId33"/>
+    <p:notesMasterId r:id="rId35"/>
   </p:notesMasterIdLst>
   <p:sldIdLst>
     <p:sldId id="256" r:id="rId2"/>
@@ -39,6 +39,8 @@
     <p:sldId id="265" r:id="rId30"/>
     <p:sldId id="260" r:id="rId31"/>
     <p:sldId id="262" r:id="rId32"/>
+    <p:sldId id="294" r:id="rId33"/>
+    <p:sldId id="295" r:id="rId34"/>
   </p:sldIdLst>
   <p:sldSz cx="12192000" cy="6858000"/>
   <p:notesSz cx="6858000" cy="9144000"/>
@@ -25813,6 +25815,29 @@
               <a:t>Because we want to understand the evolutionary and ecological mechanisms that govern microbial community composition at local scales, thus shaping large scale patterns of microbial biogeography. Community composition affects community function with profound impacts on the wider ecosystem functioning and biodiversity.  </a:t>
             </a:r>
           </a:p>
+          <a:p>
+            <a:endParaRPr lang="en-US" dirty="0"/>
+          </a:p>
+          <a:p>
+            <a:r>
+              <a:rPr lang="en-US" dirty="0"/>
+              <a:t>This study aims to develop an in-depth understanding of cryoconite community interactions and assembly processes. Particular questions of interest include:</a:t>
+            </a:r>
+          </a:p>
+          <a:p>
+            <a:r>
+              <a:rPr lang="en-US" dirty="0"/>
+              <a:t>(</a:t>
+            </a:r>
+            <a:r>
+              <a:rPr lang="en-US" dirty="0" err="1"/>
+              <a:t>i</a:t>
+            </a:r>
+            <a:r>
+              <a:rPr lang="en-US" dirty="0"/>
+              <a:t>) Do cryoconite community exhibit nonrandom co-occurrence patterns?</a:t>
+            </a:r>
+          </a:p>
         </p:txBody>
       </p:sp>
       <p:sp>
@@ -27306,6 +27331,376 @@
     <p:extLst>
       <p:ext uri="{BB962C8B-B14F-4D97-AF65-F5344CB8AC3E}">
         <p14:creationId xmlns:p14="http://schemas.microsoft.com/office/powerpoint/2010/main" val="3990178089"/>
+      </p:ext>
+    </p:extLst>
+  </p:cSld>
+  <p:clrMapOvr>
+    <a:masterClrMapping/>
+  </p:clrMapOvr>
+</p:notes>
+</file>
+
+<file path=ppt/notesSlides/notesSlide20.xml><?xml version="1.0" encoding="utf-8"?>
+<p:notes xmlns:a="http://schemas.openxmlformats.org/drawingml/2006/main" xmlns:r="http://schemas.openxmlformats.org/officeDocument/2006/relationships" xmlns:p="http://schemas.openxmlformats.org/presentationml/2006/main">
+  <p:cSld>
+    <p:spTree>
+      <p:nvGrpSpPr>
+        <p:cNvPr id="1" name=""/>
+        <p:cNvGrpSpPr/>
+        <p:nvPr/>
+      </p:nvGrpSpPr>
+      <p:grpSpPr>
+        <a:xfrm>
+          <a:off x="0" y="0"/>
+          <a:ext cx="0" cy="0"/>
+          <a:chOff x="0" y="0"/>
+          <a:chExt cx="0" cy="0"/>
+        </a:xfrm>
+      </p:grpSpPr>
+      <p:sp>
+        <p:nvSpPr>
+          <p:cNvPr id="2" name="Slide Image Placeholder 1"/>
+          <p:cNvSpPr>
+            <a:spLocks noGrp="1" noRot="1" noChangeAspect="1"/>
+          </p:cNvSpPr>
+          <p:nvPr>
+            <p:ph type="sldImg"/>
+          </p:nvPr>
+        </p:nvSpPr>
+        <p:spPr/>
+      </p:sp>
+      <p:sp>
+        <p:nvSpPr>
+          <p:cNvPr id="3" name="Notes Placeholder 2"/>
+          <p:cNvSpPr>
+            <a:spLocks noGrp="1"/>
+          </p:cNvSpPr>
+          <p:nvPr>
+            <p:ph type="body" idx="1"/>
+          </p:nvPr>
+        </p:nvSpPr>
+        <p:spPr/>
+        <p:txBody>
+          <a:bodyPr/>
+          <a:lstStyle/>
+          <a:p>
+            <a:r>
+              <a:rPr lang="en-US" dirty="0"/>
+              <a:t>Whilst multivariate analysis can assist us in investigating abiotic selection, microbial community assembly is also shaped by biotic selection. </a:t>
+            </a:r>
+          </a:p>
+          <a:p>
+            <a:endParaRPr lang="en-US" dirty="0"/>
+          </a:p>
+          <a:p>
+            <a:r>
+              <a:rPr lang="en-US" dirty="0"/>
+              <a:t>Biotic interactions may include top-down control through viral lysis and grazing, as well as microbe-microbe interactions.</a:t>
+            </a:r>
+          </a:p>
+          <a:p>
+            <a:endParaRPr lang="en-US" dirty="0"/>
+          </a:p>
+          <a:p>
+            <a:r>
+              <a:rPr lang="en-US" dirty="0"/>
+              <a:t>Due to technological restrictions, investigations of microbe-microbe interactions have typically been limited. With access to high-throughout sequencing, we can now construct co-occurrence networks in an attempt to decipher intra- and inter-specific interactions within communities.</a:t>
+            </a:r>
+          </a:p>
+          <a:p>
+            <a:endParaRPr lang="en-US" dirty="0"/>
+          </a:p>
+          <a:p>
+            <a:r>
+              <a:rPr lang="en-US" dirty="0"/>
+              <a:t>Previous research has indicated that microbial communities exhibit non-random co-occurrence patterns and module structures, suggesting that biotic selection plays a strong role in shaping community assembly.</a:t>
+            </a:r>
+          </a:p>
+          <a:p>
+            <a:endParaRPr lang="en-US" dirty="0"/>
+          </a:p>
+          <a:p>
+            <a:r>
+              <a:rPr lang="en-US" dirty="0"/>
+              <a:t>Communities may even </a:t>
+            </a:r>
+            <a:r>
+              <a:rPr lang="en-US" dirty="0" err="1"/>
+              <a:t>centre</a:t>
+            </a:r>
+            <a:r>
+              <a:rPr lang="en-US" dirty="0"/>
+              <a:t> around keystone species, that maintain the functioning of the community as a whole. </a:t>
+            </a:r>
+          </a:p>
+        </p:txBody>
+      </p:sp>
+      <p:sp>
+        <p:nvSpPr>
+          <p:cNvPr id="4" name="Slide Number Placeholder 3"/>
+          <p:cNvSpPr>
+            <a:spLocks noGrp="1"/>
+          </p:cNvSpPr>
+          <p:nvPr>
+            <p:ph type="sldNum" sz="quarter" idx="5"/>
+          </p:nvPr>
+        </p:nvSpPr>
+        <p:spPr/>
+        <p:txBody>
+          <a:bodyPr/>
+          <a:lstStyle/>
+          <a:p>
+            <a:fld id="{91AE2140-D502-214A-B76B-E0784B2C949B}" type="slidenum">
+              <a:rPr lang="en-US" smtClean="0"/>
+              <a:t>31</a:t>
+            </a:fld>
+            <a:endParaRPr lang="en-US"/>
+          </a:p>
+        </p:txBody>
+      </p:sp>
+    </p:spTree>
+    <p:extLst>
+      <p:ext uri="{BB962C8B-B14F-4D97-AF65-F5344CB8AC3E}">
+        <p14:creationId xmlns:p14="http://schemas.microsoft.com/office/powerpoint/2010/main" val="2107534487"/>
+      </p:ext>
+    </p:extLst>
+  </p:cSld>
+  <p:clrMapOvr>
+    <a:masterClrMapping/>
+  </p:clrMapOvr>
+</p:notes>
+</file>
+
+<file path=ppt/notesSlides/notesSlide21.xml><?xml version="1.0" encoding="utf-8"?>
+<p:notes xmlns:a="http://schemas.openxmlformats.org/drawingml/2006/main" xmlns:r="http://schemas.openxmlformats.org/officeDocument/2006/relationships" xmlns:p="http://schemas.openxmlformats.org/presentationml/2006/main">
+  <p:cSld>
+    <p:spTree>
+      <p:nvGrpSpPr>
+        <p:cNvPr id="1" name=""/>
+        <p:cNvGrpSpPr/>
+        <p:nvPr/>
+      </p:nvGrpSpPr>
+      <p:grpSpPr>
+        <a:xfrm>
+          <a:off x="0" y="0"/>
+          <a:ext cx="0" cy="0"/>
+          <a:chOff x="0" y="0"/>
+          <a:chExt cx="0" cy="0"/>
+        </a:xfrm>
+      </p:grpSpPr>
+      <p:sp>
+        <p:nvSpPr>
+          <p:cNvPr id="2" name="Slide Image Placeholder 1"/>
+          <p:cNvSpPr>
+            <a:spLocks noGrp="1" noRot="1" noChangeAspect="1"/>
+          </p:cNvSpPr>
+          <p:nvPr>
+            <p:ph type="sldImg"/>
+          </p:nvPr>
+        </p:nvSpPr>
+        <p:spPr/>
+      </p:sp>
+      <p:sp>
+        <p:nvSpPr>
+          <p:cNvPr id="3" name="Notes Placeholder 2"/>
+          <p:cNvSpPr>
+            <a:spLocks noGrp="1"/>
+          </p:cNvSpPr>
+          <p:nvPr>
+            <p:ph type="body" idx="1"/>
+          </p:nvPr>
+        </p:nvSpPr>
+        <p:spPr/>
+        <p:txBody>
+          <a:bodyPr/>
+          <a:lstStyle/>
+          <a:p>
+            <a:r>
+              <a:rPr lang="en-US" dirty="0"/>
+              <a:t>Centrality – how close is a node to the network as a whole </a:t>
+            </a:r>
+          </a:p>
+          <a:p>
+            <a:pPr marL="0" marR="0" lvl="0" indent="0" algn="l" defTabSz="914400" rtl="0" eaLnBrk="1" fontAlgn="auto" latinLnBrk="0" hangingPunct="1">
+              <a:lnSpc>
+                <a:spcPct val="100000"/>
+              </a:lnSpc>
+              <a:spcBef>
+                <a:spcPts val="0"/>
+              </a:spcBef>
+              <a:spcAft>
+                <a:spcPts val="0"/>
+              </a:spcAft>
+              <a:buClrTx/>
+              <a:buSzTx/>
+              <a:buFontTx/>
+              <a:buNone/>
+              <a:tabLst/>
+              <a:defRPr/>
+            </a:pPr>
+            <a:r>
+              <a:rPr lang="en-US" dirty="0"/>
+              <a:t>Degree Centrality – number of links connected to a node (who has the most friends?)</a:t>
+            </a:r>
+          </a:p>
+          <a:p>
+            <a:r>
+              <a:rPr lang="en-US" dirty="0"/>
+              <a:t>Closeness Centrality -  average length of the shortest path between the node and all other nodes in the graph (how long does it take me on average to reach another node)</a:t>
+            </a:r>
+          </a:p>
+          <a:p>
+            <a:r>
+              <a:rPr lang="en-US" dirty="0"/>
+              <a:t>Betweenness Centrality – the number of times a node is crossed by each of the shortest routes between nodes (between any two nodes there is a shortest distance to travel. How many shortest distances is the node of interest within?)</a:t>
+            </a:r>
+          </a:p>
+          <a:p>
+            <a:endParaRPr lang="en-US" dirty="0"/>
+          </a:p>
+          <a:p>
+            <a:r>
+              <a:rPr lang="en-US" dirty="0"/>
+              <a:t>Clustering</a:t>
+            </a:r>
+          </a:p>
+          <a:p>
+            <a:r>
+              <a:rPr lang="en-US" dirty="0"/>
+              <a:t>What groups are within the network?</a:t>
+            </a:r>
+          </a:p>
+          <a:p>
+            <a:r>
+              <a:rPr lang="en-US" dirty="0"/>
+              <a:t>Clustering coefficient – how many connections are there to other nodes, compared to the POTENTIAL number of connections to other nodes within the group?</a:t>
+            </a:r>
+          </a:p>
+          <a:p>
+            <a:r>
+              <a:rPr lang="en-US" dirty="0"/>
+              <a:t>Clustering coefficient = 1 means there is a clique, so all nodes are connected to each other in a group</a:t>
+            </a:r>
+          </a:p>
+          <a:p>
+            <a:endParaRPr lang="en-US" dirty="0"/>
+          </a:p>
+          <a:p>
+            <a:endParaRPr lang="en-US" dirty="0"/>
+          </a:p>
+        </p:txBody>
+      </p:sp>
+      <p:sp>
+        <p:nvSpPr>
+          <p:cNvPr id="4" name="Slide Number Placeholder 3"/>
+          <p:cNvSpPr>
+            <a:spLocks noGrp="1"/>
+          </p:cNvSpPr>
+          <p:nvPr>
+            <p:ph type="sldNum" sz="quarter" idx="5"/>
+          </p:nvPr>
+        </p:nvSpPr>
+        <p:spPr/>
+        <p:txBody>
+          <a:bodyPr/>
+          <a:lstStyle/>
+          <a:p>
+            <a:fld id="{91AE2140-D502-214A-B76B-E0784B2C949B}" type="slidenum">
+              <a:rPr lang="en-US" smtClean="0"/>
+              <a:t>32</a:t>
+            </a:fld>
+            <a:endParaRPr lang="en-US"/>
+          </a:p>
+        </p:txBody>
+      </p:sp>
+    </p:spTree>
+    <p:extLst>
+      <p:ext uri="{BB962C8B-B14F-4D97-AF65-F5344CB8AC3E}">
+        <p14:creationId xmlns:p14="http://schemas.microsoft.com/office/powerpoint/2010/main" val="553393038"/>
+      </p:ext>
+    </p:extLst>
+  </p:cSld>
+  <p:clrMapOvr>
+    <a:masterClrMapping/>
+  </p:clrMapOvr>
+</p:notes>
+</file>
+
+<file path=ppt/notesSlides/notesSlide22.xml><?xml version="1.0" encoding="utf-8"?>
+<p:notes xmlns:a="http://schemas.openxmlformats.org/drawingml/2006/main" xmlns:r="http://schemas.openxmlformats.org/officeDocument/2006/relationships" xmlns:p="http://schemas.openxmlformats.org/presentationml/2006/main">
+  <p:cSld>
+    <p:spTree>
+      <p:nvGrpSpPr>
+        <p:cNvPr id="1" name=""/>
+        <p:cNvGrpSpPr/>
+        <p:nvPr/>
+      </p:nvGrpSpPr>
+      <p:grpSpPr>
+        <a:xfrm>
+          <a:off x="0" y="0"/>
+          <a:ext cx="0" cy="0"/>
+          <a:chOff x="0" y="0"/>
+          <a:chExt cx="0" cy="0"/>
+        </a:xfrm>
+      </p:grpSpPr>
+      <p:sp>
+        <p:nvSpPr>
+          <p:cNvPr id="2" name="Slide Image Placeholder 1"/>
+          <p:cNvSpPr>
+            <a:spLocks noGrp="1" noRot="1" noChangeAspect="1"/>
+          </p:cNvSpPr>
+          <p:nvPr>
+            <p:ph type="sldImg"/>
+          </p:nvPr>
+        </p:nvSpPr>
+        <p:spPr/>
+      </p:sp>
+      <p:sp>
+        <p:nvSpPr>
+          <p:cNvPr id="3" name="Notes Placeholder 2"/>
+          <p:cNvSpPr>
+            <a:spLocks noGrp="1"/>
+          </p:cNvSpPr>
+          <p:nvPr>
+            <p:ph type="body" idx="1"/>
+          </p:nvPr>
+        </p:nvSpPr>
+        <p:spPr/>
+        <p:txBody>
+          <a:bodyPr/>
+          <a:lstStyle/>
+          <a:p>
+            <a:endParaRPr lang="en-US" dirty="0"/>
+          </a:p>
+        </p:txBody>
+      </p:sp>
+      <p:sp>
+        <p:nvSpPr>
+          <p:cNvPr id="4" name="Slide Number Placeholder 3"/>
+          <p:cNvSpPr>
+            <a:spLocks noGrp="1"/>
+          </p:cNvSpPr>
+          <p:nvPr>
+            <p:ph type="sldNum" sz="quarter" idx="5"/>
+          </p:nvPr>
+        </p:nvSpPr>
+        <p:spPr/>
+        <p:txBody>
+          <a:bodyPr/>
+          <a:lstStyle/>
+          <a:p>
+            <a:fld id="{91AE2140-D502-214A-B76B-E0784B2C949B}" type="slidenum">
+              <a:rPr lang="en-US" smtClean="0"/>
+              <a:t>33</a:t>
+            </a:fld>
+            <a:endParaRPr lang="en-US"/>
+          </a:p>
+        </p:txBody>
+      </p:sp>
+    </p:spTree>
+    <p:extLst>
+      <p:ext uri="{BB962C8B-B14F-4D97-AF65-F5344CB8AC3E}">
+        <p14:creationId xmlns:p14="http://schemas.microsoft.com/office/powerpoint/2010/main" val="2121078948"/>
       </p:ext>
     </p:extLst>
   </p:cSld>
@@ -38439,6 +38834,222 @@
     <p:extLst>
       <p:ext uri="{BB962C8B-B14F-4D97-AF65-F5344CB8AC3E}">
         <p14:creationId xmlns:p14="http://schemas.microsoft.com/office/powerpoint/2010/main" val="1804698877"/>
+      </p:ext>
+    </p:extLst>
+  </p:cSld>
+  <p:clrMapOvr>
+    <a:masterClrMapping/>
+  </p:clrMapOvr>
+</p:sld>
+</file>
+
+<file path=ppt/slides/slide32.xml><?xml version="1.0" encoding="utf-8"?>
+<p:sld xmlns:a="http://schemas.openxmlformats.org/drawingml/2006/main" xmlns:r="http://schemas.openxmlformats.org/officeDocument/2006/relationships" xmlns:p="http://schemas.openxmlformats.org/presentationml/2006/main">
+  <p:cSld>
+    <p:spTree>
+      <p:nvGrpSpPr>
+        <p:cNvPr id="1" name=""/>
+        <p:cNvGrpSpPr/>
+        <p:nvPr/>
+      </p:nvGrpSpPr>
+      <p:grpSpPr>
+        <a:xfrm>
+          <a:off x="0" y="0"/>
+          <a:ext cx="0" cy="0"/>
+          <a:chOff x="0" y="0"/>
+          <a:chExt cx="0" cy="0"/>
+        </a:xfrm>
+      </p:grpSpPr>
+      <p:sp>
+        <p:nvSpPr>
+          <p:cNvPr id="2" name="Title 1">
+            <a:extLst>
+              <a:ext uri="{FF2B5EF4-FFF2-40B4-BE49-F238E27FC236}">
+                <a16:creationId xmlns:a16="http://schemas.microsoft.com/office/drawing/2014/main" id="{91708ED6-3AC3-C74A-BC09-4ACE99BE8CEA}"/>
+              </a:ext>
+            </a:extLst>
+          </p:cNvPr>
+          <p:cNvSpPr>
+            <a:spLocks noGrp="1"/>
+          </p:cNvSpPr>
+          <p:nvPr>
+            <p:ph type="title"/>
+          </p:nvPr>
+        </p:nvSpPr>
+        <p:spPr>
+          <a:solidFill>
+            <a:srgbClr val="5C9BD5"/>
+          </a:solidFill>
+        </p:spPr>
+        <p:txBody>
+          <a:bodyPr/>
+          <a:lstStyle/>
+          <a:p>
+            <a:r>
+              <a:rPr lang="en-US" dirty="0">
+                <a:solidFill>
+                  <a:schemeClr val="bg1"/>
+                </a:solidFill>
+              </a:rPr>
+              <a:t>Centrality and Clustering</a:t>
+            </a:r>
+          </a:p>
+        </p:txBody>
+      </p:sp>
+      <p:sp>
+        <p:nvSpPr>
+          <p:cNvPr id="3" name="Content Placeholder 2">
+            <a:extLst>
+              <a:ext uri="{FF2B5EF4-FFF2-40B4-BE49-F238E27FC236}">
+                <a16:creationId xmlns:a16="http://schemas.microsoft.com/office/drawing/2014/main" id="{AE5C1FCC-630C-704F-9B87-76F833E6EB7A}"/>
+              </a:ext>
+            </a:extLst>
+          </p:cNvPr>
+          <p:cNvSpPr>
+            <a:spLocks noGrp="1"/>
+          </p:cNvSpPr>
+          <p:nvPr>
+            <p:ph idx="1"/>
+          </p:nvPr>
+        </p:nvSpPr>
+        <p:spPr/>
+        <p:txBody>
+          <a:bodyPr/>
+          <a:lstStyle/>
+          <a:p>
+            <a:r>
+              <a:rPr lang="en-US" dirty="0"/>
+              <a:t>Degree Centrality</a:t>
+            </a:r>
+          </a:p>
+          <a:p>
+            <a:r>
+              <a:rPr lang="en-US" dirty="0"/>
+              <a:t>Closeness Centrality</a:t>
+            </a:r>
+          </a:p>
+          <a:p>
+            <a:r>
+              <a:rPr lang="en-US" dirty="0"/>
+              <a:t>Betweenness Centrality</a:t>
+            </a:r>
+          </a:p>
+          <a:p>
+            <a:r>
+              <a:rPr lang="en-US" dirty="0"/>
+              <a:t>Clustering coefficient</a:t>
+            </a:r>
+          </a:p>
+          <a:p>
+            <a:endParaRPr lang="en-US" dirty="0"/>
+          </a:p>
+        </p:txBody>
+      </p:sp>
+    </p:spTree>
+    <p:extLst>
+      <p:ext uri="{BB962C8B-B14F-4D97-AF65-F5344CB8AC3E}">
+        <p14:creationId xmlns:p14="http://schemas.microsoft.com/office/powerpoint/2010/main" val="3748687434"/>
+      </p:ext>
+    </p:extLst>
+  </p:cSld>
+  <p:clrMapOvr>
+    <a:masterClrMapping/>
+  </p:clrMapOvr>
+</p:sld>
+</file>
+
+<file path=ppt/slides/slide33.xml><?xml version="1.0" encoding="utf-8"?>
+<p:sld xmlns:a="http://schemas.openxmlformats.org/drawingml/2006/main" xmlns:r="http://schemas.openxmlformats.org/officeDocument/2006/relationships" xmlns:p="http://schemas.openxmlformats.org/presentationml/2006/main">
+  <p:cSld>
+    <p:spTree>
+      <p:nvGrpSpPr>
+        <p:cNvPr id="1" name=""/>
+        <p:cNvGrpSpPr/>
+        <p:nvPr/>
+      </p:nvGrpSpPr>
+      <p:grpSpPr>
+        <a:xfrm>
+          <a:off x="0" y="0"/>
+          <a:ext cx="0" cy="0"/>
+          <a:chOff x="0" y="0"/>
+          <a:chExt cx="0" cy="0"/>
+        </a:xfrm>
+      </p:grpSpPr>
+      <p:sp>
+        <p:nvSpPr>
+          <p:cNvPr id="2" name="Title 1">
+            <a:extLst>
+              <a:ext uri="{FF2B5EF4-FFF2-40B4-BE49-F238E27FC236}">
+                <a16:creationId xmlns:a16="http://schemas.microsoft.com/office/drawing/2014/main" id="{EB9EBC78-4FE8-2C4B-B3E9-180A5A12FE77}"/>
+              </a:ext>
+            </a:extLst>
+          </p:cNvPr>
+          <p:cNvSpPr>
+            <a:spLocks noGrp="1"/>
+          </p:cNvSpPr>
+          <p:nvPr>
+            <p:ph type="title"/>
+          </p:nvPr>
+        </p:nvSpPr>
+        <p:spPr>
+          <a:solidFill>
+            <a:srgbClr val="5C9BD5"/>
+          </a:solidFill>
+        </p:spPr>
+        <p:txBody>
+          <a:bodyPr/>
+          <a:lstStyle/>
+          <a:p>
+            <a:r>
+              <a:rPr lang="en-US" dirty="0" err="1">
+                <a:solidFill>
+                  <a:schemeClr val="bg1"/>
+                </a:solidFill>
+              </a:rPr>
+              <a:t>Gephi</a:t>
+            </a:r>
+            <a:endParaRPr lang="en-US" dirty="0">
+              <a:solidFill>
+                <a:schemeClr val="bg1"/>
+              </a:solidFill>
+            </a:endParaRPr>
+          </a:p>
+        </p:txBody>
+      </p:sp>
+      <p:pic>
+        <p:nvPicPr>
+          <p:cNvPr id="6" name="Picture 5">
+            <a:extLst>
+              <a:ext uri="{FF2B5EF4-FFF2-40B4-BE49-F238E27FC236}">
+                <a16:creationId xmlns:a16="http://schemas.microsoft.com/office/drawing/2014/main" id="{D3ECF695-8101-B148-9E3A-CBC46B2DCD81}"/>
+              </a:ext>
+            </a:extLst>
+          </p:cNvPr>
+          <p:cNvPicPr>
+            <a:picLocks noChangeAspect="1"/>
+          </p:cNvPicPr>
+          <p:nvPr/>
+        </p:nvPicPr>
+        <p:blipFill>
+          <a:blip r:embed="rId3"/>
+          <a:stretch>
+            <a:fillRect/>
+          </a:stretch>
+        </p:blipFill>
+        <p:spPr>
+          <a:xfrm>
+            <a:off x="1788318" y="1858395"/>
+            <a:ext cx="8615363" cy="4735774"/>
+          </a:xfrm>
+          <a:prstGeom prst="rect">
+            <a:avLst/>
+          </a:prstGeom>
+        </p:spPr>
+      </p:pic>
+    </p:spTree>
+    <p:extLst>
+      <p:ext uri="{BB962C8B-B14F-4D97-AF65-F5344CB8AC3E}">
+        <p14:creationId xmlns:p14="http://schemas.microsoft.com/office/powerpoint/2010/main" val="4153186007"/>
       </p:ext>
     </p:extLst>
   </p:cSld>

--- a/Projects/Chapter1/community-assembly.pptx
+++ b/Projects/Chapter1/community-assembly.pptx
@@ -5,7 +5,7 @@
     <p:sldMasterId id="2147483648" r:id="rId1"/>
   </p:sldMasterIdLst>
   <p:notesMasterIdLst>
-    <p:notesMasterId r:id="rId35"/>
+    <p:notesMasterId r:id="rId39"/>
   </p:notesMasterIdLst>
   <p:sldIdLst>
     <p:sldId id="256" r:id="rId2"/>
@@ -19,28 +19,32 @@
     <p:sldId id="283" r:id="rId10"/>
     <p:sldId id="282" r:id="rId11"/>
     <p:sldId id="287" r:id="rId12"/>
-    <p:sldId id="274" r:id="rId13"/>
-    <p:sldId id="288" r:id="rId14"/>
-    <p:sldId id="289" r:id="rId15"/>
-    <p:sldId id="290" r:id="rId16"/>
-    <p:sldId id="291" r:id="rId17"/>
-    <p:sldId id="292" r:id="rId18"/>
-    <p:sldId id="284" r:id="rId19"/>
-    <p:sldId id="285" r:id="rId20"/>
-    <p:sldId id="286" r:id="rId21"/>
-    <p:sldId id="263" r:id="rId22"/>
-    <p:sldId id="258" r:id="rId23"/>
-    <p:sldId id="259" r:id="rId24"/>
-    <p:sldId id="261" r:id="rId25"/>
-    <p:sldId id="277" r:id="rId26"/>
-    <p:sldId id="278" r:id="rId27"/>
-    <p:sldId id="293" r:id="rId28"/>
-    <p:sldId id="271" r:id="rId29"/>
-    <p:sldId id="265" r:id="rId30"/>
-    <p:sldId id="260" r:id="rId31"/>
-    <p:sldId id="262" r:id="rId32"/>
-    <p:sldId id="294" r:id="rId33"/>
-    <p:sldId id="295" r:id="rId34"/>
+    <p:sldId id="299" r:id="rId13"/>
+    <p:sldId id="274" r:id="rId14"/>
+    <p:sldId id="288" r:id="rId15"/>
+    <p:sldId id="289" r:id="rId16"/>
+    <p:sldId id="290" r:id="rId17"/>
+    <p:sldId id="291" r:id="rId18"/>
+    <p:sldId id="292" r:id="rId19"/>
+    <p:sldId id="284" r:id="rId20"/>
+    <p:sldId id="285" r:id="rId21"/>
+    <p:sldId id="286" r:id="rId22"/>
+    <p:sldId id="263" r:id="rId23"/>
+    <p:sldId id="258" r:id="rId24"/>
+    <p:sldId id="259" r:id="rId25"/>
+    <p:sldId id="261" r:id="rId26"/>
+    <p:sldId id="277" r:id="rId27"/>
+    <p:sldId id="278" r:id="rId28"/>
+    <p:sldId id="293" r:id="rId29"/>
+    <p:sldId id="271" r:id="rId30"/>
+    <p:sldId id="265" r:id="rId31"/>
+    <p:sldId id="260" r:id="rId32"/>
+    <p:sldId id="262" r:id="rId33"/>
+    <p:sldId id="294" r:id="rId34"/>
+    <p:sldId id="298" r:id="rId35"/>
+    <p:sldId id="295" r:id="rId36"/>
+    <p:sldId id="296" r:id="rId37"/>
+    <p:sldId id="297" r:id="rId38"/>
   </p:sldIdLst>
   <p:sldSz cx="12192000" cy="6858000"/>
   <p:notesSz cx="6858000" cy="9144000"/>
@@ -25922,111 +25926,24 @@
           <a:p>
             <a:r>
               <a:rPr lang="en-US" dirty="0"/>
-              <a:t>1) Looked for evidence of compositionality. By multiplying ASV table by itself we can look for evidence of covariance.</a:t>
-            </a:r>
-          </a:p>
-          <a:p>
+              <a:t>#Unweighted </a:t>
+            </a:r>
+            <a:r>
+              <a:rPr lang="en-US" dirty="0" err="1"/>
+              <a:t>unifrac</a:t>
+            </a:r>
             <a:r>
               <a:rPr lang="en-US" dirty="0"/>
-              <a:t>#We then find the determinant of the covariance matrix and if the answer is 0 we have evidence of compositionality in the data – the result was 0 so the data is compositional.</a:t>
-            </a:r>
-          </a:p>
-          <a:p>
-            <a:endParaRPr lang="en-US" dirty="0"/>
-          </a:p>
-          <a:p>
+              <a:t> is based on presence/absence not abundance - but it is sensitive to sequencing depth. So if a sample is of greater depth than other reads it may have more low abundance taxa and therefore effect the </a:t>
+            </a:r>
+            <a:r>
+              <a:rPr lang="en-US" dirty="0" err="1"/>
+              <a:t>unifrac</a:t>
+            </a:r>
             <a:r>
               <a:rPr lang="en-US" dirty="0"/>
-              <a:t>2) Because out data are compositional we then need to transform them for downstream analysis</a:t>
-            </a:r>
-          </a:p>
-          <a:p>
-            <a:r>
-              <a:rPr lang="en-US" dirty="0"/>
-              <a:t>#Step Four: Perform a Log-Ratio </a:t>
-            </a:r>
-            <a:r>
-              <a:rPr lang="en-US" dirty="0" err="1"/>
-              <a:t>trasnformation</a:t>
-            </a:r>
-            <a:endParaRPr lang="en-US" dirty="0"/>
-          </a:p>
-          <a:p>
-            <a:r>
-              <a:rPr lang="en-US" dirty="0"/>
-              <a:t>#This will </a:t>
-            </a:r>
-            <a:r>
-              <a:rPr lang="en-US" dirty="0" err="1"/>
-              <a:t>normalise</a:t>
-            </a:r>
-            <a:r>
-              <a:rPr lang="en-US" dirty="0"/>
-              <a:t> the ASV data within each sample</a:t>
-            </a:r>
-          </a:p>
-          <a:p>
-            <a:endParaRPr lang="en-US" dirty="0"/>
-          </a:p>
-          <a:p>
-            <a:r>
-              <a:rPr lang="en-US" dirty="0"/>
-              <a:t>3) Look at the difference the log-ratio transformation has made to the covariance of the data</a:t>
-            </a:r>
-          </a:p>
-          <a:p>
-            <a:endParaRPr lang="en-US" dirty="0"/>
-          </a:p>
-          <a:p>
-            <a:r>
-              <a:rPr lang="en-US" dirty="0"/>
-              <a:t>4) Figure 6: Perform Principal Component Analysis on Log-Ratio Transformed Data, Create visual representation of PCA and plot</a:t>
-            </a:r>
-          </a:p>
-          <a:p>
-            <a:endParaRPr lang="en-US" dirty="0"/>
-          </a:p>
-          <a:p>
-            <a:r>
-              <a:rPr lang="en-US" dirty="0"/>
-              <a:t>5) Figure 7: </a:t>
-            </a:r>
-            <a:r>
-              <a:rPr lang="en-US" dirty="0" err="1"/>
-              <a:t>Visualise</a:t>
-            </a:r>
-            <a:r>
-              <a:rPr lang="en-US" dirty="0"/>
-              <a:t> and plot the </a:t>
-            </a:r>
-            <a:r>
-              <a:rPr lang="en-US" dirty="0" err="1"/>
-              <a:t>pca</a:t>
-            </a:r>
-            <a:r>
-              <a:rPr lang="en-US" dirty="0"/>
-              <a:t> </a:t>
-            </a:r>
-          </a:p>
-          <a:p>
-            <a:endParaRPr lang="en-US" dirty="0"/>
-          </a:p>
-          <a:p>
-            <a:r>
-              <a:rPr lang="en-US" dirty="0"/>
-              <a:t>6) Computed the </a:t>
-            </a:r>
-            <a:r>
-              <a:rPr lang="en-US" dirty="0" err="1"/>
-              <a:t>jaccard</a:t>
-            </a:r>
-            <a:r>
-              <a:rPr lang="en-US" dirty="0"/>
-              <a:t> distance metric</a:t>
-            </a:r>
-          </a:p>
-          <a:p>
-            <a:endParaRPr lang="en-US" dirty="0"/>
+              <a:t> metric</a:t>
+            </a:r>
           </a:p>
         </p:txBody>
       </p:sp>
@@ -26047,7 +25964,7 @@
           <a:p>
             <a:fld id="{91AE2140-D502-214A-B76B-E0784B2C949B}" type="slidenum">
               <a:rPr lang="en-US" smtClean="0"/>
-              <a:t>18</a:t>
+              <a:t>17</a:t>
             </a:fld>
             <a:endParaRPr lang="en-US"/>
           </a:p>
@@ -26056,7 +25973,7 @@
     </p:spTree>
     <p:extLst>
       <p:ext uri="{BB962C8B-B14F-4D97-AF65-F5344CB8AC3E}">
-        <p14:creationId xmlns:p14="http://schemas.microsoft.com/office/powerpoint/2010/main" val="171950858"/>
+        <p14:creationId xmlns:p14="http://schemas.microsoft.com/office/powerpoint/2010/main" val="127474224"/>
       </p:ext>
     </p:extLst>
   </p:cSld>
@@ -26112,15 +26029,47 @@
           <a:p>
             <a:r>
               <a:rPr lang="en-US" dirty="0"/>
-              <a:t>I performed linear regressions between the explanatory variables (glaciers) and response variables (richness, depth, area, chlorophyll, </a:t>
+              <a:t>1) Looked for evidence of compositionality. By multiplying ASV table by itself we can look for evidence of covariance.</a:t>
+            </a:r>
+          </a:p>
+          <a:p>
+            <a:r>
+              <a:rPr lang="en-US" dirty="0"/>
+              <a:t>#We then find the determinant of the covariance matrix and if the answer is 0 we have evidence of compositionality in the data – the result was 0 so the data is compositional.</a:t>
+            </a:r>
+          </a:p>
+          <a:p>
+            <a:endParaRPr lang="en-US" dirty="0"/>
+          </a:p>
+          <a:p>
+            <a:r>
+              <a:rPr lang="en-US" dirty="0"/>
+              <a:t>2) Because out data are compositional we then need to transform them for downstream analysis</a:t>
+            </a:r>
+          </a:p>
+          <a:p>
+            <a:r>
+              <a:rPr lang="en-US" dirty="0"/>
+              <a:t>#Step Four: Perform a Log-Ratio </a:t>
             </a:r>
             <a:r>
               <a:rPr lang="en-US" dirty="0" err="1"/>
-              <a:t>dna</a:t>
-            </a:r>
+              <a:t>trasnformation</a:t>
+            </a:r>
+            <a:endParaRPr lang="en-US" dirty="0"/>
+          </a:p>
+          <a:p>
             <a:r>
               <a:rPr lang="en-US" dirty="0"/>
-              <a:t> per gram, diversity indices).</a:t>
+              <a:t>#This will </a:t>
+            </a:r>
+            <a:r>
+              <a:rPr lang="en-US" dirty="0" err="1"/>
+              <a:t>normalise</a:t>
+            </a:r>
+            <a:r>
+              <a:rPr lang="en-US" dirty="0"/>
+              <a:t> the ASV data within each sample</a:t>
             </a:r>
           </a:p>
           <a:p>
@@ -26129,7 +26078,7 @@
           <a:p>
             <a:r>
               <a:rPr lang="en-US" dirty="0"/>
-              <a:t>I then constructed ANOVA tables of the linear regression models to gauge their statistical significance. </a:t>
+              <a:t>3) Look at the difference the log-ratio transformation has made to the covariance of the data</a:t>
             </a:r>
           </a:p>
           <a:p>
@@ -26138,27 +26087,32 @@
           <a:p>
             <a:r>
               <a:rPr lang="en-US" dirty="0"/>
-              <a:t>#Analysis of Variance (ANOVA), a linear model analysis. We want to ask: is the ASV richness/chlorophyll/hole size/hole depth/DNA per gram between glaciers significantly different? Plot the data divided into glacier groups</a:t>
-            </a:r>
+              <a:t>4) Figure 6: Perform Principal Component Analysis on Log-Ratio Transformed Data, Create visual representation of PCA and plot</a:t>
+            </a:r>
+          </a:p>
+          <a:p>
+            <a:endParaRPr lang="en-US" dirty="0"/>
           </a:p>
           <a:p>
             <a:r>
               <a:rPr lang="en-US" dirty="0"/>
-              <a:t>#ANOVA quantifies the signal to noise ratio. How different are our groups in ratio to how spread out the data are? ANOVA will tell us how confident we can be that we are not being fooled by a type I error (a false positive difference between the groups)</a:t>
-            </a:r>
-          </a:p>
-          <a:p>
+              <a:t>5) Figure 7: </a:t>
+            </a:r>
+            <a:r>
+              <a:rPr lang="en-US" dirty="0" err="1"/>
+              <a:t>Visualise</a:t>
+            </a:r>
             <a:r>
               <a:rPr lang="en-US" dirty="0"/>
-              <a:t>#ANOVA will: 1) quantify the overall variability of the dataset. 2) Divide that variability into the variability between and within groups. More signal = more </a:t>
+              <a:t> and plot the </a:t>
             </a:r>
             <a:r>
               <a:rPr lang="en-US" dirty="0" err="1"/>
-              <a:t>condifent</a:t>
+              <a:t>pca</a:t>
             </a:r>
             <a:r>
               <a:rPr lang="en-US" dirty="0"/>
-              <a:t>. More noise = less confident.</a:t>
+              <a:t> </a:t>
             </a:r>
           </a:p>
           <a:p>
@@ -26167,15 +26121,15 @@
           <a:p>
             <a:r>
               <a:rPr lang="en-US" dirty="0"/>
-              <a:t>The ANOVA tables showed there was significant difference between the glaciers in terms of ASV richness, cryoconite hole depth, the </a:t>
+              <a:t>6) Computed the </a:t>
             </a:r>
             <a:r>
               <a:rPr lang="en-US" dirty="0" err="1"/>
-              <a:t>dna</a:t>
+              <a:t>jaccard</a:t>
             </a:r>
             <a:r>
               <a:rPr lang="en-US" dirty="0"/>
-              <a:t> per gram of cryoconite and faith’s pd.</a:t>
+              <a:t> distance metric</a:t>
             </a:r>
           </a:p>
           <a:p>
@@ -26209,7 +26163,7 @@
     </p:spTree>
     <p:extLst>
       <p:ext uri="{BB962C8B-B14F-4D97-AF65-F5344CB8AC3E}">
-        <p14:creationId xmlns:p14="http://schemas.microsoft.com/office/powerpoint/2010/main" val="3419341708"/>
+        <p14:creationId xmlns:p14="http://schemas.microsoft.com/office/powerpoint/2010/main" val="171950858"/>
       </p:ext>
     </p:extLst>
   </p:cSld>
@@ -26265,17 +26219,71 @@
           <a:p>
             <a:r>
               <a:rPr lang="en-US" dirty="0"/>
-              <a:t>Linear Regression Analysis</a:t>
-            </a:r>
-          </a:p>
-          <a:p>
+              <a:t>I performed linear regressions between the explanatory variables (glaciers) and response variables (richness, depth, area, chlorophyll, </a:t>
+            </a:r>
+            <a:r>
+              <a:rPr lang="en-US" dirty="0" err="1"/>
+              <a:t>dna</a:t>
+            </a:r>
             <a:r>
               <a:rPr lang="en-US" dirty="0"/>
-              <a:t>#We use linear regression analysis if our explanatory variable is continuous </a:t>
+              <a:t> per gram, diversity indices).</a:t>
             </a:r>
           </a:p>
           <a:p>
             <a:endParaRPr lang="en-US" dirty="0"/>
+          </a:p>
+          <a:p>
+            <a:r>
+              <a:rPr lang="en-US" dirty="0"/>
+              <a:t>I then constructed ANOVA tables of the linear regression models to gauge their statistical significance. </a:t>
+            </a:r>
+          </a:p>
+          <a:p>
+            <a:endParaRPr lang="en-US" dirty="0"/>
+          </a:p>
+          <a:p>
+            <a:r>
+              <a:rPr lang="en-US" dirty="0"/>
+              <a:t>#Analysis of Variance (ANOVA), a linear model analysis. We want to ask: is the ASV richness/chlorophyll/hole size/hole depth/DNA per gram between glaciers significantly different? Plot the data divided into glacier groups</a:t>
+            </a:r>
+          </a:p>
+          <a:p>
+            <a:r>
+              <a:rPr lang="en-US" dirty="0"/>
+              <a:t>#ANOVA quantifies the signal to noise ratio. How different are our groups in ratio to how spread out the data are? ANOVA will tell us how confident we can be that we are not being fooled by a type I error (a false positive difference between the groups)</a:t>
+            </a:r>
+          </a:p>
+          <a:p>
+            <a:r>
+              <a:rPr lang="en-US" dirty="0"/>
+              <a:t>#ANOVA will: 1) quantify the overall variability of the dataset. 2) Divide that variability into the variability between and within groups. More signal = more </a:t>
+            </a:r>
+            <a:r>
+              <a:rPr lang="en-US" dirty="0" err="1"/>
+              <a:t>condifent</a:t>
+            </a:r>
+            <a:r>
+              <a:rPr lang="en-US" dirty="0"/>
+              <a:t>. More noise = less confident.</a:t>
+            </a:r>
+          </a:p>
+          <a:p>
+            <a:endParaRPr lang="en-US" dirty="0"/>
+          </a:p>
+          <a:p>
+            <a:r>
+              <a:rPr lang="en-US" dirty="0"/>
+              <a:t>The ANOVA tables showed there was significant difference between the glaciers in terms of ASV richness, cryoconite hole depth, the </a:t>
+            </a:r>
+            <a:r>
+              <a:rPr lang="en-US" dirty="0" err="1"/>
+              <a:t>dna</a:t>
+            </a:r>
+            <a:r>
+              <a:rPr lang="en-US" dirty="0"/>
+              <a:t> per gram of cryoconite and faith’s pd.</a:t>
+            </a:r>
           </a:p>
           <a:p>
             <a:endParaRPr lang="en-US" dirty="0"/>
@@ -26308,7 +26316,7 @@
     </p:spTree>
     <p:extLst>
       <p:ext uri="{BB962C8B-B14F-4D97-AF65-F5344CB8AC3E}">
-        <p14:creationId xmlns:p14="http://schemas.microsoft.com/office/powerpoint/2010/main" val="2976129878"/>
+        <p14:creationId xmlns:p14="http://schemas.microsoft.com/office/powerpoint/2010/main" val="3419341708"/>
       </p:ext>
     </p:extLst>
   </p:cSld>
@@ -26364,51 +26372,20 @@
           <a:p>
             <a:r>
               <a:rPr lang="en-US" dirty="0"/>
-              <a:t>Multivariate analysis can allow us to look at the relationship between community composition and environmental characteristics – these are deterministic, non-random processes. </a:t>
-            </a:r>
-            <a:r>
-              <a:rPr lang="en-US" dirty="0" err="1"/>
-              <a:t>Investiagation</a:t>
-            </a:r>
+              <a:t>Linear Regression Analysis</a:t>
+            </a:r>
+          </a:p>
+          <a:p>
             <a:r>
               <a:rPr lang="en-US" dirty="0"/>
-              <a:t> into deterministic processes of community assembly (e.g. relationship between community composition and environmental characteristics) dominate most studies of microbial community assembly, </a:t>
-            </a:r>
-            <a:r>
-              <a:rPr lang="en-US" dirty="0" err="1"/>
-              <a:t>howeber</a:t>
-            </a:r>
-            <a:r>
-              <a:rPr lang="en-US" dirty="0"/>
-              <a:t>, it is likely both deterministic and stochastic processes contribute to community assembly. This is why I combine multivariate and network analysis (deterministic) with phylogenetic null modelling (deterministic and stochastic) and neutral modelling (stochastic). </a:t>
+              <a:t>#We use linear regression analysis if our explanatory variable is continuous </a:t>
             </a:r>
           </a:p>
           <a:p>
             <a:endParaRPr lang="en-US" dirty="0"/>
           </a:p>
           <a:p>
-            <a:r>
-              <a:rPr lang="en-US" dirty="0"/>
-              <a:t>It has been suggested that initial community assembly is driven by stochastic processes, and deterministic processes shape the community through time. </a:t>
-            </a:r>
-          </a:p>
-          <a:p>
             <a:endParaRPr lang="en-US" dirty="0"/>
-          </a:p>
-          <a:p>
-            <a:r>
-              <a:rPr lang="en-US" dirty="0"/>
-              <a:t>What do we already know about deterministic processes on glaciers?</a:t>
-            </a:r>
-          </a:p>
-          <a:p>
-            <a:endParaRPr lang="en-US" dirty="0"/>
-          </a:p>
-          <a:p>
-            <a:r>
-              <a:rPr lang="en-US" dirty="0"/>
-              <a:t>What do we already know about stochastic processes on glaciers?</a:t>
-            </a:r>
           </a:p>
         </p:txBody>
       </p:sp>
@@ -26438,7 +26415,7 @@
     </p:spTree>
     <p:extLst>
       <p:ext uri="{BB962C8B-B14F-4D97-AF65-F5344CB8AC3E}">
-        <p14:creationId xmlns:p14="http://schemas.microsoft.com/office/powerpoint/2010/main" val="2827327905"/>
+        <p14:creationId xmlns:p14="http://schemas.microsoft.com/office/powerpoint/2010/main" val="2976129878"/>
       </p:ext>
     </p:extLst>
   </p:cSld>
@@ -26494,15 +26471,50 @@
           <a:p>
             <a:r>
               <a:rPr lang="en-US" dirty="0"/>
-              <a:t>DDR doesn’t work for this dataset as most of the holes are reported to have the same long </a:t>
+              <a:t>Multivariate analysis can allow us to look at the relationship between community composition and environmental characteristics – these are deterministic, non-random processes. </a:t>
             </a:r>
             <a:r>
               <a:rPr lang="en-US" dirty="0" err="1"/>
-              <a:t>lat</a:t>
+              <a:t>Investiagation</a:t>
             </a:r>
             <a:r>
               <a:rPr lang="en-US" dirty="0"/>
-              <a:t> coordinates.</a:t>
+              <a:t> into deterministic processes of community assembly (e.g. relationship between community composition and environmental characteristics) dominate most studies of microbial community assembly, </a:t>
+            </a:r>
+            <a:r>
+              <a:rPr lang="en-US" dirty="0" err="1"/>
+              <a:t>howeber</a:t>
+            </a:r>
+            <a:r>
+              <a:rPr lang="en-US" dirty="0"/>
+              <a:t>, it is likely both deterministic and stochastic processes contribute to community assembly. This is why I combine multivariate and network analysis (deterministic) with phylogenetic null modelling (deterministic and stochastic) and neutral modelling (stochastic). </a:t>
+            </a:r>
+          </a:p>
+          <a:p>
+            <a:endParaRPr lang="en-US" dirty="0"/>
+          </a:p>
+          <a:p>
+            <a:r>
+              <a:rPr lang="en-US" dirty="0"/>
+              <a:t>It has been suggested that initial community assembly is driven by stochastic processes, and deterministic processes shape the community through time. </a:t>
+            </a:r>
+          </a:p>
+          <a:p>
+            <a:endParaRPr lang="en-US" dirty="0"/>
+          </a:p>
+          <a:p>
+            <a:r>
+              <a:rPr lang="en-US" dirty="0"/>
+              <a:t>What do we already know about deterministic processes on glaciers?</a:t>
+            </a:r>
+          </a:p>
+          <a:p>
+            <a:endParaRPr lang="en-US" dirty="0"/>
+          </a:p>
+          <a:p>
+            <a:r>
+              <a:rPr lang="en-US" dirty="0"/>
+              <a:t>What do we already know about stochastic processes on glaciers?</a:t>
             </a:r>
           </a:p>
         </p:txBody>
@@ -26524,7 +26536,7 @@
           <a:p>
             <a:fld id="{91AE2140-D502-214A-B76B-E0784B2C949B}" type="slidenum">
               <a:rPr lang="en-US" smtClean="0"/>
-              <a:t>23</a:t>
+              <a:t>22</a:t>
             </a:fld>
             <a:endParaRPr lang="en-US"/>
           </a:p>
@@ -26533,7 +26545,7 @@
     </p:spTree>
     <p:extLst>
       <p:ext uri="{BB962C8B-B14F-4D97-AF65-F5344CB8AC3E}">
-        <p14:creationId xmlns:p14="http://schemas.microsoft.com/office/powerpoint/2010/main" val="2176052354"/>
+        <p14:creationId xmlns:p14="http://schemas.microsoft.com/office/powerpoint/2010/main" val="2827327905"/>
       </p:ext>
     </p:extLst>
   </p:cSld>
@@ -26589,49 +26601,15 @@
           <a:p>
             <a:r>
               <a:rPr lang="en-US" dirty="0"/>
-              <a:t>Sloan’s Neutral Model states that the probability of species </a:t>
-            </a:r>
-            <a:r>
-              <a:rPr lang="en-US" i="1" dirty="0" err="1"/>
-              <a:t>i</a:t>
+              <a:t>DDR doesn’t work for this dataset as most of the holes are reported to have the same long </a:t>
+            </a:r>
+            <a:r>
+              <a:rPr lang="en-US" dirty="0" err="1"/>
+              <a:t>lat</a:t>
             </a:r>
             <a:r>
               <a:rPr lang="en-US" dirty="0"/>
-              <a:t> occurring within a sample at abundance (x</a:t>
-            </a:r>
-            <a:r>
-              <a:rPr lang="en-US" i="0" baseline="-25000" dirty="0"/>
-              <a:t>i</a:t>
-            </a:r>
-            <a:r>
-              <a:rPr lang="en-US" dirty="0"/>
-              <a:t>) above a detection threshold (d) </a:t>
-            </a:r>
-          </a:p>
-          <a:p>
-            <a:endParaRPr lang="en-US" dirty="0"/>
-          </a:p>
-          <a:p>
-            <a:r>
-              <a:rPr lang="en-US" dirty="0"/>
-              <a:t>Model results are compared to the observed data. Deviation of observed data from model results is assumed to be evidence of deterministic community assembly.</a:t>
-            </a:r>
-          </a:p>
-          <a:p>
-            <a:endParaRPr lang="en-US" dirty="0"/>
-          </a:p>
-          <a:p>
-            <a:r>
-              <a:rPr lang="en-US" dirty="0"/>
-              <a:t>The abundance of each ASV in the metacommunity (p</a:t>
-            </a:r>
-            <a:r>
-              <a:rPr lang="en-US" i="1" dirty="0"/>
-              <a:t>i</a:t>
-            </a:r>
-            <a:r>
-              <a:rPr lang="en-US" dirty="0"/>
-              <a:t>) is estimated by averaging it’s relative abundance across all samples.</a:t>
+              <a:t> coordinates.</a:t>
             </a:r>
           </a:p>
         </p:txBody>
@@ -26662,7 +26640,7 @@
     </p:spTree>
     <p:extLst>
       <p:ext uri="{BB962C8B-B14F-4D97-AF65-F5344CB8AC3E}">
-        <p14:creationId xmlns:p14="http://schemas.microsoft.com/office/powerpoint/2010/main" val="1811139538"/>
+        <p14:creationId xmlns:p14="http://schemas.microsoft.com/office/powerpoint/2010/main" val="2176052354"/>
       </p:ext>
     </p:extLst>
   </p:cSld>
@@ -26718,23 +26696,49 @@
           <a:p>
             <a:r>
               <a:rPr lang="en-US" dirty="0"/>
-              <a:t>Code developed from Barnett et al., (2020) Soil characteristics and land-use drive bacterial community assembly patterns (https://</a:t>
-            </a:r>
-            <a:r>
-              <a:rPr lang="en-US" dirty="0" err="1"/>
-              <a:t>github.com</a:t>
+              <a:t>Sloan’s Neutral Model states that the probability of species </a:t>
+            </a:r>
+            <a:r>
+              <a:rPr lang="en-US" i="1" dirty="0" err="1"/>
+              <a:t>i</a:t>
             </a:r>
             <a:r>
               <a:rPr lang="en-US" dirty="0"/>
-              <a:t>/seb369/</a:t>
-            </a:r>
-            <a:r>
-              <a:rPr lang="en-US" dirty="0" err="1"/>
-              <a:t>landuse_comm_assembly</a:t>
+              <a:t> occurring within a sample at abundance (x</a:t>
+            </a:r>
+            <a:r>
+              <a:rPr lang="en-US" i="0" baseline="-25000" dirty="0"/>
+              <a:t>i</a:t>
             </a:r>
             <a:r>
               <a:rPr lang="en-US" dirty="0"/>
-              <a:t>)</a:t>
+              <a:t>) above a detection threshold (d) </a:t>
+            </a:r>
+          </a:p>
+          <a:p>
+            <a:endParaRPr lang="en-US" dirty="0"/>
+          </a:p>
+          <a:p>
+            <a:r>
+              <a:rPr lang="en-US" dirty="0"/>
+              <a:t>Model results are compared to the observed data. Deviation of observed data from model results is assumed to be evidence of deterministic community assembly.</a:t>
+            </a:r>
+          </a:p>
+          <a:p>
+            <a:endParaRPr lang="en-US" dirty="0"/>
+          </a:p>
+          <a:p>
+            <a:r>
+              <a:rPr lang="en-US" dirty="0"/>
+              <a:t>The abundance of each ASV in the metacommunity (p</a:t>
+            </a:r>
+            <a:r>
+              <a:rPr lang="en-US" i="1" dirty="0"/>
+              <a:t>i</a:t>
+            </a:r>
+            <a:r>
+              <a:rPr lang="en-US" dirty="0"/>
+              <a:t>) is estimated by averaging it’s relative abundance across all samples.</a:t>
             </a:r>
           </a:p>
         </p:txBody>
@@ -26765,7 +26769,7 @@
     </p:spTree>
     <p:extLst>
       <p:ext uri="{BB962C8B-B14F-4D97-AF65-F5344CB8AC3E}">
-        <p14:creationId xmlns:p14="http://schemas.microsoft.com/office/powerpoint/2010/main" val="2263901205"/>
+        <p14:creationId xmlns:p14="http://schemas.microsoft.com/office/powerpoint/2010/main" val="1811139538"/>
       </p:ext>
     </p:extLst>
   </p:cSld>
@@ -26821,84 +26825,24 @@
           <a:p>
             <a:r>
               <a:rPr lang="en-US" dirty="0"/>
-              <a:t>This is the result of the model fitting with the Sommers dataset (not reduced).</a:t>
-            </a:r>
-          </a:p>
-          <a:p>
+              <a:t>Code developed from Barnett et al., (2020) Soil characteristics and land-use drive bacterial community assembly patterns (https://</a:t>
+            </a:r>
+            <a:r>
+              <a:rPr lang="en-US" dirty="0" err="1"/>
+              <a:t>github.com</a:t>
+            </a:r>
             <a:r>
               <a:rPr lang="en-US" dirty="0"/>
-              <a:t>X axis = log mean relative abundances of each ASV</a:t>
-            </a:r>
-          </a:p>
-          <a:p>
+              <a:t>/seb369/</a:t>
+            </a:r>
+            <a:r>
+              <a:rPr lang="en-US" dirty="0" err="1"/>
+              <a:t>landuse_comm_assembly</a:t>
+            </a:r>
             <a:r>
               <a:rPr lang="en-US" dirty="0"/>
-              <a:t>Y axis = mean occurrence frequency of each ASV </a:t>
-            </a:r>
-          </a:p>
-          <a:p>
-            <a:r>
-              <a:rPr lang="en-US" dirty="0"/>
-              <a:t>Points = observed log relative abundances against occurrence frequencies</a:t>
-            </a:r>
-          </a:p>
-          <a:p>
-            <a:r>
-              <a:rPr lang="en-US" dirty="0"/>
-              <a:t>Solid line = predicted log relative abundances plotted against occurrence frequencies</a:t>
-            </a:r>
-          </a:p>
-          <a:p>
-            <a:r>
-              <a:rPr lang="en-US" dirty="0"/>
-              <a:t>Dotted lines = 95% confidence intervals</a:t>
-            </a:r>
-          </a:p>
-          <a:p>
-            <a:endParaRPr lang="en-US" dirty="0"/>
-          </a:p>
-          <a:p>
-            <a:r>
-              <a:rPr lang="en-US" dirty="0"/>
-              <a:t>This allows us to assess to what degree observed community structure can be explained by stochastic processes within each sample.</a:t>
-            </a:r>
-          </a:p>
-          <a:p>
-            <a:r>
-              <a:rPr lang="en-US" dirty="0"/>
-              <a:t>The Sloan neutral model is applied here. This model does not take into account phylogenetic distance. </a:t>
-            </a:r>
-          </a:p>
-          <a:p>
-            <a:r>
-              <a:rPr lang="en-US" dirty="0"/>
-              <a:t>ASV occurrence frequency is explained as a function of ASV abundance within the metacommunity (i.e. the more abundant an ASV is in the metacommunity, the more frequently it will be detected in the local community by chance). </a:t>
-            </a:r>
-          </a:p>
-          <a:p>
-            <a:r>
-              <a:rPr lang="en-US" dirty="0"/>
-              <a:t>The neutral model performed well, explaining 77% of variation in ASV detection frequency with an estimated migration factor of 0.02 between sites.</a:t>
-            </a:r>
-          </a:p>
-          <a:p>
-            <a:r>
-              <a:rPr lang="en-US" dirty="0"/>
-              <a:t>These results suggest that neutral assembly processes can explain the pattern of observed ASV occurrence frequencies </a:t>
-            </a:r>
-            <a:r>
-              <a:rPr lang="en-US" strike="sngStrike" dirty="0"/>
-              <a:t>and that the the regional species pool is a driving factor in the community composition of these samples. </a:t>
-            </a:r>
-          </a:p>
-          <a:p>
-            <a:r>
-              <a:rPr lang="en-US" strike="noStrike" dirty="0"/>
-              <a:t>The deviation of predicted occurrence frequencies from observed occurrence frequencies suggests that there are also deterministic processes driving community composition.</a:t>
-            </a:r>
-          </a:p>
-          <a:p>
-            <a:endParaRPr lang="en-US" dirty="0"/>
+              <a:t>)</a:t>
+            </a:r>
           </a:p>
         </p:txBody>
       </p:sp>
@@ -26928,7 +26872,7 @@
     </p:spTree>
     <p:extLst>
       <p:ext uri="{BB962C8B-B14F-4D97-AF65-F5344CB8AC3E}">
-        <p14:creationId xmlns:p14="http://schemas.microsoft.com/office/powerpoint/2010/main" val="1669585764"/>
+        <p14:creationId xmlns:p14="http://schemas.microsoft.com/office/powerpoint/2010/main" val="2263901205"/>
       </p:ext>
     </p:extLst>
   </p:cSld>
@@ -26984,8 +26928,84 @@
           <a:p>
             <a:r>
               <a:rPr lang="en-US" dirty="0"/>
-              <a:t>Here there is only one significant relationship between phylogenetic distance and environmental variable – so the null model may not be appropriate for this data – however, we must consider that this dataset was drastically reduced to allow the correlograms to process on my local computer. With that in mind, we continue with the null model analysis.</a:t>
-            </a:r>
+              <a:t>This is the result of the model fitting with the Sommers dataset (not reduced).</a:t>
+            </a:r>
+          </a:p>
+          <a:p>
+            <a:r>
+              <a:rPr lang="en-US" dirty="0"/>
+              <a:t>X axis = log mean relative abundances of each ASV</a:t>
+            </a:r>
+          </a:p>
+          <a:p>
+            <a:r>
+              <a:rPr lang="en-US" dirty="0"/>
+              <a:t>Y axis = mean occurrence frequency of each ASV </a:t>
+            </a:r>
+          </a:p>
+          <a:p>
+            <a:r>
+              <a:rPr lang="en-US" dirty="0"/>
+              <a:t>Points = observed log relative abundances against occurrence frequencies</a:t>
+            </a:r>
+          </a:p>
+          <a:p>
+            <a:r>
+              <a:rPr lang="en-US" dirty="0"/>
+              <a:t>Solid line = predicted log relative abundances plotted against occurrence frequencies</a:t>
+            </a:r>
+          </a:p>
+          <a:p>
+            <a:r>
+              <a:rPr lang="en-US" dirty="0"/>
+              <a:t>Dotted lines = 95% confidence intervals</a:t>
+            </a:r>
+          </a:p>
+          <a:p>
+            <a:endParaRPr lang="en-US" dirty="0"/>
+          </a:p>
+          <a:p>
+            <a:r>
+              <a:rPr lang="en-US" dirty="0"/>
+              <a:t>This allows us to assess to what degree observed community structure can be explained by stochastic processes within each sample.</a:t>
+            </a:r>
+          </a:p>
+          <a:p>
+            <a:r>
+              <a:rPr lang="en-US" dirty="0"/>
+              <a:t>The Sloan neutral model is applied here. This model does not take into account phylogenetic distance. </a:t>
+            </a:r>
+          </a:p>
+          <a:p>
+            <a:r>
+              <a:rPr lang="en-US" dirty="0"/>
+              <a:t>ASV occurrence frequency is explained as a function of ASV abundance within the metacommunity (i.e. the more abundant an ASV is in the metacommunity, the more frequently it will be detected in the local community by chance). </a:t>
+            </a:r>
+          </a:p>
+          <a:p>
+            <a:r>
+              <a:rPr lang="en-US" dirty="0"/>
+              <a:t>The neutral model performed well, explaining 77% of variation in ASV detection frequency with an estimated migration factor of 0.02 between sites.</a:t>
+            </a:r>
+          </a:p>
+          <a:p>
+            <a:r>
+              <a:rPr lang="en-US" dirty="0"/>
+              <a:t>These results suggest that neutral assembly processes can explain the pattern of observed ASV occurrence frequencies </a:t>
+            </a:r>
+            <a:r>
+              <a:rPr lang="en-US" strike="sngStrike" dirty="0"/>
+              <a:t>and that the the regional species pool is a driving factor in the community composition of these samples. </a:t>
+            </a:r>
+          </a:p>
+          <a:p>
+            <a:r>
+              <a:rPr lang="en-US" strike="noStrike" dirty="0"/>
+              <a:t>The deviation of predicted occurrence frequencies from observed occurrence frequencies suggests that there are also deterministic processes driving community composition.</a:t>
+            </a:r>
+          </a:p>
+          <a:p>
+            <a:endParaRPr lang="en-US" dirty="0"/>
           </a:p>
         </p:txBody>
       </p:sp>
@@ -27006,7 +27026,7 @@
           <a:p>
             <a:fld id="{91AE2140-D502-214A-B76B-E0784B2C949B}" type="slidenum">
               <a:rPr lang="en-US" smtClean="0"/>
-              <a:t>28</a:t>
+              <a:t>27</a:t>
             </a:fld>
             <a:endParaRPr lang="en-US"/>
           </a:p>
@@ -27015,7 +27035,7 @@
     </p:spTree>
     <p:extLst>
       <p:ext uri="{BB962C8B-B14F-4D97-AF65-F5344CB8AC3E}">
-        <p14:creationId xmlns:p14="http://schemas.microsoft.com/office/powerpoint/2010/main" val="1424753429"/>
+        <p14:creationId xmlns:p14="http://schemas.microsoft.com/office/powerpoint/2010/main" val="1669585764"/>
       </p:ext>
     </p:extLst>
   </p:cSld>
@@ -27071,71 +27091,8 @@
           <a:p>
             <a:r>
               <a:rPr lang="en-US" dirty="0"/>
-              <a:t>Stochastic processes can produce complex spatial community patterns. </a:t>
-            </a:r>
-          </a:p>
-          <a:p>
-            <a:r>
-              <a:rPr lang="en-US" dirty="0"/>
-              <a:t>Ecological drift = random birth/death events in a specific area, in the absence of selection. Ecological drift is particularly important when dispersal is limited as illustrated by island biogeography theory.</a:t>
-            </a:r>
-          </a:p>
-          <a:p>
-            <a:r>
-              <a:rPr lang="en-US" dirty="0"/>
-              <a:t>Dispersal limitation between isolated habitats promotes local extinction and ecological drift which causes initially identical communities to diverge. Ecological drift can cause communities to diverge, even when dispersal is high and selection pressure is low.</a:t>
-            </a:r>
-          </a:p>
-          <a:p>
-            <a:r>
-              <a:rPr lang="en-US" dirty="0"/>
-              <a:t>Homogenizing dispersal = high dispersal rates leading to similar communities between habitats (overcomes the impact of ecological drift and even deterministic processes)</a:t>
-            </a:r>
-          </a:p>
-          <a:p>
-            <a:endParaRPr lang="en-US" dirty="0"/>
-          </a:p>
-          <a:p>
-            <a:r>
-              <a:rPr lang="en-US" dirty="0"/>
-              <a:t>Deterministic (deterministic processes commonly mean beta diversity varies as a result of environmental characteristics – i.e. communities are more or less different due to the differences or similarities of the environments)</a:t>
-            </a:r>
-          </a:p>
-          <a:p>
-            <a:r>
-              <a:rPr lang="en-US" dirty="0"/>
-              <a:t>Variable selection – deterministic processes are driving variable composition between communities. Different areas have different environmental characteristics that select for different species.</a:t>
-            </a:r>
-          </a:p>
-          <a:p>
-            <a:r>
-              <a:rPr lang="en-US" dirty="0"/>
-              <a:t>Homogenizing selection – deterministic processes are driving homogenous composition between communities. Different areas have similar environmental characteristics that select for similar species.</a:t>
-            </a:r>
-          </a:p>
-          <a:p>
-            <a:endParaRPr lang="en-US" dirty="0"/>
-          </a:p>
-          <a:p>
-            <a:r>
-              <a:rPr lang="en-US" dirty="0"/>
-              <a:t>Dispersal limitation – stochastic dispersal limitation is driving variable composition between communities </a:t>
-            </a:r>
-          </a:p>
-          <a:p>
-            <a:r>
-              <a:rPr lang="en-US" dirty="0"/>
-              <a:t>Homogenizing dispersal – stochastic high dispersal is driving homogenous composition between communities</a:t>
-            </a:r>
-          </a:p>
-          <a:p>
-            <a:r>
-              <a:rPr lang="en-US" dirty="0"/>
-              <a:t>Ecological drift – stochastic ecological drift is driving variable composition between communities</a:t>
-            </a:r>
-          </a:p>
-          <a:p>
-            <a:endParaRPr lang="en-US" dirty="0"/>
+              <a:t>Here there is only one significant relationship between phylogenetic distance and environmental variable – so the null model may not be appropriate for this data – however, we must consider that this dataset was drastically reduced to allow the correlograms to process on my local computer. With that in mind, we continue with the null model analysis.</a:t>
+            </a:r>
           </a:p>
         </p:txBody>
       </p:sp>
@@ -27165,7 +27122,7 @@
     </p:spTree>
     <p:extLst>
       <p:ext uri="{BB962C8B-B14F-4D97-AF65-F5344CB8AC3E}">
-        <p14:creationId xmlns:p14="http://schemas.microsoft.com/office/powerpoint/2010/main" val="4270121788"/>
+        <p14:creationId xmlns:p14="http://schemas.microsoft.com/office/powerpoint/2010/main" val="1424753429"/>
       </p:ext>
     </p:extLst>
   </p:cSld>
@@ -27386,7 +27343,25 @@
           <a:p>
             <a:r>
               <a:rPr lang="en-US" dirty="0"/>
-              <a:t>Whilst multivariate analysis can assist us in investigating abiotic selection, microbial community assembly is also shaped by biotic selection. </a:t>
+              <a:t>Stochastic processes can produce complex spatial community patterns. </a:t>
+            </a:r>
+          </a:p>
+          <a:p>
+            <a:r>
+              <a:rPr lang="en-US" dirty="0"/>
+              <a:t>Ecological drift = random birth/death events in a specific area, in the absence of selection. Ecological drift is particularly important when dispersal is limited as illustrated by island biogeography theory.</a:t>
+            </a:r>
+          </a:p>
+          <a:p>
+            <a:r>
+              <a:rPr lang="en-US" dirty="0"/>
+              <a:t>Dispersal limitation between isolated habitats promotes local extinction and ecological drift which causes initially identical communities to diverge. Ecological drift can cause communities to diverge, even when dispersal is high and selection pressure is low.</a:t>
+            </a:r>
+          </a:p>
+          <a:p>
+            <a:r>
+              <a:rPr lang="en-US" dirty="0"/>
+              <a:t>Homogenizing dispersal = high dispersal rates leading to similar communities between habitats (overcomes the impact of ecological drift and even deterministic processes)</a:t>
             </a:r>
           </a:p>
           <a:p>
@@ -27395,7 +27370,19 @@
           <a:p>
             <a:r>
               <a:rPr lang="en-US" dirty="0"/>
-              <a:t>Biotic interactions may include top-down control through viral lysis and grazing, as well as microbe-microbe interactions.</a:t>
+              <a:t>Deterministic (deterministic processes commonly mean beta diversity varies as a result of environmental characteristics – i.e. communities are more or less different due to the differences or similarities of the environments)</a:t>
+            </a:r>
+          </a:p>
+          <a:p>
+            <a:r>
+              <a:rPr lang="en-US" dirty="0"/>
+              <a:t>Variable selection – deterministic processes are driving variable composition between communities. Different areas have different environmental characteristics that select for different species.</a:t>
+            </a:r>
+          </a:p>
+          <a:p>
+            <a:r>
+              <a:rPr lang="en-US" dirty="0"/>
+              <a:t>Homogenizing selection – deterministic processes are driving homogenous composition between communities. Different areas have similar environmental characteristics that select for similar species.</a:t>
             </a:r>
           </a:p>
           <a:p>
@@ -27404,34 +27391,23 @@
           <a:p>
             <a:r>
               <a:rPr lang="en-US" dirty="0"/>
-              <a:t>Due to technological restrictions, investigations of microbe-microbe interactions have typically been limited. With access to high-throughout sequencing, we can now construct co-occurrence networks in an attempt to decipher intra- and inter-specific interactions within communities.</a:t>
+              <a:t>Dispersal limitation – stochastic dispersal limitation is driving variable composition between communities </a:t>
+            </a:r>
+          </a:p>
+          <a:p>
+            <a:r>
+              <a:rPr lang="en-US" dirty="0"/>
+              <a:t>Homogenizing dispersal – stochastic high dispersal is driving homogenous composition between communities</a:t>
+            </a:r>
+          </a:p>
+          <a:p>
+            <a:r>
+              <a:rPr lang="en-US" dirty="0"/>
+              <a:t>Ecological drift – stochastic ecological drift is driving variable composition between communities</a:t>
             </a:r>
           </a:p>
           <a:p>
             <a:endParaRPr lang="en-US" dirty="0"/>
-          </a:p>
-          <a:p>
-            <a:r>
-              <a:rPr lang="en-US" dirty="0"/>
-              <a:t>Previous research has indicated that microbial communities exhibit non-random co-occurrence patterns and module structures, suggesting that biotic selection plays a strong role in shaping community assembly.</a:t>
-            </a:r>
-          </a:p>
-          <a:p>
-            <a:endParaRPr lang="en-US" dirty="0"/>
-          </a:p>
-          <a:p>
-            <a:r>
-              <a:rPr lang="en-US" dirty="0"/>
-              <a:t>Communities may even </a:t>
-            </a:r>
-            <a:r>
-              <a:rPr lang="en-US" dirty="0" err="1"/>
-              <a:t>centre</a:t>
-            </a:r>
-            <a:r>
-              <a:rPr lang="en-US" dirty="0"/>
-              <a:t> around keystone species, that maintain the functioning of the community as a whole. </a:t>
-            </a:r>
           </a:p>
         </p:txBody>
       </p:sp>
@@ -27452,7 +27428,7 @@
           <a:p>
             <a:fld id="{91AE2140-D502-214A-B76B-E0784B2C949B}" type="slidenum">
               <a:rPr lang="en-US" smtClean="0"/>
-              <a:t>31</a:t>
+              <a:t>30</a:t>
             </a:fld>
             <a:endParaRPr lang="en-US"/>
           </a:p>
@@ -27461,7 +27437,7 @@
     </p:spTree>
     <p:extLst>
       <p:ext uri="{BB962C8B-B14F-4D97-AF65-F5344CB8AC3E}">
-        <p14:creationId xmlns:p14="http://schemas.microsoft.com/office/powerpoint/2010/main" val="2107534487"/>
+        <p14:creationId xmlns:p14="http://schemas.microsoft.com/office/powerpoint/2010/main" val="4270121788"/>
       </p:ext>
     </p:extLst>
   </p:cSld>
@@ -27517,42 +27493,34 @@
           <a:p>
             <a:r>
               <a:rPr lang="en-US" dirty="0"/>
-              <a:t>Centrality – how close is a node to the network as a whole </a:t>
-            </a:r>
-          </a:p>
-          <a:p>
-            <a:pPr marL="0" marR="0" lvl="0" indent="0" algn="l" defTabSz="914400" rtl="0" eaLnBrk="1" fontAlgn="auto" latinLnBrk="0" hangingPunct="1">
-              <a:lnSpc>
-                <a:spcPct val="100000"/>
-              </a:lnSpc>
-              <a:spcBef>
-                <a:spcPts val="0"/>
-              </a:spcBef>
-              <a:spcAft>
-                <a:spcPts val="0"/>
-              </a:spcAft>
-              <a:buClrTx/>
-              <a:buSzTx/>
-              <a:buFontTx/>
-              <a:buNone/>
-              <a:tabLst/>
-              <a:defRPr/>
-            </a:pPr>
+              <a:t>Whilst multivariate analysis can assist us in investigating abiotic selection, microbial community assembly is also shaped by biotic selection. </a:t>
+            </a:r>
+          </a:p>
+          <a:p>
+            <a:endParaRPr lang="en-US" dirty="0"/>
+          </a:p>
+          <a:p>
             <a:r>
               <a:rPr lang="en-US" dirty="0"/>
-              <a:t>Degree Centrality – number of links connected to a node (who has the most friends?)</a:t>
-            </a:r>
+              <a:t>Biotic interactions may include top-down control through viral lysis and grazing, as well as microbe-microbe interactions.</a:t>
+            </a:r>
+          </a:p>
+          <a:p>
+            <a:endParaRPr lang="en-US" dirty="0"/>
           </a:p>
           <a:p>
             <a:r>
               <a:rPr lang="en-US" dirty="0"/>
-              <a:t>Closeness Centrality -  average length of the shortest path between the node and all other nodes in the graph (how long does it take me on average to reach another node)</a:t>
-            </a:r>
+              <a:t>Due to technological restrictions, investigations of microbe-microbe interactions have typically been limited. With access to high-throughout sequencing, we can now construct co-occurrence networks in an attempt to decipher intra- and inter-specific interactions within communities.</a:t>
+            </a:r>
+          </a:p>
+          <a:p>
+            <a:endParaRPr lang="en-US" dirty="0"/>
           </a:p>
           <a:p>
             <a:r>
               <a:rPr lang="en-US" dirty="0"/>
-              <a:t>Betweenness Centrality – the number of times a node is crossed by each of the shortest routes between nodes (between any two nodes there is a shortest distance to travel. How many shortest distances is the node of interest within?)</a:t>
+              <a:t>Previous research has indicated that microbial communities exhibit non-random co-occurrence patterns and module structures, suggesting that biotic selection plays a strong role in shaping community assembly.</a:t>
             </a:r>
           </a:p>
           <a:p>
@@ -27561,32 +27529,16 @@
           <a:p>
             <a:r>
               <a:rPr lang="en-US" dirty="0"/>
-              <a:t>Clustering</a:t>
-            </a:r>
-          </a:p>
-          <a:p>
+              <a:t>Communities may even </a:t>
+            </a:r>
+            <a:r>
+              <a:rPr lang="en-US" dirty="0" err="1"/>
+              <a:t>centre</a:t>
+            </a:r>
             <a:r>
               <a:rPr lang="en-US" dirty="0"/>
-              <a:t>What groups are within the network?</a:t>
-            </a:r>
-          </a:p>
-          <a:p>
-            <a:r>
-              <a:rPr lang="en-US" dirty="0"/>
-              <a:t>Clustering coefficient – how many connections are there to other nodes, compared to the POTENTIAL number of connections to other nodes within the group?</a:t>
-            </a:r>
-          </a:p>
-          <a:p>
-            <a:r>
-              <a:rPr lang="en-US" dirty="0"/>
-              <a:t>Clustering coefficient = 1 means there is a clique, so all nodes are connected to each other in a group</a:t>
-            </a:r>
-          </a:p>
-          <a:p>
-            <a:endParaRPr lang="en-US" dirty="0"/>
-          </a:p>
-          <a:p>
-            <a:endParaRPr lang="en-US" dirty="0"/>
+              <a:t> around keystone species, that maintain the functioning of the community as a whole. </a:t>
+            </a:r>
           </a:p>
         </p:txBody>
       </p:sp>
@@ -27616,7 +27568,7 @@
     </p:spTree>
     <p:extLst>
       <p:ext uri="{BB962C8B-B14F-4D97-AF65-F5344CB8AC3E}">
-        <p14:creationId xmlns:p14="http://schemas.microsoft.com/office/powerpoint/2010/main" val="553393038"/>
+        <p14:creationId xmlns:p14="http://schemas.microsoft.com/office/powerpoint/2010/main" val="2107534487"/>
       </p:ext>
     </p:extLst>
   </p:cSld>
@@ -27670,6 +27622,77 @@
           <a:bodyPr/>
           <a:lstStyle/>
           <a:p>
+            <a:r>
+              <a:rPr lang="en-US" dirty="0"/>
+              <a:t>Centrality – how close is a node to the network as a whole </a:t>
+            </a:r>
+          </a:p>
+          <a:p>
+            <a:pPr marL="0" marR="0" lvl="0" indent="0" algn="l" defTabSz="914400" rtl="0" eaLnBrk="1" fontAlgn="auto" latinLnBrk="0" hangingPunct="1">
+              <a:lnSpc>
+                <a:spcPct val="100000"/>
+              </a:lnSpc>
+              <a:spcBef>
+                <a:spcPts val="0"/>
+              </a:spcBef>
+              <a:spcAft>
+                <a:spcPts val="0"/>
+              </a:spcAft>
+              <a:buClrTx/>
+              <a:buSzTx/>
+              <a:buFontTx/>
+              <a:buNone/>
+              <a:tabLst/>
+              <a:defRPr/>
+            </a:pPr>
+            <a:r>
+              <a:rPr lang="en-US" dirty="0"/>
+              <a:t>Degree Centrality – number of links connected to a node (who has the most friends?)</a:t>
+            </a:r>
+          </a:p>
+          <a:p>
+            <a:r>
+              <a:rPr lang="en-US" dirty="0"/>
+              <a:t>Closeness Centrality -  average length of the shortest path between the node and all other nodes in the graph (how long does it take me on average to reach another node)</a:t>
+            </a:r>
+          </a:p>
+          <a:p>
+            <a:r>
+              <a:rPr lang="en-US" dirty="0"/>
+              <a:t>Betweenness Centrality – the number of times a node is crossed by each of the shortest routes between nodes (between any two nodes there is a shortest distance to travel. How many shortest distances is the node of interest within?)</a:t>
+            </a:r>
+          </a:p>
+          <a:p>
+            <a:endParaRPr lang="en-US" dirty="0"/>
+          </a:p>
+          <a:p>
+            <a:r>
+              <a:rPr lang="en-US" dirty="0"/>
+              <a:t>Clustering</a:t>
+            </a:r>
+          </a:p>
+          <a:p>
+            <a:r>
+              <a:rPr lang="en-US" dirty="0"/>
+              <a:t>What groups are within the network?</a:t>
+            </a:r>
+          </a:p>
+          <a:p>
+            <a:r>
+              <a:rPr lang="en-US" dirty="0"/>
+              <a:t>Clustering coefficient – how many connections are there to other nodes, compared to the POTENTIAL number of connections to other nodes within the group?</a:t>
+            </a:r>
+          </a:p>
+          <a:p>
+            <a:r>
+              <a:rPr lang="en-US" dirty="0"/>
+              <a:t>Clustering coefficient = 1 means there is a clique, so all nodes are connected to each other in a group</a:t>
+            </a:r>
+          </a:p>
+          <a:p>
+            <a:endParaRPr lang="en-US" dirty="0"/>
+          </a:p>
+          <a:p>
             <a:endParaRPr lang="en-US" dirty="0"/>
           </a:p>
         </p:txBody>
@@ -27700,7 +27723,379 @@
     </p:spTree>
     <p:extLst>
       <p:ext uri="{BB962C8B-B14F-4D97-AF65-F5344CB8AC3E}">
+        <p14:creationId xmlns:p14="http://schemas.microsoft.com/office/powerpoint/2010/main" val="553393038"/>
+      </p:ext>
+    </p:extLst>
+  </p:cSld>
+  <p:clrMapOvr>
+    <a:masterClrMapping/>
+  </p:clrMapOvr>
+</p:notes>
+</file>
+
+<file path=ppt/notesSlides/notesSlide23.xml><?xml version="1.0" encoding="utf-8"?>
+<p:notes xmlns:a="http://schemas.openxmlformats.org/drawingml/2006/main" xmlns:r="http://schemas.openxmlformats.org/officeDocument/2006/relationships" xmlns:p="http://schemas.openxmlformats.org/presentationml/2006/main">
+  <p:cSld>
+    <p:spTree>
+      <p:nvGrpSpPr>
+        <p:cNvPr id="1" name=""/>
+        <p:cNvGrpSpPr/>
+        <p:nvPr/>
+      </p:nvGrpSpPr>
+      <p:grpSpPr>
+        <a:xfrm>
+          <a:off x="0" y="0"/>
+          <a:ext cx="0" cy="0"/>
+          <a:chOff x="0" y="0"/>
+          <a:chExt cx="0" cy="0"/>
+        </a:xfrm>
+      </p:grpSpPr>
+      <p:sp>
+        <p:nvSpPr>
+          <p:cNvPr id="2" name="Slide Image Placeholder 1"/>
+          <p:cNvSpPr>
+            <a:spLocks noGrp="1" noRot="1" noChangeAspect="1"/>
+          </p:cNvSpPr>
+          <p:nvPr>
+            <p:ph type="sldImg"/>
+          </p:nvPr>
+        </p:nvSpPr>
+        <p:spPr/>
+      </p:sp>
+      <p:sp>
+        <p:nvSpPr>
+          <p:cNvPr id="3" name="Notes Placeholder 2"/>
+          <p:cNvSpPr>
+            <a:spLocks noGrp="1"/>
+          </p:cNvSpPr>
+          <p:nvPr>
+            <p:ph type="body" idx="1"/>
+          </p:nvPr>
+        </p:nvSpPr>
+        <p:spPr/>
+        <p:txBody>
+          <a:bodyPr/>
+          <a:lstStyle/>
+          <a:p>
+            <a:r>
+              <a:rPr lang="en-GB" dirty="0"/>
+              <a:t>Based on correlation analysis, for the positive co-occurrence network, 6526 edges, which depict significant and strong pairwise correlations between species (Spearman's </a:t>
+            </a:r>
+            <a:r>
+              <a:rPr lang="el-GR" i="1" dirty="0"/>
+              <a:t>ρ</a:t>
+            </a:r>
+            <a:r>
+              <a:rPr lang="el-GR" dirty="0"/>
+              <a:t> ≥ 0.6, </a:t>
+            </a:r>
+            <a:r>
+              <a:rPr lang="en-GB" i="1" dirty="0"/>
+              <a:t>P</a:t>
+            </a:r>
+            <a:r>
+              <a:rPr lang="en-GB" dirty="0"/>
+              <a:t> &lt; 0.01), were captured between 554 nodes (i.e. ASVs).</a:t>
+            </a:r>
+          </a:p>
+          <a:p>
+            <a:endParaRPr lang="en-GB" dirty="0"/>
+          </a:p>
+          <a:p>
+            <a:pPr marL="0" marR="0" lvl="0" indent="0" algn="l" defTabSz="914400" rtl="0" eaLnBrk="1" fontAlgn="auto" latinLnBrk="0" hangingPunct="1">
+              <a:lnSpc>
+                <a:spcPct val="100000"/>
+              </a:lnSpc>
+              <a:spcBef>
+                <a:spcPts val="0"/>
+              </a:spcBef>
+              <a:spcAft>
+                <a:spcPts val="0"/>
+              </a:spcAft>
+              <a:buClrTx/>
+              <a:buSzTx/>
+              <a:buFontTx/>
+              <a:buNone/>
+              <a:tabLst/>
+              <a:defRPr/>
+            </a:pPr>
+            <a:r>
+              <a:rPr lang="en-GB" dirty="0"/>
+              <a:t>Based on correlation analysis, for the negative co-occurrence network, 1780 edges, which depict significant and strong pairwise correlations between species (Spearman's </a:t>
+            </a:r>
+            <a:r>
+              <a:rPr lang="el-GR" i="1" dirty="0"/>
+              <a:t>ρ</a:t>
+            </a:r>
+            <a:r>
+              <a:rPr lang="el-GR" dirty="0"/>
+              <a:t> ≥ 0.6, </a:t>
+            </a:r>
+            <a:r>
+              <a:rPr lang="en-GB" i="1" dirty="0"/>
+              <a:t>P</a:t>
+            </a:r>
+            <a:r>
+              <a:rPr lang="en-GB" dirty="0"/>
+              <a:t> &lt; 0.01), were captured between 299 nodes (i.e. ASVs).</a:t>
+            </a:r>
+          </a:p>
+          <a:p>
+            <a:endParaRPr lang="en-GB" dirty="0"/>
+          </a:p>
+          <a:p>
+            <a:endParaRPr lang="en-GB" dirty="0"/>
+          </a:p>
+          <a:p>
+            <a:endParaRPr lang="en-US" dirty="0"/>
+          </a:p>
+        </p:txBody>
+      </p:sp>
+      <p:sp>
+        <p:nvSpPr>
+          <p:cNvPr id="4" name="Slide Number Placeholder 3"/>
+          <p:cNvSpPr>
+            <a:spLocks noGrp="1"/>
+          </p:cNvSpPr>
+          <p:nvPr>
+            <p:ph type="sldNum" sz="quarter" idx="5"/>
+          </p:nvPr>
+        </p:nvSpPr>
+        <p:spPr/>
+        <p:txBody>
+          <a:bodyPr/>
+          <a:lstStyle/>
+          <a:p>
+            <a:fld id="{91AE2140-D502-214A-B76B-E0784B2C949B}" type="slidenum">
+              <a:rPr lang="en-US" smtClean="0"/>
+              <a:t>34</a:t>
+            </a:fld>
+            <a:endParaRPr lang="en-US"/>
+          </a:p>
+        </p:txBody>
+      </p:sp>
+    </p:spTree>
+    <p:extLst>
+      <p:ext uri="{BB962C8B-B14F-4D97-AF65-F5344CB8AC3E}">
+        <p14:creationId xmlns:p14="http://schemas.microsoft.com/office/powerpoint/2010/main" val="301421177"/>
+      </p:ext>
+    </p:extLst>
+  </p:cSld>
+  <p:clrMapOvr>
+    <a:masterClrMapping/>
+  </p:clrMapOvr>
+</p:notes>
+</file>
+
+<file path=ppt/notesSlides/notesSlide24.xml><?xml version="1.0" encoding="utf-8"?>
+<p:notes xmlns:a="http://schemas.openxmlformats.org/drawingml/2006/main" xmlns:r="http://schemas.openxmlformats.org/officeDocument/2006/relationships" xmlns:p="http://schemas.openxmlformats.org/presentationml/2006/main">
+  <p:cSld>
+    <p:spTree>
+      <p:nvGrpSpPr>
+        <p:cNvPr id="1" name=""/>
+        <p:cNvGrpSpPr/>
+        <p:nvPr/>
+      </p:nvGrpSpPr>
+      <p:grpSpPr>
+        <a:xfrm>
+          <a:off x="0" y="0"/>
+          <a:ext cx="0" cy="0"/>
+          <a:chOff x="0" y="0"/>
+          <a:chExt cx="0" cy="0"/>
+        </a:xfrm>
+      </p:grpSpPr>
+      <p:sp>
+        <p:nvSpPr>
+          <p:cNvPr id="2" name="Slide Image Placeholder 1"/>
+          <p:cNvSpPr>
+            <a:spLocks noGrp="1" noRot="1" noChangeAspect="1"/>
+          </p:cNvSpPr>
+          <p:nvPr>
+            <p:ph type="sldImg"/>
+          </p:nvPr>
+        </p:nvSpPr>
+        <p:spPr/>
+      </p:sp>
+      <p:sp>
+        <p:nvSpPr>
+          <p:cNvPr id="3" name="Notes Placeholder 2"/>
+          <p:cNvSpPr>
+            <a:spLocks noGrp="1"/>
+          </p:cNvSpPr>
+          <p:nvPr>
+            <p:ph type="body" idx="1"/>
+          </p:nvPr>
+        </p:nvSpPr>
+        <p:spPr/>
+        <p:txBody>
+          <a:bodyPr/>
+          <a:lstStyle/>
+          <a:p>
+            <a:endParaRPr lang="en-US" dirty="0"/>
+          </a:p>
+        </p:txBody>
+      </p:sp>
+      <p:sp>
+        <p:nvSpPr>
+          <p:cNvPr id="4" name="Slide Number Placeholder 3"/>
+          <p:cNvSpPr>
+            <a:spLocks noGrp="1"/>
+          </p:cNvSpPr>
+          <p:nvPr>
+            <p:ph type="sldNum" sz="quarter" idx="5"/>
+          </p:nvPr>
+        </p:nvSpPr>
+        <p:spPr/>
+        <p:txBody>
+          <a:bodyPr/>
+          <a:lstStyle/>
+          <a:p>
+            <a:fld id="{91AE2140-D502-214A-B76B-E0784B2C949B}" type="slidenum">
+              <a:rPr lang="en-US" smtClean="0"/>
+              <a:t>35</a:t>
+            </a:fld>
+            <a:endParaRPr lang="en-US"/>
+          </a:p>
+        </p:txBody>
+      </p:sp>
+    </p:spTree>
+    <p:extLst>
+      <p:ext uri="{BB962C8B-B14F-4D97-AF65-F5344CB8AC3E}">
         <p14:creationId xmlns:p14="http://schemas.microsoft.com/office/powerpoint/2010/main" val="2121078948"/>
+      </p:ext>
+    </p:extLst>
+  </p:cSld>
+  <p:clrMapOvr>
+    <a:masterClrMapping/>
+  </p:clrMapOvr>
+</p:notes>
+</file>
+
+<file path=ppt/notesSlides/notesSlide25.xml><?xml version="1.0" encoding="utf-8"?>
+<p:notes xmlns:a="http://schemas.openxmlformats.org/drawingml/2006/main" xmlns:r="http://schemas.openxmlformats.org/officeDocument/2006/relationships" xmlns:p="http://schemas.openxmlformats.org/presentationml/2006/main">
+  <p:cSld>
+    <p:spTree>
+      <p:nvGrpSpPr>
+        <p:cNvPr id="1" name=""/>
+        <p:cNvGrpSpPr/>
+        <p:nvPr/>
+      </p:nvGrpSpPr>
+      <p:grpSpPr>
+        <a:xfrm>
+          <a:off x="0" y="0"/>
+          <a:ext cx="0" cy="0"/>
+          <a:chOff x="0" y="0"/>
+          <a:chExt cx="0" cy="0"/>
+        </a:xfrm>
+      </p:grpSpPr>
+      <p:sp>
+        <p:nvSpPr>
+          <p:cNvPr id="2" name="Slide Image Placeholder 1"/>
+          <p:cNvSpPr>
+            <a:spLocks noGrp="1" noRot="1" noChangeAspect="1"/>
+          </p:cNvSpPr>
+          <p:nvPr>
+            <p:ph type="sldImg"/>
+          </p:nvPr>
+        </p:nvSpPr>
+        <p:spPr/>
+      </p:sp>
+      <p:sp>
+        <p:nvSpPr>
+          <p:cNvPr id="3" name="Notes Placeholder 2"/>
+          <p:cNvSpPr>
+            <a:spLocks noGrp="1"/>
+          </p:cNvSpPr>
+          <p:nvPr>
+            <p:ph type="body" idx="1"/>
+          </p:nvPr>
+        </p:nvSpPr>
+        <p:spPr/>
+        <p:txBody>
+          <a:bodyPr/>
+          <a:lstStyle/>
+          <a:p>
+            <a:r>
+              <a:rPr lang="en-US" dirty="0"/>
+              <a:t>Packages:</a:t>
+            </a:r>
+          </a:p>
+          <a:p>
+            <a:r>
+              <a:rPr lang="en-US" dirty="0"/>
+              <a:t>Vegan</a:t>
+            </a:r>
+          </a:p>
+          <a:p>
+            <a:r>
+              <a:rPr lang="en-US" dirty="0" err="1"/>
+              <a:t>Igraph</a:t>
+            </a:r>
+            <a:endParaRPr lang="en-US" dirty="0"/>
+          </a:p>
+          <a:p>
+            <a:r>
+              <a:rPr lang="en-US" dirty="0" err="1"/>
+              <a:t>Hmisc</a:t>
+            </a:r>
+            <a:endParaRPr lang="en-US" dirty="0"/>
+          </a:p>
+          <a:p>
+            <a:endParaRPr lang="en-US" dirty="0"/>
+          </a:p>
+          <a:p>
+            <a:r>
+              <a:rPr lang="en-US" dirty="0"/>
+              <a:t>1) Defines functions for co-occurrence network analysis. Function needs a matrix with samples as columns and ASVs as rows, as well as the </a:t>
+            </a:r>
+            <a:r>
+              <a:rPr lang="en-GB" dirty="0" err="1"/>
+              <a:t>cutoffs</a:t>
+            </a:r>
+            <a:r>
+              <a:rPr lang="en-GB" dirty="0"/>
+              <a:t> for clustering coefficient and cut off for FDR-adjusted P-value. </a:t>
+            </a:r>
+          </a:p>
+          <a:p>
+            <a:endParaRPr lang="en-GB" dirty="0"/>
+          </a:p>
+          <a:p>
+            <a:r>
+              <a:rPr lang="en-GB" dirty="0"/>
+              <a:t>2) </a:t>
+            </a:r>
+            <a:endParaRPr lang="en-US" dirty="0"/>
+          </a:p>
+        </p:txBody>
+      </p:sp>
+      <p:sp>
+        <p:nvSpPr>
+          <p:cNvPr id="4" name="Slide Number Placeholder 3"/>
+          <p:cNvSpPr>
+            <a:spLocks noGrp="1"/>
+          </p:cNvSpPr>
+          <p:nvPr>
+            <p:ph type="sldNum" sz="quarter" idx="5"/>
+          </p:nvPr>
+        </p:nvSpPr>
+        <p:spPr/>
+        <p:txBody>
+          <a:bodyPr/>
+          <a:lstStyle/>
+          <a:p>
+            <a:fld id="{91AE2140-D502-214A-B76B-E0784B2C949B}" type="slidenum">
+              <a:rPr lang="en-US" smtClean="0"/>
+              <a:t>36</a:t>
+            </a:fld>
+            <a:endParaRPr lang="en-US"/>
+          </a:p>
+        </p:txBody>
+      </p:sp>
+    </p:spTree>
+    <p:extLst>
+      <p:ext uri="{BB962C8B-B14F-4D97-AF65-F5344CB8AC3E}">
+        <p14:creationId xmlns:p14="http://schemas.microsoft.com/office/powerpoint/2010/main" val="1986868823"/>
       </p:ext>
     </p:extLst>
   </p:cSld>
@@ -28785,51 +29180,53 @@
           <a:bodyPr/>
           <a:lstStyle/>
           <a:p>
-            <a:pPr marL="228600" indent="-228600">
-              <a:buAutoNum type="arabicParenR"/>
-            </a:pPr>
-            <a:r>
-              <a:rPr lang="en-US" dirty="0"/>
-              <a:t>Used ‘vegan’ package to get Shannon, Simpsons, Inverted Simpsons Diversity Indexes of count data in each sample. Also </a:t>
-            </a:r>
-            <a:r>
-              <a:rPr lang="en-US" dirty="0" err="1"/>
-              <a:t>Pilou</a:t>
-            </a:r>
-            <a:r>
-              <a:rPr lang="en-US" dirty="0"/>
-              <a:t> evenness and Faith’s phylogenetic diversity. </a:t>
-            </a:r>
-          </a:p>
-          <a:p>
-            <a:pPr marL="228600" indent="-228600">
-              <a:buAutoNum type="arabicParenR"/>
-            </a:pPr>
+            <a:r>
+              <a:rPr lang="en-US" sz="1200" dirty="0"/>
+              <a:t>Calculated ASV richness and Shannon Diversity Index for each Glacier</a:t>
+            </a:r>
+          </a:p>
+          <a:p>
+            <a:r>
+              <a:rPr lang="en-US" sz="1200" dirty="0"/>
+              <a:t>Used Two Samples T-Test to compare ASV richness between glaciers (as count data was normally distributed) </a:t>
+            </a:r>
+          </a:p>
+          <a:p>
+            <a:r>
+              <a:rPr lang="en-US" sz="1200" dirty="0"/>
+              <a:t>Result: No significant difference between ASV richness (</a:t>
+            </a:r>
+            <a:r>
+              <a:rPr lang="en-US" sz="1200" i="1" dirty="0"/>
+              <a:t>p=0.052</a:t>
+            </a:r>
+            <a:r>
+              <a:rPr lang="en-US" sz="1200" dirty="0"/>
+              <a:t>) </a:t>
+            </a:r>
+          </a:p>
+          <a:p>
+            <a:r>
+              <a:rPr lang="en-US" sz="1200" dirty="0"/>
+              <a:t>Used Two Samples Wilcoxon Test to compare Shannon Diversity Index for each glacier (as index data was not normally distribute)</a:t>
+            </a:r>
+          </a:p>
+          <a:p>
+            <a:r>
+              <a:rPr lang="en-US" sz="1200" dirty="0"/>
+              <a:t>Result: No significant difference between Shannon Diversity (</a:t>
+            </a:r>
+            <a:r>
+              <a:rPr lang="en-US" sz="1200" i="1" dirty="0"/>
+              <a:t>p=0.581</a:t>
+            </a:r>
+            <a:r>
+              <a:rPr lang="en-US" sz="1200" dirty="0"/>
+              <a:t>)</a:t>
+            </a:r>
+          </a:p>
+          <a:p>
             <a:endParaRPr lang="en-US" dirty="0"/>
-          </a:p>
-          <a:p>
-            <a:pPr marL="228600" indent="-228600">
-              <a:buAutoNum type="arabicParenR"/>
-            </a:pPr>
-            <a:r>
-              <a:rPr lang="en-US" dirty="0"/>
-              <a:t>Alternatively use alpha() function from microbiome package to calculate all indices at one!</a:t>
-            </a:r>
-          </a:p>
-          <a:p>
-            <a:pPr marL="228600" indent="-228600">
-              <a:buAutoNum type="arabicParenR"/>
-            </a:pPr>
-            <a:endParaRPr lang="en-US" dirty="0"/>
-          </a:p>
-          <a:p>
-            <a:pPr marL="228600" indent="-228600">
-              <a:buAutoNum type="arabicParenR"/>
-            </a:pPr>
-            <a:r>
-              <a:rPr lang="en-US" dirty="0"/>
-              <a:t>Here we have boxplots comparing the diversity indices of the two glaciers</a:t>
-            </a:r>
           </a:p>
         </p:txBody>
       </p:sp>
@@ -28859,7 +29256,7 @@
     </p:spTree>
     <p:extLst>
       <p:ext uri="{BB962C8B-B14F-4D97-AF65-F5344CB8AC3E}">
-        <p14:creationId xmlns:p14="http://schemas.microsoft.com/office/powerpoint/2010/main" val="3006070899"/>
+        <p14:creationId xmlns:p14="http://schemas.microsoft.com/office/powerpoint/2010/main" val="547813623"/>
       </p:ext>
     </p:extLst>
   </p:cSld>
@@ -28913,9 +29310,50 @@
           <a:bodyPr/>
           <a:lstStyle/>
           <a:p>
+            <a:pPr marL="228600" indent="-228600">
+              <a:buAutoNum type="arabicParenR"/>
+            </a:pPr>
             <a:r>
               <a:rPr lang="en-US" dirty="0"/>
-              <a:t>Comparison of phylogenetic diversities of the two glaciers</a:t>
+              <a:t>Used ‘vegan’ package to get Shannon, Simpsons, Inverted Simpsons Diversity Indexes of count data in each sample. Also </a:t>
+            </a:r>
+            <a:r>
+              <a:rPr lang="en-US" dirty="0" err="1"/>
+              <a:t>Pilou</a:t>
+            </a:r>
+            <a:r>
+              <a:rPr lang="en-US" dirty="0"/>
+              <a:t> evenness and Faith’s phylogenetic diversity. </a:t>
+            </a:r>
+          </a:p>
+          <a:p>
+            <a:pPr marL="228600" indent="-228600">
+              <a:buAutoNum type="arabicParenR"/>
+            </a:pPr>
+            <a:endParaRPr lang="en-US" dirty="0"/>
+          </a:p>
+          <a:p>
+            <a:pPr marL="228600" indent="-228600">
+              <a:buAutoNum type="arabicParenR"/>
+            </a:pPr>
+            <a:r>
+              <a:rPr lang="en-US" dirty="0"/>
+              <a:t>Alternatively use alpha() function from microbiome package to calculate all indices at one!</a:t>
+            </a:r>
+          </a:p>
+          <a:p>
+            <a:pPr marL="228600" indent="-228600">
+              <a:buAutoNum type="arabicParenR"/>
+            </a:pPr>
+            <a:endParaRPr lang="en-US" dirty="0"/>
+          </a:p>
+          <a:p>
+            <a:pPr marL="228600" indent="-228600">
+              <a:buAutoNum type="arabicParenR"/>
+            </a:pPr>
+            <a:r>
+              <a:rPr lang="en-US" dirty="0"/>
+              <a:t>Here we have boxplots comparing the diversity indices of the two glaciers</a:t>
             </a:r>
           </a:p>
         </p:txBody>
@@ -28946,7 +29384,7 @@
     </p:spTree>
     <p:extLst>
       <p:ext uri="{BB962C8B-B14F-4D97-AF65-F5344CB8AC3E}">
-        <p14:creationId xmlns:p14="http://schemas.microsoft.com/office/powerpoint/2010/main" val="4033971060"/>
+        <p14:creationId xmlns:p14="http://schemas.microsoft.com/office/powerpoint/2010/main" val="3006070899"/>
       </p:ext>
     </p:extLst>
   </p:cSld>
@@ -29002,7 +29440,7 @@
           <a:p>
             <a:r>
               <a:rPr lang="en-US" dirty="0"/>
-              <a:t>Relative abundance plots, agglomerated by Class</a:t>
+              <a:t>Comparison of phylogenetic diversities of the two glaciers</a:t>
             </a:r>
           </a:p>
         </p:txBody>
@@ -29024,7 +29462,7 @@
           <a:p>
             <a:fld id="{91AE2140-D502-214A-B76B-E0784B2C949B}" type="slidenum">
               <a:rPr lang="en-US" smtClean="0"/>
-              <a:t>15</a:t>
+              <a:t>14</a:t>
             </a:fld>
             <a:endParaRPr lang="en-US"/>
           </a:p>
@@ -29033,7 +29471,7 @@
     </p:spTree>
     <p:extLst>
       <p:ext uri="{BB962C8B-B14F-4D97-AF65-F5344CB8AC3E}">
-        <p14:creationId xmlns:p14="http://schemas.microsoft.com/office/powerpoint/2010/main" val="761170827"/>
+        <p14:creationId xmlns:p14="http://schemas.microsoft.com/office/powerpoint/2010/main" val="4033971060"/>
       </p:ext>
     </p:extLst>
   </p:cSld>
@@ -29089,23 +29527,7 @@
           <a:p>
             <a:r>
               <a:rPr lang="en-US" dirty="0"/>
-              <a:t>#Unweighted </a:t>
-            </a:r>
-            <a:r>
-              <a:rPr lang="en-US" dirty="0" err="1"/>
-              <a:t>unifrac</a:t>
-            </a:r>
-            <a:r>
-              <a:rPr lang="en-US" dirty="0"/>
-              <a:t> is based on presence/absence not abundance - but it is sensitive to sequencing depth. So if a sample is of greater depth than other reads it may have more low abundance taxa and therefore effect the </a:t>
-            </a:r>
-            <a:r>
-              <a:rPr lang="en-US" dirty="0" err="1"/>
-              <a:t>unifrac</a:t>
-            </a:r>
-            <a:r>
-              <a:rPr lang="en-US" dirty="0"/>
-              <a:t> metric</a:t>
+              <a:t>Relative abundance plots, agglomerated by Class</a:t>
             </a:r>
           </a:p>
         </p:txBody>
@@ -29136,7 +29558,7 @@
     </p:spTree>
     <p:extLst>
       <p:ext uri="{BB962C8B-B14F-4D97-AF65-F5344CB8AC3E}">
-        <p14:creationId xmlns:p14="http://schemas.microsoft.com/office/powerpoint/2010/main" val="127474224"/>
+        <p14:creationId xmlns:p14="http://schemas.microsoft.com/office/powerpoint/2010/main" val="761170827"/>
       </p:ext>
     </p:extLst>
   </p:cSld>
@@ -32679,6 +33101,145 @@
           <p:cNvPr id="2" name="Title 1">
             <a:extLst>
               <a:ext uri="{FF2B5EF4-FFF2-40B4-BE49-F238E27FC236}">
+                <a16:creationId xmlns:a16="http://schemas.microsoft.com/office/drawing/2014/main" id="{8A32E773-3623-2B44-B116-7AD110CA92ED}"/>
+              </a:ext>
+            </a:extLst>
+          </p:cNvPr>
+          <p:cNvSpPr>
+            <a:spLocks noGrp="1"/>
+          </p:cNvSpPr>
+          <p:nvPr>
+            <p:ph type="title"/>
+          </p:nvPr>
+        </p:nvSpPr>
+        <p:spPr>
+          <a:solidFill>
+            <a:srgbClr val="FFC003"/>
+          </a:solidFill>
+        </p:spPr>
+        <p:txBody>
+          <a:bodyPr/>
+          <a:lstStyle/>
+          <a:p>
+            <a:r>
+              <a:rPr lang="en-US" dirty="0">
+                <a:solidFill>
+                  <a:schemeClr val="bg1"/>
+                </a:solidFill>
+              </a:rPr>
+              <a:t>Alpha Diversity</a:t>
+            </a:r>
+          </a:p>
+        </p:txBody>
+      </p:sp>
+      <p:sp>
+        <p:nvSpPr>
+          <p:cNvPr id="3" name="Content Placeholder 2">
+            <a:extLst>
+              <a:ext uri="{FF2B5EF4-FFF2-40B4-BE49-F238E27FC236}">
+                <a16:creationId xmlns:a16="http://schemas.microsoft.com/office/drawing/2014/main" id="{C8B28687-3A56-724D-832B-D6AF3CD1B17E}"/>
+              </a:ext>
+            </a:extLst>
+          </p:cNvPr>
+          <p:cNvSpPr>
+            <a:spLocks noGrp="1"/>
+          </p:cNvSpPr>
+          <p:nvPr>
+            <p:ph idx="1"/>
+          </p:nvPr>
+        </p:nvSpPr>
+        <p:spPr>
+          <a:xfrm>
+            <a:off x="838200" y="5557837"/>
+            <a:ext cx="10515600" cy="619125"/>
+          </a:xfrm>
+        </p:spPr>
+        <p:txBody>
+          <a:bodyPr>
+            <a:normAutofit/>
+          </a:bodyPr>
+          <a:lstStyle/>
+          <a:p>
+            <a:pPr marL="0" indent="0" algn="ctr">
+              <a:buNone/>
+            </a:pPr>
+            <a:r>
+              <a:rPr lang="en-US" sz="2400" dirty="0"/>
+              <a:t>Figure : </a:t>
+            </a:r>
+            <a:r>
+              <a:rPr lang="en-GB" sz="2400" dirty="0"/>
+              <a:t>Plots of ASV richness (A) and Shannon Diversity Index (B) for each glacier</a:t>
+            </a:r>
+            <a:endParaRPr lang="en-US" sz="2400" dirty="0"/>
+          </a:p>
+        </p:txBody>
+      </p:sp>
+      <p:pic>
+        <p:nvPicPr>
+          <p:cNvPr id="5" name="Picture 4">
+            <a:extLst>
+              <a:ext uri="{FF2B5EF4-FFF2-40B4-BE49-F238E27FC236}">
+                <a16:creationId xmlns:a16="http://schemas.microsoft.com/office/drawing/2014/main" id="{4FB688A8-5093-E44A-998C-E2EA4D158E52}"/>
+              </a:ext>
+            </a:extLst>
+          </p:cNvPr>
+          <p:cNvPicPr>
+            <a:picLocks noChangeAspect="1"/>
+          </p:cNvPicPr>
+          <p:nvPr/>
+        </p:nvPicPr>
+        <p:blipFill>
+          <a:blip r:embed="rId3"/>
+          <a:stretch>
+            <a:fillRect/>
+          </a:stretch>
+        </p:blipFill>
+        <p:spPr>
+          <a:xfrm>
+            <a:off x="2438400" y="1795463"/>
+            <a:ext cx="7315200" cy="3657600"/>
+          </a:xfrm>
+          <a:prstGeom prst="rect">
+            <a:avLst/>
+          </a:prstGeom>
+        </p:spPr>
+      </p:pic>
+    </p:spTree>
+    <p:extLst>
+      <p:ext uri="{BB962C8B-B14F-4D97-AF65-F5344CB8AC3E}">
+        <p14:creationId xmlns:p14="http://schemas.microsoft.com/office/powerpoint/2010/main" val="3700840866"/>
+      </p:ext>
+    </p:extLst>
+  </p:cSld>
+  <p:clrMapOvr>
+    <a:masterClrMapping/>
+  </p:clrMapOvr>
+</p:sld>
+</file>
+
+<file path=ppt/slides/slide13.xml><?xml version="1.0" encoding="utf-8"?>
+<p:sld xmlns:a="http://schemas.openxmlformats.org/drawingml/2006/main" xmlns:r="http://schemas.openxmlformats.org/officeDocument/2006/relationships" xmlns:p="http://schemas.openxmlformats.org/presentationml/2006/main">
+  <p:cSld>
+    <p:spTree>
+      <p:nvGrpSpPr>
+        <p:cNvPr id="1" name=""/>
+        <p:cNvGrpSpPr/>
+        <p:nvPr/>
+      </p:nvGrpSpPr>
+      <p:grpSpPr>
+        <a:xfrm>
+          <a:off x="0" y="0"/>
+          <a:ext cx="0" cy="0"/>
+          <a:chOff x="0" y="0"/>
+          <a:chExt cx="0" cy="0"/>
+        </a:xfrm>
+      </p:grpSpPr>
+      <p:sp>
+        <p:nvSpPr>
+          <p:cNvPr id="2" name="Title 1">
+            <a:extLst>
+              <a:ext uri="{FF2B5EF4-FFF2-40B4-BE49-F238E27FC236}">
                 <a16:creationId xmlns:a16="http://schemas.microsoft.com/office/drawing/2014/main" id="{FD545D3B-A455-EF48-91C3-A3250798EA64}"/>
               </a:ext>
             </a:extLst>
@@ -32839,7 +33400,7 @@
 </p:sld>
 </file>
 
-<file path=ppt/slides/slide13.xml><?xml version="1.0" encoding="utf-8"?>
+<file path=ppt/slides/slide14.xml><?xml version="1.0" encoding="utf-8"?>
 <p:sld xmlns:a="http://schemas.openxmlformats.org/drawingml/2006/main" xmlns:r="http://schemas.openxmlformats.org/officeDocument/2006/relationships" xmlns:p="http://schemas.openxmlformats.org/presentationml/2006/main">
   <p:cSld>
     <p:spTree>
@@ -32935,7 +33496,7 @@
 </p:sld>
 </file>
 
-<file path=ppt/slides/slide14.xml><?xml version="1.0" encoding="utf-8"?>
+<file path=ppt/slides/slide15.xml><?xml version="1.0" encoding="utf-8"?>
 <p:sld xmlns:a="http://schemas.openxmlformats.org/drawingml/2006/main" xmlns:r="http://schemas.openxmlformats.org/officeDocument/2006/relationships" xmlns:p="http://schemas.openxmlformats.org/presentationml/2006/main">
   <p:cSld>
     <p:spTree>
@@ -33126,7 +33687,7 @@
 </p:sld>
 </file>
 
-<file path=ppt/slides/slide15.xml><?xml version="1.0" encoding="utf-8"?>
+<file path=ppt/slides/slide16.xml><?xml version="1.0" encoding="utf-8"?>
 <p:sld xmlns:a="http://schemas.openxmlformats.org/drawingml/2006/main" xmlns:r="http://schemas.openxmlformats.org/officeDocument/2006/relationships" xmlns:p="http://schemas.openxmlformats.org/presentationml/2006/main">
   <p:cSld>
     <p:spTree>
@@ -33222,7 +33783,7 @@
 </p:sld>
 </file>
 
-<file path=ppt/slides/slide16.xml><?xml version="1.0" encoding="utf-8"?>
+<file path=ppt/slides/slide17.xml><?xml version="1.0" encoding="utf-8"?>
 <p:sld xmlns:a="http://schemas.openxmlformats.org/drawingml/2006/main" xmlns:r="http://schemas.openxmlformats.org/officeDocument/2006/relationships" xmlns:p="http://schemas.openxmlformats.org/presentationml/2006/main">
   <p:cSld>
     <p:spTree>
@@ -33689,7 +34250,7 @@
 </p:sld>
 </file>
 
-<file path=ppt/slides/slide17.xml><?xml version="1.0" encoding="utf-8"?>
+<file path=ppt/slides/slide18.xml><?xml version="1.0" encoding="utf-8"?>
 <p:sld xmlns:a="http://schemas.openxmlformats.org/drawingml/2006/main" xmlns:r="http://schemas.openxmlformats.org/officeDocument/2006/relationships" xmlns:p="http://schemas.openxmlformats.org/presentationml/2006/main">
   <p:cSld>
     <p:spTree>
@@ -33957,7 +34518,7 @@
 </p:sld>
 </file>
 
-<file path=ppt/slides/slide18.xml><?xml version="1.0" encoding="utf-8"?>
+<file path=ppt/slides/slide19.xml><?xml version="1.0" encoding="utf-8"?>
 <p:sld xmlns:a="http://schemas.openxmlformats.org/drawingml/2006/main" xmlns:r="http://schemas.openxmlformats.org/officeDocument/2006/relationships" xmlns:p="http://schemas.openxmlformats.org/presentationml/2006/main">
   <p:cSld>
     <p:spTree>
@@ -34445,7 +35006,1295 @@
 </p:sld>
 </file>
 
-<file path=ppt/slides/slide19.xml><?xml version="1.0" encoding="utf-8"?>
+<file path=ppt/slides/slide2.xml><?xml version="1.0" encoding="utf-8"?>
+<p:sld xmlns:a="http://schemas.openxmlformats.org/drawingml/2006/main" xmlns:r="http://schemas.openxmlformats.org/officeDocument/2006/relationships" xmlns:p="http://schemas.openxmlformats.org/presentationml/2006/main">
+  <p:cSld>
+    <p:spTree>
+      <p:nvGrpSpPr>
+        <p:cNvPr id="1" name=""/>
+        <p:cNvGrpSpPr/>
+        <p:nvPr/>
+      </p:nvGrpSpPr>
+      <p:grpSpPr>
+        <a:xfrm>
+          <a:off x="0" y="0"/>
+          <a:ext cx="0" cy="0"/>
+          <a:chOff x="0" y="0"/>
+          <a:chExt cx="0" cy="0"/>
+        </a:xfrm>
+      </p:grpSpPr>
+      <p:sp>
+        <p:nvSpPr>
+          <p:cNvPr id="2" name="Title 1">
+            <a:extLst>
+              <a:ext uri="{FF2B5EF4-FFF2-40B4-BE49-F238E27FC236}">
+                <a16:creationId xmlns:a16="http://schemas.microsoft.com/office/drawing/2014/main" id="{122A31DA-B431-C54A-874F-C1236B9B36B8}"/>
+              </a:ext>
+            </a:extLst>
+          </p:cNvPr>
+          <p:cNvSpPr>
+            <a:spLocks noGrp="1"/>
+          </p:cNvSpPr>
+          <p:nvPr>
+            <p:ph type="title"/>
+          </p:nvPr>
+        </p:nvSpPr>
+        <p:spPr/>
+        <p:txBody>
+          <a:bodyPr/>
+          <a:lstStyle/>
+          <a:p>
+            <a:r>
+              <a:rPr lang="en-US" dirty="0"/>
+              <a:t>Why are they different? Why should we care?</a:t>
+            </a:r>
+          </a:p>
+        </p:txBody>
+      </p:sp>
+      <p:sp>
+        <p:nvSpPr>
+          <p:cNvPr id="4" name="Oval 3">
+            <a:extLst>
+              <a:ext uri="{FF2B5EF4-FFF2-40B4-BE49-F238E27FC236}">
+                <a16:creationId xmlns:a16="http://schemas.microsoft.com/office/drawing/2014/main" id="{4075A81A-7D11-9448-BF36-6D732E7F151C}"/>
+              </a:ext>
+            </a:extLst>
+          </p:cNvPr>
+          <p:cNvSpPr/>
+          <p:nvPr/>
+        </p:nvSpPr>
+        <p:spPr>
+          <a:xfrm>
+            <a:off x="2600326" y="3014662"/>
+            <a:ext cx="314325" cy="314325"/>
+          </a:xfrm>
+          <a:prstGeom prst="ellipse">
+            <a:avLst/>
+          </a:prstGeom>
+        </p:spPr>
+        <p:style>
+          <a:lnRef idx="2">
+            <a:schemeClr val="accent1">
+              <a:shade val="50000"/>
+            </a:schemeClr>
+          </a:lnRef>
+          <a:fillRef idx="1">
+            <a:schemeClr val="accent1"/>
+          </a:fillRef>
+          <a:effectRef idx="0">
+            <a:schemeClr val="accent1"/>
+          </a:effectRef>
+          <a:fontRef idx="minor">
+            <a:schemeClr val="lt1"/>
+          </a:fontRef>
+        </p:style>
+        <p:txBody>
+          <a:bodyPr rtlCol="0" anchor="ctr"/>
+          <a:lstStyle/>
+          <a:p>
+            <a:pPr algn="ctr"/>
+            <a:endParaRPr lang="en-US"/>
+          </a:p>
+        </p:txBody>
+      </p:sp>
+      <p:sp>
+        <p:nvSpPr>
+          <p:cNvPr id="5" name="Oval 4">
+            <a:extLst>
+              <a:ext uri="{FF2B5EF4-FFF2-40B4-BE49-F238E27FC236}">
+                <a16:creationId xmlns:a16="http://schemas.microsoft.com/office/drawing/2014/main" id="{E4516562-A1F7-4A44-B228-68531F4F81E8}"/>
+              </a:ext>
+            </a:extLst>
+          </p:cNvPr>
+          <p:cNvSpPr/>
+          <p:nvPr/>
+        </p:nvSpPr>
+        <p:spPr>
+          <a:xfrm>
+            <a:off x="3467101" y="3752849"/>
+            <a:ext cx="314325" cy="314325"/>
+          </a:xfrm>
+          <a:prstGeom prst="ellipse">
+            <a:avLst/>
+          </a:prstGeom>
+        </p:spPr>
+        <p:style>
+          <a:lnRef idx="2">
+            <a:schemeClr val="accent1">
+              <a:shade val="50000"/>
+            </a:schemeClr>
+          </a:lnRef>
+          <a:fillRef idx="1">
+            <a:schemeClr val="accent1"/>
+          </a:fillRef>
+          <a:effectRef idx="0">
+            <a:schemeClr val="accent1"/>
+          </a:effectRef>
+          <a:fontRef idx="minor">
+            <a:schemeClr val="lt1"/>
+          </a:fontRef>
+        </p:style>
+        <p:txBody>
+          <a:bodyPr rtlCol="0" anchor="ctr"/>
+          <a:lstStyle/>
+          <a:p>
+            <a:pPr algn="ctr"/>
+            <a:endParaRPr lang="en-US"/>
+          </a:p>
+        </p:txBody>
+      </p:sp>
+      <p:sp>
+        <p:nvSpPr>
+          <p:cNvPr id="6" name="Oval 5">
+            <a:extLst>
+              <a:ext uri="{FF2B5EF4-FFF2-40B4-BE49-F238E27FC236}">
+                <a16:creationId xmlns:a16="http://schemas.microsoft.com/office/drawing/2014/main" id="{1ABEA4FE-AD89-454B-989F-A777676B2DAB}"/>
+              </a:ext>
+            </a:extLst>
+          </p:cNvPr>
+          <p:cNvSpPr/>
+          <p:nvPr/>
+        </p:nvSpPr>
+        <p:spPr>
+          <a:xfrm>
+            <a:off x="2586038" y="4410075"/>
+            <a:ext cx="314325" cy="314325"/>
+          </a:xfrm>
+          <a:prstGeom prst="ellipse">
+            <a:avLst/>
+          </a:prstGeom>
+          <a:solidFill>
+            <a:srgbClr val="92D050"/>
+          </a:solidFill>
+        </p:spPr>
+        <p:style>
+          <a:lnRef idx="2">
+            <a:schemeClr val="accent1">
+              <a:shade val="50000"/>
+            </a:schemeClr>
+          </a:lnRef>
+          <a:fillRef idx="1">
+            <a:schemeClr val="accent1"/>
+          </a:fillRef>
+          <a:effectRef idx="0">
+            <a:schemeClr val="accent1"/>
+          </a:effectRef>
+          <a:fontRef idx="minor">
+            <a:schemeClr val="lt1"/>
+          </a:fontRef>
+        </p:style>
+        <p:txBody>
+          <a:bodyPr rtlCol="0" anchor="ctr"/>
+          <a:lstStyle/>
+          <a:p>
+            <a:pPr algn="ctr"/>
+            <a:endParaRPr lang="en-US"/>
+          </a:p>
+        </p:txBody>
+      </p:sp>
+      <p:sp>
+        <p:nvSpPr>
+          <p:cNvPr id="7" name="Oval 6">
+            <a:extLst>
+              <a:ext uri="{FF2B5EF4-FFF2-40B4-BE49-F238E27FC236}">
+                <a16:creationId xmlns:a16="http://schemas.microsoft.com/office/drawing/2014/main" id="{4E83A67A-C00A-B342-BE75-24729CD2D02F}"/>
+              </a:ext>
+            </a:extLst>
+          </p:cNvPr>
+          <p:cNvSpPr/>
+          <p:nvPr/>
+        </p:nvSpPr>
+        <p:spPr>
+          <a:xfrm>
+            <a:off x="4724401" y="4567237"/>
+            <a:ext cx="314325" cy="314325"/>
+          </a:xfrm>
+          <a:prstGeom prst="ellipse">
+            <a:avLst/>
+          </a:prstGeom>
+        </p:spPr>
+        <p:style>
+          <a:lnRef idx="2">
+            <a:schemeClr val="accent1">
+              <a:shade val="50000"/>
+            </a:schemeClr>
+          </a:lnRef>
+          <a:fillRef idx="1">
+            <a:schemeClr val="accent1"/>
+          </a:fillRef>
+          <a:effectRef idx="0">
+            <a:schemeClr val="accent1"/>
+          </a:effectRef>
+          <a:fontRef idx="minor">
+            <a:schemeClr val="lt1"/>
+          </a:fontRef>
+        </p:style>
+        <p:txBody>
+          <a:bodyPr rtlCol="0" anchor="ctr"/>
+          <a:lstStyle/>
+          <a:p>
+            <a:pPr algn="ctr"/>
+            <a:endParaRPr lang="en-US"/>
+          </a:p>
+        </p:txBody>
+      </p:sp>
+      <p:sp>
+        <p:nvSpPr>
+          <p:cNvPr id="8" name="Oval 7">
+            <a:extLst>
+              <a:ext uri="{FF2B5EF4-FFF2-40B4-BE49-F238E27FC236}">
+                <a16:creationId xmlns:a16="http://schemas.microsoft.com/office/drawing/2014/main" id="{6F55F405-3566-B348-BF65-58C69A1A867A}"/>
+              </a:ext>
+            </a:extLst>
+          </p:cNvPr>
+          <p:cNvSpPr/>
+          <p:nvPr/>
+        </p:nvSpPr>
+        <p:spPr>
+          <a:xfrm>
+            <a:off x="3467101" y="5186360"/>
+            <a:ext cx="314325" cy="314325"/>
+          </a:xfrm>
+          <a:prstGeom prst="ellipse">
+            <a:avLst/>
+          </a:prstGeom>
+          <a:solidFill>
+            <a:srgbClr val="FFC000"/>
+          </a:solidFill>
+        </p:spPr>
+        <p:style>
+          <a:lnRef idx="2">
+            <a:schemeClr val="accent1">
+              <a:shade val="50000"/>
+            </a:schemeClr>
+          </a:lnRef>
+          <a:fillRef idx="1">
+            <a:schemeClr val="accent1"/>
+          </a:fillRef>
+          <a:effectRef idx="0">
+            <a:schemeClr val="accent1"/>
+          </a:effectRef>
+          <a:fontRef idx="minor">
+            <a:schemeClr val="lt1"/>
+          </a:fontRef>
+        </p:style>
+        <p:txBody>
+          <a:bodyPr rtlCol="0" anchor="ctr"/>
+          <a:lstStyle/>
+          <a:p>
+            <a:pPr algn="ctr"/>
+            <a:endParaRPr lang="en-US"/>
+          </a:p>
+        </p:txBody>
+      </p:sp>
+      <p:sp>
+        <p:nvSpPr>
+          <p:cNvPr id="9" name="Oval 8">
+            <a:extLst>
+              <a:ext uri="{FF2B5EF4-FFF2-40B4-BE49-F238E27FC236}">
+                <a16:creationId xmlns:a16="http://schemas.microsoft.com/office/drawing/2014/main" id="{EDD5ABE0-00B9-DD40-8C3A-A0CB5719BCBA}"/>
+              </a:ext>
+            </a:extLst>
+          </p:cNvPr>
+          <p:cNvSpPr/>
+          <p:nvPr/>
+        </p:nvSpPr>
+        <p:spPr>
+          <a:xfrm>
+            <a:off x="4410075" y="2800349"/>
+            <a:ext cx="314325" cy="314325"/>
+          </a:xfrm>
+          <a:prstGeom prst="ellipse">
+            <a:avLst/>
+          </a:prstGeom>
+          <a:solidFill>
+            <a:srgbClr val="FF0000"/>
+          </a:solidFill>
+        </p:spPr>
+        <p:style>
+          <a:lnRef idx="2">
+            <a:schemeClr val="accent1">
+              <a:shade val="50000"/>
+            </a:schemeClr>
+          </a:lnRef>
+          <a:fillRef idx="1">
+            <a:schemeClr val="accent1"/>
+          </a:fillRef>
+          <a:effectRef idx="0">
+            <a:schemeClr val="accent1"/>
+          </a:effectRef>
+          <a:fontRef idx="minor">
+            <a:schemeClr val="lt1"/>
+          </a:fontRef>
+        </p:style>
+        <p:txBody>
+          <a:bodyPr rtlCol="0" anchor="ctr"/>
+          <a:lstStyle/>
+          <a:p>
+            <a:pPr algn="ctr"/>
+            <a:endParaRPr lang="en-US"/>
+          </a:p>
+        </p:txBody>
+      </p:sp>
+      <p:sp>
+        <p:nvSpPr>
+          <p:cNvPr id="10" name="Oval 9">
+            <a:extLst>
+              <a:ext uri="{FF2B5EF4-FFF2-40B4-BE49-F238E27FC236}">
+                <a16:creationId xmlns:a16="http://schemas.microsoft.com/office/drawing/2014/main" id="{B26DB84F-E78D-2A48-A3F2-63B628D47B3F}"/>
+              </a:ext>
+            </a:extLst>
+          </p:cNvPr>
+          <p:cNvSpPr/>
+          <p:nvPr/>
+        </p:nvSpPr>
+        <p:spPr>
+          <a:xfrm>
+            <a:off x="3467100" y="3050382"/>
+            <a:ext cx="314325" cy="314325"/>
+          </a:xfrm>
+          <a:prstGeom prst="ellipse">
+            <a:avLst/>
+          </a:prstGeom>
+          <a:solidFill>
+            <a:srgbClr val="92D050"/>
+          </a:solidFill>
+          <a:ln>
+            <a:solidFill>
+              <a:schemeClr val="accent1"/>
+            </a:solidFill>
+          </a:ln>
+        </p:spPr>
+        <p:style>
+          <a:lnRef idx="2">
+            <a:schemeClr val="accent1">
+              <a:shade val="50000"/>
+            </a:schemeClr>
+          </a:lnRef>
+          <a:fillRef idx="1">
+            <a:schemeClr val="accent1"/>
+          </a:fillRef>
+          <a:effectRef idx="0">
+            <a:schemeClr val="accent1"/>
+          </a:effectRef>
+          <a:fontRef idx="minor">
+            <a:schemeClr val="lt1"/>
+          </a:fontRef>
+        </p:style>
+        <p:txBody>
+          <a:bodyPr rtlCol="0" anchor="ctr"/>
+          <a:lstStyle/>
+          <a:p>
+            <a:pPr algn="ctr"/>
+            <a:endParaRPr lang="en-US"/>
+          </a:p>
+        </p:txBody>
+      </p:sp>
+      <p:sp>
+        <p:nvSpPr>
+          <p:cNvPr id="11" name="Oval 10">
+            <a:extLst>
+              <a:ext uri="{FF2B5EF4-FFF2-40B4-BE49-F238E27FC236}">
+                <a16:creationId xmlns:a16="http://schemas.microsoft.com/office/drawing/2014/main" id="{DC502950-677E-3049-990E-AEC7AF21DD01}"/>
+              </a:ext>
+            </a:extLst>
+          </p:cNvPr>
+          <p:cNvSpPr/>
+          <p:nvPr/>
+        </p:nvSpPr>
+        <p:spPr>
+          <a:xfrm>
+            <a:off x="3967164" y="4410074"/>
+            <a:ext cx="314325" cy="314325"/>
+          </a:xfrm>
+          <a:prstGeom prst="ellipse">
+            <a:avLst/>
+          </a:prstGeom>
+          <a:solidFill>
+            <a:srgbClr val="92D050"/>
+          </a:solidFill>
+        </p:spPr>
+        <p:style>
+          <a:lnRef idx="2">
+            <a:schemeClr val="accent1">
+              <a:shade val="50000"/>
+            </a:schemeClr>
+          </a:lnRef>
+          <a:fillRef idx="1">
+            <a:schemeClr val="accent1"/>
+          </a:fillRef>
+          <a:effectRef idx="0">
+            <a:schemeClr val="accent1"/>
+          </a:effectRef>
+          <a:fontRef idx="minor">
+            <a:schemeClr val="lt1"/>
+          </a:fontRef>
+        </p:style>
+        <p:txBody>
+          <a:bodyPr rtlCol="0" anchor="ctr"/>
+          <a:lstStyle/>
+          <a:p>
+            <a:pPr algn="ctr"/>
+            <a:endParaRPr lang="en-US"/>
+          </a:p>
+        </p:txBody>
+      </p:sp>
+      <p:sp>
+        <p:nvSpPr>
+          <p:cNvPr id="12" name="Oval 11">
+            <a:extLst>
+              <a:ext uri="{FF2B5EF4-FFF2-40B4-BE49-F238E27FC236}">
+                <a16:creationId xmlns:a16="http://schemas.microsoft.com/office/drawing/2014/main" id="{45A94771-F505-D14F-B441-07C73CD0D66B}"/>
+              </a:ext>
+            </a:extLst>
+          </p:cNvPr>
+          <p:cNvSpPr/>
+          <p:nvPr/>
+        </p:nvSpPr>
+        <p:spPr>
+          <a:xfrm>
+            <a:off x="4567238" y="3752848"/>
+            <a:ext cx="314325" cy="314325"/>
+          </a:xfrm>
+          <a:prstGeom prst="ellipse">
+            <a:avLst/>
+          </a:prstGeom>
+        </p:spPr>
+        <p:style>
+          <a:lnRef idx="2">
+            <a:schemeClr val="accent1">
+              <a:shade val="50000"/>
+            </a:schemeClr>
+          </a:lnRef>
+          <a:fillRef idx="1">
+            <a:schemeClr val="accent1"/>
+          </a:fillRef>
+          <a:effectRef idx="0">
+            <a:schemeClr val="accent1"/>
+          </a:effectRef>
+          <a:fontRef idx="minor">
+            <a:schemeClr val="lt1"/>
+          </a:fontRef>
+        </p:style>
+        <p:txBody>
+          <a:bodyPr rtlCol="0" anchor="ctr"/>
+          <a:lstStyle/>
+          <a:p>
+            <a:pPr algn="ctr"/>
+            <a:endParaRPr lang="en-US"/>
+          </a:p>
+        </p:txBody>
+      </p:sp>
+      <p:sp>
+        <p:nvSpPr>
+          <p:cNvPr id="13" name="Oval 12">
+            <a:extLst>
+              <a:ext uri="{FF2B5EF4-FFF2-40B4-BE49-F238E27FC236}">
+                <a16:creationId xmlns:a16="http://schemas.microsoft.com/office/drawing/2014/main" id="{A3A575E6-7D11-6844-B659-F1F931279368}"/>
+              </a:ext>
+            </a:extLst>
+          </p:cNvPr>
+          <p:cNvSpPr/>
+          <p:nvPr/>
+        </p:nvSpPr>
+        <p:spPr>
+          <a:xfrm>
+            <a:off x="3119438" y="4710111"/>
+            <a:ext cx="314325" cy="314325"/>
+          </a:xfrm>
+          <a:prstGeom prst="ellipse">
+            <a:avLst/>
+          </a:prstGeom>
+        </p:spPr>
+        <p:style>
+          <a:lnRef idx="2">
+            <a:schemeClr val="accent1">
+              <a:shade val="50000"/>
+            </a:schemeClr>
+          </a:lnRef>
+          <a:fillRef idx="1">
+            <a:schemeClr val="accent1"/>
+          </a:fillRef>
+          <a:effectRef idx="0">
+            <a:schemeClr val="accent1"/>
+          </a:effectRef>
+          <a:fontRef idx="minor">
+            <a:schemeClr val="lt1"/>
+          </a:fontRef>
+        </p:style>
+        <p:txBody>
+          <a:bodyPr rtlCol="0" anchor="ctr"/>
+          <a:lstStyle/>
+          <a:p>
+            <a:pPr algn="ctr"/>
+            <a:endParaRPr lang="en-US"/>
+          </a:p>
+        </p:txBody>
+      </p:sp>
+      <p:sp>
+        <p:nvSpPr>
+          <p:cNvPr id="14" name="Oval 13">
+            <a:extLst>
+              <a:ext uri="{FF2B5EF4-FFF2-40B4-BE49-F238E27FC236}">
+                <a16:creationId xmlns:a16="http://schemas.microsoft.com/office/drawing/2014/main" id="{1D5E120C-A984-764E-B4EF-AA70BC53CD10}"/>
+              </a:ext>
+            </a:extLst>
+          </p:cNvPr>
+          <p:cNvSpPr/>
+          <p:nvPr/>
+        </p:nvSpPr>
+        <p:spPr>
+          <a:xfrm>
+            <a:off x="2728912" y="3867149"/>
+            <a:ext cx="314325" cy="314325"/>
+          </a:xfrm>
+          <a:prstGeom prst="ellipse">
+            <a:avLst/>
+          </a:prstGeom>
+        </p:spPr>
+        <p:style>
+          <a:lnRef idx="2">
+            <a:schemeClr val="accent1">
+              <a:shade val="50000"/>
+            </a:schemeClr>
+          </a:lnRef>
+          <a:fillRef idx="1">
+            <a:schemeClr val="accent1"/>
+          </a:fillRef>
+          <a:effectRef idx="0">
+            <a:schemeClr val="accent1"/>
+          </a:effectRef>
+          <a:fontRef idx="minor">
+            <a:schemeClr val="lt1"/>
+          </a:fontRef>
+        </p:style>
+        <p:txBody>
+          <a:bodyPr rtlCol="0" anchor="ctr"/>
+          <a:lstStyle/>
+          <a:p>
+            <a:pPr algn="ctr"/>
+            <a:endParaRPr lang="en-US"/>
+          </a:p>
+        </p:txBody>
+      </p:sp>
+      <p:sp>
+        <p:nvSpPr>
+          <p:cNvPr id="15" name="Oval 14">
+            <a:extLst>
+              <a:ext uri="{FF2B5EF4-FFF2-40B4-BE49-F238E27FC236}">
+                <a16:creationId xmlns:a16="http://schemas.microsoft.com/office/drawing/2014/main" id="{F4679495-EAA4-F64B-8588-1E9DEA49D4C8}"/>
+              </a:ext>
+            </a:extLst>
+          </p:cNvPr>
+          <p:cNvSpPr/>
+          <p:nvPr/>
+        </p:nvSpPr>
+        <p:spPr>
+          <a:xfrm>
+            <a:off x="3967163" y="3378993"/>
+            <a:ext cx="314325" cy="314325"/>
+          </a:xfrm>
+          <a:prstGeom prst="ellipse">
+            <a:avLst/>
+          </a:prstGeom>
+        </p:spPr>
+        <p:style>
+          <a:lnRef idx="2">
+            <a:schemeClr val="accent1">
+              <a:shade val="50000"/>
+            </a:schemeClr>
+          </a:lnRef>
+          <a:fillRef idx="1">
+            <a:schemeClr val="accent1"/>
+          </a:fillRef>
+          <a:effectRef idx="0">
+            <a:schemeClr val="accent1"/>
+          </a:effectRef>
+          <a:fontRef idx="minor">
+            <a:schemeClr val="lt1"/>
+          </a:fontRef>
+        </p:style>
+        <p:txBody>
+          <a:bodyPr rtlCol="0" anchor="ctr"/>
+          <a:lstStyle/>
+          <a:p>
+            <a:pPr algn="ctr"/>
+            <a:endParaRPr lang="en-US"/>
+          </a:p>
+        </p:txBody>
+      </p:sp>
+      <p:sp>
+        <p:nvSpPr>
+          <p:cNvPr id="16" name="Oval 15">
+            <a:extLst>
+              <a:ext uri="{FF2B5EF4-FFF2-40B4-BE49-F238E27FC236}">
+                <a16:creationId xmlns:a16="http://schemas.microsoft.com/office/drawing/2014/main" id="{BF75227F-3BDA-534D-AC82-AA532C3B808A}"/>
+              </a:ext>
+            </a:extLst>
+          </p:cNvPr>
+          <p:cNvSpPr/>
+          <p:nvPr/>
+        </p:nvSpPr>
+        <p:spPr>
+          <a:xfrm>
+            <a:off x="6524626" y="3014662"/>
+            <a:ext cx="314325" cy="314325"/>
+          </a:xfrm>
+          <a:prstGeom prst="ellipse">
+            <a:avLst/>
+          </a:prstGeom>
+          <a:solidFill>
+            <a:srgbClr val="FF00E5"/>
+          </a:solidFill>
+        </p:spPr>
+        <p:style>
+          <a:lnRef idx="2">
+            <a:schemeClr val="accent1">
+              <a:shade val="50000"/>
+            </a:schemeClr>
+          </a:lnRef>
+          <a:fillRef idx="1">
+            <a:schemeClr val="accent1"/>
+          </a:fillRef>
+          <a:effectRef idx="0">
+            <a:schemeClr val="accent1"/>
+          </a:effectRef>
+          <a:fontRef idx="minor">
+            <a:schemeClr val="lt1"/>
+          </a:fontRef>
+        </p:style>
+        <p:txBody>
+          <a:bodyPr rtlCol="0" anchor="ctr"/>
+          <a:lstStyle/>
+          <a:p>
+            <a:pPr algn="ctr"/>
+            <a:endParaRPr lang="en-US"/>
+          </a:p>
+        </p:txBody>
+      </p:sp>
+      <p:sp>
+        <p:nvSpPr>
+          <p:cNvPr id="17" name="Oval 16">
+            <a:extLst>
+              <a:ext uri="{FF2B5EF4-FFF2-40B4-BE49-F238E27FC236}">
+                <a16:creationId xmlns:a16="http://schemas.microsoft.com/office/drawing/2014/main" id="{AC9855B0-6DB2-1749-A1D4-4B1B81587D5F}"/>
+              </a:ext>
+            </a:extLst>
+          </p:cNvPr>
+          <p:cNvSpPr/>
+          <p:nvPr/>
+        </p:nvSpPr>
+        <p:spPr>
+          <a:xfrm>
+            <a:off x="7391401" y="3752849"/>
+            <a:ext cx="314325" cy="314325"/>
+          </a:xfrm>
+          <a:prstGeom prst="ellipse">
+            <a:avLst/>
+          </a:prstGeom>
+          <a:solidFill>
+            <a:srgbClr val="7030A0"/>
+          </a:solidFill>
+        </p:spPr>
+        <p:style>
+          <a:lnRef idx="2">
+            <a:schemeClr val="accent1">
+              <a:shade val="50000"/>
+            </a:schemeClr>
+          </a:lnRef>
+          <a:fillRef idx="1">
+            <a:schemeClr val="accent1"/>
+          </a:fillRef>
+          <a:effectRef idx="0">
+            <a:schemeClr val="accent1"/>
+          </a:effectRef>
+          <a:fontRef idx="minor">
+            <a:schemeClr val="lt1"/>
+          </a:fontRef>
+        </p:style>
+        <p:txBody>
+          <a:bodyPr rtlCol="0" anchor="ctr"/>
+          <a:lstStyle/>
+          <a:p>
+            <a:pPr algn="ctr"/>
+            <a:endParaRPr lang="en-US"/>
+          </a:p>
+        </p:txBody>
+      </p:sp>
+      <p:sp>
+        <p:nvSpPr>
+          <p:cNvPr id="18" name="Oval 17">
+            <a:extLst>
+              <a:ext uri="{FF2B5EF4-FFF2-40B4-BE49-F238E27FC236}">
+                <a16:creationId xmlns:a16="http://schemas.microsoft.com/office/drawing/2014/main" id="{19F5CB4E-153D-EF40-9DD1-4986310BA056}"/>
+              </a:ext>
+            </a:extLst>
+          </p:cNvPr>
+          <p:cNvSpPr/>
+          <p:nvPr/>
+        </p:nvSpPr>
+        <p:spPr>
+          <a:xfrm>
+            <a:off x="6510338" y="4410075"/>
+            <a:ext cx="314325" cy="314325"/>
+          </a:xfrm>
+          <a:prstGeom prst="ellipse">
+            <a:avLst/>
+          </a:prstGeom>
+          <a:solidFill>
+            <a:srgbClr val="FF0000"/>
+          </a:solidFill>
+        </p:spPr>
+        <p:style>
+          <a:lnRef idx="2">
+            <a:schemeClr val="accent1">
+              <a:shade val="50000"/>
+            </a:schemeClr>
+          </a:lnRef>
+          <a:fillRef idx="1">
+            <a:schemeClr val="accent1"/>
+          </a:fillRef>
+          <a:effectRef idx="0">
+            <a:schemeClr val="accent1"/>
+          </a:effectRef>
+          <a:fontRef idx="minor">
+            <a:schemeClr val="lt1"/>
+          </a:fontRef>
+        </p:style>
+        <p:txBody>
+          <a:bodyPr rtlCol="0" anchor="ctr"/>
+          <a:lstStyle/>
+          <a:p>
+            <a:pPr algn="ctr"/>
+            <a:endParaRPr lang="en-US"/>
+          </a:p>
+        </p:txBody>
+      </p:sp>
+      <p:sp>
+        <p:nvSpPr>
+          <p:cNvPr id="19" name="Oval 18">
+            <a:extLst>
+              <a:ext uri="{FF2B5EF4-FFF2-40B4-BE49-F238E27FC236}">
+                <a16:creationId xmlns:a16="http://schemas.microsoft.com/office/drawing/2014/main" id="{304877B3-DB5A-2E40-9762-5B3784FF014E}"/>
+              </a:ext>
+            </a:extLst>
+          </p:cNvPr>
+          <p:cNvSpPr/>
+          <p:nvPr/>
+        </p:nvSpPr>
+        <p:spPr>
+          <a:xfrm>
+            <a:off x="8648701" y="4567237"/>
+            <a:ext cx="314325" cy="314325"/>
+          </a:xfrm>
+          <a:prstGeom prst="ellipse">
+            <a:avLst/>
+          </a:prstGeom>
+          <a:solidFill>
+            <a:srgbClr val="FFFF00"/>
+          </a:solidFill>
+        </p:spPr>
+        <p:style>
+          <a:lnRef idx="2">
+            <a:schemeClr val="accent1">
+              <a:shade val="50000"/>
+            </a:schemeClr>
+          </a:lnRef>
+          <a:fillRef idx="1">
+            <a:schemeClr val="accent1"/>
+          </a:fillRef>
+          <a:effectRef idx="0">
+            <a:schemeClr val="accent1"/>
+          </a:effectRef>
+          <a:fontRef idx="minor">
+            <a:schemeClr val="lt1"/>
+          </a:fontRef>
+        </p:style>
+        <p:txBody>
+          <a:bodyPr rtlCol="0" anchor="ctr"/>
+          <a:lstStyle/>
+          <a:p>
+            <a:pPr algn="ctr"/>
+            <a:endParaRPr lang="en-US"/>
+          </a:p>
+        </p:txBody>
+      </p:sp>
+      <p:sp>
+        <p:nvSpPr>
+          <p:cNvPr id="20" name="Oval 19">
+            <a:extLst>
+              <a:ext uri="{FF2B5EF4-FFF2-40B4-BE49-F238E27FC236}">
+                <a16:creationId xmlns:a16="http://schemas.microsoft.com/office/drawing/2014/main" id="{E53C1F00-2970-264E-8F3C-13F5A89C374D}"/>
+              </a:ext>
+            </a:extLst>
+          </p:cNvPr>
+          <p:cNvSpPr/>
+          <p:nvPr/>
+        </p:nvSpPr>
+        <p:spPr>
+          <a:xfrm>
+            <a:off x="7391401" y="5186360"/>
+            <a:ext cx="314325" cy="314325"/>
+          </a:xfrm>
+          <a:prstGeom prst="ellipse">
+            <a:avLst/>
+          </a:prstGeom>
+          <a:solidFill>
+            <a:srgbClr val="FF00E5"/>
+          </a:solidFill>
+        </p:spPr>
+        <p:style>
+          <a:lnRef idx="2">
+            <a:schemeClr val="accent1">
+              <a:shade val="50000"/>
+            </a:schemeClr>
+          </a:lnRef>
+          <a:fillRef idx="1">
+            <a:schemeClr val="accent1"/>
+          </a:fillRef>
+          <a:effectRef idx="0">
+            <a:schemeClr val="accent1"/>
+          </a:effectRef>
+          <a:fontRef idx="minor">
+            <a:schemeClr val="lt1"/>
+          </a:fontRef>
+        </p:style>
+        <p:txBody>
+          <a:bodyPr rtlCol="0" anchor="ctr"/>
+          <a:lstStyle/>
+          <a:p>
+            <a:pPr algn="ctr"/>
+            <a:endParaRPr lang="en-US"/>
+          </a:p>
+        </p:txBody>
+      </p:sp>
+      <p:sp>
+        <p:nvSpPr>
+          <p:cNvPr id="21" name="Oval 20">
+            <a:extLst>
+              <a:ext uri="{FF2B5EF4-FFF2-40B4-BE49-F238E27FC236}">
+                <a16:creationId xmlns:a16="http://schemas.microsoft.com/office/drawing/2014/main" id="{CBE665D8-BD16-C443-A7DB-33C745F5F4C3}"/>
+              </a:ext>
+            </a:extLst>
+          </p:cNvPr>
+          <p:cNvSpPr/>
+          <p:nvPr/>
+        </p:nvSpPr>
+        <p:spPr>
+          <a:xfrm>
+            <a:off x="8334375" y="2800349"/>
+            <a:ext cx="314325" cy="314325"/>
+          </a:xfrm>
+          <a:prstGeom prst="ellipse">
+            <a:avLst/>
+          </a:prstGeom>
+          <a:solidFill>
+            <a:srgbClr val="00B0F0"/>
+          </a:solidFill>
+        </p:spPr>
+        <p:style>
+          <a:lnRef idx="2">
+            <a:schemeClr val="accent1">
+              <a:shade val="50000"/>
+            </a:schemeClr>
+          </a:lnRef>
+          <a:fillRef idx="1">
+            <a:schemeClr val="accent1"/>
+          </a:fillRef>
+          <a:effectRef idx="0">
+            <a:schemeClr val="accent1"/>
+          </a:effectRef>
+          <a:fontRef idx="minor">
+            <a:schemeClr val="lt1"/>
+          </a:fontRef>
+        </p:style>
+        <p:txBody>
+          <a:bodyPr rtlCol="0" anchor="ctr"/>
+          <a:lstStyle/>
+          <a:p>
+            <a:pPr algn="ctr"/>
+            <a:endParaRPr lang="en-US"/>
+          </a:p>
+        </p:txBody>
+      </p:sp>
+      <p:sp>
+        <p:nvSpPr>
+          <p:cNvPr id="22" name="Oval 21">
+            <a:extLst>
+              <a:ext uri="{FF2B5EF4-FFF2-40B4-BE49-F238E27FC236}">
+                <a16:creationId xmlns:a16="http://schemas.microsoft.com/office/drawing/2014/main" id="{8716A6E8-5194-1843-8740-7CFE1E71AC8C}"/>
+              </a:ext>
+            </a:extLst>
+          </p:cNvPr>
+          <p:cNvSpPr/>
+          <p:nvPr/>
+        </p:nvSpPr>
+        <p:spPr>
+          <a:xfrm>
+            <a:off x="7391400" y="3050382"/>
+            <a:ext cx="314325" cy="314325"/>
+          </a:xfrm>
+          <a:prstGeom prst="ellipse">
+            <a:avLst/>
+          </a:prstGeom>
+          <a:solidFill>
+            <a:srgbClr val="FFFF00"/>
+          </a:solidFill>
+        </p:spPr>
+        <p:style>
+          <a:lnRef idx="2">
+            <a:schemeClr val="accent1">
+              <a:shade val="50000"/>
+            </a:schemeClr>
+          </a:lnRef>
+          <a:fillRef idx="1">
+            <a:schemeClr val="accent1"/>
+          </a:fillRef>
+          <a:effectRef idx="0">
+            <a:schemeClr val="accent1"/>
+          </a:effectRef>
+          <a:fontRef idx="minor">
+            <a:schemeClr val="lt1"/>
+          </a:fontRef>
+        </p:style>
+        <p:txBody>
+          <a:bodyPr rtlCol="0" anchor="ctr"/>
+          <a:lstStyle/>
+          <a:p>
+            <a:pPr algn="ctr"/>
+            <a:endParaRPr lang="en-US"/>
+          </a:p>
+        </p:txBody>
+      </p:sp>
+      <p:sp>
+        <p:nvSpPr>
+          <p:cNvPr id="23" name="Oval 22">
+            <a:extLst>
+              <a:ext uri="{FF2B5EF4-FFF2-40B4-BE49-F238E27FC236}">
+                <a16:creationId xmlns:a16="http://schemas.microsoft.com/office/drawing/2014/main" id="{AC7232C0-D3C4-874D-B786-BB148BFF7049}"/>
+              </a:ext>
+            </a:extLst>
+          </p:cNvPr>
+          <p:cNvSpPr/>
+          <p:nvPr/>
+        </p:nvSpPr>
+        <p:spPr>
+          <a:xfrm>
+            <a:off x="7891464" y="4410074"/>
+            <a:ext cx="314325" cy="314325"/>
+          </a:xfrm>
+          <a:prstGeom prst="ellipse">
+            <a:avLst/>
+          </a:prstGeom>
+          <a:solidFill>
+            <a:srgbClr val="00B0F0"/>
+          </a:solidFill>
+        </p:spPr>
+        <p:style>
+          <a:lnRef idx="2">
+            <a:schemeClr val="accent1">
+              <a:shade val="50000"/>
+            </a:schemeClr>
+          </a:lnRef>
+          <a:fillRef idx="1">
+            <a:schemeClr val="accent1"/>
+          </a:fillRef>
+          <a:effectRef idx="0">
+            <a:schemeClr val="accent1"/>
+          </a:effectRef>
+          <a:fontRef idx="minor">
+            <a:schemeClr val="lt1"/>
+          </a:fontRef>
+        </p:style>
+        <p:txBody>
+          <a:bodyPr rtlCol="0" anchor="ctr"/>
+          <a:lstStyle/>
+          <a:p>
+            <a:pPr algn="ctr"/>
+            <a:endParaRPr lang="en-US"/>
+          </a:p>
+        </p:txBody>
+      </p:sp>
+      <p:sp>
+        <p:nvSpPr>
+          <p:cNvPr id="24" name="Oval 23">
+            <a:extLst>
+              <a:ext uri="{FF2B5EF4-FFF2-40B4-BE49-F238E27FC236}">
+                <a16:creationId xmlns:a16="http://schemas.microsoft.com/office/drawing/2014/main" id="{CFB75B72-7751-E244-927A-357FEE2AD292}"/>
+              </a:ext>
+            </a:extLst>
+          </p:cNvPr>
+          <p:cNvSpPr/>
+          <p:nvPr/>
+        </p:nvSpPr>
+        <p:spPr>
+          <a:xfrm>
+            <a:off x="8491538" y="3752848"/>
+            <a:ext cx="314325" cy="314325"/>
+          </a:xfrm>
+          <a:prstGeom prst="ellipse">
+            <a:avLst/>
+          </a:prstGeom>
+          <a:solidFill>
+            <a:srgbClr val="002060"/>
+          </a:solidFill>
+        </p:spPr>
+        <p:style>
+          <a:lnRef idx="2">
+            <a:schemeClr val="accent1">
+              <a:shade val="50000"/>
+            </a:schemeClr>
+          </a:lnRef>
+          <a:fillRef idx="1">
+            <a:schemeClr val="accent1"/>
+          </a:fillRef>
+          <a:effectRef idx="0">
+            <a:schemeClr val="accent1"/>
+          </a:effectRef>
+          <a:fontRef idx="minor">
+            <a:schemeClr val="lt1"/>
+          </a:fontRef>
+        </p:style>
+        <p:txBody>
+          <a:bodyPr rtlCol="0" anchor="ctr"/>
+          <a:lstStyle/>
+          <a:p>
+            <a:pPr algn="ctr"/>
+            <a:endParaRPr lang="en-US"/>
+          </a:p>
+        </p:txBody>
+      </p:sp>
+      <p:sp>
+        <p:nvSpPr>
+          <p:cNvPr id="25" name="Oval 24">
+            <a:extLst>
+              <a:ext uri="{FF2B5EF4-FFF2-40B4-BE49-F238E27FC236}">
+                <a16:creationId xmlns:a16="http://schemas.microsoft.com/office/drawing/2014/main" id="{5A90B763-4A6C-AE44-B10A-CAC54BEA55F6}"/>
+              </a:ext>
+            </a:extLst>
+          </p:cNvPr>
+          <p:cNvSpPr/>
+          <p:nvPr/>
+        </p:nvSpPr>
+        <p:spPr>
+          <a:xfrm>
+            <a:off x="7043738" y="4710111"/>
+            <a:ext cx="314325" cy="314325"/>
+          </a:xfrm>
+          <a:prstGeom prst="ellipse">
+            <a:avLst/>
+          </a:prstGeom>
+          <a:solidFill>
+            <a:srgbClr val="FFFF00"/>
+          </a:solidFill>
+        </p:spPr>
+        <p:style>
+          <a:lnRef idx="2">
+            <a:schemeClr val="accent1">
+              <a:shade val="50000"/>
+            </a:schemeClr>
+          </a:lnRef>
+          <a:fillRef idx="1">
+            <a:schemeClr val="accent1"/>
+          </a:fillRef>
+          <a:effectRef idx="0">
+            <a:schemeClr val="accent1"/>
+          </a:effectRef>
+          <a:fontRef idx="minor">
+            <a:schemeClr val="lt1"/>
+          </a:fontRef>
+        </p:style>
+        <p:txBody>
+          <a:bodyPr rtlCol="0" anchor="ctr"/>
+          <a:lstStyle/>
+          <a:p>
+            <a:pPr algn="ctr"/>
+            <a:endParaRPr lang="en-US"/>
+          </a:p>
+        </p:txBody>
+      </p:sp>
+      <p:sp>
+        <p:nvSpPr>
+          <p:cNvPr id="26" name="Oval 25">
+            <a:extLst>
+              <a:ext uri="{FF2B5EF4-FFF2-40B4-BE49-F238E27FC236}">
+                <a16:creationId xmlns:a16="http://schemas.microsoft.com/office/drawing/2014/main" id="{E608D13B-D12C-924F-8139-3E7E8F9E180F}"/>
+              </a:ext>
+            </a:extLst>
+          </p:cNvPr>
+          <p:cNvSpPr/>
+          <p:nvPr/>
+        </p:nvSpPr>
+        <p:spPr>
+          <a:xfrm>
+            <a:off x="6653212" y="3867149"/>
+            <a:ext cx="314325" cy="314325"/>
+          </a:xfrm>
+          <a:prstGeom prst="ellipse">
+            <a:avLst/>
+          </a:prstGeom>
+          <a:solidFill>
+            <a:srgbClr val="92D050"/>
+          </a:solidFill>
+        </p:spPr>
+        <p:style>
+          <a:lnRef idx="2">
+            <a:schemeClr val="accent1">
+              <a:shade val="50000"/>
+            </a:schemeClr>
+          </a:lnRef>
+          <a:fillRef idx="1">
+            <a:schemeClr val="accent1"/>
+          </a:fillRef>
+          <a:effectRef idx="0">
+            <a:schemeClr val="accent1"/>
+          </a:effectRef>
+          <a:fontRef idx="minor">
+            <a:schemeClr val="lt1"/>
+          </a:fontRef>
+        </p:style>
+        <p:txBody>
+          <a:bodyPr rtlCol="0" anchor="ctr"/>
+          <a:lstStyle/>
+          <a:p>
+            <a:pPr algn="ctr"/>
+            <a:endParaRPr lang="en-US"/>
+          </a:p>
+        </p:txBody>
+      </p:sp>
+      <p:sp>
+        <p:nvSpPr>
+          <p:cNvPr id="27" name="Oval 26">
+            <a:extLst>
+              <a:ext uri="{FF2B5EF4-FFF2-40B4-BE49-F238E27FC236}">
+                <a16:creationId xmlns:a16="http://schemas.microsoft.com/office/drawing/2014/main" id="{6549C0F0-8986-694D-A0BD-8647118E99FE}"/>
+              </a:ext>
+            </a:extLst>
+          </p:cNvPr>
+          <p:cNvSpPr/>
+          <p:nvPr/>
+        </p:nvSpPr>
+        <p:spPr>
+          <a:xfrm>
+            <a:off x="7891463" y="3378993"/>
+            <a:ext cx="314325" cy="314325"/>
+          </a:xfrm>
+          <a:prstGeom prst="ellipse">
+            <a:avLst/>
+          </a:prstGeom>
+          <a:solidFill>
+            <a:srgbClr val="FFC000"/>
+          </a:solidFill>
+        </p:spPr>
+        <p:style>
+          <a:lnRef idx="2">
+            <a:schemeClr val="accent1">
+              <a:shade val="50000"/>
+            </a:schemeClr>
+          </a:lnRef>
+          <a:fillRef idx="1">
+            <a:schemeClr val="accent1"/>
+          </a:fillRef>
+          <a:effectRef idx="0">
+            <a:schemeClr val="accent1"/>
+          </a:effectRef>
+          <a:fontRef idx="minor">
+            <a:schemeClr val="lt1"/>
+          </a:fontRef>
+        </p:style>
+        <p:txBody>
+          <a:bodyPr rtlCol="0" anchor="ctr"/>
+          <a:lstStyle/>
+          <a:p>
+            <a:pPr algn="ctr"/>
+            <a:endParaRPr lang="en-US"/>
+          </a:p>
+        </p:txBody>
+      </p:sp>
+      <p:sp>
+        <p:nvSpPr>
+          <p:cNvPr id="28" name="TextBox 27">
+            <a:extLst>
+              <a:ext uri="{FF2B5EF4-FFF2-40B4-BE49-F238E27FC236}">
+                <a16:creationId xmlns:a16="http://schemas.microsoft.com/office/drawing/2014/main" id="{EA335B55-8B52-5644-A550-2710A16DB226}"/>
+              </a:ext>
+            </a:extLst>
+          </p:cNvPr>
+          <p:cNvSpPr txBox="1"/>
+          <p:nvPr/>
+        </p:nvSpPr>
+        <p:spPr>
+          <a:xfrm>
+            <a:off x="2717006" y="1991378"/>
+            <a:ext cx="2164558" cy="523220"/>
+          </a:xfrm>
+          <a:prstGeom prst="rect">
+            <a:avLst/>
+          </a:prstGeom>
+          <a:noFill/>
+        </p:spPr>
+        <p:txBody>
+          <a:bodyPr wrap="square" rtlCol="0">
+            <a:spAutoFit/>
+          </a:bodyPr>
+          <a:lstStyle/>
+          <a:p>
+            <a:r>
+              <a:rPr lang="en-US" sz="2800" dirty="0"/>
+              <a:t>Community 1</a:t>
+            </a:r>
+          </a:p>
+        </p:txBody>
+      </p:sp>
+      <p:sp>
+        <p:nvSpPr>
+          <p:cNvPr id="29" name="TextBox 28">
+            <a:extLst>
+              <a:ext uri="{FF2B5EF4-FFF2-40B4-BE49-F238E27FC236}">
+                <a16:creationId xmlns:a16="http://schemas.microsoft.com/office/drawing/2014/main" id="{BC52BB93-C1D8-A04D-98AA-48CAD4AC9990}"/>
+              </a:ext>
+            </a:extLst>
+          </p:cNvPr>
+          <p:cNvSpPr txBox="1"/>
+          <p:nvPr/>
+        </p:nvSpPr>
+        <p:spPr>
+          <a:xfrm>
+            <a:off x="6667500" y="2015520"/>
+            <a:ext cx="2164558" cy="523220"/>
+          </a:xfrm>
+          <a:prstGeom prst="rect">
+            <a:avLst/>
+          </a:prstGeom>
+          <a:noFill/>
+        </p:spPr>
+        <p:txBody>
+          <a:bodyPr wrap="square" rtlCol="0">
+            <a:spAutoFit/>
+          </a:bodyPr>
+          <a:lstStyle/>
+          <a:p>
+            <a:r>
+              <a:rPr lang="en-US" sz="2800" dirty="0"/>
+              <a:t>Community 2</a:t>
+            </a:r>
+          </a:p>
+        </p:txBody>
+      </p:sp>
+    </p:spTree>
+    <p:extLst>
+      <p:ext uri="{BB962C8B-B14F-4D97-AF65-F5344CB8AC3E}">
+        <p14:creationId xmlns:p14="http://schemas.microsoft.com/office/powerpoint/2010/main" val="3055002149"/>
+      </p:ext>
+    </p:extLst>
+  </p:cSld>
+  <p:clrMapOvr>
+    <a:masterClrMapping/>
+  </p:clrMapOvr>
+</p:sld>
+</file>
+
+<file path=ppt/slides/slide20.xml><?xml version="1.0" encoding="utf-8"?>
 <p:sld xmlns:a="http://schemas.openxmlformats.org/drawingml/2006/main" xmlns:r="http://schemas.openxmlformats.org/officeDocument/2006/relationships" xmlns:p="http://schemas.openxmlformats.org/presentationml/2006/main">
   <p:cSld>
     <p:spTree>
@@ -34905,1295 +36754,7 @@
 </p:sld>
 </file>
 
-<file path=ppt/slides/slide2.xml><?xml version="1.0" encoding="utf-8"?>
-<p:sld xmlns:a="http://schemas.openxmlformats.org/drawingml/2006/main" xmlns:r="http://schemas.openxmlformats.org/officeDocument/2006/relationships" xmlns:p="http://schemas.openxmlformats.org/presentationml/2006/main">
-  <p:cSld>
-    <p:spTree>
-      <p:nvGrpSpPr>
-        <p:cNvPr id="1" name=""/>
-        <p:cNvGrpSpPr/>
-        <p:nvPr/>
-      </p:nvGrpSpPr>
-      <p:grpSpPr>
-        <a:xfrm>
-          <a:off x="0" y="0"/>
-          <a:ext cx="0" cy="0"/>
-          <a:chOff x="0" y="0"/>
-          <a:chExt cx="0" cy="0"/>
-        </a:xfrm>
-      </p:grpSpPr>
-      <p:sp>
-        <p:nvSpPr>
-          <p:cNvPr id="2" name="Title 1">
-            <a:extLst>
-              <a:ext uri="{FF2B5EF4-FFF2-40B4-BE49-F238E27FC236}">
-                <a16:creationId xmlns:a16="http://schemas.microsoft.com/office/drawing/2014/main" id="{122A31DA-B431-C54A-874F-C1236B9B36B8}"/>
-              </a:ext>
-            </a:extLst>
-          </p:cNvPr>
-          <p:cNvSpPr>
-            <a:spLocks noGrp="1"/>
-          </p:cNvSpPr>
-          <p:nvPr>
-            <p:ph type="title"/>
-          </p:nvPr>
-        </p:nvSpPr>
-        <p:spPr/>
-        <p:txBody>
-          <a:bodyPr/>
-          <a:lstStyle/>
-          <a:p>
-            <a:r>
-              <a:rPr lang="en-US" dirty="0"/>
-              <a:t>Why are they different? Why should we care?</a:t>
-            </a:r>
-          </a:p>
-        </p:txBody>
-      </p:sp>
-      <p:sp>
-        <p:nvSpPr>
-          <p:cNvPr id="4" name="Oval 3">
-            <a:extLst>
-              <a:ext uri="{FF2B5EF4-FFF2-40B4-BE49-F238E27FC236}">
-                <a16:creationId xmlns:a16="http://schemas.microsoft.com/office/drawing/2014/main" id="{4075A81A-7D11-9448-BF36-6D732E7F151C}"/>
-              </a:ext>
-            </a:extLst>
-          </p:cNvPr>
-          <p:cNvSpPr/>
-          <p:nvPr/>
-        </p:nvSpPr>
-        <p:spPr>
-          <a:xfrm>
-            <a:off x="2600326" y="3014662"/>
-            <a:ext cx="314325" cy="314325"/>
-          </a:xfrm>
-          <a:prstGeom prst="ellipse">
-            <a:avLst/>
-          </a:prstGeom>
-        </p:spPr>
-        <p:style>
-          <a:lnRef idx="2">
-            <a:schemeClr val="accent1">
-              <a:shade val="50000"/>
-            </a:schemeClr>
-          </a:lnRef>
-          <a:fillRef idx="1">
-            <a:schemeClr val="accent1"/>
-          </a:fillRef>
-          <a:effectRef idx="0">
-            <a:schemeClr val="accent1"/>
-          </a:effectRef>
-          <a:fontRef idx="minor">
-            <a:schemeClr val="lt1"/>
-          </a:fontRef>
-        </p:style>
-        <p:txBody>
-          <a:bodyPr rtlCol="0" anchor="ctr"/>
-          <a:lstStyle/>
-          <a:p>
-            <a:pPr algn="ctr"/>
-            <a:endParaRPr lang="en-US"/>
-          </a:p>
-        </p:txBody>
-      </p:sp>
-      <p:sp>
-        <p:nvSpPr>
-          <p:cNvPr id="5" name="Oval 4">
-            <a:extLst>
-              <a:ext uri="{FF2B5EF4-FFF2-40B4-BE49-F238E27FC236}">
-                <a16:creationId xmlns:a16="http://schemas.microsoft.com/office/drawing/2014/main" id="{E4516562-A1F7-4A44-B228-68531F4F81E8}"/>
-              </a:ext>
-            </a:extLst>
-          </p:cNvPr>
-          <p:cNvSpPr/>
-          <p:nvPr/>
-        </p:nvSpPr>
-        <p:spPr>
-          <a:xfrm>
-            <a:off x="3467101" y="3752849"/>
-            <a:ext cx="314325" cy="314325"/>
-          </a:xfrm>
-          <a:prstGeom prst="ellipse">
-            <a:avLst/>
-          </a:prstGeom>
-        </p:spPr>
-        <p:style>
-          <a:lnRef idx="2">
-            <a:schemeClr val="accent1">
-              <a:shade val="50000"/>
-            </a:schemeClr>
-          </a:lnRef>
-          <a:fillRef idx="1">
-            <a:schemeClr val="accent1"/>
-          </a:fillRef>
-          <a:effectRef idx="0">
-            <a:schemeClr val="accent1"/>
-          </a:effectRef>
-          <a:fontRef idx="minor">
-            <a:schemeClr val="lt1"/>
-          </a:fontRef>
-        </p:style>
-        <p:txBody>
-          <a:bodyPr rtlCol="0" anchor="ctr"/>
-          <a:lstStyle/>
-          <a:p>
-            <a:pPr algn="ctr"/>
-            <a:endParaRPr lang="en-US"/>
-          </a:p>
-        </p:txBody>
-      </p:sp>
-      <p:sp>
-        <p:nvSpPr>
-          <p:cNvPr id="6" name="Oval 5">
-            <a:extLst>
-              <a:ext uri="{FF2B5EF4-FFF2-40B4-BE49-F238E27FC236}">
-                <a16:creationId xmlns:a16="http://schemas.microsoft.com/office/drawing/2014/main" id="{1ABEA4FE-AD89-454B-989F-A777676B2DAB}"/>
-              </a:ext>
-            </a:extLst>
-          </p:cNvPr>
-          <p:cNvSpPr/>
-          <p:nvPr/>
-        </p:nvSpPr>
-        <p:spPr>
-          <a:xfrm>
-            <a:off x="2586038" y="4410075"/>
-            <a:ext cx="314325" cy="314325"/>
-          </a:xfrm>
-          <a:prstGeom prst="ellipse">
-            <a:avLst/>
-          </a:prstGeom>
-          <a:solidFill>
-            <a:srgbClr val="92D050"/>
-          </a:solidFill>
-        </p:spPr>
-        <p:style>
-          <a:lnRef idx="2">
-            <a:schemeClr val="accent1">
-              <a:shade val="50000"/>
-            </a:schemeClr>
-          </a:lnRef>
-          <a:fillRef idx="1">
-            <a:schemeClr val="accent1"/>
-          </a:fillRef>
-          <a:effectRef idx="0">
-            <a:schemeClr val="accent1"/>
-          </a:effectRef>
-          <a:fontRef idx="minor">
-            <a:schemeClr val="lt1"/>
-          </a:fontRef>
-        </p:style>
-        <p:txBody>
-          <a:bodyPr rtlCol="0" anchor="ctr"/>
-          <a:lstStyle/>
-          <a:p>
-            <a:pPr algn="ctr"/>
-            <a:endParaRPr lang="en-US"/>
-          </a:p>
-        </p:txBody>
-      </p:sp>
-      <p:sp>
-        <p:nvSpPr>
-          <p:cNvPr id="7" name="Oval 6">
-            <a:extLst>
-              <a:ext uri="{FF2B5EF4-FFF2-40B4-BE49-F238E27FC236}">
-                <a16:creationId xmlns:a16="http://schemas.microsoft.com/office/drawing/2014/main" id="{4E83A67A-C00A-B342-BE75-24729CD2D02F}"/>
-              </a:ext>
-            </a:extLst>
-          </p:cNvPr>
-          <p:cNvSpPr/>
-          <p:nvPr/>
-        </p:nvSpPr>
-        <p:spPr>
-          <a:xfrm>
-            <a:off x="4724401" y="4567237"/>
-            <a:ext cx="314325" cy="314325"/>
-          </a:xfrm>
-          <a:prstGeom prst="ellipse">
-            <a:avLst/>
-          </a:prstGeom>
-        </p:spPr>
-        <p:style>
-          <a:lnRef idx="2">
-            <a:schemeClr val="accent1">
-              <a:shade val="50000"/>
-            </a:schemeClr>
-          </a:lnRef>
-          <a:fillRef idx="1">
-            <a:schemeClr val="accent1"/>
-          </a:fillRef>
-          <a:effectRef idx="0">
-            <a:schemeClr val="accent1"/>
-          </a:effectRef>
-          <a:fontRef idx="minor">
-            <a:schemeClr val="lt1"/>
-          </a:fontRef>
-        </p:style>
-        <p:txBody>
-          <a:bodyPr rtlCol="0" anchor="ctr"/>
-          <a:lstStyle/>
-          <a:p>
-            <a:pPr algn="ctr"/>
-            <a:endParaRPr lang="en-US"/>
-          </a:p>
-        </p:txBody>
-      </p:sp>
-      <p:sp>
-        <p:nvSpPr>
-          <p:cNvPr id="8" name="Oval 7">
-            <a:extLst>
-              <a:ext uri="{FF2B5EF4-FFF2-40B4-BE49-F238E27FC236}">
-                <a16:creationId xmlns:a16="http://schemas.microsoft.com/office/drawing/2014/main" id="{6F55F405-3566-B348-BF65-58C69A1A867A}"/>
-              </a:ext>
-            </a:extLst>
-          </p:cNvPr>
-          <p:cNvSpPr/>
-          <p:nvPr/>
-        </p:nvSpPr>
-        <p:spPr>
-          <a:xfrm>
-            <a:off x="3467101" y="5186360"/>
-            <a:ext cx="314325" cy="314325"/>
-          </a:xfrm>
-          <a:prstGeom prst="ellipse">
-            <a:avLst/>
-          </a:prstGeom>
-          <a:solidFill>
-            <a:srgbClr val="FFC000"/>
-          </a:solidFill>
-        </p:spPr>
-        <p:style>
-          <a:lnRef idx="2">
-            <a:schemeClr val="accent1">
-              <a:shade val="50000"/>
-            </a:schemeClr>
-          </a:lnRef>
-          <a:fillRef idx="1">
-            <a:schemeClr val="accent1"/>
-          </a:fillRef>
-          <a:effectRef idx="0">
-            <a:schemeClr val="accent1"/>
-          </a:effectRef>
-          <a:fontRef idx="minor">
-            <a:schemeClr val="lt1"/>
-          </a:fontRef>
-        </p:style>
-        <p:txBody>
-          <a:bodyPr rtlCol="0" anchor="ctr"/>
-          <a:lstStyle/>
-          <a:p>
-            <a:pPr algn="ctr"/>
-            <a:endParaRPr lang="en-US"/>
-          </a:p>
-        </p:txBody>
-      </p:sp>
-      <p:sp>
-        <p:nvSpPr>
-          <p:cNvPr id="9" name="Oval 8">
-            <a:extLst>
-              <a:ext uri="{FF2B5EF4-FFF2-40B4-BE49-F238E27FC236}">
-                <a16:creationId xmlns:a16="http://schemas.microsoft.com/office/drawing/2014/main" id="{EDD5ABE0-00B9-DD40-8C3A-A0CB5719BCBA}"/>
-              </a:ext>
-            </a:extLst>
-          </p:cNvPr>
-          <p:cNvSpPr/>
-          <p:nvPr/>
-        </p:nvSpPr>
-        <p:spPr>
-          <a:xfrm>
-            <a:off x="4410075" y="2800349"/>
-            <a:ext cx="314325" cy="314325"/>
-          </a:xfrm>
-          <a:prstGeom prst="ellipse">
-            <a:avLst/>
-          </a:prstGeom>
-          <a:solidFill>
-            <a:srgbClr val="FF0000"/>
-          </a:solidFill>
-        </p:spPr>
-        <p:style>
-          <a:lnRef idx="2">
-            <a:schemeClr val="accent1">
-              <a:shade val="50000"/>
-            </a:schemeClr>
-          </a:lnRef>
-          <a:fillRef idx="1">
-            <a:schemeClr val="accent1"/>
-          </a:fillRef>
-          <a:effectRef idx="0">
-            <a:schemeClr val="accent1"/>
-          </a:effectRef>
-          <a:fontRef idx="minor">
-            <a:schemeClr val="lt1"/>
-          </a:fontRef>
-        </p:style>
-        <p:txBody>
-          <a:bodyPr rtlCol="0" anchor="ctr"/>
-          <a:lstStyle/>
-          <a:p>
-            <a:pPr algn="ctr"/>
-            <a:endParaRPr lang="en-US"/>
-          </a:p>
-        </p:txBody>
-      </p:sp>
-      <p:sp>
-        <p:nvSpPr>
-          <p:cNvPr id="10" name="Oval 9">
-            <a:extLst>
-              <a:ext uri="{FF2B5EF4-FFF2-40B4-BE49-F238E27FC236}">
-                <a16:creationId xmlns:a16="http://schemas.microsoft.com/office/drawing/2014/main" id="{B26DB84F-E78D-2A48-A3F2-63B628D47B3F}"/>
-              </a:ext>
-            </a:extLst>
-          </p:cNvPr>
-          <p:cNvSpPr/>
-          <p:nvPr/>
-        </p:nvSpPr>
-        <p:spPr>
-          <a:xfrm>
-            <a:off x="3467100" y="3050382"/>
-            <a:ext cx="314325" cy="314325"/>
-          </a:xfrm>
-          <a:prstGeom prst="ellipse">
-            <a:avLst/>
-          </a:prstGeom>
-          <a:solidFill>
-            <a:srgbClr val="92D050"/>
-          </a:solidFill>
-          <a:ln>
-            <a:solidFill>
-              <a:schemeClr val="accent1"/>
-            </a:solidFill>
-          </a:ln>
-        </p:spPr>
-        <p:style>
-          <a:lnRef idx="2">
-            <a:schemeClr val="accent1">
-              <a:shade val="50000"/>
-            </a:schemeClr>
-          </a:lnRef>
-          <a:fillRef idx="1">
-            <a:schemeClr val="accent1"/>
-          </a:fillRef>
-          <a:effectRef idx="0">
-            <a:schemeClr val="accent1"/>
-          </a:effectRef>
-          <a:fontRef idx="minor">
-            <a:schemeClr val="lt1"/>
-          </a:fontRef>
-        </p:style>
-        <p:txBody>
-          <a:bodyPr rtlCol="0" anchor="ctr"/>
-          <a:lstStyle/>
-          <a:p>
-            <a:pPr algn="ctr"/>
-            <a:endParaRPr lang="en-US"/>
-          </a:p>
-        </p:txBody>
-      </p:sp>
-      <p:sp>
-        <p:nvSpPr>
-          <p:cNvPr id="11" name="Oval 10">
-            <a:extLst>
-              <a:ext uri="{FF2B5EF4-FFF2-40B4-BE49-F238E27FC236}">
-                <a16:creationId xmlns:a16="http://schemas.microsoft.com/office/drawing/2014/main" id="{DC502950-677E-3049-990E-AEC7AF21DD01}"/>
-              </a:ext>
-            </a:extLst>
-          </p:cNvPr>
-          <p:cNvSpPr/>
-          <p:nvPr/>
-        </p:nvSpPr>
-        <p:spPr>
-          <a:xfrm>
-            <a:off x="3967164" y="4410074"/>
-            <a:ext cx="314325" cy="314325"/>
-          </a:xfrm>
-          <a:prstGeom prst="ellipse">
-            <a:avLst/>
-          </a:prstGeom>
-          <a:solidFill>
-            <a:srgbClr val="92D050"/>
-          </a:solidFill>
-        </p:spPr>
-        <p:style>
-          <a:lnRef idx="2">
-            <a:schemeClr val="accent1">
-              <a:shade val="50000"/>
-            </a:schemeClr>
-          </a:lnRef>
-          <a:fillRef idx="1">
-            <a:schemeClr val="accent1"/>
-          </a:fillRef>
-          <a:effectRef idx="0">
-            <a:schemeClr val="accent1"/>
-          </a:effectRef>
-          <a:fontRef idx="minor">
-            <a:schemeClr val="lt1"/>
-          </a:fontRef>
-        </p:style>
-        <p:txBody>
-          <a:bodyPr rtlCol="0" anchor="ctr"/>
-          <a:lstStyle/>
-          <a:p>
-            <a:pPr algn="ctr"/>
-            <a:endParaRPr lang="en-US"/>
-          </a:p>
-        </p:txBody>
-      </p:sp>
-      <p:sp>
-        <p:nvSpPr>
-          <p:cNvPr id="12" name="Oval 11">
-            <a:extLst>
-              <a:ext uri="{FF2B5EF4-FFF2-40B4-BE49-F238E27FC236}">
-                <a16:creationId xmlns:a16="http://schemas.microsoft.com/office/drawing/2014/main" id="{45A94771-F505-D14F-B441-07C73CD0D66B}"/>
-              </a:ext>
-            </a:extLst>
-          </p:cNvPr>
-          <p:cNvSpPr/>
-          <p:nvPr/>
-        </p:nvSpPr>
-        <p:spPr>
-          <a:xfrm>
-            <a:off x="4567238" y="3752848"/>
-            <a:ext cx="314325" cy="314325"/>
-          </a:xfrm>
-          <a:prstGeom prst="ellipse">
-            <a:avLst/>
-          </a:prstGeom>
-        </p:spPr>
-        <p:style>
-          <a:lnRef idx="2">
-            <a:schemeClr val="accent1">
-              <a:shade val="50000"/>
-            </a:schemeClr>
-          </a:lnRef>
-          <a:fillRef idx="1">
-            <a:schemeClr val="accent1"/>
-          </a:fillRef>
-          <a:effectRef idx="0">
-            <a:schemeClr val="accent1"/>
-          </a:effectRef>
-          <a:fontRef idx="minor">
-            <a:schemeClr val="lt1"/>
-          </a:fontRef>
-        </p:style>
-        <p:txBody>
-          <a:bodyPr rtlCol="0" anchor="ctr"/>
-          <a:lstStyle/>
-          <a:p>
-            <a:pPr algn="ctr"/>
-            <a:endParaRPr lang="en-US"/>
-          </a:p>
-        </p:txBody>
-      </p:sp>
-      <p:sp>
-        <p:nvSpPr>
-          <p:cNvPr id="13" name="Oval 12">
-            <a:extLst>
-              <a:ext uri="{FF2B5EF4-FFF2-40B4-BE49-F238E27FC236}">
-                <a16:creationId xmlns:a16="http://schemas.microsoft.com/office/drawing/2014/main" id="{A3A575E6-7D11-6844-B659-F1F931279368}"/>
-              </a:ext>
-            </a:extLst>
-          </p:cNvPr>
-          <p:cNvSpPr/>
-          <p:nvPr/>
-        </p:nvSpPr>
-        <p:spPr>
-          <a:xfrm>
-            <a:off x="3119438" y="4710111"/>
-            <a:ext cx="314325" cy="314325"/>
-          </a:xfrm>
-          <a:prstGeom prst="ellipse">
-            <a:avLst/>
-          </a:prstGeom>
-        </p:spPr>
-        <p:style>
-          <a:lnRef idx="2">
-            <a:schemeClr val="accent1">
-              <a:shade val="50000"/>
-            </a:schemeClr>
-          </a:lnRef>
-          <a:fillRef idx="1">
-            <a:schemeClr val="accent1"/>
-          </a:fillRef>
-          <a:effectRef idx="0">
-            <a:schemeClr val="accent1"/>
-          </a:effectRef>
-          <a:fontRef idx="minor">
-            <a:schemeClr val="lt1"/>
-          </a:fontRef>
-        </p:style>
-        <p:txBody>
-          <a:bodyPr rtlCol="0" anchor="ctr"/>
-          <a:lstStyle/>
-          <a:p>
-            <a:pPr algn="ctr"/>
-            <a:endParaRPr lang="en-US"/>
-          </a:p>
-        </p:txBody>
-      </p:sp>
-      <p:sp>
-        <p:nvSpPr>
-          <p:cNvPr id="14" name="Oval 13">
-            <a:extLst>
-              <a:ext uri="{FF2B5EF4-FFF2-40B4-BE49-F238E27FC236}">
-                <a16:creationId xmlns:a16="http://schemas.microsoft.com/office/drawing/2014/main" id="{1D5E120C-A984-764E-B4EF-AA70BC53CD10}"/>
-              </a:ext>
-            </a:extLst>
-          </p:cNvPr>
-          <p:cNvSpPr/>
-          <p:nvPr/>
-        </p:nvSpPr>
-        <p:spPr>
-          <a:xfrm>
-            <a:off x="2728912" y="3867149"/>
-            <a:ext cx="314325" cy="314325"/>
-          </a:xfrm>
-          <a:prstGeom prst="ellipse">
-            <a:avLst/>
-          </a:prstGeom>
-        </p:spPr>
-        <p:style>
-          <a:lnRef idx="2">
-            <a:schemeClr val="accent1">
-              <a:shade val="50000"/>
-            </a:schemeClr>
-          </a:lnRef>
-          <a:fillRef idx="1">
-            <a:schemeClr val="accent1"/>
-          </a:fillRef>
-          <a:effectRef idx="0">
-            <a:schemeClr val="accent1"/>
-          </a:effectRef>
-          <a:fontRef idx="minor">
-            <a:schemeClr val="lt1"/>
-          </a:fontRef>
-        </p:style>
-        <p:txBody>
-          <a:bodyPr rtlCol="0" anchor="ctr"/>
-          <a:lstStyle/>
-          <a:p>
-            <a:pPr algn="ctr"/>
-            <a:endParaRPr lang="en-US"/>
-          </a:p>
-        </p:txBody>
-      </p:sp>
-      <p:sp>
-        <p:nvSpPr>
-          <p:cNvPr id="15" name="Oval 14">
-            <a:extLst>
-              <a:ext uri="{FF2B5EF4-FFF2-40B4-BE49-F238E27FC236}">
-                <a16:creationId xmlns:a16="http://schemas.microsoft.com/office/drawing/2014/main" id="{F4679495-EAA4-F64B-8588-1E9DEA49D4C8}"/>
-              </a:ext>
-            </a:extLst>
-          </p:cNvPr>
-          <p:cNvSpPr/>
-          <p:nvPr/>
-        </p:nvSpPr>
-        <p:spPr>
-          <a:xfrm>
-            <a:off x="3967163" y="3378993"/>
-            <a:ext cx="314325" cy="314325"/>
-          </a:xfrm>
-          <a:prstGeom prst="ellipse">
-            <a:avLst/>
-          </a:prstGeom>
-        </p:spPr>
-        <p:style>
-          <a:lnRef idx="2">
-            <a:schemeClr val="accent1">
-              <a:shade val="50000"/>
-            </a:schemeClr>
-          </a:lnRef>
-          <a:fillRef idx="1">
-            <a:schemeClr val="accent1"/>
-          </a:fillRef>
-          <a:effectRef idx="0">
-            <a:schemeClr val="accent1"/>
-          </a:effectRef>
-          <a:fontRef idx="minor">
-            <a:schemeClr val="lt1"/>
-          </a:fontRef>
-        </p:style>
-        <p:txBody>
-          <a:bodyPr rtlCol="0" anchor="ctr"/>
-          <a:lstStyle/>
-          <a:p>
-            <a:pPr algn="ctr"/>
-            <a:endParaRPr lang="en-US"/>
-          </a:p>
-        </p:txBody>
-      </p:sp>
-      <p:sp>
-        <p:nvSpPr>
-          <p:cNvPr id="16" name="Oval 15">
-            <a:extLst>
-              <a:ext uri="{FF2B5EF4-FFF2-40B4-BE49-F238E27FC236}">
-                <a16:creationId xmlns:a16="http://schemas.microsoft.com/office/drawing/2014/main" id="{BF75227F-3BDA-534D-AC82-AA532C3B808A}"/>
-              </a:ext>
-            </a:extLst>
-          </p:cNvPr>
-          <p:cNvSpPr/>
-          <p:nvPr/>
-        </p:nvSpPr>
-        <p:spPr>
-          <a:xfrm>
-            <a:off x="6524626" y="3014662"/>
-            <a:ext cx="314325" cy="314325"/>
-          </a:xfrm>
-          <a:prstGeom prst="ellipse">
-            <a:avLst/>
-          </a:prstGeom>
-          <a:solidFill>
-            <a:srgbClr val="FF00E5"/>
-          </a:solidFill>
-        </p:spPr>
-        <p:style>
-          <a:lnRef idx="2">
-            <a:schemeClr val="accent1">
-              <a:shade val="50000"/>
-            </a:schemeClr>
-          </a:lnRef>
-          <a:fillRef idx="1">
-            <a:schemeClr val="accent1"/>
-          </a:fillRef>
-          <a:effectRef idx="0">
-            <a:schemeClr val="accent1"/>
-          </a:effectRef>
-          <a:fontRef idx="minor">
-            <a:schemeClr val="lt1"/>
-          </a:fontRef>
-        </p:style>
-        <p:txBody>
-          <a:bodyPr rtlCol="0" anchor="ctr"/>
-          <a:lstStyle/>
-          <a:p>
-            <a:pPr algn="ctr"/>
-            <a:endParaRPr lang="en-US"/>
-          </a:p>
-        </p:txBody>
-      </p:sp>
-      <p:sp>
-        <p:nvSpPr>
-          <p:cNvPr id="17" name="Oval 16">
-            <a:extLst>
-              <a:ext uri="{FF2B5EF4-FFF2-40B4-BE49-F238E27FC236}">
-                <a16:creationId xmlns:a16="http://schemas.microsoft.com/office/drawing/2014/main" id="{AC9855B0-6DB2-1749-A1D4-4B1B81587D5F}"/>
-              </a:ext>
-            </a:extLst>
-          </p:cNvPr>
-          <p:cNvSpPr/>
-          <p:nvPr/>
-        </p:nvSpPr>
-        <p:spPr>
-          <a:xfrm>
-            <a:off x="7391401" y="3752849"/>
-            <a:ext cx="314325" cy="314325"/>
-          </a:xfrm>
-          <a:prstGeom prst="ellipse">
-            <a:avLst/>
-          </a:prstGeom>
-          <a:solidFill>
-            <a:srgbClr val="7030A0"/>
-          </a:solidFill>
-        </p:spPr>
-        <p:style>
-          <a:lnRef idx="2">
-            <a:schemeClr val="accent1">
-              <a:shade val="50000"/>
-            </a:schemeClr>
-          </a:lnRef>
-          <a:fillRef idx="1">
-            <a:schemeClr val="accent1"/>
-          </a:fillRef>
-          <a:effectRef idx="0">
-            <a:schemeClr val="accent1"/>
-          </a:effectRef>
-          <a:fontRef idx="minor">
-            <a:schemeClr val="lt1"/>
-          </a:fontRef>
-        </p:style>
-        <p:txBody>
-          <a:bodyPr rtlCol="0" anchor="ctr"/>
-          <a:lstStyle/>
-          <a:p>
-            <a:pPr algn="ctr"/>
-            <a:endParaRPr lang="en-US"/>
-          </a:p>
-        </p:txBody>
-      </p:sp>
-      <p:sp>
-        <p:nvSpPr>
-          <p:cNvPr id="18" name="Oval 17">
-            <a:extLst>
-              <a:ext uri="{FF2B5EF4-FFF2-40B4-BE49-F238E27FC236}">
-                <a16:creationId xmlns:a16="http://schemas.microsoft.com/office/drawing/2014/main" id="{19F5CB4E-153D-EF40-9DD1-4986310BA056}"/>
-              </a:ext>
-            </a:extLst>
-          </p:cNvPr>
-          <p:cNvSpPr/>
-          <p:nvPr/>
-        </p:nvSpPr>
-        <p:spPr>
-          <a:xfrm>
-            <a:off x="6510338" y="4410075"/>
-            <a:ext cx="314325" cy="314325"/>
-          </a:xfrm>
-          <a:prstGeom prst="ellipse">
-            <a:avLst/>
-          </a:prstGeom>
-          <a:solidFill>
-            <a:srgbClr val="FF0000"/>
-          </a:solidFill>
-        </p:spPr>
-        <p:style>
-          <a:lnRef idx="2">
-            <a:schemeClr val="accent1">
-              <a:shade val="50000"/>
-            </a:schemeClr>
-          </a:lnRef>
-          <a:fillRef idx="1">
-            <a:schemeClr val="accent1"/>
-          </a:fillRef>
-          <a:effectRef idx="0">
-            <a:schemeClr val="accent1"/>
-          </a:effectRef>
-          <a:fontRef idx="minor">
-            <a:schemeClr val="lt1"/>
-          </a:fontRef>
-        </p:style>
-        <p:txBody>
-          <a:bodyPr rtlCol="0" anchor="ctr"/>
-          <a:lstStyle/>
-          <a:p>
-            <a:pPr algn="ctr"/>
-            <a:endParaRPr lang="en-US"/>
-          </a:p>
-        </p:txBody>
-      </p:sp>
-      <p:sp>
-        <p:nvSpPr>
-          <p:cNvPr id="19" name="Oval 18">
-            <a:extLst>
-              <a:ext uri="{FF2B5EF4-FFF2-40B4-BE49-F238E27FC236}">
-                <a16:creationId xmlns:a16="http://schemas.microsoft.com/office/drawing/2014/main" id="{304877B3-DB5A-2E40-9762-5B3784FF014E}"/>
-              </a:ext>
-            </a:extLst>
-          </p:cNvPr>
-          <p:cNvSpPr/>
-          <p:nvPr/>
-        </p:nvSpPr>
-        <p:spPr>
-          <a:xfrm>
-            <a:off x="8648701" y="4567237"/>
-            <a:ext cx="314325" cy="314325"/>
-          </a:xfrm>
-          <a:prstGeom prst="ellipse">
-            <a:avLst/>
-          </a:prstGeom>
-          <a:solidFill>
-            <a:srgbClr val="FFFF00"/>
-          </a:solidFill>
-        </p:spPr>
-        <p:style>
-          <a:lnRef idx="2">
-            <a:schemeClr val="accent1">
-              <a:shade val="50000"/>
-            </a:schemeClr>
-          </a:lnRef>
-          <a:fillRef idx="1">
-            <a:schemeClr val="accent1"/>
-          </a:fillRef>
-          <a:effectRef idx="0">
-            <a:schemeClr val="accent1"/>
-          </a:effectRef>
-          <a:fontRef idx="minor">
-            <a:schemeClr val="lt1"/>
-          </a:fontRef>
-        </p:style>
-        <p:txBody>
-          <a:bodyPr rtlCol="0" anchor="ctr"/>
-          <a:lstStyle/>
-          <a:p>
-            <a:pPr algn="ctr"/>
-            <a:endParaRPr lang="en-US"/>
-          </a:p>
-        </p:txBody>
-      </p:sp>
-      <p:sp>
-        <p:nvSpPr>
-          <p:cNvPr id="20" name="Oval 19">
-            <a:extLst>
-              <a:ext uri="{FF2B5EF4-FFF2-40B4-BE49-F238E27FC236}">
-                <a16:creationId xmlns:a16="http://schemas.microsoft.com/office/drawing/2014/main" id="{E53C1F00-2970-264E-8F3C-13F5A89C374D}"/>
-              </a:ext>
-            </a:extLst>
-          </p:cNvPr>
-          <p:cNvSpPr/>
-          <p:nvPr/>
-        </p:nvSpPr>
-        <p:spPr>
-          <a:xfrm>
-            <a:off x="7391401" y="5186360"/>
-            <a:ext cx="314325" cy="314325"/>
-          </a:xfrm>
-          <a:prstGeom prst="ellipse">
-            <a:avLst/>
-          </a:prstGeom>
-          <a:solidFill>
-            <a:srgbClr val="FF00E5"/>
-          </a:solidFill>
-        </p:spPr>
-        <p:style>
-          <a:lnRef idx="2">
-            <a:schemeClr val="accent1">
-              <a:shade val="50000"/>
-            </a:schemeClr>
-          </a:lnRef>
-          <a:fillRef idx="1">
-            <a:schemeClr val="accent1"/>
-          </a:fillRef>
-          <a:effectRef idx="0">
-            <a:schemeClr val="accent1"/>
-          </a:effectRef>
-          <a:fontRef idx="minor">
-            <a:schemeClr val="lt1"/>
-          </a:fontRef>
-        </p:style>
-        <p:txBody>
-          <a:bodyPr rtlCol="0" anchor="ctr"/>
-          <a:lstStyle/>
-          <a:p>
-            <a:pPr algn="ctr"/>
-            <a:endParaRPr lang="en-US"/>
-          </a:p>
-        </p:txBody>
-      </p:sp>
-      <p:sp>
-        <p:nvSpPr>
-          <p:cNvPr id="21" name="Oval 20">
-            <a:extLst>
-              <a:ext uri="{FF2B5EF4-FFF2-40B4-BE49-F238E27FC236}">
-                <a16:creationId xmlns:a16="http://schemas.microsoft.com/office/drawing/2014/main" id="{CBE665D8-BD16-C443-A7DB-33C745F5F4C3}"/>
-              </a:ext>
-            </a:extLst>
-          </p:cNvPr>
-          <p:cNvSpPr/>
-          <p:nvPr/>
-        </p:nvSpPr>
-        <p:spPr>
-          <a:xfrm>
-            <a:off x="8334375" y="2800349"/>
-            <a:ext cx="314325" cy="314325"/>
-          </a:xfrm>
-          <a:prstGeom prst="ellipse">
-            <a:avLst/>
-          </a:prstGeom>
-          <a:solidFill>
-            <a:srgbClr val="00B0F0"/>
-          </a:solidFill>
-        </p:spPr>
-        <p:style>
-          <a:lnRef idx="2">
-            <a:schemeClr val="accent1">
-              <a:shade val="50000"/>
-            </a:schemeClr>
-          </a:lnRef>
-          <a:fillRef idx="1">
-            <a:schemeClr val="accent1"/>
-          </a:fillRef>
-          <a:effectRef idx="0">
-            <a:schemeClr val="accent1"/>
-          </a:effectRef>
-          <a:fontRef idx="minor">
-            <a:schemeClr val="lt1"/>
-          </a:fontRef>
-        </p:style>
-        <p:txBody>
-          <a:bodyPr rtlCol="0" anchor="ctr"/>
-          <a:lstStyle/>
-          <a:p>
-            <a:pPr algn="ctr"/>
-            <a:endParaRPr lang="en-US"/>
-          </a:p>
-        </p:txBody>
-      </p:sp>
-      <p:sp>
-        <p:nvSpPr>
-          <p:cNvPr id="22" name="Oval 21">
-            <a:extLst>
-              <a:ext uri="{FF2B5EF4-FFF2-40B4-BE49-F238E27FC236}">
-                <a16:creationId xmlns:a16="http://schemas.microsoft.com/office/drawing/2014/main" id="{8716A6E8-5194-1843-8740-7CFE1E71AC8C}"/>
-              </a:ext>
-            </a:extLst>
-          </p:cNvPr>
-          <p:cNvSpPr/>
-          <p:nvPr/>
-        </p:nvSpPr>
-        <p:spPr>
-          <a:xfrm>
-            <a:off x="7391400" y="3050382"/>
-            <a:ext cx="314325" cy="314325"/>
-          </a:xfrm>
-          <a:prstGeom prst="ellipse">
-            <a:avLst/>
-          </a:prstGeom>
-          <a:solidFill>
-            <a:srgbClr val="FFFF00"/>
-          </a:solidFill>
-        </p:spPr>
-        <p:style>
-          <a:lnRef idx="2">
-            <a:schemeClr val="accent1">
-              <a:shade val="50000"/>
-            </a:schemeClr>
-          </a:lnRef>
-          <a:fillRef idx="1">
-            <a:schemeClr val="accent1"/>
-          </a:fillRef>
-          <a:effectRef idx="0">
-            <a:schemeClr val="accent1"/>
-          </a:effectRef>
-          <a:fontRef idx="minor">
-            <a:schemeClr val="lt1"/>
-          </a:fontRef>
-        </p:style>
-        <p:txBody>
-          <a:bodyPr rtlCol="0" anchor="ctr"/>
-          <a:lstStyle/>
-          <a:p>
-            <a:pPr algn="ctr"/>
-            <a:endParaRPr lang="en-US"/>
-          </a:p>
-        </p:txBody>
-      </p:sp>
-      <p:sp>
-        <p:nvSpPr>
-          <p:cNvPr id="23" name="Oval 22">
-            <a:extLst>
-              <a:ext uri="{FF2B5EF4-FFF2-40B4-BE49-F238E27FC236}">
-                <a16:creationId xmlns:a16="http://schemas.microsoft.com/office/drawing/2014/main" id="{AC7232C0-D3C4-874D-B786-BB148BFF7049}"/>
-              </a:ext>
-            </a:extLst>
-          </p:cNvPr>
-          <p:cNvSpPr/>
-          <p:nvPr/>
-        </p:nvSpPr>
-        <p:spPr>
-          <a:xfrm>
-            <a:off x="7891464" y="4410074"/>
-            <a:ext cx="314325" cy="314325"/>
-          </a:xfrm>
-          <a:prstGeom prst="ellipse">
-            <a:avLst/>
-          </a:prstGeom>
-          <a:solidFill>
-            <a:srgbClr val="00B0F0"/>
-          </a:solidFill>
-        </p:spPr>
-        <p:style>
-          <a:lnRef idx="2">
-            <a:schemeClr val="accent1">
-              <a:shade val="50000"/>
-            </a:schemeClr>
-          </a:lnRef>
-          <a:fillRef idx="1">
-            <a:schemeClr val="accent1"/>
-          </a:fillRef>
-          <a:effectRef idx="0">
-            <a:schemeClr val="accent1"/>
-          </a:effectRef>
-          <a:fontRef idx="minor">
-            <a:schemeClr val="lt1"/>
-          </a:fontRef>
-        </p:style>
-        <p:txBody>
-          <a:bodyPr rtlCol="0" anchor="ctr"/>
-          <a:lstStyle/>
-          <a:p>
-            <a:pPr algn="ctr"/>
-            <a:endParaRPr lang="en-US"/>
-          </a:p>
-        </p:txBody>
-      </p:sp>
-      <p:sp>
-        <p:nvSpPr>
-          <p:cNvPr id="24" name="Oval 23">
-            <a:extLst>
-              <a:ext uri="{FF2B5EF4-FFF2-40B4-BE49-F238E27FC236}">
-                <a16:creationId xmlns:a16="http://schemas.microsoft.com/office/drawing/2014/main" id="{CFB75B72-7751-E244-927A-357FEE2AD292}"/>
-              </a:ext>
-            </a:extLst>
-          </p:cNvPr>
-          <p:cNvSpPr/>
-          <p:nvPr/>
-        </p:nvSpPr>
-        <p:spPr>
-          <a:xfrm>
-            <a:off x="8491538" y="3752848"/>
-            <a:ext cx="314325" cy="314325"/>
-          </a:xfrm>
-          <a:prstGeom prst="ellipse">
-            <a:avLst/>
-          </a:prstGeom>
-          <a:solidFill>
-            <a:srgbClr val="002060"/>
-          </a:solidFill>
-        </p:spPr>
-        <p:style>
-          <a:lnRef idx="2">
-            <a:schemeClr val="accent1">
-              <a:shade val="50000"/>
-            </a:schemeClr>
-          </a:lnRef>
-          <a:fillRef idx="1">
-            <a:schemeClr val="accent1"/>
-          </a:fillRef>
-          <a:effectRef idx="0">
-            <a:schemeClr val="accent1"/>
-          </a:effectRef>
-          <a:fontRef idx="minor">
-            <a:schemeClr val="lt1"/>
-          </a:fontRef>
-        </p:style>
-        <p:txBody>
-          <a:bodyPr rtlCol="0" anchor="ctr"/>
-          <a:lstStyle/>
-          <a:p>
-            <a:pPr algn="ctr"/>
-            <a:endParaRPr lang="en-US"/>
-          </a:p>
-        </p:txBody>
-      </p:sp>
-      <p:sp>
-        <p:nvSpPr>
-          <p:cNvPr id="25" name="Oval 24">
-            <a:extLst>
-              <a:ext uri="{FF2B5EF4-FFF2-40B4-BE49-F238E27FC236}">
-                <a16:creationId xmlns:a16="http://schemas.microsoft.com/office/drawing/2014/main" id="{5A90B763-4A6C-AE44-B10A-CAC54BEA55F6}"/>
-              </a:ext>
-            </a:extLst>
-          </p:cNvPr>
-          <p:cNvSpPr/>
-          <p:nvPr/>
-        </p:nvSpPr>
-        <p:spPr>
-          <a:xfrm>
-            <a:off x="7043738" y="4710111"/>
-            <a:ext cx="314325" cy="314325"/>
-          </a:xfrm>
-          <a:prstGeom prst="ellipse">
-            <a:avLst/>
-          </a:prstGeom>
-          <a:solidFill>
-            <a:srgbClr val="FFFF00"/>
-          </a:solidFill>
-        </p:spPr>
-        <p:style>
-          <a:lnRef idx="2">
-            <a:schemeClr val="accent1">
-              <a:shade val="50000"/>
-            </a:schemeClr>
-          </a:lnRef>
-          <a:fillRef idx="1">
-            <a:schemeClr val="accent1"/>
-          </a:fillRef>
-          <a:effectRef idx="0">
-            <a:schemeClr val="accent1"/>
-          </a:effectRef>
-          <a:fontRef idx="minor">
-            <a:schemeClr val="lt1"/>
-          </a:fontRef>
-        </p:style>
-        <p:txBody>
-          <a:bodyPr rtlCol="0" anchor="ctr"/>
-          <a:lstStyle/>
-          <a:p>
-            <a:pPr algn="ctr"/>
-            <a:endParaRPr lang="en-US"/>
-          </a:p>
-        </p:txBody>
-      </p:sp>
-      <p:sp>
-        <p:nvSpPr>
-          <p:cNvPr id="26" name="Oval 25">
-            <a:extLst>
-              <a:ext uri="{FF2B5EF4-FFF2-40B4-BE49-F238E27FC236}">
-                <a16:creationId xmlns:a16="http://schemas.microsoft.com/office/drawing/2014/main" id="{E608D13B-D12C-924F-8139-3E7E8F9E180F}"/>
-              </a:ext>
-            </a:extLst>
-          </p:cNvPr>
-          <p:cNvSpPr/>
-          <p:nvPr/>
-        </p:nvSpPr>
-        <p:spPr>
-          <a:xfrm>
-            <a:off x="6653212" y="3867149"/>
-            <a:ext cx="314325" cy="314325"/>
-          </a:xfrm>
-          <a:prstGeom prst="ellipse">
-            <a:avLst/>
-          </a:prstGeom>
-          <a:solidFill>
-            <a:srgbClr val="92D050"/>
-          </a:solidFill>
-        </p:spPr>
-        <p:style>
-          <a:lnRef idx="2">
-            <a:schemeClr val="accent1">
-              <a:shade val="50000"/>
-            </a:schemeClr>
-          </a:lnRef>
-          <a:fillRef idx="1">
-            <a:schemeClr val="accent1"/>
-          </a:fillRef>
-          <a:effectRef idx="0">
-            <a:schemeClr val="accent1"/>
-          </a:effectRef>
-          <a:fontRef idx="minor">
-            <a:schemeClr val="lt1"/>
-          </a:fontRef>
-        </p:style>
-        <p:txBody>
-          <a:bodyPr rtlCol="0" anchor="ctr"/>
-          <a:lstStyle/>
-          <a:p>
-            <a:pPr algn="ctr"/>
-            <a:endParaRPr lang="en-US"/>
-          </a:p>
-        </p:txBody>
-      </p:sp>
-      <p:sp>
-        <p:nvSpPr>
-          <p:cNvPr id="27" name="Oval 26">
-            <a:extLst>
-              <a:ext uri="{FF2B5EF4-FFF2-40B4-BE49-F238E27FC236}">
-                <a16:creationId xmlns:a16="http://schemas.microsoft.com/office/drawing/2014/main" id="{6549C0F0-8986-694D-A0BD-8647118E99FE}"/>
-              </a:ext>
-            </a:extLst>
-          </p:cNvPr>
-          <p:cNvSpPr/>
-          <p:nvPr/>
-        </p:nvSpPr>
-        <p:spPr>
-          <a:xfrm>
-            <a:off x="7891463" y="3378993"/>
-            <a:ext cx="314325" cy="314325"/>
-          </a:xfrm>
-          <a:prstGeom prst="ellipse">
-            <a:avLst/>
-          </a:prstGeom>
-          <a:solidFill>
-            <a:srgbClr val="FFC000"/>
-          </a:solidFill>
-        </p:spPr>
-        <p:style>
-          <a:lnRef idx="2">
-            <a:schemeClr val="accent1">
-              <a:shade val="50000"/>
-            </a:schemeClr>
-          </a:lnRef>
-          <a:fillRef idx="1">
-            <a:schemeClr val="accent1"/>
-          </a:fillRef>
-          <a:effectRef idx="0">
-            <a:schemeClr val="accent1"/>
-          </a:effectRef>
-          <a:fontRef idx="minor">
-            <a:schemeClr val="lt1"/>
-          </a:fontRef>
-        </p:style>
-        <p:txBody>
-          <a:bodyPr rtlCol="0" anchor="ctr"/>
-          <a:lstStyle/>
-          <a:p>
-            <a:pPr algn="ctr"/>
-            <a:endParaRPr lang="en-US"/>
-          </a:p>
-        </p:txBody>
-      </p:sp>
-      <p:sp>
-        <p:nvSpPr>
-          <p:cNvPr id="28" name="TextBox 27">
-            <a:extLst>
-              <a:ext uri="{FF2B5EF4-FFF2-40B4-BE49-F238E27FC236}">
-                <a16:creationId xmlns:a16="http://schemas.microsoft.com/office/drawing/2014/main" id="{EA335B55-8B52-5644-A550-2710A16DB226}"/>
-              </a:ext>
-            </a:extLst>
-          </p:cNvPr>
-          <p:cNvSpPr txBox="1"/>
-          <p:nvPr/>
-        </p:nvSpPr>
-        <p:spPr>
-          <a:xfrm>
-            <a:off x="2717006" y="1991378"/>
-            <a:ext cx="2164558" cy="523220"/>
-          </a:xfrm>
-          <a:prstGeom prst="rect">
-            <a:avLst/>
-          </a:prstGeom>
-          <a:noFill/>
-        </p:spPr>
-        <p:txBody>
-          <a:bodyPr wrap="square" rtlCol="0">
-            <a:spAutoFit/>
-          </a:bodyPr>
-          <a:lstStyle/>
-          <a:p>
-            <a:r>
-              <a:rPr lang="en-US" sz="2800" dirty="0"/>
-              <a:t>Community 1</a:t>
-            </a:r>
-          </a:p>
-        </p:txBody>
-      </p:sp>
-      <p:sp>
-        <p:nvSpPr>
-          <p:cNvPr id="29" name="TextBox 28">
-            <a:extLst>
-              <a:ext uri="{FF2B5EF4-FFF2-40B4-BE49-F238E27FC236}">
-                <a16:creationId xmlns:a16="http://schemas.microsoft.com/office/drawing/2014/main" id="{BC52BB93-C1D8-A04D-98AA-48CAD4AC9990}"/>
-              </a:ext>
-            </a:extLst>
-          </p:cNvPr>
-          <p:cNvSpPr txBox="1"/>
-          <p:nvPr/>
-        </p:nvSpPr>
-        <p:spPr>
-          <a:xfrm>
-            <a:off x="6667500" y="2015520"/>
-            <a:ext cx="2164558" cy="523220"/>
-          </a:xfrm>
-          <a:prstGeom prst="rect">
-            <a:avLst/>
-          </a:prstGeom>
-          <a:noFill/>
-        </p:spPr>
-        <p:txBody>
-          <a:bodyPr wrap="square" rtlCol="0">
-            <a:spAutoFit/>
-          </a:bodyPr>
-          <a:lstStyle/>
-          <a:p>
-            <a:r>
-              <a:rPr lang="en-US" sz="2800" dirty="0"/>
-              <a:t>Community 2</a:t>
-            </a:r>
-          </a:p>
-        </p:txBody>
-      </p:sp>
-    </p:spTree>
-    <p:extLst>
-      <p:ext uri="{BB962C8B-B14F-4D97-AF65-F5344CB8AC3E}">
-        <p14:creationId xmlns:p14="http://schemas.microsoft.com/office/powerpoint/2010/main" val="3055002149"/>
-      </p:ext>
-    </p:extLst>
-  </p:cSld>
-  <p:clrMapOvr>
-    <a:masterClrMapping/>
-  </p:clrMapOvr>
-</p:sld>
-</file>
-
-<file path=ppt/slides/slide20.xml><?xml version="1.0" encoding="utf-8"?>
+<file path=ppt/slides/slide21.xml><?xml version="1.0" encoding="utf-8"?>
 <p:sld xmlns:a="http://schemas.openxmlformats.org/drawingml/2006/main" xmlns:r="http://schemas.openxmlformats.org/officeDocument/2006/relationships" xmlns:p="http://schemas.openxmlformats.org/presentationml/2006/main">
   <p:cSld>
     <p:spTree>
@@ -36324,7 +36885,7 @@
 </p:sld>
 </file>
 
-<file path=ppt/slides/slide21.xml><?xml version="1.0" encoding="utf-8"?>
+<file path=ppt/slides/slide22.xml><?xml version="1.0" encoding="utf-8"?>
 <p:sld xmlns:a="http://schemas.openxmlformats.org/drawingml/2006/main" xmlns:r="http://schemas.openxmlformats.org/officeDocument/2006/relationships" xmlns:p="http://schemas.openxmlformats.org/presentationml/2006/main">
   <p:cSld>
     <p:spTree>
@@ -36433,7 +36994,7 @@
 </p:sld>
 </file>
 
-<file path=ppt/slides/slide22.xml><?xml version="1.0" encoding="utf-8"?>
+<file path=ppt/slides/slide23.xml><?xml version="1.0" encoding="utf-8"?>
 <p:sld xmlns:a="http://schemas.openxmlformats.org/drawingml/2006/main" xmlns:r="http://schemas.openxmlformats.org/officeDocument/2006/relationships" xmlns:p="http://schemas.openxmlformats.org/presentationml/2006/main">
   <p:cSld>
     <p:spTree>
@@ -36659,7 +37220,7 @@
 </p:sld>
 </file>
 
-<file path=ppt/slides/slide23.xml><?xml version="1.0" encoding="utf-8"?>
+<file path=ppt/slides/slide24.xml><?xml version="1.0" encoding="utf-8"?>
 <p:sld xmlns:a="http://schemas.openxmlformats.org/drawingml/2006/main" xmlns:r="http://schemas.openxmlformats.org/officeDocument/2006/relationships" xmlns:p="http://schemas.openxmlformats.org/presentationml/2006/main">
   <p:cSld>
     <p:spTree>
@@ -36725,7 +37286,7 @@
 </p:sld>
 </file>
 
-<file path=ppt/slides/slide24.xml><?xml version="1.0" encoding="utf-8"?>
+<file path=ppt/slides/slide25.xml><?xml version="1.0" encoding="utf-8"?>
 <p:sld xmlns:a="http://schemas.openxmlformats.org/drawingml/2006/main" xmlns:r="http://schemas.openxmlformats.org/officeDocument/2006/relationships" xmlns:p="http://schemas.openxmlformats.org/presentationml/2006/main">
   <p:cSld>
     <p:spTree>
@@ -37804,7 +38365,7 @@
 </p:sld>
 </file>
 
-<file path=ppt/slides/slide25.xml><?xml version="1.0" encoding="utf-8"?>
+<file path=ppt/slides/slide26.xml><?xml version="1.0" encoding="utf-8"?>
 <p:sld xmlns:a="http://schemas.openxmlformats.org/drawingml/2006/main" xmlns:r="http://schemas.openxmlformats.org/officeDocument/2006/relationships" xmlns:p="http://schemas.openxmlformats.org/presentationml/2006/main">
   <p:cSld>
     <p:spTree>
@@ -38163,7 +38724,7 @@
 </p:sld>
 </file>
 
-<file path=ppt/slides/slide26.xml><?xml version="1.0" encoding="utf-8"?>
+<file path=ppt/slides/slide27.xml><?xml version="1.0" encoding="utf-8"?>
 <p:sld xmlns:a="http://schemas.openxmlformats.org/drawingml/2006/main" xmlns:r="http://schemas.openxmlformats.org/officeDocument/2006/relationships" xmlns:p="http://schemas.openxmlformats.org/presentationml/2006/main">
   <p:cSld>
     <p:spTree>
@@ -38259,7 +38820,7 @@
 </p:sld>
 </file>
 
-<file path=ppt/slides/slide27.xml><?xml version="1.0" encoding="utf-8"?>
+<file path=ppt/slides/slide28.xml><?xml version="1.0" encoding="utf-8"?>
 <p:sld xmlns:a="http://schemas.openxmlformats.org/drawingml/2006/main" xmlns:r="http://schemas.openxmlformats.org/officeDocument/2006/relationships" xmlns:p="http://schemas.openxmlformats.org/presentationml/2006/main">
   <p:cSld>
     <p:spTree>
@@ -38357,7 +38918,7 @@
 </p:sld>
 </file>
 
-<file path=ppt/slides/slide28.xml><?xml version="1.0" encoding="utf-8"?>
+<file path=ppt/slides/slide29.xml><?xml version="1.0" encoding="utf-8"?>
 <p:sld xmlns:a="http://schemas.openxmlformats.org/drawingml/2006/main" xmlns:r="http://schemas.openxmlformats.org/officeDocument/2006/relationships" xmlns:p="http://schemas.openxmlformats.org/presentationml/2006/main">
   <p:cSld>
     <p:spTree>
@@ -38443,124 +39004,6 @@
     <p:extLst>
       <p:ext uri="{BB962C8B-B14F-4D97-AF65-F5344CB8AC3E}">
         <p14:creationId xmlns:p14="http://schemas.microsoft.com/office/powerpoint/2010/main" val="3277568106"/>
-      </p:ext>
-    </p:extLst>
-  </p:cSld>
-  <p:clrMapOvr>
-    <a:masterClrMapping/>
-  </p:clrMapOvr>
-</p:sld>
-</file>
-
-<file path=ppt/slides/slide29.xml><?xml version="1.0" encoding="utf-8"?>
-<p:sld xmlns:a="http://schemas.openxmlformats.org/drawingml/2006/main" xmlns:r="http://schemas.openxmlformats.org/officeDocument/2006/relationships" xmlns:p="http://schemas.openxmlformats.org/presentationml/2006/main">
-  <p:cSld>
-    <p:spTree>
-      <p:nvGrpSpPr>
-        <p:cNvPr id="1" name=""/>
-        <p:cNvGrpSpPr/>
-        <p:nvPr/>
-      </p:nvGrpSpPr>
-      <p:grpSpPr>
-        <a:xfrm>
-          <a:off x="0" y="0"/>
-          <a:ext cx="0" cy="0"/>
-          <a:chOff x="0" y="0"/>
-          <a:chExt cx="0" cy="0"/>
-        </a:xfrm>
-      </p:grpSpPr>
-      <p:sp>
-        <p:nvSpPr>
-          <p:cNvPr id="2" name="Title 1">
-            <a:extLst>
-              <a:ext uri="{FF2B5EF4-FFF2-40B4-BE49-F238E27FC236}">
-                <a16:creationId xmlns:a16="http://schemas.microsoft.com/office/drawing/2014/main" id="{E31E3458-3266-244D-BCB1-9A7BADC0BE83}"/>
-              </a:ext>
-            </a:extLst>
-          </p:cNvPr>
-          <p:cNvSpPr>
-            <a:spLocks noGrp="1"/>
-          </p:cNvSpPr>
-          <p:nvPr>
-            <p:ph type="title"/>
-          </p:nvPr>
-        </p:nvSpPr>
-        <p:spPr>
-          <a:solidFill>
-            <a:srgbClr val="3CE29B"/>
-          </a:solidFill>
-        </p:spPr>
-        <p:txBody>
-          <a:bodyPr/>
-          <a:lstStyle/>
-          <a:p>
-            <a:r>
-              <a:rPr lang="en-US" dirty="0" err="1">
-                <a:solidFill>
-                  <a:schemeClr val="bg1"/>
-                </a:solidFill>
-              </a:rPr>
-              <a:t>Stegen</a:t>
-            </a:r>
-            <a:r>
-              <a:rPr lang="en-US" dirty="0">
-                <a:solidFill>
-                  <a:schemeClr val="bg1"/>
-                </a:solidFill>
-              </a:rPr>
-              <a:t> </a:t>
-            </a:r>
-            <a:r>
-              <a:rPr lang="en-US" i="1" dirty="0">
-                <a:solidFill>
-                  <a:schemeClr val="bg1"/>
-                </a:solidFill>
-              </a:rPr>
-              <a:t>et al., </a:t>
-            </a:r>
-            <a:r>
-              <a:rPr lang="en-US" dirty="0">
-                <a:solidFill>
-                  <a:schemeClr val="bg1"/>
-                </a:solidFill>
-              </a:rPr>
-              <a:t>(2013) Phylogenetic Null Model</a:t>
-            </a:r>
-          </a:p>
-        </p:txBody>
-      </p:sp>
-      <p:graphicFrame>
-        <p:nvGraphicFramePr>
-          <p:cNvPr id="8" name="Diagram 7">
-            <a:extLst>
-              <a:ext uri="{FF2B5EF4-FFF2-40B4-BE49-F238E27FC236}">
-                <a16:creationId xmlns:a16="http://schemas.microsoft.com/office/drawing/2014/main" id="{8AE007E0-E98F-624F-A585-6E129FB1664C}"/>
-              </a:ext>
-            </a:extLst>
-          </p:cNvPr>
-          <p:cNvGraphicFramePr/>
-          <p:nvPr>
-            <p:extLst>
-              <p:ext uri="{D42A27DB-BD31-4B8C-83A1-F6EECF244321}">
-                <p14:modId xmlns:p14="http://schemas.microsoft.com/office/powerpoint/2010/main" val="291247793"/>
-              </p:ext>
-            </p:extLst>
-          </p:nvPr>
-        </p:nvGraphicFramePr>
-        <p:xfrm>
-          <a:off x="2032000" y="1843087"/>
-          <a:ext cx="8128000" cy="4623858"/>
-        </p:xfrm>
-        <a:graphic>
-          <a:graphicData uri="http://schemas.openxmlformats.org/drawingml/2006/diagram">
-            <dgm:relIds xmlns:dgm="http://schemas.openxmlformats.org/drawingml/2006/diagram" xmlns:r="http://schemas.openxmlformats.org/officeDocument/2006/relationships" r:dm="rId3" r:lo="rId4" r:qs="rId5" r:cs="rId6"/>
-          </a:graphicData>
-        </a:graphic>
-      </p:graphicFrame>
-    </p:spTree>
-    <p:extLst>
-      <p:ext uri="{BB962C8B-B14F-4D97-AF65-F5344CB8AC3E}">
-        <p14:creationId xmlns:p14="http://schemas.microsoft.com/office/powerpoint/2010/main" val="56936835"/>
       </p:ext>
     </p:extLst>
   </p:cSld>
@@ -38678,6 +39121,124 @@
           <p:cNvPr id="2" name="Title 1">
             <a:extLst>
               <a:ext uri="{FF2B5EF4-FFF2-40B4-BE49-F238E27FC236}">
+                <a16:creationId xmlns:a16="http://schemas.microsoft.com/office/drawing/2014/main" id="{E31E3458-3266-244D-BCB1-9A7BADC0BE83}"/>
+              </a:ext>
+            </a:extLst>
+          </p:cNvPr>
+          <p:cNvSpPr>
+            <a:spLocks noGrp="1"/>
+          </p:cNvSpPr>
+          <p:nvPr>
+            <p:ph type="title"/>
+          </p:nvPr>
+        </p:nvSpPr>
+        <p:spPr>
+          <a:solidFill>
+            <a:srgbClr val="3CE29B"/>
+          </a:solidFill>
+        </p:spPr>
+        <p:txBody>
+          <a:bodyPr/>
+          <a:lstStyle/>
+          <a:p>
+            <a:r>
+              <a:rPr lang="en-US" dirty="0" err="1">
+                <a:solidFill>
+                  <a:schemeClr val="bg1"/>
+                </a:solidFill>
+              </a:rPr>
+              <a:t>Stegen</a:t>
+            </a:r>
+            <a:r>
+              <a:rPr lang="en-US" dirty="0">
+                <a:solidFill>
+                  <a:schemeClr val="bg1"/>
+                </a:solidFill>
+              </a:rPr>
+              <a:t> </a:t>
+            </a:r>
+            <a:r>
+              <a:rPr lang="en-US" i="1" dirty="0">
+                <a:solidFill>
+                  <a:schemeClr val="bg1"/>
+                </a:solidFill>
+              </a:rPr>
+              <a:t>et al., </a:t>
+            </a:r>
+            <a:r>
+              <a:rPr lang="en-US" dirty="0">
+                <a:solidFill>
+                  <a:schemeClr val="bg1"/>
+                </a:solidFill>
+              </a:rPr>
+              <a:t>(2013) Phylogenetic Null Model</a:t>
+            </a:r>
+          </a:p>
+        </p:txBody>
+      </p:sp>
+      <p:graphicFrame>
+        <p:nvGraphicFramePr>
+          <p:cNvPr id="8" name="Diagram 7">
+            <a:extLst>
+              <a:ext uri="{FF2B5EF4-FFF2-40B4-BE49-F238E27FC236}">
+                <a16:creationId xmlns:a16="http://schemas.microsoft.com/office/drawing/2014/main" id="{8AE007E0-E98F-624F-A585-6E129FB1664C}"/>
+              </a:ext>
+            </a:extLst>
+          </p:cNvPr>
+          <p:cNvGraphicFramePr/>
+          <p:nvPr>
+            <p:extLst>
+              <p:ext uri="{D42A27DB-BD31-4B8C-83A1-F6EECF244321}">
+                <p14:modId xmlns:p14="http://schemas.microsoft.com/office/powerpoint/2010/main" val="291247793"/>
+              </p:ext>
+            </p:extLst>
+          </p:nvPr>
+        </p:nvGraphicFramePr>
+        <p:xfrm>
+          <a:off x="2032000" y="1843087"/>
+          <a:ext cx="8128000" cy="4623858"/>
+        </p:xfrm>
+        <a:graphic>
+          <a:graphicData uri="http://schemas.openxmlformats.org/drawingml/2006/diagram">
+            <dgm:relIds xmlns:dgm="http://schemas.openxmlformats.org/drawingml/2006/diagram" xmlns:r="http://schemas.openxmlformats.org/officeDocument/2006/relationships" r:dm="rId3" r:lo="rId4" r:qs="rId5" r:cs="rId6"/>
+          </a:graphicData>
+        </a:graphic>
+      </p:graphicFrame>
+    </p:spTree>
+    <p:extLst>
+      <p:ext uri="{BB962C8B-B14F-4D97-AF65-F5344CB8AC3E}">
+        <p14:creationId xmlns:p14="http://schemas.microsoft.com/office/powerpoint/2010/main" val="56936835"/>
+      </p:ext>
+    </p:extLst>
+  </p:cSld>
+  <p:clrMapOvr>
+    <a:masterClrMapping/>
+  </p:clrMapOvr>
+</p:sld>
+</file>
+
+<file path=ppt/slides/slide31.xml><?xml version="1.0" encoding="utf-8"?>
+<p:sld xmlns:a="http://schemas.openxmlformats.org/drawingml/2006/main" xmlns:r="http://schemas.openxmlformats.org/officeDocument/2006/relationships" xmlns:p="http://schemas.openxmlformats.org/presentationml/2006/main">
+  <p:cSld>
+    <p:spTree>
+      <p:nvGrpSpPr>
+        <p:cNvPr id="1" name=""/>
+        <p:cNvGrpSpPr/>
+        <p:nvPr/>
+      </p:nvGrpSpPr>
+      <p:grpSpPr>
+        <a:xfrm>
+          <a:off x="0" y="0"/>
+          <a:ext cx="0" cy="0"/>
+          <a:chOff x="0" y="0"/>
+          <a:chExt cx="0" cy="0"/>
+        </a:xfrm>
+      </p:grpSpPr>
+      <p:sp>
+        <p:nvSpPr>
+          <p:cNvPr id="2" name="Title 1">
+            <a:extLst>
+              <a:ext uri="{FF2B5EF4-FFF2-40B4-BE49-F238E27FC236}">
                 <a16:creationId xmlns:a16="http://schemas.microsoft.com/office/drawing/2014/main" id="{68ABA72A-65D0-264A-81C1-22BB6ED24C60}"/>
               </a:ext>
             </a:extLst>
@@ -38752,7 +39313,7 @@
 </p:sld>
 </file>
 
-<file path=ppt/slides/slide31.xml><?xml version="1.0" encoding="utf-8"?>
+<file path=ppt/slides/slide32.xml><?xml version="1.0" encoding="utf-8"?>
 <p:sld xmlns:a="http://schemas.openxmlformats.org/drawingml/2006/main" xmlns:r="http://schemas.openxmlformats.org/officeDocument/2006/relationships" xmlns:p="http://schemas.openxmlformats.org/presentationml/2006/main">
   <p:cSld>
     <p:spTree>
@@ -38805,31 +39366,6 @@
           </a:p>
         </p:txBody>
       </p:sp>
-      <p:sp>
-        <p:nvSpPr>
-          <p:cNvPr id="3" name="Content Placeholder 2">
-            <a:extLst>
-              <a:ext uri="{FF2B5EF4-FFF2-40B4-BE49-F238E27FC236}">
-                <a16:creationId xmlns:a16="http://schemas.microsoft.com/office/drawing/2014/main" id="{958C73FE-1CD3-9D4C-8447-A79ED529B7A0}"/>
-              </a:ext>
-            </a:extLst>
-          </p:cNvPr>
-          <p:cNvSpPr>
-            <a:spLocks noGrp="1"/>
-          </p:cNvSpPr>
-          <p:nvPr>
-            <p:ph idx="1"/>
-          </p:nvPr>
-        </p:nvSpPr>
-        <p:spPr/>
-        <p:txBody>
-          <a:bodyPr/>
-          <a:lstStyle/>
-          <a:p>
-            <a:endParaRPr lang="en-US"/>
-          </a:p>
-        </p:txBody>
-      </p:sp>
     </p:spTree>
     <p:extLst>
       <p:ext uri="{BB962C8B-B14F-4D97-AF65-F5344CB8AC3E}">
@@ -38843,7 +39379,7 @@
 </p:sld>
 </file>
 
-<file path=ppt/slides/slide32.xml><?xml version="1.0" encoding="utf-8"?>
+<file path=ppt/slides/slide33.xml><?xml version="1.0" encoding="utf-8"?>
 <p:sld xmlns:a="http://schemas.openxmlformats.org/drawingml/2006/main" xmlns:r="http://schemas.openxmlformats.org/officeDocument/2006/relationships" xmlns:p="http://schemas.openxmlformats.org/presentationml/2006/main">
   <p:cSld>
     <p:spTree>
@@ -38958,7 +39494,90 @@
 </p:sld>
 </file>
 
-<file path=ppt/slides/slide33.xml><?xml version="1.0" encoding="utf-8"?>
+<file path=ppt/slides/slide34.xml><?xml version="1.0" encoding="utf-8"?>
+<p:sld xmlns:a="http://schemas.openxmlformats.org/drawingml/2006/main" xmlns:r="http://schemas.openxmlformats.org/officeDocument/2006/relationships" xmlns:p="http://schemas.openxmlformats.org/presentationml/2006/main">
+  <p:cSld>
+    <p:spTree>
+      <p:nvGrpSpPr>
+        <p:cNvPr id="1" name=""/>
+        <p:cNvGrpSpPr/>
+        <p:nvPr/>
+      </p:nvGrpSpPr>
+      <p:grpSpPr>
+        <a:xfrm>
+          <a:off x="0" y="0"/>
+          <a:ext cx="0" cy="0"/>
+          <a:chOff x="0" y="0"/>
+          <a:chExt cx="0" cy="0"/>
+        </a:xfrm>
+      </p:grpSpPr>
+      <p:sp>
+        <p:nvSpPr>
+          <p:cNvPr id="2" name="Title 1">
+            <a:extLst>
+              <a:ext uri="{FF2B5EF4-FFF2-40B4-BE49-F238E27FC236}">
+                <a16:creationId xmlns:a16="http://schemas.microsoft.com/office/drawing/2014/main" id="{147D2BF3-8D20-3347-8C3A-FC5C22DAA765}"/>
+              </a:ext>
+            </a:extLst>
+          </p:cNvPr>
+          <p:cNvSpPr>
+            <a:spLocks noGrp="1"/>
+          </p:cNvSpPr>
+          <p:nvPr>
+            <p:ph type="title"/>
+          </p:nvPr>
+        </p:nvSpPr>
+        <p:spPr/>
+        <p:txBody>
+          <a:bodyPr/>
+          <a:lstStyle/>
+          <a:p>
+            <a:r>
+              <a:rPr lang="en-US" dirty="0"/>
+              <a:t>Results</a:t>
+            </a:r>
+          </a:p>
+        </p:txBody>
+      </p:sp>
+      <p:sp>
+        <p:nvSpPr>
+          <p:cNvPr id="3" name="Content Placeholder 2">
+            <a:extLst>
+              <a:ext uri="{FF2B5EF4-FFF2-40B4-BE49-F238E27FC236}">
+                <a16:creationId xmlns:a16="http://schemas.microsoft.com/office/drawing/2014/main" id="{F9534A9C-B446-AB47-AFCB-FC722EBB3FD3}"/>
+              </a:ext>
+            </a:extLst>
+          </p:cNvPr>
+          <p:cNvSpPr>
+            <a:spLocks noGrp="1"/>
+          </p:cNvSpPr>
+          <p:nvPr>
+            <p:ph idx="1"/>
+          </p:nvPr>
+        </p:nvSpPr>
+        <p:spPr/>
+        <p:txBody>
+          <a:bodyPr/>
+          <a:lstStyle/>
+          <a:p>
+            <a:endParaRPr lang="en-US"/>
+          </a:p>
+        </p:txBody>
+      </p:sp>
+    </p:spTree>
+    <p:extLst>
+      <p:ext uri="{BB962C8B-B14F-4D97-AF65-F5344CB8AC3E}">
+        <p14:creationId xmlns:p14="http://schemas.microsoft.com/office/powerpoint/2010/main" val="3629005695"/>
+      </p:ext>
+    </p:extLst>
+  </p:cSld>
+  <p:clrMapOvr>
+    <a:masterClrMapping/>
+  </p:clrMapOvr>
+</p:sld>
+</file>
+
+<file path=ppt/slides/slide35.xml><?xml version="1.0" encoding="utf-8"?>
 <p:sld xmlns:a="http://schemas.openxmlformats.org/drawingml/2006/main" xmlns:r="http://schemas.openxmlformats.org/officeDocument/2006/relationships" xmlns:p="http://schemas.openxmlformats.org/presentationml/2006/main">
   <p:cSld>
     <p:spTree>
@@ -39050,6 +39669,204 @@
     <p:extLst>
       <p:ext uri="{BB962C8B-B14F-4D97-AF65-F5344CB8AC3E}">
         <p14:creationId xmlns:p14="http://schemas.microsoft.com/office/powerpoint/2010/main" val="4153186007"/>
+      </p:ext>
+    </p:extLst>
+  </p:cSld>
+  <p:clrMapOvr>
+    <a:masterClrMapping/>
+  </p:clrMapOvr>
+</p:sld>
+</file>
+
+<file path=ppt/slides/slide36.xml><?xml version="1.0" encoding="utf-8"?>
+<p:sld xmlns:a="http://schemas.openxmlformats.org/drawingml/2006/main" xmlns:r="http://schemas.openxmlformats.org/officeDocument/2006/relationships" xmlns:p="http://schemas.openxmlformats.org/presentationml/2006/main">
+  <p:cSld>
+    <p:spTree>
+      <p:nvGrpSpPr>
+        <p:cNvPr id="1" name=""/>
+        <p:cNvGrpSpPr/>
+        <p:nvPr/>
+      </p:nvGrpSpPr>
+      <p:grpSpPr>
+        <a:xfrm>
+          <a:off x="0" y="0"/>
+          <a:ext cx="0" cy="0"/>
+          <a:chOff x="0" y="0"/>
+          <a:chExt cx="0" cy="0"/>
+        </a:xfrm>
+      </p:grpSpPr>
+      <p:sp>
+        <p:nvSpPr>
+          <p:cNvPr id="2" name="Title 1">
+            <a:extLst>
+              <a:ext uri="{FF2B5EF4-FFF2-40B4-BE49-F238E27FC236}">
+                <a16:creationId xmlns:a16="http://schemas.microsoft.com/office/drawing/2014/main" id="{174D7E04-7C38-FB49-A0A0-EF5E49EDA455}"/>
+              </a:ext>
+            </a:extLst>
+          </p:cNvPr>
+          <p:cNvSpPr>
+            <a:spLocks noGrp="1"/>
+          </p:cNvSpPr>
+          <p:nvPr>
+            <p:ph type="title"/>
+          </p:nvPr>
+        </p:nvSpPr>
+        <p:spPr>
+          <a:solidFill>
+            <a:srgbClr val="5C9BD5"/>
+          </a:solidFill>
+        </p:spPr>
+        <p:txBody>
+          <a:bodyPr>
+            <a:noAutofit/>
+          </a:bodyPr>
+          <a:lstStyle/>
+          <a:p>
+            <a:r>
+              <a:rPr lang="en-GB" sz="2800" b="1" dirty="0">
+                <a:solidFill>
+                  <a:schemeClr val="bg1"/>
+                </a:solidFill>
+              </a:rPr>
+              <a:t>Hu et al., (2017) Strong impact of anthropogenic contamination on the co‐occurrence patterns of a riverine microbial community</a:t>
+            </a:r>
+            <a:br>
+              <a:rPr lang="en-GB" sz="2800" b="1" dirty="0">
+                <a:solidFill>
+                  <a:schemeClr val="bg1"/>
+                </a:solidFill>
+              </a:rPr>
+            </a:br>
+            <a:endParaRPr lang="en-US" sz="2800" dirty="0">
+              <a:solidFill>
+                <a:schemeClr val="bg1"/>
+              </a:solidFill>
+            </a:endParaRPr>
+          </a:p>
+        </p:txBody>
+      </p:sp>
+    </p:spTree>
+    <p:extLst>
+      <p:ext uri="{BB962C8B-B14F-4D97-AF65-F5344CB8AC3E}">
+        <p14:creationId xmlns:p14="http://schemas.microsoft.com/office/powerpoint/2010/main" val="2136607666"/>
+      </p:ext>
+    </p:extLst>
+  </p:cSld>
+  <p:clrMapOvr>
+    <a:masterClrMapping/>
+  </p:clrMapOvr>
+</p:sld>
+</file>
+
+<file path=ppt/slides/slide37.xml><?xml version="1.0" encoding="utf-8"?>
+<p:sld xmlns:a="http://schemas.openxmlformats.org/drawingml/2006/main" xmlns:r="http://schemas.openxmlformats.org/officeDocument/2006/relationships" xmlns:p="http://schemas.openxmlformats.org/presentationml/2006/main">
+  <p:cSld>
+    <p:spTree>
+      <p:nvGrpSpPr>
+        <p:cNvPr id="1" name=""/>
+        <p:cNvGrpSpPr/>
+        <p:nvPr/>
+      </p:nvGrpSpPr>
+      <p:grpSpPr>
+        <a:xfrm>
+          <a:off x="0" y="0"/>
+          <a:ext cx="0" cy="0"/>
+          <a:chOff x="0" y="0"/>
+          <a:chExt cx="0" cy="0"/>
+        </a:xfrm>
+      </p:grpSpPr>
+      <p:sp>
+        <p:nvSpPr>
+          <p:cNvPr id="2" name="Title 1">
+            <a:extLst>
+              <a:ext uri="{FF2B5EF4-FFF2-40B4-BE49-F238E27FC236}">
+                <a16:creationId xmlns:a16="http://schemas.microsoft.com/office/drawing/2014/main" id="{4C2DA027-B72B-4144-A731-E9B94EB5EDDD}"/>
+              </a:ext>
+            </a:extLst>
+          </p:cNvPr>
+          <p:cNvSpPr>
+            <a:spLocks noGrp="1"/>
+          </p:cNvSpPr>
+          <p:nvPr>
+            <p:ph type="title"/>
+          </p:nvPr>
+        </p:nvSpPr>
+        <p:spPr/>
+        <p:txBody>
+          <a:bodyPr/>
+          <a:lstStyle/>
+          <a:p>
+            <a:endParaRPr lang="en-US"/>
+          </a:p>
+        </p:txBody>
+      </p:sp>
+      <p:sp>
+        <p:nvSpPr>
+          <p:cNvPr id="3" name="Content Placeholder 2">
+            <a:extLst>
+              <a:ext uri="{FF2B5EF4-FFF2-40B4-BE49-F238E27FC236}">
+                <a16:creationId xmlns:a16="http://schemas.microsoft.com/office/drawing/2014/main" id="{9F9B51A7-07A9-CA41-AA95-F674E4BEFDE9}"/>
+              </a:ext>
+            </a:extLst>
+          </p:cNvPr>
+          <p:cNvSpPr>
+            <a:spLocks noGrp="1"/>
+          </p:cNvSpPr>
+          <p:nvPr>
+            <p:ph idx="1"/>
+          </p:nvPr>
+        </p:nvSpPr>
+        <p:spPr/>
+        <p:txBody>
+          <a:bodyPr/>
+          <a:lstStyle/>
+          <a:p>
+            <a:pPr marL="514350" indent="-514350">
+              <a:buFont typeface="+mj-lt"/>
+              <a:buAutoNum type="arabicPeriod"/>
+            </a:pPr>
+            <a:r>
+              <a:rPr lang="en-US" dirty="0"/>
+              <a:t>Transpose </a:t>
+            </a:r>
+            <a:r>
+              <a:rPr lang="en-US" dirty="0" err="1"/>
+              <a:t>asv</a:t>
+            </a:r>
+            <a:r>
+              <a:rPr lang="en-US" dirty="0"/>
+              <a:t> table (</a:t>
+            </a:r>
+            <a:r>
+              <a:rPr lang="en-US" dirty="0" err="1"/>
+              <a:t>asv</a:t>
+            </a:r>
+            <a:r>
+              <a:rPr lang="en-US" dirty="0"/>
+              <a:t> = rows, samples = columns) and compute a matrix of Spearman’s rho rank correlation coefficients for all possible pairs of columns (</a:t>
+            </a:r>
+            <a:r>
+              <a:rPr lang="en-US" dirty="0" err="1"/>
+              <a:t>asvs</a:t>
+            </a:r>
+            <a:r>
+              <a:rPr lang="en-US" dirty="0"/>
+              <a:t>).</a:t>
+            </a:r>
+          </a:p>
+          <a:p>
+            <a:pPr marL="514350" indent="-514350">
+              <a:buFont typeface="+mj-lt"/>
+              <a:buAutoNum type="arabicPeriod"/>
+            </a:pPr>
+            <a:endParaRPr lang="en-US" dirty="0"/>
+          </a:p>
+        </p:txBody>
+      </p:sp>
+    </p:spTree>
+    <p:extLst>
+      <p:ext uri="{BB962C8B-B14F-4D97-AF65-F5344CB8AC3E}">
+        <p14:creationId xmlns:p14="http://schemas.microsoft.com/office/powerpoint/2010/main" val="1057470918"/>
       </p:ext>
     </p:extLst>
   </p:cSld>

--- a/Projects/Chapter1/community-assembly.pptx
+++ b/Projects/Chapter1/community-assembly.pptx
@@ -5,7 +5,7 @@
     <p:sldMasterId id="2147483648" r:id="rId1"/>
   </p:sldMasterIdLst>
   <p:notesMasterIdLst>
-    <p:notesMasterId r:id="rId39"/>
+    <p:notesMasterId r:id="rId42"/>
   </p:notesMasterIdLst>
   <p:sldIdLst>
     <p:sldId id="256" r:id="rId2"/>
@@ -20,31 +20,34 @@
     <p:sldId id="282" r:id="rId11"/>
     <p:sldId id="287" r:id="rId12"/>
     <p:sldId id="299" r:id="rId13"/>
-    <p:sldId id="274" r:id="rId14"/>
-    <p:sldId id="288" r:id="rId15"/>
-    <p:sldId id="289" r:id="rId16"/>
-    <p:sldId id="290" r:id="rId17"/>
-    <p:sldId id="291" r:id="rId18"/>
-    <p:sldId id="292" r:id="rId19"/>
-    <p:sldId id="284" r:id="rId20"/>
-    <p:sldId id="285" r:id="rId21"/>
-    <p:sldId id="286" r:id="rId22"/>
-    <p:sldId id="263" r:id="rId23"/>
-    <p:sldId id="258" r:id="rId24"/>
-    <p:sldId id="259" r:id="rId25"/>
-    <p:sldId id="261" r:id="rId26"/>
-    <p:sldId id="277" r:id="rId27"/>
-    <p:sldId id="278" r:id="rId28"/>
-    <p:sldId id="293" r:id="rId29"/>
-    <p:sldId id="271" r:id="rId30"/>
-    <p:sldId id="265" r:id="rId31"/>
-    <p:sldId id="260" r:id="rId32"/>
-    <p:sldId id="262" r:id="rId33"/>
-    <p:sldId id="294" r:id="rId34"/>
-    <p:sldId id="298" r:id="rId35"/>
-    <p:sldId id="295" r:id="rId36"/>
-    <p:sldId id="296" r:id="rId37"/>
-    <p:sldId id="297" r:id="rId38"/>
+    <p:sldId id="300" r:id="rId14"/>
+    <p:sldId id="301" r:id="rId15"/>
+    <p:sldId id="302" r:id="rId16"/>
+    <p:sldId id="274" r:id="rId17"/>
+    <p:sldId id="288" r:id="rId18"/>
+    <p:sldId id="289" r:id="rId19"/>
+    <p:sldId id="290" r:id="rId20"/>
+    <p:sldId id="291" r:id="rId21"/>
+    <p:sldId id="292" r:id="rId22"/>
+    <p:sldId id="284" r:id="rId23"/>
+    <p:sldId id="285" r:id="rId24"/>
+    <p:sldId id="286" r:id="rId25"/>
+    <p:sldId id="263" r:id="rId26"/>
+    <p:sldId id="258" r:id="rId27"/>
+    <p:sldId id="259" r:id="rId28"/>
+    <p:sldId id="261" r:id="rId29"/>
+    <p:sldId id="277" r:id="rId30"/>
+    <p:sldId id="278" r:id="rId31"/>
+    <p:sldId id="293" r:id="rId32"/>
+    <p:sldId id="271" r:id="rId33"/>
+    <p:sldId id="265" r:id="rId34"/>
+    <p:sldId id="260" r:id="rId35"/>
+    <p:sldId id="262" r:id="rId36"/>
+    <p:sldId id="294" r:id="rId37"/>
+    <p:sldId id="298" r:id="rId38"/>
+    <p:sldId id="295" r:id="rId39"/>
+    <p:sldId id="296" r:id="rId40"/>
+    <p:sldId id="297" r:id="rId41"/>
   </p:sldIdLst>
   <p:sldSz cx="12192000" cy="6858000"/>
   <p:notesSz cx="6858000" cy="9144000"/>
@@ -25926,23 +25929,7 @@
           <a:p>
             <a:r>
               <a:rPr lang="en-US" dirty="0"/>
-              <a:t>#Unweighted </a:t>
-            </a:r>
-            <a:r>
-              <a:rPr lang="en-US" dirty="0" err="1"/>
-              <a:t>unifrac</a:t>
-            </a:r>
-            <a:r>
-              <a:rPr lang="en-US" dirty="0"/>
-              <a:t> is based on presence/absence not abundance - but it is sensitive to sequencing depth. So if a sample is of greater depth than other reads it may have more low abundance taxa and therefore effect the </a:t>
-            </a:r>
-            <a:r>
-              <a:rPr lang="en-US" dirty="0" err="1"/>
-              <a:t>unifrac</a:t>
-            </a:r>
-            <a:r>
-              <a:rPr lang="en-US" dirty="0"/>
-              <a:t> metric</a:t>
+              <a:t>Relative abundance plots, agglomerated by Class</a:t>
             </a:r>
           </a:p>
         </p:txBody>
@@ -25964,7 +25951,7 @@
           <a:p>
             <a:fld id="{91AE2140-D502-214A-B76B-E0784B2C949B}" type="slidenum">
               <a:rPr lang="en-US" smtClean="0"/>
-              <a:t>17</a:t>
+              <a:t>19</a:t>
             </a:fld>
             <a:endParaRPr lang="en-US"/>
           </a:p>
@@ -25973,7 +25960,7 @@
     </p:spTree>
     <p:extLst>
       <p:ext uri="{BB962C8B-B14F-4D97-AF65-F5344CB8AC3E}">
-        <p14:creationId xmlns:p14="http://schemas.microsoft.com/office/powerpoint/2010/main" val="127474224"/>
+        <p14:creationId xmlns:p14="http://schemas.microsoft.com/office/powerpoint/2010/main" val="761170827"/>
       </p:ext>
     </p:extLst>
   </p:cSld>
@@ -26029,111 +26016,24 @@
           <a:p>
             <a:r>
               <a:rPr lang="en-US" dirty="0"/>
-              <a:t>1) Looked for evidence of compositionality. By multiplying ASV table by itself we can look for evidence of covariance.</a:t>
-            </a:r>
-          </a:p>
-          <a:p>
+              <a:t>#Unweighted </a:t>
+            </a:r>
+            <a:r>
+              <a:rPr lang="en-US" dirty="0" err="1"/>
+              <a:t>unifrac</a:t>
+            </a:r>
             <a:r>
               <a:rPr lang="en-US" dirty="0"/>
-              <a:t>#We then find the determinant of the covariance matrix and if the answer is 0 we have evidence of compositionality in the data – the result was 0 so the data is compositional.</a:t>
-            </a:r>
-          </a:p>
-          <a:p>
-            <a:endParaRPr lang="en-US" dirty="0"/>
-          </a:p>
-          <a:p>
+              <a:t> is based on presence/absence not abundance - but it is sensitive to sequencing depth. So if a sample is of greater depth than other reads it may have more low abundance taxa and therefore effect the </a:t>
+            </a:r>
+            <a:r>
+              <a:rPr lang="en-US" dirty="0" err="1"/>
+              <a:t>unifrac</a:t>
+            </a:r>
             <a:r>
               <a:rPr lang="en-US" dirty="0"/>
-              <a:t>2) Because out data are compositional we then need to transform them for downstream analysis</a:t>
-            </a:r>
-          </a:p>
-          <a:p>
-            <a:r>
-              <a:rPr lang="en-US" dirty="0"/>
-              <a:t>#Step Four: Perform a Log-Ratio </a:t>
-            </a:r>
-            <a:r>
-              <a:rPr lang="en-US" dirty="0" err="1"/>
-              <a:t>trasnformation</a:t>
-            </a:r>
-            <a:endParaRPr lang="en-US" dirty="0"/>
-          </a:p>
-          <a:p>
-            <a:r>
-              <a:rPr lang="en-US" dirty="0"/>
-              <a:t>#This will </a:t>
-            </a:r>
-            <a:r>
-              <a:rPr lang="en-US" dirty="0" err="1"/>
-              <a:t>normalise</a:t>
-            </a:r>
-            <a:r>
-              <a:rPr lang="en-US" dirty="0"/>
-              <a:t> the ASV data within each sample</a:t>
-            </a:r>
-          </a:p>
-          <a:p>
-            <a:endParaRPr lang="en-US" dirty="0"/>
-          </a:p>
-          <a:p>
-            <a:r>
-              <a:rPr lang="en-US" dirty="0"/>
-              <a:t>3) Look at the difference the log-ratio transformation has made to the covariance of the data</a:t>
-            </a:r>
-          </a:p>
-          <a:p>
-            <a:endParaRPr lang="en-US" dirty="0"/>
-          </a:p>
-          <a:p>
-            <a:r>
-              <a:rPr lang="en-US" dirty="0"/>
-              <a:t>4) Figure 6: Perform Principal Component Analysis on Log-Ratio Transformed Data, Create visual representation of PCA and plot</a:t>
-            </a:r>
-          </a:p>
-          <a:p>
-            <a:endParaRPr lang="en-US" dirty="0"/>
-          </a:p>
-          <a:p>
-            <a:r>
-              <a:rPr lang="en-US" dirty="0"/>
-              <a:t>5) Figure 7: </a:t>
-            </a:r>
-            <a:r>
-              <a:rPr lang="en-US" dirty="0" err="1"/>
-              <a:t>Visualise</a:t>
-            </a:r>
-            <a:r>
-              <a:rPr lang="en-US" dirty="0"/>
-              <a:t> and plot the </a:t>
-            </a:r>
-            <a:r>
-              <a:rPr lang="en-US" dirty="0" err="1"/>
-              <a:t>pca</a:t>
-            </a:r>
-            <a:r>
-              <a:rPr lang="en-US" dirty="0"/>
-              <a:t> </a:t>
-            </a:r>
-          </a:p>
-          <a:p>
-            <a:endParaRPr lang="en-US" dirty="0"/>
-          </a:p>
-          <a:p>
-            <a:r>
-              <a:rPr lang="en-US" dirty="0"/>
-              <a:t>6) Computed the </a:t>
-            </a:r>
-            <a:r>
-              <a:rPr lang="en-US" dirty="0" err="1"/>
-              <a:t>jaccard</a:t>
-            </a:r>
-            <a:r>
-              <a:rPr lang="en-US" dirty="0"/>
-              <a:t> distance metric</a:t>
-            </a:r>
-          </a:p>
-          <a:p>
-            <a:endParaRPr lang="en-US" dirty="0"/>
+              <a:t> metric</a:t>
+            </a:r>
           </a:p>
         </p:txBody>
       </p:sp>
@@ -26154,7 +26054,7 @@
           <a:p>
             <a:fld id="{91AE2140-D502-214A-B76B-E0784B2C949B}" type="slidenum">
               <a:rPr lang="en-US" smtClean="0"/>
-              <a:t>19</a:t>
+              <a:t>20</a:t>
             </a:fld>
             <a:endParaRPr lang="en-US"/>
           </a:p>
@@ -26163,7 +26063,7 @@
     </p:spTree>
     <p:extLst>
       <p:ext uri="{BB962C8B-B14F-4D97-AF65-F5344CB8AC3E}">
-        <p14:creationId xmlns:p14="http://schemas.microsoft.com/office/powerpoint/2010/main" val="171950858"/>
+        <p14:creationId xmlns:p14="http://schemas.microsoft.com/office/powerpoint/2010/main" val="127474224"/>
       </p:ext>
     </p:extLst>
   </p:cSld>
@@ -26219,15 +26119,47 @@
           <a:p>
             <a:r>
               <a:rPr lang="en-US" dirty="0"/>
-              <a:t>I performed linear regressions between the explanatory variables (glaciers) and response variables (richness, depth, area, chlorophyll, </a:t>
+              <a:t>1) Looked for evidence of compositionality. By multiplying ASV table by itself we can look for evidence of covariance.</a:t>
+            </a:r>
+          </a:p>
+          <a:p>
+            <a:r>
+              <a:rPr lang="en-US" dirty="0"/>
+              <a:t>#We then find the determinant of the covariance matrix and if the answer is 0 we have evidence of compositionality in the data – the result was 0 so the data is compositional.</a:t>
+            </a:r>
+          </a:p>
+          <a:p>
+            <a:endParaRPr lang="en-US" dirty="0"/>
+          </a:p>
+          <a:p>
+            <a:r>
+              <a:rPr lang="en-US" dirty="0"/>
+              <a:t>2) Because out data are compositional we then need to transform them for downstream analysis</a:t>
+            </a:r>
+          </a:p>
+          <a:p>
+            <a:r>
+              <a:rPr lang="en-US" dirty="0"/>
+              <a:t>#Step Four: Perform a Log-Ratio </a:t>
             </a:r>
             <a:r>
               <a:rPr lang="en-US" dirty="0" err="1"/>
-              <a:t>dna</a:t>
-            </a:r>
+              <a:t>trasnformation</a:t>
+            </a:r>
+            <a:endParaRPr lang="en-US" dirty="0"/>
+          </a:p>
+          <a:p>
             <a:r>
               <a:rPr lang="en-US" dirty="0"/>
-              <a:t> per gram, diversity indices).</a:t>
+              <a:t>#This will </a:t>
+            </a:r>
+            <a:r>
+              <a:rPr lang="en-US" dirty="0" err="1"/>
+              <a:t>normalise</a:t>
+            </a:r>
+            <a:r>
+              <a:rPr lang="en-US" dirty="0"/>
+              <a:t> the ASV data within each sample</a:t>
             </a:r>
           </a:p>
           <a:p>
@@ -26236,7 +26168,7 @@
           <a:p>
             <a:r>
               <a:rPr lang="en-US" dirty="0"/>
-              <a:t>I then constructed ANOVA tables of the linear regression models to gauge their statistical significance. </a:t>
+              <a:t>3) Look at the difference the log-ratio transformation has made to the covariance of the data</a:t>
             </a:r>
           </a:p>
           <a:p>
@@ -26245,27 +26177,32 @@
           <a:p>
             <a:r>
               <a:rPr lang="en-US" dirty="0"/>
-              <a:t>#Analysis of Variance (ANOVA), a linear model analysis. We want to ask: is the ASV richness/chlorophyll/hole size/hole depth/DNA per gram between glaciers significantly different? Plot the data divided into glacier groups</a:t>
-            </a:r>
+              <a:t>4) Figure 6: Perform Principal Component Analysis on Log-Ratio Transformed Data, Create visual representation of PCA and plot</a:t>
+            </a:r>
+          </a:p>
+          <a:p>
+            <a:endParaRPr lang="en-US" dirty="0"/>
           </a:p>
           <a:p>
             <a:r>
               <a:rPr lang="en-US" dirty="0"/>
-              <a:t>#ANOVA quantifies the signal to noise ratio. How different are our groups in ratio to how spread out the data are? ANOVA will tell us how confident we can be that we are not being fooled by a type I error (a false positive difference between the groups)</a:t>
-            </a:r>
-          </a:p>
-          <a:p>
+              <a:t>5) Figure 7: </a:t>
+            </a:r>
+            <a:r>
+              <a:rPr lang="en-US" dirty="0" err="1"/>
+              <a:t>Visualise</a:t>
+            </a:r>
             <a:r>
               <a:rPr lang="en-US" dirty="0"/>
-              <a:t>#ANOVA will: 1) quantify the overall variability of the dataset. 2) Divide that variability into the variability between and within groups. More signal = more </a:t>
+              <a:t> and plot the </a:t>
             </a:r>
             <a:r>
               <a:rPr lang="en-US" dirty="0" err="1"/>
-              <a:t>condifent</a:t>
+              <a:t>pca</a:t>
             </a:r>
             <a:r>
               <a:rPr lang="en-US" dirty="0"/>
-              <a:t>. More noise = less confident.</a:t>
+              <a:t> </a:t>
             </a:r>
           </a:p>
           <a:p>
@@ -26274,15 +26211,15 @@
           <a:p>
             <a:r>
               <a:rPr lang="en-US" dirty="0"/>
-              <a:t>The ANOVA tables showed there was significant difference between the glaciers in terms of ASV richness, cryoconite hole depth, the </a:t>
+              <a:t>6) Computed the </a:t>
             </a:r>
             <a:r>
               <a:rPr lang="en-US" dirty="0" err="1"/>
-              <a:t>dna</a:t>
+              <a:t>jaccard</a:t>
             </a:r>
             <a:r>
               <a:rPr lang="en-US" dirty="0"/>
-              <a:t> per gram of cryoconite and faith’s pd.</a:t>
+              <a:t> distance metric</a:t>
             </a:r>
           </a:p>
           <a:p>
@@ -26307,7 +26244,7 @@
           <a:p>
             <a:fld id="{91AE2140-D502-214A-B76B-E0784B2C949B}" type="slidenum">
               <a:rPr lang="en-US" smtClean="0"/>
-              <a:t>20</a:t>
+              <a:t>22</a:t>
             </a:fld>
             <a:endParaRPr lang="en-US"/>
           </a:p>
@@ -26316,7 +26253,7 @@
     </p:spTree>
     <p:extLst>
       <p:ext uri="{BB962C8B-B14F-4D97-AF65-F5344CB8AC3E}">
-        <p14:creationId xmlns:p14="http://schemas.microsoft.com/office/powerpoint/2010/main" val="3419341708"/>
+        <p14:creationId xmlns:p14="http://schemas.microsoft.com/office/powerpoint/2010/main" val="171950858"/>
       </p:ext>
     </p:extLst>
   </p:cSld>
@@ -26372,17 +26309,71 @@
           <a:p>
             <a:r>
               <a:rPr lang="en-US" dirty="0"/>
-              <a:t>Linear Regression Analysis</a:t>
-            </a:r>
-          </a:p>
-          <a:p>
+              <a:t>I performed linear regressions between the explanatory variables (glaciers) and response variables (richness, depth, area, chlorophyll, </a:t>
+            </a:r>
+            <a:r>
+              <a:rPr lang="en-US" dirty="0" err="1"/>
+              <a:t>dna</a:t>
+            </a:r>
             <a:r>
               <a:rPr lang="en-US" dirty="0"/>
-              <a:t>#We use linear regression analysis if our explanatory variable is continuous </a:t>
+              <a:t> per gram, diversity indices).</a:t>
             </a:r>
           </a:p>
           <a:p>
             <a:endParaRPr lang="en-US" dirty="0"/>
+          </a:p>
+          <a:p>
+            <a:r>
+              <a:rPr lang="en-US" dirty="0"/>
+              <a:t>I then constructed ANOVA tables of the linear regression models to gauge their statistical significance. </a:t>
+            </a:r>
+          </a:p>
+          <a:p>
+            <a:endParaRPr lang="en-US" dirty="0"/>
+          </a:p>
+          <a:p>
+            <a:r>
+              <a:rPr lang="en-US" dirty="0"/>
+              <a:t>#Analysis of Variance (ANOVA), a linear model analysis. We want to ask: is the ASV richness/chlorophyll/hole size/hole depth/DNA per gram between glaciers significantly different? Plot the data divided into glacier groups</a:t>
+            </a:r>
+          </a:p>
+          <a:p>
+            <a:r>
+              <a:rPr lang="en-US" dirty="0"/>
+              <a:t>#ANOVA quantifies the signal to noise ratio. How different are our groups in ratio to how spread out the data are? ANOVA will tell us how confident we can be that we are not being fooled by a type I error (a false positive difference between the groups)</a:t>
+            </a:r>
+          </a:p>
+          <a:p>
+            <a:r>
+              <a:rPr lang="en-US" dirty="0"/>
+              <a:t>#ANOVA will: 1) quantify the overall variability of the dataset. 2) Divide that variability into the variability between and within groups. More signal = more </a:t>
+            </a:r>
+            <a:r>
+              <a:rPr lang="en-US" dirty="0" err="1"/>
+              <a:t>condifent</a:t>
+            </a:r>
+            <a:r>
+              <a:rPr lang="en-US" dirty="0"/>
+              <a:t>. More noise = less confident.</a:t>
+            </a:r>
+          </a:p>
+          <a:p>
+            <a:endParaRPr lang="en-US" dirty="0"/>
+          </a:p>
+          <a:p>
+            <a:r>
+              <a:rPr lang="en-US" dirty="0"/>
+              <a:t>The ANOVA tables showed there was significant difference between the glaciers in terms of ASV richness, cryoconite hole depth, the </a:t>
+            </a:r>
+            <a:r>
+              <a:rPr lang="en-US" dirty="0" err="1"/>
+              <a:t>dna</a:t>
+            </a:r>
+            <a:r>
+              <a:rPr lang="en-US" dirty="0"/>
+              <a:t> per gram of cryoconite and faith’s pd.</a:t>
+            </a:r>
           </a:p>
           <a:p>
             <a:endParaRPr lang="en-US" dirty="0"/>
@@ -26406,7 +26397,7 @@
           <a:p>
             <a:fld id="{91AE2140-D502-214A-B76B-E0784B2C949B}" type="slidenum">
               <a:rPr lang="en-US" smtClean="0"/>
-              <a:t>21</a:t>
+              <a:t>23</a:t>
             </a:fld>
             <a:endParaRPr lang="en-US"/>
           </a:p>
@@ -26415,7 +26406,7 @@
     </p:spTree>
     <p:extLst>
       <p:ext uri="{BB962C8B-B14F-4D97-AF65-F5344CB8AC3E}">
-        <p14:creationId xmlns:p14="http://schemas.microsoft.com/office/powerpoint/2010/main" val="2976129878"/>
+        <p14:creationId xmlns:p14="http://schemas.microsoft.com/office/powerpoint/2010/main" val="3419341708"/>
       </p:ext>
     </p:extLst>
   </p:cSld>
@@ -26471,51 +26462,20 @@
           <a:p>
             <a:r>
               <a:rPr lang="en-US" dirty="0"/>
-              <a:t>Multivariate analysis can allow us to look at the relationship between community composition and environmental characteristics – these are deterministic, non-random processes. </a:t>
-            </a:r>
-            <a:r>
-              <a:rPr lang="en-US" dirty="0" err="1"/>
-              <a:t>Investiagation</a:t>
-            </a:r>
+              <a:t>Linear Regression Analysis</a:t>
+            </a:r>
+          </a:p>
+          <a:p>
             <a:r>
               <a:rPr lang="en-US" dirty="0"/>
-              <a:t> into deterministic processes of community assembly (e.g. relationship between community composition and environmental characteristics) dominate most studies of microbial community assembly, </a:t>
-            </a:r>
-            <a:r>
-              <a:rPr lang="en-US" dirty="0" err="1"/>
-              <a:t>howeber</a:t>
-            </a:r>
-            <a:r>
-              <a:rPr lang="en-US" dirty="0"/>
-              <a:t>, it is likely both deterministic and stochastic processes contribute to community assembly. This is why I combine multivariate and network analysis (deterministic) with phylogenetic null modelling (deterministic and stochastic) and neutral modelling (stochastic). </a:t>
+              <a:t>#We use linear regression analysis if our explanatory variable is continuous </a:t>
             </a:r>
           </a:p>
           <a:p>
             <a:endParaRPr lang="en-US" dirty="0"/>
           </a:p>
           <a:p>
-            <a:r>
-              <a:rPr lang="en-US" dirty="0"/>
-              <a:t>It has been suggested that initial community assembly is driven by stochastic processes, and deterministic processes shape the community through time. </a:t>
-            </a:r>
-          </a:p>
-          <a:p>
             <a:endParaRPr lang="en-US" dirty="0"/>
-          </a:p>
-          <a:p>
-            <a:r>
-              <a:rPr lang="en-US" dirty="0"/>
-              <a:t>What do we already know about deterministic processes on glaciers?</a:t>
-            </a:r>
-          </a:p>
-          <a:p>
-            <a:endParaRPr lang="en-US" dirty="0"/>
-          </a:p>
-          <a:p>
-            <a:r>
-              <a:rPr lang="en-US" dirty="0"/>
-              <a:t>What do we already know about stochastic processes on glaciers?</a:t>
-            </a:r>
           </a:p>
         </p:txBody>
       </p:sp>
@@ -26536,7 +26496,7 @@
           <a:p>
             <a:fld id="{91AE2140-D502-214A-B76B-E0784B2C949B}" type="slidenum">
               <a:rPr lang="en-US" smtClean="0"/>
-              <a:t>22</a:t>
+              <a:t>24</a:t>
             </a:fld>
             <a:endParaRPr lang="en-US"/>
           </a:p>
@@ -26545,7 +26505,7 @@
     </p:spTree>
     <p:extLst>
       <p:ext uri="{BB962C8B-B14F-4D97-AF65-F5344CB8AC3E}">
-        <p14:creationId xmlns:p14="http://schemas.microsoft.com/office/powerpoint/2010/main" val="2827327905"/>
+        <p14:creationId xmlns:p14="http://schemas.microsoft.com/office/powerpoint/2010/main" val="2976129878"/>
       </p:ext>
     </p:extLst>
   </p:cSld>
@@ -26601,15 +26561,50 @@
           <a:p>
             <a:r>
               <a:rPr lang="en-US" dirty="0"/>
-              <a:t>DDR doesn’t work for this dataset as most of the holes are reported to have the same long </a:t>
+              <a:t>Multivariate analysis can allow us to look at the relationship between community composition and environmental characteristics – these are deterministic, non-random processes. </a:t>
             </a:r>
             <a:r>
               <a:rPr lang="en-US" dirty="0" err="1"/>
-              <a:t>lat</a:t>
+              <a:t>Investiagation</a:t>
             </a:r>
             <a:r>
               <a:rPr lang="en-US" dirty="0"/>
-              <a:t> coordinates.</a:t>
+              <a:t> into deterministic processes of community assembly (e.g. relationship between community composition and environmental characteristics) dominate most studies of microbial community assembly, </a:t>
+            </a:r>
+            <a:r>
+              <a:rPr lang="en-US" dirty="0" err="1"/>
+              <a:t>howeber</a:t>
+            </a:r>
+            <a:r>
+              <a:rPr lang="en-US" dirty="0"/>
+              <a:t>, it is likely both deterministic and stochastic processes contribute to community assembly. This is why I combine multivariate and network analysis (deterministic) with phylogenetic null modelling (deterministic and stochastic) and neutral modelling (stochastic). </a:t>
+            </a:r>
+          </a:p>
+          <a:p>
+            <a:endParaRPr lang="en-US" dirty="0"/>
+          </a:p>
+          <a:p>
+            <a:r>
+              <a:rPr lang="en-US" dirty="0"/>
+              <a:t>It has been suggested that initial community assembly is driven by stochastic processes, and deterministic processes shape the community through time. </a:t>
+            </a:r>
+          </a:p>
+          <a:p>
+            <a:endParaRPr lang="en-US" dirty="0"/>
+          </a:p>
+          <a:p>
+            <a:r>
+              <a:rPr lang="en-US" dirty="0"/>
+              <a:t>What do we already know about deterministic processes on glaciers?</a:t>
+            </a:r>
+          </a:p>
+          <a:p>
+            <a:endParaRPr lang="en-US" dirty="0"/>
+          </a:p>
+          <a:p>
+            <a:r>
+              <a:rPr lang="en-US" dirty="0"/>
+              <a:t>What do we already know about stochastic processes on glaciers?</a:t>
             </a:r>
           </a:p>
         </p:txBody>
@@ -26631,7 +26626,7 @@
           <a:p>
             <a:fld id="{91AE2140-D502-214A-B76B-E0784B2C949B}" type="slidenum">
               <a:rPr lang="en-US" smtClean="0"/>
-              <a:t>24</a:t>
+              <a:t>25</a:t>
             </a:fld>
             <a:endParaRPr lang="en-US"/>
           </a:p>
@@ -26640,7 +26635,7 @@
     </p:spTree>
     <p:extLst>
       <p:ext uri="{BB962C8B-B14F-4D97-AF65-F5344CB8AC3E}">
-        <p14:creationId xmlns:p14="http://schemas.microsoft.com/office/powerpoint/2010/main" val="2176052354"/>
+        <p14:creationId xmlns:p14="http://schemas.microsoft.com/office/powerpoint/2010/main" val="2827327905"/>
       </p:ext>
     </p:extLst>
   </p:cSld>
@@ -26696,49 +26691,15 @@
           <a:p>
             <a:r>
               <a:rPr lang="en-US" dirty="0"/>
-              <a:t>Sloan’s Neutral Model states that the probability of species </a:t>
-            </a:r>
-            <a:r>
-              <a:rPr lang="en-US" i="1" dirty="0" err="1"/>
-              <a:t>i</a:t>
+              <a:t>DDR doesn’t work for this dataset as most of the holes are reported to have the same long </a:t>
+            </a:r>
+            <a:r>
+              <a:rPr lang="en-US" dirty="0" err="1"/>
+              <a:t>lat</a:t>
             </a:r>
             <a:r>
               <a:rPr lang="en-US" dirty="0"/>
-              <a:t> occurring within a sample at abundance (x</a:t>
-            </a:r>
-            <a:r>
-              <a:rPr lang="en-US" i="0" baseline="-25000" dirty="0"/>
-              <a:t>i</a:t>
-            </a:r>
-            <a:r>
-              <a:rPr lang="en-US" dirty="0"/>
-              <a:t>) above a detection threshold (d) </a:t>
-            </a:r>
-          </a:p>
-          <a:p>
-            <a:endParaRPr lang="en-US" dirty="0"/>
-          </a:p>
-          <a:p>
-            <a:r>
-              <a:rPr lang="en-US" dirty="0"/>
-              <a:t>Model results are compared to the observed data. Deviation of observed data from model results is assumed to be evidence of deterministic community assembly.</a:t>
-            </a:r>
-          </a:p>
-          <a:p>
-            <a:endParaRPr lang="en-US" dirty="0"/>
-          </a:p>
-          <a:p>
-            <a:r>
-              <a:rPr lang="en-US" dirty="0"/>
-              <a:t>The abundance of each ASV in the metacommunity (p</a:t>
-            </a:r>
-            <a:r>
-              <a:rPr lang="en-US" i="1" dirty="0"/>
-              <a:t>i</a:t>
-            </a:r>
-            <a:r>
-              <a:rPr lang="en-US" dirty="0"/>
-              <a:t>) is estimated by averaging it’s relative abundance across all samples.</a:t>
+              <a:t> coordinates.</a:t>
             </a:r>
           </a:p>
         </p:txBody>
@@ -26760,7 +26721,7 @@
           <a:p>
             <a:fld id="{91AE2140-D502-214A-B76B-E0784B2C949B}" type="slidenum">
               <a:rPr lang="en-US" smtClean="0"/>
-              <a:t>25</a:t>
+              <a:t>27</a:t>
             </a:fld>
             <a:endParaRPr lang="en-US"/>
           </a:p>
@@ -26769,7 +26730,7 @@
     </p:spTree>
     <p:extLst>
       <p:ext uri="{BB962C8B-B14F-4D97-AF65-F5344CB8AC3E}">
-        <p14:creationId xmlns:p14="http://schemas.microsoft.com/office/powerpoint/2010/main" val="1811139538"/>
+        <p14:creationId xmlns:p14="http://schemas.microsoft.com/office/powerpoint/2010/main" val="2176052354"/>
       </p:ext>
     </p:extLst>
   </p:cSld>
@@ -26825,23 +26786,49 @@
           <a:p>
             <a:r>
               <a:rPr lang="en-US" dirty="0"/>
-              <a:t>Code developed from Barnett et al., (2020) Soil characteristics and land-use drive bacterial community assembly patterns (https://</a:t>
-            </a:r>
-            <a:r>
-              <a:rPr lang="en-US" dirty="0" err="1"/>
-              <a:t>github.com</a:t>
+              <a:t>Sloan’s Neutral Model states that the probability of species </a:t>
+            </a:r>
+            <a:r>
+              <a:rPr lang="en-US" i="1" dirty="0" err="1"/>
+              <a:t>i</a:t>
             </a:r>
             <a:r>
               <a:rPr lang="en-US" dirty="0"/>
-              <a:t>/seb369/</a:t>
-            </a:r>
-            <a:r>
-              <a:rPr lang="en-US" dirty="0" err="1"/>
-              <a:t>landuse_comm_assembly</a:t>
+              <a:t> occurring within a sample at abundance (x</a:t>
+            </a:r>
+            <a:r>
+              <a:rPr lang="en-US" i="0" baseline="-25000" dirty="0"/>
+              <a:t>i</a:t>
             </a:r>
             <a:r>
               <a:rPr lang="en-US" dirty="0"/>
-              <a:t>)</a:t>
+              <a:t>) above a detection threshold (d) </a:t>
+            </a:r>
+          </a:p>
+          <a:p>
+            <a:endParaRPr lang="en-US" dirty="0"/>
+          </a:p>
+          <a:p>
+            <a:r>
+              <a:rPr lang="en-US" dirty="0"/>
+              <a:t>Model results are compared to the observed data. Deviation of observed data from model results is assumed to be evidence of deterministic community assembly.</a:t>
+            </a:r>
+          </a:p>
+          <a:p>
+            <a:endParaRPr lang="en-US" dirty="0"/>
+          </a:p>
+          <a:p>
+            <a:r>
+              <a:rPr lang="en-US" dirty="0"/>
+              <a:t>The abundance of each ASV in the metacommunity (p</a:t>
+            </a:r>
+            <a:r>
+              <a:rPr lang="en-US" i="1" dirty="0"/>
+              <a:t>i</a:t>
+            </a:r>
+            <a:r>
+              <a:rPr lang="en-US" dirty="0"/>
+              <a:t>) is estimated by averaging it’s relative abundance across all samples.</a:t>
             </a:r>
           </a:p>
         </p:txBody>
@@ -26863,7 +26850,7 @@
           <a:p>
             <a:fld id="{91AE2140-D502-214A-B76B-E0784B2C949B}" type="slidenum">
               <a:rPr lang="en-US" smtClean="0"/>
-              <a:t>26</a:t>
+              <a:t>28</a:t>
             </a:fld>
             <a:endParaRPr lang="en-US"/>
           </a:p>
@@ -26872,7 +26859,7 @@
     </p:spTree>
     <p:extLst>
       <p:ext uri="{BB962C8B-B14F-4D97-AF65-F5344CB8AC3E}">
-        <p14:creationId xmlns:p14="http://schemas.microsoft.com/office/powerpoint/2010/main" val="2263901205"/>
+        <p14:creationId xmlns:p14="http://schemas.microsoft.com/office/powerpoint/2010/main" val="1811139538"/>
       </p:ext>
     </p:extLst>
   </p:cSld>
@@ -26928,84 +26915,24 @@
           <a:p>
             <a:r>
               <a:rPr lang="en-US" dirty="0"/>
-              <a:t>This is the result of the model fitting with the Sommers dataset (not reduced).</a:t>
-            </a:r>
-          </a:p>
-          <a:p>
+              <a:t>Code developed from Barnett et al., (2020) Soil characteristics and land-use drive bacterial community assembly patterns (https://</a:t>
+            </a:r>
+            <a:r>
+              <a:rPr lang="en-US" dirty="0" err="1"/>
+              <a:t>github.com</a:t>
+            </a:r>
             <a:r>
               <a:rPr lang="en-US" dirty="0"/>
-              <a:t>X axis = log mean relative abundances of each ASV</a:t>
-            </a:r>
-          </a:p>
-          <a:p>
+              <a:t>/seb369/</a:t>
+            </a:r>
+            <a:r>
+              <a:rPr lang="en-US" dirty="0" err="1"/>
+              <a:t>landuse_comm_assembly</a:t>
+            </a:r>
             <a:r>
               <a:rPr lang="en-US" dirty="0"/>
-              <a:t>Y axis = mean occurrence frequency of each ASV </a:t>
-            </a:r>
-          </a:p>
-          <a:p>
-            <a:r>
-              <a:rPr lang="en-US" dirty="0"/>
-              <a:t>Points = observed log relative abundances against occurrence frequencies</a:t>
-            </a:r>
-          </a:p>
-          <a:p>
-            <a:r>
-              <a:rPr lang="en-US" dirty="0"/>
-              <a:t>Solid line = predicted log relative abundances plotted against occurrence frequencies</a:t>
-            </a:r>
-          </a:p>
-          <a:p>
-            <a:r>
-              <a:rPr lang="en-US" dirty="0"/>
-              <a:t>Dotted lines = 95% confidence intervals</a:t>
-            </a:r>
-          </a:p>
-          <a:p>
-            <a:endParaRPr lang="en-US" dirty="0"/>
-          </a:p>
-          <a:p>
-            <a:r>
-              <a:rPr lang="en-US" dirty="0"/>
-              <a:t>This allows us to assess to what degree observed community structure can be explained by stochastic processes within each sample.</a:t>
-            </a:r>
-          </a:p>
-          <a:p>
-            <a:r>
-              <a:rPr lang="en-US" dirty="0"/>
-              <a:t>The Sloan neutral model is applied here. This model does not take into account phylogenetic distance. </a:t>
-            </a:r>
-          </a:p>
-          <a:p>
-            <a:r>
-              <a:rPr lang="en-US" dirty="0"/>
-              <a:t>ASV occurrence frequency is explained as a function of ASV abundance within the metacommunity (i.e. the more abundant an ASV is in the metacommunity, the more frequently it will be detected in the local community by chance). </a:t>
-            </a:r>
-          </a:p>
-          <a:p>
-            <a:r>
-              <a:rPr lang="en-US" dirty="0"/>
-              <a:t>The neutral model performed well, explaining 77% of variation in ASV detection frequency with an estimated migration factor of 0.02 between sites.</a:t>
-            </a:r>
-          </a:p>
-          <a:p>
-            <a:r>
-              <a:rPr lang="en-US" dirty="0"/>
-              <a:t>These results suggest that neutral assembly processes can explain the pattern of observed ASV occurrence frequencies </a:t>
-            </a:r>
-            <a:r>
-              <a:rPr lang="en-US" strike="sngStrike" dirty="0"/>
-              <a:t>and that the the regional species pool is a driving factor in the community composition of these samples. </a:t>
-            </a:r>
-          </a:p>
-          <a:p>
-            <a:r>
-              <a:rPr lang="en-US" strike="noStrike" dirty="0"/>
-              <a:t>The deviation of predicted occurrence frequencies from observed occurrence frequencies suggests that there are also deterministic processes driving community composition.</a:t>
-            </a:r>
-          </a:p>
-          <a:p>
-            <a:endParaRPr lang="en-US" dirty="0"/>
+              <a:t>)</a:t>
+            </a:r>
           </a:p>
         </p:txBody>
       </p:sp>
@@ -27026,7 +26953,7 @@
           <a:p>
             <a:fld id="{91AE2140-D502-214A-B76B-E0784B2C949B}" type="slidenum">
               <a:rPr lang="en-US" smtClean="0"/>
-              <a:t>27</a:t>
+              <a:t>29</a:t>
             </a:fld>
             <a:endParaRPr lang="en-US"/>
           </a:p>
@@ -27035,7 +26962,7 @@
     </p:spTree>
     <p:extLst>
       <p:ext uri="{BB962C8B-B14F-4D97-AF65-F5344CB8AC3E}">
-        <p14:creationId xmlns:p14="http://schemas.microsoft.com/office/powerpoint/2010/main" val="1669585764"/>
+        <p14:creationId xmlns:p14="http://schemas.microsoft.com/office/powerpoint/2010/main" val="2263901205"/>
       </p:ext>
     </p:extLst>
   </p:cSld>
@@ -27091,8 +27018,84 @@
           <a:p>
             <a:r>
               <a:rPr lang="en-US" dirty="0"/>
-              <a:t>Here there is only one significant relationship between phylogenetic distance and environmental variable – so the null model may not be appropriate for this data – however, we must consider that this dataset was drastically reduced to allow the correlograms to process on my local computer. With that in mind, we continue with the null model analysis.</a:t>
-            </a:r>
+              <a:t>This is the result of the model fitting with the Sommers dataset (not reduced).</a:t>
+            </a:r>
+          </a:p>
+          <a:p>
+            <a:r>
+              <a:rPr lang="en-US" dirty="0"/>
+              <a:t>X axis = log mean relative abundances of each ASV</a:t>
+            </a:r>
+          </a:p>
+          <a:p>
+            <a:r>
+              <a:rPr lang="en-US" dirty="0"/>
+              <a:t>Y axis = mean occurrence frequency of each ASV </a:t>
+            </a:r>
+          </a:p>
+          <a:p>
+            <a:r>
+              <a:rPr lang="en-US" dirty="0"/>
+              <a:t>Points = observed log relative abundances against occurrence frequencies</a:t>
+            </a:r>
+          </a:p>
+          <a:p>
+            <a:r>
+              <a:rPr lang="en-US" dirty="0"/>
+              <a:t>Solid line = predicted log relative abundances plotted against occurrence frequencies</a:t>
+            </a:r>
+          </a:p>
+          <a:p>
+            <a:r>
+              <a:rPr lang="en-US" dirty="0"/>
+              <a:t>Dotted lines = 95% confidence intervals</a:t>
+            </a:r>
+          </a:p>
+          <a:p>
+            <a:endParaRPr lang="en-US" dirty="0"/>
+          </a:p>
+          <a:p>
+            <a:r>
+              <a:rPr lang="en-US" dirty="0"/>
+              <a:t>This allows us to assess to what degree observed community structure can be explained by stochastic processes within each sample.</a:t>
+            </a:r>
+          </a:p>
+          <a:p>
+            <a:r>
+              <a:rPr lang="en-US" dirty="0"/>
+              <a:t>The Sloan neutral model is applied here. This model does not take into account phylogenetic distance. </a:t>
+            </a:r>
+          </a:p>
+          <a:p>
+            <a:r>
+              <a:rPr lang="en-US" dirty="0"/>
+              <a:t>ASV occurrence frequency is explained as a function of ASV abundance within the metacommunity (i.e. the more abundant an ASV is in the metacommunity, the more frequently it will be detected in the local community by chance). </a:t>
+            </a:r>
+          </a:p>
+          <a:p>
+            <a:r>
+              <a:rPr lang="en-US" dirty="0"/>
+              <a:t>The neutral model performed well, explaining 77% of variation in ASV detection frequency with an estimated migration factor of 0.02 between sites.</a:t>
+            </a:r>
+          </a:p>
+          <a:p>
+            <a:r>
+              <a:rPr lang="en-US" dirty="0"/>
+              <a:t>These results suggest that neutral assembly processes can explain the pattern of observed ASV occurrence frequencies </a:t>
+            </a:r>
+            <a:r>
+              <a:rPr lang="en-US" strike="sngStrike" dirty="0"/>
+              <a:t>and that the the regional species pool is a driving factor in the community composition of these samples. </a:t>
+            </a:r>
+          </a:p>
+          <a:p>
+            <a:r>
+              <a:rPr lang="en-US" strike="noStrike" dirty="0"/>
+              <a:t>The deviation of predicted occurrence frequencies from observed occurrence frequencies suggests that there are also deterministic processes driving community composition.</a:t>
+            </a:r>
+          </a:p>
+          <a:p>
+            <a:endParaRPr lang="en-US" dirty="0"/>
           </a:p>
         </p:txBody>
       </p:sp>
@@ -27113,7 +27116,7 @@
           <a:p>
             <a:fld id="{91AE2140-D502-214A-B76B-E0784B2C949B}" type="slidenum">
               <a:rPr lang="en-US" smtClean="0"/>
-              <a:t>29</a:t>
+              <a:t>30</a:t>
             </a:fld>
             <a:endParaRPr lang="en-US"/>
           </a:p>
@@ -27122,7 +27125,7 @@
     </p:spTree>
     <p:extLst>
       <p:ext uri="{BB962C8B-B14F-4D97-AF65-F5344CB8AC3E}">
-        <p14:creationId xmlns:p14="http://schemas.microsoft.com/office/powerpoint/2010/main" val="1424753429"/>
+        <p14:creationId xmlns:p14="http://schemas.microsoft.com/office/powerpoint/2010/main" val="1669585764"/>
       </p:ext>
     </p:extLst>
   </p:cSld>
@@ -27343,71 +27346,8 @@
           <a:p>
             <a:r>
               <a:rPr lang="en-US" dirty="0"/>
-              <a:t>Stochastic processes can produce complex spatial community patterns. </a:t>
-            </a:r>
-          </a:p>
-          <a:p>
-            <a:r>
-              <a:rPr lang="en-US" dirty="0"/>
-              <a:t>Ecological drift = random birth/death events in a specific area, in the absence of selection. Ecological drift is particularly important when dispersal is limited as illustrated by island biogeography theory.</a:t>
-            </a:r>
-          </a:p>
-          <a:p>
-            <a:r>
-              <a:rPr lang="en-US" dirty="0"/>
-              <a:t>Dispersal limitation between isolated habitats promotes local extinction and ecological drift which causes initially identical communities to diverge. Ecological drift can cause communities to diverge, even when dispersal is high and selection pressure is low.</a:t>
-            </a:r>
-          </a:p>
-          <a:p>
-            <a:r>
-              <a:rPr lang="en-US" dirty="0"/>
-              <a:t>Homogenizing dispersal = high dispersal rates leading to similar communities between habitats (overcomes the impact of ecological drift and even deterministic processes)</a:t>
-            </a:r>
-          </a:p>
-          <a:p>
-            <a:endParaRPr lang="en-US" dirty="0"/>
-          </a:p>
-          <a:p>
-            <a:r>
-              <a:rPr lang="en-US" dirty="0"/>
-              <a:t>Deterministic (deterministic processes commonly mean beta diversity varies as a result of environmental characteristics – i.e. communities are more or less different due to the differences or similarities of the environments)</a:t>
-            </a:r>
-          </a:p>
-          <a:p>
-            <a:r>
-              <a:rPr lang="en-US" dirty="0"/>
-              <a:t>Variable selection – deterministic processes are driving variable composition between communities. Different areas have different environmental characteristics that select for different species.</a:t>
-            </a:r>
-          </a:p>
-          <a:p>
-            <a:r>
-              <a:rPr lang="en-US" dirty="0"/>
-              <a:t>Homogenizing selection – deterministic processes are driving homogenous composition between communities. Different areas have similar environmental characteristics that select for similar species.</a:t>
-            </a:r>
-          </a:p>
-          <a:p>
-            <a:endParaRPr lang="en-US" dirty="0"/>
-          </a:p>
-          <a:p>
-            <a:r>
-              <a:rPr lang="en-US" dirty="0"/>
-              <a:t>Dispersal limitation – stochastic dispersal limitation is driving variable composition between communities </a:t>
-            </a:r>
-          </a:p>
-          <a:p>
-            <a:r>
-              <a:rPr lang="en-US" dirty="0"/>
-              <a:t>Homogenizing dispersal – stochastic high dispersal is driving homogenous composition between communities</a:t>
-            </a:r>
-          </a:p>
-          <a:p>
-            <a:r>
-              <a:rPr lang="en-US" dirty="0"/>
-              <a:t>Ecological drift – stochastic ecological drift is driving variable composition between communities</a:t>
-            </a:r>
-          </a:p>
-          <a:p>
-            <a:endParaRPr lang="en-US" dirty="0"/>
+              <a:t>Here there is only one significant relationship between phylogenetic distance and environmental variable – so the null model may not be appropriate for this data – however, we must consider that this dataset was drastically reduced to allow the correlograms to process on my local computer. With that in mind, we continue with the null model analysis.</a:t>
+            </a:r>
           </a:p>
         </p:txBody>
       </p:sp>
@@ -27428,7 +27368,7 @@
           <a:p>
             <a:fld id="{91AE2140-D502-214A-B76B-E0784B2C949B}" type="slidenum">
               <a:rPr lang="en-US" smtClean="0"/>
-              <a:t>30</a:t>
+              <a:t>32</a:t>
             </a:fld>
             <a:endParaRPr lang="en-US"/>
           </a:p>
@@ -27437,7 +27377,7 @@
     </p:spTree>
     <p:extLst>
       <p:ext uri="{BB962C8B-B14F-4D97-AF65-F5344CB8AC3E}">
-        <p14:creationId xmlns:p14="http://schemas.microsoft.com/office/powerpoint/2010/main" val="4270121788"/>
+        <p14:creationId xmlns:p14="http://schemas.microsoft.com/office/powerpoint/2010/main" val="1424753429"/>
       </p:ext>
     </p:extLst>
   </p:cSld>
@@ -27493,7 +27433,25 @@
           <a:p>
             <a:r>
               <a:rPr lang="en-US" dirty="0"/>
-              <a:t>Whilst multivariate analysis can assist us in investigating abiotic selection, microbial community assembly is also shaped by biotic selection. </a:t>
+              <a:t>Stochastic processes can produce complex spatial community patterns. </a:t>
+            </a:r>
+          </a:p>
+          <a:p>
+            <a:r>
+              <a:rPr lang="en-US" dirty="0"/>
+              <a:t>Ecological drift = random birth/death events in a specific area, in the absence of selection. Ecological drift is particularly important when dispersal is limited as illustrated by island biogeography theory.</a:t>
+            </a:r>
+          </a:p>
+          <a:p>
+            <a:r>
+              <a:rPr lang="en-US" dirty="0"/>
+              <a:t>Dispersal limitation between isolated habitats promotes local extinction and ecological drift which causes initially identical communities to diverge. Ecological drift can cause communities to diverge, even when dispersal is high and selection pressure is low.</a:t>
+            </a:r>
+          </a:p>
+          <a:p>
+            <a:r>
+              <a:rPr lang="en-US" dirty="0"/>
+              <a:t>Homogenizing dispersal = high dispersal rates leading to similar communities between habitats (overcomes the impact of ecological drift and even deterministic processes)</a:t>
             </a:r>
           </a:p>
           <a:p>
@@ -27502,7 +27460,19 @@
           <a:p>
             <a:r>
               <a:rPr lang="en-US" dirty="0"/>
-              <a:t>Biotic interactions may include top-down control through viral lysis and grazing, as well as microbe-microbe interactions.</a:t>
+              <a:t>Deterministic (deterministic processes commonly mean beta diversity varies as a result of environmental characteristics – i.e. communities are more or less different due to the differences or similarities of the environments)</a:t>
+            </a:r>
+          </a:p>
+          <a:p>
+            <a:r>
+              <a:rPr lang="en-US" dirty="0"/>
+              <a:t>Variable selection – deterministic processes are driving variable composition between communities. Different areas have different environmental characteristics that select for different species.</a:t>
+            </a:r>
+          </a:p>
+          <a:p>
+            <a:r>
+              <a:rPr lang="en-US" dirty="0"/>
+              <a:t>Homogenizing selection – deterministic processes are driving homogenous composition between communities. Different areas have similar environmental characteristics that select for similar species.</a:t>
             </a:r>
           </a:p>
           <a:p>
@@ -27511,34 +27481,23 @@
           <a:p>
             <a:r>
               <a:rPr lang="en-US" dirty="0"/>
-              <a:t>Due to technological restrictions, investigations of microbe-microbe interactions have typically been limited. With access to high-throughout sequencing, we can now construct co-occurrence networks in an attempt to decipher intra- and inter-specific interactions within communities.</a:t>
+              <a:t>Dispersal limitation – stochastic dispersal limitation is driving variable composition between communities </a:t>
+            </a:r>
+          </a:p>
+          <a:p>
+            <a:r>
+              <a:rPr lang="en-US" dirty="0"/>
+              <a:t>Homogenizing dispersal – stochastic high dispersal is driving homogenous composition between communities</a:t>
+            </a:r>
+          </a:p>
+          <a:p>
+            <a:r>
+              <a:rPr lang="en-US" dirty="0"/>
+              <a:t>Ecological drift – stochastic ecological drift is driving variable composition between communities</a:t>
             </a:r>
           </a:p>
           <a:p>
             <a:endParaRPr lang="en-US" dirty="0"/>
-          </a:p>
-          <a:p>
-            <a:r>
-              <a:rPr lang="en-US" dirty="0"/>
-              <a:t>Previous research has indicated that microbial communities exhibit non-random co-occurrence patterns and module structures, suggesting that biotic selection plays a strong role in shaping community assembly.</a:t>
-            </a:r>
-          </a:p>
-          <a:p>
-            <a:endParaRPr lang="en-US" dirty="0"/>
-          </a:p>
-          <a:p>
-            <a:r>
-              <a:rPr lang="en-US" dirty="0"/>
-              <a:t>Communities may even </a:t>
-            </a:r>
-            <a:r>
-              <a:rPr lang="en-US" dirty="0" err="1"/>
-              <a:t>centre</a:t>
-            </a:r>
-            <a:r>
-              <a:rPr lang="en-US" dirty="0"/>
-              <a:t> around keystone species, that maintain the functioning of the community as a whole. </a:t>
-            </a:r>
           </a:p>
         </p:txBody>
       </p:sp>
@@ -27559,7 +27518,7 @@
           <a:p>
             <a:fld id="{91AE2140-D502-214A-B76B-E0784B2C949B}" type="slidenum">
               <a:rPr lang="en-US" smtClean="0"/>
-              <a:t>32</a:t>
+              <a:t>33</a:t>
             </a:fld>
             <a:endParaRPr lang="en-US"/>
           </a:p>
@@ -27568,7 +27527,7 @@
     </p:spTree>
     <p:extLst>
       <p:ext uri="{BB962C8B-B14F-4D97-AF65-F5344CB8AC3E}">
-        <p14:creationId xmlns:p14="http://schemas.microsoft.com/office/powerpoint/2010/main" val="2107534487"/>
+        <p14:creationId xmlns:p14="http://schemas.microsoft.com/office/powerpoint/2010/main" val="4270121788"/>
       </p:ext>
     </p:extLst>
   </p:cSld>
@@ -27624,42 +27583,34 @@
           <a:p>
             <a:r>
               <a:rPr lang="en-US" dirty="0"/>
-              <a:t>Centrality – how close is a node to the network as a whole </a:t>
-            </a:r>
-          </a:p>
-          <a:p>
-            <a:pPr marL="0" marR="0" lvl="0" indent="0" algn="l" defTabSz="914400" rtl="0" eaLnBrk="1" fontAlgn="auto" latinLnBrk="0" hangingPunct="1">
-              <a:lnSpc>
-                <a:spcPct val="100000"/>
-              </a:lnSpc>
-              <a:spcBef>
-                <a:spcPts val="0"/>
-              </a:spcBef>
-              <a:spcAft>
-                <a:spcPts val="0"/>
-              </a:spcAft>
-              <a:buClrTx/>
-              <a:buSzTx/>
-              <a:buFontTx/>
-              <a:buNone/>
-              <a:tabLst/>
-              <a:defRPr/>
-            </a:pPr>
+              <a:t>Whilst multivariate analysis can assist us in investigating abiotic selection, microbial community assembly is also shaped by biotic selection. </a:t>
+            </a:r>
+          </a:p>
+          <a:p>
+            <a:endParaRPr lang="en-US" dirty="0"/>
+          </a:p>
+          <a:p>
             <a:r>
               <a:rPr lang="en-US" dirty="0"/>
-              <a:t>Degree Centrality – number of links connected to a node (who has the most friends?)</a:t>
-            </a:r>
+              <a:t>Biotic interactions may include top-down control through viral lysis and grazing, as well as microbe-microbe interactions.</a:t>
+            </a:r>
+          </a:p>
+          <a:p>
+            <a:endParaRPr lang="en-US" dirty="0"/>
           </a:p>
           <a:p>
             <a:r>
               <a:rPr lang="en-US" dirty="0"/>
-              <a:t>Closeness Centrality -  average length of the shortest path between the node and all other nodes in the graph (how long does it take me on average to reach another node)</a:t>
-            </a:r>
+              <a:t>Due to technological restrictions, investigations of microbe-microbe interactions have typically been limited. With access to high-throughout sequencing, we can now construct co-occurrence networks in an attempt to decipher intra- and inter-specific interactions within communities.</a:t>
+            </a:r>
+          </a:p>
+          <a:p>
+            <a:endParaRPr lang="en-US" dirty="0"/>
           </a:p>
           <a:p>
             <a:r>
               <a:rPr lang="en-US" dirty="0"/>
-              <a:t>Betweenness Centrality – the number of times a node is crossed by each of the shortest routes between nodes (between any two nodes there is a shortest distance to travel. How many shortest distances is the node of interest within?)</a:t>
+              <a:t>Previous research has indicated that microbial communities exhibit non-random co-occurrence patterns and module structures, suggesting that biotic selection plays a strong role in shaping community assembly.</a:t>
             </a:r>
           </a:p>
           <a:p>
@@ -27668,32 +27619,16 @@
           <a:p>
             <a:r>
               <a:rPr lang="en-US" dirty="0"/>
-              <a:t>Clustering</a:t>
-            </a:r>
-          </a:p>
-          <a:p>
+              <a:t>Communities may even </a:t>
+            </a:r>
+            <a:r>
+              <a:rPr lang="en-US" dirty="0" err="1"/>
+              <a:t>centre</a:t>
+            </a:r>
             <a:r>
               <a:rPr lang="en-US" dirty="0"/>
-              <a:t>What groups are within the network?</a:t>
-            </a:r>
-          </a:p>
-          <a:p>
-            <a:r>
-              <a:rPr lang="en-US" dirty="0"/>
-              <a:t>Clustering coefficient – how many connections are there to other nodes, compared to the POTENTIAL number of connections to other nodes within the group?</a:t>
-            </a:r>
-          </a:p>
-          <a:p>
-            <a:r>
-              <a:rPr lang="en-US" dirty="0"/>
-              <a:t>Clustering coefficient = 1 means there is a clique, so all nodes are connected to each other in a group</a:t>
-            </a:r>
-          </a:p>
-          <a:p>
-            <a:endParaRPr lang="en-US" dirty="0"/>
-          </a:p>
-          <a:p>
-            <a:endParaRPr lang="en-US" dirty="0"/>
+              <a:t> around keystone species, that maintain the functioning of the community as a whole. </a:t>
+            </a:r>
           </a:p>
         </p:txBody>
       </p:sp>
@@ -27714,7 +27649,7 @@
           <a:p>
             <a:fld id="{91AE2140-D502-214A-B76B-E0784B2C949B}" type="slidenum">
               <a:rPr lang="en-US" smtClean="0"/>
-              <a:t>33</a:t>
+              <a:t>35</a:t>
             </a:fld>
             <a:endParaRPr lang="en-US"/>
           </a:p>
@@ -27723,7 +27658,7 @@
     </p:spTree>
     <p:extLst>
       <p:ext uri="{BB962C8B-B14F-4D97-AF65-F5344CB8AC3E}">
-        <p14:creationId xmlns:p14="http://schemas.microsoft.com/office/powerpoint/2010/main" val="553393038"/>
+        <p14:creationId xmlns:p14="http://schemas.microsoft.com/office/powerpoint/2010/main" val="2107534487"/>
       </p:ext>
     </p:extLst>
   </p:cSld>
@@ -27778,28 +27713,9 @@
           <a:lstStyle/>
           <a:p>
             <a:r>
-              <a:rPr lang="en-GB" dirty="0"/>
-              <a:t>Based on correlation analysis, for the positive co-occurrence network, 6526 edges, which depict significant and strong pairwise correlations between species (Spearman's </a:t>
-            </a:r>
-            <a:r>
-              <a:rPr lang="el-GR" i="1" dirty="0"/>
-              <a:t>ρ</a:t>
-            </a:r>
-            <a:r>
-              <a:rPr lang="el-GR" dirty="0"/>
-              <a:t> ≥ 0.6, </a:t>
-            </a:r>
-            <a:r>
-              <a:rPr lang="en-GB" i="1" dirty="0"/>
-              <a:t>P</a:t>
-            </a:r>
-            <a:r>
-              <a:rPr lang="en-GB" dirty="0"/>
-              <a:t> &lt; 0.01), were captured between 554 nodes (i.e. ASVs).</a:t>
-            </a:r>
-          </a:p>
-          <a:p>
-            <a:endParaRPr lang="en-GB" dirty="0"/>
+              <a:rPr lang="en-US" dirty="0"/>
+              <a:t>Centrality – how close is a node to the network as a whole </a:t>
+            </a:r>
           </a:p>
           <a:p>
             <a:pPr marL="0" marR="0" lvl="0" indent="0" algn="l" defTabSz="914400" rtl="0" eaLnBrk="1" fontAlgn="auto" latinLnBrk="0" hangingPunct="1">
@@ -27820,31 +27736,51 @@
               <a:defRPr/>
             </a:pPr>
             <a:r>
-              <a:rPr lang="en-GB" dirty="0"/>
-              <a:t>Based on correlation analysis, for the negative co-occurrence network, 1780 edges, which depict significant and strong pairwise correlations between species (Spearman's </a:t>
-            </a:r>
-            <a:r>
-              <a:rPr lang="el-GR" i="1" dirty="0"/>
-              <a:t>ρ</a:t>
-            </a:r>
-            <a:r>
-              <a:rPr lang="el-GR" dirty="0"/>
-              <a:t> ≥ 0.6, </a:t>
-            </a:r>
-            <a:r>
-              <a:rPr lang="en-GB" i="1" dirty="0"/>
-              <a:t>P</a:t>
-            </a:r>
-            <a:r>
-              <a:rPr lang="en-GB" dirty="0"/>
-              <a:t> &lt; 0.01), were captured between 299 nodes (i.e. ASVs).</a:t>
-            </a:r>
-          </a:p>
-          <a:p>
-            <a:endParaRPr lang="en-GB" dirty="0"/>
-          </a:p>
-          <a:p>
-            <a:endParaRPr lang="en-GB" dirty="0"/>
+              <a:rPr lang="en-US" dirty="0"/>
+              <a:t>Degree Centrality – number of links connected to a node (who has the most friends?)</a:t>
+            </a:r>
+          </a:p>
+          <a:p>
+            <a:r>
+              <a:rPr lang="en-US" dirty="0"/>
+              <a:t>Closeness Centrality -  average length of the shortest path between the node and all other nodes in the graph (how long does it take me on average to reach another node)</a:t>
+            </a:r>
+          </a:p>
+          <a:p>
+            <a:r>
+              <a:rPr lang="en-US" dirty="0"/>
+              <a:t>Betweenness Centrality – the number of times a node is crossed by each of the shortest routes between nodes (between any two nodes there is a shortest distance to travel. How many shortest distances is the node of interest within?)</a:t>
+            </a:r>
+          </a:p>
+          <a:p>
+            <a:endParaRPr lang="en-US" dirty="0"/>
+          </a:p>
+          <a:p>
+            <a:r>
+              <a:rPr lang="en-US" dirty="0"/>
+              <a:t>Clustering</a:t>
+            </a:r>
+          </a:p>
+          <a:p>
+            <a:r>
+              <a:rPr lang="en-US" dirty="0"/>
+              <a:t>What groups are within the network?</a:t>
+            </a:r>
+          </a:p>
+          <a:p>
+            <a:r>
+              <a:rPr lang="en-US" dirty="0"/>
+              <a:t>Clustering coefficient – how many connections are there to other nodes, compared to the POTENTIAL number of connections to other nodes within the group?</a:t>
+            </a:r>
+          </a:p>
+          <a:p>
+            <a:r>
+              <a:rPr lang="en-US" dirty="0"/>
+              <a:t>Clustering coefficient = 1 means there is a clique, so all nodes are connected to each other in a group</a:t>
+            </a:r>
+          </a:p>
+          <a:p>
+            <a:endParaRPr lang="en-US" dirty="0"/>
           </a:p>
           <a:p>
             <a:endParaRPr lang="en-US" dirty="0"/>
@@ -27868,7 +27804,7 @@
           <a:p>
             <a:fld id="{91AE2140-D502-214A-B76B-E0784B2C949B}" type="slidenum">
               <a:rPr lang="en-US" smtClean="0"/>
-              <a:t>34</a:t>
+              <a:t>36</a:t>
             </a:fld>
             <a:endParaRPr lang="en-US"/>
           </a:p>
@@ -27877,7 +27813,7 @@
     </p:spTree>
     <p:extLst>
       <p:ext uri="{BB962C8B-B14F-4D97-AF65-F5344CB8AC3E}">
-        <p14:creationId xmlns:p14="http://schemas.microsoft.com/office/powerpoint/2010/main" val="301421177"/>
+        <p14:creationId xmlns:p14="http://schemas.microsoft.com/office/powerpoint/2010/main" val="553393038"/>
       </p:ext>
     </p:extLst>
   </p:cSld>
@@ -27931,6 +27867,76 @@
           <a:bodyPr/>
           <a:lstStyle/>
           <a:p>
+            <a:r>
+              <a:rPr lang="en-GB" dirty="0"/>
+              <a:t>Based on correlation analysis, for the positive co-occurrence network, 6526 edges, which depict significant and strong pairwise correlations between species (Spearman's </a:t>
+            </a:r>
+            <a:r>
+              <a:rPr lang="el-GR" i="1" dirty="0"/>
+              <a:t>ρ</a:t>
+            </a:r>
+            <a:r>
+              <a:rPr lang="el-GR" dirty="0"/>
+              <a:t> ≥ 0.6, </a:t>
+            </a:r>
+            <a:r>
+              <a:rPr lang="en-GB" i="1" dirty="0"/>
+              <a:t>P</a:t>
+            </a:r>
+            <a:r>
+              <a:rPr lang="en-GB" dirty="0"/>
+              <a:t> &lt; 0.01), were captured between 554 nodes (i.e. ASVs).</a:t>
+            </a:r>
+          </a:p>
+          <a:p>
+            <a:endParaRPr lang="en-GB" dirty="0"/>
+          </a:p>
+          <a:p>
+            <a:pPr marL="0" marR="0" lvl="0" indent="0" algn="l" defTabSz="914400" rtl="0" eaLnBrk="1" fontAlgn="auto" latinLnBrk="0" hangingPunct="1">
+              <a:lnSpc>
+                <a:spcPct val="100000"/>
+              </a:lnSpc>
+              <a:spcBef>
+                <a:spcPts val="0"/>
+              </a:spcBef>
+              <a:spcAft>
+                <a:spcPts val="0"/>
+              </a:spcAft>
+              <a:buClrTx/>
+              <a:buSzTx/>
+              <a:buFontTx/>
+              <a:buNone/>
+              <a:tabLst/>
+              <a:defRPr/>
+            </a:pPr>
+            <a:r>
+              <a:rPr lang="en-GB" dirty="0"/>
+              <a:t>Based on correlation analysis, for the negative co-occurrence network, 1780 edges, which depict significant and strong pairwise correlations between species (Spearman's </a:t>
+            </a:r>
+            <a:r>
+              <a:rPr lang="el-GR" i="1" dirty="0"/>
+              <a:t>ρ</a:t>
+            </a:r>
+            <a:r>
+              <a:rPr lang="el-GR" dirty="0"/>
+              <a:t> ≥ 0.6, </a:t>
+            </a:r>
+            <a:r>
+              <a:rPr lang="en-GB" i="1" dirty="0"/>
+              <a:t>P</a:t>
+            </a:r>
+            <a:r>
+              <a:rPr lang="en-GB" dirty="0"/>
+              <a:t> &lt; 0.01), were captured between 299 nodes (i.e. ASVs).</a:t>
+            </a:r>
+          </a:p>
+          <a:p>
+            <a:endParaRPr lang="en-GB" dirty="0"/>
+          </a:p>
+          <a:p>
+            <a:endParaRPr lang="en-GB" dirty="0"/>
+          </a:p>
+          <a:p>
             <a:endParaRPr lang="en-US" dirty="0"/>
           </a:p>
         </p:txBody>
@@ -27952,7 +27958,7 @@
           <a:p>
             <a:fld id="{91AE2140-D502-214A-B76B-E0784B2C949B}" type="slidenum">
               <a:rPr lang="en-US" smtClean="0"/>
-              <a:t>35</a:t>
+              <a:t>37</a:t>
             </a:fld>
             <a:endParaRPr lang="en-US"/>
           </a:p>
@@ -27961,7 +27967,7 @@
     </p:spTree>
     <p:extLst>
       <p:ext uri="{BB962C8B-B14F-4D97-AF65-F5344CB8AC3E}">
-        <p14:creationId xmlns:p14="http://schemas.microsoft.com/office/powerpoint/2010/main" val="2121078948"/>
+        <p14:creationId xmlns:p14="http://schemas.microsoft.com/office/powerpoint/2010/main" val="301421177"/>
       </p:ext>
     </p:extLst>
   </p:cSld>
@@ -28015,56 +28021,6 @@
           <a:bodyPr/>
           <a:lstStyle/>
           <a:p>
-            <a:r>
-              <a:rPr lang="en-US" dirty="0"/>
-              <a:t>Packages:</a:t>
-            </a:r>
-          </a:p>
-          <a:p>
-            <a:r>
-              <a:rPr lang="en-US" dirty="0"/>
-              <a:t>Vegan</a:t>
-            </a:r>
-          </a:p>
-          <a:p>
-            <a:r>
-              <a:rPr lang="en-US" dirty="0" err="1"/>
-              <a:t>Igraph</a:t>
-            </a:r>
-            <a:endParaRPr lang="en-US" dirty="0"/>
-          </a:p>
-          <a:p>
-            <a:r>
-              <a:rPr lang="en-US" dirty="0" err="1"/>
-              <a:t>Hmisc</a:t>
-            </a:r>
-            <a:endParaRPr lang="en-US" dirty="0"/>
-          </a:p>
-          <a:p>
-            <a:endParaRPr lang="en-US" dirty="0"/>
-          </a:p>
-          <a:p>
-            <a:r>
-              <a:rPr lang="en-US" dirty="0"/>
-              <a:t>1) Defines functions for co-occurrence network analysis. Function needs a matrix with samples as columns and ASVs as rows, as well as the </a:t>
-            </a:r>
-            <a:r>
-              <a:rPr lang="en-GB" dirty="0" err="1"/>
-              <a:t>cutoffs</a:t>
-            </a:r>
-            <a:r>
-              <a:rPr lang="en-GB" dirty="0"/>
-              <a:t> for clustering coefficient and cut off for FDR-adjusted P-value. </a:t>
-            </a:r>
-          </a:p>
-          <a:p>
-            <a:endParaRPr lang="en-GB" dirty="0"/>
-          </a:p>
-          <a:p>
-            <a:r>
-              <a:rPr lang="en-GB" dirty="0"/>
-              <a:t>2) </a:t>
-            </a:r>
             <a:endParaRPr lang="en-US" dirty="0"/>
           </a:p>
         </p:txBody>
@@ -28086,7 +28042,141 @@
           <a:p>
             <a:fld id="{91AE2140-D502-214A-B76B-E0784B2C949B}" type="slidenum">
               <a:rPr lang="en-US" smtClean="0"/>
-              <a:t>36</a:t>
+              <a:t>38</a:t>
+            </a:fld>
+            <a:endParaRPr lang="en-US"/>
+          </a:p>
+        </p:txBody>
+      </p:sp>
+    </p:spTree>
+    <p:extLst>
+      <p:ext uri="{BB962C8B-B14F-4D97-AF65-F5344CB8AC3E}">
+        <p14:creationId xmlns:p14="http://schemas.microsoft.com/office/powerpoint/2010/main" val="2121078948"/>
+      </p:ext>
+    </p:extLst>
+  </p:cSld>
+  <p:clrMapOvr>
+    <a:masterClrMapping/>
+  </p:clrMapOvr>
+</p:notes>
+</file>
+
+<file path=ppt/notesSlides/notesSlide26.xml><?xml version="1.0" encoding="utf-8"?>
+<p:notes xmlns:a="http://schemas.openxmlformats.org/drawingml/2006/main" xmlns:r="http://schemas.openxmlformats.org/officeDocument/2006/relationships" xmlns:p="http://schemas.openxmlformats.org/presentationml/2006/main">
+  <p:cSld>
+    <p:spTree>
+      <p:nvGrpSpPr>
+        <p:cNvPr id="1" name=""/>
+        <p:cNvGrpSpPr/>
+        <p:nvPr/>
+      </p:nvGrpSpPr>
+      <p:grpSpPr>
+        <a:xfrm>
+          <a:off x="0" y="0"/>
+          <a:ext cx="0" cy="0"/>
+          <a:chOff x="0" y="0"/>
+          <a:chExt cx="0" cy="0"/>
+        </a:xfrm>
+      </p:grpSpPr>
+      <p:sp>
+        <p:nvSpPr>
+          <p:cNvPr id="2" name="Slide Image Placeholder 1"/>
+          <p:cNvSpPr>
+            <a:spLocks noGrp="1" noRot="1" noChangeAspect="1"/>
+          </p:cNvSpPr>
+          <p:nvPr>
+            <p:ph type="sldImg"/>
+          </p:nvPr>
+        </p:nvSpPr>
+        <p:spPr/>
+      </p:sp>
+      <p:sp>
+        <p:nvSpPr>
+          <p:cNvPr id="3" name="Notes Placeholder 2"/>
+          <p:cNvSpPr>
+            <a:spLocks noGrp="1"/>
+          </p:cNvSpPr>
+          <p:nvPr>
+            <p:ph type="body" idx="1"/>
+          </p:nvPr>
+        </p:nvSpPr>
+        <p:spPr/>
+        <p:txBody>
+          <a:bodyPr/>
+          <a:lstStyle/>
+          <a:p>
+            <a:r>
+              <a:rPr lang="en-US" dirty="0"/>
+              <a:t>Packages:</a:t>
+            </a:r>
+          </a:p>
+          <a:p>
+            <a:r>
+              <a:rPr lang="en-US" dirty="0"/>
+              <a:t>Vegan</a:t>
+            </a:r>
+          </a:p>
+          <a:p>
+            <a:r>
+              <a:rPr lang="en-US" dirty="0" err="1"/>
+              <a:t>Igraph</a:t>
+            </a:r>
+            <a:endParaRPr lang="en-US" dirty="0"/>
+          </a:p>
+          <a:p>
+            <a:r>
+              <a:rPr lang="en-US" dirty="0" err="1"/>
+              <a:t>Hmisc</a:t>
+            </a:r>
+            <a:endParaRPr lang="en-US" dirty="0"/>
+          </a:p>
+          <a:p>
+            <a:endParaRPr lang="en-US" dirty="0"/>
+          </a:p>
+          <a:p>
+            <a:r>
+              <a:rPr lang="en-US" dirty="0"/>
+              <a:t>1) Defines functions for co-occurrence network analysis. Function needs a matrix with samples as columns and ASVs as rows, as well as the </a:t>
+            </a:r>
+            <a:r>
+              <a:rPr lang="en-GB" dirty="0" err="1"/>
+              <a:t>cutoffs</a:t>
+            </a:r>
+            <a:r>
+              <a:rPr lang="en-GB" dirty="0"/>
+              <a:t> for clustering coefficient and cut off for FDR-adjusted P-value. </a:t>
+            </a:r>
+          </a:p>
+          <a:p>
+            <a:endParaRPr lang="en-GB" dirty="0"/>
+          </a:p>
+          <a:p>
+            <a:r>
+              <a:rPr lang="en-GB" dirty="0"/>
+              <a:t>2) </a:t>
+            </a:r>
+            <a:endParaRPr lang="en-US" dirty="0"/>
+          </a:p>
+        </p:txBody>
+      </p:sp>
+      <p:sp>
+        <p:nvSpPr>
+          <p:cNvPr id="4" name="Slide Number Placeholder 3"/>
+          <p:cNvSpPr>
+            <a:spLocks noGrp="1"/>
+          </p:cNvSpPr>
+          <p:nvPr>
+            <p:ph type="sldNum" sz="quarter" idx="5"/>
+          </p:nvPr>
+        </p:nvSpPr>
+        <p:spPr/>
+        <p:txBody>
+          <a:bodyPr/>
+          <a:lstStyle/>
+          <a:p>
+            <a:fld id="{91AE2140-D502-214A-B76B-E0784B2C949B}" type="slidenum">
+              <a:rPr lang="en-US" smtClean="0"/>
+              <a:t>39</a:t>
             </a:fld>
             <a:endParaRPr lang="en-US"/>
           </a:p>
@@ -29310,50 +29400,31 @@
           <a:bodyPr/>
           <a:lstStyle/>
           <a:p>
-            <a:pPr marL="228600" indent="-228600">
-              <a:buAutoNum type="arabicParenR"/>
-            </a:pPr>
             <a:r>
               <a:rPr lang="en-US" dirty="0"/>
-              <a:t>Used ‘vegan’ package to get Shannon, Simpsons, Inverted Simpsons Diversity Indexes of count data in each sample. Also </a:t>
+              <a:t>I calculated the beta diversity between glaciers using weighted </a:t>
             </a:r>
             <a:r>
               <a:rPr lang="en-US" dirty="0" err="1"/>
-              <a:t>Pilou</a:t>
+              <a:t>unifrac</a:t>
             </a:r>
             <a:r>
               <a:rPr lang="en-US" dirty="0"/>
-              <a:t> evenness and Faith’s phylogenetic diversity. </a:t>
-            </a:r>
-          </a:p>
-          <a:p>
-            <a:pPr marL="228600" indent="-228600">
-              <a:buAutoNum type="arabicParenR"/>
-            </a:pPr>
-            <a:endParaRPr lang="en-US" dirty="0"/>
-          </a:p>
-          <a:p>
-            <a:pPr marL="228600" indent="-228600">
-              <a:buAutoNum type="arabicParenR"/>
-            </a:pPr>
+              <a:t> distances used the distance function in </a:t>
+            </a:r>
+            <a:r>
+              <a:rPr lang="en-US" dirty="0" err="1"/>
+              <a:t>phyloseq</a:t>
+            </a:r>
             <a:r>
               <a:rPr lang="en-US" dirty="0"/>
-              <a:t>Alternatively use alpha() function from microbiome package to calculate all indices at one!</a:t>
-            </a:r>
-          </a:p>
-          <a:p>
-            <a:pPr marL="228600" indent="-228600">
-              <a:buAutoNum type="arabicParenR"/>
-            </a:pPr>
-            <a:endParaRPr lang="en-US" dirty="0"/>
-          </a:p>
-          <a:p>
-            <a:pPr marL="228600" indent="-228600">
-              <a:buAutoNum type="arabicParenR"/>
-            </a:pPr>
+              <a:t> package.</a:t>
+            </a:r>
+          </a:p>
+          <a:p>
             <a:r>
               <a:rPr lang="en-US" dirty="0"/>
-              <a:t>Here we have boxplots comparing the diversity indices of the two glaciers</a:t>
+              <a:t>I used permutational multivariate analysis of variance (PERMANOVA) to find if community composition significantly varied between glaciers using 999 permutations</a:t>
             </a:r>
           </a:p>
         </p:txBody>
@@ -29384,7 +29455,7 @@
     </p:spTree>
     <p:extLst>
       <p:ext uri="{BB962C8B-B14F-4D97-AF65-F5344CB8AC3E}">
-        <p14:creationId xmlns:p14="http://schemas.microsoft.com/office/powerpoint/2010/main" val="3006070899"/>
+        <p14:creationId xmlns:p14="http://schemas.microsoft.com/office/powerpoint/2010/main" val="4132672607"/>
       </p:ext>
     </p:extLst>
   </p:cSld>
@@ -29438,9 +29509,50 @@
           <a:bodyPr/>
           <a:lstStyle/>
           <a:p>
+            <a:pPr marL="228600" indent="-228600">
+              <a:buAutoNum type="arabicParenR"/>
+            </a:pPr>
             <a:r>
               <a:rPr lang="en-US" dirty="0"/>
-              <a:t>Comparison of phylogenetic diversities of the two glaciers</a:t>
+              <a:t>Used ‘vegan’ package to get Shannon, Simpsons, Inverted Simpsons Diversity Indexes of count data in each sample. Also </a:t>
+            </a:r>
+            <a:r>
+              <a:rPr lang="en-US" dirty="0" err="1"/>
+              <a:t>Pilou</a:t>
+            </a:r>
+            <a:r>
+              <a:rPr lang="en-US" dirty="0"/>
+              <a:t> evenness and Faith’s phylogenetic diversity. </a:t>
+            </a:r>
+          </a:p>
+          <a:p>
+            <a:pPr marL="228600" indent="-228600">
+              <a:buAutoNum type="arabicParenR"/>
+            </a:pPr>
+            <a:endParaRPr lang="en-US" dirty="0"/>
+          </a:p>
+          <a:p>
+            <a:pPr marL="228600" indent="-228600">
+              <a:buAutoNum type="arabicParenR"/>
+            </a:pPr>
+            <a:r>
+              <a:rPr lang="en-US" dirty="0"/>
+              <a:t>Alternatively use alpha() function from microbiome package to calculate all indices at one!</a:t>
+            </a:r>
+          </a:p>
+          <a:p>
+            <a:pPr marL="228600" indent="-228600">
+              <a:buAutoNum type="arabicParenR"/>
+            </a:pPr>
+            <a:endParaRPr lang="en-US" dirty="0"/>
+          </a:p>
+          <a:p>
+            <a:pPr marL="228600" indent="-228600">
+              <a:buAutoNum type="arabicParenR"/>
+            </a:pPr>
+            <a:r>
+              <a:rPr lang="en-US" dirty="0"/>
+              <a:t>Here we have boxplots comparing the diversity indices of the two glaciers</a:t>
             </a:r>
           </a:p>
         </p:txBody>
@@ -29462,7 +29574,7 @@
           <a:p>
             <a:fld id="{91AE2140-D502-214A-B76B-E0784B2C949B}" type="slidenum">
               <a:rPr lang="en-US" smtClean="0"/>
-              <a:t>14</a:t>
+              <a:t>16</a:t>
             </a:fld>
             <a:endParaRPr lang="en-US"/>
           </a:p>
@@ -29471,7 +29583,7 @@
     </p:spTree>
     <p:extLst>
       <p:ext uri="{BB962C8B-B14F-4D97-AF65-F5344CB8AC3E}">
-        <p14:creationId xmlns:p14="http://schemas.microsoft.com/office/powerpoint/2010/main" val="4033971060"/>
+        <p14:creationId xmlns:p14="http://schemas.microsoft.com/office/powerpoint/2010/main" val="3006070899"/>
       </p:ext>
     </p:extLst>
   </p:cSld>
@@ -29527,7 +29639,7 @@
           <a:p>
             <a:r>
               <a:rPr lang="en-US" dirty="0"/>
-              <a:t>Relative abundance plots, agglomerated by Class</a:t>
+              <a:t>Comparison of phylogenetic diversities of the two glaciers</a:t>
             </a:r>
           </a:p>
         </p:txBody>
@@ -29549,7 +29661,7 @@
           <a:p>
             <a:fld id="{91AE2140-D502-214A-B76B-E0784B2C949B}" type="slidenum">
               <a:rPr lang="en-US" smtClean="0"/>
-              <a:t>16</a:t>
+              <a:t>17</a:t>
             </a:fld>
             <a:endParaRPr lang="en-US"/>
           </a:p>
@@ -29558,7 +29670,7 @@
     </p:spTree>
     <p:extLst>
       <p:ext uri="{BB962C8B-B14F-4D97-AF65-F5344CB8AC3E}">
-        <p14:creationId xmlns:p14="http://schemas.microsoft.com/office/powerpoint/2010/main" val="761170827"/>
+        <p14:creationId xmlns:p14="http://schemas.microsoft.com/office/powerpoint/2010/main" val="4033971060"/>
       </p:ext>
     </p:extLst>
   </p:cSld>
@@ -33036,13 +33148,8 @@
             </a:pPr>
             <a:r>
               <a:rPr lang="en-US" sz="4000" dirty="0"/>
-              <a:t>Alpha Diversity &amp; Abundance </a:t>
-            </a:r>
-            <a:r>
-              <a:rPr lang="en-US" sz="4000" dirty="0" err="1"/>
-              <a:t>Barplots</a:t>
-            </a:r>
-            <a:endParaRPr lang="en-US" sz="4000" dirty="0"/>
+              <a:t>Alpha Diversity </a:t>
+            </a:r>
           </a:p>
           <a:p>
             <a:pPr marL="742950" indent="-742950">
@@ -33156,7 +33263,7 @@
         </p:spPr>
         <p:txBody>
           <a:bodyPr>
-            <a:normAutofit/>
+            <a:normAutofit fontScale="92500" lnSpcReduction="20000"/>
           </a:bodyPr>
           <a:lstStyle/>
           <a:p>
@@ -33169,7 +33276,15 @@
             </a:r>
             <a:r>
               <a:rPr lang="en-GB" sz="2400" dirty="0"/>
-              <a:t>Plots of ASV richness (A) and Shannon Diversity Index (B) for each glacier</a:t>
+              <a:t>Plots of ASV richness (A) and Shannon Diversity Index (B) for each glacier (richness: t = 2.0202, </a:t>
+            </a:r>
+            <a:r>
+              <a:rPr lang="en-GB" sz="2400" dirty="0" err="1"/>
+              <a:t>df</a:t>
+            </a:r>
+            <a:r>
+              <a:rPr lang="en-GB" sz="2400" dirty="0"/>
+              <a:t> = 32, p=0.0518, Shannon: W = 142, p=0.5808)</a:t>
             </a:r>
             <a:endParaRPr lang="en-US" sz="2400" dirty="0"/>
           </a:p>
@@ -33219,6 +33334,487 @@
 </file>
 
 <file path=ppt/slides/slide13.xml><?xml version="1.0" encoding="utf-8"?>
+<p:sld xmlns:a="http://schemas.openxmlformats.org/drawingml/2006/main" xmlns:r="http://schemas.openxmlformats.org/officeDocument/2006/relationships" xmlns:p="http://schemas.openxmlformats.org/presentationml/2006/main">
+  <p:cSld>
+    <p:spTree>
+      <p:nvGrpSpPr>
+        <p:cNvPr id="1" name=""/>
+        <p:cNvGrpSpPr/>
+        <p:nvPr/>
+      </p:nvGrpSpPr>
+      <p:grpSpPr>
+        <a:xfrm>
+          <a:off x="0" y="0"/>
+          <a:ext cx="0" cy="0"/>
+          <a:chOff x="0" y="0"/>
+          <a:chExt cx="0" cy="0"/>
+        </a:xfrm>
+      </p:grpSpPr>
+      <p:sp>
+        <p:nvSpPr>
+          <p:cNvPr id="2" name="Title 1">
+            <a:extLst>
+              <a:ext uri="{FF2B5EF4-FFF2-40B4-BE49-F238E27FC236}">
+                <a16:creationId xmlns:a16="http://schemas.microsoft.com/office/drawing/2014/main" id="{B782A0EB-033A-2548-B24B-9258C1B51CB6}"/>
+              </a:ext>
+            </a:extLst>
+          </p:cNvPr>
+          <p:cNvSpPr>
+            <a:spLocks noGrp="1"/>
+          </p:cNvSpPr>
+          <p:nvPr>
+            <p:ph type="title"/>
+          </p:nvPr>
+        </p:nvSpPr>
+        <p:spPr>
+          <a:solidFill>
+            <a:srgbClr val="FFC003"/>
+          </a:solidFill>
+        </p:spPr>
+        <p:txBody>
+          <a:bodyPr/>
+          <a:lstStyle/>
+          <a:p>
+            <a:r>
+              <a:rPr lang="en-US" dirty="0">
+                <a:solidFill>
+                  <a:schemeClr val="bg1"/>
+                </a:solidFill>
+              </a:rPr>
+              <a:t>Beta Diversity &amp; Ordination: Weighted </a:t>
+            </a:r>
+            <a:r>
+              <a:rPr lang="en-US" dirty="0" err="1">
+                <a:solidFill>
+                  <a:schemeClr val="bg1"/>
+                </a:solidFill>
+              </a:rPr>
+              <a:t>UniFrac</a:t>
+            </a:r>
+            <a:endParaRPr lang="en-US" dirty="0">
+              <a:solidFill>
+                <a:schemeClr val="bg1"/>
+              </a:solidFill>
+            </a:endParaRPr>
+          </a:p>
+        </p:txBody>
+      </p:sp>
+      <p:sp>
+        <p:nvSpPr>
+          <p:cNvPr id="3" name="Content Placeholder 2">
+            <a:extLst>
+              <a:ext uri="{FF2B5EF4-FFF2-40B4-BE49-F238E27FC236}">
+                <a16:creationId xmlns:a16="http://schemas.microsoft.com/office/drawing/2014/main" id="{AA3D5702-1A30-E248-80BA-2F3C6F41D3BA}"/>
+              </a:ext>
+            </a:extLst>
+          </p:cNvPr>
+          <p:cNvSpPr>
+            <a:spLocks noGrp="1"/>
+          </p:cNvSpPr>
+          <p:nvPr>
+            <p:ph idx="1"/>
+          </p:nvPr>
+        </p:nvSpPr>
+        <p:spPr>
+          <a:xfrm>
+            <a:off x="838200" y="5786437"/>
+            <a:ext cx="10515600" cy="800101"/>
+          </a:xfrm>
+        </p:spPr>
+        <p:txBody>
+          <a:bodyPr>
+            <a:normAutofit fontScale="92500" lnSpcReduction="10000"/>
+          </a:bodyPr>
+          <a:lstStyle/>
+          <a:p>
+            <a:pPr marL="0" indent="0" algn="ctr">
+              <a:buNone/>
+            </a:pPr>
+            <a:r>
+              <a:rPr lang="en-US" sz="2000" dirty="0"/>
+              <a:t>Figure : Beta diversity calculated using weighted </a:t>
+            </a:r>
+            <a:r>
+              <a:rPr lang="en-US" sz="2000" dirty="0" err="1"/>
+              <a:t>UniFrac</a:t>
+            </a:r>
+            <a:r>
+              <a:rPr lang="en-US" sz="2000" dirty="0"/>
+              <a:t> distances, visualized use </a:t>
+            </a:r>
+            <a:r>
+              <a:rPr lang="en-US" sz="2000" dirty="0" err="1"/>
+              <a:t>PCoA</a:t>
+            </a:r>
+            <a:r>
+              <a:rPr lang="en-US" sz="2000" dirty="0"/>
+              <a:t> (blue is Taylor Glacier and orange is Canada Glacier). This plot shows significant beta diversity variation between glaciers (PERMANOVA: F = 12.539, </a:t>
+            </a:r>
+            <a:r>
+              <a:rPr lang="en-US" sz="2000" dirty="0" err="1"/>
+              <a:t>df</a:t>
+            </a:r>
+            <a:r>
+              <a:rPr lang="en-US" sz="2000" dirty="0"/>
+              <a:t>=1, P = 0.0001).</a:t>
+            </a:r>
+          </a:p>
+        </p:txBody>
+      </p:sp>
+      <p:pic>
+        <p:nvPicPr>
+          <p:cNvPr id="5" name="Picture 4">
+            <a:extLst>
+              <a:ext uri="{FF2B5EF4-FFF2-40B4-BE49-F238E27FC236}">
+                <a16:creationId xmlns:a16="http://schemas.microsoft.com/office/drawing/2014/main" id="{9C1FC389-8FED-4D4B-AE7E-C8C819B547F0}"/>
+              </a:ext>
+            </a:extLst>
+          </p:cNvPr>
+          <p:cNvPicPr>
+            <a:picLocks noChangeAspect="1"/>
+          </p:cNvPicPr>
+          <p:nvPr/>
+        </p:nvPicPr>
+        <p:blipFill>
+          <a:blip r:embed="rId3"/>
+          <a:stretch>
+            <a:fillRect/>
+          </a:stretch>
+        </p:blipFill>
+        <p:spPr>
+          <a:xfrm>
+            <a:off x="2438400" y="1909762"/>
+            <a:ext cx="7315200" cy="3657600"/>
+          </a:xfrm>
+          <a:prstGeom prst="rect">
+            <a:avLst/>
+          </a:prstGeom>
+        </p:spPr>
+      </p:pic>
+    </p:spTree>
+    <p:extLst>
+      <p:ext uri="{BB962C8B-B14F-4D97-AF65-F5344CB8AC3E}">
+        <p14:creationId xmlns:p14="http://schemas.microsoft.com/office/powerpoint/2010/main" val="495349475"/>
+      </p:ext>
+    </p:extLst>
+  </p:cSld>
+  <p:clrMapOvr>
+    <a:masterClrMapping/>
+  </p:clrMapOvr>
+</p:sld>
+</file>
+
+<file path=ppt/slides/slide14.xml><?xml version="1.0" encoding="utf-8"?>
+<p:sld xmlns:a="http://schemas.openxmlformats.org/drawingml/2006/main" xmlns:r="http://schemas.openxmlformats.org/officeDocument/2006/relationships" xmlns:p="http://schemas.openxmlformats.org/presentationml/2006/main">
+  <p:cSld>
+    <p:spTree>
+      <p:nvGrpSpPr>
+        <p:cNvPr id="1" name=""/>
+        <p:cNvGrpSpPr/>
+        <p:nvPr/>
+      </p:nvGrpSpPr>
+      <p:grpSpPr>
+        <a:xfrm>
+          <a:off x="0" y="0"/>
+          <a:ext cx="0" cy="0"/>
+          <a:chOff x="0" y="0"/>
+          <a:chExt cx="0" cy="0"/>
+        </a:xfrm>
+      </p:grpSpPr>
+      <p:sp>
+        <p:nvSpPr>
+          <p:cNvPr id="2" name="Title 1">
+            <a:extLst>
+              <a:ext uri="{FF2B5EF4-FFF2-40B4-BE49-F238E27FC236}">
+                <a16:creationId xmlns:a16="http://schemas.microsoft.com/office/drawing/2014/main" id="{BF697597-8752-BB4F-8014-E3B32D5A4471}"/>
+              </a:ext>
+            </a:extLst>
+          </p:cNvPr>
+          <p:cNvSpPr>
+            <a:spLocks noGrp="1"/>
+          </p:cNvSpPr>
+          <p:nvPr>
+            <p:ph type="title"/>
+          </p:nvPr>
+        </p:nvSpPr>
+        <p:spPr>
+          <a:solidFill>
+            <a:srgbClr val="FFC003"/>
+          </a:solidFill>
+        </p:spPr>
+        <p:txBody>
+          <a:bodyPr/>
+          <a:lstStyle/>
+          <a:p>
+            <a:r>
+              <a:rPr lang="en-US" dirty="0">
+                <a:solidFill>
+                  <a:schemeClr val="bg1"/>
+                </a:solidFill>
+              </a:rPr>
+              <a:t>Beta Diversity &amp; Ordination: Unweighted </a:t>
+            </a:r>
+            <a:r>
+              <a:rPr lang="en-US" dirty="0" err="1">
+                <a:solidFill>
+                  <a:schemeClr val="bg1"/>
+                </a:solidFill>
+              </a:rPr>
+              <a:t>UniFrac</a:t>
+            </a:r>
+            <a:endParaRPr lang="en-US" dirty="0"/>
+          </a:p>
+        </p:txBody>
+      </p:sp>
+      <p:pic>
+        <p:nvPicPr>
+          <p:cNvPr id="7" name="Picture 6">
+            <a:extLst>
+              <a:ext uri="{FF2B5EF4-FFF2-40B4-BE49-F238E27FC236}">
+                <a16:creationId xmlns:a16="http://schemas.microsoft.com/office/drawing/2014/main" id="{D67D15A3-0D66-5D4C-936C-6CE3DD7CEF5F}"/>
+              </a:ext>
+            </a:extLst>
+          </p:cNvPr>
+          <p:cNvPicPr>
+            <a:picLocks noChangeAspect="1"/>
+          </p:cNvPicPr>
+          <p:nvPr/>
+        </p:nvPicPr>
+        <p:blipFill>
+          <a:blip r:embed="rId2"/>
+          <a:stretch>
+            <a:fillRect/>
+          </a:stretch>
+        </p:blipFill>
+        <p:spPr>
+          <a:xfrm>
+            <a:off x="2438400" y="1814513"/>
+            <a:ext cx="7315200" cy="3657600"/>
+          </a:xfrm>
+          <a:prstGeom prst="rect">
+            <a:avLst/>
+          </a:prstGeom>
+        </p:spPr>
+      </p:pic>
+      <p:sp>
+        <p:nvSpPr>
+          <p:cNvPr id="8" name="Content Placeholder 2">
+            <a:extLst>
+              <a:ext uri="{FF2B5EF4-FFF2-40B4-BE49-F238E27FC236}">
+                <a16:creationId xmlns:a16="http://schemas.microsoft.com/office/drawing/2014/main" id="{8E214C27-3E9A-5647-80C8-EBBD2BFEB429}"/>
+              </a:ext>
+            </a:extLst>
+          </p:cNvPr>
+          <p:cNvSpPr>
+            <a:spLocks noGrp="1"/>
+          </p:cNvSpPr>
+          <p:nvPr>
+            <p:ph idx="1"/>
+          </p:nvPr>
+        </p:nvSpPr>
+        <p:spPr>
+          <a:xfrm>
+            <a:off x="838200" y="5786437"/>
+            <a:ext cx="10515600" cy="800101"/>
+          </a:xfrm>
+        </p:spPr>
+        <p:txBody>
+          <a:bodyPr>
+            <a:normAutofit fontScale="92500" lnSpcReduction="10000"/>
+          </a:bodyPr>
+          <a:lstStyle/>
+          <a:p>
+            <a:pPr marL="0" indent="0" algn="ctr">
+              <a:buNone/>
+            </a:pPr>
+            <a:r>
+              <a:rPr lang="en-US" sz="2000" dirty="0"/>
+              <a:t>Figure : Beta diversity calculated using unweighted </a:t>
+            </a:r>
+            <a:r>
+              <a:rPr lang="en-US" sz="2000" dirty="0" err="1"/>
+              <a:t>UniFrac</a:t>
+            </a:r>
+            <a:r>
+              <a:rPr lang="en-US" sz="2000" dirty="0"/>
+              <a:t> distances, visualized use </a:t>
+            </a:r>
+            <a:r>
+              <a:rPr lang="en-US" sz="2000" dirty="0" err="1"/>
+              <a:t>PCoA</a:t>
+            </a:r>
+            <a:r>
+              <a:rPr lang="en-US" sz="2000" dirty="0"/>
+              <a:t> (blue is Taylor Glacier and orange is Canada Glacier). This plot shows significant beta diversity variation between glaciers (PERMANOVA: F =4.1016 , </a:t>
+            </a:r>
+            <a:r>
+              <a:rPr lang="en-US" sz="2000" dirty="0" err="1"/>
+              <a:t>df</a:t>
+            </a:r>
+            <a:r>
+              <a:rPr lang="en-US" sz="2000" dirty="0"/>
+              <a:t>=1, P =0.001).</a:t>
+            </a:r>
+          </a:p>
+        </p:txBody>
+      </p:sp>
+    </p:spTree>
+    <p:extLst>
+      <p:ext uri="{BB962C8B-B14F-4D97-AF65-F5344CB8AC3E}">
+        <p14:creationId xmlns:p14="http://schemas.microsoft.com/office/powerpoint/2010/main" val="1123583573"/>
+      </p:ext>
+    </p:extLst>
+  </p:cSld>
+  <p:clrMapOvr>
+    <a:masterClrMapping/>
+  </p:clrMapOvr>
+</p:sld>
+</file>
+
+<file path=ppt/slides/slide15.xml><?xml version="1.0" encoding="utf-8"?>
+<p:sld xmlns:a="http://schemas.openxmlformats.org/drawingml/2006/main" xmlns:r="http://schemas.openxmlformats.org/officeDocument/2006/relationships" xmlns:p="http://schemas.openxmlformats.org/presentationml/2006/main">
+  <p:cSld>
+    <p:spTree>
+      <p:nvGrpSpPr>
+        <p:cNvPr id="1" name=""/>
+        <p:cNvGrpSpPr/>
+        <p:nvPr/>
+      </p:nvGrpSpPr>
+      <p:grpSpPr>
+        <a:xfrm>
+          <a:off x="0" y="0"/>
+          <a:ext cx="0" cy="0"/>
+          <a:chOff x="0" y="0"/>
+          <a:chExt cx="0" cy="0"/>
+        </a:xfrm>
+      </p:grpSpPr>
+      <p:sp>
+        <p:nvSpPr>
+          <p:cNvPr id="2" name="Title 1">
+            <a:extLst>
+              <a:ext uri="{FF2B5EF4-FFF2-40B4-BE49-F238E27FC236}">
+                <a16:creationId xmlns:a16="http://schemas.microsoft.com/office/drawing/2014/main" id="{91C7BAD4-EB8D-1D49-B8F3-F6E08E43BE87}"/>
+              </a:ext>
+            </a:extLst>
+          </p:cNvPr>
+          <p:cNvSpPr>
+            <a:spLocks noGrp="1"/>
+          </p:cNvSpPr>
+          <p:nvPr>
+            <p:ph type="title"/>
+          </p:nvPr>
+        </p:nvSpPr>
+        <p:spPr>
+          <a:solidFill>
+            <a:srgbClr val="FFC003"/>
+          </a:solidFill>
+        </p:spPr>
+        <p:txBody>
+          <a:bodyPr/>
+          <a:lstStyle/>
+          <a:p>
+            <a:r>
+              <a:rPr lang="en-US" dirty="0">
+                <a:solidFill>
+                  <a:schemeClr val="bg1"/>
+                </a:solidFill>
+              </a:rPr>
+              <a:t>Beta Diversity &amp; Ordination: Bray-Curtis</a:t>
+            </a:r>
+            <a:endParaRPr lang="en-US" dirty="0"/>
+          </a:p>
+        </p:txBody>
+      </p:sp>
+      <p:pic>
+        <p:nvPicPr>
+          <p:cNvPr id="5" name="Picture 4">
+            <a:extLst>
+              <a:ext uri="{FF2B5EF4-FFF2-40B4-BE49-F238E27FC236}">
+                <a16:creationId xmlns:a16="http://schemas.microsoft.com/office/drawing/2014/main" id="{3A4996FB-FA8A-7849-A8D3-509ABB27E24F}"/>
+              </a:ext>
+            </a:extLst>
+          </p:cNvPr>
+          <p:cNvPicPr>
+            <a:picLocks noChangeAspect="1"/>
+          </p:cNvPicPr>
+          <p:nvPr/>
+        </p:nvPicPr>
+        <p:blipFill>
+          <a:blip r:embed="rId2"/>
+          <a:stretch>
+            <a:fillRect/>
+          </a:stretch>
+        </p:blipFill>
+        <p:spPr>
+          <a:xfrm>
+            <a:off x="2438400" y="1828800"/>
+            <a:ext cx="7315200" cy="3657600"/>
+          </a:xfrm>
+          <a:prstGeom prst="rect">
+            <a:avLst/>
+          </a:prstGeom>
+        </p:spPr>
+      </p:pic>
+      <p:sp>
+        <p:nvSpPr>
+          <p:cNvPr id="6" name="Content Placeholder 2">
+            <a:extLst>
+              <a:ext uri="{FF2B5EF4-FFF2-40B4-BE49-F238E27FC236}">
+                <a16:creationId xmlns:a16="http://schemas.microsoft.com/office/drawing/2014/main" id="{5F112A52-1E3F-7A4C-B8CA-E64A9B6E0D02}"/>
+              </a:ext>
+            </a:extLst>
+          </p:cNvPr>
+          <p:cNvSpPr>
+            <a:spLocks noGrp="1"/>
+          </p:cNvSpPr>
+          <p:nvPr>
+            <p:ph idx="1"/>
+          </p:nvPr>
+        </p:nvSpPr>
+        <p:spPr>
+          <a:xfrm>
+            <a:off x="838200" y="5786437"/>
+            <a:ext cx="10515600" cy="800101"/>
+          </a:xfrm>
+        </p:spPr>
+        <p:txBody>
+          <a:bodyPr>
+            <a:normAutofit fontScale="92500" lnSpcReduction="10000"/>
+          </a:bodyPr>
+          <a:lstStyle/>
+          <a:p>
+            <a:pPr marL="0" indent="0" algn="ctr">
+              <a:buNone/>
+            </a:pPr>
+            <a:r>
+              <a:rPr lang="en-US" sz="2000" dirty="0"/>
+              <a:t>Figure : Beta diversity calculated using Bray-Curtis distances, visualized use NMDS plot (blue is Taylor Glacier and orange is Canada Glacier). This plot shows significant beta diversity variation between glaciers (PERMANOVA: F =8.3412 , </a:t>
+            </a:r>
+            <a:r>
+              <a:rPr lang="en-US" sz="2000" dirty="0" err="1"/>
+              <a:t>df</a:t>
+            </a:r>
+            <a:r>
+              <a:rPr lang="en-US" sz="2000" dirty="0"/>
+              <a:t>=1, P =0.001).</a:t>
+            </a:r>
+          </a:p>
+        </p:txBody>
+      </p:sp>
+    </p:spTree>
+    <p:extLst>
+      <p:ext uri="{BB962C8B-B14F-4D97-AF65-F5344CB8AC3E}">
+        <p14:creationId xmlns:p14="http://schemas.microsoft.com/office/powerpoint/2010/main" val="2013293811"/>
+      </p:ext>
+    </p:extLst>
+  </p:cSld>
+  <p:clrMapOvr>
+    <a:masterClrMapping/>
+  </p:clrMapOvr>
+</p:sld>
+</file>
+
+<file path=ppt/slides/slide16.xml><?xml version="1.0" encoding="utf-8"?>
 <p:sld xmlns:a="http://schemas.openxmlformats.org/drawingml/2006/main" xmlns:r="http://schemas.openxmlformats.org/officeDocument/2006/relationships" xmlns:p="http://schemas.openxmlformats.org/presentationml/2006/main">
   <p:cSld>
     <p:spTree>
@@ -33400,7 +33996,7 @@
 </p:sld>
 </file>
 
-<file path=ppt/slides/slide14.xml><?xml version="1.0" encoding="utf-8"?>
+<file path=ppt/slides/slide17.xml><?xml version="1.0" encoding="utf-8"?>
 <p:sld xmlns:a="http://schemas.openxmlformats.org/drawingml/2006/main" xmlns:r="http://schemas.openxmlformats.org/officeDocument/2006/relationships" xmlns:p="http://schemas.openxmlformats.org/presentationml/2006/main">
   <p:cSld>
     <p:spTree>
@@ -33496,7 +34092,7 @@
 </p:sld>
 </file>
 
-<file path=ppt/slides/slide15.xml><?xml version="1.0" encoding="utf-8"?>
+<file path=ppt/slides/slide18.xml><?xml version="1.0" encoding="utf-8"?>
 <p:sld xmlns:a="http://schemas.openxmlformats.org/drawingml/2006/main" xmlns:r="http://schemas.openxmlformats.org/officeDocument/2006/relationships" xmlns:p="http://schemas.openxmlformats.org/presentationml/2006/main">
   <p:cSld>
     <p:spTree>
@@ -33571,7 +34167,7 @@
         </p:blipFill>
         <p:spPr>
           <a:xfrm>
-            <a:off x="396499" y="1900237"/>
+            <a:off x="1364082" y="1900237"/>
             <a:ext cx="3478199" cy="3478199"/>
           </a:xfrm>
           <a:prstGeom prst="rect">
@@ -33593,7 +34189,7 @@
         </p:nvSpPr>
         <p:spPr>
           <a:xfrm>
-            <a:off x="396499" y="5587985"/>
+            <a:off x="1910974" y="5589557"/>
             <a:ext cx="1935166" cy="830997"/>
           </a:xfrm>
           <a:prstGeom prst="rect">
@@ -33687,7 +34283,7 @@
 </p:sld>
 </file>
 
-<file path=ppt/slides/slide16.xml><?xml version="1.0" encoding="utf-8"?>
+<file path=ppt/slides/slide19.xml><?xml version="1.0" encoding="utf-8"?>
 <p:sld xmlns:a="http://schemas.openxmlformats.org/drawingml/2006/main" xmlns:r="http://schemas.openxmlformats.org/officeDocument/2006/relationships" xmlns:p="http://schemas.openxmlformats.org/presentationml/2006/main">
   <p:cSld>
     <p:spTree>
@@ -33783,7 +34379,1295 @@
 </p:sld>
 </file>
 
-<file path=ppt/slides/slide17.xml><?xml version="1.0" encoding="utf-8"?>
+<file path=ppt/slides/slide2.xml><?xml version="1.0" encoding="utf-8"?>
+<p:sld xmlns:a="http://schemas.openxmlformats.org/drawingml/2006/main" xmlns:r="http://schemas.openxmlformats.org/officeDocument/2006/relationships" xmlns:p="http://schemas.openxmlformats.org/presentationml/2006/main">
+  <p:cSld>
+    <p:spTree>
+      <p:nvGrpSpPr>
+        <p:cNvPr id="1" name=""/>
+        <p:cNvGrpSpPr/>
+        <p:nvPr/>
+      </p:nvGrpSpPr>
+      <p:grpSpPr>
+        <a:xfrm>
+          <a:off x="0" y="0"/>
+          <a:ext cx="0" cy="0"/>
+          <a:chOff x="0" y="0"/>
+          <a:chExt cx="0" cy="0"/>
+        </a:xfrm>
+      </p:grpSpPr>
+      <p:sp>
+        <p:nvSpPr>
+          <p:cNvPr id="2" name="Title 1">
+            <a:extLst>
+              <a:ext uri="{FF2B5EF4-FFF2-40B4-BE49-F238E27FC236}">
+                <a16:creationId xmlns:a16="http://schemas.microsoft.com/office/drawing/2014/main" id="{122A31DA-B431-C54A-874F-C1236B9B36B8}"/>
+              </a:ext>
+            </a:extLst>
+          </p:cNvPr>
+          <p:cNvSpPr>
+            <a:spLocks noGrp="1"/>
+          </p:cNvSpPr>
+          <p:nvPr>
+            <p:ph type="title"/>
+          </p:nvPr>
+        </p:nvSpPr>
+        <p:spPr/>
+        <p:txBody>
+          <a:bodyPr/>
+          <a:lstStyle/>
+          <a:p>
+            <a:r>
+              <a:rPr lang="en-US" dirty="0"/>
+              <a:t>Why are they different? Why should we care?</a:t>
+            </a:r>
+          </a:p>
+        </p:txBody>
+      </p:sp>
+      <p:sp>
+        <p:nvSpPr>
+          <p:cNvPr id="4" name="Oval 3">
+            <a:extLst>
+              <a:ext uri="{FF2B5EF4-FFF2-40B4-BE49-F238E27FC236}">
+                <a16:creationId xmlns:a16="http://schemas.microsoft.com/office/drawing/2014/main" id="{4075A81A-7D11-9448-BF36-6D732E7F151C}"/>
+              </a:ext>
+            </a:extLst>
+          </p:cNvPr>
+          <p:cNvSpPr/>
+          <p:nvPr/>
+        </p:nvSpPr>
+        <p:spPr>
+          <a:xfrm>
+            <a:off x="2600326" y="3014662"/>
+            <a:ext cx="314325" cy="314325"/>
+          </a:xfrm>
+          <a:prstGeom prst="ellipse">
+            <a:avLst/>
+          </a:prstGeom>
+        </p:spPr>
+        <p:style>
+          <a:lnRef idx="2">
+            <a:schemeClr val="accent1">
+              <a:shade val="50000"/>
+            </a:schemeClr>
+          </a:lnRef>
+          <a:fillRef idx="1">
+            <a:schemeClr val="accent1"/>
+          </a:fillRef>
+          <a:effectRef idx="0">
+            <a:schemeClr val="accent1"/>
+          </a:effectRef>
+          <a:fontRef idx="minor">
+            <a:schemeClr val="lt1"/>
+          </a:fontRef>
+        </p:style>
+        <p:txBody>
+          <a:bodyPr rtlCol="0" anchor="ctr"/>
+          <a:lstStyle/>
+          <a:p>
+            <a:pPr algn="ctr"/>
+            <a:endParaRPr lang="en-US"/>
+          </a:p>
+        </p:txBody>
+      </p:sp>
+      <p:sp>
+        <p:nvSpPr>
+          <p:cNvPr id="5" name="Oval 4">
+            <a:extLst>
+              <a:ext uri="{FF2B5EF4-FFF2-40B4-BE49-F238E27FC236}">
+                <a16:creationId xmlns:a16="http://schemas.microsoft.com/office/drawing/2014/main" id="{E4516562-A1F7-4A44-B228-68531F4F81E8}"/>
+              </a:ext>
+            </a:extLst>
+          </p:cNvPr>
+          <p:cNvSpPr/>
+          <p:nvPr/>
+        </p:nvSpPr>
+        <p:spPr>
+          <a:xfrm>
+            <a:off x="3467101" y="3752849"/>
+            <a:ext cx="314325" cy="314325"/>
+          </a:xfrm>
+          <a:prstGeom prst="ellipse">
+            <a:avLst/>
+          </a:prstGeom>
+        </p:spPr>
+        <p:style>
+          <a:lnRef idx="2">
+            <a:schemeClr val="accent1">
+              <a:shade val="50000"/>
+            </a:schemeClr>
+          </a:lnRef>
+          <a:fillRef idx="1">
+            <a:schemeClr val="accent1"/>
+          </a:fillRef>
+          <a:effectRef idx="0">
+            <a:schemeClr val="accent1"/>
+          </a:effectRef>
+          <a:fontRef idx="minor">
+            <a:schemeClr val="lt1"/>
+          </a:fontRef>
+        </p:style>
+        <p:txBody>
+          <a:bodyPr rtlCol="0" anchor="ctr"/>
+          <a:lstStyle/>
+          <a:p>
+            <a:pPr algn="ctr"/>
+            <a:endParaRPr lang="en-US"/>
+          </a:p>
+        </p:txBody>
+      </p:sp>
+      <p:sp>
+        <p:nvSpPr>
+          <p:cNvPr id="6" name="Oval 5">
+            <a:extLst>
+              <a:ext uri="{FF2B5EF4-FFF2-40B4-BE49-F238E27FC236}">
+                <a16:creationId xmlns:a16="http://schemas.microsoft.com/office/drawing/2014/main" id="{1ABEA4FE-AD89-454B-989F-A777676B2DAB}"/>
+              </a:ext>
+            </a:extLst>
+          </p:cNvPr>
+          <p:cNvSpPr/>
+          <p:nvPr/>
+        </p:nvSpPr>
+        <p:spPr>
+          <a:xfrm>
+            <a:off x="2586038" y="4410075"/>
+            <a:ext cx="314325" cy="314325"/>
+          </a:xfrm>
+          <a:prstGeom prst="ellipse">
+            <a:avLst/>
+          </a:prstGeom>
+          <a:solidFill>
+            <a:srgbClr val="92D050"/>
+          </a:solidFill>
+        </p:spPr>
+        <p:style>
+          <a:lnRef idx="2">
+            <a:schemeClr val="accent1">
+              <a:shade val="50000"/>
+            </a:schemeClr>
+          </a:lnRef>
+          <a:fillRef idx="1">
+            <a:schemeClr val="accent1"/>
+          </a:fillRef>
+          <a:effectRef idx="0">
+            <a:schemeClr val="accent1"/>
+          </a:effectRef>
+          <a:fontRef idx="minor">
+            <a:schemeClr val="lt1"/>
+          </a:fontRef>
+        </p:style>
+        <p:txBody>
+          <a:bodyPr rtlCol="0" anchor="ctr"/>
+          <a:lstStyle/>
+          <a:p>
+            <a:pPr algn="ctr"/>
+            <a:endParaRPr lang="en-US"/>
+          </a:p>
+        </p:txBody>
+      </p:sp>
+      <p:sp>
+        <p:nvSpPr>
+          <p:cNvPr id="7" name="Oval 6">
+            <a:extLst>
+              <a:ext uri="{FF2B5EF4-FFF2-40B4-BE49-F238E27FC236}">
+                <a16:creationId xmlns:a16="http://schemas.microsoft.com/office/drawing/2014/main" id="{4E83A67A-C00A-B342-BE75-24729CD2D02F}"/>
+              </a:ext>
+            </a:extLst>
+          </p:cNvPr>
+          <p:cNvSpPr/>
+          <p:nvPr/>
+        </p:nvSpPr>
+        <p:spPr>
+          <a:xfrm>
+            <a:off x="4724401" y="4567237"/>
+            <a:ext cx="314325" cy="314325"/>
+          </a:xfrm>
+          <a:prstGeom prst="ellipse">
+            <a:avLst/>
+          </a:prstGeom>
+        </p:spPr>
+        <p:style>
+          <a:lnRef idx="2">
+            <a:schemeClr val="accent1">
+              <a:shade val="50000"/>
+            </a:schemeClr>
+          </a:lnRef>
+          <a:fillRef idx="1">
+            <a:schemeClr val="accent1"/>
+          </a:fillRef>
+          <a:effectRef idx="0">
+            <a:schemeClr val="accent1"/>
+          </a:effectRef>
+          <a:fontRef idx="minor">
+            <a:schemeClr val="lt1"/>
+          </a:fontRef>
+        </p:style>
+        <p:txBody>
+          <a:bodyPr rtlCol="0" anchor="ctr"/>
+          <a:lstStyle/>
+          <a:p>
+            <a:pPr algn="ctr"/>
+            <a:endParaRPr lang="en-US"/>
+          </a:p>
+        </p:txBody>
+      </p:sp>
+      <p:sp>
+        <p:nvSpPr>
+          <p:cNvPr id="8" name="Oval 7">
+            <a:extLst>
+              <a:ext uri="{FF2B5EF4-FFF2-40B4-BE49-F238E27FC236}">
+                <a16:creationId xmlns:a16="http://schemas.microsoft.com/office/drawing/2014/main" id="{6F55F405-3566-B348-BF65-58C69A1A867A}"/>
+              </a:ext>
+            </a:extLst>
+          </p:cNvPr>
+          <p:cNvSpPr/>
+          <p:nvPr/>
+        </p:nvSpPr>
+        <p:spPr>
+          <a:xfrm>
+            <a:off x="3467101" y="5186360"/>
+            <a:ext cx="314325" cy="314325"/>
+          </a:xfrm>
+          <a:prstGeom prst="ellipse">
+            <a:avLst/>
+          </a:prstGeom>
+          <a:solidFill>
+            <a:srgbClr val="FFC000"/>
+          </a:solidFill>
+        </p:spPr>
+        <p:style>
+          <a:lnRef idx="2">
+            <a:schemeClr val="accent1">
+              <a:shade val="50000"/>
+            </a:schemeClr>
+          </a:lnRef>
+          <a:fillRef idx="1">
+            <a:schemeClr val="accent1"/>
+          </a:fillRef>
+          <a:effectRef idx="0">
+            <a:schemeClr val="accent1"/>
+          </a:effectRef>
+          <a:fontRef idx="minor">
+            <a:schemeClr val="lt1"/>
+          </a:fontRef>
+        </p:style>
+        <p:txBody>
+          <a:bodyPr rtlCol="0" anchor="ctr"/>
+          <a:lstStyle/>
+          <a:p>
+            <a:pPr algn="ctr"/>
+            <a:endParaRPr lang="en-US"/>
+          </a:p>
+        </p:txBody>
+      </p:sp>
+      <p:sp>
+        <p:nvSpPr>
+          <p:cNvPr id="9" name="Oval 8">
+            <a:extLst>
+              <a:ext uri="{FF2B5EF4-FFF2-40B4-BE49-F238E27FC236}">
+                <a16:creationId xmlns:a16="http://schemas.microsoft.com/office/drawing/2014/main" id="{EDD5ABE0-00B9-DD40-8C3A-A0CB5719BCBA}"/>
+              </a:ext>
+            </a:extLst>
+          </p:cNvPr>
+          <p:cNvSpPr/>
+          <p:nvPr/>
+        </p:nvSpPr>
+        <p:spPr>
+          <a:xfrm>
+            <a:off x="4410075" y="2800349"/>
+            <a:ext cx="314325" cy="314325"/>
+          </a:xfrm>
+          <a:prstGeom prst="ellipse">
+            <a:avLst/>
+          </a:prstGeom>
+          <a:solidFill>
+            <a:srgbClr val="FF0000"/>
+          </a:solidFill>
+        </p:spPr>
+        <p:style>
+          <a:lnRef idx="2">
+            <a:schemeClr val="accent1">
+              <a:shade val="50000"/>
+            </a:schemeClr>
+          </a:lnRef>
+          <a:fillRef idx="1">
+            <a:schemeClr val="accent1"/>
+          </a:fillRef>
+          <a:effectRef idx="0">
+            <a:schemeClr val="accent1"/>
+          </a:effectRef>
+          <a:fontRef idx="minor">
+            <a:schemeClr val="lt1"/>
+          </a:fontRef>
+        </p:style>
+        <p:txBody>
+          <a:bodyPr rtlCol="0" anchor="ctr"/>
+          <a:lstStyle/>
+          <a:p>
+            <a:pPr algn="ctr"/>
+            <a:endParaRPr lang="en-US"/>
+          </a:p>
+        </p:txBody>
+      </p:sp>
+      <p:sp>
+        <p:nvSpPr>
+          <p:cNvPr id="10" name="Oval 9">
+            <a:extLst>
+              <a:ext uri="{FF2B5EF4-FFF2-40B4-BE49-F238E27FC236}">
+                <a16:creationId xmlns:a16="http://schemas.microsoft.com/office/drawing/2014/main" id="{B26DB84F-E78D-2A48-A3F2-63B628D47B3F}"/>
+              </a:ext>
+            </a:extLst>
+          </p:cNvPr>
+          <p:cNvSpPr/>
+          <p:nvPr/>
+        </p:nvSpPr>
+        <p:spPr>
+          <a:xfrm>
+            <a:off x="3467100" y="3050382"/>
+            <a:ext cx="314325" cy="314325"/>
+          </a:xfrm>
+          <a:prstGeom prst="ellipse">
+            <a:avLst/>
+          </a:prstGeom>
+          <a:solidFill>
+            <a:srgbClr val="92D050"/>
+          </a:solidFill>
+          <a:ln>
+            <a:solidFill>
+              <a:schemeClr val="accent1"/>
+            </a:solidFill>
+          </a:ln>
+        </p:spPr>
+        <p:style>
+          <a:lnRef idx="2">
+            <a:schemeClr val="accent1">
+              <a:shade val="50000"/>
+            </a:schemeClr>
+          </a:lnRef>
+          <a:fillRef idx="1">
+            <a:schemeClr val="accent1"/>
+          </a:fillRef>
+          <a:effectRef idx="0">
+            <a:schemeClr val="accent1"/>
+          </a:effectRef>
+          <a:fontRef idx="minor">
+            <a:schemeClr val="lt1"/>
+          </a:fontRef>
+        </p:style>
+        <p:txBody>
+          <a:bodyPr rtlCol="0" anchor="ctr"/>
+          <a:lstStyle/>
+          <a:p>
+            <a:pPr algn="ctr"/>
+            <a:endParaRPr lang="en-US"/>
+          </a:p>
+        </p:txBody>
+      </p:sp>
+      <p:sp>
+        <p:nvSpPr>
+          <p:cNvPr id="11" name="Oval 10">
+            <a:extLst>
+              <a:ext uri="{FF2B5EF4-FFF2-40B4-BE49-F238E27FC236}">
+                <a16:creationId xmlns:a16="http://schemas.microsoft.com/office/drawing/2014/main" id="{DC502950-677E-3049-990E-AEC7AF21DD01}"/>
+              </a:ext>
+            </a:extLst>
+          </p:cNvPr>
+          <p:cNvSpPr/>
+          <p:nvPr/>
+        </p:nvSpPr>
+        <p:spPr>
+          <a:xfrm>
+            <a:off x="3967164" y="4410074"/>
+            <a:ext cx="314325" cy="314325"/>
+          </a:xfrm>
+          <a:prstGeom prst="ellipse">
+            <a:avLst/>
+          </a:prstGeom>
+          <a:solidFill>
+            <a:srgbClr val="92D050"/>
+          </a:solidFill>
+        </p:spPr>
+        <p:style>
+          <a:lnRef idx="2">
+            <a:schemeClr val="accent1">
+              <a:shade val="50000"/>
+            </a:schemeClr>
+          </a:lnRef>
+          <a:fillRef idx="1">
+            <a:schemeClr val="accent1"/>
+          </a:fillRef>
+          <a:effectRef idx="0">
+            <a:schemeClr val="accent1"/>
+          </a:effectRef>
+          <a:fontRef idx="minor">
+            <a:schemeClr val="lt1"/>
+          </a:fontRef>
+        </p:style>
+        <p:txBody>
+          <a:bodyPr rtlCol="0" anchor="ctr"/>
+          <a:lstStyle/>
+          <a:p>
+            <a:pPr algn="ctr"/>
+            <a:endParaRPr lang="en-US"/>
+          </a:p>
+        </p:txBody>
+      </p:sp>
+      <p:sp>
+        <p:nvSpPr>
+          <p:cNvPr id="12" name="Oval 11">
+            <a:extLst>
+              <a:ext uri="{FF2B5EF4-FFF2-40B4-BE49-F238E27FC236}">
+                <a16:creationId xmlns:a16="http://schemas.microsoft.com/office/drawing/2014/main" id="{45A94771-F505-D14F-B441-07C73CD0D66B}"/>
+              </a:ext>
+            </a:extLst>
+          </p:cNvPr>
+          <p:cNvSpPr/>
+          <p:nvPr/>
+        </p:nvSpPr>
+        <p:spPr>
+          <a:xfrm>
+            <a:off x="4567238" y="3752848"/>
+            <a:ext cx="314325" cy="314325"/>
+          </a:xfrm>
+          <a:prstGeom prst="ellipse">
+            <a:avLst/>
+          </a:prstGeom>
+        </p:spPr>
+        <p:style>
+          <a:lnRef idx="2">
+            <a:schemeClr val="accent1">
+              <a:shade val="50000"/>
+            </a:schemeClr>
+          </a:lnRef>
+          <a:fillRef idx="1">
+            <a:schemeClr val="accent1"/>
+          </a:fillRef>
+          <a:effectRef idx="0">
+            <a:schemeClr val="accent1"/>
+          </a:effectRef>
+          <a:fontRef idx="minor">
+            <a:schemeClr val="lt1"/>
+          </a:fontRef>
+        </p:style>
+        <p:txBody>
+          <a:bodyPr rtlCol="0" anchor="ctr"/>
+          <a:lstStyle/>
+          <a:p>
+            <a:pPr algn="ctr"/>
+            <a:endParaRPr lang="en-US"/>
+          </a:p>
+        </p:txBody>
+      </p:sp>
+      <p:sp>
+        <p:nvSpPr>
+          <p:cNvPr id="13" name="Oval 12">
+            <a:extLst>
+              <a:ext uri="{FF2B5EF4-FFF2-40B4-BE49-F238E27FC236}">
+                <a16:creationId xmlns:a16="http://schemas.microsoft.com/office/drawing/2014/main" id="{A3A575E6-7D11-6844-B659-F1F931279368}"/>
+              </a:ext>
+            </a:extLst>
+          </p:cNvPr>
+          <p:cNvSpPr/>
+          <p:nvPr/>
+        </p:nvSpPr>
+        <p:spPr>
+          <a:xfrm>
+            <a:off x="3119438" y="4710111"/>
+            <a:ext cx="314325" cy="314325"/>
+          </a:xfrm>
+          <a:prstGeom prst="ellipse">
+            <a:avLst/>
+          </a:prstGeom>
+        </p:spPr>
+        <p:style>
+          <a:lnRef idx="2">
+            <a:schemeClr val="accent1">
+              <a:shade val="50000"/>
+            </a:schemeClr>
+          </a:lnRef>
+          <a:fillRef idx="1">
+            <a:schemeClr val="accent1"/>
+          </a:fillRef>
+          <a:effectRef idx="0">
+            <a:schemeClr val="accent1"/>
+          </a:effectRef>
+          <a:fontRef idx="minor">
+            <a:schemeClr val="lt1"/>
+          </a:fontRef>
+        </p:style>
+        <p:txBody>
+          <a:bodyPr rtlCol="0" anchor="ctr"/>
+          <a:lstStyle/>
+          <a:p>
+            <a:pPr algn="ctr"/>
+            <a:endParaRPr lang="en-US"/>
+          </a:p>
+        </p:txBody>
+      </p:sp>
+      <p:sp>
+        <p:nvSpPr>
+          <p:cNvPr id="14" name="Oval 13">
+            <a:extLst>
+              <a:ext uri="{FF2B5EF4-FFF2-40B4-BE49-F238E27FC236}">
+                <a16:creationId xmlns:a16="http://schemas.microsoft.com/office/drawing/2014/main" id="{1D5E120C-A984-764E-B4EF-AA70BC53CD10}"/>
+              </a:ext>
+            </a:extLst>
+          </p:cNvPr>
+          <p:cNvSpPr/>
+          <p:nvPr/>
+        </p:nvSpPr>
+        <p:spPr>
+          <a:xfrm>
+            <a:off x="2728912" y="3867149"/>
+            <a:ext cx="314325" cy="314325"/>
+          </a:xfrm>
+          <a:prstGeom prst="ellipse">
+            <a:avLst/>
+          </a:prstGeom>
+        </p:spPr>
+        <p:style>
+          <a:lnRef idx="2">
+            <a:schemeClr val="accent1">
+              <a:shade val="50000"/>
+            </a:schemeClr>
+          </a:lnRef>
+          <a:fillRef idx="1">
+            <a:schemeClr val="accent1"/>
+          </a:fillRef>
+          <a:effectRef idx="0">
+            <a:schemeClr val="accent1"/>
+          </a:effectRef>
+          <a:fontRef idx="minor">
+            <a:schemeClr val="lt1"/>
+          </a:fontRef>
+        </p:style>
+        <p:txBody>
+          <a:bodyPr rtlCol="0" anchor="ctr"/>
+          <a:lstStyle/>
+          <a:p>
+            <a:pPr algn="ctr"/>
+            <a:endParaRPr lang="en-US"/>
+          </a:p>
+        </p:txBody>
+      </p:sp>
+      <p:sp>
+        <p:nvSpPr>
+          <p:cNvPr id="15" name="Oval 14">
+            <a:extLst>
+              <a:ext uri="{FF2B5EF4-FFF2-40B4-BE49-F238E27FC236}">
+                <a16:creationId xmlns:a16="http://schemas.microsoft.com/office/drawing/2014/main" id="{F4679495-EAA4-F64B-8588-1E9DEA49D4C8}"/>
+              </a:ext>
+            </a:extLst>
+          </p:cNvPr>
+          <p:cNvSpPr/>
+          <p:nvPr/>
+        </p:nvSpPr>
+        <p:spPr>
+          <a:xfrm>
+            <a:off x="3967163" y="3378993"/>
+            <a:ext cx="314325" cy="314325"/>
+          </a:xfrm>
+          <a:prstGeom prst="ellipse">
+            <a:avLst/>
+          </a:prstGeom>
+        </p:spPr>
+        <p:style>
+          <a:lnRef idx="2">
+            <a:schemeClr val="accent1">
+              <a:shade val="50000"/>
+            </a:schemeClr>
+          </a:lnRef>
+          <a:fillRef idx="1">
+            <a:schemeClr val="accent1"/>
+          </a:fillRef>
+          <a:effectRef idx="0">
+            <a:schemeClr val="accent1"/>
+          </a:effectRef>
+          <a:fontRef idx="minor">
+            <a:schemeClr val="lt1"/>
+          </a:fontRef>
+        </p:style>
+        <p:txBody>
+          <a:bodyPr rtlCol="0" anchor="ctr"/>
+          <a:lstStyle/>
+          <a:p>
+            <a:pPr algn="ctr"/>
+            <a:endParaRPr lang="en-US"/>
+          </a:p>
+        </p:txBody>
+      </p:sp>
+      <p:sp>
+        <p:nvSpPr>
+          <p:cNvPr id="16" name="Oval 15">
+            <a:extLst>
+              <a:ext uri="{FF2B5EF4-FFF2-40B4-BE49-F238E27FC236}">
+                <a16:creationId xmlns:a16="http://schemas.microsoft.com/office/drawing/2014/main" id="{BF75227F-3BDA-534D-AC82-AA532C3B808A}"/>
+              </a:ext>
+            </a:extLst>
+          </p:cNvPr>
+          <p:cNvSpPr/>
+          <p:nvPr/>
+        </p:nvSpPr>
+        <p:spPr>
+          <a:xfrm>
+            <a:off x="6524626" y="3014662"/>
+            <a:ext cx="314325" cy="314325"/>
+          </a:xfrm>
+          <a:prstGeom prst="ellipse">
+            <a:avLst/>
+          </a:prstGeom>
+          <a:solidFill>
+            <a:srgbClr val="FF00E5"/>
+          </a:solidFill>
+        </p:spPr>
+        <p:style>
+          <a:lnRef idx="2">
+            <a:schemeClr val="accent1">
+              <a:shade val="50000"/>
+            </a:schemeClr>
+          </a:lnRef>
+          <a:fillRef idx="1">
+            <a:schemeClr val="accent1"/>
+          </a:fillRef>
+          <a:effectRef idx="0">
+            <a:schemeClr val="accent1"/>
+          </a:effectRef>
+          <a:fontRef idx="minor">
+            <a:schemeClr val="lt1"/>
+          </a:fontRef>
+        </p:style>
+        <p:txBody>
+          <a:bodyPr rtlCol="0" anchor="ctr"/>
+          <a:lstStyle/>
+          <a:p>
+            <a:pPr algn="ctr"/>
+            <a:endParaRPr lang="en-US"/>
+          </a:p>
+        </p:txBody>
+      </p:sp>
+      <p:sp>
+        <p:nvSpPr>
+          <p:cNvPr id="17" name="Oval 16">
+            <a:extLst>
+              <a:ext uri="{FF2B5EF4-FFF2-40B4-BE49-F238E27FC236}">
+                <a16:creationId xmlns:a16="http://schemas.microsoft.com/office/drawing/2014/main" id="{AC9855B0-6DB2-1749-A1D4-4B1B81587D5F}"/>
+              </a:ext>
+            </a:extLst>
+          </p:cNvPr>
+          <p:cNvSpPr/>
+          <p:nvPr/>
+        </p:nvSpPr>
+        <p:spPr>
+          <a:xfrm>
+            <a:off x="7391401" y="3752849"/>
+            <a:ext cx="314325" cy="314325"/>
+          </a:xfrm>
+          <a:prstGeom prst="ellipse">
+            <a:avLst/>
+          </a:prstGeom>
+          <a:solidFill>
+            <a:srgbClr val="7030A0"/>
+          </a:solidFill>
+        </p:spPr>
+        <p:style>
+          <a:lnRef idx="2">
+            <a:schemeClr val="accent1">
+              <a:shade val="50000"/>
+            </a:schemeClr>
+          </a:lnRef>
+          <a:fillRef idx="1">
+            <a:schemeClr val="accent1"/>
+          </a:fillRef>
+          <a:effectRef idx="0">
+            <a:schemeClr val="accent1"/>
+          </a:effectRef>
+          <a:fontRef idx="minor">
+            <a:schemeClr val="lt1"/>
+          </a:fontRef>
+        </p:style>
+        <p:txBody>
+          <a:bodyPr rtlCol="0" anchor="ctr"/>
+          <a:lstStyle/>
+          <a:p>
+            <a:pPr algn="ctr"/>
+            <a:endParaRPr lang="en-US"/>
+          </a:p>
+        </p:txBody>
+      </p:sp>
+      <p:sp>
+        <p:nvSpPr>
+          <p:cNvPr id="18" name="Oval 17">
+            <a:extLst>
+              <a:ext uri="{FF2B5EF4-FFF2-40B4-BE49-F238E27FC236}">
+                <a16:creationId xmlns:a16="http://schemas.microsoft.com/office/drawing/2014/main" id="{19F5CB4E-153D-EF40-9DD1-4986310BA056}"/>
+              </a:ext>
+            </a:extLst>
+          </p:cNvPr>
+          <p:cNvSpPr/>
+          <p:nvPr/>
+        </p:nvSpPr>
+        <p:spPr>
+          <a:xfrm>
+            <a:off x="6510338" y="4410075"/>
+            <a:ext cx="314325" cy="314325"/>
+          </a:xfrm>
+          <a:prstGeom prst="ellipse">
+            <a:avLst/>
+          </a:prstGeom>
+          <a:solidFill>
+            <a:srgbClr val="FF0000"/>
+          </a:solidFill>
+        </p:spPr>
+        <p:style>
+          <a:lnRef idx="2">
+            <a:schemeClr val="accent1">
+              <a:shade val="50000"/>
+            </a:schemeClr>
+          </a:lnRef>
+          <a:fillRef idx="1">
+            <a:schemeClr val="accent1"/>
+          </a:fillRef>
+          <a:effectRef idx="0">
+            <a:schemeClr val="accent1"/>
+          </a:effectRef>
+          <a:fontRef idx="minor">
+            <a:schemeClr val="lt1"/>
+          </a:fontRef>
+        </p:style>
+        <p:txBody>
+          <a:bodyPr rtlCol="0" anchor="ctr"/>
+          <a:lstStyle/>
+          <a:p>
+            <a:pPr algn="ctr"/>
+            <a:endParaRPr lang="en-US"/>
+          </a:p>
+        </p:txBody>
+      </p:sp>
+      <p:sp>
+        <p:nvSpPr>
+          <p:cNvPr id="19" name="Oval 18">
+            <a:extLst>
+              <a:ext uri="{FF2B5EF4-FFF2-40B4-BE49-F238E27FC236}">
+                <a16:creationId xmlns:a16="http://schemas.microsoft.com/office/drawing/2014/main" id="{304877B3-DB5A-2E40-9762-5B3784FF014E}"/>
+              </a:ext>
+            </a:extLst>
+          </p:cNvPr>
+          <p:cNvSpPr/>
+          <p:nvPr/>
+        </p:nvSpPr>
+        <p:spPr>
+          <a:xfrm>
+            <a:off x="8648701" y="4567237"/>
+            <a:ext cx="314325" cy="314325"/>
+          </a:xfrm>
+          <a:prstGeom prst="ellipse">
+            <a:avLst/>
+          </a:prstGeom>
+          <a:solidFill>
+            <a:srgbClr val="FFFF00"/>
+          </a:solidFill>
+        </p:spPr>
+        <p:style>
+          <a:lnRef idx="2">
+            <a:schemeClr val="accent1">
+              <a:shade val="50000"/>
+            </a:schemeClr>
+          </a:lnRef>
+          <a:fillRef idx="1">
+            <a:schemeClr val="accent1"/>
+          </a:fillRef>
+          <a:effectRef idx="0">
+            <a:schemeClr val="accent1"/>
+          </a:effectRef>
+          <a:fontRef idx="minor">
+            <a:schemeClr val="lt1"/>
+          </a:fontRef>
+        </p:style>
+        <p:txBody>
+          <a:bodyPr rtlCol="0" anchor="ctr"/>
+          <a:lstStyle/>
+          <a:p>
+            <a:pPr algn="ctr"/>
+            <a:endParaRPr lang="en-US"/>
+          </a:p>
+        </p:txBody>
+      </p:sp>
+      <p:sp>
+        <p:nvSpPr>
+          <p:cNvPr id="20" name="Oval 19">
+            <a:extLst>
+              <a:ext uri="{FF2B5EF4-FFF2-40B4-BE49-F238E27FC236}">
+                <a16:creationId xmlns:a16="http://schemas.microsoft.com/office/drawing/2014/main" id="{E53C1F00-2970-264E-8F3C-13F5A89C374D}"/>
+              </a:ext>
+            </a:extLst>
+          </p:cNvPr>
+          <p:cNvSpPr/>
+          <p:nvPr/>
+        </p:nvSpPr>
+        <p:spPr>
+          <a:xfrm>
+            <a:off x="7391401" y="5186360"/>
+            <a:ext cx="314325" cy="314325"/>
+          </a:xfrm>
+          <a:prstGeom prst="ellipse">
+            <a:avLst/>
+          </a:prstGeom>
+          <a:solidFill>
+            <a:srgbClr val="FF00E5"/>
+          </a:solidFill>
+        </p:spPr>
+        <p:style>
+          <a:lnRef idx="2">
+            <a:schemeClr val="accent1">
+              <a:shade val="50000"/>
+            </a:schemeClr>
+          </a:lnRef>
+          <a:fillRef idx="1">
+            <a:schemeClr val="accent1"/>
+          </a:fillRef>
+          <a:effectRef idx="0">
+            <a:schemeClr val="accent1"/>
+          </a:effectRef>
+          <a:fontRef idx="minor">
+            <a:schemeClr val="lt1"/>
+          </a:fontRef>
+        </p:style>
+        <p:txBody>
+          <a:bodyPr rtlCol="0" anchor="ctr"/>
+          <a:lstStyle/>
+          <a:p>
+            <a:pPr algn="ctr"/>
+            <a:endParaRPr lang="en-US"/>
+          </a:p>
+        </p:txBody>
+      </p:sp>
+      <p:sp>
+        <p:nvSpPr>
+          <p:cNvPr id="21" name="Oval 20">
+            <a:extLst>
+              <a:ext uri="{FF2B5EF4-FFF2-40B4-BE49-F238E27FC236}">
+                <a16:creationId xmlns:a16="http://schemas.microsoft.com/office/drawing/2014/main" id="{CBE665D8-BD16-C443-A7DB-33C745F5F4C3}"/>
+              </a:ext>
+            </a:extLst>
+          </p:cNvPr>
+          <p:cNvSpPr/>
+          <p:nvPr/>
+        </p:nvSpPr>
+        <p:spPr>
+          <a:xfrm>
+            <a:off x="8334375" y="2800349"/>
+            <a:ext cx="314325" cy="314325"/>
+          </a:xfrm>
+          <a:prstGeom prst="ellipse">
+            <a:avLst/>
+          </a:prstGeom>
+          <a:solidFill>
+            <a:srgbClr val="00B0F0"/>
+          </a:solidFill>
+        </p:spPr>
+        <p:style>
+          <a:lnRef idx="2">
+            <a:schemeClr val="accent1">
+              <a:shade val="50000"/>
+            </a:schemeClr>
+          </a:lnRef>
+          <a:fillRef idx="1">
+            <a:schemeClr val="accent1"/>
+          </a:fillRef>
+          <a:effectRef idx="0">
+            <a:schemeClr val="accent1"/>
+          </a:effectRef>
+          <a:fontRef idx="minor">
+            <a:schemeClr val="lt1"/>
+          </a:fontRef>
+        </p:style>
+        <p:txBody>
+          <a:bodyPr rtlCol="0" anchor="ctr"/>
+          <a:lstStyle/>
+          <a:p>
+            <a:pPr algn="ctr"/>
+            <a:endParaRPr lang="en-US"/>
+          </a:p>
+        </p:txBody>
+      </p:sp>
+      <p:sp>
+        <p:nvSpPr>
+          <p:cNvPr id="22" name="Oval 21">
+            <a:extLst>
+              <a:ext uri="{FF2B5EF4-FFF2-40B4-BE49-F238E27FC236}">
+                <a16:creationId xmlns:a16="http://schemas.microsoft.com/office/drawing/2014/main" id="{8716A6E8-5194-1843-8740-7CFE1E71AC8C}"/>
+              </a:ext>
+            </a:extLst>
+          </p:cNvPr>
+          <p:cNvSpPr/>
+          <p:nvPr/>
+        </p:nvSpPr>
+        <p:spPr>
+          <a:xfrm>
+            <a:off x="7391400" y="3050382"/>
+            <a:ext cx="314325" cy="314325"/>
+          </a:xfrm>
+          <a:prstGeom prst="ellipse">
+            <a:avLst/>
+          </a:prstGeom>
+          <a:solidFill>
+            <a:srgbClr val="FFFF00"/>
+          </a:solidFill>
+        </p:spPr>
+        <p:style>
+          <a:lnRef idx="2">
+            <a:schemeClr val="accent1">
+              <a:shade val="50000"/>
+            </a:schemeClr>
+          </a:lnRef>
+          <a:fillRef idx="1">
+            <a:schemeClr val="accent1"/>
+          </a:fillRef>
+          <a:effectRef idx="0">
+            <a:schemeClr val="accent1"/>
+          </a:effectRef>
+          <a:fontRef idx="minor">
+            <a:schemeClr val="lt1"/>
+          </a:fontRef>
+        </p:style>
+        <p:txBody>
+          <a:bodyPr rtlCol="0" anchor="ctr"/>
+          <a:lstStyle/>
+          <a:p>
+            <a:pPr algn="ctr"/>
+            <a:endParaRPr lang="en-US"/>
+          </a:p>
+        </p:txBody>
+      </p:sp>
+      <p:sp>
+        <p:nvSpPr>
+          <p:cNvPr id="23" name="Oval 22">
+            <a:extLst>
+              <a:ext uri="{FF2B5EF4-FFF2-40B4-BE49-F238E27FC236}">
+                <a16:creationId xmlns:a16="http://schemas.microsoft.com/office/drawing/2014/main" id="{AC7232C0-D3C4-874D-B786-BB148BFF7049}"/>
+              </a:ext>
+            </a:extLst>
+          </p:cNvPr>
+          <p:cNvSpPr/>
+          <p:nvPr/>
+        </p:nvSpPr>
+        <p:spPr>
+          <a:xfrm>
+            <a:off x="7891464" y="4410074"/>
+            <a:ext cx="314325" cy="314325"/>
+          </a:xfrm>
+          <a:prstGeom prst="ellipse">
+            <a:avLst/>
+          </a:prstGeom>
+          <a:solidFill>
+            <a:srgbClr val="00B0F0"/>
+          </a:solidFill>
+        </p:spPr>
+        <p:style>
+          <a:lnRef idx="2">
+            <a:schemeClr val="accent1">
+              <a:shade val="50000"/>
+            </a:schemeClr>
+          </a:lnRef>
+          <a:fillRef idx="1">
+            <a:schemeClr val="accent1"/>
+          </a:fillRef>
+          <a:effectRef idx="0">
+            <a:schemeClr val="accent1"/>
+          </a:effectRef>
+          <a:fontRef idx="minor">
+            <a:schemeClr val="lt1"/>
+          </a:fontRef>
+        </p:style>
+        <p:txBody>
+          <a:bodyPr rtlCol="0" anchor="ctr"/>
+          <a:lstStyle/>
+          <a:p>
+            <a:pPr algn="ctr"/>
+            <a:endParaRPr lang="en-US"/>
+          </a:p>
+        </p:txBody>
+      </p:sp>
+      <p:sp>
+        <p:nvSpPr>
+          <p:cNvPr id="24" name="Oval 23">
+            <a:extLst>
+              <a:ext uri="{FF2B5EF4-FFF2-40B4-BE49-F238E27FC236}">
+                <a16:creationId xmlns:a16="http://schemas.microsoft.com/office/drawing/2014/main" id="{CFB75B72-7751-E244-927A-357FEE2AD292}"/>
+              </a:ext>
+            </a:extLst>
+          </p:cNvPr>
+          <p:cNvSpPr/>
+          <p:nvPr/>
+        </p:nvSpPr>
+        <p:spPr>
+          <a:xfrm>
+            <a:off x="8491538" y="3752848"/>
+            <a:ext cx="314325" cy="314325"/>
+          </a:xfrm>
+          <a:prstGeom prst="ellipse">
+            <a:avLst/>
+          </a:prstGeom>
+          <a:solidFill>
+            <a:srgbClr val="002060"/>
+          </a:solidFill>
+        </p:spPr>
+        <p:style>
+          <a:lnRef idx="2">
+            <a:schemeClr val="accent1">
+              <a:shade val="50000"/>
+            </a:schemeClr>
+          </a:lnRef>
+          <a:fillRef idx="1">
+            <a:schemeClr val="accent1"/>
+          </a:fillRef>
+          <a:effectRef idx="0">
+            <a:schemeClr val="accent1"/>
+          </a:effectRef>
+          <a:fontRef idx="minor">
+            <a:schemeClr val="lt1"/>
+          </a:fontRef>
+        </p:style>
+        <p:txBody>
+          <a:bodyPr rtlCol="0" anchor="ctr"/>
+          <a:lstStyle/>
+          <a:p>
+            <a:pPr algn="ctr"/>
+            <a:endParaRPr lang="en-US"/>
+          </a:p>
+        </p:txBody>
+      </p:sp>
+      <p:sp>
+        <p:nvSpPr>
+          <p:cNvPr id="25" name="Oval 24">
+            <a:extLst>
+              <a:ext uri="{FF2B5EF4-FFF2-40B4-BE49-F238E27FC236}">
+                <a16:creationId xmlns:a16="http://schemas.microsoft.com/office/drawing/2014/main" id="{5A90B763-4A6C-AE44-B10A-CAC54BEA55F6}"/>
+              </a:ext>
+            </a:extLst>
+          </p:cNvPr>
+          <p:cNvSpPr/>
+          <p:nvPr/>
+        </p:nvSpPr>
+        <p:spPr>
+          <a:xfrm>
+            <a:off x="7043738" y="4710111"/>
+            <a:ext cx="314325" cy="314325"/>
+          </a:xfrm>
+          <a:prstGeom prst="ellipse">
+            <a:avLst/>
+          </a:prstGeom>
+          <a:solidFill>
+            <a:srgbClr val="FFFF00"/>
+          </a:solidFill>
+        </p:spPr>
+        <p:style>
+          <a:lnRef idx="2">
+            <a:schemeClr val="accent1">
+              <a:shade val="50000"/>
+            </a:schemeClr>
+          </a:lnRef>
+          <a:fillRef idx="1">
+            <a:schemeClr val="accent1"/>
+          </a:fillRef>
+          <a:effectRef idx="0">
+            <a:schemeClr val="accent1"/>
+          </a:effectRef>
+          <a:fontRef idx="minor">
+            <a:schemeClr val="lt1"/>
+          </a:fontRef>
+        </p:style>
+        <p:txBody>
+          <a:bodyPr rtlCol="0" anchor="ctr"/>
+          <a:lstStyle/>
+          <a:p>
+            <a:pPr algn="ctr"/>
+            <a:endParaRPr lang="en-US"/>
+          </a:p>
+        </p:txBody>
+      </p:sp>
+      <p:sp>
+        <p:nvSpPr>
+          <p:cNvPr id="26" name="Oval 25">
+            <a:extLst>
+              <a:ext uri="{FF2B5EF4-FFF2-40B4-BE49-F238E27FC236}">
+                <a16:creationId xmlns:a16="http://schemas.microsoft.com/office/drawing/2014/main" id="{E608D13B-D12C-924F-8139-3E7E8F9E180F}"/>
+              </a:ext>
+            </a:extLst>
+          </p:cNvPr>
+          <p:cNvSpPr/>
+          <p:nvPr/>
+        </p:nvSpPr>
+        <p:spPr>
+          <a:xfrm>
+            <a:off x="6653212" y="3867149"/>
+            <a:ext cx="314325" cy="314325"/>
+          </a:xfrm>
+          <a:prstGeom prst="ellipse">
+            <a:avLst/>
+          </a:prstGeom>
+          <a:solidFill>
+            <a:srgbClr val="92D050"/>
+          </a:solidFill>
+        </p:spPr>
+        <p:style>
+          <a:lnRef idx="2">
+            <a:schemeClr val="accent1">
+              <a:shade val="50000"/>
+            </a:schemeClr>
+          </a:lnRef>
+          <a:fillRef idx="1">
+            <a:schemeClr val="accent1"/>
+          </a:fillRef>
+          <a:effectRef idx="0">
+            <a:schemeClr val="accent1"/>
+          </a:effectRef>
+          <a:fontRef idx="minor">
+            <a:schemeClr val="lt1"/>
+          </a:fontRef>
+        </p:style>
+        <p:txBody>
+          <a:bodyPr rtlCol="0" anchor="ctr"/>
+          <a:lstStyle/>
+          <a:p>
+            <a:pPr algn="ctr"/>
+            <a:endParaRPr lang="en-US"/>
+          </a:p>
+        </p:txBody>
+      </p:sp>
+      <p:sp>
+        <p:nvSpPr>
+          <p:cNvPr id="27" name="Oval 26">
+            <a:extLst>
+              <a:ext uri="{FF2B5EF4-FFF2-40B4-BE49-F238E27FC236}">
+                <a16:creationId xmlns:a16="http://schemas.microsoft.com/office/drawing/2014/main" id="{6549C0F0-8986-694D-A0BD-8647118E99FE}"/>
+              </a:ext>
+            </a:extLst>
+          </p:cNvPr>
+          <p:cNvSpPr/>
+          <p:nvPr/>
+        </p:nvSpPr>
+        <p:spPr>
+          <a:xfrm>
+            <a:off x="7891463" y="3378993"/>
+            <a:ext cx="314325" cy="314325"/>
+          </a:xfrm>
+          <a:prstGeom prst="ellipse">
+            <a:avLst/>
+          </a:prstGeom>
+          <a:solidFill>
+            <a:srgbClr val="FFC000"/>
+          </a:solidFill>
+        </p:spPr>
+        <p:style>
+          <a:lnRef idx="2">
+            <a:schemeClr val="accent1">
+              <a:shade val="50000"/>
+            </a:schemeClr>
+          </a:lnRef>
+          <a:fillRef idx="1">
+            <a:schemeClr val="accent1"/>
+          </a:fillRef>
+          <a:effectRef idx="0">
+            <a:schemeClr val="accent1"/>
+          </a:effectRef>
+          <a:fontRef idx="minor">
+            <a:schemeClr val="lt1"/>
+          </a:fontRef>
+        </p:style>
+        <p:txBody>
+          <a:bodyPr rtlCol="0" anchor="ctr"/>
+          <a:lstStyle/>
+          <a:p>
+            <a:pPr algn="ctr"/>
+            <a:endParaRPr lang="en-US"/>
+          </a:p>
+        </p:txBody>
+      </p:sp>
+      <p:sp>
+        <p:nvSpPr>
+          <p:cNvPr id="28" name="TextBox 27">
+            <a:extLst>
+              <a:ext uri="{FF2B5EF4-FFF2-40B4-BE49-F238E27FC236}">
+                <a16:creationId xmlns:a16="http://schemas.microsoft.com/office/drawing/2014/main" id="{EA335B55-8B52-5644-A550-2710A16DB226}"/>
+              </a:ext>
+            </a:extLst>
+          </p:cNvPr>
+          <p:cNvSpPr txBox="1"/>
+          <p:nvPr/>
+        </p:nvSpPr>
+        <p:spPr>
+          <a:xfrm>
+            <a:off x="2717006" y="1991378"/>
+            <a:ext cx="2164558" cy="523220"/>
+          </a:xfrm>
+          <a:prstGeom prst="rect">
+            <a:avLst/>
+          </a:prstGeom>
+          <a:noFill/>
+        </p:spPr>
+        <p:txBody>
+          <a:bodyPr wrap="square" rtlCol="0">
+            <a:spAutoFit/>
+          </a:bodyPr>
+          <a:lstStyle/>
+          <a:p>
+            <a:r>
+              <a:rPr lang="en-US" sz="2800" dirty="0"/>
+              <a:t>Community 1</a:t>
+            </a:r>
+          </a:p>
+        </p:txBody>
+      </p:sp>
+      <p:sp>
+        <p:nvSpPr>
+          <p:cNvPr id="29" name="TextBox 28">
+            <a:extLst>
+              <a:ext uri="{FF2B5EF4-FFF2-40B4-BE49-F238E27FC236}">
+                <a16:creationId xmlns:a16="http://schemas.microsoft.com/office/drawing/2014/main" id="{BC52BB93-C1D8-A04D-98AA-48CAD4AC9990}"/>
+              </a:ext>
+            </a:extLst>
+          </p:cNvPr>
+          <p:cNvSpPr txBox="1"/>
+          <p:nvPr/>
+        </p:nvSpPr>
+        <p:spPr>
+          <a:xfrm>
+            <a:off x="6667500" y="2015520"/>
+            <a:ext cx="2164558" cy="523220"/>
+          </a:xfrm>
+          <a:prstGeom prst="rect">
+            <a:avLst/>
+          </a:prstGeom>
+          <a:noFill/>
+        </p:spPr>
+        <p:txBody>
+          <a:bodyPr wrap="square" rtlCol="0">
+            <a:spAutoFit/>
+          </a:bodyPr>
+          <a:lstStyle/>
+          <a:p>
+            <a:r>
+              <a:rPr lang="en-US" sz="2800" dirty="0"/>
+              <a:t>Community 2</a:t>
+            </a:r>
+          </a:p>
+        </p:txBody>
+      </p:sp>
+    </p:spTree>
+    <p:extLst>
+      <p:ext uri="{BB962C8B-B14F-4D97-AF65-F5344CB8AC3E}">
+        <p14:creationId xmlns:p14="http://schemas.microsoft.com/office/powerpoint/2010/main" val="3055002149"/>
+      </p:ext>
+    </p:extLst>
+  </p:cSld>
+  <p:clrMapOvr>
+    <a:masterClrMapping/>
+  </p:clrMapOvr>
+</p:sld>
+</file>
+
+<file path=ppt/slides/slide20.xml><?xml version="1.0" encoding="utf-8"?>
 <p:sld xmlns:a="http://schemas.openxmlformats.org/drawingml/2006/main" xmlns:r="http://schemas.openxmlformats.org/officeDocument/2006/relationships" xmlns:p="http://schemas.openxmlformats.org/presentationml/2006/main">
   <p:cSld>
     <p:spTree>
@@ -34250,7 +36134,7 @@
 </p:sld>
 </file>
 
-<file path=ppt/slides/slide18.xml><?xml version="1.0" encoding="utf-8"?>
+<file path=ppt/slides/slide21.xml><?xml version="1.0" encoding="utf-8"?>
 <p:sld xmlns:a="http://schemas.openxmlformats.org/drawingml/2006/main" xmlns:r="http://schemas.openxmlformats.org/officeDocument/2006/relationships" xmlns:p="http://schemas.openxmlformats.org/presentationml/2006/main">
   <p:cSld>
     <p:spTree>
@@ -34518,7 +36402,7 @@
 </p:sld>
 </file>
 
-<file path=ppt/slides/slide19.xml><?xml version="1.0" encoding="utf-8"?>
+<file path=ppt/slides/slide22.xml><?xml version="1.0" encoding="utf-8"?>
 <p:sld xmlns:a="http://schemas.openxmlformats.org/drawingml/2006/main" xmlns:r="http://schemas.openxmlformats.org/officeDocument/2006/relationships" xmlns:p="http://schemas.openxmlformats.org/presentationml/2006/main">
   <p:cSld>
     <p:spTree>
@@ -35006,1295 +36890,7 @@
 </p:sld>
 </file>
 
-<file path=ppt/slides/slide2.xml><?xml version="1.0" encoding="utf-8"?>
-<p:sld xmlns:a="http://schemas.openxmlformats.org/drawingml/2006/main" xmlns:r="http://schemas.openxmlformats.org/officeDocument/2006/relationships" xmlns:p="http://schemas.openxmlformats.org/presentationml/2006/main">
-  <p:cSld>
-    <p:spTree>
-      <p:nvGrpSpPr>
-        <p:cNvPr id="1" name=""/>
-        <p:cNvGrpSpPr/>
-        <p:nvPr/>
-      </p:nvGrpSpPr>
-      <p:grpSpPr>
-        <a:xfrm>
-          <a:off x="0" y="0"/>
-          <a:ext cx="0" cy="0"/>
-          <a:chOff x="0" y="0"/>
-          <a:chExt cx="0" cy="0"/>
-        </a:xfrm>
-      </p:grpSpPr>
-      <p:sp>
-        <p:nvSpPr>
-          <p:cNvPr id="2" name="Title 1">
-            <a:extLst>
-              <a:ext uri="{FF2B5EF4-FFF2-40B4-BE49-F238E27FC236}">
-                <a16:creationId xmlns:a16="http://schemas.microsoft.com/office/drawing/2014/main" id="{122A31DA-B431-C54A-874F-C1236B9B36B8}"/>
-              </a:ext>
-            </a:extLst>
-          </p:cNvPr>
-          <p:cNvSpPr>
-            <a:spLocks noGrp="1"/>
-          </p:cNvSpPr>
-          <p:nvPr>
-            <p:ph type="title"/>
-          </p:nvPr>
-        </p:nvSpPr>
-        <p:spPr/>
-        <p:txBody>
-          <a:bodyPr/>
-          <a:lstStyle/>
-          <a:p>
-            <a:r>
-              <a:rPr lang="en-US" dirty="0"/>
-              <a:t>Why are they different? Why should we care?</a:t>
-            </a:r>
-          </a:p>
-        </p:txBody>
-      </p:sp>
-      <p:sp>
-        <p:nvSpPr>
-          <p:cNvPr id="4" name="Oval 3">
-            <a:extLst>
-              <a:ext uri="{FF2B5EF4-FFF2-40B4-BE49-F238E27FC236}">
-                <a16:creationId xmlns:a16="http://schemas.microsoft.com/office/drawing/2014/main" id="{4075A81A-7D11-9448-BF36-6D732E7F151C}"/>
-              </a:ext>
-            </a:extLst>
-          </p:cNvPr>
-          <p:cNvSpPr/>
-          <p:nvPr/>
-        </p:nvSpPr>
-        <p:spPr>
-          <a:xfrm>
-            <a:off x="2600326" y="3014662"/>
-            <a:ext cx="314325" cy="314325"/>
-          </a:xfrm>
-          <a:prstGeom prst="ellipse">
-            <a:avLst/>
-          </a:prstGeom>
-        </p:spPr>
-        <p:style>
-          <a:lnRef idx="2">
-            <a:schemeClr val="accent1">
-              <a:shade val="50000"/>
-            </a:schemeClr>
-          </a:lnRef>
-          <a:fillRef idx="1">
-            <a:schemeClr val="accent1"/>
-          </a:fillRef>
-          <a:effectRef idx="0">
-            <a:schemeClr val="accent1"/>
-          </a:effectRef>
-          <a:fontRef idx="minor">
-            <a:schemeClr val="lt1"/>
-          </a:fontRef>
-        </p:style>
-        <p:txBody>
-          <a:bodyPr rtlCol="0" anchor="ctr"/>
-          <a:lstStyle/>
-          <a:p>
-            <a:pPr algn="ctr"/>
-            <a:endParaRPr lang="en-US"/>
-          </a:p>
-        </p:txBody>
-      </p:sp>
-      <p:sp>
-        <p:nvSpPr>
-          <p:cNvPr id="5" name="Oval 4">
-            <a:extLst>
-              <a:ext uri="{FF2B5EF4-FFF2-40B4-BE49-F238E27FC236}">
-                <a16:creationId xmlns:a16="http://schemas.microsoft.com/office/drawing/2014/main" id="{E4516562-A1F7-4A44-B228-68531F4F81E8}"/>
-              </a:ext>
-            </a:extLst>
-          </p:cNvPr>
-          <p:cNvSpPr/>
-          <p:nvPr/>
-        </p:nvSpPr>
-        <p:spPr>
-          <a:xfrm>
-            <a:off x="3467101" y="3752849"/>
-            <a:ext cx="314325" cy="314325"/>
-          </a:xfrm>
-          <a:prstGeom prst="ellipse">
-            <a:avLst/>
-          </a:prstGeom>
-        </p:spPr>
-        <p:style>
-          <a:lnRef idx="2">
-            <a:schemeClr val="accent1">
-              <a:shade val="50000"/>
-            </a:schemeClr>
-          </a:lnRef>
-          <a:fillRef idx="1">
-            <a:schemeClr val="accent1"/>
-          </a:fillRef>
-          <a:effectRef idx="0">
-            <a:schemeClr val="accent1"/>
-          </a:effectRef>
-          <a:fontRef idx="minor">
-            <a:schemeClr val="lt1"/>
-          </a:fontRef>
-        </p:style>
-        <p:txBody>
-          <a:bodyPr rtlCol="0" anchor="ctr"/>
-          <a:lstStyle/>
-          <a:p>
-            <a:pPr algn="ctr"/>
-            <a:endParaRPr lang="en-US"/>
-          </a:p>
-        </p:txBody>
-      </p:sp>
-      <p:sp>
-        <p:nvSpPr>
-          <p:cNvPr id="6" name="Oval 5">
-            <a:extLst>
-              <a:ext uri="{FF2B5EF4-FFF2-40B4-BE49-F238E27FC236}">
-                <a16:creationId xmlns:a16="http://schemas.microsoft.com/office/drawing/2014/main" id="{1ABEA4FE-AD89-454B-989F-A777676B2DAB}"/>
-              </a:ext>
-            </a:extLst>
-          </p:cNvPr>
-          <p:cNvSpPr/>
-          <p:nvPr/>
-        </p:nvSpPr>
-        <p:spPr>
-          <a:xfrm>
-            <a:off x="2586038" y="4410075"/>
-            <a:ext cx="314325" cy="314325"/>
-          </a:xfrm>
-          <a:prstGeom prst="ellipse">
-            <a:avLst/>
-          </a:prstGeom>
-          <a:solidFill>
-            <a:srgbClr val="92D050"/>
-          </a:solidFill>
-        </p:spPr>
-        <p:style>
-          <a:lnRef idx="2">
-            <a:schemeClr val="accent1">
-              <a:shade val="50000"/>
-            </a:schemeClr>
-          </a:lnRef>
-          <a:fillRef idx="1">
-            <a:schemeClr val="accent1"/>
-          </a:fillRef>
-          <a:effectRef idx="0">
-            <a:schemeClr val="accent1"/>
-          </a:effectRef>
-          <a:fontRef idx="minor">
-            <a:schemeClr val="lt1"/>
-          </a:fontRef>
-        </p:style>
-        <p:txBody>
-          <a:bodyPr rtlCol="0" anchor="ctr"/>
-          <a:lstStyle/>
-          <a:p>
-            <a:pPr algn="ctr"/>
-            <a:endParaRPr lang="en-US"/>
-          </a:p>
-        </p:txBody>
-      </p:sp>
-      <p:sp>
-        <p:nvSpPr>
-          <p:cNvPr id="7" name="Oval 6">
-            <a:extLst>
-              <a:ext uri="{FF2B5EF4-FFF2-40B4-BE49-F238E27FC236}">
-                <a16:creationId xmlns:a16="http://schemas.microsoft.com/office/drawing/2014/main" id="{4E83A67A-C00A-B342-BE75-24729CD2D02F}"/>
-              </a:ext>
-            </a:extLst>
-          </p:cNvPr>
-          <p:cNvSpPr/>
-          <p:nvPr/>
-        </p:nvSpPr>
-        <p:spPr>
-          <a:xfrm>
-            <a:off x="4724401" y="4567237"/>
-            <a:ext cx="314325" cy="314325"/>
-          </a:xfrm>
-          <a:prstGeom prst="ellipse">
-            <a:avLst/>
-          </a:prstGeom>
-        </p:spPr>
-        <p:style>
-          <a:lnRef idx="2">
-            <a:schemeClr val="accent1">
-              <a:shade val="50000"/>
-            </a:schemeClr>
-          </a:lnRef>
-          <a:fillRef idx="1">
-            <a:schemeClr val="accent1"/>
-          </a:fillRef>
-          <a:effectRef idx="0">
-            <a:schemeClr val="accent1"/>
-          </a:effectRef>
-          <a:fontRef idx="minor">
-            <a:schemeClr val="lt1"/>
-          </a:fontRef>
-        </p:style>
-        <p:txBody>
-          <a:bodyPr rtlCol="0" anchor="ctr"/>
-          <a:lstStyle/>
-          <a:p>
-            <a:pPr algn="ctr"/>
-            <a:endParaRPr lang="en-US"/>
-          </a:p>
-        </p:txBody>
-      </p:sp>
-      <p:sp>
-        <p:nvSpPr>
-          <p:cNvPr id="8" name="Oval 7">
-            <a:extLst>
-              <a:ext uri="{FF2B5EF4-FFF2-40B4-BE49-F238E27FC236}">
-                <a16:creationId xmlns:a16="http://schemas.microsoft.com/office/drawing/2014/main" id="{6F55F405-3566-B348-BF65-58C69A1A867A}"/>
-              </a:ext>
-            </a:extLst>
-          </p:cNvPr>
-          <p:cNvSpPr/>
-          <p:nvPr/>
-        </p:nvSpPr>
-        <p:spPr>
-          <a:xfrm>
-            <a:off x="3467101" y="5186360"/>
-            <a:ext cx="314325" cy="314325"/>
-          </a:xfrm>
-          <a:prstGeom prst="ellipse">
-            <a:avLst/>
-          </a:prstGeom>
-          <a:solidFill>
-            <a:srgbClr val="FFC000"/>
-          </a:solidFill>
-        </p:spPr>
-        <p:style>
-          <a:lnRef idx="2">
-            <a:schemeClr val="accent1">
-              <a:shade val="50000"/>
-            </a:schemeClr>
-          </a:lnRef>
-          <a:fillRef idx="1">
-            <a:schemeClr val="accent1"/>
-          </a:fillRef>
-          <a:effectRef idx="0">
-            <a:schemeClr val="accent1"/>
-          </a:effectRef>
-          <a:fontRef idx="minor">
-            <a:schemeClr val="lt1"/>
-          </a:fontRef>
-        </p:style>
-        <p:txBody>
-          <a:bodyPr rtlCol="0" anchor="ctr"/>
-          <a:lstStyle/>
-          <a:p>
-            <a:pPr algn="ctr"/>
-            <a:endParaRPr lang="en-US"/>
-          </a:p>
-        </p:txBody>
-      </p:sp>
-      <p:sp>
-        <p:nvSpPr>
-          <p:cNvPr id="9" name="Oval 8">
-            <a:extLst>
-              <a:ext uri="{FF2B5EF4-FFF2-40B4-BE49-F238E27FC236}">
-                <a16:creationId xmlns:a16="http://schemas.microsoft.com/office/drawing/2014/main" id="{EDD5ABE0-00B9-DD40-8C3A-A0CB5719BCBA}"/>
-              </a:ext>
-            </a:extLst>
-          </p:cNvPr>
-          <p:cNvSpPr/>
-          <p:nvPr/>
-        </p:nvSpPr>
-        <p:spPr>
-          <a:xfrm>
-            <a:off x="4410075" y="2800349"/>
-            <a:ext cx="314325" cy="314325"/>
-          </a:xfrm>
-          <a:prstGeom prst="ellipse">
-            <a:avLst/>
-          </a:prstGeom>
-          <a:solidFill>
-            <a:srgbClr val="FF0000"/>
-          </a:solidFill>
-        </p:spPr>
-        <p:style>
-          <a:lnRef idx="2">
-            <a:schemeClr val="accent1">
-              <a:shade val="50000"/>
-            </a:schemeClr>
-          </a:lnRef>
-          <a:fillRef idx="1">
-            <a:schemeClr val="accent1"/>
-          </a:fillRef>
-          <a:effectRef idx="0">
-            <a:schemeClr val="accent1"/>
-          </a:effectRef>
-          <a:fontRef idx="minor">
-            <a:schemeClr val="lt1"/>
-          </a:fontRef>
-        </p:style>
-        <p:txBody>
-          <a:bodyPr rtlCol="0" anchor="ctr"/>
-          <a:lstStyle/>
-          <a:p>
-            <a:pPr algn="ctr"/>
-            <a:endParaRPr lang="en-US"/>
-          </a:p>
-        </p:txBody>
-      </p:sp>
-      <p:sp>
-        <p:nvSpPr>
-          <p:cNvPr id="10" name="Oval 9">
-            <a:extLst>
-              <a:ext uri="{FF2B5EF4-FFF2-40B4-BE49-F238E27FC236}">
-                <a16:creationId xmlns:a16="http://schemas.microsoft.com/office/drawing/2014/main" id="{B26DB84F-E78D-2A48-A3F2-63B628D47B3F}"/>
-              </a:ext>
-            </a:extLst>
-          </p:cNvPr>
-          <p:cNvSpPr/>
-          <p:nvPr/>
-        </p:nvSpPr>
-        <p:spPr>
-          <a:xfrm>
-            <a:off x="3467100" y="3050382"/>
-            <a:ext cx="314325" cy="314325"/>
-          </a:xfrm>
-          <a:prstGeom prst="ellipse">
-            <a:avLst/>
-          </a:prstGeom>
-          <a:solidFill>
-            <a:srgbClr val="92D050"/>
-          </a:solidFill>
-          <a:ln>
-            <a:solidFill>
-              <a:schemeClr val="accent1"/>
-            </a:solidFill>
-          </a:ln>
-        </p:spPr>
-        <p:style>
-          <a:lnRef idx="2">
-            <a:schemeClr val="accent1">
-              <a:shade val="50000"/>
-            </a:schemeClr>
-          </a:lnRef>
-          <a:fillRef idx="1">
-            <a:schemeClr val="accent1"/>
-          </a:fillRef>
-          <a:effectRef idx="0">
-            <a:schemeClr val="accent1"/>
-          </a:effectRef>
-          <a:fontRef idx="minor">
-            <a:schemeClr val="lt1"/>
-          </a:fontRef>
-        </p:style>
-        <p:txBody>
-          <a:bodyPr rtlCol="0" anchor="ctr"/>
-          <a:lstStyle/>
-          <a:p>
-            <a:pPr algn="ctr"/>
-            <a:endParaRPr lang="en-US"/>
-          </a:p>
-        </p:txBody>
-      </p:sp>
-      <p:sp>
-        <p:nvSpPr>
-          <p:cNvPr id="11" name="Oval 10">
-            <a:extLst>
-              <a:ext uri="{FF2B5EF4-FFF2-40B4-BE49-F238E27FC236}">
-                <a16:creationId xmlns:a16="http://schemas.microsoft.com/office/drawing/2014/main" id="{DC502950-677E-3049-990E-AEC7AF21DD01}"/>
-              </a:ext>
-            </a:extLst>
-          </p:cNvPr>
-          <p:cNvSpPr/>
-          <p:nvPr/>
-        </p:nvSpPr>
-        <p:spPr>
-          <a:xfrm>
-            <a:off x="3967164" y="4410074"/>
-            <a:ext cx="314325" cy="314325"/>
-          </a:xfrm>
-          <a:prstGeom prst="ellipse">
-            <a:avLst/>
-          </a:prstGeom>
-          <a:solidFill>
-            <a:srgbClr val="92D050"/>
-          </a:solidFill>
-        </p:spPr>
-        <p:style>
-          <a:lnRef idx="2">
-            <a:schemeClr val="accent1">
-              <a:shade val="50000"/>
-            </a:schemeClr>
-          </a:lnRef>
-          <a:fillRef idx="1">
-            <a:schemeClr val="accent1"/>
-          </a:fillRef>
-          <a:effectRef idx="0">
-            <a:schemeClr val="accent1"/>
-          </a:effectRef>
-          <a:fontRef idx="minor">
-            <a:schemeClr val="lt1"/>
-          </a:fontRef>
-        </p:style>
-        <p:txBody>
-          <a:bodyPr rtlCol="0" anchor="ctr"/>
-          <a:lstStyle/>
-          <a:p>
-            <a:pPr algn="ctr"/>
-            <a:endParaRPr lang="en-US"/>
-          </a:p>
-        </p:txBody>
-      </p:sp>
-      <p:sp>
-        <p:nvSpPr>
-          <p:cNvPr id="12" name="Oval 11">
-            <a:extLst>
-              <a:ext uri="{FF2B5EF4-FFF2-40B4-BE49-F238E27FC236}">
-                <a16:creationId xmlns:a16="http://schemas.microsoft.com/office/drawing/2014/main" id="{45A94771-F505-D14F-B441-07C73CD0D66B}"/>
-              </a:ext>
-            </a:extLst>
-          </p:cNvPr>
-          <p:cNvSpPr/>
-          <p:nvPr/>
-        </p:nvSpPr>
-        <p:spPr>
-          <a:xfrm>
-            <a:off x="4567238" y="3752848"/>
-            <a:ext cx="314325" cy="314325"/>
-          </a:xfrm>
-          <a:prstGeom prst="ellipse">
-            <a:avLst/>
-          </a:prstGeom>
-        </p:spPr>
-        <p:style>
-          <a:lnRef idx="2">
-            <a:schemeClr val="accent1">
-              <a:shade val="50000"/>
-            </a:schemeClr>
-          </a:lnRef>
-          <a:fillRef idx="1">
-            <a:schemeClr val="accent1"/>
-          </a:fillRef>
-          <a:effectRef idx="0">
-            <a:schemeClr val="accent1"/>
-          </a:effectRef>
-          <a:fontRef idx="minor">
-            <a:schemeClr val="lt1"/>
-          </a:fontRef>
-        </p:style>
-        <p:txBody>
-          <a:bodyPr rtlCol="0" anchor="ctr"/>
-          <a:lstStyle/>
-          <a:p>
-            <a:pPr algn="ctr"/>
-            <a:endParaRPr lang="en-US"/>
-          </a:p>
-        </p:txBody>
-      </p:sp>
-      <p:sp>
-        <p:nvSpPr>
-          <p:cNvPr id="13" name="Oval 12">
-            <a:extLst>
-              <a:ext uri="{FF2B5EF4-FFF2-40B4-BE49-F238E27FC236}">
-                <a16:creationId xmlns:a16="http://schemas.microsoft.com/office/drawing/2014/main" id="{A3A575E6-7D11-6844-B659-F1F931279368}"/>
-              </a:ext>
-            </a:extLst>
-          </p:cNvPr>
-          <p:cNvSpPr/>
-          <p:nvPr/>
-        </p:nvSpPr>
-        <p:spPr>
-          <a:xfrm>
-            <a:off x="3119438" y="4710111"/>
-            <a:ext cx="314325" cy="314325"/>
-          </a:xfrm>
-          <a:prstGeom prst="ellipse">
-            <a:avLst/>
-          </a:prstGeom>
-        </p:spPr>
-        <p:style>
-          <a:lnRef idx="2">
-            <a:schemeClr val="accent1">
-              <a:shade val="50000"/>
-            </a:schemeClr>
-          </a:lnRef>
-          <a:fillRef idx="1">
-            <a:schemeClr val="accent1"/>
-          </a:fillRef>
-          <a:effectRef idx="0">
-            <a:schemeClr val="accent1"/>
-          </a:effectRef>
-          <a:fontRef idx="minor">
-            <a:schemeClr val="lt1"/>
-          </a:fontRef>
-        </p:style>
-        <p:txBody>
-          <a:bodyPr rtlCol="0" anchor="ctr"/>
-          <a:lstStyle/>
-          <a:p>
-            <a:pPr algn="ctr"/>
-            <a:endParaRPr lang="en-US"/>
-          </a:p>
-        </p:txBody>
-      </p:sp>
-      <p:sp>
-        <p:nvSpPr>
-          <p:cNvPr id="14" name="Oval 13">
-            <a:extLst>
-              <a:ext uri="{FF2B5EF4-FFF2-40B4-BE49-F238E27FC236}">
-                <a16:creationId xmlns:a16="http://schemas.microsoft.com/office/drawing/2014/main" id="{1D5E120C-A984-764E-B4EF-AA70BC53CD10}"/>
-              </a:ext>
-            </a:extLst>
-          </p:cNvPr>
-          <p:cNvSpPr/>
-          <p:nvPr/>
-        </p:nvSpPr>
-        <p:spPr>
-          <a:xfrm>
-            <a:off x="2728912" y="3867149"/>
-            <a:ext cx="314325" cy="314325"/>
-          </a:xfrm>
-          <a:prstGeom prst="ellipse">
-            <a:avLst/>
-          </a:prstGeom>
-        </p:spPr>
-        <p:style>
-          <a:lnRef idx="2">
-            <a:schemeClr val="accent1">
-              <a:shade val="50000"/>
-            </a:schemeClr>
-          </a:lnRef>
-          <a:fillRef idx="1">
-            <a:schemeClr val="accent1"/>
-          </a:fillRef>
-          <a:effectRef idx="0">
-            <a:schemeClr val="accent1"/>
-          </a:effectRef>
-          <a:fontRef idx="minor">
-            <a:schemeClr val="lt1"/>
-          </a:fontRef>
-        </p:style>
-        <p:txBody>
-          <a:bodyPr rtlCol="0" anchor="ctr"/>
-          <a:lstStyle/>
-          <a:p>
-            <a:pPr algn="ctr"/>
-            <a:endParaRPr lang="en-US"/>
-          </a:p>
-        </p:txBody>
-      </p:sp>
-      <p:sp>
-        <p:nvSpPr>
-          <p:cNvPr id="15" name="Oval 14">
-            <a:extLst>
-              <a:ext uri="{FF2B5EF4-FFF2-40B4-BE49-F238E27FC236}">
-                <a16:creationId xmlns:a16="http://schemas.microsoft.com/office/drawing/2014/main" id="{F4679495-EAA4-F64B-8588-1E9DEA49D4C8}"/>
-              </a:ext>
-            </a:extLst>
-          </p:cNvPr>
-          <p:cNvSpPr/>
-          <p:nvPr/>
-        </p:nvSpPr>
-        <p:spPr>
-          <a:xfrm>
-            <a:off x="3967163" y="3378993"/>
-            <a:ext cx="314325" cy="314325"/>
-          </a:xfrm>
-          <a:prstGeom prst="ellipse">
-            <a:avLst/>
-          </a:prstGeom>
-        </p:spPr>
-        <p:style>
-          <a:lnRef idx="2">
-            <a:schemeClr val="accent1">
-              <a:shade val="50000"/>
-            </a:schemeClr>
-          </a:lnRef>
-          <a:fillRef idx="1">
-            <a:schemeClr val="accent1"/>
-          </a:fillRef>
-          <a:effectRef idx="0">
-            <a:schemeClr val="accent1"/>
-          </a:effectRef>
-          <a:fontRef idx="minor">
-            <a:schemeClr val="lt1"/>
-          </a:fontRef>
-        </p:style>
-        <p:txBody>
-          <a:bodyPr rtlCol="0" anchor="ctr"/>
-          <a:lstStyle/>
-          <a:p>
-            <a:pPr algn="ctr"/>
-            <a:endParaRPr lang="en-US"/>
-          </a:p>
-        </p:txBody>
-      </p:sp>
-      <p:sp>
-        <p:nvSpPr>
-          <p:cNvPr id="16" name="Oval 15">
-            <a:extLst>
-              <a:ext uri="{FF2B5EF4-FFF2-40B4-BE49-F238E27FC236}">
-                <a16:creationId xmlns:a16="http://schemas.microsoft.com/office/drawing/2014/main" id="{BF75227F-3BDA-534D-AC82-AA532C3B808A}"/>
-              </a:ext>
-            </a:extLst>
-          </p:cNvPr>
-          <p:cNvSpPr/>
-          <p:nvPr/>
-        </p:nvSpPr>
-        <p:spPr>
-          <a:xfrm>
-            <a:off x="6524626" y="3014662"/>
-            <a:ext cx="314325" cy="314325"/>
-          </a:xfrm>
-          <a:prstGeom prst="ellipse">
-            <a:avLst/>
-          </a:prstGeom>
-          <a:solidFill>
-            <a:srgbClr val="FF00E5"/>
-          </a:solidFill>
-        </p:spPr>
-        <p:style>
-          <a:lnRef idx="2">
-            <a:schemeClr val="accent1">
-              <a:shade val="50000"/>
-            </a:schemeClr>
-          </a:lnRef>
-          <a:fillRef idx="1">
-            <a:schemeClr val="accent1"/>
-          </a:fillRef>
-          <a:effectRef idx="0">
-            <a:schemeClr val="accent1"/>
-          </a:effectRef>
-          <a:fontRef idx="minor">
-            <a:schemeClr val="lt1"/>
-          </a:fontRef>
-        </p:style>
-        <p:txBody>
-          <a:bodyPr rtlCol="0" anchor="ctr"/>
-          <a:lstStyle/>
-          <a:p>
-            <a:pPr algn="ctr"/>
-            <a:endParaRPr lang="en-US"/>
-          </a:p>
-        </p:txBody>
-      </p:sp>
-      <p:sp>
-        <p:nvSpPr>
-          <p:cNvPr id="17" name="Oval 16">
-            <a:extLst>
-              <a:ext uri="{FF2B5EF4-FFF2-40B4-BE49-F238E27FC236}">
-                <a16:creationId xmlns:a16="http://schemas.microsoft.com/office/drawing/2014/main" id="{AC9855B0-6DB2-1749-A1D4-4B1B81587D5F}"/>
-              </a:ext>
-            </a:extLst>
-          </p:cNvPr>
-          <p:cNvSpPr/>
-          <p:nvPr/>
-        </p:nvSpPr>
-        <p:spPr>
-          <a:xfrm>
-            <a:off x="7391401" y="3752849"/>
-            <a:ext cx="314325" cy="314325"/>
-          </a:xfrm>
-          <a:prstGeom prst="ellipse">
-            <a:avLst/>
-          </a:prstGeom>
-          <a:solidFill>
-            <a:srgbClr val="7030A0"/>
-          </a:solidFill>
-        </p:spPr>
-        <p:style>
-          <a:lnRef idx="2">
-            <a:schemeClr val="accent1">
-              <a:shade val="50000"/>
-            </a:schemeClr>
-          </a:lnRef>
-          <a:fillRef idx="1">
-            <a:schemeClr val="accent1"/>
-          </a:fillRef>
-          <a:effectRef idx="0">
-            <a:schemeClr val="accent1"/>
-          </a:effectRef>
-          <a:fontRef idx="minor">
-            <a:schemeClr val="lt1"/>
-          </a:fontRef>
-        </p:style>
-        <p:txBody>
-          <a:bodyPr rtlCol="0" anchor="ctr"/>
-          <a:lstStyle/>
-          <a:p>
-            <a:pPr algn="ctr"/>
-            <a:endParaRPr lang="en-US"/>
-          </a:p>
-        </p:txBody>
-      </p:sp>
-      <p:sp>
-        <p:nvSpPr>
-          <p:cNvPr id="18" name="Oval 17">
-            <a:extLst>
-              <a:ext uri="{FF2B5EF4-FFF2-40B4-BE49-F238E27FC236}">
-                <a16:creationId xmlns:a16="http://schemas.microsoft.com/office/drawing/2014/main" id="{19F5CB4E-153D-EF40-9DD1-4986310BA056}"/>
-              </a:ext>
-            </a:extLst>
-          </p:cNvPr>
-          <p:cNvSpPr/>
-          <p:nvPr/>
-        </p:nvSpPr>
-        <p:spPr>
-          <a:xfrm>
-            <a:off x="6510338" y="4410075"/>
-            <a:ext cx="314325" cy="314325"/>
-          </a:xfrm>
-          <a:prstGeom prst="ellipse">
-            <a:avLst/>
-          </a:prstGeom>
-          <a:solidFill>
-            <a:srgbClr val="FF0000"/>
-          </a:solidFill>
-        </p:spPr>
-        <p:style>
-          <a:lnRef idx="2">
-            <a:schemeClr val="accent1">
-              <a:shade val="50000"/>
-            </a:schemeClr>
-          </a:lnRef>
-          <a:fillRef idx="1">
-            <a:schemeClr val="accent1"/>
-          </a:fillRef>
-          <a:effectRef idx="0">
-            <a:schemeClr val="accent1"/>
-          </a:effectRef>
-          <a:fontRef idx="minor">
-            <a:schemeClr val="lt1"/>
-          </a:fontRef>
-        </p:style>
-        <p:txBody>
-          <a:bodyPr rtlCol="0" anchor="ctr"/>
-          <a:lstStyle/>
-          <a:p>
-            <a:pPr algn="ctr"/>
-            <a:endParaRPr lang="en-US"/>
-          </a:p>
-        </p:txBody>
-      </p:sp>
-      <p:sp>
-        <p:nvSpPr>
-          <p:cNvPr id="19" name="Oval 18">
-            <a:extLst>
-              <a:ext uri="{FF2B5EF4-FFF2-40B4-BE49-F238E27FC236}">
-                <a16:creationId xmlns:a16="http://schemas.microsoft.com/office/drawing/2014/main" id="{304877B3-DB5A-2E40-9762-5B3784FF014E}"/>
-              </a:ext>
-            </a:extLst>
-          </p:cNvPr>
-          <p:cNvSpPr/>
-          <p:nvPr/>
-        </p:nvSpPr>
-        <p:spPr>
-          <a:xfrm>
-            <a:off x="8648701" y="4567237"/>
-            <a:ext cx="314325" cy="314325"/>
-          </a:xfrm>
-          <a:prstGeom prst="ellipse">
-            <a:avLst/>
-          </a:prstGeom>
-          <a:solidFill>
-            <a:srgbClr val="FFFF00"/>
-          </a:solidFill>
-        </p:spPr>
-        <p:style>
-          <a:lnRef idx="2">
-            <a:schemeClr val="accent1">
-              <a:shade val="50000"/>
-            </a:schemeClr>
-          </a:lnRef>
-          <a:fillRef idx="1">
-            <a:schemeClr val="accent1"/>
-          </a:fillRef>
-          <a:effectRef idx="0">
-            <a:schemeClr val="accent1"/>
-          </a:effectRef>
-          <a:fontRef idx="minor">
-            <a:schemeClr val="lt1"/>
-          </a:fontRef>
-        </p:style>
-        <p:txBody>
-          <a:bodyPr rtlCol="0" anchor="ctr"/>
-          <a:lstStyle/>
-          <a:p>
-            <a:pPr algn="ctr"/>
-            <a:endParaRPr lang="en-US"/>
-          </a:p>
-        </p:txBody>
-      </p:sp>
-      <p:sp>
-        <p:nvSpPr>
-          <p:cNvPr id="20" name="Oval 19">
-            <a:extLst>
-              <a:ext uri="{FF2B5EF4-FFF2-40B4-BE49-F238E27FC236}">
-                <a16:creationId xmlns:a16="http://schemas.microsoft.com/office/drawing/2014/main" id="{E53C1F00-2970-264E-8F3C-13F5A89C374D}"/>
-              </a:ext>
-            </a:extLst>
-          </p:cNvPr>
-          <p:cNvSpPr/>
-          <p:nvPr/>
-        </p:nvSpPr>
-        <p:spPr>
-          <a:xfrm>
-            <a:off x="7391401" y="5186360"/>
-            <a:ext cx="314325" cy="314325"/>
-          </a:xfrm>
-          <a:prstGeom prst="ellipse">
-            <a:avLst/>
-          </a:prstGeom>
-          <a:solidFill>
-            <a:srgbClr val="FF00E5"/>
-          </a:solidFill>
-        </p:spPr>
-        <p:style>
-          <a:lnRef idx="2">
-            <a:schemeClr val="accent1">
-              <a:shade val="50000"/>
-            </a:schemeClr>
-          </a:lnRef>
-          <a:fillRef idx="1">
-            <a:schemeClr val="accent1"/>
-          </a:fillRef>
-          <a:effectRef idx="0">
-            <a:schemeClr val="accent1"/>
-          </a:effectRef>
-          <a:fontRef idx="minor">
-            <a:schemeClr val="lt1"/>
-          </a:fontRef>
-        </p:style>
-        <p:txBody>
-          <a:bodyPr rtlCol="0" anchor="ctr"/>
-          <a:lstStyle/>
-          <a:p>
-            <a:pPr algn="ctr"/>
-            <a:endParaRPr lang="en-US"/>
-          </a:p>
-        </p:txBody>
-      </p:sp>
-      <p:sp>
-        <p:nvSpPr>
-          <p:cNvPr id="21" name="Oval 20">
-            <a:extLst>
-              <a:ext uri="{FF2B5EF4-FFF2-40B4-BE49-F238E27FC236}">
-                <a16:creationId xmlns:a16="http://schemas.microsoft.com/office/drawing/2014/main" id="{CBE665D8-BD16-C443-A7DB-33C745F5F4C3}"/>
-              </a:ext>
-            </a:extLst>
-          </p:cNvPr>
-          <p:cNvSpPr/>
-          <p:nvPr/>
-        </p:nvSpPr>
-        <p:spPr>
-          <a:xfrm>
-            <a:off x="8334375" y="2800349"/>
-            <a:ext cx="314325" cy="314325"/>
-          </a:xfrm>
-          <a:prstGeom prst="ellipse">
-            <a:avLst/>
-          </a:prstGeom>
-          <a:solidFill>
-            <a:srgbClr val="00B0F0"/>
-          </a:solidFill>
-        </p:spPr>
-        <p:style>
-          <a:lnRef idx="2">
-            <a:schemeClr val="accent1">
-              <a:shade val="50000"/>
-            </a:schemeClr>
-          </a:lnRef>
-          <a:fillRef idx="1">
-            <a:schemeClr val="accent1"/>
-          </a:fillRef>
-          <a:effectRef idx="0">
-            <a:schemeClr val="accent1"/>
-          </a:effectRef>
-          <a:fontRef idx="minor">
-            <a:schemeClr val="lt1"/>
-          </a:fontRef>
-        </p:style>
-        <p:txBody>
-          <a:bodyPr rtlCol="0" anchor="ctr"/>
-          <a:lstStyle/>
-          <a:p>
-            <a:pPr algn="ctr"/>
-            <a:endParaRPr lang="en-US"/>
-          </a:p>
-        </p:txBody>
-      </p:sp>
-      <p:sp>
-        <p:nvSpPr>
-          <p:cNvPr id="22" name="Oval 21">
-            <a:extLst>
-              <a:ext uri="{FF2B5EF4-FFF2-40B4-BE49-F238E27FC236}">
-                <a16:creationId xmlns:a16="http://schemas.microsoft.com/office/drawing/2014/main" id="{8716A6E8-5194-1843-8740-7CFE1E71AC8C}"/>
-              </a:ext>
-            </a:extLst>
-          </p:cNvPr>
-          <p:cNvSpPr/>
-          <p:nvPr/>
-        </p:nvSpPr>
-        <p:spPr>
-          <a:xfrm>
-            <a:off x="7391400" y="3050382"/>
-            <a:ext cx="314325" cy="314325"/>
-          </a:xfrm>
-          <a:prstGeom prst="ellipse">
-            <a:avLst/>
-          </a:prstGeom>
-          <a:solidFill>
-            <a:srgbClr val="FFFF00"/>
-          </a:solidFill>
-        </p:spPr>
-        <p:style>
-          <a:lnRef idx="2">
-            <a:schemeClr val="accent1">
-              <a:shade val="50000"/>
-            </a:schemeClr>
-          </a:lnRef>
-          <a:fillRef idx="1">
-            <a:schemeClr val="accent1"/>
-          </a:fillRef>
-          <a:effectRef idx="0">
-            <a:schemeClr val="accent1"/>
-          </a:effectRef>
-          <a:fontRef idx="minor">
-            <a:schemeClr val="lt1"/>
-          </a:fontRef>
-        </p:style>
-        <p:txBody>
-          <a:bodyPr rtlCol="0" anchor="ctr"/>
-          <a:lstStyle/>
-          <a:p>
-            <a:pPr algn="ctr"/>
-            <a:endParaRPr lang="en-US"/>
-          </a:p>
-        </p:txBody>
-      </p:sp>
-      <p:sp>
-        <p:nvSpPr>
-          <p:cNvPr id="23" name="Oval 22">
-            <a:extLst>
-              <a:ext uri="{FF2B5EF4-FFF2-40B4-BE49-F238E27FC236}">
-                <a16:creationId xmlns:a16="http://schemas.microsoft.com/office/drawing/2014/main" id="{AC7232C0-D3C4-874D-B786-BB148BFF7049}"/>
-              </a:ext>
-            </a:extLst>
-          </p:cNvPr>
-          <p:cNvSpPr/>
-          <p:nvPr/>
-        </p:nvSpPr>
-        <p:spPr>
-          <a:xfrm>
-            <a:off x="7891464" y="4410074"/>
-            <a:ext cx="314325" cy="314325"/>
-          </a:xfrm>
-          <a:prstGeom prst="ellipse">
-            <a:avLst/>
-          </a:prstGeom>
-          <a:solidFill>
-            <a:srgbClr val="00B0F0"/>
-          </a:solidFill>
-        </p:spPr>
-        <p:style>
-          <a:lnRef idx="2">
-            <a:schemeClr val="accent1">
-              <a:shade val="50000"/>
-            </a:schemeClr>
-          </a:lnRef>
-          <a:fillRef idx="1">
-            <a:schemeClr val="accent1"/>
-          </a:fillRef>
-          <a:effectRef idx="0">
-            <a:schemeClr val="accent1"/>
-          </a:effectRef>
-          <a:fontRef idx="minor">
-            <a:schemeClr val="lt1"/>
-          </a:fontRef>
-        </p:style>
-        <p:txBody>
-          <a:bodyPr rtlCol="0" anchor="ctr"/>
-          <a:lstStyle/>
-          <a:p>
-            <a:pPr algn="ctr"/>
-            <a:endParaRPr lang="en-US"/>
-          </a:p>
-        </p:txBody>
-      </p:sp>
-      <p:sp>
-        <p:nvSpPr>
-          <p:cNvPr id="24" name="Oval 23">
-            <a:extLst>
-              <a:ext uri="{FF2B5EF4-FFF2-40B4-BE49-F238E27FC236}">
-                <a16:creationId xmlns:a16="http://schemas.microsoft.com/office/drawing/2014/main" id="{CFB75B72-7751-E244-927A-357FEE2AD292}"/>
-              </a:ext>
-            </a:extLst>
-          </p:cNvPr>
-          <p:cNvSpPr/>
-          <p:nvPr/>
-        </p:nvSpPr>
-        <p:spPr>
-          <a:xfrm>
-            <a:off x="8491538" y="3752848"/>
-            <a:ext cx="314325" cy="314325"/>
-          </a:xfrm>
-          <a:prstGeom prst="ellipse">
-            <a:avLst/>
-          </a:prstGeom>
-          <a:solidFill>
-            <a:srgbClr val="002060"/>
-          </a:solidFill>
-        </p:spPr>
-        <p:style>
-          <a:lnRef idx="2">
-            <a:schemeClr val="accent1">
-              <a:shade val="50000"/>
-            </a:schemeClr>
-          </a:lnRef>
-          <a:fillRef idx="1">
-            <a:schemeClr val="accent1"/>
-          </a:fillRef>
-          <a:effectRef idx="0">
-            <a:schemeClr val="accent1"/>
-          </a:effectRef>
-          <a:fontRef idx="minor">
-            <a:schemeClr val="lt1"/>
-          </a:fontRef>
-        </p:style>
-        <p:txBody>
-          <a:bodyPr rtlCol="0" anchor="ctr"/>
-          <a:lstStyle/>
-          <a:p>
-            <a:pPr algn="ctr"/>
-            <a:endParaRPr lang="en-US"/>
-          </a:p>
-        </p:txBody>
-      </p:sp>
-      <p:sp>
-        <p:nvSpPr>
-          <p:cNvPr id="25" name="Oval 24">
-            <a:extLst>
-              <a:ext uri="{FF2B5EF4-FFF2-40B4-BE49-F238E27FC236}">
-                <a16:creationId xmlns:a16="http://schemas.microsoft.com/office/drawing/2014/main" id="{5A90B763-4A6C-AE44-B10A-CAC54BEA55F6}"/>
-              </a:ext>
-            </a:extLst>
-          </p:cNvPr>
-          <p:cNvSpPr/>
-          <p:nvPr/>
-        </p:nvSpPr>
-        <p:spPr>
-          <a:xfrm>
-            <a:off x="7043738" y="4710111"/>
-            <a:ext cx="314325" cy="314325"/>
-          </a:xfrm>
-          <a:prstGeom prst="ellipse">
-            <a:avLst/>
-          </a:prstGeom>
-          <a:solidFill>
-            <a:srgbClr val="FFFF00"/>
-          </a:solidFill>
-        </p:spPr>
-        <p:style>
-          <a:lnRef idx="2">
-            <a:schemeClr val="accent1">
-              <a:shade val="50000"/>
-            </a:schemeClr>
-          </a:lnRef>
-          <a:fillRef idx="1">
-            <a:schemeClr val="accent1"/>
-          </a:fillRef>
-          <a:effectRef idx="0">
-            <a:schemeClr val="accent1"/>
-          </a:effectRef>
-          <a:fontRef idx="minor">
-            <a:schemeClr val="lt1"/>
-          </a:fontRef>
-        </p:style>
-        <p:txBody>
-          <a:bodyPr rtlCol="0" anchor="ctr"/>
-          <a:lstStyle/>
-          <a:p>
-            <a:pPr algn="ctr"/>
-            <a:endParaRPr lang="en-US"/>
-          </a:p>
-        </p:txBody>
-      </p:sp>
-      <p:sp>
-        <p:nvSpPr>
-          <p:cNvPr id="26" name="Oval 25">
-            <a:extLst>
-              <a:ext uri="{FF2B5EF4-FFF2-40B4-BE49-F238E27FC236}">
-                <a16:creationId xmlns:a16="http://schemas.microsoft.com/office/drawing/2014/main" id="{E608D13B-D12C-924F-8139-3E7E8F9E180F}"/>
-              </a:ext>
-            </a:extLst>
-          </p:cNvPr>
-          <p:cNvSpPr/>
-          <p:nvPr/>
-        </p:nvSpPr>
-        <p:spPr>
-          <a:xfrm>
-            <a:off x="6653212" y="3867149"/>
-            <a:ext cx="314325" cy="314325"/>
-          </a:xfrm>
-          <a:prstGeom prst="ellipse">
-            <a:avLst/>
-          </a:prstGeom>
-          <a:solidFill>
-            <a:srgbClr val="92D050"/>
-          </a:solidFill>
-        </p:spPr>
-        <p:style>
-          <a:lnRef idx="2">
-            <a:schemeClr val="accent1">
-              <a:shade val="50000"/>
-            </a:schemeClr>
-          </a:lnRef>
-          <a:fillRef idx="1">
-            <a:schemeClr val="accent1"/>
-          </a:fillRef>
-          <a:effectRef idx="0">
-            <a:schemeClr val="accent1"/>
-          </a:effectRef>
-          <a:fontRef idx="minor">
-            <a:schemeClr val="lt1"/>
-          </a:fontRef>
-        </p:style>
-        <p:txBody>
-          <a:bodyPr rtlCol="0" anchor="ctr"/>
-          <a:lstStyle/>
-          <a:p>
-            <a:pPr algn="ctr"/>
-            <a:endParaRPr lang="en-US"/>
-          </a:p>
-        </p:txBody>
-      </p:sp>
-      <p:sp>
-        <p:nvSpPr>
-          <p:cNvPr id="27" name="Oval 26">
-            <a:extLst>
-              <a:ext uri="{FF2B5EF4-FFF2-40B4-BE49-F238E27FC236}">
-                <a16:creationId xmlns:a16="http://schemas.microsoft.com/office/drawing/2014/main" id="{6549C0F0-8986-694D-A0BD-8647118E99FE}"/>
-              </a:ext>
-            </a:extLst>
-          </p:cNvPr>
-          <p:cNvSpPr/>
-          <p:nvPr/>
-        </p:nvSpPr>
-        <p:spPr>
-          <a:xfrm>
-            <a:off x="7891463" y="3378993"/>
-            <a:ext cx="314325" cy="314325"/>
-          </a:xfrm>
-          <a:prstGeom prst="ellipse">
-            <a:avLst/>
-          </a:prstGeom>
-          <a:solidFill>
-            <a:srgbClr val="FFC000"/>
-          </a:solidFill>
-        </p:spPr>
-        <p:style>
-          <a:lnRef idx="2">
-            <a:schemeClr val="accent1">
-              <a:shade val="50000"/>
-            </a:schemeClr>
-          </a:lnRef>
-          <a:fillRef idx="1">
-            <a:schemeClr val="accent1"/>
-          </a:fillRef>
-          <a:effectRef idx="0">
-            <a:schemeClr val="accent1"/>
-          </a:effectRef>
-          <a:fontRef idx="minor">
-            <a:schemeClr val="lt1"/>
-          </a:fontRef>
-        </p:style>
-        <p:txBody>
-          <a:bodyPr rtlCol="0" anchor="ctr"/>
-          <a:lstStyle/>
-          <a:p>
-            <a:pPr algn="ctr"/>
-            <a:endParaRPr lang="en-US"/>
-          </a:p>
-        </p:txBody>
-      </p:sp>
-      <p:sp>
-        <p:nvSpPr>
-          <p:cNvPr id="28" name="TextBox 27">
-            <a:extLst>
-              <a:ext uri="{FF2B5EF4-FFF2-40B4-BE49-F238E27FC236}">
-                <a16:creationId xmlns:a16="http://schemas.microsoft.com/office/drawing/2014/main" id="{EA335B55-8B52-5644-A550-2710A16DB226}"/>
-              </a:ext>
-            </a:extLst>
-          </p:cNvPr>
-          <p:cNvSpPr txBox="1"/>
-          <p:nvPr/>
-        </p:nvSpPr>
-        <p:spPr>
-          <a:xfrm>
-            <a:off x="2717006" y="1991378"/>
-            <a:ext cx="2164558" cy="523220"/>
-          </a:xfrm>
-          <a:prstGeom prst="rect">
-            <a:avLst/>
-          </a:prstGeom>
-          <a:noFill/>
-        </p:spPr>
-        <p:txBody>
-          <a:bodyPr wrap="square" rtlCol="0">
-            <a:spAutoFit/>
-          </a:bodyPr>
-          <a:lstStyle/>
-          <a:p>
-            <a:r>
-              <a:rPr lang="en-US" sz="2800" dirty="0"/>
-              <a:t>Community 1</a:t>
-            </a:r>
-          </a:p>
-        </p:txBody>
-      </p:sp>
-      <p:sp>
-        <p:nvSpPr>
-          <p:cNvPr id="29" name="TextBox 28">
-            <a:extLst>
-              <a:ext uri="{FF2B5EF4-FFF2-40B4-BE49-F238E27FC236}">
-                <a16:creationId xmlns:a16="http://schemas.microsoft.com/office/drawing/2014/main" id="{BC52BB93-C1D8-A04D-98AA-48CAD4AC9990}"/>
-              </a:ext>
-            </a:extLst>
-          </p:cNvPr>
-          <p:cNvSpPr txBox="1"/>
-          <p:nvPr/>
-        </p:nvSpPr>
-        <p:spPr>
-          <a:xfrm>
-            <a:off x="6667500" y="2015520"/>
-            <a:ext cx="2164558" cy="523220"/>
-          </a:xfrm>
-          <a:prstGeom prst="rect">
-            <a:avLst/>
-          </a:prstGeom>
-          <a:noFill/>
-        </p:spPr>
-        <p:txBody>
-          <a:bodyPr wrap="square" rtlCol="0">
-            <a:spAutoFit/>
-          </a:bodyPr>
-          <a:lstStyle/>
-          <a:p>
-            <a:r>
-              <a:rPr lang="en-US" sz="2800" dirty="0"/>
-              <a:t>Community 2</a:t>
-            </a:r>
-          </a:p>
-        </p:txBody>
-      </p:sp>
-    </p:spTree>
-    <p:extLst>
-      <p:ext uri="{BB962C8B-B14F-4D97-AF65-F5344CB8AC3E}">
-        <p14:creationId xmlns:p14="http://schemas.microsoft.com/office/powerpoint/2010/main" val="3055002149"/>
-      </p:ext>
-    </p:extLst>
-  </p:cSld>
-  <p:clrMapOvr>
-    <a:masterClrMapping/>
-  </p:clrMapOvr>
-</p:sld>
-</file>
-
-<file path=ppt/slides/slide20.xml><?xml version="1.0" encoding="utf-8"?>
+<file path=ppt/slides/slide23.xml><?xml version="1.0" encoding="utf-8"?>
 <p:sld xmlns:a="http://schemas.openxmlformats.org/drawingml/2006/main" xmlns:r="http://schemas.openxmlformats.org/officeDocument/2006/relationships" xmlns:p="http://schemas.openxmlformats.org/presentationml/2006/main">
   <p:cSld>
     <p:spTree>
@@ -36754,7 +37350,7 @@
 </p:sld>
 </file>
 
-<file path=ppt/slides/slide21.xml><?xml version="1.0" encoding="utf-8"?>
+<file path=ppt/slides/slide24.xml><?xml version="1.0" encoding="utf-8"?>
 <p:sld xmlns:a="http://schemas.openxmlformats.org/drawingml/2006/main" xmlns:r="http://schemas.openxmlformats.org/officeDocument/2006/relationships" xmlns:p="http://schemas.openxmlformats.org/presentationml/2006/main">
   <p:cSld>
     <p:spTree>
@@ -36885,7 +37481,7 @@
 </p:sld>
 </file>
 
-<file path=ppt/slides/slide22.xml><?xml version="1.0" encoding="utf-8"?>
+<file path=ppt/slides/slide25.xml><?xml version="1.0" encoding="utf-8"?>
 <p:sld xmlns:a="http://schemas.openxmlformats.org/drawingml/2006/main" xmlns:r="http://schemas.openxmlformats.org/officeDocument/2006/relationships" xmlns:p="http://schemas.openxmlformats.org/presentationml/2006/main">
   <p:cSld>
     <p:spTree>
@@ -36961,18 +37557,6 @@
           <a:p>
             <a:r>
               <a:rPr lang="en-US" dirty="0"/>
-              <a:t>Kruskal-Wallis to compare alpha diversity between glaciers</a:t>
-            </a:r>
-          </a:p>
-          <a:p>
-            <a:r>
-              <a:rPr lang="en-US" dirty="0"/>
-              <a:t>Permutation Multivariate Analysis of Variance (PERMANOVA) to identify if community composition varied between glaciers</a:t>
-            </a:r>
-          </a:p>
-          <a:p>
-            <a:r>
-              <a:rPr lang="en-US" dirty="0"/>
               <a:t>Canonical Analysis of Principal Coordinates (CAP) used to identify the variation in community composition explained by pH, cryoconite hole area, cryoconite hole depth, water content and chlorophyll</a:t>
             </a:r>
           </a:p>
@@ -36994,7 +37578,7 @@
 </p:sld>
 </file>
 
-<file path=ppt/slides/slide23.xml><?xml version="1.0" encoding="utf-8"?>
+<file path=ppt/slides/slide26.xml><?xml version="1.0" encoding="utf-8"?>
 <p:sld xmlns:a="http://schemas.openxmlformats.org/drawingml/2006/main" xmlns:r="http://schemas.openxmlformats.org/officeDocument/2006/relationships" xmlns:p="http://schemas.openxmlformats.org/presentationml/2006/main">
   <p:cSld>
     <p:spTree>
@@ -37220,7 +37804,7 @@
 </p:sld>
 </file>
 
-<file path=ppt/slides/slide24.xml><?xml version="1.0" encoding="utf-8"?>
+<file path=ppt/slides/slide27.xml><?xml version="1.0" encoding="utf-8"?>
 <p:sld xmlns:a="http://schemas.openxmlformats.org/drawingml/2006/main" xmlns:r="http://schemas.openxmlformats.org/officeDocument/2006/relationships" xmlns:p="http://schemas.openxmlformats.org/presentationml/2006/main">
   <p:cSld>
     <p:spTree>
@@ -37286,7 +37870,7 @@
 </p:sld>
 </file>
 
-<file path=ppt/slides/slide25.xml><?xml version="1.0" encoding="utf-8"?>
+<file path=ppt/slides/slide28.xml><?xml version="1.0" encoding="utf-8"?>
 <p:sld xmlns:a="http://schemas.openxmlformats.org/drawingml/2006/main" xmlns:r="http://schemas.openxmlformats.org/officeDocument/2006/relationships" xmlns:p="http://schemas.openxmlformats.org/presentationml/2006/main">
   <p:cSld>
     <p:spTree>
@@ -38365,7 +38949,7 @@
 </p:sld>
 </file>
 
-<file path=ppt/slides/slide26.xml><?xml version="1.0" encoding="utf-8"?>
+<file path=ppt/slides/slide29.xml><?xml version="1.0" encoding="utf-8"?>
 <p:sld xmlns:a="http://schemas.openxmlformats.org/drawingml/2006/main" xmlns:r="http://schemas.openxmlformats.org/officeDocument/2006/relationships" xmlns:p="http://schemas.openxmlformats.org/presentationml/2006/main">
   <p:cSld>
     <p:spTree>
@@ -38724,7 +39308,93 @@
 </p:sld>
 </file>
 
-<file path=ppt/slides/slide27.xml><?xml version="1.0" encoding="utf-8"?>
+<file path=ppt/slides/slide3.xml><?xml version="1.0" encoding="utf-8"?>
+<p:sld xmlns:a="http://schemas.openxmlformats.org/drawingml/2006/main" xmlns:r="http://schemas.openxmlformats.org/officeDocument/2006/relationships" xmlns:p="http://schemas.openxmlformats.org/presentationml/2006/main">
+  <p:cSld>
+    <p:spTree>
+      <p:nvGrpSpPr>
+        <p:cNvPr id="1" name=""/>
+        <p:cNvGrpSpPr/>
+        <p:nvPr/>
+      </p:nvGrpSpPr>
+      <p:grpSpPr>
+        <a:xfrm>
+          <a:off x="0" y="0"/>
+          <a:ext cx="0" cy="0"/>
+          <a:chOff x="0" y="0"/>
+          <a:chExt cx="0" cy="0"/>
+        </a:xfrm>
+      </p:grpSpPr>
+      <p:sp>
+        <p:nvSpPr>
+          <p:cNvPr id="2" name="Title 1">
+            <a:extLst>
+              <a:ext uri="{FF2B5EF4-FFF2-40B4-BE49-F238E27FC236}">
+                <a16:creationId xmlns:a16="http://schemas.microsoft.com/office/drawing/2014/main" id="{0FFB9FC6-0620-0A48-9F8C-295D1BC9A634}"/>
+              </a:ext>
+            </a:extLst>
+          </p:cNvPr>
+          <p:cNvSpPr>
+            <a:spLocks noGrp="1"/>
+          </p:cNvSpPr>
+          <p:nvPr>
+            <p:ph type="title"/>
+          </p:nvPr>
+        </p:nvSpPr>
+        <p:spPr/>
+        <p:txBody>
+          <a:bodyPr/>
+          <a:lstStyle/>
+          <a:p>
+            <a:r>
+              <a:rPr lang="en-US" dirty="0"/>
+              <a:t>Community Assembly Processes</a:t>
+            </a:r>
+          </a:p>
+        </p:txBody>
+      </p:sp>
+      <p:graphicFrame>
+        <p:nvGraphicFramePr>
+          <p:cNvPr id="12" name="Diagram 11">
+            <a:extLst>
+              <a:ext uri="{FF2B5EF4-FFF2-40B4-BE49-F238E27FC236}">
+                <a16:creationId xmlns:a16="http://schemas.microsoft.com/office/drawing/2014/main" id="{8B3002D7-459F-0B49-B4AD-4140562B12BC}"/>
+              </a:ext>
+            </a:extLst>
+          </p:cNvPr>
+          <p:cNvGraphicFramePr/>
+          <p:nvPr>
+            <p:extLst>
+              <p:ext uri="{D42A27DB-BD31-4B8C-83A1-F6EECF244321}">
+                <p14:modId xmlns:p14="http://schemas.microsoft.com/office/powerpoint/2010/main" val="662949717"/>
+              </p:ext>
+            </p:extLst>
+          </p:nvPr>
+        </p:nvGraphicFramePr>
+        <p:xfrm>
+          <a:off x="2489993" y="1690688"/>
+          <a:ext cx="7212013" cy="4808009"/>
+        </p:xfrm>
+        <a:graphic>
+          <a:graphicData uri="http://schemas.openxmlformats.org/drawingml/2006/diagram">
+            <dgm:relIds xmlns:dgm="http://schemas.openxmlformats.org/drawingml/2006/diagram" xmlns:r="http://schemas.openxmlformats.org/officeDocument/2006/relationships" r:dm="rId3" r:lo="rId4" r:qs="rId5" r:cs="rId6"/>
+          </a:graphicData>
+        </a:graphic>
+      </p:graphicFrame>
+    </p:spTree>
+    <p:extLst>
+      <p:ext uri="{BB962C8B-B14F-4D97-AF65-F5344CB8AC3E}">
+        <p14:creationId xmlns:p14="http://schemas.microsoft.com/office/powerpoint/2010/main" val="1185572630"/>
+      </p:ext>
+    </p:extLst>
+  </p:cSld>
+  <p:clrMapOvr>
+    <a:masterClrMapping/>
+  </p:clrMapOvr>
+</p:sld>
+</file>
+
+<file path=ppt/slides/slide30.xml><?xml version="1.0" encoding="utf-8"?>
 <p:sld xmlns:a="http://schemas.openxmlformats.org/drawingml/2006/main" xmlns:r="http://schemas.openxmlformats.org/officeDocument/2006/relationships" xmlns:p="http://schemas.openxmlformats.org/presentationml/2006/main">
   <p:cSld>
     <p:spTree>
@@ -38820,7 +39490,7 @@
 </p:sld>
 </file>
 
-<file path=ppt/slides/slide28.xml><?xml version="1.0" encoding="utf-8"?>
+<file path=ppt/slides/slide31.xml><?xml version="1.0" encoding="utf-8"?>
 <p:sld xmlns:a="http://schemas.openxmlformats.org/drawingml/2006/main" xmlns:r="http://schemas.openxmlformats.org/officeDocument/2006/relationships" xmlns:p="http://schemas.openxmlformats.org/presentationml/2006/main">
   <p:cSld>
     <p:spTree>
@@ -38918,7 +39588,7 @@
 </p:sld>
 </file>
 
-<file path=ppt/slides/slide29.xml><?xml version="1.0" encoding="utf-8"?>
+<file path=ppt/slides/slide32.xml><?xml version="1.0" encoding="utf-8"?>
 <p:sld xmlns:a="http://schemas.openxmlformats.org/drawingml/2006/main" xmlns:r="http://schemas.openxmlformats.org/officeDocument/2006/relationships" xmlns:p="http://schemas.openxmlformats.org/presentationml/2006/main">
   <p:cSld>
     <p:spTree>
@@ -39013,93 +39683,7 @@
 </p:sld>
 </file>
 
-<file path=ppt/slides/slide3.xml><?xml version="1.0" encoding="utf-8"?>
-<p:sld xmlns:a="http://schemas.openxmlformats.org/drawingml/2006/main" xmlns:r="http://schemas.openxmlformats.org/officeDocument/2006/relationships" xmlns:p="http://schemas.openxmlformats.org/presentationml/2006/main">
-  <p:cSld>
-    <p:spTree>
-      <p:nvGrpSpPr>
-        <p:cNvPr id="1" name=""/>
-        <p:cNvGrpSpPr/>
-        <p:nvPr/>
-      </p:nvGrpSpPr>
-      <p:grpSpPr>
-        <a:xfrm>
-          <a:off x="0" y="0"/>
-          <a:ext cx="0" cy="0"/>
-          <a:chOff x="0" y="0"/>
-          <a:chExt cx="0" cy="0"/>
-        </a:xfrm>
-      </p:grpSpPr>
-      <p:sp>
-        <p:nvSpPr>
-          <p:cNvPr id="2" name="Title 1">
-            <a:extLst>
-              <a:ext uri="{FF2B5EF4-FFF2-40B4-BE49-F238E27FC236}">
-                <a16:creationId xmlns:a16="http://schemas.microsoft.com/office/drawing/2014/main" id="{0FFB9FC6-0620-0A48-9F8C-295D1BC9A634}"/>
-              </a:ext>
-            </a:extLst>
-          </p:cNvPr>
-          <p:cNvSpPr>
-            <a:spLocks noGrp="1"/>
-          </p:cNvSpPr>
-          <p:nvPr>
-            <p:ph type="title"/>
-          </p:nvPr>
-        </p:nvSpPr>
-        <p:spPr/>
-        <p:txBody>
-          <a:bodyPr/>
-          <a:lstStyle/>
-          <a:p>
-            <a:r>
-              <a:rPr lang="en-US" dirty="0"/>
-              <a:t>Community Assembly Processes</a:t>
-            </a:r>
-          </a:p>
-        </p:txBody>
-      </p:sp>
-      <p:graphicFrame>
-        <p:nvGraphicFramePr>
-          <p:cNvPr id="12" name="Diagram 11">
-            <a:extLst>
-              <a:ext uri="{FF2B5EF4-FFF2-40B4-BE49-F238E27FC236}">
-                <a16:creationId xmlns:a16="http://schemas.microsoft.com/office/drawing/2014/main" id="{8B3002D7-459F-0B49-B4AD-4140562B12BC}"/>
-              </a:ext>
-            </a:extLst>
-          </p:cNvPr>
-          <p:cNvGraphicFramePr/>
-          <p:nvPr>
-            <p:extLst>
-              <p:ext uri="{D42A27DB-BD31-4B8C-83A1-F6EECF244321}">
-                <p14:modId xmlns:p14="http://schemas.microsoft.com/office/powerpoint/2010/main" val="662949717"/>
-              </p:ext>
-            </p:extLst>
-          </p:nvPr>
-        </p:nvGraphicFramePr>
-        <p:xfrm>
-          <a:off x="2489993" y="1690688"/>
-          <a:ext cx="7212013" cy="4808009"/>
-        </p:xfrm>
-        <a:graphic>
-          <a:graphicData uri="http://schemas.openxmlformats.org/drawingml/2006/diagram">
-            <dgm:relIds xmlns:dgm="http://schemas.openxmlformats.org/drawingml/2006/diagram" xmlns:r="http://schemas.openxmlformats.org/officeDocument/2006/relationships" r:dm="rId3" r:lo="rId4" r:qs="rId5" r:cs="rId6"/>
-          </a:graphicData>
-        </a:graphic>
-      </p:graphicFrame>
-    </p:spTree>
-    <p:extLst>
-      <p:ext uri="{BB962C8B-B14F-4D97-AF65-F5344CB8AC3E}">
-        <p14:creationId xmlns:p14="http://schemas.microsoft.com/office/powerpoint/2010/main" val="1185572630"/>
-      </p:ext>
-    </p:extLst>
-  </p:cSld>
-  <p:clrMapOvr>
-    <a:masterClrMapping/>
-  </p:clrMapOvr>
-</p:sld>
-</file>
-
-<file path=ppt/slides/slide30.xml><?xml version="1.0" encoding="utf-8"?>
+<file path=ppt/slides/slide33.xml><?xml version="1.0" encoding="utf-8"?>
 <p:sld xmlns:a="http://schemas.openxmlformats.org/drawingml/2006/main" xmlns:r="http://schemas.openxmlformats.org/officeDocument/2006/relationships" xmlns:p="http://schemas.openxmlformats.org/presentationml/2006/main">
   <p:cSld>
     <p:spTree>
@@ -39217,7 +39801,7 @@
 </p:sld>
 </file>
 
-<file path=ppt/slides/slide31.xml><?xml version="1.0" encoding="utf-8"?>
+<file path=ppt/slides/slide34.xml><?xml version="1.0" encoding="utf-8"?>
 <p:sld xmlns:a="http://schemas.openxmlformats.org/drawingml/2006/main" xmlns:r="http://schemas.openxmlformats.org/officeDocument/2006/relationships" xmlns:p="http://schemas.openxmlformats.org/presentationml/2006/main">
   <p:cSld>
     <p:spTree>
@@ -39313,7 +39897,7 @@
 </p:sld>
 </file>
 
-<file path=ppt/slides/slide32.xml><?xml version="1.0" encoding="utf-8"?>
+<file path=ppt/slides/slide35.xml><?xml version="1.0" encoding="utf-8"?>
 <p:sld xmlns:a="http://schemas.openxmlformats.org/drawingml/2006/main" xmlns:r="http://schemas.openxmlformats.org/officeDocument/2006/relationships" xmlns:p="http://schemas.openxmlformats.org/presentationml/2006/main">
   <p:cSld>
     <p:spTree>
@@ -39379,7 +39963,7 @@
 </p:sld>
 </file>
 
-<file path=ppt/slides/slide33.xml><?xml version="1.0" encoding="utf-8"?>
+<file path=ppt/slides/slide36.xml><?xml version="1.0" encoding="utf-8"?>
 <p:sld xmlns:a="http://schemas.openxmlformats.org/drawingml/2006/main" xmlns:r="http://schemas.openxmlformats.org/officeDocument/2006/relationships" xmlns:p="http://schemas.openxmlformats.org/presentationml/2006/main">
   <p:cSld>
     <p:spTree>
@@ -39494,7 +40078,7 @@
 </p:sld>
 </file>
 
-<file path=ppt/slides/slide34.xml><?xml version="1.0" encoding="utf-8"?>
+<file path=ppt/slides/slide37.xml><?xml version="1.0" encoding="utf-8"?>
 <p:sld xmlns:a="http://schemas.openxmlformats.org/drawingml/2006/main" xmlns:r="http://schemas.openxmlformats.org/officeDocument/2006/relationships" xmlns:p="http://schemas.openxmlformats.org/presentationml/2006/main">
   <p:cSld>
     <p:spTree>
@@ -39527,7 +40111,16 @@
             <p:ph type="title"/>
           </p:nvPr>
         </p:nvSpPr>
-        <p:spPr/>
+        <p:spPr>
+          <a:solidFill>
+            <a:srgbClr val="5C9BD5"/>
+          </a:solidFill>
+          <a:ln>
+            <a:solidFill>
+              <a:schemeClr val="accent1"/>
+            </a:solidFill>
+          </a:ln>
+        </p:spPr>
         <p:txBody>
           <a:bodyPr/>
           <a:lstStyle/>
@@ -39577,7 +40170,7 @@
 </p:sld>
 </file>
 
-<file path=ppt/slides/slide35.xml><?xml version="1.0" encoding="utf-8"?>
+<file path=ppt/slides/slide38.xml><?xml version="1.0" encoding="utf-8"?>
 <p:sld xmlns:a="http://schemas.openxmlformats.org/drawingml/2006/main" xmlns:r="http://schemas.openxmlformats.org/officeDocument/2006/relationships" xmlns:p="http://schemas.openxmlformats.org/presentationml/2006/main">
   <p:cSld>
     <p:spTree>
@@ -39678,7 +40271,7 @@
 </p:sld>
 </file>
 
-<file path=ppt/slides/slide36.xml><?xml version="1.0" encoding="utf-8"?>
+<file path=ppt/slides/slide39.xml><?xml version="1.0" encoding="utf-8"?>
 <p:sld xmlns:a="http://schemas.openxmlformats.org/drawingml/2006/main" xmlns:r="http://schemas.openxmlformats.org/officeDocument/2006/relationships" xmlns:p="http://schemas.openxmlformats.org/presentationml/2006/main">
   <p:cSld>
     <p:spTree>
@@ -39749,124 +40342,6 @@
     <p:extLst>
       <p:ext uri="{BB962C8B-B14F-4D97-AF65-F5344CB8AC3E}">
         <p14:creationId xmlns:p14="http://schemas.microsoft.com/office/powerpoint/2010/main" val="2136607666"/>
-      </p:ext>
-    </p:extLst>
-  </p:cSld>
-  <p:clrMapOvr>
-    <a:masterClrMapping/>
-  </p:clrMapOvr>
-</p:sld>
-</file>
-
-<file path=ppt/slides/slide37.xml><?xml version="1.0" encoding="utf-8"?>
-<p:sld xmlns:a="http://schemas.openxmlformats.org/drawingml/2006/main" xmlns:r="http://schemas.openxmlformats.org/officeDocument/2006/relationships" xmlns:p="http://schemas.openxmlformats.org/presentationml/2006/main">
-  <p:cSld>
-    <p:spTree>
-      <p:nvGrpSpPr>
-        <p:cNvPr id="1" name=""/>
-        <p:cNvGrpSpPr/>
-        <p:nvPr/>
-      </p:nvGrpSpPr>
-      <p:grpSpPr>
-        <a:xfrm>
-          <a:off x="0" y="0"/>
-          <a:ext cx="0" cy="0"/>
-          <a:chOff x="0" y="0"/>
-          <a:chExt cx="0" cy="0"/>
-        </a:xfrm>
-      </p:grpSpPr>
-      <p:sp>
-        <p:nvSpPr>
-          <p:cNvPr id="2" name="Title 1">
-            <a:extLst>
-              <a:ext uri="{FF2B5EF4-FFF2-40B4-BE49-F238E27FC236}">
-                <a16:creationId xmlns:a16="http://schemas.microsoft.com/office/drawing/2014/main" id="{4C2DA027-B72B-4144-A731-E9B94EB5EDDD}"/>
-              </a:ext>
-            </a:extLst>
-          </p:cNvPr>
-          <p:cNvSpPr>
-            <a:spLocks noGrp="1"/>
-          </p:cNvSpPr>
-          <p:nvPr>
-            <p:ph type="title"/>
-          </p:nvPr>
-        </p:nvSpPr>
-        <p:spPr/>
-        <p:txBody>
-          <a:bodyPr/>
-          <a:lstStyle/>
-          <a:p>
-            <a:endParaRPr lang="en-US"/>
-          </a:p>
-        </p:txBody>
-      </p:sp>
-      <p:sp>
-        <p:nvSpPr>
-          <p:cNvPr id="3" name="Content Placeholder 2">
-            <a:extLst>
-              <a:ext uri="{FF2B5EF4-FFF2-40B4-BE49-F238E27FC236}">
-                <a16:creationId xmlns:a16="http://schemas.microsoft.com/office/drawing/2014/main" id="{9F9B51A7-07A9-CA41-AA95-F674E4BEFDE9}"/>
-              </a:ext>
-            </a:extLst>
-          </p:cNvPr>
-          <p:cNvSpPr>
-            <a:spLocks noGrp="1"/>
-          </p:cNvSpPr>
-          <p:nvPr>
-            <p:ph idx="1"/>
-          </p:nvPr>
-        </p:nvSpPr>
-        <p:spPr/>
-        <p:txBody>
-          <a:bodyPr/>
-          <a:lstStyle/>
-          <a:p>
-            <a:pPr marL="514350" indent="-514350">
-              <a:buFont typeface="+mj-lt"/>
-              <a:buAutoNum type="arabicPeriod"/>
-            </a:pPr>
-            <a:r>
-              <a:rPr lang="en-US" dirty="0"/>
-              <a:t>Transpose </a:t>
-            </a:r>
-            <a:r>
-              <a:rPr lang="en-US" dirty="0" err="1"/>
-              <a:t>asv</a:t>
-            </a:r>
-            <a:r>
-              <a:rPr lang="en-US" dirty="0"/>
-              <a:t> table (</a:t>
-            </a:r>
-            <a:r>
-              <a:rPr lang="en-US" dirty="0" err="1"/>
-              <a:t>asv</a:t>
-            </a:r>
-            <a:r>
-              <a:rPr lang="en-US" dirty="0"/>
-              <a:t> = rows, samples = columns) and compute a matrix of Spearman’s rho rank correlation coefficients for all possible pairs of columns (</a:t>
-            </a:r>
-            <a:r>
-              <a:rPr lang="en-US" dirty="0" err="1"/>
-              <a:t>asvs</a:t>
-            </a:r>
-            <a:r>
-              <a:rPr lang="en-US" dirty="0"/>
-              <a:t>).</a:t>
-            </a:r>
-          </a:p>
-          <a:p>
-            <a:pPr marL="514350" indent="-514350">
-              <a:buFont typeface="+mj-lt"/>
-              <a:buAutoNum type="arabicPeriod"/>
-            </a:pPr>
-            <a:endParaRPr lang="en-US" dirty="0"/>
-          </a:p>
-        </p:txBody>
-      </p:sp>
-    </p:spTree>
-    <p:extLst>
-      <p:ext uri="{BB962C8B-B14F-4D97-AF65-F5344CB8AC3E}">
-        <p14:creationId xmlns:p14="http://schemas.microsoft.com/office/powerpoint/2010/main" val="1057470918"/>
       </p:ext>
     </p:extLst>
   </p:cSld>
@@ -39950,6 +40425,124 @@
     <p:extLst>
       <p:ext uri="{BB962C8B-B14F-4D97-AF65-F5344CB8AC3E}">
         <p14:creationId xmlns:p14="http://schemas.microsoft.com/office/powerpoint/2010/main" val="2252230248"/>
+      </p:ext>
+    </p:extLst>
+  </p:cSld>
+  <p:clrMapOvr>
+    <a:masterClrMapping/>
+  </p:clrMapOvr>
+</p:sld>
+</file>
+
+<file path=ppt/slides/slide40.xml><?xml version="1.0" encoding="utf-8"?>
+<p:sld xmlns:a="http://schemas.openxmlformats.org/drawingml/2006/main" xmlns:r="http://schemas.openxmlformats.org/officeDocument/2006/relationships" xmlns:p="http://schemas.openxmlformats.org/presentationml/2006/main">
+  <p:cSld>
+    <p:spTree>
+      <p:nvGrpSpPr>
+        <p:cNvPr id="1" name=""/>
+        <p:cNvGrpSpPr/>
+        <p:nvPr/>
+      </p:nvGrpSpPr>
+      <p:grpSpPr>
+        <a:xfrm>
+          <a:off x="0" y="0"/>
+          <a:ext cx="0" cy="0"/>
+          <a:chOff x="0" y="0"/>
+          <a:chExt cx="0" cy="0"/>
+        </a:xfrm>
+      </p:grpSpPr>
+      <p:sp>
+        <p:nvSpPr>
+          <p:cNvPr id="2" name="Title 1">
+            <a:extLst>
+              <a:ext uri="{FF2B5EF4-FFF2-40B4-BE49-F238E27FC236}">
+                <a16:creationId xmlns:a16="http://schemas.microsoft.com/office/drawing/2014/main" id="{4C2DA027-B72B-4144-A731-E9B94EB5EDDD}"/>
+              </a:ext>
+            </a:extLst>
+          </p:cNvPr>
+          <p:cNvSpPr>
+            <a:spLocks noGrp="1"/>
+          </p:cNvSpPr>
+          <p:nvPr>
+            <p:ph type="title"/>
+          </p:nvPr>
+        </p:nvSpPr>
+        <p:spPr/>
+        <p:txBody>
+          <a:bodyPr/>
+          <a:lstStyle/>
+          <a:p>
+            <a:endParaRPr lang="en-US"/>
+          </a:p>
+        </p:txBody>
+      </p:sp>
+      <p:sp>
+        <p:nvSpPr>
+          <p:cNvPr id="3" name="Content Placeholder 2">
+            <a:extLst>
+              <a:ext uri="{FF2B5EF4-FFF2-40B4-BE49-F238E27FC236}">
+                <a16:creationId xmlns:a16="http://schemas.microsoft.com/office/drawing/2014/main" id="{9F9B51A7-07A9-CA41-AA95-F674E4BEFDE9}"/>
+              </a:ext>
+            </a:extLst>
+          </p:cNvPr>
+          <p:cNvSpPr>
+            <a:spLocks noGrp="1"/>
+          </p:cNvSpPr>
+          <p:nvPr>
+            <p:ph idx="1"/>
+          </p:nvPr>
+        </p:nvSpPr>
+        <p:spPr/>
+        <p:txBody>
+          <a:bodyPr/>
+          <a:lstStyle/>
+          <a:p>
+            <a:pPr marL="514350" indent="-514350">
+              <a:buFont typeface="+mj-lt"/>
+              <a:buAutoNum type="arabicPeriod"/>
+            </a:pPr>
+            <a:r>
+              <a:rPr lang="en-US" dirty="0"/>
+              <a:t>Transpose </a:t>
+            </a:r>
+            <a:r>
+              <a:rPr lang="en-US" dirty="0" err="1"/>
+              <a:t>asv</a:t>
+            </a:r>
+            <a:r>
+              <a:rPr lang="en-US" dirty="0"/>
+              <a:t> table (</a:t>
+            </a:r>
+            <a:r>
+              <a:rPr lang="en-US" dirty="0" err="1"/>
+              <a:t>asv</a:t>
+            </a:r>
+            <a:r>
+              <a:rPr lang="en-US" dirty="0"/>
+              <a:t> = rows, samples = columns) and compute a matrix of Spearman’s rho rank correlation coefficients for all possible pairs of columns (</a:t>
+            </a:r>
+            <a:r>
+              <a:rPr lang="en-US" dirty="0" err="1"/>
+              <a:t>asvs</a:t>
+            </a:r>
+            <a:r>
+              <a:rPr lang="en-US" dirty="0"/>
+              <a:t>).</a:t>
+            </a:r>
+          </a:p>
+          <a:p>
+            <a:pPr marL="514350" indent="-514350">
+              <a:buFont typeface="+mj-lt"/>
+              <a:buAutoNum type="arabicPeriod"/>
+            </a:pPr>
+            <a:endParaRPr lang="en-US" dirty="0"/>
+          </a:p>
+        </p:txBody>
+      </p:sp>
+    </p:spTree>
+    <p:extLst>
+      <p:ext uri="{BB962C8B-B14F-4D97-AF65-F5344CB8AC3E}">
+        <p14:creationId xmlns:p14="http://schemas.microsoft.com/office/powerpoint/2010/main" val="1057470918"/>
       </p:ext>
     </p:extLst>
   </p:cSld>

--- a/Projects/Chapter1/community-assembly.pptx
+++ b/Projects/Chapter1/community-assembly.pptx
@@ -5,7 +5,7 @@
     <p:sldMasterId id="2147483648" r:id="rId1"/>
   </p:sldMasterIdLst>
   <p:notesMasterIdLst>
-    <p:notesMasterId r:id="rId42"/>
+    <p:notesMasterId r:id="rId44"/>
   </p:notesMasterIdLst>
   <p:sldIdLst>
     <p:sldId id="256" r:id="rId2"/>
@@ -23,31 +23,33 @@
     <p:sldId id="300" r:id="rId14"/>
     <p:sldId id="301" r:id="rId15"/>
     <p:sldId id="302" r:id="rId16"/>
-    <p:sldId id="274" r:id="rId17"/>
-    <p:sldId id="288" r:id="rId18"/>
-    <p:sldId id="289" r:id="rId19"/>
-    <p:sldId id="290" r:id="rId20"/>
-    <p:sldId id="291" r:id="rId21"/>
-    <p:sldId id="292" r:id="rId22"/>
-    <p:sldId id="284" r:id="rId23"/>
-    <p:sldId id="285" r:id="rId24"/>
-    <p:sldId id="286" r:id="rId25"/>
-    <p:sldId id="263" r:id="rId26"/>
-    <p:sldId id="258" r:id="rId27"/>
-    <p:sldId id="259" r:id="rId28"/>
-    <p:sldId id="261" r:id="rId29"/>
-    <p:sldId id="277" r:id="rId30"/>
-    <p:sldId id="278" r:id="rId31"/>
-    <p:sldId id="293" r:id="rId32"/>
-    <p:sldId id="271" r:id="rId33"/>
-    <p:sldId id="265" r:id="rId34"/>
-    <p:sldId id="260" r:id="rId35"/>
-    <p:sldId id="262" r:id="rId36"/>
-    <p:sldId id="294" r:id="rId37"/>
-    <p:sldId id="298" r:id="rId38"/>
-    <p:sldId id="295" r:id="rId39"/>
-    <p:sldId id="296" r:id="rId40"/>
-    <p:sldId id="297" r:id="rId41"/>
+    <p:sldId id="309" r:id="rId17"/>
+    <p:sldId id="310" r:id="rId18"/>
+    <p:sldId id="274" r:id="rId19"/>
+    <p:sldId id="288" r:id="rId20"/>
+    <p:sldId id="289" r:id="rId21"/>
+    <p:sldId id="290" r:id="rId22"/>
+    <p:sldId id="291" r:id="rId23"/>
+    <p:sldId id="292" r:id="rId24"/>
+    <p:sldId id="284" r:id="rId25"/>
+    <p:sldId id="285" r:id="rId26"/>
+    <p:sldId id="286" r:id="rId27"/>
+    <p:sldId id="263" r:id="rId28"/>
+    <p:sldId id="258" r:id="rId29"/>
+    <p:sldId id="259" r:id="rId30"/>
+    <p:sldId id="261" r:id="rId31"/>
+    <p:sldId id="277" r:id="rId32"/>
+    <p:sldId id="278" r:id="rId33"/>
+    <p:sldId id="293" r:id="rId34"/>
+    <p:sldId id="271" r:id="rId35"/>
+    <p:sldId id="265" r:id="rId36"/>
+    <p:sldId id="260" r:id="rId37"/>
+    <p:sldId id="262" r:id="rId38"/>
+    <p:sldId id="294" r:id="rId39"/>
+    <p:sldId id="298" r:id="rId40"/>
+    <p:sldId id="295" r:id="rId41"/>
+    <p:sldId id="296" r:id="rId42"/>
+    <p:sldId id="297" r:id="rId43"/>
   </p:sldIdLst>
   <p:sldSz cx="12192000" cy="6858000"/>
   <p:notesSz cx="6858000" cy="9144000"/>
@@ -25927,9 +25929,50 @@
           <a:bodyPr/>
           <a:lstStyle/>
           <a:p>
+            <a:pPr marL="228600" indent="-228600">
+              <a:buAutoNum type="arabicParenR"/>
+            </a:pPr>
             <a:r>
               <a:rPr lang="en-US" dirty="0"/>
-              <a:t>Relative abundance plots, agglomerated by Class</a:t>
+              <a:t>Used ‘vegan’ package to get Shannon, Simpsons, Inverted Simpsons Diversity Indexes of count data in each sample. Also </a:t>
+            </a:r>
+            <a:r>
+              <a:rPr lang="en-US" dirty="0" err="1"/>
+              <a:t>Pilou</a:t>
+            </a:r>
+            <a:r>
+              <a:rPr lang="en-US" dirty="0"/>
+              <a:t> evenness and Faith’s phylogenetic diversity. </a:t>
+            </a:r>
+          </a:p>
+          <a:p>
+            <a:pPr marL="228600" indent="-228600">
+              <a:buAutoNum type="arabicParenR"/>
+            </a:pPr>
+            <a:endParaRPr lang="en-US" dirty="0"/>
+          </a:p>
+          <a:p>
+            <a:pPr marL="228600" indent="-228600">
+              <a:buAutoNum type="arabicParenR"/>
+            </a:pPr>
+            <a:r>
+              <a:rPr lang="en-US" dirty="0"/>
+              <a:t>Alternatively use alpha() function from microbiome package to calculate all indices at one!</a:t>
+            </a:r>
+          </a:p>
+          <a:p>
+            <a:pPr marL="228600" indent="-228600">
+              <a:buAutoNum type="arabicParenR"/>
+            </a:pPr>
+            <a:endParaRPr lang="en-US" dirty="0"/>
+          </a:p>
+          <a:p>
+            <a:pPr marL="228600" indent="-228600">
+              <a:buAutoNum type="arabicParenR"/>
+            </a:pPr>
+            <a:r>
+              <a:rPr lang="en-US" dirty="0"/>
+              <a:t>Here we have boxplots comparing the diversity indices of the two glaciers</a:t>
             </a:r>
           </a:p>
         </p:txBody>
@@ -25951,7 +25994,7 @@
           <a:p>
             <a:fld id="{91AE2140-D502-214A-B76B-E0784B2C949B}" type="slidenum">
               <a:rPr lang="en-US" smtClean="0"/>
-              <a:t>19</a:t>
+              <a:t>18</a:t>
             </a:fld>
             <a:endParaRPr lang="en-US"/>
           </a:p>
@@ -25960,7 +26003,7 @@
     </p:spTree>
     <p:extLst>
       <p:ext uri="{BB962C8B-B14F-4D97-AF65-F5344CB8AC3E}">
-        <p14:creationId xmlns:p14="http://schemas.microsoft.com/office/powerpoint/2010/main" val="761170827"/>
+        <p14:creationId xmlns:p14="http://schemas.microsoft.com/office/powerpoint/2010/main" val="3006070899"/>
       </p:ext>
     </p:extLst>
   </p:cSld>
@@ -26016,23 +26059,7 @@
           <a:p>
             <a:r>
               <a:rPr lang="en-US" dirty="0"/>
-              <a:t>#Unweighted </a:t>
-            </a:r>
-            <a:r>
-              <a:rPr lang="en-US" dirty="0" err="1"/>
-              <a:t>unifrac</a:t>
-            </a:r>
-            <a:r>
-              <a:rPr lang="en-US" dirty="0"/>
-              <a:t> is based on presence/absence not abundance - but it is sensitive to sequencing depth. So if a sample is of greater depth than other reads it may have more low abundance taxa and therefore effect the </a:t>
-            </a:r>
-            <a:r>
-              <a:rPr lang="en-US" dirty="0" err="1"/>
-              <a:t>unifrac</a:t>
-            </a:r>
-            <a:r>
-              <a:rPr lang="en-US" dirty="0"/>
-              <a:t> metric</a:t>
+              <a:t>Comparison of phylogenetic diversities of the two glaciers</a:t>
             </a:r>
           </a:p>
         </p:txBody>
@@ -26054,7 +26081,7 @@
           <a:p>
             <a:fld id="{91AE2140-D502-214A-B76B-E0784B2C949B}" type="slidenum">
               <a:rPr lang="en-US" smtClean="0"/>
-              <a:t>20</a:t>
+              <a:t>19</a:t>
             </a:fld>
             <a:endParaRPr lang="en-US"/>
           </a:p>
@@ -26063,7 +26090,7 @@
     </p:spTree>
     <p:extLst>
       <p:ext uri="{BB962C8B-B14F-4D97-AF65-F5344CB8AC3E}">
-        <p14:creationId xmlns:p14="http://schemas.microsoft.com/office/powerpoint/2010/main" val="127474224"/>
+        <p14:creationId xmlns:p14="http://schemas.microsoft.com/office/powerpoint/2010/main" val="4033971060"/>
       </p:ext>
     </p:extLst>
   </p:cSld>
@@ -26119,111 +26146,8 @@
           <a:p>
             <a:r>
               <a:rPr lang="en-US" dirty="0"/>
-              <a:t>1) Looked for evidence of compositionality. By multiplying ASV table by itself we can look for evidence of covariance.</a:t>
-            </a:r>
-          </a:p>
-          <a:p>
-            <a:r>
-              <a:rPr lang="en-US" dirty="0"/>
-              <a:t>#We then find the determinant of the covariance matrix and if the answer is 0 we have evidence of compositionality in the data – the result was 0 so the data is compositional.</a:t>
-            </a:r>
-          </a:p>
-          <a:p>
-            <a:endParaRPr lang="en-US" dirty="0"/>
-          </a:p>
-          <a:p>
-            <a:r>
-              <a:rPr lang="en-US" dirty="0"/>
-              <a:t>2) Because out data are compositional we then need to transform them for downstream analysis</a:t>
-            </a:r>
-          </a:p>
-          <a:p>
-            <a:r>
-              <a:rPr lang="en-US" dirty="0"/>
-              <a:t>#Step Four: Perform a Log-Ratio </a:t>
-            </a:r>
-            <a:r>
-              <a:rPr lang="en-US" dirty="0" err="1"/>
-              <a:t>trasnformation</a:t>
-            </a:r>
-            <a:endParaRPr lang="en-US" dirty="0"/>
-          </a:p>
-          <a:p>
-            <a:r>
-              <a:rPr lang="en-US" dirty="0"/>
-              <a:t>#This will </a:t>
-            </a:r>
-            <a:r>
-              <a:rPr lang="en-US" dirty="0" err="1"/>
-              <a:t>normalise</a:t>
-            </a:r>
-            <a:r>
-              <a:rPr lang="en-US" dirty="0"/>
-              <a:t> the ASV data within each sample</a:t>
-            </a:r>
-          </a:p>
-          <a:p>
-            <a:endParaRPr lang="en-US" dirty="0"/>
-          </a:p>
-          <a:p>
-            <a:r>
-              <a:rPr lang="en-US" dirty="0"/>
-              <a:t>3) Look at the difference the log-ratio transformation has made to the covariance of the data</a:t>
-            </a:r>
-          </a:p>
-          <a:p>
-            <a:endParaRPr lang="en-US" dirty="0"/>
-          </a:p>
-          <a:p>
-            <a:r>
-              <a:rPr lang="en-US" dirty="0"/>
-              <a:t>4) Figure 6: Perform Principal Component Analysis on Log-Ratio Transformed Data, Create visual representation of PCA and plot</a:t>
-            </a:r>
-          </a:p>
-          <a:p>
-            <a:endParaRPr lang="en-US" dirty="0"/>
-          </a:p>
-          <a:p>
-            <a:r>
-              <a:rPr lang="en-US" dirty="0"/>
-              <a:t>5) Figure 7: </a:t>
-            </a:r>
-            <a:r>
-              <a:rPr lang="en-US" dirty="0" err="1"/>
-              <a:t>Visualise</a:t>
-            </a:r>
-            <a:r>
-              <a:rPr lang="en-US" dirty="0"/>
-              <a:t> and plot the </a:t>
-            </a:r>
-            <a:r>
-              <a:rPr lang="en-US" dirty="0" err="1"/>
-              <a:t>pca</a:t>
-            </a:r>
-            <a:r>
-              <a:rPr lang="en-US" dirty="0"/>
-              <a:t> </a:t>
-            </a:r>
-          </a:p>
-          <a:p>
-            <a:endParaRPr lang="en-US" dirty="0"/>
-          </a:p>
-          <a:p>
-            <a:r>
-              <a:rPr lang="en-US" dirty="0"/>
-              <a:t>6) Computed the </a:t>
-            </a:r>
-            <a:r>
-              <a:rPr lang="en-US" dirty="0" err="1"/>
-              <a:t>jaccard</a:t>
-            </a:r>
-            <a:r>
-              <a:rPr lang="en-US" dirty="0"/>
-              <a:t> distance metric</a:t>
-            </a:r>
-          </a:p>
-          <a:p>
-            <a:endParaRPr lang="en-US" dirty="0"/>
+              <a:t>Relative abundance plots, agglomerated by Class</a:t>
+            </a:r>
           </a:p>
         </p:txBody>
       </p:sp>
@@ -26244,7 +26168,7 @@
           <a:p>
             <a:fld id="{91AE2140-D502-214A-B76B-E0784B2C949B}" type="slidenum">
               <a:rPr lang="en-US" smtClean="0"/>
-              <a:t>22</a:t>
+              <a:t>21</a:t>
             </a:fld>
             <a:endParaRPr lang="en-US"/>
           </a:p>
@@ -26253,7 +26177,7 @@
     </p:spTree>
     <p:extLst>
       <p:ext uri="{BB962C8B-B14F-4D97-AF65-F5344CB8AC3E}">
-        <p14:creationId xmlns:p14="http://schemas.microsoft.com/office/powerpoint/2010/main" val="171950858"/>
+        <p14:creationId xmlns:p14="http://schemas.microsoft.com/office/powerpoint/2010/main" val="761170827"/>
       </p:ext>
     </p:extLst>
   </p:cSld>
@@ -26309,74 +26233,24 @@
           <a:p>
             <a:r>
               <a:rPr lang="en-US" dirty="0"/>
-              <a:t>I performed linear regressions between the explanatory variables (glaciers) and response variables (richness, depth, area, chlorophyll, </a:t>
+              <a:t>#Unweighted </a:t>
             </a:r>
             <a:r>
               <a:rPr lang="en-US" dirty="0" err="1"/>
-              <a:t>dna</a:t>
+              <a:t>unifrac</a:t>
             </a:r>
             <a:r>
               <a:rPr lang="en-US" dirty="0"/>
-              <a:t> per gram, diversity indices).</a:t>
-            </a:r>
-          </a:p>
-          <a:p>
-            <a:endParaRPr lang="en-US" dirty="0"/>
-          </a:p>
-          <a:p>
+              <a:t> is based on presence/absence not abundance - but it is sensitive to sequencing depth. So if a sample is of greater depth than other reads it may have more low abundance taxa and therefore effect the </a:t>
+            </a:r>
+            <a:r>
+              <a:rPr lang="en-US" dirty="0" err="1"/>
+              <a:t>unifrac</a:t>
+            </a:r>
             <a:r>
               <a:rPr lang="en-US" dirty="0"/>
-              <a:t>I then constructed ANOVA tables of the linear regression models to gauge their statistical significance. </a:t>
-            </a:r>
-          </a:p>
-          <a:p>
-            <a:endParaRPr lang="en-US" dirty="0"/>
-          </a:p>
-          <a:p>
-            <a:r>
-              <a:rPr lang="en-US" dirty="0"/>
-              <a:t>#Analysis of Variance (ANOVA), a linear model analysis. We want to ask: is the ASV richness/chlorophyll/hole size/hole depth/DNA per gram between glaciers significantly different? Plot the data divided into glacier groups</a:t>
-            </a:r>
-          </a:p>
-          <a:p>
-            <a:r>
-              <a:rPr lang="en-US" dirty="0"/>
-              <a:t>#ANOVA quantifies the signal to noise ratio. How different are our groups in ratio to how spread out the data are? ANOVA will tell us how confident we can be that we are not being fooled by a type I error (a false positive difference between the groups)</a:t>
-            </a:r>
-          </a:p>
-          <a:p>
-            <a:r>
-              <a:rPr lang="en-US" dirty="0"/>
-              <a:t>#ANOVA will: 1) quantify the overall variability of the dataset. 2) Divide that variability into the variability between and within groups. More signal = more </a:t>
-            </a:r>
-            <a:r>
-              <a:rPr lang="en-US" dirty="0" err="1"/>
-              <a:t>condifent</a:t>
-            </a:r>
-            <a:r>
-              <a:rPr lang="en-US" dirty="0"/>
-              <a:t>. More noise = less confident.</a:t>
-            </a:r>
-          </a:p>
-          <a:p>
-            <a:endParaRPr lang="en-US" dirty="0"/>
-          </a:p>
-          <a:p>
-            <a:r>
-              <a:rPr lang="en-US" dirty="0"/>
-              <a:t>The ANOVA tables showed there was significant difference between the glaciers in terms of ASV richness, cryoconite hole depth, the </a:t>
-            </a:r>
-            <a:r>
-              <a:rPr lang="en-US" dirty="0" err="1"/>
-              <a:t>dna</a:t>
-            </a:r>
-            <a:r>
-              <a:rPr lang="en-US" dirty="0"/>
-              <a:t> per gram of cryoconite and faith’s pd.</a:t>
-            </a:r>
-          </a:p>
-          <a:p>
-            <a:endParaRPr lang="en-US" dirty="0"/>
+              <a:t> metric</a:t>
+            </a:r>
           </a:p>
         </p:txBody>
       </p:sp>
@@ -26397,7 +26271,7 @@
           <a:p>
             <a:fld id="{91AE2140-D502-214A-B76B-E0784B2C949B}" type="slidenum">
               <a:rPr lang="en-US" smtClean="0"/>
-              <a:t>23</a:t>
+              <a:t>22</a:t>
             </a:fld>
             <a:endParaRPr lang="en-US"/>
           </a:p>
@@ -26406,7 +26280,7 @@
     </p:spTree>
     <p:extLst>
       <p:ext uri="{BB962C8B-B14F-4D97-AF65-F5344CB8AC3E}">
-        <p14:creationId xmlns:p14="http://schemas.microsoft.com/office/powerpoint/2010/main" val="3419341708"/>
+        <p14:creationId xmlns:p14="http://schemas.microsoft.com/office/powerpoint/2010/main" val="127474224"/>
       </p:ext>
     </p:extLst>
   </p:cSld>
@@ -26462,17 +26336,108 @@
           <a:p>
             <a:r>
               <a:rPr lang="en-US" dirty="0"/>
-              <a:t>Linear Regression Analysis</a:t>
+              <a:t>1) Looked for evidence of compositionality. By multiplying ASV table by itself we can look for evidence of covariance.</a:t>
             </a:r>
           </a:p>
           <a:p>
             <a:r>
               <a:rPr lang="en-US" dirty="0"/>
-              <a:t>#We use linear regression analysis if our explanatory variable is continuous </a:t>
+              <a:t>#We then find the determinant of the covariance matrix and if the answer is 0 we have evidence of compositionality in the data – the result was 0 so the data is compositional.</a:t>
             </a:r>
           </a:p>
           <a:p>
             <a:endParaRPr lang="en-US" dirty="0"/>
+          </a:p>
+          <a:p>
+            <a:r>
+              <a:rPr lang="en-US" dirty="0"/>
+              <a:t>2) Because out data are compositional we then need to transform them for downstream analysis</a:t>
+            </a:r>
+          </a:p>
+          <a:p>
+            <a:r>
+              <a:rPr lang="en-US" dirty="0"/>
+              <a:t>#Step Four: Perform a Log-Ratio </a:t>
+            </a:r>
+            <a:r>
+              <a:rPr lang="en-US" dirty="0" err="1"/>
+              <a:t>trasnformation</a:t>
+            </a:r>
+            <a:endParaRPr lang="en-US" dirty="0"/>
+          </a:p>
+          <a:p>
+            <a:r>
+              <a:rPr lang="en-US" dirty="0"/>
+              <a:t>#This will </a:t>
+            </a:r>
+            <a:r>
+              <a:rPr lang="en-US" dirty="0" err="1"/>
+              <a:t>normalise</a:t>
+            </a:r>
+            <a:r>
+              <a:rPr lang="en-US" dirty="0"/>
+              <a:t> the ASV data within each sample</a:t>
+            </a:r>
+          </a:p>
+          <a:p>
+            <a:endParaRPr lang="en-US" dirty="0"/>
+          </a:p>
+          <a:p>
+            <a:r>
+              <a:rPr lang="en-US" dirty="0"/>
+              <a:t>3) Look at the difference the log-ratio transformation has made to the covariance of the data</a:t>
+            </a:r>
+          </a:p>
+          <a:p>
+            <a:endParaRPr lang="en-US" dirty="0"/>
+          </a:p>
+          <a:p>
+            <a:r>
+              <a:rPr lang="en-US" dirty="0"/>
+              <a:t>4) Figure 6: Perform Principal Component Analysis on Log-Ratio Transformed Data, Create visual representation of PCA and plot</a:t>
+            </a:r>
+          </a:p>
+          <a:p>
+            <a:endParaRPr lang="en-US" dirty="0"/>
+          </a:p>
+          <a:p>
+            <a:r>
+              <a:rPr lang="en-US" dirty="0"/>
+              <a:t>5) Figure 7: </a:t>
+            </a:r>
+            <a:r>
+              <a:rPr lang="en-US" dirty="0" err="1"/>
+              <a:t>Visualise</a:t>
+            </a:r>
+            <a:r>
+              <a:rPr lang="en-US" dirty="0"/>
+              <a:t> and plot the </a:t>
+            </a:r>
+            <a:r>
+              <a:rPr lang="en-US" dirty="0" err="1"/>
+              <a:t>pca</a:t>
+            </a:r>
+            <a:r>
+              <a:rPr lang="en-US" dirty="0"/>
+              <a:t> </a:t>
+            </a:r>
+          </a:p>
+          <a:p>
+            <a:endParaRPr lang="en-US" dirty="0"/>
+          </a:p>
+          <a:p>
+            <a:r>
+              <a:rPr lang="en-US" dirty="0"/>
+              <a:t>6) Computed the </a:t>
+            </a:r>
+            <a:r>
+              <a:rPr lang="en-US" dirty="0" err="1"/>
+              <a:t>jaccard</a:t>
+            </a:r>
+            <a:r>
+              <a:rPr lang="en-US" dirty="0"/>
+              <a:t> distance metric</a:t>
+            </a:r>
           </a:p>
           <a:p>
             <a:endParaRPr lang="en-US" dirty="0"/>
@@ -26505,7 +26470,7 @@
     </p:spTree>
     <p:extLst>
       <p:ext uri="{BB962C8B-B14F-4D97-AF65-F5344CB8AC3E}">
-        <p14:creationId xmlns:p14="http://schemas.microsoft.com/office/powerpoint/2010/main" val="2976129878"/>
+        <p14:creationId xmlns:p14="http://schemas.microsoft.com/office/powerpoint/2010/main" val="171950858"/>
       </p:ext>
     </p:extLst>
   </p:cSld>
@@ -26561,23 +26526,53 @@
           <a:p>
             <a:r>
               <a:rPr lang="en-US" dirty="0"/>
-              <a:t>Multivariate analysis can allow us to look at the relationship between community composition and environmental characteristics – these are deterministic, non-random processes. </a:t>
+              <a:t>I performed linear regressions between the explanatory variables (glaciers) and response variables (richness, depth, area, chlorophyll, </a:t>
             </a:r>
             <a:r>
               <a:rPr lang="en-US" dirty="0" err="1"/>
-              <a:t>Investiagation</a:t>
+              <a:t>dna</a:t>
             </a:r>
             <a:r>
               <a:rPr lang="en-US" dirty="0"/>
-              <a:t> into deterministic processes of community assembly (e.g. relationship between community composition and environmental characteristics) dominate most studies of microbial community assembly, </a:t>
+              <a:t> per gram, diversity indices).</a:t>
+            </a:r>
+          </a:p>
+          <a:p>
+            <a:endParaRPr lang="en-US" dirty="0"/>
+          </a:p>
+          <a:p>
+            <a:r>
+              <a:rPr lang="en-US" dirty="0"/>
+              <a:t>I then constructed ANOVA tables of the linear regression models to gauge their statistical significance. </a:t>
+            </a:r>
+          </a:p>
+          <a:p>
+            <a:endParaRPr lang="en-US" dirty="0"/>
+          </a:p>
+          <a:p>
+            <a:r>
+              <a:rPr lang="en-US" dirty="0"/>
+              <a:t>#Analysis of Variance (ANOVA), a linear model analysis. We want to ask: is the ASV richness/chlorophyll/hole size/hole depth/DNA per gram between glaciers significantly different? Plot the data divided into glacier groups</a:t>
+            </a:r>
+          </a:p>
+          <a:p>
+            <a:r>
+              <a:rPr lang="en-US" dirty="0"/>
+              <a:t>#ANOVA quantifies the signal to noise ratio. How different are our groups in ratio to how spread out the data are? ANOVA will tell us how confident we can be that we are not being fooled by a type I error (a false positive difference between the groups)</a:t>
+            </a:r>
+          </a:p>
+          <a:p>
+            <a:r>
+              <a:rPr lang="en-US" dirty="0"/>
+              <a:t>#ANOVA will: 1) quantify the overall variability of the dataset. 2) Divide that variability into the variability between and within groups. More signal = more </a:t>
             </a:r>
             <a:r>
               <a:rPr lang="en-US" dirty="0" err="1"/>
-              <a:t>howeber</a:t>
+              <a:t>condifent</a:t>
             </a:r>
             <a:r>
               <a:rPr lang="en-US" dirty="0"/>
-              <a:t>, it is likely both deterministic and stochastic processes contribute to community assembly. This is why I combine multivariate and network analysis (deterministic) with phylogenetic null modelling (deterministic and stochastic) and neutral modelling (stochastic). </a:t>
+              <a:t>. More noise = less confident.</a:t>
             </a:r>
           </a:p>
           <a:p>
@@ -26586,26 +26581,19 @@
           <a:p>
             <a:r>
               <a:rPr lang="en-US" dirty="0"/>
-              <a:t>It has been suggested that initial community assembly is driven by stochastic processes, and deterministic processes shape the community through time. </a:t>
+              <a:t>The ANOVA tables showed there was significant difference between the glaciers in terms of ASV richness, cryoconite hole depth, the </a:t>
+            </a:r>
+            <a:r>
+              <a:rPr lang="en-US" dirty="0" err="1"/>
+              <a:t>dna</a:t>
+            </a:r>
+            <a:r>
+              <a:rPr lang="en-US" dirty="0"/>
+              <a:t> per gram of cryoconite and faith’s pd.</a:t>
             </a:r>
           </a:p>
           <a:p>
             <a:endParaRPr lang="en-US" dirty="0"/>
-          </a:p>
-          <a:p>
-            <a:r>
-              <a:rPr lang="en-US" dirty="0"/>
-              <a:t>What do we already know about deterministic processes on glaciers?</a:t>
-            </a:r>
-          </a:p>
-          <a:p>
-            <a:endParaRPr lang="en-US" dirty="0"/>
-          </a:p>
-          <a:p>
-            <a:r>
-              <a:rPr lang="en-US" dirty="0"/>
-              <a:t>What do we already know about stochastic processes on glaciers?</a:t>
-            </a:r>
           </a:p>
         </p:txBody>
       </p:sp>
@@ -26635,7 +26623,7 @@
     </p:spTree>
     <p:extLst>
       <p:ext uri="{BB962C8B-B14F-4D97-AF65-F5344CB8AC3E}">
-        <p14:creationId xmlns:p14="http://schemas.microsoft.com/office/powerpoint/2010/main" val="2827327905"/>
+        <p14:creationId xmlns:p14="http://schemas.microsoft.com/office/powerpoint/2010/main" val="3419341708"/>
       </p:ext>
     </p:extLst>
   </p:cSld>
@@ -26691,16 +26679,20 @@
           <a:p>
             <a:r>
               <a:rPr lang="en-US" dirty="0"/>
-              <a:t>DDR doesn’t work for this dataset as most of the holes are reported to have the same long </a:t>
-            </a:r>
-            <a:r>
-              <a:rPr lang="en-US" dirty="0" err="1"/>
-              <a:t>lat</a:t>
-            </a:r>
+              <a:t>Linear Regression Analysis</a:t>
+            </a:r>
+          </a:p>
+          <a:p>
             <a:r>
               <a:rPr lang="en-US" dirty="0"/>
-              <a:t> coordinates.</a:t>
-            </a:r>
+              <a:t>#We use linear regression analysis if our explanatory variable is continuous </a:t>
+            </a:r>
+          </a:p>
+          <a:p>
+            <a:endParaRPr lang="en-US" dirty="0"/>
+          </a:p>
+          <a:p>
+            <a:endParaRPr lang="en-US" dirty="0"/>
           </a:p>
         </p:txBody>
       </p:sp>
@@ -26721,7 +26713,7 @@
           <a:p>
             <a:fld id="{91AE2140-D502-214A-B76B-E0784B2C949B}" type="slidenum">
               <a:rPr lang="en-US" smtClean="0"/>
-              <a:t>27</a:t>
+              <a:t>26</a:t>
             </a:fld>
             <a:endParaRPr lang="en-US"/>
           </a:p>
@@ -26730,7 +26722,7 @@
     </p:spTree>
     <p:extLst>
       <p:ext uri="{BB962C8B-B14F-4D97-AF65-F5344CB8AC3E}">
-        <p14:creationId xmlns:p14="http://schemas.microsoft.com/office/powerpoint/2010/main" val="2176052354"/>
+        <p14:creationId xmlns:p14="http://schemas.microsoft.com/office/powerpoint/2010/main" val="2976129878"/>
       </p:ext>
     </p:extLst>
   </p:cSld>
@@ -26786,23 +26778,23 @@
           <a:p>
             <a:r>
               <a:rPr lang="en-US" dirty="0"/>
-              <a:t>Sloan’s Neutral Model states that the probability of species </a:t>
-            </a:r>
-            <a:r>
-              <a:rPr lang="en-US" i="1" dirty="0" err="1"/>
-              <a:t>i</a:t>
+              <a:t>Multivariate analysis can allow us to look at the relationship between community composition and environmental characteristics – these are deterministic, non-random processes. </a:t>
+            </a:r>
+            <a:r>
+              <a:rPr lang="en-US" dirty="0" err="1"/>
+              <a:t>Investiagation</a:t>
             </a:r>
             <a:r>
               <a:rPr lang="en-US" dirty="0"/>
-              <a:t> occurring within a sample at abundance (x</a:t>
-            </a:r>
-            <a:r>
-              <a:rPr lang="en-US" i="0" baseline="-25000" dirty="0"/>
-              <a:t>i</a:t>
+              <a:t> into deterministic processes of community assembly (e.g. relationship between community composition and environmental characteristics) dominate most studies of microbial community assembly, </a:t>
+            </a:r>
+            <a:r>
+              <a:rPr lang="en-US" dirty="0" err="1"/>
+              <a:t>howeber</a:t>
             </a:r>
             <a:r>
               <a:rPr lang="en-US" dirty="0"/>
-              <a:t>) above a detection threshold (d) </a:t>
+              <a:t>, it is likely both deterministic and stochastic processes contribute to community assembly. This is why I combine multivariate and network analysis (deterministic) with phylogenetic null modelling (deterministic and stochastic) and neutral modelling (stochastic). </a:t>
             </a:r>
           </a:p>
           <a:p>
@@ -26811,7 +26803,7 @@
           <a:p>
             <a:r>
               <a:rPr lang="en-US" dirty="0"/>
-              <a:t>Model results are compared to the observed data. Deviation of observed data from model results is assumed to be evidence of deterministic community assembly.</a:t>
+              <a:t>It has been suggested that initial community assembly is driven by stochastic processes, and deterministic processes shape the community through time. </a:t>
             </a:r>
           </a:p>
           <a:p>
@@ -26820,15 +26812,16 @@
           <a:p>
             <a:r>
               <a:rPr lang="en-US" dirty="0"/>
-              <a:t>The abundance of each ASV in the metacommunity (p</a:t>
-            </a:r>
-            <a:r>
-              <a:rPr lang="en-US" i="1" dirty="0"/>
-              <a:t>i</a:t>
-            </a:r>
+              <a:t>What do we already know about deterministic processes on glaciers?</a:t>
+            </a:r>
+          </a:p>
+          <a:p>
+            <a:endParaRPr lang="en-US" dirty="0"/>
+          </a:p>
+          <a:p>
             <a:r>
               <a:rPr lang="en-US" dirty="0"/>
-              <a:t>) is estimated by averaging it’s relative abundance across all samples.</a:t>
+              <a:t>What do we already know about stochastic processes on glaciers?</a:t>
             </a:r>
           </a:p>
         </p:txBody>
@@ -26850,7 +26843,7 @@
           <a:p>
             <a:fld id="{91AE2140-D502-214A-B76B-E0784B2C949B}" type="slidenum">
               <a:rPr lang="en-US" smtClean="0"/>
-              <a:t>28</a:t>
+              <a:t>27</a:t>
             </a:fld>
             <a:endParaRPr lang="en-US"/>
           </a:p>
@@ -26859,7 +26852,7 @@
     </p:spTree>
     <p:extLst>
       <p:ext uri="{BB962C8B-B14F-4D97-AF65-F5344CB8AC3E}">
-        <p14:creationId xmlns:p14="http://schemas.microsoft.com/office/powerpoint/2010/main" val="1811139538"/>
+        <p14:creationId xmlns:p14="http://schemas.microsoft.com/office/powerpoint/2010/main" val="2827327905"/>
       </p:ext>
     </p:extLst>
   </p:cSld>
@@ -26915,23 +26908,15 @@
           <a:p>
             <a:r>
               <a:rPr lang="en-US" dirty="0"/>
-              <a:t>Code developed from Barnett et al., (2020) Soil characteristics and land-use drive bacterial community assembly patterns (https://</a:t>
+              <a:t>DDR doesn’t work for this dataset as most of the holes are reported to have the same long </a:t>
             </a:r>
             <a:r>
               <a:rPr lang="en-US" dirty="0" err="1"/>
-              <a:t>github.com</a:t>
+              <a:t>lat</a:t>
             </a:r>
             <a:r>
               <a:rPr lang="en-US" dirty="0"/>
-              <a:t>/seb369/</a:t>
-            </a:r>
-            <a:r>
-              <a:rPr lang="en-US" dirty="0" err="1"/>
-              <a:t>landuse_comm_assembly</a:t>
-            </a:r>
-            <a:r>
-              <a:rPr lang="en-US" dirty="0"/>
-              <a:t>)</a:t>
+              <a:t> coordinates.</a:t>
             </a:r>
           </a:p>
         </p:txBody>
@@ -26962,7 +26947,7 @@
     </p:spTree>
     <p:extLst>
       <p:ext uri="{BB962C8B-B14F-4D97-AF65-F5344CB8AC3E}">
-        <p14:creationId xmlns:p14="http://schemas.microsoft.com/office/powerpoint/2010/main" val="2263901205"/>
+        <p14:creationId xmlns:p14="http://schemas.microsoft.com/office/powerpoint/2010/main" val="2176052354"/>
       </p:ext>
     </p:extLst>
   </p:cSld>
@@ -27018,84 +27003,50 @@
           <a:p>
             <a:r>
               <a:rPr lang="en-US" dirty="0"/>
-              <a:t>This is the result of the model fitting with the Sommers dataset (not reduced).</a:t>
-            </a:r>
-          </a:p>
-          <a:p>
+              <a:t>Sloan’s Neutral Model states that the probability of species </a:t>
+            </a:r>
+            <a:r>
+              <a:rPr lang="en-US" i="1" dirty="0" err="1"/>
+              <a:t>i</a:t>
+            </a:r>
             <a:r>
               <a:rPr lang="en-US" dirty="0"/>
-              <a:t>X axis = log mean relative abundances of each ASV</a:t>
-            </a:r>
-          </a:p>
-          <a:p>
+              <a:t> occurring within a sample at abundance (x</a:t>
+            </a:r>
+            <a:r>
+              <a:rPr lang="en-US" i="0" baseline="-25000" dirty="0"/>
+              <a:t>i</a:t>
+            </a:r>
             <a:r>
               <a:rPr lang="en-US" dirty="0"/>
-              <a:t>Y axis = mean occurrence frequency of each ASV </a:t>
-            </a:r>
+              <a:t>) above a detection threshold (d) </a:t>
+            </a:r>
+          </a:p>
+          <a:p>
+            <a:endParaRPr lang="en-US" dirty="0"/>
           </a:p>
           <a:p>
             <a:r>
               <a:rPr lang="en-US" dirty="0"/>
-              <a:t>Points = observed log relative abundances against occurrence frequencies</a:t>
-            </a:r>
+              <a:t>Model results are compared to the observed data. Deviation of observed data from model results is assumed to be evidence of deterministic community assembly.</a:t>
+            </a:r>
+          </a:p>
+          <a:p>
+            <a:endParaRPr lang="en-US" dirty="0"/>
           </a:p>
           <a:p>
             <a:r>
               <a:rPr lang="en-US" dirty="0"/>
-              <a:t>Solid line = predicted log relative abundances plotted against occurrence frequencies</a:t>
-            </a:r>
-          </a:p>
-          <a:p>
+              <a:t>The abundance of each ASV in the metacommunity (p</a:t>
+            </a:r>
+            <a:r>
+              <a:rPr lang="en-US" i="1" dirty="0"/>
+              <a:t>i</a:t>
+            </a:r>
             <a:r>
               <a:rPr lang="en-US" dirty="0"/>
-              <a:t>Dotted lines = 95% confidence intervals</a:t>
-            </a:r>
-          </a:p>
-          <a:p>
-            <a:endParaRPr lang="en-US" dirty="0"/>
-          </a:p>
-          <a:p>
-            <a:r>
-              <a:rPr lang="en-US" dirty="0"/>
-              <a:t>This allows us to assess to what degree observed community structure can be explained by stochastic processes within each sample.</a:t>
-            </a:r>
-          </a:p>
-          <a:p>
-            <a:r>
-              <a:rPr lang="en-US" dirty="0"/>
-              <a:t>The Sloan neutral model is applied here. This model does not take into account phylogenetic distance. </a:t>
-            </a:r>
-          </a:p>
-          <a:p>
-            <a:r>
-              <a:rPr lang="en-US" dirty="0"/>
-              <a:t>ASV occurrence frequency is explained as a function of ASV abundance within the metacommunity (i.e. the more abundant an ASV is in the metacommunity, the more frequently it will be detected in the local community by chance). </a:t>
-            </a:r>
-          </a:p>
-          <a:p>
-            <a:r>
-              <a:rPr lang="en-US" dirty="0"/>
-              <a:t>The neutral model performed well, explaining 77% of variation in ASV detection frequency with an estimated migration factor of 0.02 between sites.</a:t>
-            </a:r>
-          </a:p>
-          <a:p>
-            <a:r>
-              <a:rPr lang="en-US" dirty="0"/>
-              <a:t>These results suggest that neutral assembly processes can explain the pattern of observed ASV occurrence frequencies </a:t>
-            </a:r>
-            <a:r>
-              <a:rPr lang="en-US" strike="sngStrike" dirty="0"/>
-              <a:t>and that the the regional species pool is a driving factor in the community composition of these samples. </a:t>
-            </a:r>
-          </a:p>
-          <a:p>
-            <a:r>
-              <a:rPr lang="en-US" strike="noStrike" dirty="0"/>
-              <a:t>The deviation of predicted occurrence frequencies from observed occurrence frequencies suggests that there are also deterministic processes driving community composition.</a:t>
-            </a:r>
-          </a:p>
-          <a:p>
-            <a:endParaRPr lang="en-US" dirty="0"/>
+              <a:t>) is estimated by averaging it’s relative abundance across all samples.</a:t>
+            </a:r>
           </a:p>
         </p:txBody>
       </p:sp>
@@ -27125,7 +27076,7 @@
     </p:spTree>
     <p:extLst>
       <p:ext uri="{BB962C8B-B14F-4D97-AF65-F5344CB8AC3E}">
-        <p14:creationId xmlns:p14="http://schemas.microsoft.com/office/powerpoint/2010/main" val="1669585764"/>
+        <p14:creationId xmlns:p14="http://schemas.microsoft.com/office/powerpoint/2010/main" val="1811139538"/>
       </p:ext>
     </p:extLst>
   </p:cSld>
@@ -27346,7 +27297,23 @@
           <a:p>
             <a:r>
               <a:rPr lang="en-US" dirty="0"/>
-              <a:t>Here there is only one significant relationship between phylogenetic distance and environmental variable – so the null model may not be appropriate for this data – however, we must consider that this dataset was drastically reduced to allow the correlograms to process on my local computer. With that in mind, we continue with the null model analysis.</a:t>
+              <a:t>Code developed from Barnett et al., (2020) Soil characteristics and land-use drive bacterial community assembly patterns (https://</a:t>
+            </a:r>
+            <a:r>
+              <a:rPr lang="en-US" dirty="0" err="1"/>
+              <a:t>github.com</a:t>
+            </a:r>
+            <a:r>
+              <a:rPr lang="en-US" dirty="0"/>
+              <a:t>/seb369/</a:t>
+            </a:r>
+            <a:r>
+              <a:rPr lang="en-US" dirty="0" err="1"/>
+              <a:t>landuse_comm_assembly</a:t>
+            </a:r>
+            <a:r>
+              <a:rPr lang="en-US" dirty="0"/>
+              <a:t>)</a:t>
             </a:r>
           </a:p>
         </p:txBody>
@@ -27368,7 +27335,7 @@
           <a:p>
             <a:fld id="{91AE2140-D502-214A-B76B-E0784B2C949B}" type="slidenum">
               <a:rPr lang="en-US" smtClean="0"/>
-              <a:t>32</a:t>
+              <a:t>31</a:t>
             </a:fld>
             <a:endParaRPr lang="en-US"/>
           </a:p>
@@ -27377,7 +27344,7 @@
     </p:spTree>
     <p:extLst>
       <p:ext uri="{BB962C8B-B14F-4D97-AF65-F5344CB8AC3E}">
-        <p14:creationId xmlns:p14="http://schemas.microsoft.com/office/powerpoint/2010/main" val="1424753429"/>
+        <p14:creationId xmlns:p14="http://schemas.microsoft.com/office/powerpoint/2010/main" val="2263901205"/>
       </p:ext>
     </p:extLst>
   </p:cSld>
@@ -27433,25 +27400,37 @@
           <a:p>
             <a:r>
               <a:rPr lang="en-US" dirty="0"/>
-              <a:t>Stochastic processes can produce complex spatial community patterns. </a:t>
+              <a:t>This is the result of the model fitting with the Sommers dataset (not reduced).</a:t>
             </a:r>
           </a:p>
           <a:p>
             <a:r>
               <a:rPr lang="en-US" dirty="0"/>
-              <a:t>Ecological drift = random birth/death events in a specific area, in the absence of selection. Ecological drift is particularly important when dispersal is limited as illustrated by island biogeography theory.</a:t>
+              <a:t>X axis = log mean relative abundances of each ASV</a:t>
             </a:r>
           </a:p>
           <a:p>
             <a:r>
               <a:rPr lang="en-US" dirty="0"/>
-              <a:t>Dispersal limitation between isolated habitats promotes local extinction and ecological drift which causes initially identical communities to diverge. Ecological drift can cause communities to diverge, even when dispersal is high and selection pressure is low.</a:t>
+              <a:t>Y axis = mean occurrence frequency of each ASV </a:t>
             </a:r>
           </a:p>
           <a:p>
             <a:r>
               <a:rPr lang="en-US" dirty="0"/>
-              <a:t>Homogenizing dispersal = high dispersal rates leading to similar communities between habitats (overcomes the impact of ecological drift and even deterministic processes)</a:t>
+              <a:t>Points = observed log relative abundances against occurrence frequencies</a:t>
+            </a:r>
+          </a:p>
+          <a:p>
+            <a:r>
+              <a:rPr lang="en-US" dirty="0"/>
+              <a:t>Solid line = predicted log relative abundances plotted against occurrence frequencies</a:t>
+            </a:r>
+          </a:p>
+          <a:p>
+            <a:r>
+              <a:rPr lang="en-US" dirty="0"/>
+              <a:t>Dotted lines = 95% confidence intervals</a:t>
             </a:r>
           </a:p>
           <a:p>
@@ -27460,40 +27439,41 @@
           <a:p>
             <a:r>
               <a:rPr lang="en-US" dirty="0"/>
-              <a:t>Deterministic (deterministic processes commonly mean beta diversity varies as a result of environmental characteristics – i.e. communities are more or less different due to the differences or similarities of the environments)</a:t>
+              <a:t>This allows us to assess to what degree observed community structure can be explained by stochastic processes within each sample.</a:t>
             </a:r>
           </a:p>
           <a:p>
             <a:r>
               <a:rPr lang="en-US" dirty="0"/>
-              <a:t>Variable selection – deterministic processes are driving variable composition between communities. Different areas have different environmental characteristics that select for different species.</a:t>
+              <a:t>The Sloan neutral model is applied here. This model does not take into account phylogenetic distance. </a:t>
             </a:r>
           </a:p>
           <a:p>
             <a:r>
               <a:rPr lang="en-US" dirty="0"/>
-              <a:t>Homogenizing selection – deterministic processes are driving homogenous composition between communities. Different areas have similar environmental characteristics that select for similar species.</a:t>
-            </a:r>
-          </a:p>
-          <a:p>
-            <a:endParaRPr lang="en-US" dirty="0"/>
+              <a:t>ASV occurrence frequency is explained as a function of ASV abundance within the metacommunity (i.e. the more abundant an ASV is in the metacommunity, the more frequently it will be detected in the local community by chance). </a:t>
+            </a:r>
           </a:p>
           <a:p>
             <a:r>
               <a:rPr lang="en-US" dirty="0"/>
-              <a:t>Dispersal limitation – stochastic dispersal limitation is driving variable composition between communities </a:t>
+              <a:t>The neutral model performed well, explaining 77% of variation in ASV detection frequency with an estimated migration factor of 0.02 between sites.</a:t>
             </a:r>
           </a:p>
           <a:p>
             <a:r>
               <a:rPr lang="en-US" dirty="0"/>
-              <a:t>Homogenizing dispersal – stochastic high dispersal is driving homogenous composition between communities</a:t>
-            </a:r>
-          </a:p>
-          <a:p>
-            <a:r>
-              <a:rPr lang="en-US" dirty="0"/>
-              <a:t>Ecological drift – stochastic ecological drift is driving variable composition between communities</a:t>
+              <a:t>These results suggest that neutral assembly processes can explain the pattern of observed ASV occurrence frequencies </a:t>
+            </a:r>
+            <a:r>
+              <a:rPr lang="en-US" strike="sngStrike" dirty="0"/>
+              <a:t>and that the the regional species pool is a driving factor in the community composition of these samples. </a:t>
+            </a:r>
+          </a:p>
+          <a:p>
+            <a:r>
+              <a:rPr lang="en-US" strike="noStrike" dirty="0"/>
+              <a:t>The deviation of predicted occurrence frequencies from observed occurrence frequencies suggests that there are also deterministic processes driving community composition.</a:t>
             </a:r>
           </a:p>
           <a:p>
@@ -27518,7 +27498,7 @@
           <a:p>
             <a:fld id="{91AE2140-D502-214A-B76B-E0784B2C949B}" type="slidenum">
               <a:rPr lang="en-US" smtClean="0"/>
-              <a:t>33</a:t>
+              <a:t>32</a:t>
             </a:fld>
             <a:endParaRPr lang="en-US"/>
           </a:p>
@@ -27527,7 +27507,7 @@
     </p:spTree>
     <p:extLst>
       <p:ext uri="{BB962C8B-B14F-4D97-AF65-F5344CB8AC3E}">
-        <p14:creationId xmlns:p14="http://schemas.microsoft.com/office/powerpoint/2010/main" val="4270121788"/>
+        <p14:creationId xmlns:p14="http://schemas.microsoft.com/office/powerpoint/2010/main" val="1669585764"/>
       </p:ext>
     </p:extLst>
   </p:cSld>
@@ -27583,51 +27563,7 @@
           <a:p>
             <a:r>
               <a:rPr lang="en-US" dirty="0"/>
-              <a:t>Whilst multivariate analysis can assist us in investigating abiotic selection, microbial community assembly is also shaped by biotic selection. </a:t>
-            </a:r>
-          </a:p>
-          <a:p>
-            <a:endParaRPr lang="en-US" dirty="0"/>
-          </a:p>
-          <a:p>
-            <a:r>
-              <a:rPr lang="en-US" dirty="0"/>
-              <a:t>Biotic interactions may include top-down control through viral lysis and grazing, as well as microbe-microbe interactions.</a:t>
-            </a:r>
-          </a:p>
-          <a:p>
-            <a:endParaRPr lang="en-US" dirty="0"/>
-          </a:p>
-          <a:p>
-            <a:r>
-              <a:rPr lang="en-US" dirty="0"/>
-              <a:t>Due to technological restrictions, investigations of microbe-microbe interactions have typically been limited. With access to high-throughout sequencing, we can now construct co-occurrence networks in an attempt to decipher intra- and inter-specific interactions within communities.</a:t>
-            </a:r>
-          </a:p>
-          <a:p>
-            <a:endParaRPr lang="en-US" dirty="0"/>
-          </a:p>
-          <a:p>
-            <a:r>
-              <a:rPr lang="en-US" dirty="0"/>
-              <a:t>Previous research has indicated that microbial communities exhibit non-random co-occurrence patterns and module structures, suggesting that biotic selection plays a strong role in shaping community assembly.</a:t>
-            </a:r>
-          </a:p>
-          <a:p>
-            <a:endParaRPr lang="en-US" dirty="0"/>
-          </a:p>
-          <a:p>
-            <a:r>
-              <a:rPr lang="en-US" dirty="0"/>
-              <a:t>Communities may even </a:t>
-            </a:r>
-            <a:r>
-              <a:rPr lang="en-US" dirty="0" err="1"/>
-              <a:t>centre</a:t>
-            </a:r>
-            <a:r>
-              <a:rPr lang="en-US" dirty="0"/>
-              <a:t> around keystone species, that maintain the functioning of the community as a whole. </a:t>
+              <a:t>Here there is only one significant relationship between phylogenetic distance and environmental variable – so the null model may not be appropriate for this data – however, we must consider that this dataset was drastically reduced to allow the correlograms to process on my local computer. With that in mind, we continue with the null model analysis.</a:t>
             </a:r>
           </a:p>
         </p:txBody>
@@ -27649,7 +27585,7 @@
           <a:p>
             <a:fld id="{91AE2140-D502-214A-B76B-E0784B2C949B}" type="slidenum">
               <a:rPr lang="en-US" smtClean="0"/>
-              <a:t>35</a:t>
+              <a:t>34</a:t>
             </a:fld>
             <a:endParaRPr lang="en-US"/>
           </a:p>
@@ -27658,7 +27594,7 @@
     </p:spTree>
     <p:extLst>
       <p:ext uri="{BB962C8B-B14F-4D97-AF65-F5344CB8AC3E}">
-        <p14:creationId xmlns:p14="http://schemas.microsoft.com/office/powerpoint/2010/main" val="2107534487"/>
+        <p14:creationId xmlns:p14="http://schemas.microsoft.com/office/powerpoint/2010/main" val="1424753429"/>
       </p:ext>
     </p:extLst>
   </p:cSld>
@@ -27714,42 +27650,25 @@
           <a:p>
             <a:r>
               <a:rPr lang="en-US" dirty="0"/>
-              <a:t>Centrality – how close is a node to the network as a whole </a:t>
-            </a:r>
-          </a:p>
-          <a:p>
-            <a:pPr marL="0" marR="0" lvl="0" indent="0" algn="l" defTabSz="914400" rtl="0" eaLnBrk="1" fontAlgn="auto" latinLnBrk="0" hangingPunct="1">
-              <a:lnSpc>
-                <a:spcPct val="100000"/>
-              </a:lnSpc>
-              <a:spcBef>
-                <a:spcPts val="0"/>
-              </a:spcBef>
-              <a:spcAft>
-                <a:spcPts val="0"/>
-              </a:spcAft>
-              <a:buClrTx/>
-              <a:buSzTx/>
-              <a:buFontTx/>
-              <a:buNone/>
-              <a:tabLst/>
-              <a:defRPr/>
-            </a:pPr>
+              <a:t>Stochastic processes can produce complex spatial community patterns. </a:t>
+            </a:r>
+          </a:p>
+          <a:p>
             <a:r>
               <a:rPr lang="en-US" dirty="0"/>
-              <a:t>Degree Centrality – number of links connected to a node (who has the most friends?)</a:t>
+              <a:t>Ecological drift = random birth/death events in a specific area, in the absence of selection. Ecological drift is particularly important when dispersal is limited as illustrated by island biogeography theory.</a:t>
             </a:r>
           </a:p>
           <a:p>
             <a:r>
               <a:rPr lang="en-US" dirty="0"/>
-              <a:t>Closeness Centrality -  average length of the shortest path between the node and all other nodes in the graph (how long does it take me on average to reach another node)</a:t>
+              <a:t>Dispersal limitation between isolated habitats promotes local extinction and ecological drift which causes initially identical communities to diverge. Ecological drift can cause communities to diverge, even when dispersal is high and selection pressure is low.</a:t>
             </a:r>
           </a:p>
           <a:p>
             <a:r>
               <a:rPr lang="en-US" dirty="0"/>
-              <a:t>Betweenness Centrality – the number of times a node is crossed by each of the shortest routes between nodes (between any two nodes there is a shortest distance to travel. How many shortest distances is the node of interest within?)</a:t>
+              <a:t>Homogenizing dispersal = high dispersal rates leading to similar communities between habitats (overcomes the impact of ecological drift and even deterministic processes)</a:t>
             </a:r>
           </a:p>
           <a:p>
@@ -27758,29 +27677,41 @@
           <a:p>
             <a:r>
               <a:rPr lang="en-US" dirty="0"/>
-              <a:t>Clustering</a:t>
+              <a:t>Deterministic (deterministic processes commonly mean beta diversity varies as a result of environmental characteristics – i.e. communities are more or less different due to the differences or similarities of the environments)</a:t>
             </a:r>
           </a:p>
           <a:p>
             <a:r>
               <a:rPr lang="en-US" dirty="0"/>
-              <a:t>What groups are within the network?</a:t>
+              <a:t>Variable selection – deterministic processes are driving variable composition between communities. Different areas have different environmental characteristics that select for different species.</a:t>
             </a:r>
           </a:p>
           <a:p>
             <a:r>
               <a:rPr lang="en-US" dirty="0"/>
-              <a:t>Clustering coefficient – how many connections are there to other nodes, compared to the POTENTIAL number of connections to other nodes within the group?</a:t>
-            </a:r>
+              <a:t>Homogenizing selection – deterministic processes are driving homogenous composition between communities. Different areas have similar environmental characteristics that select for similar species.</a:t>
+            </a:r>
+          </a:p>
+          <a:p>
+            <a:endParaRPr lang="en-US" dirty="0"/>
           </a:p>
           <a:p>
             <a:r>
               <a:rPr lang="en-US" dirty="0"/>
-              <a:t>Clustering coefficient = 1 means there is a clique, so all nodes are connected to each other in a group</a:t>
-            </a:r>
-          </a:p>
-          <a:p>
-            <a:endParaRPr lang="en-US" dirty="0"/>
+              <a:t>Dispersal limitation – stochastic dispersal limitation is driving variable composition between communities </a:t>
+            </a:r>
+          </a:p>
+          <a:p>
+            <a:r>
+              <a:rPr lang="en-US" dirty="0"/>
+              <a:t>Homogenizing dispersal – stochastic high dispersal is driving homogenous composition between communities</a:t>
+            </a:r>
+          </a:p>
+          <a:p>
+            <a:r>
+              <a:rPr lang="en-US" dirty="0"/>
+              <a:t>Ecological drift – stochastic ecological drift is driving variable composition between communities</a:t>
+            </a:r>
           </a:p>
           <a:p>
             <a:endParaRPr lang="en-US" dirty="0"/>
@@ -27804,7 +27735,7 @@
           <a:p>
             <a:fld id="{91AE2140-D502-214A-B76B-E0784B2C949B}" type="slidenum">
               <a:rPr lang="en-US" smtClean="0"/>
-              <a:t>36</a:t>
+              <a:t>35</a:t>
             </a:fld>
             <a:endParaRPr lang="en-US"/>
           </a:p>
@@ -27813,7 +27744,7 @@
     </p:spTree>
     <p:extLst>
       <p:ext uri="{BB962C8B-B14F-4D97-AF65-F5344CB8AC3E}">
-        <p14:creationId xmlns:p14="http://schemas.microsoft.com/office/powerpoint/2010/main" val="553393038"/>
+        <p14:creationId xmlns:p14="http://schemas.microsoft.com/office/powerpoint/2010/main" val="4270121788"/>
       </p:ext>
     </p:extLst>
   </p:cSld>
@@ -27868,76 +27799,53 @@
           <a:lstStyle/>
           <a:p>
             <a:r>
-              <a:rPr lang="en-GB" dirty="0"/>
-              <a:t>Based on correlation analysis, for the positive co-occurrence network, 6526 edges, which depict significant and strong pairwise correlations between species (Spearman's </a:t>
-            </a:r>
-            <a:r>
-              <a:rPr lang="el-GR" i="1" dirty="0"/>
-              <a:t>ρ</a:t>
-            </a:r>
-            <a:r>
-              <a:rPr lang="el-GR" dirty="0"/>
-              <a:t> ≥ 0.6, </a:t>
-            </a:r>
-            <a:r>
-              <a:rPr lang="en-GB" i="1" dirty="0"/>
-              <a:t>P</a:t>
-            </a:r>
-            <a:r>
-              <a:rPr lang="en-GB" dirty="0"/>
-              <a:t> &lt; 0.01), were captured between 554 nodes (i.e. ASVs).</a:t>
-            </a:r>
-          </a:p>
-          <a:p>
-            <a:endParaRPr lang="en-GB" dirty="0"/>
-          </a:p>
-          <a:p>
-            <a:pPr marL="0" marR="0" lvl="0" indent="0" algn="l" defTabSz="914400" rtl="0" eaLnBrk="1" fontAlgn="auto" latinLnBrk="0" hangingPunct="1">
-              <a:lnSpc>
-                <a:spcPct val="100000"/>
-              </a:lnSpc>
-              <a:spcBef>
-                <a:spcPts val="0"/>
-              </a:spcBef>
-              <a:spcAft>
-                <a:spcPts val="0"/>
-              </a:spcAft>
-              <a:buClrTx/>
-              <a:buSzTx/>
-              <a:buFontTx/>
-              <a:buNone/>
-              <a:tabLst/>
-              <a:defRPr/>
-            </a:pPr>
-            <a:r>
-              <a:rPr lang="en-GB" dirty="0"/>
-              <a:t>Based on correlation analysis, for the negative co-occurrence network, 1780 edges, which depict significant and strong pairwise correlations between species (Spearman's </a:t>
-            </a:r>
-            <a:r>
-              <a:rPr lang="el-GR" i="1" dirty="0"/>
-              <a:t>ρ</a:t>
-            </a:r>
-            <a:r>
-              <a:rPr lang="el-GR" dirty="0"/>
-              <a:t> ≥ 0.6, </a:t>
-            </a:r>
-            <a:r>
-              <a:rPr lang="en-GB" i="1" dirty="0"/>
-              <a:t>P</a:t>
-            </a:r>
-            <a:r>
-              <a:rPr lang="en-GB" dirty="0"/>
-              <a:t> &lt; 0.01), were captured between 299 nodes (i.e. ASVs).</a:t>
-            </a:r>
-          </a:p>
-          <a:p>
-            <a:endParaRPr lang="en-GB" dirty="0"/>
-          </a:p>
-          <a:p>
-            <a:endParaRPr lang="en-GB" dirty="0"/>
+              <a:rPr lang="en-US" dirty="0"/>
+              <a:t>Whilst multivariate analysis can assist us in investigating abiotic selection, microbial community assembly is also shaped by biotic selection. </a:t>
+            </a:r>
           </a:p>
           <a:p>
             <a:endParaRPr lang="en-US" dirty="0"/>
+          </a:p>
+          <a:p>
+            <a:r>
+              <a:rPr lang="en-US" dirty="0"/>
+              <a:t>Biotic interactions may include top-down control through viral lysis and grazing, as well as microbe-microbe interactions.</a:t>
+            </a:r>
+          </a:p>
+          <a:p>
+            <a:endParaRPr lang="en-US" dirty="0"/>
+          </a:p>
+          <a:p>
+            <a:r>
+              <a:rPr lang="en-US" dirty="0"/>
+              <a:t>Due to technological restrictions, investigations of microbe-microbe interactions have typically been limited. With access to high-throughout sequencing, we can now construct co-occurrence networks in an attempt to decipher intra- and inter-specific interactions within communities.</a:t>
+            </a:r>
+          </a:p>
+          <a:p>
+            <a:endParaRPr lang="en-US" dirty="0"/>
+          </a:p>
+          <a:p>
+            <a:r>
+              <a:rPr lang="en-US" dirty="0"/>
+              <a:t>Previous research has indicated that microbial communities exhibit non-random co-occurrence patterns and module structures, suggesting that biotic selection plays a strong role in shaping community assembly.</a:t>
+            </a:r>
+          </a:p>
+          <a:p>
+            <a:endParaRPr lang="en-US" dirty="0"/>
+          </a:p>
+          <a:p>
+            <a:r>
+              <a:rPr lang="en-US" dirty="0"/>
+              <a:t>Communities may even </a:t>
+            </a:r>
+            <a:r>
+              <a:rPr lang="en-US" dirty="0" err="1"/>
+              <a:t>centre</a:t>
+            </a:r>
+            <a:r>
+              <a:rPr lang="en-US" dirty="0"/>
+              <a:t> around keystone species, that maintain the functioning of the community as a whole. </a:t>
+            </a:r>
           </a:p>
         </p:txBody>
       </p:sp>
@@ -27967,7 +27875,7 @@
     </p:spTree>
     <p:extLst>
       <p:ext uri="{BB962C8B-B14F-4D97-AF65-F5344CB8AC3E}">
-        <p14:creationId xmlns:p14="http://schemas.microsoft.com/office/powerpoint/2010/main" val="301421177"/>
+        <p14:creationId xmlns:p14="http://schemas.microsoft.com/office/powerpoint/2010/main" val="2107534487"/>
       </p:ext>
     </p:extLst>
   </p:cSld>
@@ -28021,6 +27929,77 @@
           <a:bodyPr/>
           <a:lstStyle/>
           <a:p>
+            <a:r>
+              <a:rPr lang="en-US" dirty="0"/>
+              <a:t>Centrality – how close is a node to the network as a whole </a:t>
+            </a:r>
+          </a:p>
+          <a:p>
+            <a:pPr marL="0" marR="0" lvl="0" indent="0" algn="l" defTabSz="914400" rtl="0" eaLnBrk="1" fontAlgn="auto" latinLnBrk="0" hangingPunct="1">
+              <a:lnSpc>
+                <a:spcPct val="100000"/>
+              </a:lnSpc>
+              <a:spcBef>
+                <a:spcPts val="0"/>
+              </a:spcBef>
+              <a:spcAft>
+                <a:spcPts val="0"/>
+              </a:spcAft>
+              <a:buClrTx/>
+              <a:buSzTx/>
+              <a:buFontTx/>
+              <a:buNone/>
+              <a:tabLst/>
+              <a:defRPr/>
+            </a:pPr>
+            <a:r>
+              <a:rPr lang="en-US" dirty="0"/>
+              <a:t>Degree Centrality – number of links connected to a node (who has the most friends?)</a:t>
+            </a:r>
+          </a:p>
+          <a:p>
+            <a:r>
+              <a:rPr lang="en-US" dirty="0"/>
+              <a:t>Closeness Centrality -  average length of the shortest path between the node and all other nodes in the graph (how long does it take me on average to reach another node)</a:t>
+            </a:r>
+          </a:p>
+          <a:p>
+            <a:r>
+              <a:rPr lang="en-US" dirty="0"/>
+              <a:t>Betweenness Centrality – the number of times a node is crossed by each of the shortest routes between nodes (between any two nodes there is a shortest distance to travel. How many shortest distances is the node of interest within?)</a:t>
+            </a:r>
+          </a:p>
+          <a:p>
+            <a:endParaRPr lang="en-US" dirty="0"/>
+          </a:p>
+          <a:p>
+            <a:r>
+              <a:rPr lang="en-US" dirty="0"/>
+              <a:t>Clustering</a:t>
+            </a:r>
+          </a:p>
+          <a:p>
+            <a:r>
+              <a:rPr lang="en-US" dirty="0"/>
+              <a:t>What groups are within the network?</a:t>
+            </a:r>
+          </a:p>
+          <a:p>
+            <a:r>
+              <a:rPr lang="en-US" dirty="0"/>
+              <a:t>Clustering coefficient – how many connections are there to other nodes, compared to the POTENTIAL number of connections to other nodes within the group?</a:t>
+            </a:r>
+          </a:p>
+          <a:p>
+            <a:r>
+              <a:rPr lang="en-US" dirty="0"/>
+              <a:t>Clustering coefficient = 1 means there is a clique, so all nodes are connected to each other in a group</a:t>
+            </a:r>
+          </a:p>
+          <a:p>
+            <a:endParaRPr lang="en-US" dirty="0"/>
+          </a:p>
+          <a:p>
             <a:endParaRPr lang="en-US" dirty="0"/>
           </a:p>
         </p:txBody>
@@ -28051,7 +28030,7 @@
     </p:spTree>
     <p:extLst>
       <p:ext uri="{BB962C8B-B14F-4D97-AF65-F5344CB8AC3E}">
-        <p14:creationId xmlns:p14="http://schemas.microsoft.com/office/powerpoint/2010/main" val="2121078948"/>
+        <p14:creationId xmlns:p14="http://schemas.microsoft.com/office/powerpoint/2010/main" val="553393038"/>
       </p:ext>
     </p:extLst>
   </p:cSld>
@@ -28106,55 +28085,75 @@
           <a:lstStyle/>
           <a:p>
             <a:r>
-              <a:rPr lang="en-US" dirty="0"/>
-              <a:t>Packages:</a:t>
-            </a:r>
-          </a:p>
-          <a:p>
-            <a:r>
-              <a:rPr lang="en-US" dirty="0"/>
-              <a:t>Vegan</a:t>
-            </a:r>
-          </a:p>
-          <a:p>
-            <a:r>
-              <a:rPr lang="en-US" dirty="0" err="1"/>
-              <a:t>Igraph</a:t>
-            </a:r>
-            <a:endParaRPr lang="en-US" dirty="0"/>
-          </a:p>
-          <a:p>
-            <a:r>
-              <a:rPr lang="en-US" dirty="0" err="1"/>
-              <a:t>Hmisc</a:t>
-            </a:r>
-            <a:endParaRPr lang="en-US" dirty="0"/>
-          </a:p>
-          <a:p>
-            <a:endParaRPr lang="en-US" dirty="0"/>
-          </a:p>
-          <a:p>
-            <a:r>
-              <a:rPr lang="en-US" dirty="0"/>
-              <a:t>1) Defines functions for co-occurrence network analysis. Function needs a matrix with samples as columns and ASVs as rows, as well as the </a:t>
-            </a:r>
-            <a:r>
-              <a:rPr lang="en-GB" dirty="0" err="1"/>
-              <a:t>cutoffs</a:t>
-            </a:r>
-            <a:r>
               <a:rPr lang="en-GB" dirty="0"/>
-              <a:t> for clustering coefficient and cut off for FDR-adjusted P-value. </a:t>
+              <a:t>Based on correlation analysis, for the positive co-occurrence network, 6526 edges, which depict significant and strong pairwise correlations between species (Spearman's </a:t>
+            </a:r>
+            <a:r>
+              <a:rPr lang="el-GR" i="1" dirty="0"/>
+              <a:t>ρ</a:t>
+            </a:r>
+            <a:r>
+              <a:rPr lang="el-GR" dirty="0"/>
+              <a:t> ≥ 0.6, </a:t>
+            </a:r>
+            <a:r>
+              <a:rPr lang="en-GB" i="1" dirty="0"/>
+              <a:t>P</a:t>
+            </a:r>
+            <a:r>
+              <a:rPr lang="en-GB" dirty="0"/>
+              <a:t> &lt; 0.01), were captured between 554 nodes (i.e. ASVs).</a:t>
             </a:r>
           </a:p>
           <a:p>
             <a:endParaRPr lang="en-GB" dirty="0"/>
           </a:p>
           <a:p>
+            <a:pPr marL="0" marR="0" lvl="0" indent="0" algn="l" defTabSz="914400" rtl="0" eaLnBrk="1" fontAlgn="auto" latinLnBrk="0" hangingPunct="1">
+              <a:lnSpc>
+                <a:spcPct val="100000"/>
+              </a:lnSpc>
+              <a:spcBef>
+                <a:spcPts val="0"/>
+              </a:spcBef>
+              <a:spcAft>
+                <a:spcPts val="0"/>
+              </a:spcAft>
+              <a:buClrTx/>
+              <a:buSzTx/>
+              <a:buFontTx/>
+              <a:buNone/>
+              <a:tabLst/>
+              <a:defRPr/>
+            </a:pPr>
             <a:r>
               <a:rPr lang="en-GB" dirty="0"/>
-              <a:t>2) </a:t>
-            </a:r>
+              <a:t>Based on correlation analysis, for the negative co-occurrence network, 1780 edges, which depict significant and strong pairwise correlations between species (Spearman's </a:t>
+            </a:r>
+            <a:r>
+              <a:rPr lang="el-GR" i="1" dirty="0"/>
+              <a:t>ρ</a:t>
+            </a:r>
+            <a:r>
+              <a:rPr lang="el-GR" dirty="0"/>
+              <a:t> ≥ 0.6, </a:t>
+            </a:r>
+            <a:r>
+              <a:rPr lang="en-GB" i="1" dirty="0"/>
+              <a:t>P</a:t>
+            </a:r>
+            <a:r>
+              <a:rPr lang="en-GB" dirty="0"/>
+              <a:t> &lt; 0.01), were captured between 299 nodes (i.e. ASVs).</a:t>
+            </a:r>
+          </a:p>
+          <a:p>
+            <a:endParaRPr lang="en-GB" dirty="0"/>
+          </a:p>
+          <a:p>
+            <a:endParaRPr lang="en-GB" dirty="0"/>
+          </a:p>
+          <a:p>
             <a:endParaRPr lang="en-US" dirty="0"/>
           </a:p>
         </p:txBody>
@@ -28177,6 +28176,224 @@
             <a:fld id="{91AE2140-D502-214A-B76B-E0784B2C949B}" type="slidenum">
               <a:rPr lang="en-US" smtClean="0"/>
               <a:t>39</a:t>
+            </a:fld>
+            <a:endParaRPr lang="en-US"/>
+          </a:p>
+        </p:txBody>
+      </p:sp>
+    </p:spTree>
+    <p:extLst>
+      <p:ext uri="{BB962C8B-B14F-4D97-AF65-F5344CB8AC3E}">
+        <p14:creationId xmlns:p14="http://schemas.microsoft.com/office/powerpoint/2010/main" val="301421177"/>
+      </p:ext>
+    </p:extLst>
+  </p:cSld>
+  <p:clrMapOvr>
+    <a:masterClrMapping/>
+  </p:clrMapOvr>
+</p:notes>
+</file>
+
+<file path=ppt/notesSlides/notesSlide27.xml><?xml version="1.0" encoding="utf-8"?>
+<p:notes xmlns:a="http://schemas.openxmlformats.org/drawingml/2006/main" xmlns:r="http://schemas.openxmlformats.org/officeDocument/2006/relationships" xmlns:p="http://schemas.openxmlformats.org/presentationml/2006/main">
+  <p:cSld>
+    <p:spTree>
+      <p:nvGrpSpPr>
+        <p:cNvPr id="1" name=""/>
+        <p:cNvGrpSpPr/>
+        <p:nvPr/>
+      </p:nvGrpSpPr>
+      <p:grpSpPr>
+        <a:xfrm>
+          <a:off x="0" y="0"/>
+          <a:ext cx="0" cy="0"/>
+          <a:chOff x="0" y="0"/>
+          <a:chExt cx="0" cy="0"/>
+        </a:xfrm>
+      </p:grpSpPr>
+      <p:sp>
+        <p:nvSpPr>
+          <p:cNvPr id="2" name="Slide Image Placeholder 1"/>
+          <p:cNvSpPr>
+            <a:spLocks noGrp="1" noRot="1" noChangeAspect="1"/>
+          </p:cNvSpPr>
+          <p:nvPr>
+            <p:ph type="sldImg"/>
+          </p:nvPr>
+        </p:nvSpPr>
+        <p:spPr/>
+      </p:sp>
+      <p:sp>
+        <p:nvSpPr>
+          <p:cNvPr id="3" name="Notes Placeholder 2"/>
+          <p:cNvSpPr>
+            <a:spLocks noGrp="1"/>
+          </p:cNvSpPr>
+          <p:nvPr>
+            <p:ph type="body" idx="1"/>
+          </p:nvPr>
+        </p:nvSpPr>
+        <p:spPr/>
+        <p:txBody>
+          <a:bodyPr/>
+          <a:lstStyle/>
+          <a:p>
+            <a:endParaRPr lang="en-US" dirty="0"/>
+          </a:p>
+        </p:txBody>
+      </p:sp>
+      <p:sp>
+        <p:nvSpPr>
+          <p:cNvPr id="4" name="Slide Number Placeholder 3"/>
+          <p:cNvSpPr>
+            <a:spLocks noGrp="1"/>
+          </p:cNvSpPr>
+          <p:nvPr>
+            <p:ph type="sldNum" sz="quarter" idx="5"/>
+          </p:nvPr>
+        </p:nvSpPr>
+        <p:spPr/>
+        <p:txBody>
+          <a:bodyPr/>
+          <a:lstStyle/>
+          <a:p>
+            <a:fld id="{91AE2140-D502-214A-B76B-E0784B2C949B}" type="slidenum">
+              <a:rPr lang="en-US" smtClean="0"/>
+              <a:t>40</a:t>
+            </a:fld>
+            <a:endParaRPr lang="en-US"/>
+          </a:p>
+        </p:txBody>
+      </p:sp>
+    </p:spTree>
+    <p:extLst>
+      <p:ext uri="{BB962C8B-B14F-4D97-AF65-F5344CB8AC3E}">
+        <p14:creationId xmlns:p14="http://schemas.microsoft.com/office/powerpoint/2010/main" val="2121078948"/>
+      </p:ext>
+    </p:extLst>
+  </p:cSld>
+  <p:clrMapOvr>
+    <a:masterClrMapping/>
+  </p:clrMapOvr>
+</p:notes>
+</file>
+
+<file path=ppt/notesSlides/notesSlide28.xml><?xml version="1.0" encoding="utf-8"?>
+<p:notes xmlns:a="http://schemas.openxmlformats.org/drawingml/2006/main" xmlns:r="http://schemas.openxmlformats.org/officeDocument/2006/relationships" xmlns:p="http://schemas.openxmlformats.org/presentationml/2006/main">
+  <p:cSld>
+    <p:spTree>
+      <p:nvGrpSpPr>
+        <p:cNvPr id="1" name=""/>
+        <p:cNvGrpSpPr/>
+        <p:nvPr/>
+      </p:nvGrpSpPr>
+      <p:grpSpPr>
+        <a:xfrm>
+          <a:off x="0" y="0"/>
+          <a:ext cx="0" cy="0"/>
+          <a:chOff x="0" y="0"/>
+          <a:chExt cx="0" cy="0"/>
+        </a:xfrm>
+      </p:grpSpPr>
+      <p:sp>
+        <p:nvSpPr>
+          <p:cNvPr id="2" name="Slide Image Placeholder 1"/>
+          <p:cNvSpPr>
+            <a:spLocks noGrp="1" noRot="1" noChangeAspect="1"/>
+          </p:cNvSpPr>
+          <p:nvPr>
+            <p:ph type="sldImg"/>
+          </p:nvPr>
+        </p:nvSpPr>
+        <p:spPr/>
+      </p:sp>
+      <p:sp>
+        <p:nvSpPr>
+          <p:cNvPr id="3" name="Notes Placeholder 2"/>
+          <p:cNvSpPr>
+            <a:spLocks noGrp="1"/>
+          </p:cNvSpPr>
+          <p:nvPr>
+            <p:ph type="body" idx="1"/>
+          </p:nvPr>
+        </p:nvSpPr>
+        <p:spPr/>
+        <p:txBody>
+          <a:bodyPr/>
+          <a:lstStyle/>
+          <a:p>
+            <a:r>
+              <a:rPr lang="en-US" dirty="0"/>
+              <a:t>Packages:</a:t>
+            </a:r>
+          </a:p>
+          <a:p>
+            <a:r>
+              <a:rPr lang="en-US" dirty="0"/>
+              <a:t>Vegan</a:t>
+            </a:r>
+          </a:p>
+          <a:p>
+            <a:r>
+              <a:rPr lang="en-US" dirty="0" err="1"/>
+              <a:t>Igraph</a:t>
+            </a:r>
+            <a:endParaRPr lang="en-US" dirty="0"/>
+          </a:p>
+          <a:p>
+            <a:r>
+              <a:rPr lang="en-US" dirty="0" err="1"/>
+              <a:t>Hmisc</a:t>
+            </a:r>
+            <a:endParaRPr lang="en-US" dirty="0"/>
+          </a:p>
+          <a:p>
+            <a:endParaRPr lang="en-US" dirty="0"/>
+          </a:p>
+          <a:p>
+            <a:r>
+              <a:rPr lang="en-US" dirty="0"/>
+              <a:t>1) Defines functions for co-occurrence network analysis. Function needs a matrix with samples as columns and ASVs as rows, as well as the </a:t>
+            </a:r>
+            <a:r>
+              <a:rPr lang="en-GB" dirty="0" err="1"/>
+              <a:t>cutoffs</a:t>
+            </a:r>
+            <a:r>
+              <a:rPr lang="en-GB" dirty="0"/>
+              <a:t> for clustering coefficient and cut off for FDR-adjusted P-value. </a:t>
+            </a:r>
+          </a:p>
+          <a:p>
+            <a:endParaRPr lang="en-GB" dirty="0"/>
+          </a:p>
+          <a:p>
+            <a:r>
+              <a:rPr lang="en-GB" dirty="0"/>
+              <a:t>2) </a:t>
+            </a:r>
+            <a:endParaRPr lang="en-US" dirty="0"/>
+          </a:p>
+        </p:txBody>
+      </p:sp>
+      <p:sp>
+        <p:nvSpPr>
+          <p:cNvPr id="4" name="Slide Number Placeholder 3"/>
+          <p:cNvSpPr>
+            <a:spLocks noGrp="1"/>
+          </p:cNvSpPr>
+          <p:nvPr>
+            <p:ph type="sldNum" sz="quarter" idx="5"/>
+          </p:nvPr>
+        </p:nvSpPr>
+        <p:spPr/>
+        <p:txBody>
+          <a:bodyPr/>
+          <a:lstStyle/>
+          <a:p>
+            <a:fld id="{91AE2140-D502-214A-B76B-E0784B2C949B}" type="slidenum">
+              <a:rPr lang="en-US" smtClean="0"/>
+              <a:t>41</a:t>
             </a:fld>
             <a:endParaRPr lang="en-US"/>
           </a:p>
@@ -29509,51 +29726,102 @@
           <a:bodyPr/>
           <a:lstStyle/>
           <a:p>
-            <a:pPr marL="228600" indent="-228600">
-              <a:buAutoNum type="arabicParenR"/>
+            <a:r>
+              <a:rPr lang="en-US" sz="1200" dirty="0"/>
+              <a:t>Wilcoxon test used to compare cryoconite hole area (cm2) between glaciers. No significant difference detected (W = 134, p=0.7966).</a:t>
+            </a:r>
+          </a:p>
+          <a:p>
+            <a:pPr marL="0" marR="0" lvl="0" indent="0" algn="l" defTabSz="914400" rtl="0" eaLnBrk="1" fontAlgn="auto" latinLnBrk="0" hangingPunct="1">
+              <a:lnSpc>
+                <a:spcPct val="100000"/>
+              </a:lnSpc>
+              <a:spcBef>
+                <a:spcPts val="0"/>
+              </a:spcBef>
+              <a:spcAft>
+                <a:spcPts val="0"/>
+              </a:spcAft>
+              <a:buClrTx/>
+              <a:buSzTx/>
+              <a:buFontTx/>
+              <a:buNone/>
+              <a:tabLst/>
+              <a:defRPr/>
             </a:pPr>
             <a:r>
-              <a:rPr lang="en-US" dirty="0"/>
-              <a:t>Used ‘vegan’ package to get Shannon, Simpsons, Inverted Simpsons Diversity Indexes of count data in each sample. Also </a:t>
-            </a:r>
-            <a:r>
-              <a:rPr lang="en-US" dirty="0" err="1"/>
-              <a:t>Pilou</a:t>
-            </a:r>
-            <a:r>
-              <a:rPr lang="en-US" dirty="0"/>
-              <a:t> evenness and Faith’s phylogenetic diversity. </a:t>
-            </a:r>
-          </a:p>
-          <a:p>
-            <a:pPr marL="228600" indent="-228600">
-              <a:buAutoNum type="arabicParenR"/>
+              <a:rPr lang="en-US" sz="1200" dirty="0"/>
+              <a:t>Wilcoxon test used to compare chlorophyll between glaciers. No significant difference detected (W = 160, p=0.141).</a:t>
+            </a:r>
+          </a:p>
+          <a:p>
+            <a:pPr marL="0" marR="0" lvl="0" indent="0" algn="l" defTabSz="914400" rtl="0" eaLnBrk="1" fontAlgn="auto" latinLnBrk="0" hangingPunct="1">
+              <a:lnSpc>
+                <a:spcPct val="100000"/>
+              </a:lnSpc>
+              <a:spcBef>
+                <a:spcPts val="0"/>
+              </a:spcBef>
+              <a:spcAft>
+                <a:spcPts val="0"/>
+              </a:spcAft>
+              <a:buClrTx/>
+              <a:buSzTx/>
+              <a:buFontTx/>
+              <a:buNone/>
+              <a:tabLst/>
+              <a:defRPr/>
             </a:pPr>
+            <a:r>
+              <a:rPr lang="en-US" sz="1200" dirty="0"/>
+              <a:t>Wilcoxon test used to compare DNA content between glaciers. Significant difference detected (W = 251, p&lt;0.05).</a:t>
+            </a:r>
+          </a:p>
+          <a:p>
+            <a:pPr marL="0" marR="0" lvl="0" indent="0" algn="l" defTabSz="914400" rtl="0" eaLnBrk="1" fontAlgn="auto" latinLnBrk="0" hangingPunct="1">
+              <a:lnSpc>
+                <a:spcPct val="100000"/>
+              </a:lnSpc>
+              <a:spcBef>
+                <a:spcPts val="0"/>
+              </a:spcBef>
+              <a:spcAft>
+                <a:spcPts val="0"/>
+              </a:spcAft>
+              <a:buClrTx/>
+              <a:buSzTx/>
+              <a:buFontTx/>
+              <a:buNone/>
+              <a:tabLst/>
+              <a:defRPr/>
+            </a:pPr>
+            <a:r>
+              <a:rPr lang="en-US" sz="1200" dirty="0"/>
+              <a:t>Wilcoxon test used to compare organic matter content between glaciers. Significant difference detected (W = 220, p&lt;0.05).</a:t>
+            </a:r>
+          </a:p>
+          <a:p>
+            <a:r>
+              <a:rPr lang="en-US" sz="1200" dirty="0"/>
+              <a:t>Welch Two Sample T-Test used to compare pH between glaciers. Significant difference detected (t=2.193, </a:t>
+            </a:r>
+            <a:r>
+              <a:rPr lang="en-US" sz="1200" dirty="0" err="1"/>
+              <a:t>df</a:t>
+            </a:r>
+            <a:r>
+              <a:rPr lang="en-US" sz="1200" dirty="0"/>
+              <a:t>=11.766, p=0.0492).</a:t>
+            </a:r>
+          </a:p>
+          <a:p>
+            <a:r>
+              <a:rPr lang="en-US" sz="1200" dirty="0"/>
+              <a:t>Wilcoxon test used to compare water content between glaciers. Significant difference detected (W = 220, p&lt;0.05).</a:t>
+            </a:r>
+          </a:p>
+          <a:p>
             <a:endParaRPr lang="en-US" dirty="0"/>
-          </a:p>
-          <a:p>
-            <a:pPr marL="228600" indent="-228600">
-              <a:buAutoNum type="arabicParenR"/>
-            </a:pPr>
-            <a:r>
-              <a:rPr lang="en-US" dirty="0"/>
-              <a:t>Alternatively use alpha() function from microbiome package to calculate all indices at one!</a:t>
-            </a:r>
-          </a:p>
-          <a:p>
-            <a:pPr marL="228600" indent="-228600">
-              <a:buAutoNum type="arabicParenR"/>
-            </a:pPr>
-            <a:endParaRPr lang="en-US" dirty="0"/>
-          </a:p>
-          <a:p>
-            <a:pPr marL="228600" indent="-228600">
-              <a:buAutoNum type="arabicParenR"/>
-            </a:pPr>
-            <a:r>
-              <a:rPr lang="en-US" dirty="0"/>
-              <a:t>Here we have boxplots comparing the diversity indices of the two glaciers</a:t>
-            </a:r>
           </a:p>
         </p:txBody>
       </p:sp>
@@ -29583,7 +29851,7 @@
     </p:spTree>
     <p:extLst>
       <p:ext uri="{BB962C8B-B14F-4D97-AF65-F5344CB8AC3E}">
-        <p14:creationId xmlns:p14="http://schemas.microsoft.com/office/powerpoint/2010/main" val="3006070899"/>
+        <p14:creationId xmlns:p14="http://schemas.microsoft.com/office/powerpoint/2010/main" val="2425932987"/>
       </p:ext>
     </p:extLst>
   </p:cSld>
@@ -29639,7 +29907,7 @@
           <a:p>
             <a:r>
               <a:rPr lang="en-US" dirty="0"/>
-              <a:t>Comparison of phylogenetic diversities of the two glaciers</a:t>
+              <a:t>I have used canonical analysis of principal coordinates (CAP) to explore how differences in community composition are explained by environmental variables</a:t>
             </a:r>
           </a:p>
         </p:txBody>
@@ -29670,7 +29938,7 @@
     </p:spTree>
     <p:extLst>
       <p:ext uri="{BB962C8B-B14F-4D97-AF65-F5344CB8AC3E}">
-        <p14:creationId xmlns:p14="http://schemas.microsoft.com/office/powerpoint/2010/main" val="4033971060"/>
+        <p14:creationId xmlns:p14="http://schemas.microsoft.com/office/powerpoint/2010/main" val="1733676401"/>
       </p:ext>
     </p:extLst>
   </p:cSld>
@@ -33836,6 +34104,233 @@
           <p:cNvPr id="2" name="Title 1">
             <a:extLst>
               <a:ext uri="{FF2B5EF4-FFF2-40B4-BE49-F238E27FC236}">
+                <a16:creationId xmlns:a16="http://schemas.microsoft.com/office/drawing/2014/main" id="{EB796473-5430-F94F-A1EB-7F803CC603D0}"/>
+              </a:ext>
+            </a:extLst>
+          </p:cNvPr>
+          <p:cNvSpPr>
+            <a:spLocks noGrp="1"/>
+          </p:cNvSpPr>
+          <p:nvPr>
+            <p:ph type="title"/>
+          </p:nvPr>
+        </p:nvSpPr>
+        <p:spPr>
+          <a:solidFill>
+            <a:srgbClr val="FFC003"/>
+          </a:solidFill>
+        </p:spPr>
+        <p:txBody>
+          <a:bodyPr/>
+          <a:lstStyle/>
+          <a:p>
+            <a:r>
+              <a:rPr lang="en-US" dirty="0">
+                <a:solidFill>
+                  <a:schemeClr val="bg1"/>
+                </a:solidFill>
+              </a:rPr>
+              <a:t>All Environmental Plots</a:t>
+            </a:r>
+          </a:p>
+        </p:txBody>
+      </p:sp>
+      <p:pic>
+        <p:nvPicPr>
+          <p:cNvPr id="7" name="Picture 6">
+            <a:extLst>
+              <a:ext uri="{FF2B5EF4-FFF2-40B4-BE49-F238E27FC236}">
+                <a16:creationId xmlns:a16="http://schemas.microsoft.com/office/drawing/2014/main" id="{C65E59A6-8A0C-E84D-B114-65759E77C968}"/>
+              </a:ext>
+            </a:extLst>
+          </p:cNvPr>
+          <p:cNvPicPr>
+            <a:picLocks noChangeAspect="1"/>
+          </p:cNvPicPr>
+          <p:nvPr/>
+        </p:nvPicPr>
+        <p:blipFill>
+          <a:blip r:embed="rId3"/>
+          <a:stretch>
+            <a:fillRect/>
+          </a:stretch>
+        </p:blipFill>
+        <p:spPr>
+          <a:xfrm>
+            <a:off x="2438400" y="1943100"/>
+            <a:ext cx="7315200" cy="3657600"/>
+          </a:xfrm>
+          <a:prstGeom prst="rect">
+            <a:avLst/>
+          </a:prstGeom>
+        </p:spPr>
+      </p:pic>
+    </p:spTree>
+    <p:extLst>
+      <p:ext uri="{BB962C8B-B14F-4D97-AF65-F5344CB8AC3E}">
+        <p14:creationId xmlns:p14="http://schemas.microsoft.com/office/powerpoint/2010/main" val="122094526"/>
+      </p:ext>
+    </p:extLst>
+  </p:cSld>
+  <p:clrMapOvr>
+    <a:masterClrMapping/>
+  </p:clrMapOvr>
+</p:sld>
+</file>
+
+<file path=ppt/slides/slide17.xml><?xml version="1.0" encoding="utf-8"?>
+<p:sld xmlns:a="http://schemas.openxmlformats.org/drawingml/2006/main" xmlns:r="http://schemas.openxmlformats.org/officeDocument/2006/relationships" xmlns:p="http://schemas.openxmlformats.org/presentationml/2006/main">
+  <p:cSld>
+    <p:spTree>
+      <p:nvGrpSpPr>
+        <p:cNvPr id="1" name=""/>
+        <p:cNvGrpSpPr/>
+        <p:nvPr/>
+      </p:nvGrpSpPr>
+      <p:grpSpPr>
+        <a:xfrm>
+          <a:off x="0" y="0"/>
+          <a:ext cx="0" cy="0"/>
+          <a:chOff x="0" y="0"/>
+          <a:chExt cx="0" cy="0"/>
+        </a:xfrm>
+      </p:grpSpPr>
+      <p:sp>
+        <p:nvSpPr>
+          <p:cNvPr id="2" name="Title 1">
+            <a:extLst>
+              <a:ext uri="{FF2B5EF4-FFF2-40B4-BE49-F238E27FC236}">
+                <a16:creationId xmlns:a16="http://schemas.microsoft.com/office/drawing/2014/main" id="{1199DEB0-79A5-B744-AA4C-5111DDB04B27}"/>
+              </a:ext>
+            </a:extLst>
+          </p:cNvPr>
+          <p:cNvSpPr>
+            <a:spLocks noGrp="1"/>
+          </p:cNvSpPr>
+          <p:nvPr>
+            <p:ph type="title"/>
+          </p:nvPr>
+        </p:nvSpPr>
+        <p:spPr>
+          <a:solidFill>
+            <a:srgbClr val="FFC003"/>
+          </a:solidFill>
+        </p:spPr>
+        <p:txBody>
+          <a:bodyPr/>
+          <a:lstStyle/>
+          <a:p>
+            <a:r>
+              <a:rPr lang="en-US" dirty="0">
+                <a:solidFill>
+                  <a:schemeClr val="bg1"/>
+                </a:solidFill>
+              </a:rPr>
+              <a:t>CAP Analysis</a:t>
+            </a:r>
+          </a:p>
+        </p:txBody>
+      </p:sp>
+      <p:pic>
+        <p:nvPicPr>
+          <p:cNvPr id="5" name="Picture 4">
+            <a:extLst>
+              <a:ext uri="{FF2B5EF4-FFF2-40B4-BE49-F238E27FC236}">
+                <a16:creationId xmlns:a16="http://schemas.microsoft.com/office/drawing/2014/main" id="{2513AD3E-5F8C-F641-872B-CBCBC5910B98}"/>
+              </a:ext>
+            </a:extLst>
+          </p:cNvPr>
+          <p:cNvPicPr>
+            <a:picLocks noChangeAspect="1"/>
+          </p:cNvPicPr>
+          <p:nvPr/>
+        </p:nvPicPr>
+        <p:blipFill>
+          <a:blip r:embed="rId3"/>
+          <a:stretch>
+            <a:fillRect/>
+          </a:stretch>
+        </p:blipFill>
+        <p:spPr>
+          <a:xfrm>
+            <a:off x="2438400" y="1843088"/>
+            <a:ext cx="7315200" cy="3657600"/>
+          </a:xfrm>
+          <a:prstGeom prst="rect">
+            <a:avLst/>
+          </a:prstGeom>
+        </p:spPr>
+      </p:pic>
+      <p:sp>
+        <p:nvSpPr>
+          <p:cNvPr id="6" name="TextBox 5">
+            <a:extLst>
+              <a:ext uri="{FF2B5EF4-FFF2-40B4-BE49-F238E27FC236}">
+                <a16:creationId xmlns:a16="http://schemas.microsoft.com/office/drawing/2014/main" id="{F69621DA-50DE-014E-8857-8DB3E935379B}"/>
+              </a:ext>
+            </a:extLst>
+          </p:cNvPr>
+          <p:cNvSpPr txBox="1"/>
+          <p:nvPr/>
+        </p:nvSpPr>
+        <p:spPr>
+          <a:xfrm>
+            <a:off x="1585913" y="5500688"/>
+            <a:ext cx="9958387" cy="1200329"/>
+          </a:xfrm>
+          <a:prstGeom prst="rect">
+            <a:avLst/>
+          </a:prstGeom>
+          <a:noFill/>
+        </p:spPr>
+        <p:txBody>
+          <a:bodyPr wrap="square" rtlCol="0">
+            <a:spAutoFit/>
+          </a:bodyPr>
+          <a:lstStyle/>
+          <a:p>
+            <a:r>
+              <a:rPr lang="en-US" dirty="0"/>
+              <a:t>Figure : Most of the variation in beta diversity within each glacier explained by cryoconite area. On Taylor glacier cryoconite area explained  34.8% of variation in community composition (F = 3.734, P=0.002). On Canada glacier, both area and water content explained 29.7% of variation in community composition (F=5.124, P=0.001)</a:t>
+            </a:r>
+          </a:p>
+        </p:txBody>
+      </p:sp>
+    </p:spTree>
+    <p:extLst>
+      <p:ext uri="{BB962C8B-B14F-4D97-AF65-F5344CB8AC3E}">
+        <p14:creationId xmlns:p14="http://schemas.microsoft.com/office/powerpoint/2010/main" val="2678951402"/>
+      </p:ext>
+    </p:extLst>
+  </p:cSld>
+  <p:clrMapOvr>
+    <a:masterClrMapping/>
+  </p:clrMapOvr>
+</p:sld>
+</file>
+
+<file path=ppt/slides/slide18.xml><?xml version="1.0" encoding="utf-8"?>
+<p:sld xmlns:a="http://schemas.openxmlformats.org/drawingml/2006/main" xmlns:r="http://schemas.openxmlformats.org/officeDocument/2006/relationships" xmlns:p="http://schemas.openxmlformats.org/presentationml/2006/main">
+  <p:cSld>
+    <p:spTree>
+      <p:nvGrpSpPr>
+        <p:cNvPr id="1" name=""/>
+        <p:cNvGrpSpPr/>
+        <p:nvPr/>
+      </p:nvGrpSpPr>
+      <p:grpSpPr>
+        <a:xfrm>
+          <a:off x="0" y="0"/>
+          <a:ext cx="0" cy="0"/>
+          <a:chOff x="0" y="0"/>
+          <a:chExt cx="0" cy="0"/>
+        </a:xfrm>
+      </p:grpSpPr>
+      <p:sp>
+        <p:nvSpPr>
+          <p:cNvPr id="2" name="Title 1">
+            <a:extLst>
+              <a:ext uri="{FF2B5EF4-FFF2-40B4-BE49-F238E27FC236}">
                 <a16:creationId xmlns:a16="http://schemas.microsoft.com/office/drawing/2014/main" id="{FD545D3B-A455-EF48-91C3-A3250798EA64}"/>
               </a:ext>
             </a:extLst>
@@ -33996,7 +34491,7 @@
 </p:sld>
 </file>
 
-<file path=ppt/slides/slide17.xml><?xml version="1.0" encoding="utf-8"?>
+<file path=ppt/slides/slide19.xml><?xml version="1.0" encoding="utf-8"?>
 <p:sld xmlns:a="http://schemas.openxmlformats.org/drawingml/2006/main" xmlns:r="http://schemas.openxmlformats.org/officeDocument/2006/relationships" xmlns:p="http://schemas.openxmlformats.org/presentationml/2006/main">
   <p:cSld>
     <p:spTree>
@@ -34092,7 +34587,1295 @@
 </p:sld>
 </file>
 
-<file path=ppt/slides/slide18.xml><?xml version="1.0" encoding="utf-8"?>
+<file path=ppt/slides/slide2.xml><?xml version="1.0" encoding="utf-8"?>
+<p:sld xmlns:a="http://schemas.openxmlformats.org/drawingml/2006/main" xmlns:r="http://schemas.openxmlformats.org/officeDocument/2006/relationships" xmlns:p="http://schemas.openxmlformats.org/presentationml/2006/main">
+  <p:cSld>
+    <p:spTree>
+      <p:nvGrpSpPr>
+        <p:cNvPr id="1" name=""/>
+        <p:cNvGrpSpPr/>
+        <p:nvPr/>
+      </p:nvGrpSpPr>
+      <p:grpSpPr>
+        <a:xfrm>
+          <a:off x="0" y="0"/>
+          <a:ext cx="0" cy="0"/>
+          <a:chOff x="0" y="0"/>
+          <a:chExt cx="0" cy="0"/>
+        </a:xfrm>
+      </p:grpSpPr>
+      <p:sp>
+        <p:nvSpPr>
+          <p:cNvPr id="2" name="Title 1">
+            <a:extLst>
+              <a:ext uri="{FF2B5EF4-FFF2-40B4-BE49-F238E27FC236}">
+                <a16:creationId xmlns:a16="http://schemas.microsoft.com/office/drawing/2014/main" id="{122A31DA-B431-C54A-874F-C1236B9B36B8}"/>
+              </a:ext>
+            </a:extLst>
+          </p:cNvPr>
+          <p:cNvSpPr>
+            <a:spLocks noGrp="1"/>
+          </p:cNvSpPr>
+          <p:nvPr>
+            <p:ph type="title"/>
+          </p:nvPr>
+        </p:nvSpPr>
+        <p:spPr/>
+        <p:txBody>
+          <a:bodyPr/>
+          <a:lstStyle/>
+          <a:p>
+            <a:r>
+              <a:rPr lang="en-US" dirty="0"/>
+              <a:t>Why are they different? Why should we care?</a:t>
+            </a:r>
+          </a:p>
+        </p:txBody>
+      </p:sp>
+      <p:sp>
+        <p:nvSpPr>
+          <p:cNvPr id="4" name="Oval 3">
+            <a:extLst>
+              <a:ext uri="{FF2B5EF4-FFF2-40B4-BE49-F238E27FC236}">
+                <a16:creationId xmlns:a16="http://schemas.microsoft.com/office/drawing/2014/main" id="{4075A81A-7D11-9448-BF36-6D732E7F151C}"/>
+              </a:ext>
+            </a:extLst>
+          </p:cNvPr>
+          <p:cNvSpPr/>
+          <p:nvPr/>
+        </p:nvSpPr>
+        <p:spPr>
+          <a:xfrm>
+            <a:off x="2600326" y="3014662"/>
+            <a:ext cx="314325" cy="314325"/>
+          </a:xfrm>
+          <a:prstGeom prst="ellipse">
+            <a:avLst/>
+          </a:prstGeom>
+        </p:spPr>
+        <p:style>
+          <a:lnRef idx="2">
+            <a:schemeClr val="accent1">
+              <a:shade val="50000"/>
+            </a:schemeClr>
+          </a:lnRef>
+          <a:fillRef idx="1">
+            <a:schemeClr val="accent1"/>
+          </a:fillRef>
+          <a:effectRef idx="0">
+            <a:schemeClr val="accent1"/>
+          </a:effectRef>
+          <a:fontRef idx="minor">
+            <a:schemeClr val="lt1"/>
+          </a:fontRef>
+        </p:style>
+        <p:txBody>
+          <a:bodyPr rtlCol="0" anchor="ctr"/>
+          <a:lstStyle/>
+          <a:p>
+            <a:pPr algn="ctr"/>
+            <a:endParaRPr lang="en-US"/>
+          </a:p>
+        </p:txBody>
+      </p:sp>
+      <p:sp>
+        <p:nvSpPr>
+          <p:cNvPr id="5" name="Oval 4">
+            <a:extLst>
+              <a:ext uri="{FF2B5EF4-FFF2-40B4-BE49-F238E27FC236}">
+                <a16:creationId xmlns:a16="http://schemas.microsoft.com/office/drawing/2014/main" id="{E4516562-A1F7-4A44-B228-68531F4F81E8}"/>
+              </a:ext>
+            </a:extLst>
+          </p:cNvPr>
+          <p:cNvSpPr/>
+          <p:nvPr/>
+        </p:nvSpPr>
+        <p:spPr>
+          <a:xfrm>
+            <a:off x="3467101" y="3752849"/>
+            <a:ext cx="314325" cy="314325"/>
+          </a:xfrm>
+          <a:prstGeom prst="ellipse">
+            <a:avLst/>
+          </a:prstGeom>
+        </p:spPr>
+        <p:style>
+          <a:lnRef idx="2">
+            <a:schemeClr val="accent1">
+              <a:shade val="50000"/>
+            </a:schemeClr>
+          </a:lnRef>
+          <a:fillRef idx="1">
+            <a:schemeClr val="accent1"/>
+          </a:fillRef>
+          <a:effectRef idx="0">
+            <a:schemeClr val="accent1"/>
+          </a:effectRef>
+          <a:fontRef idx="minor">
+            <a:schemeClr val="lt1"/>
+          </a:fontRef>
+        </p:style>
+        <p:txBody>
+          <a:bodyPr rtlCol="0" anchor="ctr"/>
+          <a:lstStyle/>
+          <a:p>
+            <a:pPr algn="ctr"/>
+            <a:endParaRPr lang="en-US"/>
+          </a:p>
+        </p:txBody>
+      </p:sp>
+      <p:sp>
+        <p:nvSpPr>
+          <p:cNvPr id="6" name="Oval 5">
+            <a:extLst>
+              <a:ext uri="{FF2B5EF4-FFF2-40B4-BE49-F238E27FC236}">
+                <a16:creationId xmlns:a16="http://schemas.microsoft.com/office/drawing/2014/main" id="{1ABEA4FE-AD89-454B-989F-A777676B2DAB}"/>
+              </a:ext>
+            </a:extLst>
+          </p:cNvPr>
+          <p:cNvSpPr/>
+          <p:nvPr/>
+        </p:nvSpPr>
+        <p:spPr>
+          <a:xfrm>
+            <a:off x="2586038" y="4410075"/>
+            <a:ext cx="314325" cy="314325"/>
+          </a:xfrm>
+          <a:prstGeom prst="ellipse">
+            <a:avLst/>
+          </a:prstGeom>
+          <a:solidFill>
+            <a:srgbClr val="92D050"/>
+          </a:solidFill>
+        </p:spPr>
+        <p:style>
+          <a:lnRef idx="2">
+            <a:schemeClr val="accent1">
+              <a:shade val="50000"/>
+            </a:schemeClr>
+          </a:lnRef>
+          <a:fillRef idx="1">
+            <a:schemeClr val="accent1"/>
+          </a:fillRef>
+          <a:effectRef idx="0">
+            <a:schemeClr val="accent1"/>
+          </a:effectRef>
+          <a:fontRef idx="minor">
+            <a:schemeClr val="lt1"/>
+          </a:fontRef>
+        </p:style>
+        <p:txBody>
+          <a:bodyPr rtlCol="0" anchor="ctr"/>
+          <a:lstStyle/>
+          <a:p>
+            <a:pPr algn="ctr"/>
+            <a:endParaRPr lang="en-US"/>
+          </a:p>
+        </p:txBody>
+      </p:sp>
+      <p:sp>
+        <p:nvSpPr>
+          <p:cNvPr id="7" name="Oval 6">
+            <a:extLst>
+              <a:ext uri="{FF2B5EF4-FFF2-40B4-BE49-F238E27FC236}">
+                <a16:creationId xmlns:a16="http://schemas.microsoft.com/office/drawing/2014/main" id="{4E83A67A-C00A-B342-BE75-24729CD2D02F}"/>
+              </a:ext>
+            </a:extLst>
+          </p:cNvPr>
+          <p:cNvSpPr/>
+          <p:nvPr/>
+        </p:nvSpPr>
+        <p:spPr>
+          <a:xfrm>
+            <a:off x="4724401" y="4567237"/>
+            <a:ext cx="314325" cy="314325"/>
+          </a:xfrm>
+          <a:prstGeom prst="ellipse">
+            <a:avLst/>
+          </a:prstGeom>
+        </p:spPr>
+        <p:style>
+          <a:lnRef idx="2">
+            <a:schemeClr val="accent1">
+              <a:shade val="50000"/>
+            </a:schemeClr>
+          </a:lnRef>
+          <a:fillRef idx="1">
+            <a:schemeClr val="accent1"/>
+          </a:fillRef>
+          <a:effectRef idx="0">
+            <a:schemeClr val="accent1"/>
+          </a:effectRef>
+          <a:fontRef idx="minor">
+            <a:schemeClr val="lt1"/>
+          </a:fontRef>
+        </p:style>
+        <p:txBody>
+          <a:bodyPr rtlCol="0" anchor="ctr"/>
+          <a:lstStyle/>
+          <a:p>
+            <a:pPr algn="ctr"/>
+            <a:endParaRPr lang="en-US"/>
+          </a:p>
+        </p:txBody>
+      </p:sp>
+      <p:sp>
+        <p:nvSpPr>
+          <p:cNvPr id="8" name="Oval 7">
+            <a:extLst>
+              <a:ext uri="{FF2B5EF4-FFF2-40B4-BE49-F238E27FC236}">
+                <a16:creationId xmlns:a16="http://schemas.microsoft.com/office/drawing/2014/main" id="{6F55F405-3566-B348-BF65-58C69A1A867A}"/>
+              </a:ext>
+            </a:extLst>
+          </p:cNvPr>
+          <p:cNvSpPr/>
+          <p:nvPr/>
+        </p:nvSpPr>
+        <p:spPr>
+          <a:xfrm>
+            <a:off x="3467101" y="5186360"/>
+            <a:ext cx="314325" cy="314325"/>
+          </a:xfrm>
+          <a:prstGeom prst="ellipse">
+            <a:avLst/>
+          </a:prstGeom>
+          <a:solidFill>
+            <a:srgbClr val="FFC000"/>
+          </a:solidFill>
+        </p:spPr>
+        <p:style>
+          <a:lnRef idx="2">
+            <a:schemeClr val="accent1">
+              <a:shade val="50000"/>
+            </a:schemeClr>
+          </a:lnRef>
+          <a:fillRef idx="1">
+            <a:schemeClr val="accent1"/>
+          </a:fillRef>
+          <a:effectRef idx="0">
+            <a:schemeClr val="accent1"/>
+          </a:effectRef>
+          <a:fontRef idx="minor">
+            <a:schemeClr val="lt1"/>
+          </a:fontRef>
+        </p:style>
+        <p:txBody>
+          <a:bodyPr rtlCol="0" anchor="ctr"/>
+          <a:lstStyle/>
+          <a:p>
+            <a:pPr algn="ctr"/>
+            <a:endParaRPr lang="en-US"/>
+          </a:p>
+        </p:txBody>
+      </p:sp>
+      <p:sp>
+        <p:nvSpPr>
+          <p:cNvPr id="9" name="Oval 8">
+            <a:extLst>
+              <a:ext uri="{FF2B5EF4-FFF2-40B4-BE49-F238E27FC236}">
+                <a16:creationId xmlns:a16="http://schemas.microsoft.com/office/drawing/2014/main" id="{EDD5ABE0-00B9-DD40-8C3A-A0CB5719BCBA}"/>
+              </a:ext>
+            </a:extLst>
+          </p:cNvPr>
+          <p:cNvSpPr/>
+          <p:nvPr/>
+        </p:nvSpPr>
+        <p:spPr>
+          <a:xfrm>
+            <a:off x="4410075" y="2800349"/>
+            <a:ext cx="314325" cy="314325"/>
+          </a:xfrm>
+          <a:prstGeom prst="ellipse">
+            <a:avLst/>
+          </a:prstGeom>
+          <a:solidFill>
+            <a:srgbClr val="FF0000"/>
+          </a:solidFill>
+        </p:spPr>
+        <p:style>
+          <a:lnRef idx="2">
+            <a:schemeClr val="accent1">
+              <a:shade val="50000"/>
+            </a:schemeClr>
+          </a:lnRef>
+          <a:fillRef idx="1">
+            <a:schemeClr val="accent1"/>
+          </a:fillRef>
+          <a:effectRef idx="0">
+            <a:schemeClr val="accent1"/>
+          </a:effectRef>
+          <a:fontRef idx="minor">
+            <a:schemeClr val="lt1"/>
+          </a:fontRef>
+        </p:style>
+        <p:txBody>
+          <a:bodyPr rtlCol="0" anchor="ctr"/>
+          <a:lstStyle/>
+          <a:p>
+            <a:pPr algn="ctr"/>
+            <a:endParaRPr lang="en-US"/>
+          </a:p>
+        </p:txBody>
+      </p:sp>
+      <p:sp>
+        <p:nvSpPr>
+          <p:cNvPr id="10" name="Oval 9">
+            <a:extLst>
+              <a:ext uri="{FF2B5EF4-FFF2-40B4-BE49-F238E27FC236}">
+                <a16:creationId xmlns:a16="http://schemas.microsoft.com/office/drawing/2014/main" id="{B26DB84F-E78D-2A48-A3F2-63B628D47B3F}"/>
+              </a:ext>
+            </a:extLst>
+          </p:cNvPr>
+          <p:cNvSpPr/>
+          <p:nvPr/>
+        </p:nvSpPr>
+        <p:spPr>
+          <a:xfrm>
+            <a:off x="3467100" y="3050382"/>
+            <a:ext cx="314325" cy="314325"/>
+          </a:xfrm>
+          <a:prstGeom prst="ellipse">
+            <a:avLst/>
+          </a:prstGeom>
+          <a:solidFill>
+            <a:srgbClr val="92D050"/>
+          </a:solidFill>
+          <a:ln>
+            <a:solidFill>
+              <a:schemeClr val="accent1"/>
+            </a:solidFill>
+          </a:ln>
+        </p:spPr>
+        <p:style>
+          <a:lnRef idx="2">
+            <a:schemeClr val="accent1">
+              <a:shade val="50000"/>
+            </a:schemeClr>
+          </a:lnRef>
+          <a:fillRef idx="1">
+            <a:schemeClr val="accent1"/>
+          </a:fillRef>
+          <a:effectRef idx="0">
+            <a:schemeClr val="accent1"/>
+          </a:effectRef>
+          <a:fontRef idx="minor">
+            <a:schemeClr val="lt1"/>
+          </a:fontRef>
+        </p:style>
+        <p:txBody>
+          <a:bodyPr rtlCol="0" anchor="ctr"/>
+          <a:lstStyle/>
+          <a:p>
+            <a:pPr algn="ctr"/>
+            <a:endParaRPr lang="en-US"/>
+          </a:p>
+        </p:txBody>
+      </p:sp>
+      <p:sp>
+        <p:nvSpPr>
+          <p:cNvPr id="11" name="Oval 10">
+            <a:extLst>
+              <a:ext uri="{FF2B5EF4-FFF2-40B4-BE49-F238E27FC236}">
+                <a16:creationId xmlns:a16="http://schemas.microsoft.com/office/drawing/2014/main" id="{DC502950-677E-3049-990E-AEC7AF21DD01}"/>
+              </a:ext>
+            </a:extLst>
+          </p:cNvPr>
+          <p:cNvSpPr/>
+          <p:nvPr/>
+        </p:nvSpPr>
+        <p:spPr>
+          <a:xfrm>
+            <a:off x="3967164" y="4410074"/>
+            <a:ext cx="314325" cy="314325"/>
+          </a:xfrm>
+          <a:prstGeom prst="ellipse">
+            <a:avLst/>
+          </a:prstGeom>
+          <a:solidFill>
+            <a:srgbClr val="92D050"/>
+          </a:solidFill>
+        </p:spPr>
+        <p:style>
+          <a:lnRef idx="2">
+            <a:schemeClr val="accent1">
+              <a:shade val="50000"/>
+            </a:schemeClr>
+          </a:lnRef>
+          <a:fillRef idx="1">
+            <a:schemeClr val="accent1"/>
+          </a:fillRef>
+          <a:effectRef idx="0">
+            <a:schemeClr val="accent1"/>
+          </a:effectRef>
+          <a:fontRef idx="minor">
+            <a:schemeClr val="lt1"/>
+          </a:fontRef>
+        </p:style>
+        <p:txBody>
+          <a:bodyPr rtlCol="0" anchor="ctr"/>
+          <a:lstStyle/>
+          <a:p>
+            <a:pPr algn="ctr"/>
+            <a:endParaRPr lang="en-US"/>
+          </a:p>
+        </p:txBody>
+      </p:sp>
+      <p:sp>
+        <p:nvSpPr>
+          <p:cNvPr id="12" name="Oval 11">
+            <a:extLst>
+              <a:ext uri="{FF2B5EF4-FFF2-40B4-BE49-F238E27FC236}">
+                <a16:creationId xmlns:a16="http://schemas.microsoft.com/office/drawing/2014/main" id="{45A94771-F505-D14F-B441-07C73CD0D66B}"/>
+              </a:ext>
+            </a:extLst>
+          </p:cNvPr>
+          <p:cNvSpPr/>
+          <p:nvPr/>
+        </p:nvSpPr>
+        <p:spPr>
+          <a:xfrm>
+            <a:off x="4567238" y="3752848"/>
+            <a:ext cx="314325" cy="314325"/>
+          </a:xfrm>
+          <a:prstGeom prst="ellipse">
+            <a:avLst/>
+          </a:prstGeom>
+        </p:spPr>
+        <p:style>
+          <a:lnRef idx="2">
+            <a:schemeClr val="accent1">
+              <a:shade val="50000"/>
+            </a:schemeClr>
+          </a:lnRef>
+          <a:fillRef idx="1">
+            <a:schemeClr val="accent1"/>
+          </a:fillRef>
+          <a:effectRef idx="0">
+            <a:schemeClr val="accent1"/>
+          </a:effectRef>
+          <a:fontRef idx="minor">
+            <a:schemeClr val="lt1"/>
+          </a:fontRef>
+        </p:style>
+        <p:txBody>
+          <a:bodyPr rtlCol="0" anchor="ctr"/>
+          <a:lstStyle/>
+          <a:p>
+            <a:pPr algn="ctr"/>
+            <a:endParaRPr lang="en-US"/>
+          </a:p>
+        </p:txBody>
+      </p:sp>
+      <p:sp>
+        <p:nvSpPr>
+          <p:cNvPr id="13" name="Oval 12">
+            <a:extLst>
+              <a:ext uri="{FF2B5EF4-FFF2-40B4-BE49-F238E27FC236}">
+                <a16:creationId xmlns:a16="http://schemas.microsoft.com/office/drawing/2014/main" id="{A3A575E6-7D11-6844-B659-F1F931279368}"/>
+              </a:ext>
+            </a:extLst>
+          </p:cNvPr>
+          <p:cNvSpPr/>
+          <p:nvPr/>
+        </p:nvSpPr>
+        <p:spPr>
+          <a:xfrm>
+            <a:off x="3119438" y="4710111"/>
+            <a:ext cx="314325" cy="314325"/>
+          </a:xfrm>
+          <a:prstGeom prst="ellipse">
+            <a:avLst/>
+          </a:prstGeom>
+        </p:spPr>
+        <p:style>
+          <a:lnRef idx="2">
+            <a:schemeClr val="accent1">
+              <a:shade val="50000"/>
+            </a:schemeClr>
+          </a:lnRef>
+          <a:fillRef idx="1">
+            <a:schemeClr val="accent1"/>
+          </a:fillRef>
+          <a:effectRef idx="0">
+            <a:schemeClr val="accent1"/>
+          </a:effectRef>
+          <a:fontRef idx="minor">
+            <a:schemeClr val="lt1"/>
+          </a:fontRef>
+        </p:style>
+        <p:txBody>
+          <a:bodyPr rtlCol="0" anchor="ctr"/>
+          <a:lstStyle/>
+          <a:p>
+            <a:pPr algn="ctr"/>
+            <a:endParaRPr lang="en-US"/>
+          </a:p>
+        </p:txBody>
+      </p:sp>
+      <p:sp>
+        <p:nvSpPr>
+          <p:cNvPr id="14" name="Oval 13">
+            <a:extLst>
+              <a:ext uri="{FF2B5EF4-FFF2-40B4-BE49-F238E27FC236}">
+                <a16:creationId xmlns:a16="http://schemas.microsoft.com/office/drawing/2014/main" id="{1D5E120C-A984-764E-B4EF-AA70BC53CD10}"/>
+              </a:ext>
+            </a:extLst>
+          </p:cNvPr>
+          <p:cNvSpPr/>
+          <p:nvPr/>
+        </p:nvSpPr>
+        <p:spPr>
+          <a:xfrm>
+            <a:off x="2728912" y="3867149"/>
+            <a:ext cx="314325" cy="314325"/>
+          </a:xfrm>
+          <a:prstGeom prst="ellipse">
+            <a:avLst/>
+          </a:prstGeom>
+        </p:spPr>
+        <p:style>
+          <a:lnRef idx="2">
+            <a:schemeClr val="accent1">
+              <a:shade val="50000"/>
+            </a:schemeClr>
+          </a:lnRef>
+          <a:fillRef idx="1">
+            <a:schemeClr val="accent1"/>
+          </a:fillRef>
+          <a:effectRef idx="0">
+            <a:schemeClr val="accent1"/>
+          </a:effectRef>
+          <a:fontRef idx="minor">
+            <a:schemeClr val="lt1"/>
+          </a:fontRef>
+        </p:style>
+        <p:txBody>
+          <a:bodyPr rtlCol="0" anchor="ctr"/>
+          <a:lstStyle/>
+          <a:p>
+            <a:pPr algn="ctr"/>
+            <a:endParaRPr lang="en-US"/>
+          </a:p>
+        </p:txBody>
+      </p:sp>
+      <p:sp>
+        <p:nvSpPr>
+          <p:cNvPr id="15" name="Oval 14">
+            <a:extLst>
+              <a:ext uri="{FF2B5EF4-FFF2-40B4-BE49-F238E27FC236}">
+                <a16:creationId xmlns:a16="http://schemas.microsoft.com/office/drawing/2014/main" id="{F4679495-EAA4-F64B-8588-1E9DEA49D4C8}"/>
+              </a:ext>
+            </a:extLst>
+          </p:cNvPr>
+          <p:cNvSpPr/>
+          <p:nvPr/>
+        </p:nvSpPr>
+        <p:spPr>
+          <a:xfrm>
+            <a:off x="3967163" y="3378993"/>
+            <a:ext cx="314325" cy="314325"/>
+          </a:xfrm>
+          <a:prstGeom prst="ellipse">
+            <a:avLst/>
+          </a:prstGeom>
+        </p:spPr>
+        <p:style>
+          <a:lnRef idx="2">
+            <a:schemeClr val="accent1">
+              <a:shade val="50000"/>
+            </a:schemeClr>
+          </a:lnRef>
+          <a:fillRef idx="1">
+            <a:schemeClr val="accent1"/>
+          </a:fillRef>
+          <a:effectRef idx="0">
+            <a:schemeClr val="accent1"/>
+          </a:effectRef>
+          <a:fontRef idx="minor">
+            <a:schemeClr val="lt1"/>
+          </a:fontRef>
+        </p:style>
+        <p:txBody>
+          <a:bodyPr rtlCol="0" anchor="ctr"/>
+          <a:lstStyle/>
+          <a:p>
+            <a:pPr algn="ctr"/>
+            <a:endParaRPr lang="en-US"/>
+          </a:p>
+        </p:txBody>
+      </p:sp>
+      <p:sp>
+        <p:nvSpPr>
+          <p:cNvPr id="16" name="Oval 15">
+            <a:extLst>
+              <a:ext uri="{FF2B5EF4-FFF2-40B4-BE49-F238E27FC236}">
+                <a16:creationId xmlns:a16="http://schemas.microsoft.com/office/drawing/2014/main" id="{BF75227F-3BDA-534D-AC82-AA532C3B808A}"/>
+              </a:ext>
+            </a:extLst>
+          </p:cNvPr>
+          <p:cNvSpPr/>
+          <p:nvPr/>
+        </p:nvSpPr>
+        <p:spPr>
+          <a:xfrm>
+            <a:off x="6524626" y="3014662"/>
+            <a:ext cx="314325" cy="314325"/>
+          </a:xfrm>
+          <a:prstGeom prst="ellipse">
+            <a:avLst/>
+          </a:prstGeom>
+          <a:solidFill>
+            <a:srgbClr val="FF00E5"/>
+          </a:solidFill>
+        </p:spPr>
+        <p:style>
+          <a:lnRef idx="2">
+            <a:schemeClr val="accent1">
+              <a:shade val="50000"/>
+            </a:schemeClr>
+          </a:lnRef>
+          <a:fillRef idx="1">
+            <a:schemeClr val="accent1"/>
+          </a:fillRef>
+          <a:effectRef idx="0">
+            <a:schemeClr val="accent1"/>
+          </a:effectRef>
+          <a:fontRef idx="minor">
+            <a:schemeClr val="lt1"/>
+          </a:fontRef>
+        </p:style>
+        <p:txBody>
+          <a:bodyPr rtlCol="0" anchor="ctr"/>
+          <a:lstStyle/>
+          <a:p>
+            <a:pPr algn="ctr"/>
+            <a:endParaRPr lang="en-US"/>
+          </a:p>
+        </p:txBody>
+      </p:sp>
+      <p:sp>
+        <p:nvSpPr>
+          <p:cNvPr id="17" name="Oval 16">
+            <a:extLst>
+              <a:ext uri="{FF2B5EF4-FFF2-40B4-BE49-F238E27FC236}">
+                <a16:creationId xmlns:a16="http://schemas.microsoft.com/office/drawing/2014/main" id="{AC9855B0-6DB2-1749-A1D4-4B1B81587D5F}"/>
+              </a:ext>
+            </a:extLst>
+          </p:cNvPr>
+          <p:cNvSpPr/>
+          <p:nvPr/>
+        </p:nvSpPr>
+        <p:spPr>
+          <a:xfrm>
+            <a:off x="7391401" y="3752849"/>
+            <a:ext cx="314325" cy="314325"/>
+          </a:xfrm>
+          <a:prstGeom prst="ellipse">
+            <a:avLst/>
+          </a:prstGeom>
+          <a:solidFill>
+            <a:srgbClr val="7030A0"/>
+          </a:solidFill>
+        </p:spPr>
+        <p:style>
+          <a:lnRef idx="2">
+            <a:schemeClr val="accent1">
+              <a:shade val="50000"/>
+            </a:schemeClr>
+          </a:lnRef>
+          <a:fillRef idx="1">
+            <a:schemeClr val="accent1"/>
+          </a:fillRef>
+          <a:effectRef idx="0">
+            <a:schemeClr val="accent1"/>
+          </a:effectRef>
+          <a:fontRef idx="minor">
+            <a:schemeClr val="lt1"/>
+          </a:fontRef>
+        </p:style>
+        <p:txBody>
+          <a:bodyPr rtlCol="0" anchor="ctr"/>
+          <a:lstStyle/>
+          <a:p>
+            <a:pPr algn="ctr"/>
+            <a:endParaRPr lang="en-US"/>
+          </a:p>
+        </p:txBody>
+      </p:sp>
+      <p:sp>
+        <p:nvSpPr>
+          <p:cNvPr id="18" name="Oval 17">
+            <a:extLst>
+              <a:ext uri="{FF2B5EF4-FFF2-40B4-BE49-F238E27FC236}">
+                <a16:creationId xmlns:a16="http://schemas.microsoft.com/office/drawing/2014/main" id="{19F5CB4E-153D-EF40-9DD1-4986310BA056}"/>
+              </a:ext>
+            </a:extLst>
+          </p:cNvPr>
+          <p:cNvSpPr/>
+          <p:nvPr/>
+        </p:nvSpPr>
+        <p:spPr>
+          <a:xfrm>
+            <a:off x="6510338" y="4410075"/>
+            <a:ext cx="314325" cy="314325"/>
+          </a:xfrm>
+          <a:prstGeom prst="ellipse">
+            <a:avLst/>
+          </a:prstGeom>
+          <a:solidFill>
+            <a:srgbClr val="FF0000"/>
+          </a:solidFill>
+        </p:spPr>
+        <p:style>
+          <a:lnRef idx="2">
+            <a:schemeClr val="accent1">
+              <a:shade val="50000"/>
+            </a:schemeClr>
+          </a:lnRef>
+          <a:fillRef idx="1">
+            <a:schemeClr val="accent1"/>
+          </a:fillRef>
+          <a:effectRef idx="0">
+            <a:schemeClr val="accent1"/>
+          </a:effectRef>
+          <a:fontRef idx="minor">
+            <a:schemeClr val="lt1"/>
+          </a:fontRef>
+        </p:style>
+        <p:txBody>
+          <a:bodyPr rtlCol="0" anchor="ctr"/>
+          <a:lstStyle/>
+          <a:p>
+            <a:pPr algn="ctr"/>
+            <a:endParaRPr lang="en-US"/>
+          </a:p>
+        </p:txBody>
+      </p:sp>
+      <p:sp>
+        <p:nvSpPr>
+          <p:cNvPr id="19" name="Oval 18">
+            <a:extLst>
+              <a:ext uri="{FF2B5EF4-FFF2-40B4-BE49-F238E27FC236}">
+                <a16:creationId xmlns:a16="http://schemas.microsoft.com/office/drawing/2014/main" id="{304877B3-DB5A-2E40-9762-5B3784FF014E}"/>
+              </a:ext>
+            </a:extLst>
+          </p:cNvPr>
+          <p:cNvSpPr/>
+          <p:nvPr/>
+        </p:nvSpPr>
+        <p:spPr>
+          <a:xfrm>
+            <a:off x="8648701" y="4567237"/>
+            <a:ext cx="314325" cy="314325"/>
+          </a:xfrm>
+          <a:prstGeom prst="ellipse">
+            <a:avLst/>
+          </a:prstGeom>
+          <a:solidFill>
+            <a:srgbClr val="FFFF00"/>
+          </a:solidFill>
+        </p:spPr>
+        <p:style>
+          <a:lnRef idx="2">
+            <a:schemeClr val="accent1">
+              <a:shade val="50000"/>
+            </a:schemeClr>
+          </a:lnRef>
+          <a:fillRef idx="1">
+            <a:schemeClr val="accent1"/>
+          </a:fillRef>
+          <a:effectRef idx="0">
+            <a:schemeClr val="accent1"/>
+          </a:effectRef>
+          <a:fontRef idx="minor">
+            <a:schemeClr val="lt1"/>
+          </a:fontRef>
+        </p:style>
+        <p:txBody>
+          <a:bodyPr rtlCol="0" anchor="ctr"/>
+          <a:lstStyle/>
+          <a:p>
+            <a:pPr algn="ctr"/>
+            <a:endParaRPr lang="en-US"/>
+          </a:p>
+        </p:txBody>
+      </p:sp>
+      <p:sp>
+        <p:nvSpPr>
+          <p:cNvPr id="20" name="Oval 19">
+            <a:extLst>
+              <a:ext uri="{FF2B5EF4-FFF2-40B4-BE49-F238E27FC236}">
+                <a16:creationId xmlns:a16="http://schemas.microsoft.com/office/drawing/2014/main" id="{E53C1F00-2970-264E-8F3C-13F5A89C374D}"/>
+              </a:ext>
+            </a:extLst>
+          </p:cNvPr>
+          <p:cNvSpPr/>
+          <p:nvPr/>
+        </p:nvSpPr>
+        <p:spPr>
+          <a:xfrm>
+            <a:off x="7391401" y="5186360"/>
+            <a:ext cx="314325" cy="314325"/>
+          </a:xfrm>
+          <a:prstGeom prst="ellipse">
+            <a:avLst/>
+          </a:prstGeom>
+          <a:solidFill>
+            <a:srgbClr val="FF00E5"/>
+          </a:solidFill>
+        </p:spPr>
+        <p:style>
+          <a:lnRef idx="2">
+            <a:schemeClr val="accent1">
+              <a:shade val="50000"/>
+            </a:schemeClr>
+          </a:lnRef>
+          <a:fillRef idx="1">
+            <a:schemeClr val="accent1"/>
+          </a:fillRef>
+          <a:effectRef idx="0">
+            <a:schemeClr val="accent1"/>
+          </a:effectRef>
+          <a:fontRef idx="minor">
+            <a:schemeClr val="lt1"/>
+          </a:fontRef>
+        </p:style>
+        <p:txBody>
+          <a:bodyPr rtlCol="0" anchor="ctr"/>
+          <a:lstStyle/>
+          <a:p>
+            <a:pPr algn="ctr"/>
+            <a:endParaRPr lang="en-US"/>
+          </a:p>
+        </p:txBody>
+      </p:sp>
+      <p:sp>
+        <p:nvSpPr>
+          <p:cNvPr id="21" name="Oval 20">
+            <a:extLst>
+              <a:ext uri="{FF2B5EF4-FFF2-40B4-BE49-F238E27FC236}">
+                <a16:creationId xmlns:a16="http://schemas.microsoft.com/office/drawing/2014/main" id="{CBE665D8-BD16-C443-A7DB-33C745F5F4C3}"/>
+              </a:ext>
+            </a:extLst>
+          </p:cNvPr>
+          <p:cNvSpPr/>
+          <p:nvPr/>
+        </p:nvSpPr>
+        <p:spPr>
+          <a:xfrm>
+            <a:off x="8334375" y="2800349"/>
+            <a:ext cx="314325" cy="314325"/>
+          </a:xfrm>
+          <a:prstGeom prst="ellipse">
+            <a:avLst/>
+          </a:prstGeom>
+          <a:solidFill>
+            <a:srgbClr val="00B0F0"/>
+          </a:solidFill>
+        </p:spPr>
+        <p:style>
+          <a:lnRef idx="2">
+            <a:schemeClr val="accent1">
+              <a:shade val="50000"/>
+            </a:schemeClr>
+          </a:lnRef>
+          <a:fillRef idx="1">
+            <a:schemeClr val="accent1"/>
+          </a:fillRef>
+          <a:effectRef idx="0">
+            <a:schemeClr val="accent1"/>
+          </a:effectRef>
+          <a:fontRef idx="minor">
+            <a:schemeClr val="lt1"/>
+          </a:fontRef>
+        </p:style>
+        <p:txBody>
+          <a:bodyPr rtlCol="0" anchor="ctr"/>
+          <a:lstStyle/>
+          <a:p>
+            <a:pPr algn="ctr"/>
+            <a:endParaRPr lang="en-US"/>
+          </a:p>
+        </p:txBody>
+      </p:sp>
+      <p:sp>
+        <p:nvSpPr>
+          <p:cNvPr id="22" name="Oval 21">
+            <a:extLst>
+              <a:ext uri="{FF2B5EF4-FFF2-40B4-BE49-F238E27FC236}">
+                <a16:creationId xmlns:a16="http://schemas.microsoft.com/office/drawing/2014/main" id="{8716A6E8-5194-1843-8740-7CFE1E71AC8C}"/>
+              </a:ext>
+            </a:extLst>
+          </p:cNvPr>
+          <p:cNvSpPr/>
+          <p:nvPr/>
+        </p:nvSpPr>
+        <p:spPr>
+          <a:xfrm>
+            <a:off x="7391400" y="3050382"/>
+            <a:ext cx="314325" cy="314325"/>
+          </a:xfrm>
+          <a:prstGeom prst="ellipse">
+            <a:avLst/>
+          </a:prstGeom>
+          <a:solidFill>
+            <a:srgbClr val="FFFF00"/>
+          </a:solidFill>
+        </p:spPr>
+        <p:style>
+          <a:lnRef idx="2">
+            <a:schemeClr val="accent1">
+              <a:shade val="50000"/>
+            </a:schemeClr>
+          </a:lnRef>
+          <a:fillRef idx="1">
+            <a:schemeClr val="accent1"/>
+          </a:fillRef>
+          <a:effectRef idx="0">
+            <a:schemeClr val="accent1"/>
+          </a:effectRef>
+          <a:fontRef idx="minor">
+            <a:schemeClr val="lt1"/>
+          </a:fontRef>
+        </p:style>
+        <p:txBody>
+          <a:bodyPr rtlCol="0" anchor="ctr"/>
+          <a:lstStyle/>
+          <a:p>
+            <a:pPr algn="ctr"/>
+            <a:endParaRPr lang="en-US"/>
+          </a:p>
+        </p:txBody>
+      </p:sp>
+      <p:sp>
+        <p:nvSpPr>
+          <p:cNvPr id="23" name="Oval 22">
+            <a:extLst>
+              <a:ext uri="{FF2B5EF4-FFF2-40B4-BE49-F238E27FC236}">
+                <a16:creationId xmlns:a16="http://schemas.microsoft.com/office/drawing/2014/main" id="{AC7232C0-D3C4-874D-B786-BB148BFF7049}"/>
+              </a:ext>
+            </a:extLst>
+          </p:cNvPr>
+          <p:cNvSpPr/>
+          <p:nvPr/>
+        </p:nvSpPr>
+        <p:spPr>
+          <a:xfrm>
+            <a:off x="7891464" y="4410074"/>
+            <a:ext cx="314325" cy="314325"/>
+          </a:xfrm>
+          <a:prstGeom prst="ellipse">
+            <a:avLst/>
+          </a:prstGeom>
+          <a:solidFill>
+            <a:srgbClr val="00B0F0"/>
+          </a:solidFill>
+        </p:spPr>
+        <p:style>
+          <a:lnRef idx="2">
+            <a:schemeClr val="accent1">
+              <a:shade val="50000"/>
+            </a:schemeClr>
+          </a:lnRef>
+          <a:fillRef idx="1">
+            <a:schemeClr val="accent1"/>
+          </a:fillRef>
+          <a:effectRef idx="0">
+            <a:schemeClr val="accent1"/>
+          </a:effectRef>
+          <a:fontRef idx="minor">
+            <a:schemeClr val="lt1"/>
+          </a:fontRef>
+        </p:style>
+        <p:txBody>
+          <a:bodyPr rtlCol="0" anchor="ctr"/>
+          <a:lstStyle/>
+          <a:p>
+            <a:pPr algn="ctr"/>
+            <a:endParaRPr lang="en-US"/>
+          </a:p>
+        </p:txBody>
+      </p:sp>
+      <p:sp>
+        <p:nvSpPr>
+          <p:cNvPr id="24" name="Oval 23">
+            <a:extLst>
+              <a:ext uri="{FF2B5EF4-FFF2-40B4-BE49-F238E27FC236}">
+                <a16:creationId xmlns:a16="http://schemas.microsoft.com/office/drawing/2014/main" id="{CFB75B72-7751-E244-927A-357FEE2AD292}"/>
+              </a:ext>
+            </a:extLst>
+          </p:cNvPr>
+          <p:cNvSpPr/>
+          <p:nvPr/>
+        </p:nvSpPr>
+        <p:spPr>
+          <a:xfrm>
+            <a:off x="8491538" y="3752848"/>
+            <a:ext cx="314325" cy="314325"/>
+          </a:xfrm>
+          <a:prstGeom prst="ellipse">
+            <a:avLst/>
+          </a:prstGeom>
+          <a:solidFill>
+            <a:srgbClr val="002060"/>
+          </a:solidFill>
+        </p:spPr>
+        <p:style>
+          <a:lnRef idx="2">
+            <a:schemeClr val="accent1">
+              <a:shade val="50000"/>
+            </a:schemeClr>
+          </a:lnRef>
+          <a:fillRef idx="1">
+            <a:schemeClr val="accent1"/>
+          </a:fillRef>
+          <a:effectRef idx="0">
+            <a:schemeClr val="accent1"/>
+          </a:effectRef>
+          <a:fontRef idx="minor">
+            <a:schemeClr val="lt1"/>
+          </a:fontRef>
+        </p:style>
+        <p:txBody>
+          <a:bodyPr rtlCol="0" anchor="ctr"/>
+          <a:lstStyle/>
+          <a:p>
+            <a:pPr algn="ctr"/>
+            <a:endParaRPr lang="en-US"/>
+          </a:p>
+        </p:txBody>
+      </p:sp>
+      <p:sp>
+        <p:nvSpPr>
+          <p:cNvPr id="25" name="Oval 24">
+            <a:extLst>
+              <a:ext uri="{FF2B5EF4-FFF2-40B4-BE49-F238E27FC236}">
+                <a16:creationId xmlns:a16="http://schemas.microsoft.com/office/drawing/2014/main" id="{5A90B763-4A6C-AE44-B10A-CAC54BEA55F6}"/>
+              </a:ext>
+            </a:extLst>
+          </p:cNvPr>
+          <p:cNvSpPr/>
+          <p:nvPr/>
+        </p:nvSpPr>
+        <p:spPr>
+          <a:xfrm>
+            <a:off x="7043738" y="4710111"/>
+            <a:ext cx="314325" cy="314325"/>
+          </a:xfrm>
+          <a:prstGeom prst="ellipse">
+            <a:avLst/>
+          </a:prstGeom>
+          <a:solidFill>
+            <a:srgbClr val="FFFF00"/>
+          </a:solidFill>
+        </p:spPr>
+        <p:style>
+          <a:lnRef idx="2">
+            <a:schemeClr val="accent1">
+              <a:shade val="50000"/>
+            </a:schemeClr>
+          </a:lnRef>
+          <a:fillRef idx="1">
+            <a:schemeClr val="accent1"/>
+          </a:fillRef>
+          <a:effectRef idx="0">
+            <a:schemeClr val="accent1"/>
+          </a:effectRef>
+          <a:fontRef idx="minor">
+            <a:schemeClr val="lt1"/>
+          </a:fontRef>
+        </p:style>
+        <p:txBody>
+          <a:bodyPr rtlCol="0" anchor="ctr"/>
+          <a:lstStyle/>
+          <a:p>
+            <a:pPr algn="ctr"/>
+            <a:endParaRPr lang="en-US"/>
+          </a:p>
+        </p:txBody>
+      </p:sp>
+      <p:sp>
+        <p:nvSpPr>
+          <p:cNvPr id="26" name="Oval 25">
+            <a:extLst>
+              <a:ext uri="{FF2B5EF4-FFF2-40B4-BE49-F238E27FC236}">
+                <a16:creationId xmlns:a16="http://schemas.microsoft.com/office/drawing/2014/main" id="{E608D13B-D12C-924F-8139-3E7E8F9E180F}"/>
+              </a:ext>
+            </a:extLst>
+          </p:cNvPr>
+          <p:cNvSpPr/>
+          <p:nvPr/>
+        </p:nvSpPr>
+        <p:spPr>
+          <a:xfrm>
+            <a:off x="6653212" y="3867149"/>
+            <a:ext cx="314325" cy="314325"/>
+          </a:xfrm>
+          <a:prstGeom prst="ellipse">
+            <a:avLst/>
+          </a:prstGeom>
+          <a:solidFill>
+            <a:srgbClr val="92D050"/>
+          </a:solidFill>
+        </p:spPr>
+        <p:style>
+          <a:lnRef idx="2">
+            <a:schemeClr val="accent1">
+              <a:shade val="50000"/>
+            </a:schemeClr>
+          </a:lnRef>
+          <a:fillRef idx="1">
+            <a:schemeClr val="accent1"/>
+          </a:fillRef>
+          <a:effectRef idx="0">
+            <a:schemeClr val="accent1"/>
+          </a:effectRef>
+          <a:fontRef idx="minor">
+            <a:schemeClr val="lt1"/>
+          </a:fontRef>
+        </p:style>
+        <p:txBody>
+          <a:bodyPr rtlCol="0" anchor="ctr"/>
+          <a:lstStyle/>
+          <a:p>
+            <a:pPr algn="ctr"/>
+            <a:endParaRPr lang="en-US"/>
+          </a:p>
+        </p:txBody>
+      </p:sp>
+      <p:sp>
+        <p:nvSpPr>
+          <p:cNvPr id="27" name="Oval 26">
+            <a:extLst>
+              <a:ext uri="{FF2B5EF4-FFF2-40B4-BE49-F238E27FC236}">
+                <a16:creationId xmlns:a16="http://schemas.microsoft.com/office/drawing/2014/main" id="{6549C0F0-8986-694D-A0BD-8647118E99FE}"/>
+              </a:ext>
+            </a:extLst>
+          </p:cNvPr>
+          <p:cNvSpPr/>
+          <p:nvPr/>
+        </p:nvSpPr>
+        <p:spPr>
+          <a:xfrm>
+            <a:off x="7891463" y="3378993"/>
+            <a:ext cx="314325" cy="314325"/>
+          </a:xfrm>
+          <a:prstGeom prst="ellipse">
+            <a:avLst/>
+          </a:prstGeom>
+          <a:solidFill>
+            <a:srgbClr val="FFC000"/>
+          </a:solidFill>
+        </p:spPr>
+        <p:style>
+          <a:lnRef idx="2">
+            <a:schemeClr val="accent1">
+              <a:shade val="50000"/>
+            </a:schemeClr>
+          </a:lnRef>
+          <a:fillRef idx="1">
+            <a:schemeClr val="accent1"/>
+          </a:fillRef>
+          <a:effectRef idx="0">
+            <a:schemeClr val="accent1"/>
+          </a:effectRef>
+          <a:fontRef idx="minor">
+            <a:schemeClr val="lt1"/>
+          </a:fontRef>
+        </p:style>
+        <p:txBody>
+          <a:bodyPr rtlCol="0" anchor="ctr"/>
+          <a:lstStyle/>
+          <a:p>
+            <a:pPr algn="ctr"/>
+            <a:endParaRPr lang="en-US"/>
+          </a:p>
+        </p:txBody>
+      </p:sp>
+      <p:sp>
+        <p:nvSpPr>
+          <p:cNvPr id="28" name="TextBox 27">
+            <a:extLst>
+              <a:ext uri="{FF2B5EF4-FFF2-40B4-BE49-F238E27FC236}">
+                <a16:creationId xmlns:a16="http://schemas.microsoft.com/office/drawing/2014/main" id="{EA335B55-8B52-5644-A550-2710A16DB226}"/>
+              </a:ext>
+            </a:extLst>
+          </p:cNvPr>
+          <p:cNvSpPr txBox="1"/>
+          <p:nvPr/>
+        </p:nvSpPr>
+        <p:spPr>
+          <a:xfrm>
+            <a:off x="2717006" y="1991378"/>
+            <a:ext cx="2164558" cy="523220"/>
+          </a:xfrm>
+          <a:prstGeom prst="rect">
+            <a:avLst/>
+          </a:prstGeom>
+          <a:noFill/>
+        </p:spPr>
+        <p:txBody>
+          <a:bodyPr wrap="square" rtlCol="0">
+            <a:spAutoFit/>
+          </a:bodyPr>
+          <a:lstStyle/>
+          <a:p>
+            <a:r>
+              <a:rPr lang="en-US" sz="2800" dirty="0"/>
+              <a:t>Community 1</a:t>
+            </a:r>
+          </a:p>
+        </p:txBody>
+      </p:sp>
+      <p:sp>
+        <p:nvSpPr>
+          <p:cNvPr id="29" name="TextBox 28">
+            <a:extLst>
+              <a:ext uri="{FF2B5EF4-FFF2-40B4-BE49-F238E27FC236}">
+                <a16:creationId xmlns:a16="http://schemas.microsoft.com/office/drawing/2014/main" id="{BC52BB93-C1D8-A04D-98AA-48CAD4AC9990}"/>
+              </a:ext>
+            </a:extLst>
+          </p:cNvPr>
+          <p:cNvSpPr txBox="1"/>
+          <p:nvPr/>
+        </p:nvSpPr>
+        <p:spPr>
+          <a:xfrm>
+            <a:off x="6667500" y="2015520"/>
+            <a:ext cx="2164558" cy="523220"/>
+          </a:xfrm>
+          <a:prstGeom prst="rect">
+            <a:avLst/>
+          </a:prstGeom>
+          <a:noFill/>
+        </p:spPr>
+        <p:txBody>
+          <a:bodyPr wrap="square" rtlCol="0">
+            <a:spAutoFit/>
+          </a:bodyPr>
+          <a:lstStyle/>
+          <a:p>
+            <a:r>
+              <a:rPr lang="en-US" sz="2800" dirty="0"/>
+              <a:t>Community 2</a:t>
+            </a:r>
+          </a:p>
+        </p:txBody>
+      </p:sp>
+    </p:spTree>
+    <p:extLst>
+      <p:ext uri="{BB962C8B-B14F-4D97-AF65-F5344CB8AC3E}">
+        <p14:creationId xmlns:p14="http://schemas.microsoft.com/office/powerpoint/2010/main" val="3055002149"/>
+      </p:ext>
+    </p:extLst>
+  </p:cSld>
+  <p:clrMapOvr>
+    <a:masterClrMapping/>
+  </p:clrMapOvr>
+</p:sld>
+</file>
+
+<file path=ppt/slides/slide20.xml><?xml version="1.0" encoding="utf-8"?>
 <p:sld xmlns:a="http://schemas.openxmlformats.org/drawingml/2006/main" xmlns:r="http://schemas.openxmlformats.org/officeDocument/2006/relationships" xmlns:p="http://schemas.openxmlformats.org/presentationml/2006/main">
   <p:cSld>
     <p:spTree>
@@ -34283,7 +36066,7 @@
 </p:sld>
 </file>
 
-<file path=ppt/slides/slide19.xml><?xml version="1.0" encoding="utf-8"?>
+<file path=ppt/slides/slide21.xml><?xml version="1.0" encoding="utf-8"?>
 <p:sld xmlns:a="http://schemas.openxmlformats.org/drawingml/2006/main" xmlns:r="http://schemas.openxmlformats.org/officeDocument/2006/relationships" xmlns:p="http://schemas.openxmlformats.org/presentationml/2006/main">
   <p:cSld>
     <p:spTree>
@@ -34379,1295 +36162,7 @@
 </p:sld>
 </file>
 
-<file path=ppt/slides/slide2.xml><?xml version="1.0" encoding="utf-8"?>
-<p:sld xmlns:a="http://schemas.openxmlformats.org/drawingml/2006/main" xmlns:r="http://schemas.openxmlformats.org/officeDocument/2006/relationships" xmlns:p="http://schemas.openxmlformats.org/presentationml/2006/main">
-  <p:cSld>
-    <p:spTree>
-      <p:nvGrpSpPr>
-        <p:cNvPr id="1" name=""/>
-        <p:cNvGrpSpPr/>
-        <p:nvPr/>
-      </p:nvGrpSpPr>
-      <p:grpSpPr>
-        <a:xfrm>
-          <a:off x="0" y="0"/>
-          <a:ext cx="0" cy="0"/>
-          <a:chOff x="0" y="0"/>
-          <a:chExt cx="0" cy="0"/>
-        </a:xfrm>
-      </p:grpSpPr>
-      <p:sp>
-        <p:nvSpPr>
-          <p:cNvPr id="2" name="Title 1">
-            <a:extLst>
-              <a:ext uri="{FF2B5EF4-FFF2-40B4-BE49-F238E27FC236}">
-                <a16:creationId xmlns:a16="http://schemas.microsoft.com/office/drawing/2014/main" id="{122A31DA-B431-C54A-874F-C1236B9B36B8}"/>
-              </a:ext>
-            </a:extLst>
-          </p:cNvPr>
-          <p:cNvSpPr>
-            <a:spLocks noGrp="1"/>
-          </p:cNvSpPr>
-          <p:nvPr>
-            <p:ph type="title"/>
-          </p:nvPr>
-        </p:nvSpPr>
-        <p:spPr/>
-        <p:txBody>
-          <a:bodyPr/>
-          <a:lstStyle/>
-          <a:p>
-            <a:r>
-              <a:rPr lang="en-US" dirty="0"/>
-              <a:t>Why are they different? Why should we care?</a:t>
-            </a:r>
-          </a:p>
-        </p:txBody>
-      </p:sp>
-      <p:sp>
-        <p:nvSpPr>
-          <p:cNvPr id="4" name="Oval 3">
-            <a:extLst>
-              <a:ext uri="{FF2B5EF4-FFF2-40B4-BE49-F238E27FC236}">
-                <a16:creationId xmlns:a16="http://schemas.microsoft.com/office/drawing/2014/main" id="{4075A81A-7D11-9448-BF36-6D732E7F151C}"/>
-              </a:ext>
-            </a:extLst>
-          </p:cNvPr>
-          <p:cNvSpPr/>
-          <p:nvPr/>
-        </p:nvSpPr>
-        <p:spPr>
-          <a:xfrm>
-            <a:off x="2600326" y="3014662"/>
-            <a:ext cx="314325" cy="314325"/>
-          </a:xfrm>
-          <a:prstGeom prst="ellipse">
-            <a:avLst/>
-          </a:prstGeom>
-        </p:spPr>
-        <p:style>
-          <a:lnRef idx="2">
-            <a:schemeClr val="accent1">
-              <a:shade val="50000"/>
-            </a:schemeClr>
-          </a:lnRef>
-          <a:fillRef idx="1">
-            <a:schemeClr val="accent1"/>
-          </a:fillRef>
-          <a:effectRef idx="0">
-            <a:schemeClr val="accent1"/>
-          </a:effectRef>
-          <a:fontRef idx="minor">
-            <a:schemeClr val="lt1"/>
-          </a:fontRef>
-        </p:style>
-        <p:txBody>
-          <a:bodyPr rtlCol="0" anchor="ctr"/>
-          <a:lstStyle/>
-          <a:p>
-            <a:pPr algn="ctr"/>
-            <a:endParaRPr lang="en-US"/>
-          </a:p>
-        </p:txBody>
-      </p:sp>
-      <p:sp>
-        <p:nvSpPr>
-          <p:cNvPr id="5" name="Oval 4">
-            <a:extLst>
-              <a:ext uri="{FF2B5EF4-FFF2-40B4-BE49-F238E27FC236}">
-                <a16:creationId xmlns:a16="http://schemas.microsoft.com/office/drawing/2014/main" id="{E4516562-A1F7-4A44-B228-68531F4F81E8}"/>
-              </a:ext>
-            </a:extLst>
-          </p:cNvPr>
-          <p:cNvSpPr/>
-          <p:nvPr/>
-        </p:nvSpPr>
-        <p:spPr>
-          <a:xfrm>
-            <a:off x="3467101" y="3752849"/>
-            <a:ext cx="314325" cy="314325"/>
-          </a:xfrm>
-          <a:prstGeom prst="ellipse">
-            <a:avLst/>
-          </a:prstGeom>
-        </p:spPr>
-        <p:style>
-          <a:lnRef idx="2">
-            <a:schemeClr val="accent1">
-              <a:shade val="50000"/>
-            </a:schemeClr>
-          </a:lnRef>
-          <a:fillRef idx="1">
-            <a:schemeClr val="accent1"/>
-          </a:fillRef>
-          <a:effectRef idx="0">
-            <a:schemeClr val="accent1"/>
-          </a:effectRef>
-          <a:fontRef idx="minor">
-            <a:schemeClr val="lt1"/>
-          </a:fontRef>
-        </p:style>
-        <p:txBody>
-          <a:bodyPr rtlCol="0" anchor="ctr"/>
-          <a:lstStyle/>
-          <a:p>
-            <a:pPr algn="ctr"/>
-            <a:endParaRPr lang="en-US"/>
-          </a:p>
-        </p:txBody>
-      </p:sp>
-      <p:sp>
-        <p:nvSpPr>
-          <p:cNvPr id="6" name="Oval 5">
-            <a:extLst>
-              <a:ext uri="{FF2B5EF4-FFF2-40B4-BE49-F238E27FC236}">
-                <a16:creationId xmlns:a16="http://schemas.microsoft.com/office/drawing/2014/main" id="{1ABEA4FE-AD89-454B-989F-A777676B2DAB}"/>
-              </a:ext>
-            </a:extLst>
-          </p:cNvPr>
-          <p:cNvSpPr/>
-          <p:nvPr/>
-        </p:nvSpPr>
-        <p:spPr>
-          <a:xfrm>
-            <a:off x="2586038" y="4410075"/>
-            <a:ext cx="314325" cy="314325"/>
-          </a:xfrm>
-          <a:prstGeom prst="ellipse">
-            <a:avLst/>
-          </a:prstGeom>
-          <a:solidFill>
-            <a:srgbClr val="92D050"/>
-          </a:solidFill>
-        </p:spPr>
-        <p:style>
-          <a:lnRef idx="2">
-            <a:schemeClr val="accent1">
-              <a:shade val="50000"/>
-            </a:schemeClr>
-          </a:lnRef>
-          <a:fillRef idx="1">
-            <a:schemeClr val="accent1"/>
-          </a:fillRef>
-          <a:effectRef idx="0">
-            <a:schemeClr val="accent1"/>
-          </a:effectRef>
-          <a:fontRef idx="minor">
-            <a:schemeClr val="lt1"/>
-          </a:fontRef>
-        </p:style>
-        <p:txBody>
-          <a:bodyPr rtlCol="0" anchor="ctr"/>
-          <a:lstStyle/>
-          <a:p>
-            <a:pPr algn="ctr"/>
-            <a:endParaRPr lang="en-US"/>
-          </a:p>
-        </p:txBody>
-      </p:sp>
-      <p:sp>
-        <p:nvSpPr>
-          <p:cNvPr id="7" name="Oval 6">
-            <a:extLst>
-              <a:ext uri="{FF2B5EF4-FFF2-40B4-BE49-F238E27FC236}">
-                <a16:creationId xmlns:a16="http://schemas.microsoft.com/office/drawing/2014/main" id="{4E83A67A-C00A-B342-BE75-24729CD2D02F}"/>
-              </a:ext>
-            </a:extLst>
-          </p:cNvPr>
-          <p:cNvSpPr/>
-          <p:nvPr/>
-        </p:nvSpPr>
-        <p:spPr>
-          <a:xfrm>
-            <a:off x="4724401" y="4567237"/>
-            <a:ext cx="314325" cy="314325"/>
-          </a:xfrm>
-          <a:prstGeom prst="ellipse">
-            <a:avLst/>
-          </a:prstGeom>
-        </p:spPr>
-        <p:style>
-          <a:lnRef idx="2">
-            <a:schemeClr val="accent1">
-              <a:shade val="50000"/>
-            </a:schemeClr>
-          </a:lnRef>
-          <a:fillRef idx="1">
-            <a:schemeClr val="accent1"/>
-          </a:fillRef>
-          <a:effectRef idx="0">
-            <a:schemeClr val="accent1"/>
-          </a:effectRef>
-          <a:fontRef idx="minor">
-            <a:schemeClr val="lt1"/>
-          </a:fontRef>
-        </p:style>
-        <p:txBody>
-          <a:bodyPr rtlCol="0" anchor="ctr"/>
-          <a:lstStyle/>
-          <a:p>
-            <a:pPr algn="ctr"/>
-            <a:endParaRPr lang="en-US"/>
-          </a:p>
-        </p:txBody>
-      </p:sp>
-      <p:sp>
-        <p:nvSpPr>
-          <p:cNvPr id="8" name="Oval 7">
-            <a:extLst>
-              <a:ext uri="{FF2B5EF4-FFF2-40B4-BE49-F238E27FC236}">
-                <a16:creationId xmlns:a16="http://schemas.microsoft.com/office/drawing/2014/main" id="{6F55F405-3566-B348-BF65-58C69A1A867A}"/>
-              </a:ext>
-            </a:extLst>
-          </p:cNvPr>
-          <p:cNvSpPr/>
-          <p:nvPr/>
-        </p:nvSpPr>
-        <p:spPr>
-          <a:xfrm>
-            <a:off x="3467101" y="5186360"/>
-            <a:ext cx="314325" cy="314325"/>
-          </a:xfrm>
-          <a:prstGeom prst="ellipse">
-            <a:avLst/>
-          </a:prstGeom>
-          <a:solidFill>
-            <a:srgbClr val="FFC000"/>
-          </a:solidFill>
-        </p:spPr>
-        <p:style>
-          <a:lnRef idx="2">
-            <a:schemeClr val="accent1">
-              <a:shade val="50000"/>
-            </a:schemeClr>
-          </a:lnRef>
-          <a:fillRef idx="1">
-            <a:schemeClr val="accent1"/>
-          </a:fillRef>
-          <a:effectRef idx="0">
-            <a:schemeClr val="accent1"/>
-          </a:effectRef>
-          <a:fontRef idx="minor">
-            <a:schemeClr val="lt1"/>
-          </a:fontRef>
-        </p:style>
-        <p:txBody>
-          <a:bodyPr rtlCol="0" anchor="ctr"/>
-          <a:lstStyle/>
-          <a:p>
-            <a:pPr algn="ctr"/>
-            <a:endParaRPr lang="en-US"/>
-          </a:p>
-        </p:txBody>
-      </p:sp>
-      <p:sp>
-        <p:nvSpPr>
-          <p:cNvPr id="9" name="Oval 8">
-            <a:extLst>
-              <a:ext uri="{FF2B5EF4-FFF2-40B4-BE49-F238E27FC236}">
-                <a16:creationId xmlns:a16="http://schemas.microsoft.com/office/drawing/2014/main" id="{EDD5ABE0-00B9-DD40-8C3A-A0CB5719BCBA}"/>
-              </a:ext>
-            </a:extLst>
-          </p:cNvPr>
-          <p:cNvSpPr/>
-          <p:nvPr/>
-        </p:nvSpPr>
-        <p:spPr>
-          <a:xfrm>
-            <a:off x="4410075" y="2800349"/>
-            <a:ext cx="314325" cy="314325"/>
-          </a:xfrm>
-          <a:prstGeom prst="ellipse">
-            <a:avLst/>
-          </a:prstGeom>
-          <a:solidFill>
-            <a:srgbClr val="FF0000"/>
-          </a:solidFill>
-        </p:spPr>
-        <p:style>
-          <a:lnRef idx="2">
-            <a:schemeClr val="accent1">
-              <a:shade val="50000"/>
-            </a:schemeClr>
-          </a:lnRef>
-          <a:fillRef idx="1">
-            <a:schemeClr val="accent1"/>
-          </a:fillRef>
-          <a:effectRef idx="0">
-            <a:schemeClr val="accent1"/>
-          </a:effectRef>
-          <a:fontRef idx="minor">
-            <a:schemeClr val="lt1"/>
-          </a:fontRef>
-        </p:style>
-        <p:txBody>
-          <a:bodyPr rtlCol="0" anchor="ctr"/>
-          <a:lstStyle/>
-          <a:p>
-            <a:pPr algn="ctr"/>
-            <a:endParaRPr lang="en-US"/>
-          </a:p>
-        </p:txBody>
-      </p:sp>
-      <p:sp>
-        <p:nvSpPr>
-          <p:cNvPr id="10" name="Oval 9">
-            <a:extLst>
-              <a:ext uri="{FF2B5EF4-FFF2-40B4-BE49-F238E27FC236}">
-                <a16:creationId xmlns:a16="http://schemas.microsoft.com/office/drawing/2014/main" id="{B26DB84F-E78D-2A48-A3F2-63B628D47B3F}"/>
-              </a:ext>
-            </a:extLst>
-          </p:cNvPr>
-          <p:cNvSpPr/>
-          <p:nvPr/>
-        </p:nvSpPr>
-        <p:spPr>
-          <a:xfrm>
-            <a:off x="3467100" y="3050382"/>
-            <a:ext cx="314325" cy="314325"/>
-          </a:xfrm>
-          <a:prstGeom prst="ellipse">
-            <a:avLst/>
-          </a:prstGeom>
-          <a:solidFill>
-            <a:srgbClr val="92D050"/>
-          </a:solidFill>
-          <a:ln>
-            <a:solidFill>
-              <a:schemeClr val="accent1"/>
-            </a:solidFill>
-          </a:ln>
-        </p:spPr>
-        <p:style>
-          <a:lnRef idx="2">
-            <a:schemeClr val="accent1">
-              <a:shade val="50000"/>
-            </a:schemeClr>
-          </a:lnRef>
-          <a:fillRef idx="1">
-            <a:schemeClr val="accent1"/>
-          </a:fillRef>
-          <a:effectRef idx="0">
-            <a:schemeClr val="accent1"/>
-          </a:effectRef>
-          <a:fontRef idx="minor">
-            <a:schemeClr val="lt1"/>
-          </a:fontRef>
-        </p:style>
-        <p:txBody>
-          <a:bodyPr rtlCol="0" anchor="ctr"/>
-          <a:lstStyle/>
-          <a:p>
-            <a:pPr algn="ctr"/>
-            <a:endParaRPr lang="en-US"/>
-          </a:p>
-        </p:txBody>
-      </p:sp>
-      <p:sp>
-        <p:nvSpPr>
-          <p:cNvPr id="11" name="Oval 10">
-            <a:extLst>
-              <a:ext uri="{FF2B5EF4-FFF2-40B4-BE49-F238E27FC236}">
-                <a16:creationId xmlns:a16="http://schemas.microsoft.com/office/drawing/2014/main" id="{DC502950-677E-3049-990E-AEC7AF21DD01}"/>
-              </a:ext>
-            </a:extLst>
-          </p:cNvPr>
-          <p:cNvSpPr/>
-          <p:nvPr/>
-        </p:nvSpPr>
-        <p:spPr>
-          <a:xfrm>
-            <a:off x="3967164" y="4410074"/>
-            <a:ext cx="314325" cy="314325"/>
-          </a:xfrm>
-          <a:prstGeom prst="ellipse">
-            <a:avLst/>
-          </a:prstGeom>
-          <a:solidFill>
-            <a:srgbClr val="92D050"/>
-          </a:solidFill>
-        </p:spPr>
-        <p:style>
-          <a:lnRef idx="2">
-            <a:schemeClr val="accent1">
-              <a:shade val="50000"/>
-            </a:schemeClr>
-          </a:lnRef>
-          <a:fillRef idx="1">
-            <a:schemeClr val="accent1"/>
-          </a:fillRef>
-          <a:effectRef idx="0">
-            <a:schemeClr val="accent1"/>
-          </a:effectRef>
-          <a:fontRef idx="minor">
-            <a:schemeClr val="lt1"/>
-          </a:fontRef>
-        </p:style>
-        <p:txBody>
-          <a:bodyPr rtlCol="0" anchor="ctr"/>
-          <a:lstStyle/>
-          <a:p>
-            <a:pPr algn="ctr"/>
-            <a:endParaRPr lang="en-US"/>
-          </a:p>
-        </p:txBody>
-      </p:sp>
-      <p:sp>
-        <p:nvSpPr>
-          <p:cNvPr id="12" name="Oval 11">
-            <a:extLst>
-              <a:ext uri="{FF2B5EF4-FFF2-40B4-BE49-F238E27FC236}">
-                <a16:creationId xmlns:a16="http://schemas.microsoft.com/office/drawing/2014/main" id="{45A94771-F505-D14F-B441-07C73CD0D66B}"/>
-              </a:ext>
-            </a:extLst>
-          </p:cNvPr>
-          <p:cNvSpPr/>
-          <p:nvPr/>
-        </p:nvSpPr>
-        <p:spPr>
-          <a:xfrm>
-            <a:off x="4567238" y="3752848"/>
-            <a:ext cx="314325" cy="314325"/>
-          </a:xfrm>
-          <a:prstGeom prst="ellipse">
-            <a:avLst/>
-          </a:prstGeom>
-        </p:spPr>
-        <p:style>
-          <a:lnRef idx="2">
-            <a:schemeClr val="accent1">
-              <a:shade val="50000"/>
-            </a:schemeClr>
-          </a:lnRef>
-          <a:fillRef idx="1">
-            <a:schemeClr val="accent1"/>
-          </a:fillRef>
-          <a:effectRef idx="0">
-            <a:schemeClr val="accent1"/>
-          </a:effectRef>
-          <a:fontRef idx="minor">
-            <a:schemeClr val="lt1"/>
-          </a:fontRef>
-        </p:style>
-        <p:txBody>
-          <a:bodyPr rtlCol="0" anchor="ctr"/>
-          <a:lstStyle/>
-          <a:p>
-            <a:pPr algn="ctr"/>
-            <a:endParaRPr lang="en-US"/>
-          </a:p>
-        </p:txBody>
-      </p:sp>
-      <p:sp>
-        <p:nvSpPr>
-          <p:cNvPr id="13" name="Oval 12">
-            <a:extLst>
-              <a:ext uri="{FF2B5EF4-FFF2-40B4-BE49-F238E27FC236}">
-                <a16:creationId xmlns:a16="http://schemas.microsoft.com/office/drawing/2014/main" id="{A3A575E6-7D11-6844-B659-F1F931279368}"/>
-              </a:ext>
-            </a:extLst>
-          </p:cNvPr>
-          <p:cNvSpPr/>
-          <p:nvPr/>
-        </p:nvSpPr>
-        <p:spPr>
-          <a:xfrm>
-            <a:off x="3119438" y="4710111"/>
-            <a:ext cx="314325" cy="314325"/>
-          </a:xfrm>
-          <a:prstGeom prst="ellipse">
-            <a:avLst/>
-          </a:prstGeom>
-        </p:spPr>
-        <p:style>
-          <a:lnRef idx="2">
-            <a:schemeClr val="accent1">
-              <a:shade val="50000"/>
-            </a:schemeClr>
-          </a:lnRef>
-          <a:fillRef idx="1">
-            <a:schemeClr val="accent1"/>
-          </a:fillRef>
-          <a:effectRef idx="0">
-            <a:schemeClr val="accent1"/>
-          </a:effectRef>
-          <a:fontRef idx="minor">
-            <a:schemeClr val="lt1"/>
-          </a:fontRef>
-        </p:style>
-        <p:txBody>
-          <a:bodyPr rtlCol="0" anchor="ctr"/>
-          <a:lstStyle/>
-          <a:p>
-            <a:pPr algn="ctr"/>
-            <a:endParaRPr lang="en-US"/>
-          </a:p>
-        </p:txBody>
-      </p:sp>
-      <p:sp>
-        <p:nvSpPr>
-          <p:cNvPr id="14" name="Oval 13">
-            <a:extLst>
-              <a:ext uri="{FF2B5EF4-FFF2-40B4-BE49-F238E27FC236}">
-                <a16:creationId xmlns:a16="http://schemas.microsoft.com/office/drawing/2014/main" id="{1D5E120C-A984-764E-B4EF-AA70BC53CD10}"/>
-              </a:ext>
-            </a:extLst>
-          </p:cNvPr>
-          <p:cNvSpPr/>
-          <p:nvPr/>
-        </p:nvSpPr>
-        <p:spPr>
-          <a:xfrm>
-            <a:off x="2728912" y="3867149"/>
-            <a:ext cx="314325" cy="314325"/>
-          </a:xfrm>
-          <a:prstGeom prst="ellipse">
-            <a:avLst/>
-          </a:prstGeom>
-        </p:spPr>
-        <p:style>
-          <a:lnRef idx="2">
-            <a:schemeClr val="accent1">
-              <a:shade val="50000"/>
-            </a:schemeClr>
-          </a:lnRef>
-          <a:fillRef idx="1">
-            <a:schemeClr val="accent1"/>
-          </a:fillRef>
-          <a:effectRef idx="0">
-            <a:schemeClr val="accent1"/>
-          </a:effectRef>
-          <a:fontRef idx="minor">
-            <a:schemeClr val="lt1"/>
-          </a:fontRef>
-        </p:style>
-        <p:txBody>
-          <a:bodyPr rtlCol="0" anchor="ctr"/>
-          <a:lstStyle/>
-          <a:p>
-            <a:pPr algn="ctr"/>
-            <a:endParaRPr lang="en-US"/>
-          </a:p>
-        </p:txBody>
-      </p:sp>
-      <p:sp>
-        <p:nvSpPr>
-          <p:cNvPr id="15" name="Oval 14">
-            <a:extLst>
-              <a:ext uri="{FF2B5EF4-FFF2-40B4-BE49-F238E27FC236}">
-                <a16:creationId xmlns:a16="http://schemas.microsoft.com/office/drawing/2014/main" id="{F4679495-EAA4-F64B-8588-1E9DEA49D4C8}"/>
-              </a:ext>
-            </a:extLst>
-          </p:cNvPr>
-          <p:cNvSpPr/>
-          <p:nvPr/>
-        </p:nvSpPr>
-        <p:spPr>
-          <a:xfrm>
-            <a:off x="3967163" y="3378993"/>
-            <a:ext cx="314325" cy="314325"/>
-          </a:xfrm>
-          <a:prstGeom prst="ellipse">
-            <a:avLst/>
-          </a:prstGeom>
-        </p:spPr>
-        <p:style>
-          <a:lnRef idx="2">
-            <a:schemeClr val="accent1">
-              <a:shade val="50000"/>
-            </a:schemeClr>
-          </a:lnRef>
-          <a:fillRef idx="1">
-            <a:schemeClr val="accent1"/>
-          </a:fillRef>
-          <a:effectRef idx="0">
-            <a:schemeClr val="accent1"/>
-          </a:effectRef>
-          <a:fontRef idx="minor">
-            <a:schemeClr val="lt1"/>
-          </a:fontRef>
-        </p:style>
-        <p:txBody>
-          <a:bodyPr rtlCol="0" anchor="ctr"/>
-          <a:lstStyle/>
-          <a:p>
-            <a:pPr algn="ctr"/>
-            <a:endParaRPr lang="en-US"/>
-          </a:p>
-        </p:txBody>
-      </p:sp>
-      <p:sp>
-        <p:nvSpPr>
-          <p:cNvPr id="16" name="Oval 15">
-            <a:extLst>
-              <a:ext uri="{FF2B5EF4-FFF2-40B4-BE49-F238E27FC236}">
-                <a16:creationId xmlns:a16="http://schemas.microsoft.com/office/drawing/2014/main" id="{BF75227F-3BDA-534D-AC82-AA532C3B808A}"/>
-              </a:ext>
-            </a:extLst>
-          </p:cNvPr>
-          <p:cNvSpPr/>
-          <p:nvPr/>
-        </p:nvSpPr>
-        <p:spPr>
-          <a:xfrm>
-            <a:off x="6524626" y="3014662"/>
-            <a:ext cx="314325" cy="314325"/>
-          </a:xfrm>
-          <a:prstGeom prst="ellipse">
-            <a:avLst/>
-          </a:prstGeom>
-          <a:solidFill>
-            <a:srgbClr val="FF00E5"/>
-          </a:solidFill>
-        </p:spPr>
-        <p:style>
-          <a:lnRef idx="2">
-            <a:schemeClr val="accent1">
-              <a:shade val="50000"/>
-            </a:schemeClr>
-          </a:lnRef>
-          <a:fillRef idx="1">
-            <a:schemeClr val="accent1"/>
-          </a:fillRef>
-          <a:effectRef idx="0">
-            <a:schemeClr val="accent1"/>
-          </a:effectRef>
-          <a:fontRef idx="minor">
-            <a:schemeClr val="lt1"/>
-          </a:fontRef>
-        </p:style>
-        <p:txBody>
-          <a:bodyPr rtlCol="0" anchor="ctr"/>
-          <a:lstStyle/>
-          <a:p>
-            <a:pPr algn="ctr"/>
-            <a:endParaRPr lang="en-US"/>
-          </a:p>
-        </p:txBody>
-      </p:sp>
-      <p:sp>
-        <p:nvSpPr>
-          <p:cNvPr id="17" name="Oval 16">
-            <a:extLst>
-              <a:ext uri="{FF2B5EF4-FFF2-40B4-BE49-F238E27FC236}">
-                <a16:creationId xmlns:a16="http://schemas.microsoft.com/office/drawing/2014/main" id="{AC9855B0-6DB2-1749-A1D4-4B1B81587D5F}"/>
-              </a:ext>
-            </a:extLst>
-          </p:cNvPr>
-          <p:cNvSpPr/>
-          <p:nvPr/>
-        </p:nvSpPr>
-        <p:spPr>
-          <a:xfrm>
-            <a:off x="7391401" y="3752849"/>
-            <a:ext cx="314325" cy="314325"/>
-          </a:xfrm>
-          <a:prstGeom prst="ellipse">
-            <a:avLst/>
-          </a:prstGeom>
-          <a:solidFill>
-            <a:srgbClr val="7030A0"/>
-          </a:solidFill>
-        </p:spPr>
-        <p:style>
-          <a:lnRef idx="2">
-            <a:schemeClr val="accent1">
-              <a:shade val="50000"/>
-            </a:schemeClr>
-          </a:lnRef>
-          <a:fillRef idx="1">
-            <a:schemeClr val="accent1"/>
-          </a:fillRef>
-          <a:effectRef idx="0">
-            <a:schemeClr val="accent1"/>
-          </a:effectRef>
-          <a:fontRef idx="minor">
-            <a:schemeClr val="lt1"/>
-          </a:fontRef>
-        </p:style>
-        <p:txBody>
-          <a:bodyPr rtlCol="0" anchor="ctr"/>
-          <a:lstStyle/>
-          <a:p>
-            <a:pPr algn="ctr"/>
-            <a:endParaRPr lang="en-US"/>
-          </a:p>
-        </p:txBody>
-      </p:sp>
-      <p:sp>
-        <p:nvSpPr>
-          <p:cNvPr id="18" name="Oval 17">
-            <a:extLst>
-              <a:ext uri="{FF2B5EF4-FFF2-40B4-BE49-F238E27FC236}">
-                <a16:creationId xmlns:a16="http://schemas.microsoft.com/office/drawing/2014/main" id="{19F5CB4E-153D-EF40-9DD1-4986310BA056}"/>
-              </a:ext>
-            </a:extLst>
-          </p:cNvPr>
-          <p:cNvSpPr/>
-          <p:nvPr/>
-        </p:nvSpPr>
-        <p:spPr>
-          <a:xfrm>
-            <a:off x="6510338" y="4410075"/>
-            <a:ext cx="314325" cy="314325"/>
-          </a:xfrm>
-          <a:prstGeom prst="ellipse">
-            <a:avLst/>
-          </a:prstGeom>
-          <a:solidFill>
-            <a:srgbClr val="FF0000"/>
-          </a:solidFill>
-        </p:spPr>
-        <p:style>
-          <a:lnRef idx="2">
-            <a:schemeClr val="accent1">
-              <a:shade val="50000"/>
-            </a:schemeClr>
-          </a:lnRef>
-          <a:fillRef idx="1">
-            <a:schemeClr val="accent1"/>
-          </a:fillRef>
-          <a:effectRef idx="0">
-            <a:schemeClr val="accent1"/>
-          </a:effectRef>
-          <a:fontRef idx="minor">
-            <a:schemeClr val="lt1"/>
-          </a:fontRef>
-        </p:style>
-        <p:txBody>
-          <a:bodyPr rtlCol="0" anchor="ctr"/>
-          <a:lstStyle/>
-          <a:p>
-            <a:pPr algn="ctr"/>
-            <a:endParaRPr lang="en-US"/>
-          </a:p>
-        </p:txBody>
-      </p:sp>
-      <p:sp>
-        <p:nvSpPr>
-          <p:cNvPr id="19" name="Oval 18">
-            <a:extLst>
-              <a:ext uri="{FF2B5EF4-FFF2-40B4-BE49-F238E27FC236}">
-                <a16:creationId xmlns:a16="http://schemas.microsoft.com/office/drawing/2014/main" id="{304877B3-DB5A-2E40-9762-5B3784FF014E}"/>
-              </a:ext>
-            </a:extLst>
-          </p:cNvPr>
-          <p:cNvSpPr/>
-          <p:nvPr/>
-        </p:nvSpPr>
-        <p:spPr>
-          <a:xfrm>
-            <a:off x="8648701" y="4567237"/>
-            <a:ext cx="314325" cy="314325"/>
-          </a:xfrm>
-          <a:prstGeom prst="ellipse">
-            <a:avLst/>
-          </a:prstGeom>
-          <a:solidFill>
-            <a:srgbClr val="FFFF00"/>
-          </a:solidFill>
-        </p:spPr>
-        <p:style>
-          <a:lnRef idx="2">
-            <a:schemeClr val="accent1">
-              <a:shade val="50000"/>
-            </a:schemeClr>
-          </a:lnRef>
-          <a:fillRef idx="1">
-            <a:schemeClr val="accent1"/>
-          </a:fillRef>
-          <a:effectRef idx="0">
-            <a:schemeClr val="accent1"/>
-          </a:effectRef>
-          <a:fontRef idx="minor">
-            <a:schemeClr val="lt1"/>
-          </a:fontRef>
-        </p:style>
-        <p:txBody>
-          <a:bodyPr rtlCol="0" anchor="ctr"/>
-          <a:lstStyle/>
-          <a:p>
-            <a:pPr algn="ctr"/>
-            <a:endParaRPr lang="en-US"/>
-          </a:p>
-        </p:txBody>
-      </p:sp>
-      <p:sp>
-        <p:nvSpPr>
-          <p:cNvPr id="20" name="Oval 19">
-            <a:extLst>
-              <a:ext uri="{FF2B5EF4-FFF2-40B4-BE49-F238E27FC236}">
-                <a16:creationId xmlns:a16="http://schemas.microsoft.com/office/drawing/2014/main" id="{E53C1F00-2970-264E-8F3C-13F5A89C374D}"/>
-              </a:ext>
-            </a:extLst>
-          </p:cNvPr>
-          <p:cNvSpPr/>
-          <p:nvPr/>
-        </p:nvSpPr>
-        <p:spPr>
-          <a:xfrm>
-            <a:off x="7391401" y="5186360"/>
-            <a:ext cx="314325" cy="314325"/>
-          </a:xfrm>
-          <a:prstGeom prst="ellipse">
-            <a:avLst/>
-          </a:prstGeom>
-          <a:solidFill>
-            <a:srgbClr val="FF00E5"/>
-          </a:solidFill>
-        </p:spPr>
-        <p:style>
-          <a:lnRef idx="2">
-            <a:schemeClr val="accent1">
-              <a:shade val="50000"/>
-            </a:schemeClr>
-          </a:lnRef>
-          <a:fillRef idx="1">
-            <a:schemeClr val="accent1"/>
-          </a:fillRef>
-          <a:effectRef idx="0">
-            <a:schemeClr val="accent1"/>
-          </a:effectRef>
-          <a:fontRef idx="minor">
-            <a:schemeClr val="lt1"/>
-          </a:fontRef>
-        </p:style>
-        <p:txBody>
-          <a:bodyPr rtlCol="0" anchor="ctr"/>
-          <a:lstStyle/>
-          <a:p>
-            <a:pPr algn="ctr"/>
-            <a:endParaRPr lang="en-US"/>
-          </a:p>
-        </p:txBody>
-      </p:sp>
-      <p:sp>
-        <p:nvSpPr>
-          <p:cNvPr id="21" name="Oval 20">
-            <a:extLst>
-              <a:ext uri="{FF2B5EF4-FFF2-40B4-BE49-F238E27FC236}">
-                <a16:creationId xmlns:a16="http://schemas.microsoft.com/office/drawing/2014/main" id="{CBE665D8-BD16-C443-A7DB-33C745F5F4C3}"/>
-              </a:ext>
-            </a:extLst>
-          </p:cNvPr>
-          <p:cNvSpPr/>
-          <p:nvPr/>
-        </p:nvSpPr>
-        <p:spPr>
-          <a:xfrm>
-            <a:off x="8334375" y="2800349"/>
-            <a:ext cx="314325" cy="314325"/>
-          </a:xfrm>
-          <a:prstGeom prst="ellipse">
-            <a:avLst/>
-          </a:prstGeom>
-          <a:solidFill>
-            <a:srgbClr val="00B0F0"/>
-          </a:solidFill>
-        </p:spPr>
-        <p:style>
-          <a:lnRef idx="2">
-            <a:schemeClr val="accent1">
-              <a:shade val="50000"/>
-            </a:schemeClr>
-          </a:lnRef>
-          <a:fillRef idx="1">
-            <a:schemeClr val="accent1"/>
-          </a:fillRef>
-          <a:effectRef idx="0">
-            <a:schemeClr val="accent1"/>
-          </a:effectRef>
-          <a:fontRef idx="minor">
-            <a:schemeClr val="lt1"/>
-          </a:fontRef>
-        </p:style>
-        <p:txBody>
-          <a:bodyPr rtlCol="0" anchor="ctr"/>
-          <a:lstStyle/>
-          <a:p>
-            <a:pPr algn="ctr"/>
-            <a:endParaRPr lang="en-US"/>
-          </a:p>
-        </p:txBody>
-      </p:sp>
-      <p:sp>
-        <p:nvSpPr>
-          <p:cNvPr id="22" name="Oval 21">
-            <a:extLst>
-              <a:ext uri="{FF2B5EF4-FFF2-40B4-BE49-F238E27FC236}">
-                <a16:creationId xmlns:a16="http://schemas.microsoft.com/office/drawing/2014/main" id="{8716A6E8-5194-1843-8740-7CFE1E71AC8C}"/>
-              </a:ext>
-            </a:extLst>
-          </p:cNvPr>
-          <p:cNvSpPr/>
-          <p:nvPr/>
-        </p:nvSpPr>
-        <p:spPr>
-          <a:xfrm>
-            <a:off x="7391400" y="3050382"/>
-            <a:ext cx="314325" cy="314325"/>
-          </a:xfrm>
-          <a:prstGeom prst="ellipse">
-            <a:avLst/>
-          </a:prstGeom>
-          <a:solidFill>
-            <a:srgbClr val="FFFF00"/>
-          </a:solidFill>
-        </p:spPr>
-        <p:style>
-          <a:lnRef idx="2">
-            <a:schemeClr val="accent1">
-              <a:shade val="50000"/>
-            </a:schemeClr>
-          </a:lnRef>
-          <a:fillRef idx="1">
-            <a:schemeClr val="accent1"/>
-          </a:fillRef>
-          <a:effectRef idx="0">
-            <a:schemeClr val="accent1"/>
-          </a:effectRef>
-          <a:fontRef idx="minor">
-            <a:schemeClr val="lt1"/>
-          </a:fontRef>
-        </p:style>
-        <p:txBody>
-          <a:bodyPr rtlCol="0" anchor="ctr"/>
-          <a:lstStyle/>
-          <a:p>
-            <a:pPr algn="ctr"/>
-            <a:endParaRPr lang="en-US"/>
-          </a:p>
-        </p:txBody>
-      </p:sp>
-      <p:sp>
-        <p:nvSpPr>
-          <p:cNvPr id="23" name="Oval 22">
-            <a:extLst>
-              <a:ext uri="{FF2B5EF4-FFF2-40B4-BE49-F238E27FC236}">
-                <a16:creationId xmlns:a16="http://schemas.microsoft.com/office/drawing/2014/main" id="{AC7232C0-D3C4-874D-B786-BB148BFF7049}"/>
-              </a:ext>
-            </a:extLst>
-          </p:cNvPr>
-          <p:cNvSpPr/>
-          <p:nvPr/>
-        </p:nvSpPr>
-        <p:spPr>
-          <a:xfrm>
-            <a:off x="7891464" y="4410074"/>
-            <a:ext cx="314325" cy="314325"/>
-          </a:xfrm>
-          <a:prstGeom prst="ellipse">
-            <a:avLst/>
-          </a:prstGeom>
-          <a:solidFill>
-            <a:srgbClr val="00B0F0"/>
-          </a:solidFill>
-        </p:spPr>
-        <p:style>
-          <a:lnRef idx="2">
-            <a:schemeClr val="accent1">
-              <a:shade val="50000"/>
-            </a:schemeClr>
-          </a:lnRef>
-          <a:fillRef idx="1">
-            <a:schemeClr val="accent1"/>
-          </a:fillRef>
-          <a:effectRef idx="0">
-            <a:schemeClr val="accent1"/>
-          </a:effectRef>
-          <a:fontRef idx="minor">
-            <a:schemeClr val="lt1"/>
-          </a:fontRef>
-        </p:style>
-        <p:txBody>
-          <a:bodyPr rtlCol="0" anchor="ctr"/>
-          <a:lstStyle/>
-          <a:p>
-            <a:pPr algn="ctr"/>
-            <a:endParaRPr lang="en-US"/>
-          </a:p>
-        </p:txBody>
-      </p:sp>
-      <p:sp>
-        <p:nvSpPr>
-          <p:cNvPr id="24" name="Oval 23">
-            <a:extLst>
-              <a:ext uri="{FF2B5EF4-FFF2-40B4-BE49-F238E27FC236}">
-                <a16:creationId xmlns:a16="http://schemas.microsoft.com/office/drawing/2014/main" id="{CFB75B72-7751-E244-927A-357FEE2AD292}"/>
-              </a:ext>
-            </a:extLst>
-          </p:cNvPr>
-          <p:cNvSpPr/>
-          <p:nvPr/>
-        </p:nvSpPr>
-        <p:spPr>
-          <a:xfrm>
-            <a:off x="8491538" y="3752848"/>
-            <a:ext cx="314325" cy="314325"/>
-          </a:xfrm>
-          <a:prstGeom prst="ellipse">
-            <a:avLst/>
-          </a:prstGeom>
-          <a:solidFill>
-            <a:srgbClr val="002060"/>
-          </a:solidFill>
-        </p:spPr>
-        <p:style>
-          <a:lnRef idx="2">
-            <a:schemeClr val="accent1">
-              <a:shade val="50000"/>
-            </a:schemeClr>
-          </a:lnRef>
-          <a:fillRef idx="1">
-            <a:schemeClr val="accent1"/>
-          </a:fillRef>
-          <a:effectRef idx="0">
-            <a:schemeClr val="accent1"/>
-          </a:effectRef>
-          <a:fontRef idx="minor">
-            <a:schemeClr val="lt1"/>
-          </a:fontRef>
-        </p:style>
-        <p:txBody>
-          <a:bodyPr rtlCol="0" anchor="ctr"/>
-          <a:lstStyle/>
-          <a:p>
-            <a:pPr algn="ctr"/>
-            <a:endParaRPr lang="en-US"/>
-          </a:p>
-        </p:txBody>
-      </p:sp>
-      <p:sp>
-        <p:nvSpPr>
-          <p:cNvPr id="25" name="Oval 24">
-            <a:extLst>
-              <a:ext uri="{FF2B5EF4-FFF2-40B4-BE49-F238E27FC236}">
-                <a16:creationId xmlns:a16="http://schemas.microsoft.com/office/drawing/2014/main" id="{5A90B763-4A6C-AE44-B10A-CAC54BEA55F6}"/>
-              </a:ext>
-            </a:extLst>
-          </p:cNvPr>
-          <p:cNvSpPr/>
-          <p:nvPr/>
-        </p:nvSpPr>
-        <p:spPr>
-          <a:xfrm>
-            <a:off x="7043738" y="4710111"/>
-            <a:ext cx="314325" cy="314325"/>
-          </a:xfrm>
-          <a:prstGeom prst="ellipse">
-            <a:avLst/>
-          </a:prstGeom>
-          <a:solidFill>
-            <a:srgbClr val="FFFF00"/>
-          </a:solidFill>
-        </p:spPr>
-        <p:style>
-          <a:lnRef idx="2">
-            <a:schemeClr val="accent1">
-              <a:shade val="50000"/>
-            </a:schemeClr>
-          </a:lnRef>
-          <a:fillRef idx="1">
-            <a:schemeClr val="accent1"/>
-          </a:fillRef>
-          <a:effectRef idx="0">
-            <a:schemeClr val="accent1"/>
-          </a:effectRef>
-          <a:fontRef idx="minor">
-            <a:schemeClr val="lt1"/>
-          </a:fontRef>
-        </p:style>
-        <p:txBody>
-          <a:bodyPr rtlCol="0" anchor="ctr"/>
-          <a:lstStyle/>
-          <a:p>
-            <a:pPr algn="ctr"/>
-            <a:endParaRPr lang="en-US"/>
-          </a:p>
-        </p:txBody>
-      </p:sp>
-      <p:sp>
-        <p:nvSpPr>
-          <p:cNvPr id="26" name="Oval 25">
-            <a:extLst>
-              <a:ext uri="{FF2B5EF4-FFF2-40B4-BE49-F238E27FC236}">
-                <a16:creationId xmlns:a16="http://schemas.microsoft.com/office/drawing/2014/main" id="{E608D13B-D12C-924F-8139-3E7E8F9E180F}"/>
-              </a:ext>
-            </a:extLst>
-          </p:cNvPr>
-          <p:cNvSpPr/>
-          <p:nvPr/>
-        </p:nvSpPr>
-        <p:spPr>
-          <a:xfrm>
-            <a:off x="6653212" y="3867149"/>
-            <a:ext cx="314325" cy="314325"/>
-          </a:xfrm>
-          <a:prstGeom prst="ellipse">
-            <a:avLst/>
-          </a:prstGeom>
-          <a:solidFill>
-            <a:srgbClr val="92D050"/>
-          </a:solidFill>
-        </p:spPr>
-        <p:style>
-          <a:lnRef idx="2">
-            <a:schemeClr val="accent1">
-              <a:shade val="50000"/>
-            </a:schemeClr>
-          </a:lnRef>
-          <a:fillRef idx="1">
-            <a:schemeClr val="accent1"/>
-          </a:fillRef>
-          <a:effectRef idx="0">
-            <a:schemeClr val="accent1"/>
-          </a:effectRef>
-          <a:fontRef idx="minor">
-            <a:schemeClr val="lt1"/>
-          </a:fontRef>
-        </p:style>
-        <p:txBody>
-          <a:bodyPr rtlCol="0" anchor="ctr"/>
-          <a:lstStyle/>
-          <a:p>
-            <a:pPr algn="ctr"/>
-            <a:endParaRPr lang="en-US"/>
-          </a:p>
-        </p:txBody>
-      </p:sp>
-      <p:sp>
-        <p:nvSpPr>
-          <p:cNvPr id="27" name="Oval 26">
-            <a:extLst>
-              <a:ext uri="{FF2B5EF4-FFF2-40B4-BE49-F238E27FC236}">
-                <a16:creationId xmlns:a16="http://schemas.microsoft.com/office/drawing/2014/main" id="{6549C0F0-8986-694D-A0BD-8647118E99FE}"/>
-              </a:ext>
-            </a:extLst>
-          </p:cNvPr>
-          <p:cNvSpPr/>
-          <p:nvPr/>
-        </p:nvSpPr>
-        <p:spPr>
-          <a:xfrm>
-            <a:off x="7891463" y="3378993"/>
-            <a:ext cx="314325" cy="314325"/>
-          </a:xfrm>
-          <a:prstGeom prst="ellipse">
-            <a:avLst/>
-          </a:prstGeom>
-          <a:solidFill>
-            <a:srgbClr val="FFC000"/>
-          </a:solidFill>
-        </p:spPr>
-        <p:style>
-          <a:lnRef idx="2">
-            <a:schemeClr val="accent1">
-              <a:shade val="50000"/>
-            </a:schemeClr>
-          </a:lnRef>
-          <a:fillRef idx="1">
-            <a:schemeClr val="accent1"/>
-          </a:fillRef>
-          <a:effectRef idx="0">
-            <a:schemeClr val="accent1"/>
-          </a:effectRef>
-          <a:fontRef idx="minor">
-            <a:schemeClr val="lt1"/>
-          </a:fontRef>
-        </p:style>
-        <p:txBody>
-          <a:bodyPr rtlCol="0" anchor="ctr"/>
-          <a:lstStyle/>
-          <a:p>
-            <a:pPr algn="ctr"/>
-            <a:endParaRPr lang="en-US"/>
-          </a:p>
-        </p:txBody>
-      </p:sp>
-      <p:sp>
-        <p:nvSpPr>
-          <p:cNvPr id="28" name="TextBox 27">
-            <a:extLst>
-              <a:ext uri="{FF2B5EF4-FFF2-40B4-BE49-F238E27FC236}">
-                <a16:creationId xmlns:a16="http://schemas.microsoft.com/office/drawing/2014/main" id="{EA335B55-8B52-5644-A550-2710A16DB226}"/>
-              </a:ext>
-            </a:extLst>
-          </p:cNvPr>
-          <p:cNvSpPr txBox="1"/>
-          <p:nvPr/>
-        </p:nvSpPr>
-        <p:spPr>
-          <a:xfrm>
-            <a:off x="2717006" y="1991378"/>
-            <a:ext cx="2164558" cy="523220"/>
-          </a:xfrm>
-          <a:prstGeom prst="rect">
-            <a:avLst/>
-          </a:prstGeom>
-          <a:noFill/>
-        </p:spPr>
-        <p:txBody>
-          <a:bodyPr wrap="square" rtlCol="0">
-            <a:spAutoFit/>
-          </a:bodyPr>
-          <a:lstStyle/>
-          <a:p>
-            <a:r>
-              <a:rPr lang="en-US" sz="2800" dirty="0"/>
-              <a:t>Community 1</a:t>
-            </a:r>
-          </a:p>
-        </p:txBody>
-      </p:sp>
-      <p:sp>
-        <p:nvSpPr>
-          <p:cNvPr id="29" name="TextBox 28">
-            <a:extLst>
-              <a:ext uri="{FF2B5EF4-FFF2-40B4-BE49-F238E27FC236}">
-                <a16:creationId xmlns:a16="http://schemas.microsoft.com/office/drawing/2014/main" id="{BC52BB93-C1D8-A04D-98AA-48CAD4AC9990}"/>
-              </a:ext>
-            </a:extLst>
-          </p:cNvPr>
-          <p:cNvSpPr txBox="1"/>
-          <p:nvPr/>
-        </p:nvSpPr>
-        <p:spPr>
-          <a:xfrm>
-            <a:off x="6667500" y="2015520"/>
-            <a:ext cx="2164558" cy="523220"/>
-          </a:xfrm>
-          <a:prstGeom prst="rect">
-            <a:avLst/>
-          </a:prstGeom>
-          <a:noFill/>
-        </p:spPr>
-        <p:txBody>
-          <a:bodyPr wrap="square" rtlCol="0">
-            <a:spAutoFit/>
-          </a:bodyPr>
-          <a:lstStyle/>
-          <a:p>
-            <a:r>
-              <a:rPr lang="en-US" sz="2800" dirty="0"/>
-              <a:t>Community 2</a:t>
-            </a:r>
-          </a:p>
-        </p:txBody>
-      </p:sp>
-    </p:spTree>
-    <p:extLst>
-      <p:ext uri="{BB962C8B-B14F-4D97-AF65-F5344CB8AC3E}">
-        <p14:creationId xmlns:p14="http://schemas.microsoft.com/office/powerpoint/2010/main" val="3055002149"/>
-      </p:ext>
-    </p:extLst>
-  </p:cSld>
-  <p:clrMapOvr>
-    <a:masterClrMapping/>
-  </p:clrMapOvr>
-</p:sld>
-</file>
-
-<file path=ppt/slides/slide20.xml><?xml version="1.0" encoding="utf-8"?>
+<file path=ppt/slides/slide22.xml><?xml version="1.0" encoding="utf-8"?>
 <p:sld xmlns:a="http://schemas.openxmlformats.org/drawingml/2006/main" xmlns:r="http://schemas.openxmlformats.org/officeDocument/2006/relationships" xmlns:p="http://schemas.openxmlformats.org/presentationml/2006/main">
   <p:cSld>
     <p:spTree>
@@ -36134,7 +36629,7 @@
 </p:sld>
 </file>
 
-<file path=ppt/slides/slide21.xml><?xml version="1.0" encoding="utf-8"?>
+<file path=ppt/slides/slide23.xml><?xml version="1.0" encoding="utf-8"?>
 <p:sld xmlns:a="http://schemas.openxmlformats.org/drawingml/2006/main" xmlns:r="http://schemas.openxmlformats.org/officeDocument/2006/relationships" xmlns:p="http://schemas.openxmlformats.org/presentationml/2006/main">
   <p:cSld>
     <p:spTree>
@@ -36402,7 +36897,7 @@
 </p:sld>
 </file>
 
-<file path=ppt/slides/slide22.xml><?xml version="1.0" encoding="utf-8"?>
+<file path=ppt/slides/slide24.xml><?xml version="1.0" encoding="utf-8"?>
 <p:sld xmlns:a="http://schemas.openxmlformats.org/drawingml/2006/main" xmlns:r="http://schemas.openxmlformats.org/officeDocument/2006/relationships" xmlns:p="http://schemas.openxmlformats.org/presentationml/2006/main">
   <p:cSld>
     <p:spTree>
@@ -36890,7 +37385,7 @@
 </p:sld>
 </file>
 
-<file path=ppt/slides/slide23.xml><?xml version="1.0" encoding="utf-8"?>
+<file path=ppt/slides/slide25.xml><?xml version="1.0" encoding="utf-8"?>
 <p:sld xmlns:a="http://schemas.openxmlformats.org/drawingml/2006/main" xmlns:r="http://schemas.openxmlformats.org/officeDocument/2006/relationships" xmlns:p="http://schemas.openxmlformats.org/presentationml/2006/main">
   <p:cSld>
     <p:spTree>
@@ -37350,7 +37845,7 @@
 </p:sld>
 </file>
 
-<file path=ppt/slides/slide24.xml><?xml version="1.0" encoding="utf-8"?>
+<file path=ppt/slides/slide26.xml><?xml version="1.0" encoding="utf-8"?>
 <p:sld xmlns:a="http://schemas.openxmlformats.org/drawingml/2006/main" xmlns:r="http://schemas.openxmlformats.org/officeDocument/2006/relationships" xmlns:p="http://schemas.openxmlformats.org/presentationml/2006/main">
   <p:cSld>
     <p:spTree>
@@ -37481,7 +37976,7 @@
 </p:sld>
 </file>
 
-<file path=ppt/slides/slide25.xml><?xml version="1.0" encoding="utf-8"?>
+<file path=ppt/slides/slide27.xml><?xml version="1.0" encoding="utf-8"?>
 <p:sld xmlns:a="http://schemas.openxmlformats.org/drawingml/2006/main" xmlns:r="http://schemas.openxmlformats.org/officeDocument/2006/relationships" xmlns:p="http://schemas.openxmlformats.org/presentationml/2006/main">
   <p:cSld>
     <p:spTree>
@@ -37578,7 +38073,7 @@
 </p:sld>
 </file>
 
-<file path=ppt/slides/slide26.xml><?xml version="1.0" encoding="utf-8"?>
+<file path=ppt/slides/slide28.xml><?xml version="1.0" encoding="utf-8"?>
 <p:sld xmlns:a="http://schemas.openxmlformats.org/drawingml/2006/main" xmlns:r="http://schemas.openxmlformats.org/officeDocument/2006/relationships" xmlns:p="http://schemas.openxmlformats.org/presentationml/2006/main">
   <p:cSld>
     <p:spTree>
@@ -37804,7 +38299,7 @@
 </p:sld>
 </file>
 
-<file path=ppt/slides/slide27.xml><?xml version="1.0" encoding="utf-8"?>
+<file path=ppt/slides/slide29.xml><?xml version="1.0" encoding="utf-8"?>
 <p:sld xmlns:a="http://schemas.openxmlformats.org/drawingml/2006/main" xmlns:r="http://schemas.openxmlformats.org/officeDocument/2006/relationships" xmlns:p="http://schemas.openxmlformats.org/presentationml/2006/main">
   <p:cSld>
     <p:spTree>
@@ -37870,7 +38365,93 @@
 </p:sld>
 </file>
 
-<file path=ppt/slides/slide28.xml><?xml version="1.0" encoding="utf-8"?>
+<file path=ppt/slides/slide3.xml><?xml version="1.0" encoding="utf-8"?>
+<p:sld xmlns:a="http://schemas.openxmlformats.org/drawingml/2006/main" xmlns:r="http://schemas.openxmlformats.org/officeDocument/2006/relationships" xmlns:p="http://schemas.openxmlformats.org/presentationml/2006/main">
+  <p:cSld>
+    <p:spTree>
+      <p:nvGrpSpPr>
+        <p:cNvPr id="1" name=""/>
+        <p:cNvGrpSpPr/>
+        <p:nvPr/>
+      </p:nvGrpSpPr>
+      <p:grpSpPr>
+        <a:xfrm>
+          <a:off x="0" y="0"/>
+          <a:ext cx="0" cy="0"/>
+          <a:chOff x="0" y="0"/>
+          <a:chExt cx="0" cy="0"/>
+        </a:xfrm>
+      </p:grpSpPr>
+      <p:sp>
+        <p:nvSpPr>
+          <p:cNvPr id="2" name="Title 1">
+            <a:extLst>
+              <a:ext uri="{FF2B5EF4-FFF2-40B4-BE49-F238E27FC236}">
+                <a16:creationId xmlns:a16="http://schemas.microsoft.com/office/drawing/2014/main" id="{0FFB9FC6-0620-0A48-9F8C-295D1BC9A634}"/>
+              </a:ext>
+            </a:extLst>
+          </p:cNvPr>
+          <p:cNvSpPr>
+            <a:spLocks noGrp="1"/>
+          </p:cNvSpPr>
+          <p:nvPr>
+            <p:ph type="title"/>
+          </p:nvPr>
+        </p:nvSpPr>
+        <p:spPr/>
+        <p:txBody>
+          <a:bodyPr/>
+          <a:lstStyle/>
+          <a:p>
+            <a:r>
+              <a:rPr lang="en-US" dirty="0"/>
+              <a:t>Community Assembly Processes</a:t>
+            </a:r>
+          </a:p>
+        </p:txBody>
+      </p:sp>
+      <p:graphicFrame>
+        <p:nvGraphicFramePr>
+          <p:cNvPr id="12" name="Diagram 11">
+            <a:extLst>
+              <a:ext uri="{FF2B5EF4-FFF2-40B4-BE49-F238E27FC236}">
+                <a16:creationId xmlns:a16="http://schemas.microsoft.com/office/drawing/2014/main" id="{8B3002D7-459F-0B49-B4AD-4140562B12BC}"/>
+              </a:ext>
+            </a:extLst>
+          </p:cNvPr>
+          <p:cNvGraphicFramePr/>
+          <p:nvPr>
+            <p:extLst>
+              <p:ext uri="{D42A27DB-BD31-4B8C-83A1-F6EECF244321}">
+                <p14:modId xmlns:p14="http://schemas.microsoft.com/office/powerpoint/2010/main" val="662949717"/>
+              </p:ext>
+            </p:extLst>
+          </p:nvPr>
+        </p:nvGraphicFramePr>
+        <p:xfrm>
+          <a:off x="2489993" y="1690688"/>
+          <a:ext cx="7212013" cy="4808009"/>
+        </p:xfrm>
+        <a:graphic>
+          <a:graphicData uri="http://schemas.openxmlformats.org/drawingml/2006/diagram">
+            <dgm:relIds xmlns:dgm="http://schemas.openxmlformats.org/drawingml/2006/diagram" xmlns:r="http://schemas.openxmlformats.org/officeDocument/2006/relationships" r:dm="rId3" r:lo="rId4" r:qs="rId5" r:cs="rId6"/>
+          </a:graphicData>
+        </a:graphic>
+      </p:graphicFrame>
+    </p:spTree>
+    <p:extLst>
+      <p:ext uri="{BB962C8B-B14F-4D97-AF65-F5344CB8AC3E}">
+        <p14:creationId xmlns:p14="http://schemas.microsoft.com/office/powerpoint/2010/main" val="1185572630"/>
+      </p:ext>
+    </p:extLst>
+  </p:cSld>
+  <p:clrMapOvr>
+    <a:masterClrMapping/>
+  </p:clrMapOvr>
+</p:sld>
+</file>
+
+<file path=ppt/slides/slide30.xml><?xml version="1.0" encoding="utf-8"?>
 <p:sld xmlns:a="http://schemas.openxmlformats.org/drawingml/2006/main" xmlns:r="http://schemas.openxmlformats.org/officeDocument/2006/relationships" xmlns:p="http://schemas.openxmlformats.org/presentationml/2006/main">
   <p:cSld>
     <p:spTree>
@@ -38949,7 +39530,7 @@
 </p:sld>
 </file>
 
-<file path=ppt/slides/slide29.xml><?xml version="1.0" encoding="utf-8"?>
+<file path=ppt/slides/slide31.xml><?xml version="1.0" encoding="utf-8"?>
 <p:sld xmlns:a="http://schemas.openxmlformats.org/drawingml/2006/main" xmlns:r="http://schemas.openxmlformats.org/officeDocument/2006/relationships" xmlns:p="http://schemas.openxmlformats.org/presentationml/2006/main">
   <p:cSld>
     <p:spTree>
@@ -39308,93 +39889,7 @@
 </p:sld>
 </file>
 
-<file path=ppt/slides/slide3.xml><?xml version="1.0" encoding="utf-8"?>
-<p:sld xmlns:a="http://schemas.openxmlformats.org/drawingml/2006/main" xmlns:r="http://schemas.openxmlformats.org/officeDocument/2006/relationships" xmlns:p="http://schemas.openxmlformats.org/presentationml/2006/main">
-  <p:cSld>
-    <p:spTree>
-      <p:nvGrpSpPr>
-        <p:cNvPr id="1" name=""/>
-        <p:cNvGrpSpPr/>
-        <p:nvPr/>
-      </p:nvGrpSpPr>
-      <p:grpSpPr>
-        <a:xfrm>
-          <a:off x="0" y="0"/>
-          <a:ext cx="0" cy="0"/>
-          <a:chOff x="0" y="0"/>
-          <a:chExt cx="0" cy="0"/>
-        </a:xfrm>
-      </p:grpSpPr>
-      <p:sp>
-        <p:nvSpPr>
-          <p:cNvPr id="2" name="Title 1">
-            <a:extLst>
-              <a:ext uri="{FF2B5EF4-FFF2-40B4-BE49-F238E27FC236}">
-                <a16:creationId xmlns:a16="http://schemas.microsoft.com/office/drawing/2014/main" id="{0FFB9FC6-0620-0A48-9F8C-295D1BC9A634}"/>
-              </a:ext>
-            </a:extLst>
-          </p:cNvPr>
-          <p:cNvSpPr>
-            <a:spLocks noGrp="1"/>
-          </p:cNvSpPr>
-          <p:nvPr>
-            <p:ph type="title"/>
-          </p:nvPr>
-        </p:nvSpPr>
-        <p:spPr/>
-        <p:txBody>
-          <a:bodyPr/>
-          <a:lstStyle/>
-          <a:p>
-            <a:r>
-              <a:rPr lang="en-US" dirty="0"/>
-              <a:t>Community Assembly Processes</a:t>
-            </a:r>
-          </a:p>
-        </p:txBody>
-      </p:sp>
-      <p:graphicFrame>
-        <p:nvGraphicFramePr>
-          <p:cNvPr id="12" name="Diagram 11">
-            <a:extLst>
-              <a:ext uri="{FF2B5EF4-FFF2-40B4-BE49-F238E27FC236}">
-                <a16:creationId xmlns:a16="http://schemas.microsoft.com/office/drawing/2014/main" id="{8B3002D7-459F-0B49-B4AD-4140562B12BC}"/>
-              </a:ext>
-            </a:extLst>
-          </p:cNvPr>
-          <p:cNvGraphicFramePr/>
-          <p:nvPr>
-            <p:extLst>
-              <p:ext uri="{D42A27DB-BD31-4B8C-83A1-F6EECF244321}">
-                <p14:modId xmlns:p14="http://schemas.microsoft.com/office/powerpoint/2010/main" val="662949717"/>
-              </p:ext>
-            </p:extLst>
-          </p:nvPr>
-        </p:nvGraphicFramePr>
-        <p:xfrm>
-          <a:off x="2489993" y="1690688"/>
-          <a:ext cx="7212013" cy="4808009"/>
-        </p:xfrm>
-        <a:graphic>
-          <a:graphicData uri="http://schemas.openxmlformats.org/drawingml/2006/diagram">
-            <dgm:relIds xmlns:dgm="http://schemas.openxmlformats.org/drawingml/2006/diagram" xmlns:r="http://schemas.openxmlformats.org/officeDocument/2006/relationships" r:dm="rId3" r:lo="rId4" r:qs="rId5" r:cs="rId6"/>
-          </a:graphicData>
-        </a:graphic>
-      </p:graphicFrame>
-    </p:spTree>
-    <p:extLst>
-      <p:ext uri="{BB962C8B-B14F-4D97-AF65-F5344CB8AC3E}">
-        <p14:creationId xmlns:p14="http://schemas.microsoft.com/office/powerpoint/2010/main" val="1185572630"/>
-      </p:ext>
-    </p:extLst>
-  </p:cSld>
-  <p:clrMapOvr>
-    <a:masterClrMapping/>
-  </p:clrMapOvr>
-</p:sld>
-</file>
-
-<file path=ppt/slides/slide30.xml><?xml version="1.0" encoding="utf-8"?>
+<file path=ppt/slides/slide32.xml><?xml version="1.0" encoding="utf-8"?>
 <p:sld xmlns:a="http://schemas.openxmlformats.org/drawingml/2006/main" xmlns:r="http://schemas.openxmlformats.org/officeDocument/2006/relationships" xmlns:p="http://schemas.openxmlformats.org/presentationml/2006/main">
   <p:cSld>
     <p:spTree>
@@ -39490,7 +39985,7 @@
 </p:sld>
 </file>
 
-<file path=ppt/slides/slide31.xml><?xml version="1.0" encoding="utf-8"?>
+<file path=ppt/slides/slide33.xml><?xml version="1.0" encoding="utf-8"?>
 <p:sld xmlns:a="http://schemas.openxmlformats.org/drawingml/2006/main" xmlns:r="http://schemas.openxmlformats.org/officeDocument/2006/relationships" xmlns:p="http://schemas.openxmlformats.org/presentationml/2006/main">
   <p:cSld>
     <p:spTree>
@@ -39588,7 +40083,7 @@
 </p:sld>
 </file>
 
-<file path=ppt/slides/slide32.xml><?xml version="1.0" encoding="utf-8"?>
+<file path=ppt/slides/slide34.xml><?xml version="1.0" encoding="utf-8"?>
 <p:sld xmlns:a="http://schemas.openxmlformats.org/drawingml/2006/main" xmlns:r="http://schemas.openxmlformats.org/officeDocument/2006/relationships" xmlns:p="http://schemas.openxmlformats.org/presentationml/2006/main">
   <p:cSld>
     <p:spTree>
@@ -39683,7 +40178,7 @@
 </p:sld>
 </file>
 
-<file path=ppt/slides/slide33.xml><?xml version="1.0" encoding="utf-8"?>
+<file path=ppt/slides/slide35.xml><?xml version="1.0" encoding="utf-8"?>
 <p:sld xmlns:a="http://schemas.openxmlformats.org/drawingml/2006/main" xmlns:r="http://schemas.openxmlformats.org/officeDocument/2006/relationships" xmlns:p="http://schemas.openxmlformats.org/presentationml/2006/main">
   <p:cSld>
     <p:spTree>
@@ -39801,7 +40296,7 @@
 </p:sld>
 </file>
 
-<file path=ppt/slides/slide34.xml><?xml version="1.0" encoding="utf-8"?>
+<file path=ppt/slides/slide36.xml><?xml version="1.0" encoding="utf-8"?>
 <p:sld xmlns:a="http://schemas.openxmlformats.org/drawingml/2006/main" xmlns:r="http://schemas.openxmlformats.org/officeDocument/2006/relationships" xmlns:p="http://schemas.openxmlformats.org/presentationml/2006/main">
   <p:cSld>
     <p:spTree>
@@ -39897,7 +40392,7 @@
 </p:sld>
 </file>
 
-<file path=ppt/slides/slide35.xml><?xml version="1.0" encoding="utf-8"?>
+<file path=ppt/slides/slide37.xml><?xml version="1.0" encoding="utf-8"?>
 <p:sld xmlns:a="http://schemas.openxmlformats.org/drawingml/2006/main" xmlns:r="http://schemas.openxmlformats.org/officeDocument/2006/relationships" xmlns:p="http://schemas.openxmlformats.org/presentationml/2006/main">
   <p:cSld>
     <p:spTree>
@@ -39963,7 +40458,7 @@
 </p:sld>
 </file>
 
-<file path=ppt/slides/slide36.xml><?xml version="1.0" encoding="utf-8"?>
+<file path=ppt/slides/slide38.xml><?xml version="1.0" encoding="utf-8"?>
 <p:sld xmlns:a="http://schemas.openxmlformats.org/drawingml/2006/main" xmlns:r="http://schemas.openxmlformats.org/officeDocument/2006/relationships" xmlns:p="http://schemas.openxmlformats.org/presentationml/2006/main">
   <p:cSld>
     <p:spTree>
@@ -40078,7 +40573,7 @@
 </p:sld>
 </file>
 
-<file path=ppt/slides/slide37.xml><?xml version="1.0" encoding="utf-8"?>
+<file path=ppt/slides/slide39.xml><?xml version="1.0" encoding="utf-8"?>
 <p:sld xmlns:a="http://schemas.openxmlformats.org/drawingml/2006/main" xmlns:r="http://schemas.openxmlformats.org/officeDocument/2006/relationships" xmlns:p="http://schemas.openxmlformats.org/presentationml/2006/main">
   <p:cSld>
     <p:spTree>
@@ -40161,187 +40656,6 @@
     <p:extLst>
       <p:ext uri="{BB962C8B-B14F-4D97-AF65-F5344CB8AC3E}">
         <p14:creationId xmlns:p14="http://schemas.microsoft.com/office/powerpoint/2010/main" val="3629005695"/>
-      </p:ext>
-    </p:extLst>
-  </p:cSld>
-  <p:clrMapOvr>
-    <a:masterClrMapping/>
-  </p:clrMapOvr>
-</p:sld>
-</file>
-
-<file path=ppt/slides/slide38.xml><?xml version="1.0" encoding="utf-8"?>
-<p:sld xmlns:a="http://schemas.openxmlformats.org/drawingml/2006/main" xmlns:r="http://schemas.openxmlformats.org/officeDocument/2006/relationships" xmlns:p="http://schemas.openxmlformats.org/presentationml/2006/main">
-  <p:cSld>
-    <p:spTree>
-      <p:nvGrpSpPr>
-        <p:cNvPr id="1" name=""/>
-        <p:cNvGrpSpPr/>
-        <p:nvPr/>
-      </p:nvGrpSpPr>
-      <p:grpSpPr>
-        <a:xfrm>
-          <a:off x="0" y="0"/>
-          <a:ext cx="0" cy="0"/>
-          <a:chOff x="0" y="0"/>
-          <a:chExt cx="0" cy="0"/>
-        </a:xfrm>
-      </p:grpSpPr>
-      <p:sp>
-        <p:nvSpPr>
-          <p:cNvPr id="2" name="Title 1">
-            <a:extLst>
-              <a:ext uri="{FF2B5EF4-FFF2-40B4-BE49-F238E27FC236}">
-                <a16:creationId xmlns:a16="http://schemas.microsoft.com/office/drawing/2014/main" id="{EB9EBC78-4FE8-2C4B-B3E9-180A5A12FE77}"/>
-              </a:ext>
-            </a:extLst>
-          </p:cNvPr>
-          <p:cNvSpPr>
-            <a:spLocks noGrp="1"/>
-          </p:cNvSpPr>
-          <p:nvPr>
-            <p:ph type="title"/>
-          </p:nvPr>
-        </p:nvSpPr>
-        <p:spPr>
-          <a:solidFill>
-            <a:srgbClr val="5C9BD5"/>
-          </a:solidFill>
-        </p:spPr>
-        <p:txBody>
-          <a:bodyPr/>
-          <a:lstStyle/>
-          <a:p>
-            <a:r>
-              <a:rPr lang="en-US" dirty="0" err="1">
-                <a:solidFill>
-                  <a:schemeClr val="bg1"/>
-                </a:solidFill>
-              </a:rPr>
-              <a:t>Gephi</a:t>
-            </a:r>
-            <a:endParaRPr lang="en-US" dirty="0">
-              <a:solidFill>
-                <a:schemeClr val="bg1"/>
-              </a:solidFill>
-            </a:endParaRPr>
-          </a:p>
-        </p:txBody>
-      </p:sp>
-      <p:pic>
-        <p:nvPicPr>
-          <p:cNvPr id="6" name="Picture 5">
-            <a:extLst>
-              <a:ext uri="{FF2B5EF4-FFF2-40B4-BE49-F238E27FC236}">
-                <a16:creationId xmlns:a16="http://schemas.microsoft.com/office/drawing/2014/main" id="{D3ECF695-8101-B148-9E3A-CBC46B2DCD81}"/>
-              </a:ext>
-            </a:extLst>
-          </p:cNvPr>
-          <p:cNvPicPr>
-            <a:picLocks noChangeAspect="1"/>
-          </p:cNvPicPr>
-          <p:nvPr/>
-        </p:nvPicPr>
-        <p:blipFill>
-          <a:blip r:embed="rId3"/>
-          <a:stretch>
-            <a:fillRect/>
-          </a:stretch>
-        </p:blipFill>
-        <p:spPr>
-          <a:xfrm>
-            <a:off x="1788318" y="1858395"/>
-            <a:ext cx="8615363" cy="4735774"/>
-          </a:xfrm>
-          <a:prstGeom prst="rect">
-            <a:avLst/>
-          </a:prstGeom>
-        </p:spPr>
-      </p:pic>
-    </p:spTree>
-    <p:extLst>
-      <p:ext uri="{BB962C8B-B14F-4D97-AF65-F5344CB8AC3E}">
-        <p14:creationId xmlns:p14="http://schemas.microsoft.com/office/powerpoint/2010/main" val="4153186007"/>
-      </p:ext>
-    </p:extLst>
-  </p:cSld>
-  <p:clrMapOvr>
-    <a:masterClrMapping/>
-  </p:clrMapOvr>
-</p:sld>
-</file>
-
-<file path=ppt/slides/slide39.xml><?xml version="1.0" encoding="utf-8"?>
-<p:sld xmlns:a="http://schemas.openxmlformats.org/drawingml/2006/main" xmlns:r="http://schemas.openxmlformats.org/officeDocument/2006/relationships" xmlns:p="http://schemas.openxmlformats.org/presentationml/2006/main">
-  <p:cSld>
-    <p:spTree>
-      <p:nvGrpSpPr>
-        <p:cNvPr id="1" name=""/>
-        <p:cNvGrpSpPr/>
-        <p:nvPr/>
-      </p:nvGrpSpPr>
-      <p:grpSpPr>
-        <a:xfrm>
-          <a:off x="0" y="0"/>
-          <a:ext cx="0" cy="0"/>
-          <a:chOff x="0" y="0"/>
-          <a:chExt cx="0" cy="0"/>
-        </a:xfrm>
-      </p:grpSpPr>
-      <p:sp>
-        <p:nvSpPr>
-          <p:cNvPr id="2" name="Title 1">
-            <a:extLst>
-              <a:ext uri="{FF2B5EF4-FFF2-40B4-BE49-F238E27FC236}">
-                <a16:creationId xmlns:a16="http://schemas.microsoft.com/office/drawing/2014/main" id="{174D7E04-7C38-FB49-A0A0-EF5E49EDA455}"/>
-              </a:ext>
-            </a:extLst>
-          </p:cNvPr>
-          <p:cNvSpPr>
-            <a:spLocks noGrp="1"/>
-          </p:cNvSpPr>
-          <p:nvPr>
-            <p:ph type="title"/>
-          </p:nvPr>
-        </p:nvSpPr>
-        <p:spPr>
-          <a:solidFill>
-            <a:srgbClr val="5C9BD5"/>
-          </a:solidFill>
-        </p:spPr>
-        <p:txBody>
-          <a:bodyPr>
-            <a:noAutofit/>
-          </a:bodyPr>
-          <a:lstStyle/>
-          <a:p>
-            <a:r>
-              <a:rPr lang="en-GB" sz="2800" b="1" dirty="0">
-                <a:solidFill>
-                  <a:schemeClr val="bg1"/>
-                </a:solidFill>
-              </a:rPr>
-              <a:t>Hu et al., (2017) Strong impact of anthropogenic contamination on the co‐occurrence patterns of a riverine microbial community</a:t>
-            </a:r>
-            <a:br>
-              <a:rPr lang="en-GB" sz="2800" b="1" dirty="0">
-                <a:solidFill>
-                  <a:schemeClr val="bg1"/>
-                </a:solidFill>
-              </a:rPr>
-            </a:br>
-            <a:endParaRPr lang="en-US" sz="2800" dirty="0">
-              <a:solidFill>
-                <a:schemeClr val="bg1"/>
-              </a:solidFill>
-            </a:endParaRPr>
-          </a:p>
-        </p:txBody>
-      </p:sp>
-    </p:spTree>
-    <p:extLst>
-      <p:ext uri="{BB962C8B-B14F-4D97-AF65-F5344CB8AC3E}">
-        <p14:creationId xmlns:p14="http://schemas.microsoft.com/office/powerpoint/2010/main" val="2136607666"/>
       </p:ext>
     </p:extLst>
   </p:cSld>
@@ -40435,6 +40749,187 @@
 </file>
 
 <file path=ppt/slides/slide40.xml><?xml version="1.0" encoding="utf-8"?>
+<p:sld xmlns:a="http://schemas.openxmlformats.org/drawingml/2006/main" xmlns:r="http://schemas.openxmlformats.org/officeDocument/2006/relationships" xmlns:p="http://schemas.openxmlformats.org/presentationml/2006/main">
+  <p:cSld>
+    <p:spTree>
+      <p:nvGrpSpPr>
+        <p:cNvPr id="1" name=""/>
+        <p:cNvGrpSpPr/>
+        <p:nvPr/>
+      </p:nvGrpSpPr>
+      <p:grpSpPr>
+        <a:xfrm>
+          <a:off x="0" y="0"/>
+          <a:ext cx="0" cy="0"/>
+          <a:chOff x="0" y="0"/>
+          <a:chExt cx="0" cy="0"/>
+        </a:xfrm>
+      </p:grpSpPr>
+      <p:sp>
+        <p:nvSpPr>
+          <p:cNvPr id="2" name="Title 1">
+            <a:extLst>
+              <a:ext uri="{FF2B5EF4-FFF2-40B4-BE49-F238E27FC236}">
+                <a16:creationId xmlns:a16="http://schemas.microsoft.com/office/drawing/2014/main" id="{EB9EBC78-4FE8-2C4B-B3E9-180A5A12FE77}"/>
+              </a:ext>
+            </a:extLst>
+          </p:cNvPr>
+          <p:cNvSpPr>
+            <a:spLocks noGrp="1"/>
+          </p:cNvSpPr>
+          <p:nvPr>
+            <p:ph type="title"/>
+          </p:nvPr>
+        </p:nvSpPr>
+        <p:spPr>
+          <a:solidFill>
+            <a:srgbClr val="5C9BD5"/>
+          </a:solidFill>
+        </p:spPr>
+        <p:txBody>
+          <a:bodyPr/>
+          <a:lstStyle/>
+          <a:p>
+            <a:r>
+              <a:rPr lang="en-US" dirty="0" err="1">
+                <a:solidFill>
+                  <a:schemeClr val="bg1"/>
+                </a:solidFill>
+              </a:rPr>
+              <a:t>Gephi</a:t>
+            </a:r>
+            <a:endParaRPr lang="en-US" dirty="0">
+              <a:solidFill>
+                <a:schemeClr val="bg1"/>
+              </a:solidFill>
+            </a:endParaRPr>
+          </a:p>
+        </p:txBody>
+      </p:sp>
+      <p:pic>
+        <p:nvPicPr>
+          <p:cNvPr id="6" name="Picture 5">
+            <a:extLst>
+              <a:ext uri="{FF2B5EF4-FFF2-40B4-BE49-F238E27FC236}">
+                <a16:creationId xmlns:a16="http://schemas.microsoft.com/office/drawing/2014/main" id="{D3ECF695-8101-B148-9E3A-CBC46B2DCD81}"/>
+              </a:ext>
+            </a:extLst>
+          </p:cNvPr>
+          <p:cNvPicPr>
+            <a:picLocks noChangeAspect="1"/>
+          </p:cNvPicPr>
+          <p:nvPr/>
+        </p:nvPicPr>
+        <p:blipFill>
+          <a:blip r:embed="rId3"/>
+          <a:stretch>
+            <a:fillRect/>
+          </a:stretch>
+        </p:blipFill>
+        <p:spPr>
+          <a:xfrm>
+            <a:off x="1788318" y="1858395"/>
+            <a:ext cx="8615363" cy="4735774"/>
+          </a:xfrm>
+          <a:prstGeom prst="rect">
+            <a:avLst/>
+          </a:prstGeom>
+        </p:spPr>
+      </p:pic>
+    </p:spTree>
+    <p:extLst>
+      <p:ext uri="{BB962C8B-B14F-4D97-AF65-F5344CB8AC3E}">
+        <p14:creationId xmlns:p14="http://schemas.microsoft.com/office/powerpoint/2010/main" val="4153186007"/>
+      </p:ext>
+    </p:extLst>
+  </p:cSld>
+  <p:clrMapOvr>
+    <a:masterClrMapping/>
+  </p:clrMapOvr>
+</p:sld>
+</file>
+
+<file path=ppt/slides/slide41.xml><?xml version="1.0" encoding="utf-8"?>
+<p:sld xmlns:a="http://schemas.openxmlformats.org/drawingml/2006/main" xmlns:r="http://schemas.openxmlformats.org/officeDocument/2006/relationships" xmlns:p="http://schemas.openxmlformats.org/presentationml/2006/main">
+  <p:cSld>
+    <p:spTree>
+      <p:nvGrpSpPr>
+        <p:cNvPr id="1" name=""/>
+        <p:cNvGrpSpPr/>
+        <p:nvPr/>
+      </p:nvGrpSpPr>
+      <p:grpSpPr>
+        <a:xfrm>
+          <a:off x="0" y="0"/>
+          <a:ext cx="0" cy="0"/>
+          <a:chOff x="0" y="0"/>
+          <a:chExt cx="0" cy="0"/>
+        </a:xfrm>
+      </p:grpSpPr>
+      <p:sp>
+        <p:nvSpPr>
+          <p:cNvPr id="2" name="Title 1">
+            <a:extLst>
+              <a:ext uri="{FF2B5EF4-FFF2-40B4-BE49-F238E27FC236}">
+                <a16:creationId xmlns:a16="http://schemas.microsoft.com/office/drawing/2014/main" id="{174D7E04-7C38-FB49-A0A0-EF5E49EDA455}"/>
+              </a:ext>
+            </a:extLst>
+          </p:cNvPr>
+          <p:cNvSpPr>
+            <a:spLocks noGrp="1"/>
+          </p:cNvSpPr>
+          <p:nvPr>
+            <p:ph type="title"/>
+          </p:nvPr>
+        </p:nvSpPr>
+        <p:spPr>
+          <a:solidFill>
+            <a:srgbClr val="5C9BD5"/>
+          </a:solidFill>
+        </p:spPr>
+        <p:txBody>
+          <a:bodyPr>
+            <a:noAutofit/>
+          </a:bodyPr>
+          <a:lstStyle/>
+          <a:p>
+            <a:r>
+              <a:rPr lang="en-GB" sz="2800" b="1" dirty="0">
+                <a:solidFill>
+                  <a:schemeClr val="bg1"/>
+                </a:solidFill>
+              </a:rPr>
+              <a:t>Hu et al., (2017) Strong impact of anthropogenic contamination on the co‐occurrence patterns of a riverine microbial community</a:t>
+            </a:r>
+            <a:br>
+              <a:rPr lang="en-GB" sz="2800" b="1" dirty="0">
+                <a:solidFill>
+                  <a:schemeClr val="bg1"/>
+                </a:solidFill>
+              </a:rPr>
+            </a:br>
+            <a:endParaRPr lang="en-US" sz="2800" dirty="0">
+              <a:solidFill>
+                <a:schemeClr val="bg1"/>
+              </a:solidFill>
+            </a:endParaRPr>
+          </a:p>
+        </p:txBody>
+      </p:sp>
+    </p:spTree>
+    <p:extLst>
+      <p:ext uri="{BB962C8B-B14F-4D97-AF65-F5344CB8AC3E}">
+        <p14:creationId xmlns:p14="http://schemas.microsoft.com/office/powerpoint/2010/main" val="2136607666"/>
+      </p:ext>
+    </p:extLst>
+  </p:cSld>
+  <p:clrMapOvr>
+    <a:masterClrMapping/>
+  </p:clrMapOvr>
+</p:sld>
+</file>
+
+<file path=ppt/slides/slide42.xml><?xml version="1.0" encoding="utf-8"?>
 <p:sld xmlns:a="http://schemas.openxmlformats.org/drawingml/2006/main" xmlns:r="http://schemas.openxmlformats.org/officeDocument/2006/relationships" xmlns:p="http://schemas.openxmlformats.org/presentationml/2006/main">
   <p:cSld>
     <p:spTree>
